--- a/day2-deck/decks/Technician Proficiency - House Style.pptx
+++ b/day2-deck/decks/Technician Proficiency - House Style.pptx
@@ -2089,20 +2089,6 @@
           <a:bodyPr wrap="square" lIns="0" tIns="0" rIns="0" bIns="0" rtlCol="0" anchor="ctr"/>
           <a:lstStyle/>
           <a:p>
-            <a:pPr indent="0" marL="0">
-              <a:buNone/>
-            </a:pPr>
-            <a:r>
-              <a:rPr lang="en-US" sz="1400" spc="90" kern="0" dirty="0">
-                <a:solidFill>
-                  <a:srgbClr val="595959"/>
-                </a:solidFill>
-                <a:latin typeface="Inter" pitchFamily="34" charset="0"/>
-                <a:ea typeface="Inter" pitchFamily="34" charset="-122"/>
-                <a:cs typeface="Inter" pitchFamily="34" charset="-120"/>
-              </a:rPr>
-              <a:t>YEAR TO DATE   ·   </a:t>
-            </a:r>
             <a:pPr indent="0" marL="0">
               <a:buNone/>
             </a:pPr>

--- a/day2-deck/decks/Technician Proficiency - House Style.pptx
+++ b/day2-deck/decks/Technician Proficiency - House Style.pptx
@@ -597,39 +597,39 @@
           <a:p>
             <a:r>
               <a:rPr lang="en-US" dirty="0"/>
-              <a:t>Source: ADP paid hours (regular + overtime) and Qlik - Closed Repair Orders sold hours, all pay types, matched by tech number. Dec 25, 2025 - Oct 9, 2026 (shown as Jan-Sep). Same-store, INEOS excluded (opened 2026). Service, express, team-leader and shop-foreman titles only; body shop, detail and tint excluded. Outliers dropped: shop foremen at or below 30% (workbook uses 20%; under 30% a foreman is mainly dispatching), team leaders at or below 20%, service and express technicians at or below 10% (workbook uses 2%; under 10% a tech is not working as a line tech). Unassigned codes (MULT, 999, 77777) excluded. Role changes: ADP shows one current title with paid hours for the whole period, so when a tech's paid hours exceed 125% of full time over the months they actually flagged, paid hours are scaled to that span (56 techs). 45 keying-error lines removed from sold hours (5,399 hrs: single lines of 20+ hours with under $25 labor sale per hour, e.g. 940.58 hrs for $0 at Hyundai St George, RO 177970). Proficiency = sold hours / paid hours, from store totals. Green at or above 85%, red below. Bars start at 40%.ACURA: 67.4% (11,339 sold / 16,815 paid, 11 techs: 0 above, 0 on, 11 under)
-AUDI HENDERSON: 91.0% (33,481 sold / 36,766 paid, 23 techs: 6 above, 4 on, 13 under)
-AUDI RENO: 117.1% (15,985 sold / 13,640 paid, 10 techs: 6 above, 0 on, 4 under)
-CADILLAC: 87.7% (42,358 sold / 48,277 paid, 29 techs: 8 above, 5 on, 16 under)
-CDJR POST FALLS: 71.2% (14,538 sold / 20,418 paid, 14 techs: 4 above, 1 on, 9 under)
-CHEVY GMC BULLHEAD: 68.4% (19,904 sold / 29,093 paid, 20 techs: 2 above, 2 on, 16 under)
-CHEVY LV: 103.4% (81,675 sold / 78,983 paid, 51 techs: 21 above, 14 on, 16 under)
-GMC PRESCOTT: 73.6% (10,985 sold / 14,924 paid, 12 techs: 1 above, 4 on, 7 under)
-HONDA FLAGSTAFF: 78.5% (7,653 sold / 9,743 paid, 6 techs: 2 above, 0 on, 4 under)
-HONDA HENDERSON: 118.5% (61,099 sold / 51,555 paid, 28 techs: 16 above, 7 on, 5 under)
-HONDA NORTH: 109.3% (39,419 sold / 36,062 paid, 22 techs: 10 above, 8 on, 4 under)
-HONDA SPOKANE: 109.0% (17,638 sold / 16,169 paid, 15 techs: 10 above, 3 on, 2 under)
-HYUNDAI PRESCOTT: 78.8% (9,116 sold / 11,564 paid, 9 techs: 1 above, 2 on, 6 under)
-HYUNDAI ST GEORGE: 69.0% (9,329 sold / 13,515 paid, 11 techs: 3 above, 0 on, 8 under)
-KIA LV: 76.8% (20,682 sold / 26,909 paid, 20 techs: 2 above, 2 on, 16 under)
-KIA ST GEORGE: 67.5% (11,981 sold / 17,746 paid, 12 techs: 1 above, 2 on, 9 under)
-LEXUS: 104.7% (16,940 sold / 16,175 paid, 11 techs: 4 above, 1 on, 6 under)
-LINCOLN: 94.9% (15,983 sold / 16,836 paid, 11 techs: 4 above, 2 on, 5 under)
-LR HENDERSON: 106.0% (11,497 sold / 10,838 paid, 7 techs: 3 above, 1 on, 3 under)
-LR LV: 91.2% (20,301 sold / 22,258 paid, 16 techs: 5 above, 3 on, 8 under)
-LR RENO: 81.4% (7,559 sold / 9,283 paid, 6 techs: 1 above, 3 on, 2 under)
-MAZDA: 101.6% (14,560 sold / 14,322 paid, 11 techs: 5 above, 2 on, 4 under)
-NISSAN: 91.1% (24,792 sold / 27,197 paid, 17 techs: 3 above, 6 on, 8 under)
-SUBARU LV: 96.9% (41,501 sold / 42,797 paid, 27 techs: 9 above, 7 on, 11 under)
-SUBARU PRESCOTT: 98.4% (17,475 sold / 17,747 paid, 12 techs: 6 above, 0 on, 6 under)
-SUBARU ST GEORGE: 109.7% (20,954 sold / 19,086 paid, 12 techs: 9 above, 0 on, 3 under)
-TOYOTA FLAGSTAFF: 102.4% (31,978 sold / 31,216 paid, 18 techs: 7 above, 5 on, 6 under)
-TOYOTA HENDERSON: 104.3% (104,465 sold / 100,080 paid, 59 techs: 22 above, 17 on, 20 under)
-TOYOTA PRESCOTT: 83.6% (29,341 sold / 35,081 paid, 22 techs: 6 above, 5 on, 11 under)
-TOYOTA SPOKANE: 108.0% (35,947 sold / 33,274 paid, 28 techs: 15 above, 9 on, 4 under)
-VOLVO: 72.3% (10,479 sold / 14,475 paid, 9 techs: 0 above, 1 on, 8 under)
-VW HENDERSON: 92.2% (25,394 sold / 27,527 paid, 19 techs: 6 above, 7 on, 6 under)
-VW ST GEORGE: 70.0% (5,375 sold / 7,674 paid, 5 techs: 0 above, 0 on, 5 under)</a:t>
+              <a:t>Source: ADP worked hours (regular + overtime) and Qlik - Closed Repair Orders sold hours, all pay types, matched by tech number. Dec 25, 2025 - Oct 9, 2026 (shown as Jan-Sep). Same-store, INEOS excluded (opened 2026). Service, express, team-leader and shop-foreman titles only; body shop, detail and tint excluded. Outliers dropped: shop foremen at or below 30% (workbook uses 20%; under 30% a foreman is mainly dispatching), team leaders at or below 20%, service and express technicians at or below 10% (workbook uses 2%; under 10% a tech is not working as a line tech). Unassigned codes (MULT, 999, 77777) excluded. Role changes: ADP shows one current title with worked hours for the whole period, so when a tech's worked hours exceed 125% of full time over the months they actually flagged, worked hours are scaled to that span (56 techs). 45 keying-error lines removed from sold hours (5,399 hrs: single lines of 20+ hours with under $25 labor sale per hour, e.g. 940.58 hrs for $0 at Hyundai St George, RO 177970). Proficiency = sold hours / worked hours, from store totals. Green at or above 85%, red below. Bars start at 40%.ACURA: 67.4% (11,339 sold / 16,815 worked, 11 techs: 0 above, 0 on, 11 under)
+AUDI HENDERSON: 91.0% (33,481 sold / 36,766 worked, 23 techs: 6 above, 4 on, 13 under)
+AUDI RENO: 117.1% (15,985 sold / 13,640 worked, 10 techs: 6 above, 0 on, 4 under)
+CADILLAC: 87.7% (42,358 sold / 48,277 worked, 29 techs: 8 above, 5 on, 16 under)
+CDJR POST FALLS: 71.2% (14,538 sold / 20,418 worked, 14 techs: 4 above, 1 on, 9 under)
+CHEVY GMC BULLHEAD: 68.4% (19,904 sold / 29,093 worked, 20 techs: 2 above, 2 on, 16 under)
+CHEVY LV: 103.4% (81,675 sold / 78,983 worked, 51 techs: 21 above, 14 on, 16 under)
+GMC PRESCOTT: 73.6% (10,985 sold / 14,924 worked, 12 techs: 1 above, 4 on, 7 under)
+HONDA FLAGSTAFF: 78.5% (7,653 sold / 9,743 worked, 6 techs: 2 above, 0 on, 4 under)
+HONDA HENDERSON: 118.5% (61,099 sold / 51,555 worked, 28 techs: 16 above, 7 on, 5 under)
+HONDA NORTH: 109.3% (39,419 sold / 36,062 worked, 22 techs: 10 above, 8 on, 4 under)
+HONDA SPOKANE: 109.0% (17,638 sold / 16,169 worked, 15 techs: 10 above, 3 on, 2 under)
+HYUNDAI PRESCOTT: 78.8% (9,116 sold / 11,564 worked, 9 techs: 1 above, 2 on, 6 under)
+HYUNDAI ST GEORGE: 69.0% (9,329 sold / 13,515 worked, 11 techs: 3 above, 0 on, 8 under)
+KIA LV: 76.8% (20,682 sold / 26,909 worked, 20 techs: 2 above, 2 on, 16 under)
+KIA ST GEORGE: 67.5% (11,981 sold / 17,746 worked, 12 techs: 1 above, 2 on, 9 under)
+LEXUS: 104.7% (16,940 sold / 16,175 worked, 11 techs: 4 above, 1 on, 6 under)
+LINCOLN: 94.9% (15,983 sold / 16,836 worked, 11 techs: 4 above, 2 on, 5 under)
+LR HENDERSON: 106.0% (11,497 sold / 10,838 worked, 7 techs: 3 above, 1 on, 3 under)
+LR LV: 91.2% (20,301 sold / 22,258 worked, 16 techs: 5 above, 3 on, 8 under)
+LR RENO: 81.4% (7,559 sold / 9,283 worked, 6 techs: 1 above, 3 on, 2 under)
+MAZDA: 101.6% (14,560 sold / 14,322 worked, 11 techs: 5 above, 2 on, 4 under)
+NISSAN: 91.1% (24,792 sold / 27,197 worked, 17 techs: 3 above, 6 on, 8 under)
+SUBARU LV: 96.9% (41,501 sold / 42,797 worked, 27 techs: 9 above, 7 on, 11 under)
+SUBARU PRESCOTT: 98.4% (17,475 sold / 17,747 worked, 12 techs: 6 above, 0 on, 6 under)
+SUBARU ST GEORGE: 109.7% (20,954 sold / 19,086 worked, 12 techs: 9 above, 0 on, 3 under)
+TOYOTA FLAGSTAFF: 102.4% (31,978 sold / 31,216 worked, 18 techs: 7 above, 5 on, 6 under)
+TOYOTA HENDERSON: 104.3% (104,465 sold / 100,080 worked, 59 techs: 22 above, 17 on, 20 under)
+TOYOTA PRESCOTT: 83.6% (29,341 sold / 35,081 worked, 22 techs: 6 above, 5 on, 11 under)
+TOYOTA SPOKANE: 108.0% (35,947 sold / 33,274 worked, 28 techs: 15 above, 9 on, 4 under)
+VOLVO: 72.3% (10,479 sold / 14,475 worked, 9 techs: 0 above, 1 on, 8 under)
+VW HENDERSON: 92.2% (25,394 sold / 27,527 worked, 19 techs: 6 above, 7 on, 6 under)
+VW ST GEORGE: 70.0% (5,375 sold / 7,674 worked, 5 techs: 0 above, 0 on, 5 under)</a:t>
             </a:r>
             <a:endParaRPr lang="en-US" dirty="0"/>
           </a:p>
@@ -717,39 +717,39 @@
           <a:p>
             <a:r>
               <a:rPr lang="en-US" dirty="0"/>
-              <a:t>Source: ADP paid hours (regular + overtime) and Qlik - Closed Repair Orders sold hours, all pay types, matched by tech number. Dec 25, 2025 - Oct 9, 2026 (shown as Jan-Sep). Same-store, INEOS excluded (opened 2026). Service, express, team-leader and shop-foreman titles only; body shop, detail and tint excluded. Outliers dropped: shop foremen at or below 30% (workbook uses 20%; under 30% a foreman is mainly dispatching), team leaders at or below 20%, service and express technicians at or below 10% (workbook uses 2%; under 10% a tech is not working as a line tech). Unassigned codes (MULT, 999, 77777) excluded. Role changes: ADP shows one current title with paid hours for the whole period, so when a tech's paid hours exceed 125% of full time over the months they actually flagged, paid hours are scaled to that span (56 techs). 45 keying-error lines removed from sold hours (5,399 hrs: single lines of 20+ hours with under $25 labor sale per hour, e.g. 940.58 hrs for $0 at Hyundai St George, RO 177970). Share of each store's technicians by proficiency band (workbook status: Above Target, On Target, Under Target), most above first.ACURA: 67.4% (11,339 sold / 16,815 paid, 11 techs: 0 above, 0 on, 11 under)
-AUDI HENDERSON: 91.0% (33,481 sold / 36,766 paid, 23 techs: 6 above, 4 on, 13 under)
-AUDI RENO: 117.1% (15,985 sold / 13,640 paid, 10 techs: 6 above, 0 on, 4 under)
-CADILLAC: 87.7% (42,358 sold / 48,277 paid, 29 techs: 8 above, 5 on, 16 under)
-CDJR POST FALLS: 71.2% (14,538 sold / 20,418 paid, 14 techs: 4 above, 1 on, 9 under)
-CHEVY GMC BULLHEAD: 68.4% (19,904 sold / 29,093 paid, 20 techs: 2 above, 2 on, 16 under)
-CHEVY LV: 103.4% (81,675 sold / 78,983 paid, 51 techs: 21 above, 14 on, 16 under)
-GMC PRESCOTT: 73.6% (10,985 sold / 14,924 paid, 12 techs: 1 above, 4 on, 7 under)
-HONDA FLAGSTAFF: 78.5% (7,653 sold / 9,743 paid, 6 techs: 2 above, 0 on, 4 under)
-HONDA HENDERSON: 118.5% (61,099 sold / 51,555 paid, 28 techs: 16 above, 7 on, 5 under)
-HONDA NORTH: 109.3% (39,419 sold / 36,062 paid, 22 techs: 10 above, 8 on, 4 under)
-HONDA SPOKANE: 109.0% (17,638 sold / 16,169 paid, 15 techs: 10 above, 3 on, 2 under)
-HYUNDAI PRESCOTT: 78.8% (9,116 sold / 11,564 paid, 9 techs: 1 above, 2 on, 6 under)
-HYUNDAI ST GEORGE: 69.0% (9,329 sold / 13,515 paid, 11 techs: 3 above, 0 on, 8 under)
-KIA LV: 76.8% (20,682 sold / 26,909 paid, 20 techs: 2 above, 2 on, 16 under)
-KIA ST GEORGE: 67.5% (11,981 sold / 17,746 paid, 12 techs: 1 above, 2 on, 9 under)
-LEXUS: 104.7% (16,940 sold / 16,175 paid, 11 techs: 4 above, 1 on, 6 under)
-LINCOLN: 94.9% (15,983 sold / 16,836 paid, 11 techs: 4 above, 2 on, 5 under)
-LR HENDERSON: 106.0% (11,497 sold / 10,838 paid, 7 techs: 3 above, 1 on, 3 under)
-LR LV: 91.2% (20,301 sold / 22,258 paid, 16 techs: 5 above, 3 on, 8 under)
-LR RENO: 81.4% (7,559 sold / 9,283 paid, 6 techs: 1 above, 3 on, 2 under)
-MAZDA: 101.6% (14,560 sold / 14,322 paid, 11 techs: 5 above, 2 on, 4 under)
-NISSAN: 91.1% (24,792 sold / 27,197 paid, 17 techs: 3 above, 6 on, 8 under)
-SUBARU LV: 96.9% (41,501 sold / 42,797 paid, 27 techs: 9 above, 7 on, 11 under)
-SUBARU PRESCOTT: 98.4% (17,475 sold / 17,747 paid, 12 techs: 6 above, 0 on, 6 under)
-SUBARU ST GEORGE: 109.7% (20,954 sold / 19,086 paid, 12 techs: 9 above, 0 on, 3 under)
-TOYOTA FLAGSTAFF: 102.4% (31,978 sold / 31,216 paid, 18 techs: 7 above, 5 on, 6 under)
-TOYOTA HENDERSON: 104.3% (104,465 sold / 100,080 paid, 59 techs: 22 above, 17 on, 20 under)
-TOYOTA PRESCOTT: 83.6% (29,341 sold / 35,081 paid, 22 techs: 6 above, 5 on, 11 under)
-TOYOTA SPOKANE: 108.0% (35,947 sold / 33,274 paid, 28 techs: 15 above, 9 on, 4 under)
-VOLVO: 72.3% (10,479 sold / 14,475 paid, 9 techs: 0 above, 1 on, 8 under)
-VW HENDERSON: 92.2% (25,394 sold / 27,527 paid, 19 techs: 6 above, 7 on, 6 under)
-VW ST GEORGE: 70.0% (5,375 sold / 7,674 paid, 5 techs: 0 above, 0 on, 5 under)</a:t>
+              <a:t>Source: ADP worked hours (regular + overtime) and Qlik - Closed Repair Orders sold hours, all pay types, matched by tech number. Dec 25, 2025 - Oct 9, 2026 (shown as Jan-Sep). Same-store, INEOS excluded (opened 2026). Service, express, team-leader and shop-foreman titles only; body shop, detail and tint excluded. Outliers dropped: shop foremen at or below 30% (workbook uses 20%; under 30% a foreman is mainly dispatching), team leaders at or below 20%, service and express technicians at or below 10% (workbook uses 2%; under 10% a tech is not working as a line tech). Unassigned codes (MULT, 999, 77777) excluded. Role changes: ADP shows one current title with worked hours for the whole period, so when a tech's worked hours exceed 125% of full time over the months they actually flagged, worked hours are scaled to that span (56 techs). 45 keying-error lines removed from sold hours (5,399 hrs: single lines of 20+ hours with under $25 labor sale per hour, e.g. 940.58 hrs for $0 at Hyundai St George, RO 177970). Share of each store's technicians by proficiency band (workbook status: Above Target, On Target, Under Target), most above first.ACURA: 67.4% (11,339 sold / 16,815 worked, 11 techs: 0 above, 0 on, 11 under)
+AUDI HENDERSON: 91.0% (33,481 sold / 36,766 worked, 23 techs: 6 above, 4 on, 13 under)
+AUDI RENO: 117.1% (15,985 sold / 13,640 worked, 10 techs: 6 above, 0 on, 4 under)
+CADILLAC: 87.7% (42,358 sold / 48,277 worked, 29 techs: 8 above, 5 on, 16 under)
+CDJR POST FALLS: 71.2% (14,538 sold / 20,418 worked, 14 techs: 4 above, 1 on, 9 under)
+CHEVY GMC BULLHEAD: 68.4% (19,904 sold / 29,093 worked, 20 techs: 2 above, 2 on, 16 under)
+CHEVY LV: 103.4% (81,675 sold / 78,983 worked, 51 techs: 21 above, 14 on, 16 under)
+GMC PRESCOTT: 73.6% (10,985 sold / 14,924 worked, 12 techs: 1 above, 4 on, 7 under)
+HONDA FLAGSTAFF: 78.5% (7,653 sold / 9,743 worked, 6 techs: 2 above, 0 on, 4 under)
+HONDA HENDERSON: 118.5% (61,099 sold / 51,555 worked, 28 techs: 16 above, 7 on, 5 under)
+HONDA NORTH: 109.3% (39,419 sold / 36,062 worked, 22 techs: 10 above, 8 on, 4 under)
+HONDA SPOKANE: 109.0% (17,638 sold / 16,169 worked, 15 techs: 10 above, 3 on, 2 under)
+HYUNDAI PRESCOTT: 78.8% (9,116 sold / 11,564 worked, 9 techs: 1 above, 2 on, 6 under)
+HYUNDAI ST GEORGE: 69.0% (9,329 sold / 13,515 worked, 11 techs: 3 above, 0 on, 8 under)
+KIA LV: 76.8% (20,682 sold / 26,909 worked, 20 techs: 2 above, 2 on, 16 under)
+KIA ST GEORGE: 67.5% (11,981 sold / 17,746 worked, 12 techs: 1 above, 2 on, 9 under)
+LEXUS: 104.7% (16,940 sold / 16,175 worked, 11 techs: 4 above, 1 on, 6 under)
+LINCOLN: 94.9% (15,983 sold / 16,836 worked, 11 techs: 4 above, 2 on, 5 under)
+LR HENDERSON: 106.0% (11,497 sold / 10,838 worked, 7 techs: 3 above, 1 on, 3 under)
+LR LV: 91.2% (20,301 sold / 22,258 worked, 16 techs: 5 above, 3 on, 8 under)
+LR RENO: 81.4% (7,559 sold / 9,283 worked, 6 techs: 1 above, 3 on, 2 under)
+MAZDA: 101.6% (14,560 sold / 14,322 worked, 11 techs: 5 above, 2 on, 4 under)
+NISSAN: 91.1% (24,792 sold / 27,197 worked, 17 techs: 3 above, 6 on, 8 under)
+SUBARU LV: 96.9% (41,501 sold / 42,797 worked, 27 techs: 9 above, 7 on, 11 under)
+SUBARU PRESCOTT: 98.4% (17,475 sold / 17,747 worked, 12 techs: 6 above, 0 on, 6 under)
+SUBARU ST GEORGE: 109.7% (20,954 sold / 19,086 worked, 12 techs: 9 above, 0 on, 3 under)
+TOYOTA FLAGSTAFF: 102.4% (31,978 sold / 31,216 worked, 18 techs: 7 above, 5 on, 6 under)
+TOYOTA HENDERSON: 104.3% (104,465 sold / 100,080 worked, 59 techs: 22 above, 17 on, 20 under)
+TOYOTA PRESCOTT: 83.6% (29,341 sold / 35,081 worked, 22 techs: 6 above, 5 on, 11 under)
+TOYOTA SPOKANE: 108.0% (35,947 sold / 33,274 worked, 28 techs: 15 above, 9 on, 4 under)
+VOLVO: 72.3% (10,479 sold / 14,475 worked, 9 techs: 0 above, 1 on, 8 under)
+VW HENDERSON: 92.2% (25,394 sold / 27,527 worked, 19 techs: 6 above, 7 on, 6 under)
+VW ST GEORGE: 70.0% (5,375 sold / 7,674 worked, 5 techs: 0 above, 0 on, 5 under)</a:t>
             </a:r>
             <a:endParaRPr lang="en-US" dirty="0"/>
           </a:p>
@@ -837,7 +837,7 @@
           <a:p>
             <a:r>
               <a:rPr lang="en-US" dirty="0"/>
-              <a:t>Source: Each technician under 85% lifted to 85% of their own paid hours; techs at or above 85% count as zero, so no store offsets one tech with another. Gap hours valued at what the store's own technicians (counted titles) earn per sold hour in labor gross and parts gross, all pay types, Qlik - Closed Repair Orders, same dates; tech pay at their labor cost per sold hour. Store-wide averages are not used because they carry detail, rental and recon sale booked with no hours. Per month = period total / 9.49 months (Dec 25, 2025 - Oct 9, 2026). Parts assumes the extra hours carry the store's average parts per hour. Population as on the proficiency slides.ACURA: 67.4%; 11 of 11 under 85%; gap 2,954 hrs; labor $50K/mo + parts $26K/mo; tech pay $14K/mo; 25.4% of $299K/mo RO gross; top quarter 74% (3 techs); 3.46 ROs/tech day; 1.75 hrs/RO
+              <a:t>Source: Each technician under 85% lifted to 85% of their own worked hours; techs at or above 85% count as zero, so no store offsets one tech with another. Gap hours valued at what the store's own technicians (counted titles) earn per sold hour in labor gross and parts gross, all pay types, Qlik - Closed Repair Orders, same dates; tech pay at their labor cost per sold hour. Store-wide averages are not used because they carry detail, rental and recon sale booked with no hours. Per month = period total / 9.49 months (Dec 25, 2025 - Oct 9, 2026). Parts assumes the extra hours carry the store's average parts per hour. Population as on the proficiency slides.ACURA: 67.4%; 11 of 11 under 85%; gap 2,954 hrs; labor $50K/mo + parts $26K/mo; tech pay $14K/mo; 25.4% of $299K/mo RO gross; top quarter 74% (3 techs); 3.46 ROs/tech day; 1.75 hrs/RO
 AUDI HENDERSON: 91.0%; 13 of 23 under 85%; gap 3,426 hrs; labor $81K/mo + parts $20K/mo; tech pay $14K/mo; 8.3% of $1.23M/mo RO gross; top quarter 135% (6 techs); 2.77 ROs/tech day; 3.23 hrs/RO
 AUDI RENO: 117.1%; 4 of 10 under 85%; gap 826 hrs; labor $14K/mo + parts $6K/mo; tech pay $4K/mo; 4.0% of $504K/mo RO gross; top quarter 194% (2 techs); 4.08 ROs/tech day; 2.88 hrs/RO
 CADILLAC: 87.7%; 16 of 29 under 85%; gap 6,705 hrs; labor $108K/mo + parts $49K/mo; tech pay $24K/mo; 13.6% of $1.16M/mo RO gross; top quarter 143% (7 techs); 2.48 ROs/tech day; 3.41 hrs/RO
@@ -957,7 +957,7 @@
           <a:p>
             <a:r>
               <a:rPr lang="en-US" dirty="0"/>
-              <a:t>Source: Each technician under 85% lifted to 85% of their own paid hours; techs at or above 85% count as zero, so no store offsets one tech with another. Gap hours valued at what the store's own technicians (counted titles) earn per sold hour in labor gross and parts gross, all pay types, Qlik - Closed Repair Orders, same dates; tech pay at their labor cost per sold hour. Store-wide averages are not used because they carry detail, rental and recon sale booked with no hours. Per month = period total / 9.49 months (Dec 25, 2025 - Oct 9, 2026). Parts assumes the extra hours carry the store's average parts per hour. Population as on the proficiency slides. Per mo = labor + parts gross. Under 85% = technicians under 85% of all counted. Store = store proficiency.ACURA: 67.4%; 11 of 11 under 85%; gap 2,954 hrs; labor $50K/mo + parts $26K/mo; tech pay $14K/mo; 25.4% of $299K/mo RO gross; top quarter 74% (3 techs); 3.46 ROs/tech day; 1.75 hrs/RO
+              <a:t>Source: Each technician under 85% lifted to 85% of their own worked hours; techs at or above 85% count as zero, so no store offsets one tech with another. Gap hours valued at what the store's own technicians (counted titles) earn per sold hour in labor gross and parts gross, all pay types, Qlik - Closed Repair Orders, same dates; tech pay at their labor cost per sold hour. Store-wide averages are not used because they carry detail, rental and recon sale booked with no hours. Per month = period total / 9.49 months (Dec 25, 2025 - Oct 9, 2026). Parts assumes the extra hours carry the store's average parts per hour. Population as on the proficiency slides. Per mo = labor + parts gross. Under 85% = technicians under 85% of all counted. Store = store proficiency.ACURA: 67.4%; 11 of 11 under 85%; gap 2,954 hrs; labor $50K/mo + parts $26K/mo; tech pay $14K/mo; 25.4% of $299K/mo RO gross; top quarter 74% (3 techs); 3.46 ROs/tech day; 1.75 hrs/RO
 AUDI HENDERSON: 91.0%; 13 of 23 under 85%; gap 3,426 hrs; labor $81K/mo + parts $20K/mo; tech pay $14K/mo; 8.3% of $1.23M/mo RO gross; top quarter 135% (6 techs); 2.77 ROs/tech day; 3.23 hrs/RO
 AUDI RENO: 117.1%; 4 of 10 under 85%; gap 826 hrs; labor $14K/mo + parts $6K/mo; tech pay $4K/mo; 4.0% of $504K/mo RO gross; top quarter 194% (2 techs); 4.08 ROs/tech day; 2.88 hrs/RO
 CADILLAC: 87.7%; 16 of 29 under 85%; gap 6,705 hrs; labor $108K/mo + parts $49K/mo; tech pay $24K/mo; 13.6% of $1.16M/mo RO gross; top quarter 143% (7 techs); 2.48 ROs/tech day; 3.41 hrs/RO
@@ -1077,7 +1077,7 @@
           <a:p>
             <a:r>
               <a:rPr lang="en-US" dirty="0"/>
-              <a:t>Source: Each technician under 85% lifted to 85% of their own paid hours; techs at or above 85% count as zero, so no store offsets one tech with another. Gap hours valued at what the store's own technicians (counted titles) earn per sold hour in labor gross and parts gross, all pay types, Qlik - Closed Repair Orders, same dates; tech pay at their labor cost per sold hour. Store-wide averages are not used because they carry detail, rental and recon sale booked with no hours. Per month = period total / 9.49 months (Dec 25, 2025 - Oct 9, 2026). Parts assumes the extra hours carry the store's average parts per hour. Population as on the proficiency slides. Missed and Gross are per month. Share = missed labor + parts gross / labor + parts gross on the store's closed ROs, all pay types, same dates (includes work on shared tech codes). Not P&amp;L gross: counter and wholesale parts are excluded because techs do not produce them.ACURA: 67.4%; 11 of 11 under 85%; gap 2,954 hrs; labor $50K/mo + parts $26K/mo; tech pay $14K/mo; 25.4% of $299K/mo RO gross; top quarter 74% (3 techs); 3.46 ROs/tech day; 1.75 hrs/RO
+              <a:t>Source: Each technician under 85% lifted to 85% of their own worked hours; techs at or above 85% count as zero, so no store offsets one tech with another. Gap hours valued at what the store's own technicians (counted titles) earn per sold hour in labor gross and parts gross, all pay types, Qlik - Closed Repair Orders, same dates; tech pay at their labor cost per sold hour. Store-wide averages are not used because they carry detail, rental and recon sale booked with no hours. Per month = period total / 9.49 months (Dec 25, 2025 - Oct 9, 2026). Parts assumes the extra hours carry the store's average parts per hour. Population as on the proficiency slides. Missed and Gross are per month. Share = missed labor + parts gross / labor + parts gross on the store's closed ROs, all pay types, same dates (includes work on shared tech codes). Not P&amp;L gross: counter and wholesale parts are excluded because techs do not produce them.ACURA: 67.4%; 11 of 11 under 85%; gap 2,954 hrs; labor $50K/mo + parts $26K/mo; tech pay $14K/mo; 25.4% of $299K/mo RO gross; top quarter 74% (3 techs); 3.46 ROs/tech day; 1.75 hrs/RO
 AUDI HENDERSON: 91.0%; 13 of 23 under 85%; gap 3,426 hrs; labor $81K/mo + parts $20K/mo; tech pay $14K/mo; 8.3% of $1.23M/mo RO gross; top quarter 135% (6 techs); 2.77 ROs/tech day; 3.23 hrs/RO
 AUDI RENO: 117.1%; 4 of 10 under 85%; gap 826 hrs; labor $14K/mo + parts $6K/mo; tech pay $4K/mo; 4.0% of $504K/mo RO gross; top quarter 194% (2 techs); 4.08 ROs/tech day; 2.88 hrs/RO
 CADILLAC: 87.7%; 16 of 29 under 85%; gap 6,705 hrs; labor $108K/mo + parts $49K/mo; tech pay $24K/mo; 13.6% of $1.16M/mo RO gross; top quarter 143% (7 techs); 2.48 ROs/tech day; 3.41 hrs/RO
@@ -1197,7 +1197,7 @@
           <a:p>
             <a:r>
               <a:rPr lang="en-US" dirty="0"/>
-              <a:t>Source: ADP paid hours (regular + overtime) and Qlik - Closed Repair Orders sold hours, all pay types, matched by tech number. Dec 25, 2025 - Oct 9, 2026 (shown as Jan-Sep). Same-store, INEOS excluded (opened 2026). Service, express, team-leader and shop-foreman titles only; body shop, detail and tint excluded. Outliers dropped: shop foremen at or below 30% (workbook uses 20%; under 30% a foreman is mainly dispatching), team leaders at or below 20%, service and express technicians at or below 10% (workbook uses 2%; under 10% a tech is not working as a line tech). Unassigned codes (MULT, 999, 77777) excluded. Role changes: ADP shows one current title with paid hours for the whole period, so when a tech's paid hours exceed 125% of full time over the months they actually flagged, paid hours are scaled to that span (56 techs). 45 keying-error lines removed from sold hours (5,399 hrs: single lines of 20+ hours with under $25 labor sale per hour, e.g. 940.58 hrs for $0 at Hyundai St George, RO 177970). Top quarter = the store's most proficient quarter of counted technicians (at least one), sold / paid hours combined. Bars capped at 190%.ACURA: 67.4%; 11 of 11 under 85%; gap 2,954 hrs; labor $50K/mo + parts $26K/mo; tech pay $14K/mo; 25.4% of $299K/mo RO gross; top quarter 74% (3 techs); 3.46 ROs/tech day; 1.75 hrs/RO
+              <a:t>Source: ADP worked hours (regular + overtime) and Qlik - Closed Repair Orders sold hours, all pay types, matched by tech number. Dec 25, 2025 - Oct 9, 2026 (shown as Jan-Sep). Same-store, INEOS excluded (opened 2026). Service, express, team-leader and shop-foreman titles only; body shop, detail and tint excluded. Outliers dropped: shop foremen at or below 30% (workbook uses 20%; under 30% a foreman is mainly dispatching), team leaders at or below 20%, service and express technicians at or below 10% (workbook uses 2%; under 10% a tech is not working as a line tech). Unassigned codes (MULT, 999, 77777) excluded. Role changes: ADP shows one current title with worked hours for the whole period, so when a tech's worked hours exceed 125% of full time over the months they actually flagged, worked hours are scaled to that span (56 techs). 45 keying-error lines removed from sold hours (5,399 hrs: single lines of 20+ hours with under $25 labor sale per hour, e.g. 940.58 hrs for $0 at Hyundai St George, RO 177970). Top quarter = the store's most proficient quarter of counted technicians (at least one), sold / worked hours combined. Bars capped at 190%.ACURA: 67.4%; 11 of 11 under 85%; gap 2,954 hrs; labor $50K/mo + parts $26K/mo; tech pay $14K/mo; 25.4% of $299K/mo RO gross; top quarter 74% (3 techs); 3.46 ROs/tech day; 1.75 hrs/RO
 AUDI HENDERSON: 91.0%; 13 of 23 under 85%; gap 3,426 hrs; labor $81K/mo + parts $20K/mo; tech pay $14K/mo; 8.3% of $1.23M/mo RO gross; top quarter 135% (6 techs); 2.77 ROs/tech day; 3.23 hrs/RO
 AUDI RENO: 117.1%; 4 of 10 under 85%; gap 826 hrs; labor $14K/mo + parts $6K/mo; tech pay $4K/mo; 4.0% of $504K/mo RO gross; top quarter 194% (2 techs); 4.08 ROs/tech day; 2.88 hrs/RO
 CADILLAC: 87.7%; 16 of 29 under 85%; gap 6,705 hrs; labor $108K/mo + parts $49K/mo; tech pay $24K/mo; 13.6% of $1.16M/mo RO gross; top quarter 143% (7 techs); 2.48 ROs/tech day; 3.41 hrs/RO
@@ -1317,7 +1317,7 @@
           <a:p>
             <a:r>
               <a:rPr lang="en-US" dirty="0"/>
-              <a:t>Source: ADP paid hours (regular + overtime) and Qlik - Closed Repair Orders sold hours, all pay types, matched by tech number. Dec 25, 2025 - Oct 9, 2026 (shown as Jan-Sep). Same-store, INEOS excluded (opened 2026). Service, express, team-leader and shop-foreman titles only; body shop, detail and tint excluded. Outliers dropped: shop foremen at or below 30% (workbook uses 20%; under 30% a foreman is mainly dispatching), team leaders at or below 20%, service and express technicians at or below 10% (workbook uses 2%; under 10% a tech is not working as a line tech). Unassigned codes (MULT, 999, 77777) excluded. Role changes: ADP shows one current title with paid hours for the whole period, so when a tech's paid hours exceed 125% of full time over the months they actually flagged, paid hours are scaled to that span (56 techs). 45 keying-error lines removed from sold hours (5,399 hrs: single lines of 20+ hours with under $25 labor sale per hour, e.g. 940.58 hrs for $0 at Hyundai St George, RO 177970). Stores under 85% only. ROs/day = distinct ROs, all pay types, per counted tech per 8 paid hours. Seg avg = luxury 3.0, non-luxury 4.9 (luxury = Lexus, Lincoln, Cadillac, Volvo, Audi Reno, Audi Henderson, LR Reno, LR LV, LR Henderson). Fewer ROs per tech can mean too few cars for the staff or slow techs turning work away; it starts the conversation rather than settling it.ACURA: 67.4%; 11 of 11 under 85%; gap 2,954 hrs; labor $50K/mo + parts $26K/mo; tech pay $14K/mo; 25.4% of $299K/mo RO gross; top quarter 74% (3 techs); 3.46 ROs/tech day; 1.75 hrs/RO
+              <a:t>Source: ADP worked hours (regular + overtime) and Qlik - Closed Repair Orders sold hours, all pay types, matched by tech number. Dec 25, 2025 - Oct 9, 2026 (shown as Jan-Sep). Same-store, INEOS excluded (opened 2026). Service, express, team-leader and shop-foreman titles only; body shop, detail and tint excluded. Outliers dropped: shop foremen at or below 30% (workbook uses 20%; under 30% a foreman is mainly dispatching), team leaders at or below 20%, service and express technicians at or below 10% (workbook uses 2%; under 10% a tech is not working as a line tech). Unassigned codes (MULT, 999, 77777) excluded. Role changes: ADP shows one current title with worked hours for the whole period, so when a tech's worked hours exceed 125% of full time over the months they actually flagged, worked hours are scaled to that span (56 techs). 45 keying-error lines removed from sold hours (5,399 hrs: single lines of 20+ hours with under $25 labor sale per hour, e.g. 940.58 hrs for $0 at Hyundai St George, RO 177970). Stores under 85% only. ROs/day = distinct ROs, all pay types, per counted tech per 8 worked hours. Seg avg = luxury 3.0, non-luxury 4.9 (luxury = Lexus, Lincoln, Cadillac, Volvo, Audi Reno, Audi Henderson, LR Reno, LR LV, LR Henderson). Fewer ROs per tech can mean too few cars for the staff or slow techs turning work away; it starts the conversation rather than settling it.ACURA: 67.4%; 11 of 11 under 85%; gap 2,954 hrs; labor $50K/mo + parts $26K/mo; tech pay $14K/mo; 25.4% of $299K/mo RO gross; top quarter 74% (3 techs); 3.46 ROs/tech day; 1.75 hrs/RO
 AUDI HENDERSON: 91.0%; 13 of 23 under 85%; gap 3,426 hrs; labor $81K/mo + parts $20K/mo; tech pay $14K/mo; 8.3% of $1.23M/mo RO gross; top quarter 135% (6 techs); 2.77 ROs/tech day; 3.23 hrs/RO
 AUDI RENO: 117.1%; 4 of 10 under 85%; gap 826 hrs; labor $14K/mo + parts $6K/mo; tech pay $4K/mo; 4.0% of $504K/mo RO gross; top quarter 194% (2 techs); 4.08 ROs/tech day; 2.88 hrs/RO
 CADILLAC: 87.7%; 16 of 29 under 85%; gap 6,705 hrs; labor $108K/mo + parts $49K/mo; tech pay $24K/mo; 13.6% of $1.16M/mo RO gross; top quarter 143% (7 techs); 2.48 ROs/tech day; 3.41 hrs/RO

--- a/day2-deck/decks/Technician Proficiency - House Style.pptx
+++ b/day2-deck/decks/Technician Proficiency - House Style.pptx
@@ -15197,7 +15197,7 @@
                 <a:ea typeface="Inter" pitchFamily="34" charset="-122"/>
                 <a:cs typeface="Inter" pitchFamily="34" charset="-120"/>
               </a:rPr>
-              <a:t>HOURS NOT PRODUCED, YEAR TO DATE</a:t>
+              <a:t>HOURS NOT PRODUCED YTD</a:t>
             </a:r>
             <a:endParaRPr lang="en-US" sz="1400" dirty="0"/>
           </a:p>
@@ -15238,7 +15238,7 @@
                 <a:ea typeface="Inter" pitchFamily="34" charset="-122"/>
                 <a:cs typeface="Inter" pitchFamily="34" charset="-120"/>
               </a:rPr>
-              <a:t>79K YTD</a:t>
+              <a:t>79K</a:t>
             </a:r>
             <a:endParaRPr lang="en-US" sz="4000" dirty="0"/>
           </a:p>
@@ -15397,7 +15397,7 @@
                 <a:ea typeface="Inter" pitchFamily="34" charset="-122"/>
                 <a:cs typeface="Inter" pitchFamily="34" charset="-120"/>
               </a:rPr>
-              <a:t>262 of 583</a:t>
+              <a:t>262</a:t>
             </a:r>
             <a:endParaRPr lang="en-US" sz="4000" dirty="0"/>
           </a:p>
@@ -15436,7 +15436,7 @@
                 <a:ea typeface="Inter" pitchFamily="34" charset="-122"/>
                 <a:cs typeface="Inter" pitchFamily="34" charset="-120"/>
               </a:rPr>
-              <a:t>45% of technicians. Every store has at least one.</a:t>
+              <a:t>Of 583 technicians (45%). Every store has at least one.</a:t>
             </a:r>
             <a:endParaRPr lang="en-US" sz="1500" dirty="0"/>
           </a:p>

--- a/day2-deck/decks/Technician Proficiency - House Style.pptx
+++ b/day2-deck/decks/Technician Proficiency - House Style.pptx
@@ -15698,7 +15698,7 @@
         </p:nvSpPr>
         <p:spPr>
           <a:xfrm>
-            <a:off x="3474720" y="1316736"/>
+            <a:off x="3520440" y="1316736"/>
             <a:ext cx="786384" cy="329184"/>
           </a:xfrm>
           <a:prstGeom prst="rect">
@@ -15737,7 +15737,7 @@
         </p:nvSpPr>
         <p:spPr>
           <a:xfrm>
-            <a:off x="4261104" y="1316736"/>
+            <a:off x="4306824" y="1316736"/>
             <a:ext cx="932688" cy="329184"/>
           </a:xfrm>
           <a:prstGeom prst="rect">
@@ -15776,7 +15776,7 @@
         </p:nvSpPr>
         <p:spPr>
           <a:xfrm>
-            <a:off x="5193792" y="1316736"/>
+            <a:off x="5239512" y="1316736"/>
             <a:ext cx="676656" cy="329184"/>
           </a:xfrm>
           <a:prstGeom prst="rect">
@@ -15815,7 +15815,7 @@
         </p:nvSpPr>
         <p:spPr>
           <a:xfrm>
-            <a:off x="9025128" y="1316736"/>
+            <a:off x="9070848" y="1316736"/>
             <a:ext cx="786384" cy="329184"/>
           </a:xfrm>
           <a:prstGeom prst="rect">
@@ -15854,7 +15854,7 @@
         </p:nvSpPr>
         <p:spPr>
           <a:xfrm>
-            <a:off x="9811512" y="1316736"/>
+            <a:off x="9857232" y="1316736"/>
             <a:ext cx="932688" cy="329184"/>
           </a:xfrm>
           <a:prstGeom prst="rect">
@@ -15893,7 +15893,7 @@
         </p:nvSpPr>
         <p:spPr>
           <a:xfrm>
-            <a:off x="10744200" y="1316736"/>
+            <a:off x="10789920" y="1316736"/>
             <a:ext cx="676656" cy="329184"/>
           </a:xfrm>
           <a:prstGeom prst="rect">
@@ -15933,7 +15933,46 @@
         <p:spPr>
           <a:xfrm>
             <a:off x="658368" y="1700784"/>
-            <a:ext cx="1938528" cy="248502"/>
+            <a:ext cx="310896" cy="248502"/>
+          </a:xfrm>
+          <a:prstGeom prst="rect">
+            <a:avLst/>
+          </a:prstGeom>
+          <a:noFill/>
+          <a:ln/>
+        </p:spPr>
+        <p:txBody>
+          <a:bodyPr wrap="square" lIns="0" tIns="0" rIns="0" bIns="0" rtlCol="0" anchor="ctr"/>
+          <a:lstStyle/>
+          <a:p>
+            <a:pPr algn="r" indent="0" marL="0">
+              <a:buNone/>
+            </a:pPr>
+            <a:r>
+              <a:rPr lang="en-US" sz="1200" dirty="0">
+                <a:solidFill>
+                  <a:srgbClr val="9AA3AD"/>
+                </a:solidFill>
+                <a:latin typeface="Inter" pitchFamily="34" charset="0"/>
+                <a:ea typeface="Inter" pitchFamily="34" charset="-122"/>
+                <a:cs typeface="Inter" pitchFamily="34" charset="-120"/>
+              </a:rPr>
+              <a:t>1</a:t>
+            </a:r>
+            <a:endParaRPr lang="en-US" sz="1200" dirty="0"/>
+          </a:p>
+        </p:txBody>
+      </p:sp>
+      <p:sp>
+        <p:nvSpPr>
+          <p:cNvPr id="13" name="Text 11"/>
+          <p:cNvSpPr txBox="1"/>
+          <p:nvPr/>
+        </p:nvSpPr>
+        <p:spPr>
+          <a:xfrm>
+            <a:off x="1014984" y="1700784"/>
+            <a:ext cx="1783080" cy="248502"/>
           </a:xfrm>
           <a:prstGeom prst="rect">
             <a:avLst/>
@@ -15965,14 +16004,14 @@
       </p:sp>
       <p:sp>
         <p:nvSpPr>
-          <p:cNvPr id="13" name="Shape 11"/>
+          <p:cNvPr id="14" name="Shape 12"/>
           <p:cNvSpPr/>
           <p:nvPr/>
         </p:nvSpPr>
         <p:spPr>
           <a:xfrm>
-            <a:off x="2670048" y="1756697"/>
-            <a:ext cx="749808" cy="136676"/>
+            <a:off x="2871216" y="1756697"/>
+            <a:ext cx="594360" cy="136676"/>
           </a:xfrm>
           <a:prstGeom prst="rect">
             <a:avLst/>
@@ -15985,13 +16024,13 @@
       </p:sp>
       <p:sp>
         <p:nvSpPr>
-          <p:cNvPr id="14" name="Text 12"/>
-          <p:cNvSpPr txBox="1"/>
-          <p:nvPr/>
-        </p:nvSpPr>
-        <p:spPr>
-          <a:xfrm>
-            <a:off x="3474720" y="1700784"/>
+          <p:cNvPr id="15" name="Text 13"/>
+          <p:cNvSpPr txBox="1"/>
+          <p:nvPr/>
+        </p:nvSpPr>
+        <p:spPr>
+          <a:xfrm>
+            <a:off x="3520440" y="1700784"/>
             <a:ext cx="786384" cy="248502"/>
           </a:xfrm>
           <a:prstGeom prst="rect">
@@ -16024,13 +16063,13 @@
       </p:sp>
       <p:sp>
         <p:nvSpPr>
-          <p:cNvPr id="15" name="Text 13"/>
-          <p:cNvSpPr txBox="1"/>
-          <p:nvPr/>
-        </p:nvSpPr>
-        <p:spPr>
-          <a:xfrm>
-            <a:off x="4261104" y="1700784"/>
+          <p:cNvPr id="16" name="Text 14"/>
+          <p:cNvSpPr txBox="1"/>
+          <p:nvPr/>
+        </p:nvSpPr>
+        <p:spPr>
+          <a:xfrm>
+            <a:off x="4306824" y="1700784"/>
             <a:ext cx="932688" cy="248502"/>
           </a:xfrm>
           <a:prstGeom prst="rect">
@@ -16063,13 +16102,13 @@
       </p:sp>
       <p:sp>
         <p:nvSpPr>
-          <p:cNvPr id="16" name="Text 14"/>
-          <p:cNvSpPr txBox="1"/>
-          <p:nvPr/>
-        </p:nvSpPr>
-        <p:spPr>
-          <a:xfrm>
-            <a:off x="5193792" y="1700784"/>
+          <p:cNvPr id="17" name="Text 15"/>
+          <p:cNvSpPr txBox="1"/>
+          <p:nvPr/>
+        </p:nvSpPr>
+        <p:spPr>
+          <a:xfrm>
+            <a:off x="5239512" y="1700784"/>
             <a:ext cx="676656" cy="248502"/>
           </a:xfrm>
           <a:prstGeom prst="rect">
@@ -16102,14 +16141,53 @@
       </p:sp>
       <p:sp>
         <p:nvSpPr>
-          <p:cNvPr id="17" name="Text 15"/>
+          <p:cNvPr id="18" name="Text 16"/>
           <p:cNvSpPr txBox="1"/>
           <p:nvPr/>
         </p:nvSpPr>
         <p:spPr>
           <a:xfrm>
             <a:off x="658368" y="1949286"/>
-            <a:ext cx="1938528" cy="248502"/>
+            <a:ext cx="310896" cy="248502"/>
+          </a:xfrm>
+          <a:prstGeom prst="rect">
+            <a:avLst/>
+          </a:prstGeom>
+          <a:noFill/>
+          <a:ln/>
+        </p:spPr>
+        <p:txBody>
+          <a:bodyPr wrap="square" lIns="0" tIns="0" rIns="0" bIns="0" rtlCol="0" anchor="ctr"/>
+          <a:lstStyle/>
+          <a:p>
+            <a:pPr algn="r" indent="0" marL="0">
+              <a:buNone/>
+            </a:pPr>
+            <a:r>
+              <a:rPr lang="en-US" sz="1200" dirty="0">
+                <a:solidFill>
+                  <a:srgbClr val="9AA3AD"/>
+                </a:solidFill>
+                <a:latin typeface="Inter" pitchFamily="34" charset="0"/>
+                <a:ea typeface="Inter" pitchFamily="34" charset="-122"/>
+                <a:cs typeface="Inter" pitchFamily="34" charset="-120"/>
+              </a:rPr>
+              <a:t>2</a:t>
+            </a:r>
+            <a:endParaRPr lang="en-US" sz="1200" dirty="0"/>
+          </a:p>
+        </p:txBody>
+      </p:sp>
+      <p:sp>
+        <p:nvSpPr>
+          <p:cNvPr id="19" name="Text 17"/>
+          <p:cNvSpPr txBox="1"/>
+          <p:nvPr/>
+        </p:nvSpPr>
+        <p:spPr>
+          <a:xfrm>
+            <a:off x="1014984" y="1949286"/>
+            <a:ext cx="1783080" cy="248502"/>
           </a:xfrm>
           <a:prstGeom prst="rect">
             <a:avLst/>
@@ -16141,14 +16219,14 @@
       </p:sp>
       <p:sp>
         <p:nvSpPr>
-          <p:cNvPr id="18" name="Shape 16"/>
+          <p:cNvPr id="20" name="Shape 18"/>
           <p:cNvSpPr/>
           <p:nvPr/>
         </p:nvSpPr>
         <p:spPr>
           <a:xfrm>
-            <a:off x="2670048" y="2005199"/>
-            <a:ext cx="533948" cy="136676"/>
+            <a:off x="2871216" y="2005199"/>
+            <a:ext cx="423252" cy="136676"/>
           </a:xfrm>
           <a:prstGeom prst="rect">
             <a:avLst/>
@@ -16161,13 +16239,13 @@
       </p:sp>
       <p:sp>
         <p:nvSpPr>
-          <p:cNvPr id="19" name="Text 17"/>
-          <p:cNvSpPr txBox="1"/>
-          <p:nvPr/>
-        </p:nvSpPr>
-        <p:spPr>
-          <a:xfrm>
-            <a:off x="3474720" y="1949286"/>
+          <p:cNvPr id="21" name="Text 19"/>
+          <p:cNvSpPr txBox="1"/>
+          <p:nvPr/>
+        </p:nvSpPr>
+        <p:spPr>
+          <a:xfrm>
+            <a:off x="3520440" y="1949286"/>
             <a:ext cx="786384" cy="248502"/>
           </a:xfrm>
           <a:prstGeom prst="rect">
@@ -16200,13 +16278,13 @@
       </p:sp>
       <p:sp>
         <p:nvSpPr>
-          <p:cNvPr id="20" name="Text 18"/>
-          <p:cNvSpPr txBox="1"/>
-          <p:nvPr/>
-        </p:nvSpPr>
-        <p:spPr>
-          <a:xfrm>
-            <a:off x="4261104" y="1949286"/>
+          <p:cNvPr id="22" name="Text 20"/>
+          <p:cNvSpPr txBox="1"/>
+          <p:nvPr/>
+        </p:nvSpPr>
+        <p:spPr>
+          <a:xfrm>
+            <a:off x="4306824" y="1949286"/>
             <a:ext cx="932688" cy="248502"/>
           </a:xfrm>
           <a:prstGeom prst="rect">
@@ -16239,13 +16317,13 @@
       </p:sp>
       <p:sp>
         <p:nvSpPr>
-          <p:cNvPr id="21" name="Text 19"/>
-          <p:cNvSpPr txBox="1"/>
-          <p:nvPr/>
-        </p:nvSpPr>
-        <p:spPr>
-          <a:xfrm>
-            <a:off x="5193792" y="1949286"/>
+          <p:cNvPr id="23" name="Text 21"/>
+          <p:cNvSpPr txBox="1"/>
+          <p:nvPr/>
+        </p:nvSpPr>
+        <p:spPr>
+          <a:xfrm>
+            <a:off x="5239512" y="1949286"/>
             <a:ext cx="676656" cy="248502"/>
           </a:xfrm>
           <a:prstGeom prst="rect">
@@ -16278,14 +16356,53 @@
       </p:sp>
       <p:sp>
         <p:nvSpPr>
-          <p:cNvPr id="22" name="Text 20"/>
+          <p:cNvPr id="24" name="Text 22"/>
           <p:cNvSpPr txBox="1"/>
           <p:nvPr/>
         </p:nvSpPr>
         <p:spPr>
           <a:xfrm>
             <a:off x="658368" y="2197787"/>
-            <a:ext cx="1938528" cy="248502"/>
+            <a:ext cx="310896" cy="248502"/>
+          </a:xfrm>
+          <a:prstGeom prst="rect">
+            <a:avLst/>
+          </a:prstGeom>
+          <a:noFill/>
+          <a:ln/>
+        </p:spPr>
+        <p:txBody>
+          <a:bodyPr wrap="square" lIns="0" tIns="0" rIns="0" bIns="0" rtlCol="0" anchor="ctr"/>
+          <a:lstStyle/>
+          <a:p>
+            <a:pPr algn="r" indent="0" marL="0">
+              <a:buNone/>
+            </a:pPr>
+            <a:r>
+              <a:rPr lang="en-US" sz="1200" dirty="0">
+                <a:solidFill>
+                  <a:srgbClr val="9AA3AD"/>
+                </a:solidFill>
+                <a:latin typeface="Inter" pitchFamily="34" charset="0"/>
+                <a:ea typeface="Inter" pitchFamily="34" charset="-122"/>
+                <a:cs typeface="Inter" pitchFamily="34" charset="-120"/>
+              </a:rPr>
+              <a:t>3</a:t>
+            </a:r>
+            <a:endParaRPr lang="en-US" sz="1200" dirty="0"/>
+          </a:p>
+        </p:txBody>
+      </p:sp>
+      <p:sp>
+        <p:nvSpPr>
+          <p:cNvPr id="25" name="Text 23"/>
+          <p:cNvSpPr txBox="1"/>
+          <p:nvPr/>
+        </p:nvSpPr>
+        <p:spPr>
+          <a:xfrm>
+            <a:off x="1014984" y="2197787"/>
+            <a:ext cx="1783080" cy="248502"/>
           </a:xfrm>
           <a:prstGeom prst="rect">
             <a:avLst/>
@@ -16317,14 +16434,14 @@
       </p:sp>
       <p:sp>
         <p:nvSpPr>
-          <p:cNvPr id="23" name="Shape 21"/>
+          <p:cNvPr id="26" name="Shape 24"/>
           <p:cNvSpPr/>
           <p:nvPr/>
         </p:nvSpPr>
         <p:spPr>
           <a:xfrm>
-            <a:off x="2670048" y="2253700"/>
-            <a:ext cx="483297" cy="136676"/>
+            <a:off x="2871216" y="2253700"/>
+            <a:ext cx="383101" cy="136676"/>
           </a:xfrm>
           <a:prstGeom prst="rect">
             <a:avLst/>
@@ -16337,13 +16454,13 @@
       </p:sp>
       <p:sp>
         <p:nvSpPr>
-          <p:cNvPr id="24" name="Text 22"/>
-          <p:cNvSpPr txBox="1"/>
-          <p:nvPr/>
-        </p:nvSpPr>
-        <p:spPr>
-          <a:xfrm>
-            <a:off x="3474720" y="2197787"/>
+          <p:cNvPr id="27" name="Text 25"/>
+          <p:cNvSpPr txBox="1"/>
+          <p:nvPr/>
+        </p:nvSpPr>
+        <p:spPr>
+          <a:xfrm>
+            <a:off x="3520440" y="2197787"/>
             <a:ext cx="786384" cy="248502"/>
           </a:xfrm>
           <a:prstGeom prst="rect">
@@ -16376,13 +16493,13 @@
       </p:sp>
       <p:sp>
         <p:nvSpPr>
-          <p:cNvPr id="25" name="Text 23"/>
-          <p:cNvSpPr txBox="1"/>
-          <p:nvPr/>
-        </p:nvSpPr>
-        <p:spPr>
-          <a:xfrm>
-            <a:off x="4261104" y="2197787"/>
+          <p:cNvPr id="28" name="Text 26"/>
+          <p:cNvSpPr txBox="1"/>
+          <p:nvPr/>
+        </p:nvSpPr>
+        <p:spPr>
+          <a:xfrm>
+            <a:off x="4306824" y="2197787"/>
             <a:ext cx="932688" cy="248502"/>
           </a:xfrm>
           <a:prstGeom prst="rect">
@@ -16415,13 +16532,13 @@
       </p:sp>
       <p:sp>
         <p:nvSpPr>
-          <p:cNvPr id="26" name="Text 24"/>
-          <p:cNvSpPr txBox="1"/>
-          <p:nvPr/>
-        </p:nvSpPr>
-        <p:spPr>
-          <a:xfrm>
-            <a:off x="5193792" y="2197787"/>
+          <p:cNvPr id="29" name="Text 27"/>
+          <p:cNvSpPr txBox="1"/>
+          <p:nvPr/>
+        </p:nvSpPr>
+        <p:spPr>
+          <a:xfrm>
+            <a:off x="5239512" y="2197787"/>
             <a:ext cx="676656" cy="248502"/>
           </a:xfrm>
           <a:prstGeom prst="rect">
@@ -16454,14 +16571,53 @@
       </p:sp>
       <p:sp>
         <p:nvSpPr>
-          <p:cNvPr id="27" name="Text 25"/>
+          <p:cNvPr id="30" name="Text 28"/>
           <p:cNvSpPr txBox="1"/>
           <p:nvPr/>
         </p:nvSpPr>
         <p:spPr>
           <a:xfrm>
             <a:off x="658368" y="2446289"/>
-            <a:ext cx="1938528" cy="248502"/>
+            <a:ext cx="310896" cy="248502"/>
+          </a:xfrm>
+          <a:prstGeom prst="rect">
+            <a:avLst/>
+          </a:prstGeom>
+          <a:noFill/>
+          <a:ln/>
+        </p:spPr>
+        <p:txBody>
+          <a:bodyPr wrap="square" lIns="0" tIns="0" rIns="0" bIns="0" rtlCol="0" anchor="ctr"/>
+          <a:lstStyle/>
+          <a:p>
+            <a:pPr algn="r" indent="0" marL="0">
+              <a:buNone/>
+            </a:pPr>
+            <a:r>
+              <a:rPr lang="en-US" sz="1200" dirty="0">
+                <a:solidFill>
+                  <a:srgbClr val="9AA3AD"/>
+                </a:solidFill>
+                <a:latin typeface="Inter" pitchFamily="34" charset="0"/>
+                <a:ea typeface="Inter" pitchFamily="34" charset="-122"/>
+                <a:cs typeface="Inter" pitchFamily="34" charset="-120"/>
+              </a:rPr>
+              <a:t>4</a:t>
+            </a:r>
+            <a:endParaRPr lang="en-US" sz="1200" dirty="0"/>
+          </a:p>
+        </p:txBody>
+      </p:sp>
+      <p:sp>
+        <p:nvSpPr>
+          <p:cNvPr id="31" name="Text 29"/>
+          <p:cNvSpPr txBox="1"/>
+          <p:nvPr/>
+        </p:nvSpPr>
+        <p:spPr>
+          <a:xfrm>
+            <a:off x="1014984" y="2446289"/>
+            <a:ext cx="1783080" cy="248502"/>
           </a:xfrm>
           <a:prstGeom prst="rect">
             <a:avLst/>
@@ -16493,14 +16649,14 @@
       </p:sp>
       <p:sp>
         <p:nvSpPr>
-          <p:cNvPr id="28" name="Shape 26"/>
+          <p:cNvPr id="32" name="Shape 30"/>
           <p:cNvSpPr/>
           <p:nvPr/>
         </p:nvSpPr>
         <p:spPr>
           <a:xfrm>
-            <a:off x="2670048" y="2502202"/>
-            <a:ext cx="476411" cy="136676"/>
+            <a:off x="2871216" y="2502202"/>
+            <a:ext cx="377643" cy="136676"/>
           </a:xfrm>
           <a:prstGeom prst="rect">
             <a:avLst/>
@@ -16513,13 +16669,13 @@
       </p:sp>
       <p:sp>
         <p:nvSpPr>
-          <p:cNvPr id="29" name="Text 27"/>
-          <p:cNvSpPr txBox="1"/>
-          <p:nvPr/>
-        </p:nvSpPr>
-        <p:spPr>
-          <a:xfrm>
-            <a:off x="3474720" y="2446289"/>
+          <p:cNvPr id="33" name="Text 31"/>
+          <p:cNvSpPr txBox="1"/>
+          <p:nvPr/>
+        </p:nvSpPr>
+        <p:spPr>
+          <a:xfrm>
+            <a:off x="3520440" y="2446289"/>
             <a:ext cx="786384" cy="248502"/>
           </a:xfrm>
           <a:prstGeom prst="rect">
@@ -16552,13 +16708,13 @@
       </p:sp>
       <p:sp>
         <p:nvSpPr>
-          <p:cNvPr id="30" name="Text 28"/>
-          <p:cNvSpPr txBox="1"/>
-          <p:nvPr/>
-        </p:nvSpPr>
-        <p:spPr>
-          <a:xfrm>
-            <a:off x="4261104" y="2446289"/>
+          <p:cNvPr id="34" name="Text 32"/>
+          <p:cNvSpPr txBox="1"/>
+          <p:nvPr/>
+        </p:nvSpPr>
+        <p:spPr>
+          <a:xfrm>
+            <a:off x="4306824" y="2446289"/>
             <a:ext cx="932688" cy="248502"/>
           </a:xfrm>
           <a:prstGeom prst="rect">
@@ -16591,13 +16747,13 @@
       </p:sp>
       <p:sp>
         <p:nvSpPr>
-          <p:cNvPr id="31" name="Text 29"/>
-          <p:cNvSpPr txBox="1"/>
-          <p:nvPr/>
-        </p:nvSpPr>
-        <p:spPr>
-          <a:xfrm>
-            <a:off x="5193792" y="2446289"/>
+          <p:cNvPr id="35" name="Text 33"/>
+          <p:cNvSpPr txBox="1"/>
+          <p:nvPr/>
+        </p:nvSpPr>
+        <p:spPr>
+          <a:xfrm>
+            <a:off x="5239512" y="2446289"/>
             <a:ext cx="676656" cy="248502"/>
           </a:xfrm>
           <a:prstGeom prst="rect">
@@ -16630,14 +16786,53 @@
       </p:sp>
       <p:sp>
         <p:nvSpPr>
-          <p:cNvPr id="32" name="Text 30"/>
+          <p:cNvPr id="36" name="Text 34"/>
           <p:cNvSpPr txBox="1"/>
           <p:nvPr/>
         </p:nvSpPr>
         <p:spPr>
           <a:xfrm>
             <a:off x="658368" y="2694791"/>
-            <a:ext cx="1938528" cy="248502"/>
+            <a:ext cx="310896" cy="248502"/>
+          </a:xfrm>
+          <a:prstGeom prst="rect">
+            <a:avLst/>
+          </a:prstGeom>
+          <a:noFill/>
+          <a:ln/>
+        </p:spPr>
+        <p:txBody>
+          <a:bodyPr wrap="square" lIns="0" tIns="0" rIns="0" bIns="0" rtlCol="0" anchor="ctr"/>
+          <a:lstStyle/>
+          <a:p>
+            <a:pPr algn="r" indent="0" marL="0">
+              <a:buNone/>
+            </a:pPr>
+            <a:r>
+              <a:rPr lang="en-US" sz="1200" dirty="0">
+                <a:solidFill>
+                  <a:srgbClr val="9AA3AD"/>
+                </a:solidFill>
+                <a:latin typeface="Inter" pitchFamily="34" charset="0"/>
+                <a:ea typeface="Inter" pitchFamily="34" charset="-122"/>
+                <a:cs typeface="Inter" pitchFamily="34" charset="-120"/>
+              </a:rPr>
+              <a:t>5</a:t>
+            </a:r>
+            <a:endParaRPr lang="en-US" sz="1200" dirty="0"/>
+          </a:p>
+        </p:txBody>
+      </p:sp>
+      <p:sp>
+        <p:nvSpPr>
+          <p:cNvPr id="37" name="Text 35"/>
+          <p:cNvSpPr txBox="1"/>
+          <p:nvPr/>
+        </p:nvSpPr>
+        <p:spPr>
+          <a:xfrm>
+            <a:off x="1014984" y="2694791"/>
+            <a:ext cx="1783080" cy="248502"/>
           </a:xfrm>
           <a:prstGeom prst="rect">
             <a:avLst/>
@@ -16669,14 +16864,14 @@
       </p:sp>
       <p:sp>
         <p:nvSpPr>
-          <p:cNvPr id="33" name="Shape 31"/>
+          <p:cNvPr id="38" name="Shape 36"/>
           <p:cNvSpPr/>
           <p:nvPr/>
         </p:nvSpPr>
         <p:spPr>
           <a:xfrm>
-            <a:off x="2670048" y="2750703"/>
-            <a:ext cx="419972" cy="136676"/>
+            <a:off x="2871216" y="2750703"/>
+            <a:ext cx="332905" cy="136676"/>
           </a:xfrm>
           <a:prstGeom prst="rect">
             <a:avLst/>
@@ -16689,13 +16884,13 @@
       </p:sp>
       <p:sp>
         <p:nvSpPr>
-          <p:cNvPr id="34" name="Text 32"/>
-          <p:cNvSpPr txBox="1"/>
-          <p:nvPr/>
-        </p:nvSpPr>
-        <p:spPr>
-          <a:xfrm>
-            <a:off x="3474720" y="2694791"/>
+          <p:cNvPr id="39" name="Text 37"/>
+          <p:cNvSpPr txBox="1"/>
+          <p:nvPr/>
+        </p:nvSpPr>
+        <p:spPr>
+          <a:xfrm>
+            <a:off x="3520440" y="2694791"/>
             <a:ext cx="786384" cy="248502"/>
           </a:xfrm>
           <a:prstGeom prst="rect">
@@ -16728,13 +16923,13 @@
       </p:sp>
       <p:sp>
         <p:nvSpPr>
-          <p:cNvPr id="35" name="Text 33"/>
-          <p:cNvSpPr txBox="1"/>
-          <p:nvPr/>
-        </p:nvSpPr>
-        <p:spPr>
-          <a:xfrm>
-            <a:off x="4261104" y="2694791"/>
+          <p:cNvPr id="40" name="Text 38"/>
+          <p:cNvSpPr txBox="1"/>
+          <p:nvPr/>
+        </p:nvSpPr>
+        <p:spPr>
+          <a:xfrm>
+            <a:off x="4306824" y="2694791"/>
             <a:ext cx="932688" cy="248502"/>
           </a:xfrm>
           <a:prstGeom prst="rect">
@@ -16767,13 +16962,13 @@
       </p:sp>
       <p:sp>
         <p:nvSpPr>
-          <p:cNvPr id="36" name="Text 34"/>
-          <p:cNvSpPr txBox="1"/>
-          <p:nvPr/>
-        </p:nvSpPr>
-        <p:spPr>
-          <a:xfrm>
-            <a:off x="5193792" y="2694791"/>
+          <p:cNvPr id="41" name="Text 39"/>
+          <p:cNvSpPr txBox="1"/>
+          <p:nvPr/>
+        </p:nvSpPr>
+        <p:spPr>
+          <a:xfrm>
+            <a:off x="5239512" y="2694791"/>
             <a:ext cx="676656" cy="248502"/>
           </a:xfrm>
           <a:prstGeom prst="rect">
@@ -16806,14 +17001,53 @@
       </p:sp>
       <p:sp>
         <p:nvSpPr>
-          <p:cNvPr id="37" name="Text 35"/>
+          <p:cNvPr id="42" name="Text 40"/>
           <p:cNvSpPr txBox="1"/>
           <p:nvPr/>
         </p:nvSpPr>
         <p:spPr>
           <a:xfrm>
             <a:off x="658368" y="2943292"/>
-            <a:ext cx="1938528" cy="248502"/>
+            <a:ext cx="310896" cy="248502"/>
+          </a:xfrm>
+          <a:prstGeom prst="rect">
+            <a:avLst/>
+          </a:prstGeom>
+          <a:noFill/>
+          <a:ln/>
+        </p:spPr>
+        <p:txBody>
+          <a:bodyPr wrap="square" lIns="0" tIns="0" rIns="0" bIns="0" rtlCol="0" anchor="ctr"/>
+          <a:lstStyle/>
+          <a:p>
+            <a:pPr algn="r" indent="0" marL="0">
+              <a:buNone/>
+            </a:pPr>
+            <a:r>
+              <a:rPr lang="en-US" sz="1200" dirty="0">
+                <a:solidFill>
+                  <a:srgbClr val="9AA3AD"/>
+                </a:solidFill>
+                <a:latin typeface="Inter" pitchFamily="34" charset="0"/>
+                <a:ea typeface="Inter" pitchFamily="34" charset="-122"/>
+                <a:cs typeface="Inter" pitchFamily="34" charset="-120"/>
+              </a:rPr>
+              <a:t>6</a:t>
+            </a:r>
+            <a:endParaRPr lang="en-US" sz="1200" dirty="0"/>
+          </a:p>
+        </p:txBody>
+      </p:sp>
+      <p:sp>
+        <p:nvSpPr>
+          <p:cNvPr id="43" name="Text 41"/>
+          <p:cNvSpPr txBox="1"/>
+          <p:nvPr/>
+        </p:nvSpPr>
+        <p:spPr>
+          <a:xfrm>
+            <a:off x="1014984" y="2943292"/>
+            <a:ext cx="1783080" cy="248502"/>
           </a:xfrm>
           <a:prstGeom prst="rect">
             <a:avLst/>
@@ -16845,14 +17079,14 @@
       </p:sp>
       <p:sp>
         <p:nvSpPr>
-          <p:cNvPr id="38" name="Shape 36"/>
+          <p:cNvPr id="44" name="Shape 42"/>
           <p:cNvSpPr/>
           <p:nvPr/>
         </p:nvSpPr>
         <p:spPr>
           <a:xfrm>
-            <a:off x="2670048" y="2999205"/>
-            <a:ext cx="415094" cy="136676"/>
+            <a:off x="2871216" y="2999205"/>
+            <a:ext cx="329038" cy="136676"/>
           </a:xfrm>
           <a:prstGeom prst="rect">
             <a:avLst/>
@@ -16865,13 +17099,13 @@
       </p:sp>
       <p:sp>
         <p:nvSpPr>
-          <p:cNvPr id="39" name="Text 37"/>
-          <p:cNvSpPr txBox="1"/>
-          <p:nvPr/>
-        </p:nvSpPr>
-        <p:spPr>
-          <a:xfrm>
-            <a:off x="3474720" y="2943292"/>
+          <p:cNvPr id="45" name="Text 43"/>
+          <p:cNvSpPr txBox="1"/>
+          <p:nvPr/>
+        </p:nvSpPr>
+        <p:spPr>
+          <a:xfrm>
+            <a:off x="3520440" y="2943292"/>
             <a:ext cx="786384" cy="248502"/>
           </a:xfrm>
           <a:prstGeom prst="rect">
@@ -16904,13 +17138,13 @@
       </p:sp>
       <p:sp>
         <p:nvSpPr>
-          <p:cNvPr id="40" name="Text 38"/>
-          <p:cNvSpPr txBox="1"/>
-          <p:nvPr/>
-        </p:nvSpPr>
-        <p:spPr>
-          <a:xfrm>
-            <a:off x="4261104" y="2943292"/>
+          <p:cNvPr id="46" name="Text 44"/>
+          <p:cNvSpPr txBox="1"/>
+          <p:nvPr/>
+        </p:nvSpPr>
+        <p:spPr>
+          <a:xfrm>
+            <a:off x="4306824" y="2943292"/>
             <a:ext cx="932688" cy="248502"/>
           </a:xfrm>
           <a:prstGeom prst="rect">
@@ -16943,13 +17177,13 @@
       </p:sp>
       <p:sp>
         <p:nvSpPr>
-          <p:cNvPr id="41" name="Text 39"/>
-          <p:cNvSpPr txBox="1"/>
-          <p:nvPr/>
-        </p:nvSpPr>
-        <p:spPr>
-          <a:xfrm>
-            <a:off x="5193792" y="2943292"/>
+          <p:cNvPr id="47" name="Text 45"/>
+          <p:cNvSpPr txBox="1"/>
+          <p:nvPr/>
+        </p:nvSpPr>
+        <p:spPr>
+          <a:xfrm>
+            <a:off x="5239512" y="2943292"/>
             <a:ext cx="676656" cy="248502"/>
           </a:xfrm>
           <a:prstGeom prst="rect">
@@ -16982,14 +17216,53 @@
       </p:sp>
       <p:sp>
         <p:nvSpPr>
-          <p:cNvPr id="42" name="Text 40"/>
+          <p:cNvPr id="48" name="Text 46"/>
           <p:cNvSpPr txBox="1"/>
           <p:nvPr/>
         </p:nvSpPr>
         <p:spPr>
           <a:xfrm>
             <a:off x="658368" y="3191794"/>
-            <a:ext cx="1938528" cy="248502"/>
+            <a:ext cx="310896" cy="248502"/>
+          </a:xfrm>
+          <a:prstGeom prst="rect">
+            <a:avLst/>
+          </a:prstGeom>
+          <a:noFill/>
+          <a:ln/>
+        </p:spPr>
+        <p:txBody>
+          <a:bodyPr wrap="square" lIns="0" tIns="0" rIns="0" bIns="0" rtlCol="0" anchor="ctr"/>
+          <a:lstStyle/>
+          <a:p>
+            <a:pPr algn="r" indent="0" marL="0">
+              <a:buNone/>
+            </a:pPr>
+            <a:r>
+              <a:rPr lang="en-US" sz="1200" dirty="0">
+                <a:solidFill>
+                  <a:srgbClr val="9AA3AD"/>
+                </a:solidFill>
+                <a:latin typeface="Inter" pitchFamily="34" charset="0"/>
+                <a:ea typeface="Inter" pitchFamily="34" charset="-122"/>
+                <a:cs typeface="Inter" pitchFamily="34" charset="-120"/>
+              </a:rPr>
+              <a:t>7</a:t>
+            </a:r>
+            <a:endParaRPr lang="en-US" sz="1200" dirty="0"/>
+          </a:p>
+        </p:txBody>
+      </p:sp>
+      <p:sp>
+        <p:nvSpPr>
+          <p:cNvPr id="49" name="Text 47"/>
+          <p:cNvSpPr txBox="1"/>
+          <p:nvPr/>
+        </p:nvSpPr>
+        <p:spPr>
+          <a:xfrm>
+            <a:off x="1014984" y="3191794"/>
+            <a:ext cx="1783080" cy="248502"/>
           </a:xfrm>
           <a:prstGeom prst="rect">
             <a:avLst/>
@@ -17021,14 +17294,14 @@
       </p:sp>
       <p:sp>
         <p:nvSpPr>
-          <p:cNvPr id="43" name="Shape 41"/>
+          <p:cNvPr id="50" name="Shape 48"/>
           <p:cNvSpPr/>
           <p:nvPr/>
         </p:nvSpPr>
         <p:spPr>
           <a:xfrm>
-            <a:off x="2670048" y="3247707"/>
-            <a:ext cx="367707" cy="136676"/>
+            <a:off x="2871216" y="3247707"/>
+            <a:ext cx="291475" cy="136676"/>
           </a:xfrm>
           <a:prstGeom prst="rect">
             <a:avLst/>
@@ -17041,13 +17314,13 @@
       </p:sp>
       <p:sp>
         <p:nvSpPr>
-          <p:cNvPr id="44" name="Text 42"/>
-          <p:cNvSpPr txBox="1"/>
-          <p:nvPr/>
-        </p:nvSpPr>
-        <p:spPr>
-          <a:xfrm>
-            <a:off x="3474720" y="3191794"/>
+          <p:cNvPr id="51" name="Text 49"/>
+          <p:cNvSpPr txBox="1"/>
+          <p:nvPr/>
+        </p:nvSpPr>
+        <p:spPr>
+          <a:xfrm>
+            <a:off x="3520440" y="3191794"/>
             <a:ext cx="786384" cy="248502"/>
           </a:xfrm>
           <a:prstGeom prst="rect">
@@ -17080,13 +17353,13 @@
       </p:sp>
       <p:sp>
         <p:nvSpPr>
-          <p:cNvPr id="45" name="Text 43"/>
-          <p:cNvSpPr txBox="1"/>
-          <p:nvPr/>
-        </p:nvSpPr>
-        <p:spPr>
-          <a:xfrm>
-            <a:off x="4261104" y="3191794"/>
+          <p:cNvPr id="52" name="Text 50"/>
+          <p:cNvSpPr txBox="1"/>
+          <p:nvPr/>
+        </p:nvSpPr>
+        <p:spPr>
+          <a:xfrm>
+            <a:off x="4306824" y="3191794"/>
             <a:ext cx="932688" cy="248502"/>
           </a:xfrm>
           <a:prstGeom prst="rect">
@@ -17119,13 +17392,13 @@
       </p:sp>
       <p:sp>
         <p:nvSpPr>
-          <p:cNvPr id="46" name="Text 44"/>
-          <p:cNvSpPr txBox="1"/>
-          <p:nvPr/>
-        </p:nvSpPr>
-        <p:spPr>
-          <a:xfrm>
-            <a:off x="5193792" y="3191794"/>
+          <p:cNvPr id="53" name="Text 51"/>
+          <p:cNvSpPr txBox="1"/>
+          <p:nvPr/>
+        </p:nvSpPr>
+        <p:spPr>
+          <a:xfrm>
+            <a:off x="5239512" y="3191794"/>
             <a:ext cx="676656" cy="248502"/>
           </a:xfrm>
           <a:prstGeom prst="rect">
@@ -17158,14 +17431,53 @@
       </p:sp>
       <p:sp>
         <p:nvSpPr>
-          <p:cNvPr id="47" name="Text 45"/>
+          <p:cNvPr id="54" name="Text 52"/>
           <p:cNvSpPr txBox="1"/>
           <p:nvPr/>
         </p:nvSpPr>
         <p:spPr>
           <a:xfrm>
             <a:off x="658368" y="3440296"/>
-            <a:ext cx="1938528" cy="248502"/>
+            <a:ext cx="310896" cy="248502"/>
+          </a:xfrm>
+          <a:prstGeom prst="rect">
+            <a:avLst/>
+          </a:prstGeom>
+          <a:noFill/>
+          <a:ln/>
+        </p:spPr>
+        <p:txBody>
+          <a:bodyPr wrap="square" lIns="0" tIns="0" rIns="0" bIns="0" rtlCol="0" anchor="ctr"/>
+          <a:lstStyle/>
+          <a:p>
+            <a:pPr algn="r" indent="0" marL="0">
+              <a:buNone/>
+            </a:pPr>
+            <a:r>
+              <a:rPr lang="en-US" sz="1200" dirty="0">
+                <a:solidFill>
+                  <a:srgbClr val="9AA3AD"/>
+                </a:solidFill>
+                <a:latin typeface="Inter" pitchFamily="34" charset="0"/>
+                <a:ea typeface="Inter" pitchFamily="34" charset="-122"/>
+                <a:cs typeface="Inter" pitchFamily="34" charset="-120"/>
+              </a:rPr>
+              <a:t>8</a:t>
+            </a:r>
+            <a:endParaRPr lang="en-US" sz="1200" dirty="0"/>
+          </a:p>
+        </p:txBody>
+      </p:sp>
+      <p:sp>
+        <p:nvSpPr>
+          <p:cNvPr id="55" name="Text 53"/>
+          <p:cNvSpPr txBox="1"/>
+          <p:nvPr/>
+        </p:nvSpPr>
+        <p:spPr>
+          <a:xfrm>
+            <a:off x="1014984" y="3440296"/>
+            <a:ext cx="1783080" cy="248502"/>
           </a:xfrm>
           <a:prstGeom prst="rect">
             <a:avLst/>
@@ -17197,14 +17509,14 @@
       </p:sp>
       <p:sp>
         <p:nvSpPr>
-          <p:cNvPr id="48" name="Shape 46"/>
+          <p:cNvPr id="56" name="Shape 54"/>
           <p:cNvSpPr/>
           <p:nvPr/>
         </p:nvSpPr>
         <p:spPr>
           <a:xfrm>
-            <a:off x="2670048" y="3496208"/>
-            <a:ext cx="364470" cy="136676"/>
+            <a:off x="2871216" y="3496208"/>
+            <a:ext cx="288910" cy="136676"/>
           </a:xfrm>
           <a:prstGeom prst="rect">
             <a:avLst/>
@@ -17217,13 +17529,13 @@
       </p:sp>
       <p:sp>
         <p:nvSpPr>
-          <p:cNvPr id="49" name="Text 47"/>
-          <p:cNvSpPr txBox="1"/>
-          <p:nvPr/>
-        </p:nvSpPr>
-        <p:spPr>
-          <a:xfrm>
-            <a:off x="3474720" y="3440296"/>
+          <p:cNvPr id="57" name="Text 55"/>
+          <p:cNvSpPr txBox="1"/>
+          <p:nvPr/>
+        </p:nvSpPr>
+        <p:spPr>
+          <a:xfrm>
+            <a:off x="3520440" y="3440296"/>
             <a:ext cx="786384" cy="248502"/>
           </a:xfrm>
           <a:prstGeom prst="rect">
@@ -17256,13 +17568,13 @@
       </p:sp>
       <p:sp>
         <p:nvSpPr>
-          <p:cNvPr id="50" name="Text 48"/>
-          <p:cNvSpPr txBox="1"/>
-          <p:nvPr/>
-        </p:nvSpPr>
-        <p:spPr>
-          <a:xfrm>
-            <a:off x="4261104" y="3440296"/>
+          <p:cNvPr id="58" name="Text 56"/>
+          <p:cNvSpPr txBox="1"/>
+          <p:nvPr/>
+        </p:nvSpPr>
+        <p:spPr>
+          <a:xfrm>
+            <a:off x="4306824" y="3440296"/>
             <a:ext cx="932688" cy="248502"/>
           </a:xfrm>
           <a:prstGeom prst="rect">
@@ -17295,13 +17607,13 @@
       </p:sp>
       <p:sp>
         <p:nvSpPr>
-          <p:cNvPr id="51" name="Text 49"/>
-          <p:cNvSpPr txBox="1"/>
-          <p:nvPr/>
-        </p:nvSpPr>
-        <p:spPr>
-          <a:xfrm>
-            <a:off x="5193792" y="3440296"/>
+          <p:cNvPr id="59" name="Text 57"/>
+          <p:cNvSpPr txBox="1"/>
+          <p:nvPr/>
+        </p:nvSpPr>
+        <p:spPr>
+          <a:xfrm>
+            <a:off x="5239512" y="3440296"/>
             <a:ext cx="676656" cy="248502"/>
           </a:xfrm>
           <a:prstGeom prst="rect">
@@ -17334,14 +17646,53 @@
       </p:sp>
       <p:sp>
         <p:nvSpPr>
-          <p:cNvPr id="52" name="Text 50"/>
+          <p:cNvPr id="60" name="Text 58"/>
           <p:cNvSpPr txBox="1"/>
           <p:nvPr/>
         </p:nvSpPr>
         <p:spPr>
           <a:xfrm>
             <a:off x="658368" y="3688797"/>
-            <a:ext cx="1938528" cy="248502"/>
+            <a:ext cx="310896" cy="248502"/>
+          </a:xfrm>
+          <a:prstGeom prst="rect">
+            <a:avLst/>
+          </a:prstGeom>
+          <a:noFill/>
+          <a:ln/>
+        </p:spPr>
+        <p:txBody>
+          <a:bodyPr wrap="square" lIns="0" tIns="0" rIns="0" bIns="0" rtlCol="0" anchor="ctr"/>
+          <a:lstStyle/>
+          <a:p>
+            <a:pPr algn="r" indent="0" marL="0">
+              <a:buNone/>
+            </a:pPr>
+            <a:r>
+              <a:rPr lang="en-US" sz="1200" dirty="0">
+                <a:solidFill>
+                  <a:srgbClr val="9AA3AD"/>
+                </a:solidFill>
+                <a:latin typeface="Inter" pitchFamily="34" charset="0"/>
+                <a:ea typeface="Inter" pitchFamily="34" charset="-122"/>
+                <a:cs typeface="Inter" pitchFamily="34" charset="-120"/>
+              </a:rPr>
+              <a:t>9</a:t>
+            </a:r>
+            <a:endParaRPr lang="en-US" sz="1200" dirty="0"/>
+          </a:p>
+        </p:txBody>
+      </p:sp>
+      <p:sp>
+        <p:nvSpPr>
+          <p:cNvPr id="61" name="Text 59"/>
+          <p:cNvSpPr txBox="1"/>
+          <p:nvPr/>
+        </p:nvSpPr>
+        <p:spPr>
+          <a:xfrm>
+            <a:off x="1014984" y="3688797"/>
+            <a:ext cx="1783080" cy="248502"/>
           </a:xfrm>
           <a:prstGeom prst="rect">
             <a:avLst/>
@@ -17373,14 +17724,14 @@
       </p:sp>
       <p:sp>
         <p:nvSpPr>
-          <p:cNvPr id="53" name="Shape 51"/>
+          <p:cNvPr id="62" name="Shape 60"/>
           <p:cNvSpPr/>
           <p:nvPr/>
         </p:nvSpPr>
         <p:spPr>
           <a:xfrm>
-            <a:off x="2670048" y="3744710"/>
-            <a:ext cx="361005" cy="136676"/>
+            <a:off x="2871216" y="3744710"/>
+            <a:ext cx="286162" cy="136676"/>
           </a:xfrm>
           <a:prstGeom prst="rect">
             <a:avLst/>
@@ -17393,13 +17744,13 @@
       </p:sp>
       <p:sp>
         <p:nvSpPr>
-          <p:cNvPr id="54" name="Text 52"/>
-          <p:cNvSpPr txBox="1"/>
-          <p:nvPr/>
-        </p:nvSpPr>
-        <p:spPr>
-          <a:xfrm>
-            <a:off x="3474720" y="3688797"/>
+          <p:cNvPr id="63" name="Text 61"/>
+          <p:cNvSpPr txBox="1"/>
+          <p:nvPr/>
+        </p:nvSpPr>
+        <p:spPr>
+          <a:xfrm>
+            <a:off x="3520440" y="3688797"/>
             <a:ext cx="786384" cy="248502"/>
           </a:xfrm>
           <a:prstGeom prst="rect">
@@ -17432,13 +17783,13 @@
       </p:sp>
       <p:sp>
         <p:nvSpPr>
-          <p:cNvPr id="55" name="Text 53"/>
-          <p:cNvSpPr txBox="1"/>
-          <p:nvPr/>
-        </p:nvSpPr>
-        <p:spPr>
-          <a:xfrm>
-            <a:off x="4261104" y="3688797"/>
+          <p:cNvPr id="64" name="Text 62"/>
+          <p:cNvSpPr txBox="1"/>
+          <p:nvPr/>
+        </p:nvSpPr>
+        <p:spPr>
+          <a:xfrm>
+            <a:off x="4306824" y="3688797"/>
             <a:ext cx="932688" cy="248502"/>
           </a:xfrm>
           <a:prstGeom prst="rect">
@@ -17471,13 +17822,13 @@
       </p:sp>
       <p:sp>
         <p:nvSpPr>
-          <p:cNvPr id="56" name="Text 54"/>
-          <p:cNvSpPr txBox="1"/>
-          <p:nvPr/>
-        </p:nvSpPr>
-        <p:spPr>
-          <a:xfrm>
-            <a:off x="5193792" y="3688797"/>
+          <p:cNvPr id="65" name="Text 63"/>
+          <p:cNvSpPr txBox="1"/>
+          <p:nvPr/>
+        </p:nvSpPr>
+        <p:spPr>
+          <a:xfrm>
+            <a:off x="5239512" y="3688797"/>
             <a:ext cx="676656" cy="248502"/>
           </a:xfrm>
           <a:prstGeom prst="rect">
@@ -17510,14 +17861,53 @@
       </p:sp>
       <p:sp>
         <p:nvSpPr>
-          <p:cNvPr id="57" name="Text 55"/>
+          <p:cNvPr id="66" name="Text 64"/>
           <p:cNvSpPr txBox="1"/>
           <p:nvPr/>
         </p:nvSpPr>
         <p:spPr>
           <a:xfrm>
             <a:off x="658368" y="3937299"/>
-            <a:ext cx="1938528" cy="248502"/>
+            <a:ext cx="310896" cy="248502"/>
+          </a:xfrm>
+          <a:prstGeom prst="rect">
+            <a:avLst/>
+          </a:prstGeom>
+          <a:noFill/>
+          <a:ln/>
+        </p:spPr>
+        <p:txBody>
+          <a:bodyPr wrap="square" lIns="0" tIns="0" rIns="0" bIns="0" rtlCol="0" anchor="ctr"/>
+          <a:lstStyle/>
+          <a:p>
+            <a:pPr algn="r" indent="0" marL="0">
+              <a:buNone/>
+            </a:pPr>
+            <a:r>
+              <a:rPr lang="en-US" sz="1200" dirty="0">
+                <a:solidFill>
+                  <a:srgbClr val="9AA3AD"/>
+                </a:solidFill>
+                <a:latin typeface="Inter" pitchFamily="34" charset="0"/>
+                <a:ea typeface="Inter" pitchFamily="34" charset="-122"/>
+                <a:cs typeface="Inter" pitchFamily="34" charset="-120"/>
+              </a:rPr>
+              <a:t>10</a:t>
+            </a:r>
+            <a:endParaRPr lang="en-US" sz="1200" dirty="0"/>
+          </a:p>
+        </p:txBody>
+      </p:sp>
+      <p:sp>
+        <p:nvSpPr>
+          <p:cNvPr id="67" name="Text 65"/>
+          <p:cNvSpPr txBox="1"/>
+          <p:nvPr/>
+        </p:nvSpPr>
+        <p:spPr>
+          <a:xfrm>
+            <a:off x="1014984" y="3937299"/>
+            <a:ext cx="1783080" cy="248502"/>
           </a:xfrm>
           <a:prstGeom prst="rect">
             <a:avLst/>
@@ -17549,14 +17939,14 @@
       </p:sp>
       <p:sp>
         <p:nvSpPr>
-          <p:cNvPr id="58" name="Shape 56"/>
+          <p:cNvPr id="68" name="Shape 66"/>
           <p:cNvSpPr/>
           <p:nvPr/>
         </p:nvSpPr>
         <p:spPr>
           <a:xfrm>
-            <a:off x="2670048" y="3993212"/>
-            <a:ext cx="353265" cy="136676"/>
+            <a:off x="2871216" y="3993212"/>
+            <a:ext cx="280027" cy="136676"/>
           </a:xfrm>
           <a:prstGeom prst="rect">
             <a:avLst/>
@@ -17569,13 +17959,13 @@
       </p:sp>
       <p:sp>
         <p:nvSpPr>
-          <p:cNvPr id="59" name="Text 57"/>
-          <p:cNvSpPr txBox="1"/>
-          <p:nvPr/>
-        </p:nvSpPr>
-        <p:spPr>
-          <a:xfrm>
-            <a:off x="3474720" y="3937299"/>
+          <p:cNvPr id="69" name="Text 67"/>
+          <p:cNvSpPr txBox="1"/>
+          <p:nvPr/>
+        </p:nvSpPr>
+        <p:spPr>
+          <a:xfrm>
+            <a:off x="3520440" y="3937299"/>
             <a:ext cx="786384" cy="248502"/>
           </a:xfrm>
           <a:prstGeom prst="rect">
@@ -17608,13 +17998,13 @@
       </p:sp>
       <p:sp>
         <p:nvSpPr>
-          <p:cNvPr id="60" name="Text 58"/>
-          <p:cNvSpPr txBox="1"/>
-          <p:nvPr/>
-        </p:nvSpPr>
-        <p:spPr>
-          <a:xfrm>
-            <a:off x="4261104" y="3937299"/>
+          <p:cNvPr id="70" name="Text 68"/>
+          <p:cNvSpPr txBox="1"/>
+          <p:nvPr/>
+        </p:nvSpPr>
+        <p:spPr>
+          <a:xfrm>
+            <a:off x="4306824" y="3937299"/>
             <a:ext cx="932688" cy="248502"/>
           </a:xfrm>
           <a:prstGeom prst="rect">
@@ -17647,13 +18037,13 @@
       </p:sp>
       <p:sp>
         <p:nvSpPr>
-          <p:cNvPr id="61" name="Text 59"/>
-          <p:cNvSpPr txBox="1"/>
-          <p:nvPr/>
-        </p:nvSpPr>
-        <p:spPr>
-          <a:xfrm>
-            <a:off x="5193792" y="3937299"/>
+          <p:cNvPr id="71" name="Text 69"/>
+          <p:cNvSpPr txBox="1"/>
+          <p:nvPr/>
+        </p:nvSpPr>
+        <p:spPr>
+          <a:xfrm>
+            <a:off x="5239512" y="3937299"/>
             <a:ext cx="676656" cy="248502"/>
           </a:xfrm>
           <a:prstGeom prst="rect">
@@ -17686,14 +18076,53 @@
       </p:sp>
       <p:sp>
         <p:nvSpPr>
-          <p:cNvPr id="62" name="Text 60"/>
+          <p:cNvPr id="72" name="Text 70"/>
           <p:cNvSpPr txBox="1"/>
           <p:nvPr/>
         </p:nvSpPr>
         <p:spPr>
           <a:xfrm>
             <a:off x="658368" y="4185800"/>
-            <a:ext cx="1938528" cy="248502"/>
+            <a:ext cx="310896" cy="248502"/>
+          </a:xfrm>
+          <a:prstGeom prst="rect">
+            <a:avLst/>
+          </a:prstGeom>
+          <a:noFill/>
+          <a:ln/>
+        </p:spPr>
+        <p:txBody>
+          <a:bodyPr wrap="square" lIns="0" tIns="0" rIns="0" bIns="0" rtlCol="0" anchor="ctr"/>
+          <a:lstStyle/>
+          <a:p>
+            <a:pPr algn="r" indent="0" marL="0">
+              <a:buNone/>
+            </a:pPr>
+            <a:r>
+              <a:rPr lang="en-US" sz="1200" dirty="0">
+                <a:solidFill>
+                  <a:srgbClr val="9AA3AD"/>
+                </a:solidFill>
+                <a:latin typeface="Inter" pitchFamily="34" charset="0"/>
+                <a:ea typeface="Inter" pitchFamily="34" charset="-122"/>
+                <a:cs typeface="Inter" pitchFamily="34" charset="-120"/>
+              </a:rPr>
+              <a:t>11</a:t>
+            </a:r>
+            <a:endParaRPr lang="en-US" sz="1200" dirty="0"/>
+          </a:p>
+        </p:txBody>
+      </p:sp>
+      <p:sp>
+        <p:nvSpPr>
+          <p:cNvPr id="73" name="Text 71"/>
+          <p:cNvSpPr txBox="1"/>
+          <p:nvPr/>
+        </p:nvSpPr>
+        <p:spPr>
+          <a:xfrm>
+            <a:off x="1014984" y="4185800"/>
+            <a:ext cx="1783080" cy="248502"/>
           </a:xfrm>
           <a:prstGeom prst="rect">
             <a:avLst/>
@@ -17725,14 +18154,14 @@
       </p:sp>
       <p:sp>
         <p:nvSpPr>
-          <p:cNvPr id="63" name="Shape 61"/>
+          <p:cNvPr id="74" name="Shape 72"/>
           <p:cNvSpPr/>
           <p:nvPr/>
         </p:nvSpPr>
         <p:spPr>
           <a:xfrm>
-            <a:off x="2670048" y="4241713"/>
-            <a:ext cx="333730" cy="136676"/>
+            <a:off x="2871216" y="4241713"/>
+            <a:ext cx="264542" cy="136676"/>
           </a:xfrm>
           <a:prstGeom prst="rect">
             <a:avLst/>
@@ -17745,13 +18174,13 @@
       </p:sp>
       <p:sp>
         <p:nvSpPr>
-          <p:cNvPr id="64" name="Text 62"/>
-          <p:cNvSpPr txBox="1"/>
-          <p:nvPr/>
-        </p:nvSpPr>
-        <p:spPr>
-          <a:xfrm>
-            <a:off x="3474720" y="4185800"/>
+          <p:cNvPr id="75" name="Text 73"/>
+          <p:cNvSpPr txBox="1"/>
+          <p:nvPr/>
+        </p:nvSpPr>
+        <p:spPr>
+          <a:xfrm>
+            <a:off x="3520440" y="4185800"/>
             <a:ext cx="786384" cy="248502"/>
           </a:xfrm>
           <a:prstGeom prst="rect">
@@ -17784,13 +18213,13 @@
       </p:sp>
       <p:sp>
         <p:nvSpPr>
-          <p:cNvPr id="65" name="Text 63"/>
-          <p:cNvSpPr txBox="1"/>
-          <p:nvPr/>
-        </p:nvSpPr>
-        <p:spPr>
-          <a:xfrm>
-            <a:off x="4261104" y="4185800"/>
+          <p:cNvPr id="76" name="Text 74"/>
+          <p:cNvSpPr txBox="1"/>
+          <p:nvPr/>
+        </p:nvSpPr>
+        <p:spPr>
+          <a:xfrm>
+            <a:off x="4306824" y="4185800"/>
             <a:ext cx="932688" cy="248502"/>
           </a:xfrm>
           <a:prstGeom prst="rect">
@@ -17823,13 +18252,13 @@
       </p:sp>
       <p:sp>
         <p:nvSpPr>
-          <p:cNvPr id="66" name="Text 64"/>
-          <p:cNvSpPr txBox="1"/>
-          <p:nvPr/>
-        </p:nvSpPr>
-        <p:spPr>
-          <a:xfrm>
-            <a:off x="5193792" y="4185800"/>
+          <p:cNvPr id="77" name="Text 75"/>
+          <p:cNvSpPr txBox="1"/>
+          <p:nvPr/>
+        </p:nvSpPr>
+        <p:spPr>
+          <a:xfrm>
+            <a:off x="5239512" y="4185800"/>
             <a:ext cx="676656" cy="248502"/>
           </a:xfrm>
           <a:prstGeom prst="rect">
@@ -17862,14 +18291,53 @@
       </p:sp>
       <p:sp>
         <p:nvSpPr>
-          <p:cNvPr id="67" name="Text 65"/>
+          <p:cNvPr id="78" name="Text 76"/>
           <p:cNvSpPr txBox="1"/>
           <p:nvPr/>
         </p:nvSpPr>
         <p:spPr>
           <a:xfrm>
             <a:off x="658368" y="4434302"/>
-            <a:ext cx="1938528" cy="248502"/>
+            <a:ext cx="310896" cy="248502"/>
+          </a:xfrm>
+          <a:prstGeom prst="rect">
+            <a:avLst/>
+          </a:prstGeom>
+          <a:noFill/>
+          <a:ln/>
+        </p:spPr>
+        <p:txBody>
+          <a:bodyPr wrap="square" lIns="0" tIns="0" rIns="0" bIns="0" rtlCol="0" anchor="ctr"/>
+          <a:lstStyle/>
+          <a:p>
+            <a:pPr algn="r" indent="0" marL="0">
+              <a:buNone/>
+            </a:pPr>
+            <a:r>
+              <a:rPr lang="en-US" sz="1200" dirty="0">
+                <a:solidFill>
+                  <a:srgbClr val="9AA3AD"/>
+                </a:solidFill>
+                <a:latin typeface="Inter" pitchFamily="34" charset="0"/>
+                <a:ea typeface="Inter" pitchFamily="34" charset="-122"/>
+                <a:cs typeface="Inter" pitchFamily="34" charset="-120"/>
+              </a:rPr>
+              <a:t>12</a:t>
+            </a:r>
+            <a:endParaRPr lang="en-US" sz="1200" dirty="0"/>
+          </a:p>
+        </p:txBody>
+      </p:sp>
+      <p:sp>
+        <p:nvSpPr>
+          <p:cNvPr id="79" name="Text 77"/>
+          <p:cNvSpPr txBox="1"/>
+          <p:nvPr/>
+        </p:nvSpPr>
+        <p:spPr>
+          <a:xfrm>
+            <a:off x="1014984" y="4434302"/>
+            <a:ext cx="1783080" cy="248502"/>
           </a:xfrm>
           <a:prstGeom prst="rect">
             <a:avLst/>
@@ -17901,14 +18369,14 @@
       </p:sp>
       <p:sp>
         <p:nvSpPr>
-          <p:cNvPr id="68" name="Shape 66"/>
+          <p:cNvPr id="80" name="Shape 78"/>
           <p:cNvSpPr/>
           <p:nvPr/>
         </p:nvSpPr>
         <p:spPr>
           <a:xfrm>
-            <a:off x="2670048" y="4490215"/>
-            <a:ext cx="300431" cy="136676"/>
+            <a:off x="2871216" y="4490215"/>
+            <a:ext cx="238147" cy="136676"/>
           </a:xfrm>
           <a:prstGeom prst="rect">
             <a:avLst/>
@@ -17921,13 +18389,13 @@
       </p:sp>
       <p:sp>
         <p:nvSpPr>
-          <p:cNvPr id="69" name="Text 67"/>
-          <p:cNvSpPr txBox="1"/>
-          <p:nvPr/>
-        </p:nvSpPr>
-        <p:spPr>
-          <a:xfrm>
-            <a:off x="3474720" y="4434302"/>
+          <p:cNvPr id="81" name="Text 79"/>
+          <p:cNvSpPr txBox="1"/>
+          <p:nvPr/>
+        </p:nvSpPr>
+        <p:spPr>
+          <a:xfrm>
+            <a:off x="3520440" y="4434302"/>
             <a:ext cx="786384" cy="248502"/>
           </a:xfrm>
           <a:prstGeom prst="rect">
@@ -17960,13 +18428,13 @@
       </p:sp>
       <p:sp>
         <p:nvSpPr>
-          <p:cNvPr id="70" name="Text 68"/>
-          <p:cNvSpPr txBox="1"/>
-          <p:nvPr/>
-        </p:nvSpPr>
-        <p:spPr>
-          <a:xfrm>
-            <a:off x="4261104" y="4434302"/>
+          <p:cNvPr id="82" name="Text 80"/>
+          <p:cNvSpPr txBox="1"/>
+          <p:nvPr/>
+        </p:nvSpPr>
+        <p:spPr>
+          <a:xfrm>
+            <a:off x="4306824" y="4434302"/>
             <a:ext cx="932688" cy="248502"/>
           </a:xfrm>
           <a:prstGeom prst="rect">
@@ -17999,13 +18467,13 @@
       </p:sp>
       <p:sp>
         <p:nvSpPr>
-          <p:cNvPr id="71" name="Text 69"/>
-          <p:cNvSpPr txBox="1"/>
-          <p:nvPr/>
-        </p:nvSpPr>
-        <p:spPr>
-          <a:xfrm>
-            <a:off x="5193792" y="4434302"/>
+          <p:cNvPr id="83" name="Text 81"/>
+          <p:cNvSpPr txBox="1"/>
+          <p:nvPr/>
+        </p:nvSpPr>
+        <p:spPr>
+          <a:xfrm>
+            <a:off x="5239512" y="4434302"/>
             <a:ext cx="676656" cy="248502"/>
           </a:xfrm>
           <a:prstGeom prst="rect">
@@ -18038,14 +18506,53 @@
       </p:sp>
       <p:sp>
         <p:nvSpPr>
-          <p:cNvPr id="72" name="Text 70"/>
+          <p:cNvPr id="84" name="Text 82"/>
           <p:cNvSpPr txBox="1"/>
           <p:nvPr/>
         </p:nvSpPr>
         <p:spPr>
           <a:xfrm>
             <a:off x="658368" y="4682804"/>
-            <a:ext cx="1938528" cy="248502"/>
+            <a:ext cx="310896" cy="248502"/>
+          </a:xfrm>
+          <a:prstGeom prst="rect">
+            <a:avLst/>
+          </a:prstGeom>
+          <a:noFill/>
+          <a:ln/>
+        </p:spPr>
+        <p:txBody>
+          <a:bodyPr wrap="square" lIns="0" tIns="0" rIns="0" bIns="0" rtlCol="0" anchor="ctr"/>
+          <a:lstStyle/>
+          <a:p>
+            <a:pPr algn="r" indent="0" marL="0">
+              <a:buNone/>
+            </a:pPr>
+            <a:r>
+              <a:rPr lang="en-US" sz="1200" dirty="0">
+                <a:solidFill>
+                  <a:srgbClr val="9AA3AD"/>
+                </a:solidFill>
+                <a:latin typeface="Inter" pitchFamily="34" charset="0"/>
+                <a:ea typeface="Inter" pitchFamily="34" charset="-122"/>
+                <a:cs typeface="Inter" pitchFamily="34" charset="-120"/>
+              </a:rPr>
+              <a:t>13</a:t>
+            </a:r>
+            <a:endParaRPr lang="en-US" sz="1200" dirty="0"/>
+          </a:p>
+        </p:txBody>
+      </p:sp>
+      <p:sp>
+        <p:nvSpPr>
+          <p:cNvPr id="85" name="Text 83"/>
+          <p:cNvSpPr txBox="1"/>
+          <p:nvPr/>
+        </p:nvSpPr>
+        <p:spPr>
+          <a:xfrm>
+            <a:off x="1014984" y="4682804"/>
+            <a:ext cx="1783080" cy="248502"/>
           </a:xfrm>
           <a:prstGeom prst="rect">
             <a:avLst/>
@@ -18077,14 +18584,14 @@
       </p:sp>
       <p:sp>
         <p:nvSpPr>
-          <p:cNvPr id="73" name="Shape 71"/>
+          <p:cNvPr id="86" name="Shape 84"/>
           <p:cNvSpPr/>
           <p:nvPr/>
         </p:nvSpPr>
         <p:spPr>
           <a:xfrm>
-            <a:off x="2670048" y="4738717"/>
-            <a:ext cx="294453" cy="136676"/>
+            <a:off x="2871216" y="4738717"/>
+            <a:ext cx="233408" cy="136676"/>
           </a:xfrm>
           <a:prstGeom prst="rect">
             <a:avLst/>
@@ -18097,13 +18604,13 @@
       </p:sp>
       <p:sp>
         <p:nvSpPr>
-          <p:cNvPr id="74" name="Text 72"/>
-          <p:cNvSpPr txBox="1"/>
-          <p:nvPr/>
-        </p:nvSpPr>
-        <p:spPr>
-          <a:xfrm>
-            <a:off x="3474720" y="4682804"/>
+          <p:cNvPr id="87" name="Text 85"/>
+          <p:cNvSpPr txBox="1"/>
+          <p:nvPr/>
+        </p:nvSpPr>
+        <p:spPr>
+          <a:xfrm>
+            <a:off x="3520440" y="4682804"/>
             <a:ext cx="786384" cy="248502"/>
           </a:xfrm>
           <a:prstGeom prst="rect">
@@ -18136,13 +18643,13 @@
       </p:sp>
       <p:sp>
         <p:nvSpPr>
-          <p:cNvPr id="75" name="Text 73"/>
-          <p:cNvSpPr txBox="1"/>
-          <p:nvPr/>
-        </p:nvSpPr>
-        <p:spPr>
-          <a:xfrm>
-            <a:off x="4261104" y="4682804"/>
+          <p:cNvPr id="88" name="Text 86"/>
+          <p:cNvSpPr txBox="1"/>
+          <p:nvPr/>
+        </p:nvSpPr>
+        <p:spPr>
+          <a:xfrm>
+            <a:off x="4306824" y="4682804"/>
             <a:ext cx="932688" cy="248502"/>
           </a:xfrm>
           <a:prstGeom prst="rect">
@@ -18175,13 +18682,13 @@
       </p:sp>
       <p:sp>
         <p:nvSpPr>
-          <p:cNvPr id="76" name="Text 74"/>
-          <p:cNvSpPr txBox="1"/>
-          <p:nvPr/>
-        </p:nvSpPr>
-        <p:spPr>
-          <a:xfrm>
-            <a:off x="5193792" y="4682804"/>
+          <p:cNvPr id="89" name="Text 87"/>
+          <p:cNvSpPr txBox="1"/>
+          <p:nvPr/>
+        </p:nvSpPr>
+        <p:spPr>
+          <a:xfrm>
+            <a:off x="5239512" y="4682804"/>
             <a:ext cx="676656" cy="248502"/>
           </a:xfrm>
           <a:prstGeom prst="rect">
@@ -18214,14 +18721,53 @@
       </p:sp>
       <p:sp>
         <p:nvSpPr>
-          <p:cNvPr id="77" name="Text 75"/>
+          <p:cNvPr id="90" name="Text 88"/>
           <p:cNvSpPr txBox="1"/>
           <p:nvPr/>
         </p:nvSpPr>
         <p:spPr>
           <a:xfrm>
             <a:off x="658368" y="4931305"/>
-            <a:ext cx="1938528" cy="248502"/>
+            <a:ext cx="310896" cy="248502"/>
+          </a:xfrm>
+          <a:prstGeom prst="rect">
+            <a:avLst/>
+          </a:prstGeom>
+          <a:noFill/>
+          <a:ln/>
+        </p:spPr>
+        <p:txBody>
+          <a:bodyPr wrap="square" lIns="0" tIns="0" rIns="0" bIns="0" rtlCol="0" anchor="ctr"/>
+          <a:lstStyle/>
+          <a:p>
+            <a:pPr algn="r" indent="0" marL="0">
+              <a:buNone/>
+            </a:pPr>
+            <a:r>
+              <a:rPr lang="en-US" sz="1200" dirty="0">
+                <a:solidFill>
+                  <a:srgbClr val="9AA3AD"/>
+                </a:solidFill>
+                <a:latin typeface="Inter" pitchFamily="34" charset="0"/>
+                <a:ea typeface="Inter" pitchFamily="34" charset="-122"/>
+                <a:cs typeface="Inter" pitchFamily="34" charset="-120"/>
+              </a:rPr>
+              <a:t>14</a:t>
+            </a:r>
+            <a:endParaRPr lang="en-US" sz="1200" dirty="0"/>
+          </a:p>
+        </p:txBody>
+      </p:sp>
+      <p:sp>
+        <p:nvSpPr>
+          <p:cNvPr id="91" name="Text 89"/>
+          <p:cNvSpPr txBox="1"/>
+          <p:nvPr/>
+        </p:nvSpPr>
+        <p:spPr>
+          <a:xfrm>
+            <a:off x="1014984" y="4931305"/>
+            <a:ext cx="1783080" cy="248502"/>
           </a:xfrm>
           <a:prstGeom prst="rect">
             <a:avLst/>
@@ -18253,14 +18799,14 @@
       </p:sp>
       <p:sp>
         <p:nvSpPr>
-          <p:cNvPr id="78" name="Shape 76"/>
+          <p:cNvPr id="92" name="Shape 90"/>
           <p:cNvSpPr/>
           <p:nvPr/>
         </p:nvSpPr>
         <p:spPr>
           <a:xfrm>
-            <a:off x="2670048" y="4987218"/>
-            <a:ext cx="273826" cy="136676"/>
+            <a:off x="2871216" y="4987218"/>
+            <a:ext cx="217057" cy="136676"/>
           </a:xfrm>
           <a:prstGeom prst="rect">
             <a:avLst/>
@@ -18273,13 +18819,13 @@
       </p:sp>
       <p:sp>
         <p:nvSpPr>
-          <p:cNvPr id="79" name="Text 77"/>
-          <p:cNvSpPr txBox="1"/>
-          <p:nvPr/>
-        </p:nvSpPr>
-        <p:spPr>
-          <a:xfrm>
-            <a:off x="3474720" y="4931305"/>
+          <p:cNvPr id="93" name="Text 91"/>
+          <p:cNvSpPr txBox="1"/>
+          <p:nvPr/>
+        </p:nvSpPr>
+        <p:spPr>
+          <a:xfrm>
+            <a:off x="3520440" y="4931305"/>
             <a:ext cx="786384" cy="248502"/>
           </a:xfrm>
           <a:prstGeom prst="rect">
@@ -18312,13 +18858,13 @@
       </p:sp>
       <p:sp>
         <p:nvSpPr>
-          <p:cNvPr id="80" name="Text 78"/>
-          <p:cNvSpPr txBox="1"/>
-          <p:nvPr/>
-        </p:nvSpPr>
-        <p:spPr>
-          <a:xfrm>
-            <a:off x="4261104" y="4931305"/>
+          <p:cNvPr id="94" name="Text 92"/>
+          <p:cNvSpPr txBox="1"/>
+          <p:nvPr/>
+        </p:nvSpPr>
+        <p:spPr>
+          <a:xfrm>
+            <a:off x="4306824" y="4931305"/>
             <a:ext cx="932688" cy="248502"/>
           </a:xfrm>
           <a:prstGeom prst="rect">
@@ -18351,13 +18897,13 @@
       </p:sp>
       <p:sp>
         <p:nvSpPr>
-          <p:cNvPr id="81" name="Text 79"/>
-          <p:cNvSpPr txBox="1"/>
-          <p:nvPr/>
-        </p:nvSpPr>
-        <p:spPr>
-          <a:xfrm>
-            <a:off x="5193792" y="4931305"/>
+          <p:cNvPr id="95" name="Text 93"/>
+          <p:cNvSpPr txBox="1"/>
+          <p:nvPr/>
+        </p:nvSpPr>
+        <p:spPr>
+          <a:xfrm>
+            <a:off x="5239512" y="4931305"/>
             <a:ext cx="676656" cy="248502"/>
           </a:xfrm>
           <a:prstGeom prst="rect">
@@ -18390,14 +18936,53 @@
       </p:sp>
       <p:sp>
         <p:nvSpPr>
-          <p:cNvPr id="82" name="Text 80"/>
+          <p:cNvPr id="96" name="Text 94"/>
           <p:cNvSpPr txBox="1"/>
           <p:nvPr/>
         </p:nvSpPr>
         <p:spPr>
           <a:xfrm>
             <a:off x="658368" y="5179807"/>
-            <a:ext cx="1938528" cy="248502"/>
+            <a:ext cx="310896" cy="248502"/>
+          </a:xfrm>
+          <a:prstGeom prst="rect">
+            <a:avLst/>
+          </a:prstGeom>
+          <a:noFill/>
+          <a:ln/>
+        </p:spPr>
+        <p:txBody>
+          <a:bodyPr wrap="square" lIns="0" tIns="0" rIns="0" bIns="0" rtlCol="0" anchor="ctr"/>
+          <a:lstStyle/>
+          <a:p>
+            <a:pPr algn="r" indent="0" marL="0">
+              <a:buNone/>
+            </a:pPr>
+            <a:r>
+              <a:rPr lang="en-US" sz="1200" dirty="0">
+                <a:solidFill>
+                  <a:srgbClr val="9AA3AD"/>
+                </a:solidFill>
+                <a:latin typeface="Inter" pitchFamily="34" charset="0"/>
+                <a:ea typeface="Inter" pitchFamily="34" charset="-122"/>
+                <a:cs typeface="Inter" pitchFamily="34" charset="-120"/>
+              </a:rPr>
+              <a:t>15</a:t>
+            </a:r>
+            <a:endParaRPr lang="en-US" sz="1200" dirty="0"/>
+          </a:p>
+        </p:txBody>
+      </p:sp>
+      <p:sp>
+        <p:nvSpPr>
+          <p:cNvPr id="97" name="Text 95"/>
+          <p:cNvSpPr txBox="1"/>
+          <p:nvPr/>
+        </p:nvSpPr>
+        <p:spPr>
+          <a:xfrm>
+            <a:off x="1014984" y="5179807"/>
+            <a:ext cx="1783080" cy="248502"/>
           </a:xfrm>
           <a:prstGeom prst="rect">
             <a:avLst/>
@@ -18429,14 +19014,14 @@
       </p:sp>
       <p:sp>
         <p:nvSpPr>
-          <p:cNvPr id="83" name="Shape 81"/>
+          <p:cNvPr id="98" name="Shape 96"/>
           <p:cNvSpPr/>
           <p:nvPr/>
         </p:nvSpPr>
         <p:spPr>
           <a:xfrm>
-            <a:off x="2670048" y="5235720"/>
-            <a:ext cx="227614" cy="136676"/>
+            <a:off x="2871216" y="5235720"/>
+            <a:ext cx="180426" cy="136676"/>
           </a:xfrm>
           <a:prstGeom prst="rect">
             <a:avLst/>
@@ -18449,13 +19034,13 @@
       </p:sp>
       <p:sp>
         <p:nvSpPr>
-          <p:cNvPr id="84" name="Text 82"/>
-          <p:cNvSpPr txBox="1"/>
-          <p:nvPr/>
-        </p:nvSpPr>
-        <p:spPr>
-          <a:xfrm>
-            <a:off x="3474720" y="5179807"/>
+          <p:cNvPr id="99" name="Text 97"/>
+          <p:cNvSpPr txBox="1"/>
+          <p:nvPr/>
+        </p:nvSpPr>
+        <p:spPr>
+          <a:xfrm>
+            <a:off x="3520440" y="5179807"/>
             <a:ext cx="786384" cy="248502"/>
           </a:xfrm>
           <a:prstGeom prst="rect">
@@ -18488,13 +19073,13 @@
       </p:sp>
       <p:sp>
         <p:nvSpPr>
-          <p:cNvPr id="85" name="Text 83"/>
-          <p:cNvSpPr txBox="1"/>
-          <p:nvPr/>
-        </p:nvSpPr>
-        <p:spPr>
-          <a:xfrm>
-            <a:off x="4261104" y="5179807"/>
+          <p:cNvPr id="100" name="Text 98"/>
+          <p:cNvSpPr txBox="1"/>
+          <p:nvPr/>
+        </p:nvSpPr>
+        <p:spPr>
+          <a:xfrm>
+            <a:off x="4306824" y="5179807"/>
             <a:ext cx="932688" cy="248502"/>
           </a:xfrm>
           <a:prstGeom prst="rect">
@@ -18527,13 +19112,13 @@
       </p:sp>
       <p:sp>
         <p:nvSpPr>
-          <p:cNvPr id="86" name="Text 84"/>
-          <p:cNvSpPr txBox="1"/>
-          <p:nvPr/>
-        </p:nvSpPr>
-        <p:spPr>
-          <a:xfrm>
-            <a:off x="5193792" y="5179807"/>
+          <p:cNvPr id="101" name="Text 99"/>
+          <p:cNvSpPr txBox="1"/>
+          <p:nvPr/>
+        </p:nvSpPr>
+        <p:spPr>
+          <a:xfrm>
+            <a:off x="5239512" y="5179807"/>
             <a:ext cx="676656" cy="248502"/>
           </a:xfrm>
           <a:prstGeom prst="rect">
@@ -18566,14 +19151,53 @@
       </p:sp>
       <p:sp>
         <p:nvSpPr>
-          <p:cNvPr id="87" name="Text 85"/>
+          <p:cNvPr id="102" name="Text 100"/>
           <p:cNvSpPr txBox="1"/>
           <p:nvPr/>
         </p:nvSpPr>
         <p:spPr>
           <a:xfrm>
             <a:off x="658368" y="5428309"/>
-            <a:ext cx="1938528" cy="248502"/>
+            <a:ext cx="310896" cy="248502"/>
+          </a:xfrm>
+          <a:prstGeom prst="rect">
+            <a:avLst/>
+          </a:prstGeom>
+          <a:noFill/>
+          <a:ln/>
+        </p:spPr>
+        <p:txBody>
+          <a:bodyPr wrap="square" lIns="0" tIns="0" rIns="0" bIns="0" rtlCol="0" anchor="ctr"/>
+          <a:lstStyle/>
+          <a:p>
+            <a:pPr algn="r" indent="0" marL="0">
+              <a:buNone/>
+            </a:pPr>
+            <a:r>
+              <a:rPr lang="en-US" sz="1200" dirty="0">
+                <a:solidFill>
+                  <a:srgbClr val="9AA3AD"/>
+                </a:solidFill>
+                <a:latin typeface="Inter" pitchFamily="34" charset="0"/>
+                <a:ea typeface="Inter" pitchFamily="34" charset="-122"/>
+                <a:cs typeface="Inter" pitchFamily="34" charset="-120"/>
+              </a:rPr>
+              <a:t>16</a:t>
+            </a:r>
+            <a:endParaRPr lang="en-US" sz="1200" dirty="0"/>
+          </a:p>
+        </p:txBody>
+      </p:sp>
+      <p:sp>
+        <p:nvSpPr>
+          <p:cNvPr id="103" name="Text 101"/>
+          <p:cNvSpPr txBox="1"/>
+          <p:nvPr/>
+        </p:nvSpPr>
+        <p:spPr>
+          <a:xfrm>
+            <a:off x="1014984" y="5428309"/>
+            <a:ext cx="1783080" cy="248502"/>
           </a:xfrm>
           <a:prstGeom prst="rect">
             <a:avLst/>
@@ -18605,14 +19229,14 @@
       </p:sp>
       <p:sp>
         <p:nvSpPr>
-          <p:cNvPr id="88" name="Shape 86"/>
+          <p:cNvPr id="104" name="Shape 102"/>
           <p:cNvSpPr/>
           <p:nvPr/>
         </p:nvSpPr>
         <p:spPr>
           <a:xfrm>
-            <a:off x="2670048" y="5484222"/>
-            <a:ext cx="207650" cy="136676"/>
+            <a:off x="2871216" y="5484222"/>
+            <a:ext cx="164601" cy="136676"/>
           </a:xfrm>
           <a:prstGeom prst="rect">
             <a:avLst/>
@@ -18625,13 +19249,13 @@
       </p:sp>
       <p:sp>
         <p:nvSpPr>
-          <p:cNvPr id="89" name="Text 87"/>
-          <p:cNvSpPr txBox="1"/>
-          <p:nvPr/>
-        </p:nvSpPr>
-        <p:spPr>
-          <a:xfrm>
-            <a:off x="3474720" y="5428309"/>
+          <p:cNvPr id="105" name="Text 103"/>
+          <p:cNvSpPr txBox="1"/>
+          <p:nvPr/>
+        </p:nvSpPr>
+        <p:spPr>
+          <a:xfrm>
+            <a:off x="3520440" y="5428309"/>
             <a:ext cx="786384" cy="248502"/>
           </a:xfrm>
           <a:prstGeom prst="rect">
@@ -18664,13 +19288,13 @@
       </p:sp>
       <p:sp>
         <p:nvSpPr>
-          <p:cNvPr id="90" name="Text 88"/>
-          <p:cNvSpPr txBox="1"/>
-          <p:nvPr/>
-        </p:nvSpPr>
-        <p:spPr>
-          <a:xfrm>
-            <a:off x="4261104" y="5428309"/>
+          <p:cNvPr id="106" name="Text 104"/>
+          <p:cNvSpPr txBox="1"/>
+          <p:nvPr/>
+        </p:nvSpPr>
+        <p:spPr>
+          <a:xfrm>
+            <a:off x="4306824" y="5428309"/>
             <a:ext cx="932688" cy="248502"/>
           </a:xfrm>
           <a:prstGeom prst="rect">
@@ -18703,13 +19327,13 @@
       </p:sp>
       <p:sp>
         <p:nvSpPr>
-          <p:cNvPr id="91" name="Text 89"/>
-          <p:cNvSpPr txBox="1"/>
-          <p:nvPr/>
-        </p:nvSpPr>
-        <p:spPr>
-          <a:xfrm>
-            <a:off x="5193792" y="5428309"/>
+          <p:cNvPr id="107" name="Text 105"/>
+          <p:cNvSpPr txBox="1"/>
+          <p:nvPr/>
+        </p:nvSpPr>
+        <p:spPr>
+          <a:xfrm>
+            <a:off x="5239512" y="5428309"/>
             <a:ext cx="676656" cy="248502"/>
           </a:xfrm>
           <a:prstGeom prst="rect">
@@ -18742,14 +19366,53 @@
       </p:sp>
       <p:sp>
         <p:nvSpPr>
-          <p:cNvPr id="92" name="Text 90"/>
+          <p:cNvPr id="108" name="Text 106"/>
           <p:cNvSpPr txBox="1"/>
           <p:nvPr/>
         </p:nvSpPr>
         <p:spPr>
           <a:xfrm>
             <a:off x="658368" y="5676810"/>
-            <a:ext cx="1938528" cy="248502"/>
+            <a:ext cx="310896" cy="248502"/>
+          </a:xfrm>
+          <a:prstGeom prst="rect">
+            <a:avLst/>
+          </a:prstGeom>
+          <a:noFill/>
+          <a:ln/>
+        </p:spPr>
+        <p:txBody>
+          <a:bodyPr wrap="square" lIns="0" tIns="0" rIns="0" bIns="0" rtlCol="0" anchor="ctr"/>
+          <a:lstStyle/>
+          <a:p>
+            <a:pPr algn="r" indent="0" marL="0">
+              <a:buNone/>
+            </a:pPr>
+            <a:r>
+              <a:rPr lang="en-US" sz="1200" dirty="0">
+                <a:solidFill>
+                  <a:srgbClr val="9AA3AD"/>
+                </a:solidFill>
+                <a:latin typeface="Inter" pitchFamily="34" charset="0"/>
+                <a:ea typeface="Inter" pitchFamily="34" charset="-122"/>
+                <a:cs typeface="Inter" pitchFamily="34" charset="-120"/>
+              </a:rPr>
+              <a:t>17</a:t>
+            </a:r>
+            <a:endParaRPr lang="en-US" sz="1200" dirty="0"/>
+          </a:p>
+        </p:txBody>
+      </p:sp>
+      <p:sp>
+        <p:nvSpPr>
+          <p:cNvPr id="109" name="Text 107"/>
+          <p:cNvSpPr txBox="1"/>
+          <p:nvPr/>
+        </p:nvSpPr>
+        <p:spPr>
+          <a:xfrm>
+            <a:off x="1014984" y="5676810"/>
+            <a:ext cx="1783080" cy="248502"/>
           </a:xfrm>
           <a:prstGeom prst="rect">
             <a:avLst/>
@@ -18781,14 +19444,14 @@
       </p:sp>
       <p:sp>
         <p:nvSpPr>
-          <p:cNvPr id="93" name="Shape 91"/>
+          <p:cNvPr id="110" name="Shape 108"/>
           <p:cNvSpPr/>
           <p:nvPr/>
         </p:nvSpPr>
         <p:spPr>
           <a:xfrm>
-            <a:off x="2670048" y="5732723"/>
-            <a:ext cx="201603" cy="136676"/>
+            <a:off x="2871216" y="5732723"/>
+            <a:ext cx="159807" cy="136676"/>
           </a:xfrm>
           <a:prstGeom prst="rect">
             <a:avLst/>
@@ -18801,13 +19464,13 @@
       </p:sp>
       <p:sp>
         <p:nvSpPr>
-          <p:cNvPr id="94" name="Text 92"/>
-          <p:cNvSpPr txBox="1"/>
-          <p:nvPr/>
-        </p:nvSpPr>
-        <p:spPr>
-          <a:xfrm>
-            <a:off x="3474720" y="5676810"/>
+          <p:cNvPr id="111" name="Text 109"/>
+          <p:cNvSpPr txBox="1"/>
+          <p:nvPr/>
+        </p:nvSpPr>
+        <p:spPr>
+          <a:xfrm>
+            <a:off x="3520440" y="5676810"/>
             <a:ext cx="786384" cy="248502"/>
           </a:xfrm>
           <a:prstGeom prst="rect">
@@ -18840,13 +19503,13 @@
       </p:sp>
       <p:sp>
         <p:nvSpPr>
-          <p:cNvPr id="95" name="Text 93"/>
-          <p:cNvSpPr txBox="1"/>
-          <p:nvPr/>
-        </p:nvSpPr>
-        <p:spPr>
-          <a:xfrm>
-            <a:off x="4261104" y="5676810"/>
+          <p:cNvPr id="112" name="Text 110"/>
+          <p:cNvSpPr txBox="1"/>
+          <p:nvPr/>
+        </p:nvSpPr>
+        <p:spPr>
+          <a:xfrm>
+            <a:off x="4306824" y="5676810"/>
             <a:ext cx="932688" cy="248502"/>
           </a:xfrm>
           <a:prstGeom prst="rect">
@@ -18879,13 +19542,13 @@
       </p:sp>
       <p:sp>
         <p:nvSpPr>
-          <p:cNvPr id="96" name="Text 94"/>
-          <p:cNvSpPr txBox="1"/>
-          <p:nvPr/>
-        </p:nvSpPr>
-        <p:spPr>
-          <a:xfrm>
-            <a:off x="5193792" y="5676810"/>
+          <p:cNvPr id="113" name="Text 111"/>
+          <p:cNvSpPr txBox="1"/>
+          <p:nvPr/>
+        </p:nvSpPr>
+        <p:spPr>
+          <a:xfrm>
+            <a:off x="5239512" y="5676810"/>
             <a:ext cx="676656" cy="248502"/>
           </a:xfrm>
           <a:prstGeom prst="rect">
@@ -18918,14 +19581,53 @@
       </p:sp>
       <p:sp>
         <p:nvSpPr>
-          <p:cNvPr id="97" name="Text 95"/>
+          <p:cNvPr id="114" name="Text 112"/>
           <p:cNvSpPr txBox="1"/>
           <p:nvPr/>
         </p:nvSpPr>
         <p:spPr>
           <a:xfrm>
             <a:off x="6208776" y="1700784"/>
-            <a:ext cx="1938528" cy="248502"/>
+            <a:ext cx="310896" cy="248502"/>
+          </a:xfrm>
+          <a:prstGeom prst="rect">
+            <a:avLst/>
+          </a:prstGeom>
+          <a:noFill/>
+          <a:ln/>
+        </p:spPr>
+        <p:txBody>
+          <a:bodyPr wrap="square" lIns="0" tIns="0" rIns="0" bIns="0" rtlCol="0" anchor="ctr"/>
+          <a:lstStyle/>
+          <a:p>
+            <a:pPr algn="r" indent="0" marL="0">
+              <a:buNone/>
+            </a:pPr>
+            <a:r>
+              <a:rPr lang="en-US" sz="1200" dirty="0">
+                <a:solidFill>
+                  <a:srgbClr val="9AA3AD"/>
+                </a:solidFill>
+                <a:latin typeface="Inter" pitchFamily="34" charset="0"/>
+                <a:ea typeface="Inter" pitchFamily="34" charset="-122"/>
+                <a:cs typeface="Inter" pitchFamily="34" charset="-120"/>
+              </a:rPr>
+              <a:t>18</a:t>
+            </a:r>
+            <a:endParaRPr lang="en-US" sz="1200" dirty="0"/>
+          </a:p>
+        </p:txBody>
+      </p:sp>
+      <p:sp>
+        <p:nvSpPr>
+          <p:cNvPr id="115" name="Text 113"/>
+          <p:cNvSpPr txBox="1"/>
+          <p:nvPr/>
+        </p:nvSpPr>
+        <p:spPr>
+          <a:xfrm>
+            <a:off x="6565392" y="1700784"/>
+            <a:ext cx="1783080" cy="248502"/>
           </a:xfrm>
           <a:prstGeom prst="rect">
             <a:avLst/>
@@ -18957,14 +19659,14 @@
       </p:sp>
       <p:sp>
         <p:nvSpPr>
-          <p:cNvPr id="98" name="Shape 96"/>
+          <p:cNvPr id="116" name="Shape 114"/>
           <p:cNvSpPr/>
           <p:nvPr/>
         </p:nvSpPr>
         <p:spPr>
           <a:xfrm>
-            <a:off x="8220456" y="1756697"/>
-            <a:ext cx="187634" cy="136676"/>
+            <a:off x="8421624" y="1756697"/>
+            <a:ext cx="148734" cy="136676"/>
           </a:xfrm>
           <a:prstGeom prst="rect">
             <a:avLst/>
@@ -18977,13 +19679,13 @@
       </p:sp>
       <p:sp>
         <p:nvSpPr>
-          <p:cNvPr id="99" name="Text 97"/>
-          <p:cNvSpPr txBox="1"/>
-          <p:nvPr/>
-        </p:nvSpPr>
-        <p:spPr>
-          <a:xfrm>
-            <a:off x="9025128" y="1700784"/>
+          <p:cNvPr id="117" name="Text 115"/>
+          <p:cNvSpPr txBox="1"/>
+          <p:nvPr/>
+        </p:nvSpPr>
+        <p:spPr>
+          <a:xfrm>
+            <a:off x="9070848" y="1700784"/>
             <a:ext cx="786384" cy="248502"/>
           </a:xfrm>
           <a:prstGeom prst="rect">
@@ -19016,13 +19718,13 @@
       </p:sp>
       <p:sp>
         <p:nvSpPr>
-          <p:cNvPr id="100" name="Text 98"/>
-          <p:cNvSpPr txBox="1"/>
-          <p:nvPr/>
-        </p:nvSpPr>
-        <p:spPr>
-          <a:xfrm>
-            <a:off x="9811512" y="1700784"/>
+          <p:cNvPr id="118" name="Text 116"/>
+          <p:cNvSpPr txBox="1"/>
+          <p:nvPr/>
+        </p:nvSpPr>
+        <p:spPr>
+          <a:xfrm>
+            <a:off x="9857232" y="1700784"/>
             <a:ext cx="932688" cy="248502"/>
           </a:xfrm>
           <a:prstGeom prst="rect">
@@ -19055,13 +19757,13 @@
       </p:sp>
       <p:sp>
         <p:nvSpPr>
-          <p:cNvPr id="101" name="Text 99"/>
-          <p:cNvSpPr txBox="1"/>
-          <p:nvPr/>
-        </p:nvSpPr>
-        <p:spPr>
-          <a:xfrm>
-            <a:off x="10744200" y="1700784"/>
+          <p:cNvPr id="119" name="Text 117"/>
+          <p:cNvSpPr txBox="1"/>
+          <p:nvPr/>
+        </p:nvSpPr>
+        <p:spPr>
+          <a:xfrm>
+            <a:off x="10789920" y="1700784"/>
             <a:ext cx="676656" cy="248502"/>
           </a:xfrm>
           <a:prstGeom prst="rect">
@@ -19094,14 +19796,53 @@
       </p:sp>
       <p:sp>
         <p:nvSpPr>
-          <p:cNvPr id="102" name="Text 100"/>
+          <p:cNvPr id="120" name="Text 118"/>
           <p:cNvSpPr txBox="1"/>
           <p:nvPr/>
         </p:nvSpPr>
         <p:spPr>
           <a:xfrm>
             <a:off x="6208776" y="1949286"/>
-            <a:ext cx="1938528" cy="248502"/>
+            <a:ext cx="310896" cy="248502"/>
+          </a:xfrm>
+          <a:prstGeom prst="rect">
+            <a:avLst/>
+          </a:prstGeom>
+          <a:noFill/>
+          <a:ln/>
+        </p:spPr>
+        <p:txBody>
+          <a:bodyPr wrap="square" lIns="0" tIns="0" rIns="0" bIns="0" rtlCol="0" anchor="ctr"/>
+          <a:lstStyle/>
+          <a:p>
+            <a:pPr algn="r" indent="0" marL="0">
+              <a:buNone/>
+            </a:pPr>
+            <a:r>
+              <a:rPr lang="en-US" sz="1200" dirty="0">
+                <a:solidFill>
+                  <a:srgbClr val="9AA3AD"/>
+                </a:solidFill>
+                <a:latin typeface="Inter" pitchFamily="34" charset="0"/>
+                <a:ea typeface="Inter" pitchFamily="34" charset="-122"/>
+                <a:cs typeface="Inter" pitchFamily="34" charset="-120"/>
+              </a:rPr>
+              <a:t>19</a:t>
+            </a:r>
+            <a:endParaRPr lang="en-US" sz="1200" dirty="0"/>
+          </a:p>
+        </p:txBody>
+      </p:sp>
+      <p:sp>
+        <p:nvSpPr>
+          <p:cNvPr id="121" name="Text 119"/>
+          <p:cNvSpPr txBox="1"/>
+          <p:nvPr/>
+        </p:nvSpPr>
+        <p:spPr>
+          <a:xfrm>
+            <a:off x="6565392" y="1949286"/>
+            <a:ext cx="1783080" cy="248502"/>
           </a:xfrm>
           <a:prstGeom prst="rect">
             <a:avLst/>
@@ -19133,14 +19874,14 @@
       </p:sp>
       <p:sp>
         <p:nvSpPr>
-          <p:cNvPr id="103" name="Shape 101"/>
+          <p:cNvPr id="122" name="Shape 120"/>
           <p:cNvSpPr/>
           <p:nvPr/>
         </p:nvSpPr>
         <p:spPr>
           <a:xfrm>
-            <a:off x="8220456" y="2005199"/>
-            <a:ext cx="163154" cy="136676"/>
+            <a:off x="8421624" y="2005199"/>
+            <a:ext cx="129329" cy="136676"/>
           </a:xfrm>
           <a:prstGeom prst="rect">
             <a:avLst/>
@@ -19153,13 +19894,13 @@
       </p:sp>
       <p:sp>
         <p:nvSpPr>
-          <p:cNvPr id="104" name="Text 102"/>
-          <p:cNvSpPr txBox="1"/>
-          <p:nvPr/>
-        </p:nvSpPr>
-        <p:spPr>
-          <a:xfrm>
-            <a:off x="9025128" y="1949286"/>
+          <p:cNvPr id="123" name="Text 121"/>
+          <p:cNvSpPr txBox="1"/>
+          <p:nvPr/>
+        </p:nvSpPr>
+        <p:spPr>
+          <a:xfrm>
+            <a:off x="9070848" y="1949286"/>
             <a:ext cx="786384" cy="248502"/>
           </a:xfrm>
           <a:prstGeom prst="rect">
@@ -19192,13 +19933,13 @@
       </p:sp>
       <p:sp>
         <p:nvSpPr>
-          <p:cNvPr id="105" name="Text 103"/>
-          <p:cNvSpPr txBox="1"/>
-          <p:nvPr/>
-        </p:nvSpPr>
-        <p:spPr>
-          <a:xfrm>
-            <a:off x="9811512" y="1949286"/>
+          <p:cNvPr id="124" name="Text 122"/>
+          <p:cNvSpPr txBox="1"/>
+          <p:nvPr/>
+        </p:nvSpPr>
+        <p:spPr>
+          <a:xfrm>
+            <a:off x="9857232" y="1949286"/>
             <a:ext cx="932688" cy="248502"/>
           </a:xfrm>
           <a:prstGeom prst="rect">
@@ -19231,13 +19972,13 @@
       </p:sp>
       <p:sp>
         <p:nvSpPr>
-          <p:cNvPr id="106" name="Text 104"/>
-          <p:cNvSpPr txBox="1"/>
-          <p:nvPr/>
-        </p:nvSpPr>
-        <p:spPr>
-          <a:xfrm>
-            <a:off x="10744200" y="1949286"/>
+          <p:cNvPr id="125" name="Text 123"/>
+          <p:cNvSpPr txBox="1"/>
+          <p:nvPr/>
+        </p:nvSpPr>
+        <p:spPr>
+          <a:xfrm>
+            <a:off x="10789920" y="1949286"/>
             <a:ext cx="676656" cy="248502"/>
           </a:xfrm>
           <a:prstGeom prst="rect">
@@ -19270,14 +20011,53 @@
       </p:sp>
       <p:sp>
         <p:nvSpPr>
-          <p:cNvPr id="107" name="Text 105"/>
+          <p:cNvPr id="126" name="Text 124"/>
           <p:cNvSpPr txBox="1"/>
           <p:nvPr/>
         </p:nvSpPr>
         <p:spPr>
           <a:xfrm>
             <a:off x="6208776" y="2197787"/>
-            <a:ext cx="1938528" cy="248502"/>
+            <a:ext cx="310896" cy="248502"/>
+          </a:xfrm>
+          <a:prstGeom prst="rect">
+            <a:avLst/>
+          </a:prstGeom>
+          <a:noFill/>
+          <a:ln/>
+        </p:spPr>
+        <p:txBody>
+          <a:bodyPr wrap="square" lIns="0" tIns="0" rIns="0" bIns="0" rtlCol="0" anchor="ctr"/>
+          <a:lstStyle/>
+          <a:p>
+            <a:pPr algn="r" indent="0" marL="0">
+              <a:buNone/>
+            </a:pPr>
+            <a:r>
+              <a:rPr lang="en-US" sz="1200" dirty="0">
+                <a:solidFill>
+                  <a:srgbClr val="9AA3AD"/>
+                </a:solidFill>
+                <a:latin typeface="Inter" pitchFamily="34" charset="0"/>
+                <a:ea typeface="Inter" pitchFamily="34" charset="-122"/>
+                <a:cs typeface="Inter" pitchFamily="34" charset="-120"/>
+              </a:rPr>
+              <a:t>20</a:t>
+            </a:r>
+            <a:endParaRPr lang="en-US" sz="1200" dirty="0"/>
+          </a:p>
+        </p:txBody>
+      </p:sp>
+      <p:sp>
+        <p:nvSpPr>
+          <p:cNvPr id="127" name="Text 125"/>
+          <p:cNvSpPr txBox="1"/>
+          <p:nvPr/>
+        </p:nvSpPr>
+        <p:spPr>
+          <a:xfrm>
+            <a:off x="6565392" y="2197787"/>
+            <a:ext cx="1783080" cy="248502"/>
           </a:xfrm>
           <a:prstGeom prst="rect">
             <a:avLst/>
@@ -19309,14 +20089,14 @@
       </p:sp>
       <p:sp>
         <p:nvSpPr>
-          <p:cNvPr id="108" name="Shape 106"/>
+          <p:cNvPr id="128" name="Shape 126"/>
           <p:cNvSpPr/>
           <p:nvPr/>
         </p:nvSpPr>
         <p:spPr>
           <a:xfrm>
-            <a:off x="8220456" y="2253700"/>
-            <a:ext cx="150261" cy="136676"/>
+            <a:off x="8421624" y="2253700"/>
+            <a:ext cx="119109" cy="136676"/>
           </a:xfrm>
           <a:prstGeom prst="rect">
             <a:avLst/>
@@ -19329,13 +20109,13 @@
       </p:sp>
       <p:sp>
         <p:nvSpPr>
-          <p:cNvPr id="109" name="Text 107"/>
-          <p:cNvSpPr txBox="1"/>
-          <p:nvPr/>
-        </p:nvSpPr>
-        <p:spPr>
-          <a:xfrm>
-            <a:off x="9025128" y="2197787"/>
+          <p:cNvPr id="129" name="Text 127"/>
+          <p:cNvSpPr txBox="1"/>
+          <p:nvPr/>
+        </p:nvSpPr>
+        <p:spPr>
+          <a:xfrm>
+            <a:off x="9070848" y="2197787"/>
             <a:ext cx="786384" cy="248502"/>
           </a:xfrm>
           <a:prstGeom prst="rect">
@@ -19368,13 +20148,13 @@
       </p:sp>
       <p:sp>
         <p:nvSpPr>
-          <p:cNvPr id="110" name="Text 108"/>
-          <p:cNvSpPr txBox="1"/>
-          <p:nvPr/>
-        </p:nvSpPr>
-        <p:spPr>
-          <a:xfrm>
-            <a:off x="9811512" y="2197787"/>
+          <p:cNvPr id="130" name="Text 128"/>
+          <p:cNvSpPr txBox="1"/>
+          <p:nvPr/>
+        </p:nvSpPr>
+        <p:spPr>
+          <a:xfrm>
+            <a:off x="9857232" y="2197787"/>
             <a:ext cx="932688" cy="248502"/>
           </a:xfrm>
           <a:prstGeom prst="rect">
@@ -19407,13 +20187,13 @@
       </p:sp>
       <p:sp>
         <p:nvSpPr>
-          <p:cNvPr id="111" name="Text 109"/>
-          <p:cNvSpPr txBox="1"/>
-          <p:nvPr/>
-        </p:nvSpPr>
-        <p:spPr>
-          <a:xfrm>
-            <a:off x="10744200" y="2197787"/>
+          <p:cNvPr id="131" name="Text 129"/>
+          <p:cNvSpPr txBox="1"/>
+          <p:nvPr/>
+        </p:nvSpPr>
+        <p:spPr>
+          <a:xfrm>
+            <a:off x="10789920" y="2197787"/>
             <a:ext cx="676656" cy="248502"/>
           </a:xfrm>
           <a:prstGeom prst="rect">
@@ -19446,14 +20226,53 @@
       </p:sp>
       <p:sp>
         <p:nvSpPr>
-          <p:cNvPr id="112" name="Text 110"/>
+          <p:cNvPr id="132" name="Text 130"/>
           <p:cNvSpPr txBox="1"/>
           <p:nvPr/>
         </p:nvSpPr>
         <p:spPr>
           <a:xfrm>
             <a:off x="6208776" y="2446289"/>
-            <a:ext cx="1938528" cy="248502"/>
+            <a:ext cx="310896" cy="248502"/>
+          </a:xfrm>
+          <a:prstGeom prst="rect">
+            <a:avLst/>
+          </a:prstGeom>
+          <a:noFill/>
+          <a:ln/>
+        </p:spPr>
+        <p:txBody>
+          <a:bodyPr wrap="square" lIns="0" tIns="0" rIns="0" bIns="0" rtlCol="0" anchor="ctr"/>
+          <a:lstStyle/>
+          <a:p>
+            <a:pPr algn="r" indent="0" marL="0">
+              <a:buNone/>
+            </a:pPr>
+            <a:r>
+              <a:rPr lang="en-US" sz="1200" dirty="0">
+                <a:solidFill>
+                  <a:srgbClr val="9AA3AD"/>
+                </a:solidFill>
+                <a:latin typeface="Inter" pitchFamily="34" charset="0"/>
+                <a:ea typeface="Inter" pitchFamily="34" charset="-122"/>
+                <a:cs typeface="Inter" pitchFamily="34" charset="-120"/>
+              </a:rPr>
+              <a:t>21</a:t>
+            </a:r>
+            <a:endParaRPr lang="en-US" sz="1200" dirty="0"/>
+          </a:p>
+        </p:txBody>
+      </p:sp>
+      <p:sp>
+        <p:nvSpPr>
+          <p:cNvPr id="133" name="Text 131"/>
+          <p:cNvSpPr txBox="1"/>
+          <p:nvPr/>
+        </p:nvSpPr>
+        <p:spPr>
+          <a:xfrm>
+            <a:off x="6565392" y="2446289"/>
+            <a:ext cx="1783080" cy="248502"/>
           </a:xfrm>
           <a:prstGeom prst="rect">
             <a:avLst/>
@@ -19485,14 +20304,14 @@
       </p:sp>
       <p:sp>
         <p:nvSpPr>
-          <p:cNvPr id="113" name="Shape 111"/>
+          <p:cNvPr id="134" name="Shape 132"/>
           <p:cNvSpPr/>
           <p:nvPr/>
         </p:nvSpPr>
         <p:spPr>
           <a:xfrm>
-            <a:off x="8220456" y="2502202"/>
-            <a:ext cx="116946" cy="136676"/>
+            <a:off x="8421624" y="2502202"/>
+            <a:ext cx="92701" cy="136676"/>
           </a:xfrm>
           <a:prstGeom prst="rect">
             <a:avLst/>
@@ -19505,13 +20324,13 @@
       </p:sp>
       <p:sp>
         <p:nvSpPr>
-          <p:cNvPr id="114" name="Text 112"/>
-          <p:cNvSpPr txBox="1"/>
-          <p:nvPr/>
-        </p:nvSpPr>
-        <p:spPr>
-          <a:xfrm>
-            <a:off x="9025128" y="2446289"/>
+          <p:cNvPr id="135" name="Text 133"/>
+          <p:cNvSpPr txBox="1"/>
+          <p:nvPr/>
+        </p:nvSpPr>
+        <p:spPr>
+          <a:xfrm>
+            <a:off x="9070848" y="2446289"/>
             <a:ext cx="786384" cy="248502"/>
           </a:xfrm>
           <a:prstGeom prst="rect">
@@ -19544,13 +20363,13 @@
       </p:sp>
       <p:sp>
         <p:nvSpPr>
-          <p:cNvPr id="115" name="Text 113"/>
-          <p:cNvSpPr txBox="1"/>
-          <p:nvPr/>
-        </p:nvSpPr>
-        <p:spPr>
-          <a:xfrm>
-            <a:off x="9811512" y="2446289"/>
+          <p:cNvPr id="136" name="Text 134"/>
+          <p:cNvSpPr txBox="1"/>
+          <p:nvPr/>
+        </p:nvSpPr>
+        <p:spPr>
+          <a:xfrm>
+            <a:off x="9857232" y="2446289"/>
             <a:ext cx="932688" cy="248502"/>
           </a:xfrm>
           <a:prstGeom prst="rect">
@@ -19583,13 +20402,13 @@
       </p:sp>
       <p:sp>
         <p:nvSpPr>
-          <p:cNvPr id="116" name="Text 114"/>
-          <p:cNvSpPr txBox="1"/>
-          <p:nvPr/>
-        </p:nvSpPr>
-        <p:spPr>
-          <a:xfrm>
-            <a:off x="10744200" y="2446289"/>
+          <p:cNvPr id="137" name="Text 135"/>
+          <p:cNvSpPr txBox="1"/>
+          <p:nvPr/>
+        </p:nvSpPr>
+        <p:spPr>
+          <a:xfrm>
+            <a:off x="10789920" y="2446289"/>
             <a:ext cx="676656" cy="248502"/>
           </a:xfrm>
           <a:prstGeom prst="rect">
@@ -19622,14 +20441,53 @@
       </p:sp>
       <p:sp>
         <p:nvSpPr>
-          <p:cNvPr id="117" name="Text 115"/>
+          <p:cNvPr id="138" name="Text 136"/>
           <p:cNvSpPr txBox="1"/>
           <p:nvPr/>
         </p:nvSpPr>
         <p:spPr>
           <a:xfrm>
             <a:off x="6208776" y="2694791"/>
-            <a:ext cx="1938528" cy="248502"/>
+            <a:ext cx="310896" cy="248502"/>
+          </a:xfrm>
+          <a:prstGeom prst="rect">
+            <a:avLst/>
+          </a:prstGeom>
+          <a:noFill/>
+          <a:ln/>
+        </p:spPr>
+        <p:txBody>
+          <a:bodyPr wrap="square" lIns="0" tIns="0" rIns="0" bIns="0" rtlCol="0" anchor="ctr"/>
+          <a:lstStyle/>
+          <a:p>
+            <a:pPr algn="r" indent="0" marL="0">
+              <a:buNone/>
+            </a:pPr>
+            <a:r>
+              <a:rPr lang="en-US" sz="1200" dirty="0">
+                <a:solidFill>
+                  <a:srgbClr val="9AA3AD"/>
+                </a:solidFill>
+                <a:latin typeface="Inter" pitchFamily="34" charset="0"/>
+                <a:ea typeface="Inter" pitchFamily="34" charset="-122"/>
+                <a:cs typeface="Inter" pitchFamily="34" charset="-120"/>
+              </a:rPr>
+              <a:t>22</a:t>
+            </a:r>
+            <a:endParaRPr lang="en-US" sz="1200" dirty="0"/>
+          </a:p>
+        </p:txBody>
+      </p:sp>
+      <p:sp>
+        <p:nvSpPr>
+          <p:cNvPr id="139" name="Text 137"/>
+          <p:cNvSpPr txBox="1"/>
+          <p:nvPr/>
+        </p:nvSpPr>
+        <p:spPr>
+          <a:xfrm>
+            <a:off x="6565392" y="2694791"/>
+            <a:ext cx="1783080" cy="248502"/>
           </a:xfrm>
           <a:prstGeom prst="rect">
             <a:avLst/>
@@ -19661,14 +20519,14 @@
       </p:sp>
       <p:sp>
         <p:nvSpPr>
-          <p:cNvPr id="118" name="Shape 116"/>
+          <p:cNvPr id="140" name="Shape 138"/>
           <p:cNvSpPr/>
           <p:nvPr/>
         </p:nvSpPr>
         <p:spPr>
           <a:xfrm>
-            <a:off x="8220456" y="2750703"/>
-            <a:ext cx="112759" cy="136676"/>
+            <a:off x="8421624" y="2750703"/>
+            <a:ext cx="89382" cy="136676"/>
           </a:xfrm>
           <a:prstGeom prst="rect">
             <a:avLst/>
@@ -19681,13 +20539,13 @@
       </p:sp>
       <p:sp>
         <p:nvSpPr>
-          <p:cNvPr id="119" name="Text 117"/>
-          <p:cNvSpPr txBox="1"/>
-          <p:nvPr/>
-        </p:nvSpPr>
-        <p:spPr>
-          <a:xfrm>
-            <a:off x="9025128" y="2694791"/>
+          <p:cNvPr id="141" name="Text 139"/>
+          <p:cNvSpPr txBox="1"/>
+          <p:nvPr/>
+        </p:nvSpPr>
+        <p:spPr>
+          <a:xfrm>
+            <a:off x="9070848" y="2694791"/>
             <a:ext cx="786384" cy="248502"/>
           </a:xfrm>
           <a:prstGeom prst="rect">
@@ -19720,13 +20578,13 @@
       </p:sp>
       <p:sp>
         <p:nvSpPr>
-          <p:cNvPr id="120" name="Text 118"/>
-          <p:cNvSpPr txBox="1"/>
-          <p:nvPr/>
-        </p:nvSpPr>
-        <p:spPr>
-          <a:xfrm>
-            <a:off x="9811512" y="2694791"/>
+          <p:cNvPr id="142" name="Text 140"/>
+          <p:cNvSpPr txBox="1"/>
+          <p:nvPr/>
+        </p:nvSpPr>
+        <p:spPr>
+          <a:xfrm>
+            <a:off x="9857232" y="2694791"/>
             <a:ext cx="932688" cy="248502"/>
           </a:xfrm>
           <a:prstGeom prst="rect">
@@ -19759,13 +20617,13 @@
       </p:sp>
       <p:sp>
         <p:nvSpPr>
-          <p:cNvPr id="121" name="Text 119"/>
-          <p:cNvSpPr txBox="1"/>
-          <p:nvPr/>
-        </p:nvSpPr>
-        <p:spPr>
-          <a:xfrm>
-            <a:off x="10744200" y="2694791"/>
+          <p:cNvPr id="143" name="Text 141"/>
+          <p:cNvSpPr txBox="1"/>
+          <p:nvPr/>
+        </p:nvSpPr>
+        <p:spPr>
+          <a:xfrm>
+            <a:off x="10789920" y="2694791"/>
             <a:ext cx="676656" cy="248502"/>
           </a:xfrm>
           <a:prstGeom prst="rect">
@@ -19798,14 +20656,53 @@
       </p:sp>
       <p:sp>
         <p:nvSpPr>
-          <p:cNvPr id="122" name="Text 120"/>
+          <p:cNvPr id="144" name="Text 142"/>
           <p:cNvSpPr txBox="1"/>
           <p:nvPr/>
         </p:nvSpPr>
         <p:spPr>
           <a:xfrm>
             <a:off x="6208776" y="2943292"/>
-            <a:ext cx="1938528" cy="248502"/>
+            <a:ext cx="310896" cy="248502"/>
+          </a:xfrm>
+          <a:prstGeom prst="rect">
+            <a:avLst/>
+          </a:prstGeom>
+          <a:noFill/>
+          <a:ln/>
+        </p:spPr>
+        <p:txBody>
+          <a:bodyPr wrap="square" lIns="0" tIns="0" rIns="0" bIns="0" rtlCol="0" anchor="ctr"/>
+          <a:lstStyle/>
+          <a:p>
+            <a:pPr algn="r" indent="0" marL="0">
+              <a:buNone/>
+            </a:pPr>
+            <a:r>
+              <a:rPr lang="en-US" sz="1200" dirty="0">
+                <a:solidFill>
+                  <a:srgbClr val="9AA3AD"/>
+                </a:solidFill>
+                <a:latin typeface="Inter" pitchFamily="34" charset="0"/>
+                <a:ea typeface="Inter" pitchFamily="34" charset="-122"/>
+                <a:cs typeface="Inter" pitchFamily="34" charset="-120"/>
+              </a:rPr>
+              <a:t>23</a:t>
+            </a:r>
+            <a:endParaRPr lang="en-US" sz="1200" dirty="0"/>
+          </a:p>
+        </p:txBody>
+      </p:sp>
+      <p:sp>
+        <p:nvSpPr>
+          <p:cNvPr id="145" name="Text 143"/>
+          <p:cNvSpPr txBox="1"/>
+          <p:nvPr/>
+        </p:nvSpPr>
+        <p:spPr>
+          <a:xfrm>
+            <a:off x="6565392" y="2943292"/>
+            <a:ext cx="1783080" cy="248502"/>
           </a:xfrm>
           <a:prstGeom prst="rect">
             <a:avLst/>
@@ -19837,14 +20734,14 @@
       </p:sp>
       <p:sp>
         <p:nvSpPr>
-          <p:cNvPr id="123" name="Shape 121"/>
+          <p:cNvPr id="146" name="Shape 144"/>
           <p:cNvSpPr/>
           <p:nvPr/>
         </p:nvSpPr>
         <p:spPr>
           <a:xfrm>
-            <a:off x="8220456" y="2999205"/>
-            <a:ext cx="105168" cy="136676"/>
+            <a:off x="8421624" y="2999205"/>
+            <a:ext cx="83365" cy="136676"/>
           </a:xfrm>
           <a:prstGeom prst="rect">
             <a:avLst/>
@@ -19857,13 +20754,13 @@
       </p:sp>
       <p:sp>
         <p:nvSpPr>
-          <p:cNvPr id="124" name="Text 122"/>
-          <p:cNvSpPr txBox="1"/>
-          <p:nvPr/>
-        </p:nvSpPr>
-        <p:spPr>
-          <a:xfrm>
-            <a:off x="9025128" y="2943292"/>
+          <p:cNvPr id="147" name="Text 145"/>
+          <p:cNvSpPr txBox="1"/>
+          <p:nvPr/>
+        </p:nvSpPr>
+        <p:spPr>
+          <a:xfrm>
+            <a:off x="9070848" y="2943292"/>
             <a:ext cx="786384" cy="248502"/>
           </a:xfrm>
           <a:prstGeom prst="rect">
@@ -19896,13 +20793,13 @@
       </p:sp>
       <p:sp>
         <p:nvSpPr>
-          <p:cNvPr id="125" name="Text 123"/>
-          <p:cNvSpPr txBox="1"/>
-          <p:nvPr/>
-        </p:nvSpPr>
-        <p:spPr>
-          <a:xfrm>
-            <a:off x="9811512" y="2943292"/>
+          <p:cNvPr id="148" name="Text 146"/>
+          <p:cNvSpPr txBox="1"/>
+          <p:nvPr/>
+        </p:nvSpPr>
+        <p:spPr>
+          <a:xfrm>
+            <a:off x="9857232" y="2943292"/>
             <a:ext cx="932688" cy="248502"/>
           </a:xfrm>
           <a:prstGeom prst="rect">
@@ -19935,13 +20832,13 @@
       </p:sp>
       <p:sp>
         <p:nvSpPr>
-          <p:cNvPr id="126" name="Text 124"/>
-          <p:cNvSpPr txBox="1"/>
-          <p:nvPr/>
-        </p:nvSpPr>
-        <p:spPr>
-          <a:xfrm>
-            <a:off x="10744200" y="2943292"/>
+          <p:cNvPr id="149" name="Text 147"/>
+          <p:cNvSpPr txBox="1"/>
+          <p:nvPr/>
+        </p:nvSpPr>
+        <p:spPr>
+          <a:xfrm>
+            <a:off x="10789920" y="2943292"/>
             <a:ext cx="676656" cy="248502"/>
           </a:xfrm>
           <a:prstGeom prst="rect">
@@ -19974,14 +20871,53 @@
       </p:sp>
       <p:sp>
         <p:nvSpPr>
-          <p:cNvPr id="127" name="Text 125"/>
+          <p:cNvPr id="150" name="Text 148"/>
           <p:cNvSpPr txBox="1"/>
           <p:nvPr/>
         </p:nvSpPr>
         <p:spPr>
           <a:xfrm>
             <a:off x="6208776" y="3191794"/>
-            <a:ext cx="1938528" cy="248502"/>
+            <a:ext cx="310896" cy="248502"/>
+          </a:xfrm>
+          <a:prstGeom prst="rect">
+            <a:avLst/>
+          </a:prstGeom>
+          <a:noFill/>
+          <a:ln/>
+        </p:spPr>
+        <p:txBody>
+          <a:bodyPr wrap="square" lIns="0" tIns="0" rIns="0" bIns="0" rtlCol="0" anchor="ctr"/>
+          <a:lstStyle/>
+          <a:p>
+            <a:pPr algn="r" indent="0" marL="0">
+              <a:buNone/>
+            </a:pPr>
+            <a:r>
+              <a:rPr lang="en-US" sz="1200" dirty="0">
+                <a:solidFill>
+                  <a:srgbClr val="9AA3AD"/>
+                </a:solidFill>
+                <a:latin typeface="Inter" pitchFamily="34" charset="0"/>
+                <a:ea typeface="Inter" pitchFamily="34" charset="-122"/>
+                <a:cs typeface="Inter" pitchFamily="34" charset="-120"/>
+              </a:rPr>
+              <a:t>24</a:t>
+            </a:r>
+            <a:endParaRPr lang="en-US" sz="1200" dirty="0"/>
+          </a:p>
+        </p:txBody>
+      </p:sp>
+      <p:sp>
+        <p:nvSpPr>
+          <p:cNvPr id="151" name="Text 149"/>
+          <p:cNvSpPr txBox="1"/>
+          <p:nvPr/>
+        </p:nvSpPr>
+        <p:spPr>
+          <a:xfrm>
+            <a:off x="6565392" y="3191794"/>
+            <a:ext cx="1783080" cy="248502"/>
           </a:xfrm>
           <a:prstGeom prst="rect">
             <a:avLst/>
@@ -20013,14 +20949,14 @@
       </p:sp>
       <p:sp>
         <p:nvSpPr>
-          <p:cNvPr id="128" name="Shape 126"/>
+          <p:cNvPr id="152" name="Shape 150"/>
           <p:cNvSpPr/>
           <p:nvPr/>
         </p:nvSpPr>
         <p:spPr>
           <a:xfrm>
-            <a:off x="8220456" y="3247707"/>
-            <a:ext cx="98507" cy="136676"/>
+            <a:off x="8421624" y="3247707"/>
+            <a:ext cx="78085" cy="136676"/>
           </a:xfrm>
           <a:prstGeom prst="rect">
             <a:avLst/>
@@ -20033,13 +20969,13 @@
       </p:sp>
       <p:sp>
         <p:nvSpPr>
-          <p:cNvPr id="129" name="Text 127"/>
-          <p:cNvSpPr txBox="1"/>
-          <p:nvPr/>
-        </p:nvSpPr>
-        <p:spPr>
-          <a:xfrm>
-            <a:off x="9025128" y="3191794"/>
+          <p:cNvPr id="153" name="Text 151"/>
+          <p:cNvSpPr txBox="1"/>
+          <p:nvPr/>
+        </p:nvSpPr>
+        <p:spPr>
+          <a:xfrm>
+            <a:off x="9070848" y="3191794"/>
             <a:ext cx="786384" cy="248502"/>
           </a:xfrm>
           <a:prstGeom prst="rect">
@@ -20072,13 +21008,13 @@
       </p:sp>
       <p:sp>
         <p:nvSpPr>
-          <p:cNvPr id="130" name="Text 128"/>
-          <p:cNvSpPr txBox="1"/>
-          <p:nvPr/>
-        </p:nvSpPr>
-        <p:spPr>
-          <a:xfrm>
-            <a:off x="9811512" y="3191794"/>
+          <p:cNvPr id="154" name="Text 152"/>
+          <p:cNvSpPr txBox="1"/>
+          <p:nvPr/>
+        </p:nvSpPr>
+        <p:spPr>
+          <a:xfrm>
+            <a:off x="9857232" y="3191794"/>
             <a:ext cx="932688" cy="248502"/>
           </a:xfrm>
           <a:prstGeom prst="rect">
@@ -20111,13 +21047,13 @@
       </p:sp>
       <p:sp>
         <p:nvSpPr>
-          <p:cNvPr id="131" name="Text 129"/>
-          <p:cNvSpPr txBox="1"/>
-          <p:nvPr/>
-        </p:nvSpPr>
-        <p:spPr>
-          <a:xfrm>
-            <a:off x="10744200" y="3191794"/>
+          <p:cNvPr id="155" name="Text 153"/>
+          <p:cNvSpPr txBox="1"/>
+          <p:nvPr/>
+        </p:nvSpPr>
+        <p:spPr>
+          <a:xfrm>
+            <a:off x="10789920" y="3191794"/>
             <a:ext cx="676656" cy="248502"/>
           </a:xfrm>
           <a:prstGeom prst="rect">
@@ -20150,14 +21086,53 @@
       </p:sp>
       <p:sp>
         <p:nvSpPr>
-          <p:cNvPr id="132" name="Text 130"/>
+          <p:cNvPr id="156" name="Text 154"/>
           <p:cNvSpPr txBox="1"/>
           <p:nvPr/>
         </p:nvSpPr>
         <p:spPr>
           <a:xfrm>
             <a:off x="6208776" y="3440296"/>
-            <a:ext cx="1938528" cy="248502"/>
+            <a:ext cx="310896" cy="248502"/>
+          </a:xfrm>
+          <a:prstGeom prst="rect">
+            <a:avLst/>
+          </a:prstGeom>
+          <a:noFill/>
+          <a:ln/>
+        </p:spPr>
+        <p:txBody>
+          <a:bodyPr wrap="square" lIns="0" tIns="0" rIns="0" bIns="0" rtlCol="0" anchor="ctr"/>
+          <a:lstStyle/>
+          <a:p>
+            <a:pPr algn="r" indent="0" marL="0">
+              <a:buNone/>
+            </a:pPr>
+            <a:r>
+              <a:rPr lang="en-US" sz="1200" dirty="0">
+                <a:solidFill>
+                  <a:srgbClr val="9AA3AD"/>
+                </a:solidFill>
+                <a:latin typeface="Inter" pitchFamily="34" charset="0"/>
+                <a:ea typeface="Inter" pitchFamily="34" charset="-122"/>
+                <a:cs typeface="Inter" pitchFamily="34" charset="-120"/>
+              </a:rPr>
+              <a:t>25</a:t>
+            </a:r>
+            <a:endParaRPr lang="en-US" sz="1200" dirty="0"/>
+          </a:p>
+        </p:txBody>
+      </p:sp>
+      <p:sp>
+        <p:nvSpPr>
+          <p:cNvPr id="157" name="Text 155"/>
+          <p:cNvSpPr txBox="1"/>
+          <p:nvPr/>
+        </p:nvSpPr>
+        <p:spPr>
+          <a:xfrm>
+            <a:off x="6565392" y="3440296"/>
+            <a:ext cx="1783080" cy="248502"/>
           </a:xfrm>
           <a:prstGeom prst="rect">
             <a:avLst/>
@@ -20189,14 +21164,14 @@
       </p:sp>
       <p:sp>
         <p:nvSpPr>
-          <p:cNvPr id="133" name="Shape 131"/>
+          <p:cNvPr id="158" name="Shape 156"/>
           <p:cNvSpPr/>
           <p:nvPr/>
         </p:nvSpPr>
         <p:spPr>
           <a:xfrm>
-            <a:off x="8220456" y="3496208"/>
-            <a:ext cx="97766" cy="136676"/>
+            <a:off x="8421624" y="3496208"/>
+            <a:ext cx="77498" cy="136676"/>
           </a:xfrm>
           <a:prstGeom prst="rect">
             <a:avLst/>
@@ -20209,13 +21184,13 @@
       </p:sp>
       <p:sp>
         <p:nvSpPr>
-          <p:cNvPr id="134" name="Text 132"/>
-          <p:cNvSpPr txBox="1"/>
-          <p:nvPr/>
-        </p:nvSpPr>
-        <p:spPr>
-          <a:xfrm>
-            <a:off x="9025128" y="3440296"/>
+          <p:cNvPr id="159" name="Text 157"/>
+          <p:cNvSpPr txBox="1"/>
+          <p:nvPr/>
+        </p:nvSpPr>
+        <p:spPr>
+          <a:xfrm>
+            <a:off x="9070848" y="3440296"/>
             <a:ext cx="786384" cy="248502"/>
           </a:xfrm>
           <a:prstGeom prst="rect">
@@ -20248,13 +21223,13 @@
       </p:sp>
       <p:sp>
         <p:nvSpPr>
-          <p:cNvPr id="135" name="Text 133"/>
-          <p:cNvSpPr txBox="1"/>
-          <p:nvPr/>
-        </p:nvSpPr>
-        <p:spPr>
-          <a:xfrm>
-            <a:off x="9811512" y="3440296"/>
+          <p:cNvPr id="160" name="Text 158"/>
+          <p:cNvSpPr txBox="1"/>
+          <p:nvPr/>
+        </p:nvSpPr>
+        <p:spPr>
+          <a:xfrm>
+            <a:off x="9857232" y="3440296"/>
             <a:ext cx="932688" cy="248502"/>
           </a:xfrm>
           <a:prstGeom prst="rect">
@@ -20287,13 +21262,13 @@
       </p:sp>
       <p:sp>
         <p:nvSpPr>
-          <p:cNvPr id="136" name="Text 134"/>
-          <p:cNvSpPr txBox="1"/>
-          <p:nvPr/>
-        </p:nvSpPr>
-        <p:spPr>
-          <a:xfrm>
-            <a:off x="10744200" y="3440296"/>
+          <p:cNvPr id="161" name="Text 159"/>
+          <p:cNvSpPr txBox="1"/>
+          <p:nvPr/>
+        </p:nvSpPr>
+        <p:spPr>
+          <a:xfrm>
+            <a:off x="10789920" y="3440296"/>
             <a:ext cx="676656" cy="248502"/>
           </a:xfrm>
           <a:prstGeom prst="rect">
@@ -20326,14 +21301,53 @@
       </p:sp>
       <p:sp>
         <p:nvSpPr>
-          <p:cNvPr id="137" name="Text 135"/>
+          <p:cNvPr id="162" name="Text 160"/>
           <p:cNvSpPr txBox="1"/>
           <p:nvPr/>
         </p:nvSpPr>
         <p:spPr>
           <a:xfrm>
             <a:off x="6208776" y="3688797"/>
-            <a:ext cx="1938528" cy="248502"/>
+            <a:ext cx="310896" cy="248502"/>
+          </a:xfrm>
+          <a:prstGeom prst="rect">
+            <a:avLst/>
+          </a:prstGeom>
+          <a:noFill/>
+          <a:ln/>
+        </p:spPr>
+        <p:txBody>
+          <a:bodyPr wrap="square" lIns="0" tIns="0" rIns="0" bIns="0" rtlCol="0" anchor="ctr"/>
+          <a:lstStyle/>
+          <a:p>
+            <a:pPr algn="r" indent="0" marL="0">
+              <a:buNone/>
+            </a:pPr>
+            <a:r>
+              <a:rPr lang="en-US" sz="1200" dirty="0">
+                <a:solidFill>
+                  <a:srgbClr val="9AA3AD"/>
+                </a:solidFill>
+                <a:latin typeface="Inter" pitchFamily="34" charset="0"/>
+                <a:ea typeface="Inter" pitchFamily="34" charset="-122"/>
+                <a:cs typeface="Inter" pitchFamily="34" charset="-120"/>
+              </a:rPr>
+              <a:t>26</a:t>
+            </a:r>
+            <a:endParaRPr lang="en-US" sz="1200" dirty="0"/>
+          </a:p>
+        </p:txBody>
+      </p:sp>
+      <p:sp>
+        <p:nvSpPr>
+          <p:cNvPr id="163" name="Text 161"/>
+          <p:cNvSpPr txBox="1"/>
+          <p:nvPr/>
+        </p:nvSpPr>
+        <p:spPr>
+          <a:xfrm>
+            <a:off x="6565392" y="3688797"/>
+            <a:ext cx="1783080" cy="248502"/>
           </a:xfrm>
           <a:prstGeom prst="rect">
             <a:avLst/>
@@ -20365,14 +21379,14 @@
       </p:sp>
       <p:sp>
         <p:nvSpPr>
-          <p:cNvPr id="138" name="Shape 136"/>
+          <p:cNvPr id="164" name="Shape 162"/>
           <p:cNvSpPr/>
           <p:nvPr/>
         </p:nvSpPr>
         <p:spPr>
           <a:xfrm>
-            <a:off x="8220456" y="3744710"/>
-            <a:ext cx="95452" cy="136676"/>
+            <a:off x="8421624" y="3744710"/>
+            <a:ext cx="75663" cy="136676"/>
           </a:xfrm>
           <a:prstGeom prst="rect">
             <a:avLst/>
@@ -20385,13 +21399,13 @@
       </p:sp>
       <p:sp>
         <p:nvSpPr>
-          <p:cNvPr id="139" name="Text 137"/>
-          <p:cNvSpPr txBox="1"/>
-          <p:nvPr/>
-        </p:nvSpPr>
-        <p:spPr>
-          <a:xfrm>
-            <a:off x="9025128" y="3688797"/>
+          <p:cNvPr id="165" name="Text 163"/>
+          <p:cNvSpPr txBox="1"/>
+          <p:nvPr/>
+        </p:nvSpPr>
+        <p:spPr>
+          <a:xfrm>
+            <a:off x="9070848" y="3688797"/>
             <a:ext cx="786384" cy="248502"/>
           </a:xfrm>
           <a:prstGeom prst="rect">
@@ -20424,13 +21438,13 @@
       </p:sp>
       <p:sp>
         <p:nvSpPr>
-          <p:cNvPr id="140" name="Text 138"/>
-          <p:cNvSpPr txBox="1"/>
-          <p:nvPr/>
-        </p:nvSpPr>
-        <p:spPr>
-          <a:xfrm>
-            <a:off x="9811512" y="3688797"/>
+          <p:cNvPr id="166" name="Text 164"/>
+          <p:cNvSpPr txBox="1"/>
+          <p:nvPr/>
+        </p:nvSpPr>
+        <p:spPr>
+          <a:xfrm>
+            <a:off x="9857232" y="3688797"/>
             <a:ext cx="932688" cy="248502"/>
           </a:xfrm>
           <a:prstGeom prst="rect">
@@ -20463,13 +21477,13 @@
       </p:sp>
       <p:sp>
         <p:nvSpPr>
-          <p:cNvPr id="141" name="Text 139"/>
-          <p:cNvSpPr txBox="1"/>
-          <p:nvPr/>
-        </p:nvSpPr>
-        <p:spPr>
-          <a:xfrm>
-            <a:off x="10744200" y="3688797"/>
+          <p:cNvPr id="167" name="Text 165"/>
+          <p:cNvSpPr txBox="1"/>
+          <p:nvPr/>
+        </p:nvSpPr>
+        <p:spPr>
+          <a:xfrm>
+            <a:off x="10789920" y="3688797"/>
             <a:ext cx="676656" cy="248502"/>
           </a:xfrm>
           <a:prstGeom prst="rect">
@@ -20502,14 +21516,53 @@
       </p:sp>
       <p:sp>
         <p:nvSpPr>
-          <p:cNvPr id="142" name="Text 140"/>
+          <p:cNvPr id="168" name="Text 166"/>
           <p:cNvSpPr txBox="1"/>
           <p:nvPr/>
         </p:nvSpPr>
         <p:spPr>
           <a:xfrm>
             <a:off x="6208776" y="3937299"/>
-            <a:ext cx="1938528" cy="248502"/>
+            <a:ext cx="310896" cy="248502"/>
+          </a:xfrm>
+          <a:prstGeom prst="rect">
+            <a:avLst/>
+          </a:prstGeom>
+          <a:noFill/>
+          <a:ln/>
+        </p:spPr>
+        <p:txBody>
+          <a:bodyPr wrap="square" lIns="0" tIns="0" rIns="0" bIns="0" rtlCol="0" anchor="ctr"/>
+          <a:lstStyle/>
+          <a:p>
+            <a:pPr algn="r" indent="0" marL="0">
+              <a:buNone/>
+            </a:pPr>
+            <a:r>
+              <a:rPr lang="en-US" sz="1200" dirty="0">
+                <a:solidFill>
+                  <a:srgbClr val="9AA3AD"/>
+                </a:solidFill>
+                <a:latin typeface="Inter" pitchFamily="34" charset="0"/>
+                <a:ea typeface="Inter" pitchFamily="34" charset="-122"/>
+                <a:cs typeface="Inter" pitchFamily="34" charset="-120"/>
+              </a:rPr>
+              <a:t>27</a:t>
+            </a:r>
+            <a:endParaRPr lang="en-US" sz="1200" dirty="0"/>
+          </a:p>
+        </p:txBody>
+      </p:sp>
+      <p:sp>
+        <p:nvSpPr>
+          <p:cNvPr id="169" name="Text 167"/>
+          <p:cNvSpPr txBox="1"/>
+          <p:nvPr/>
+        </p:nvSpPr>
+        <p:spPr>
+          <a:xfrm>
+            <a:off x="6565392" y="3937299"/>
+            <a:ext cx="1783080" cy="248502"/>
           </a:xfrm>
           <a:prstGeom prst="rect">
             <a:avLst/>
@@ -20541,14 +21594,14 @@
       </p:sp>
       <p:sp>
         <p:nvSpPr>
-          <p:cNvPr id="143" name="Shape 141"/>
+          <p:cNvPr id="170" name="Shape 168"/>
           <p:cNvSpPr/>
           <p:nvPr/>
         </p:nvSpPr>
         <p:spPr>
           <a:xfrm>
-            <a:off x="8220456" y="3993212"/>
-            <a:ext cx="71097" cy="136676"/>
+            <a:off x="8421624" y="3993212"/>
+            <a:ext cx="56358" cy="136676"/>
           </a:xfrm>
           <a:prstGeom prst="rect">
             <a:avLst/>
@@ -20561,13 +21614,13 @@
       </p:sp>
       <p:sp>
         <p:nvSpPr>
-          <p:cNvPr id="144" name="Text 142"/>
-          <p:cNvSpPr txBox="1"/>
-          <p:nvPr/>
-        </p:nvSpPr>
-        <p:spPr>
-          <a:xfrm>
-            <a:off x="9025128" y="3937299"/>
+          <p:cNvPr id="171" name="Text 169"/>
+          <p:cNvSpPr txBox="1"/>
+          <p:nvPr/>
+        </p:nvSpPr>
+        <p:spPr>
+          <a:xfrm>
+            <a:off x="9070848" y="3937299"/>
             <a:ext cx="786384" cy="248502"/>
           </a:xfrm>
           <a:prstGeom prst="rect">
@@ -20600,13 +21653,13 @@
       </p:sp>
       <p:sp>
         <p:nvSpPr>
-          <p:cNvPr id="145" name="Text 143"/>
-          <p:cNvSpPr txBox="1"/>
-          <p:nvPr/>
-        </p:nvSpPr>
-        <p:spPr>
-          <a:xfrm>
-            <a:off x="9811512" y="3937299"/>
+          <p:cNvPr id="172" name="Text 170"/>
+          <p:cNvSpPr txBox="1"/>
+          <p:nvPr/>
+        </p:nvSpPr>
+        <p:spPr>
+          <a:xfrm>
+            <a:off x="9857232" y="3937299"/>
             <a:ext cx="932688" cy="248502"/>
           </a:xfrm>
           <a:prstGeom prst="rect">
@@ -20639,13 +21692,13 @@
       </p:sp>
       <p:sp>
         <p:nvSpPr>
-          <p:cNvPr id="146" name="Text 144"/>
-          <p:cNvSpPr txBox="1"/>
-          <p:nvPr/>
-        </p:nvSpPr>
-        <p:spPr>
-          <a:xfrm>
-            <a:off x="10744200" y="3937299"/>
+          <p:cNvPr id="173" name="Text 171"/>
+          <p:cNvSpPr txBox="1"/>
+          <p:nvPr/>
+        </p:nvSpPr>
+        <p:spPr>
+          <a:xfrm>
+            <a:off x="10789920" y="3937299"/>
             <a:ext cx="676656" cy="248502"/>
           </a:xfrm>
           <a:prstGeom prst="rect">
@@ -20678,14 +21731,53 @@
       </p:sp>
       <p:sp>
         <p:nvSpPr>
-          <p:cNvPr id="147" name="Text 145"/>
+          <p:cNvPr id="174" name="Text 172"/>
           <p:cNvSpPr txBox="1"/>
           <p:nvPr/>
         </p:nvSpPr>
         <p:spPr>
           <a:xfrm>
             <a:off x="6208776" y="4185800"/>
-            <a:ext cx="1938528" cy="248502"/>
+            <a:ext cx="310896" cy="248502"/>
+          </a:xfrm>
+          <a:prstGeom prst="rect">
+            <a:avLst/>
+          </a:prstGeom>
+          <a:noFill/>
+          <a:ln/>
+        </p:spPr>
+        <p:txBody>
+          <a:bodyPr wrap="square" lIns="0" tIns="0" rIns="0" bIns="0" rtlCol="0" anchor="ctr"/>
+          <a:lstStyle/>
+          <a:p>
+            <a:pPr algn="r" indent="0" marL="0">
+              <a:buNone/>
+            </a:pPr>
+            <a:r>
+              <a:rPr lang="en-US" sz="1200" dirty="0">
+                <a:solidFill>
+                  <a:srgbClr val="9AA3AD"/>
+                </a:solidFill>
+                <a:latin typeface="Inter" pitchFamily="34" charset="0"/>
+                <a:ea typeface="Inter" pitchFamily="34" charset="-122"/>
+                <a:cs typeface="Inter" pitchFamily="34" charset="-120"/>
+              </a:rPr>
+              <a:t>28</a:t>
+            </a:r>
+            <a:endParaRPr lang="en-US" sz="1200" dirty="0"/>
+          </a:p>
+        </p:txBody>
+      </p:sp>
+      <p:sp>
+        <p:nvSpPr>
+          <p:cNvPr id="175" name="Text 173"/>
+          <p:cNvSpPr txBox="1"/>
+          <p:nvPr/>
+        </p:nvSpPr>
+        <p:spPr>
+          <a:xfrm>
+            <a:off x="6565392" y="4185800"/>
+            <a:ext cx="1783080" cy="248502"/>
           </a:xfrm>
           <a:prstGeom prst="rect">
             <a:avLst/>
@@ -20717,14 +21809,14 @@
       </p:sp>
       <p:sp>
         <p:nvSpPr>
-          <p:cNvPr id="148" name="Shape 146"/>
+          <p:cNvPr id="176" name="Shape 174"/>
           <p:cNvSpPr/>
           <p:nvPr/>
         </p:nvSpPr>
         <p:spPr>
           <a:xfrm>
-            <a:off x="8220456" y="4241713"/>
-            <a:ext cx="61565" cy="136676"/>
+            <a:off x="8421624" y="4241713"/>
+            <a:ext cx="48801" cy="136676"/>
           </a:xfrm>
           <a:prstGeom prst="rect">
             <a:avLst/>
@@ -20737,13 +21829,13 @@
       </p:sp>
       <p:sp>
         <p:nvSpPr>
-          <p:cNvPr id="149" name="Text 147"/>
-          <p:cNvSpPr txBox="1"/>
-          <p:nvPr/>
-        </p:nvSpPr>
-        <p:spPr>
-          <a:xfrm>
-            <a:off x="9025128" y="4185800"/>
+          <p:cNvPr id="177" name="Text 175"/>
+          <p:cNvSpPr txBox="1"/>
+          <p:nvPr/>
+        </p:nvSpPr>
+        <p:spPr>
+          <a:xfrm>
+            <a:off x="9070848" y="4185800"/>
             <a:ext cx="786384" cy="248502"/>
           </a:xfrm>
           <a:prstGeom prst="rect">
@@ -20776,13 +21868,13 @@
       </p:sp>
       <p:sp>
         <p:nvSpPr>
-          <p:cNvPr id="150" name="Text 148"/>
-          <p:cNvSpPr txBox="1"/>
-          <p:nvPr/>
-        </p:nvSpPr>
-        <p:spPr>
-          <a:xfrm>
-            <a:off x="9811512" y="4185800"/>
+          <p:cNvPr id="178" name="Text 176"/>
+          <p:cNvSpPr txBox="1"/>
+          <p:nvPr/>
+        </p:nvSpPr>
+        <p:spPr>
+          <a:xfrm>
+            <a:off x="9857232" y="4185800"/>
             <a:ext cx="932688" cy="248502"/>
           </a:xfrm>
           <a:prstGeom prst="rect">
@@ -20815,13 +21907,13 @@
       </p:sp>
       <p:sp>
         <p:nvSpPr>
-          <p:cNvPr id="151" name="Text 149"/>
-          <p:cNvSpPr txBox="1"/>
-          <p:nvPr/>
-        </p:nvSpPr>
-        <p:spPr>
-          <a:xfrm>
-            <a:off x="10744200" y="4185800"/>
+          <p:cNvPr id="179" name="Text 177"/>
+          <p:cNvSpPr txBox="1"/>
+          <p:nvPr/>
+        </p:nvSpPr>
+        <p:spPr>
+          <a:xfrm>
+            <a:off x="10789920" y="4185800"/>
             <a:ext cx="676656" cy="248502"/>
           </a:xfrm>
           <a:prstGeom prst="rect">
@@ -20854,14 +21946,53 @@
       </p:sp>
       <p:sp>
         <p:nvSpPr>
-          <p:cNvPr id="152" name="Text 150"/>
+          <p:cNvPr id="180" name="Text 178"/>
           <p:cNvSpPr txBox="1"/>
           <p:nvPr/>
         </p:nvSpPr>
         <p:spPr>
           <a:xfrm>
             <a:off x="6208776" y="4434302"/>
-            <a:ext cx="1938528" cy="248502"/>
+            <a:ext cx="310896" cy="248502"/>
+          </a:xfrm>
+          <a:prstGeom prst="rect">
+            <a:avLst/>
+          </a:prstGeom>
+          <a:noFill/>
+          <a:ln/>
+        </p:spPr>
+        <p:txBody>
+          <a:bodyPr wrap="square" lIns="0" tIns="0" rIns="0" bIns="0" rtlCol="0" anchor="ctr"/>
+          <a:lstStyle/>
+          <a:p>
+            <a:pPr algn="r" indent="0" marL="0">
+              <a:buNone/>
+            </a:pPr>
+            <a:r>
+              <a:rPr lang="en-US" sz="1200" dirty="0">
+                <a:solidFill>
+                  <a:srgbClr val="9AA3AD"/>
+                </a:solidFill>
+                <a:latin typeface="Inter" pitchFamily="34" charset="0"/>
+                <a:ea typeface="Inter" pitchFamily="34" charset="-122"/>
+                <a:cs typeface="Inter" pitchFamily="34" charset="-120"/>
+              </a:rPr>
+              <a:t>29</a:t>
+            </a:r>
+            <a:endParaRPr lang="en-US" sz="1200" dirty="0"/>
+          </a:p>
+        </p:txBody>
+      </p:sp>
+      <p:sp>
+        <p:nvSpPr>
+          <p:cNvPr id="181" name="Text 179"/>
+          <p:cNvSpPr txBox="1"/>
+          <p:nvPr/>
+        </p:nvSpPr>
+        <p:spPr>
+          <a:xfrm>
+            <a:off x="6565392" y="4434302"/>
+            <a:ext cx="1783080" cy="248502"/>
           </a:xfrm>
           <a:prstGeom prst="rect">
             <a:avLst/>
@@ -20893,14 +22024,14 @@
       </p:sp>
       <p:sp>
         <p:nvSpPr>
-          <p:cNvPr id="153" name="Shape 151"/>
+          <p:cNvPr id="182" name="Shape 180"/>
           <p:cNvSpPr/>
           <p:nvPr/>
         </p:nvSpPr>
         <p:spPr>
           <a:xfrm>
-            <a:off x="8220456" y="4490215"/>
-            <a:ext cx="61457" cy="136676"/>
+            <a:off x="8421624" y="4490215"/>
+            <a:ext cx="48716" cy="136676"/>
           </a:xfrm>
           <a:prstGeom prst="rect">
             <a:avLst/>
@@ -20913,13 +22044,13 @@
       </p:sp>
       <p:sp>
         <p:nvSpPr>
-          <p:cNvPr id="154" name="Text 152"/>
-          <p:cNvSpPr txBox="1"/>
-          <p:nvPr/>
-        </p:nvSpPr>
-        <p:spPr>
-          <a:xfrm>
-            <a:off x="9025128" y="4434302"/>
+          <p:cNvPr id="183" name="Text 181"/>
+          <p:cNvSpPr txBox="1"/>
+          <p:nvPr/>
+        </p:nvSpPr>
+        <p:spPr>
+          <a:xfrm>
+            <a:off x="9070848" y="4434302"/>
             <a:ext cx="786384" cy="248502"/>
           </a:xfrm>
           <a:prstGeom prst="rect">
@@ -20952,13 +22083,13 @@
       </p:sp>
       <p:sp>
         <p:nvSpPr>
-          <p:cNvPr id="155" name="Text 153"/>
-          <p:cNvSpPr txBox="1"/>
-          <p:nvPr/>
-        </p:nvSpPr>
-        <p:spPr>
-          <a:xfrm>
-            <a:off x="9811512" y="4434302"/>
+          <p:cNvPr id="184" name="Text 182"/>
+          <p:cNvSpPr txBox="1"/>
+          <p:nvPr/>
+        </p:nvSpPr>
+        <p:spPr>
+          <a:xfrm>
+            <a:off x="9857232" y="4434302"/>
             <a:ext cx="932688" cy="248502"/>
           </a:xfrm>
           <a:prstGeom prst="rect">
@@ -20991,13 +22122,13 @@
       </p:sp>
       <p:sp>
         <p:nvSpPr>
-          <p:cNvPr id="156" name="Text 154"/>
-          <p:cNvSpPr txBox="1"/>
-          <p:nvPr/>
-        </p:nvSpPr>
-        <p:spPr>
-          <a:xfrm>
-            <a:off x="10744200" y="4434302"/>
+          <p:cNvPr id="185" name="Text 183"/>
+          <p:cNvSpPr txBox="1"/>
+          <p:nvPr/>
+        </p:nvSpPr>
+        <p:spPr>
+          <a:xfrm>
+            <a:off x="10789920" y="4434302"/>
             <a:ext cx="676656" cy="248502"/>
           </a:xfrm>
           <a:prstGeom prst="rect">
@@ -21030,14 +22161,53 @@
       </p:sp>
       <p:sp>
         <p:nvSpPr>
-          <p:cNvPr id="157" name="Text 155"/>
+          <p:cNvPr id="186" name="Text 184"/>
           <p:cNvSpPr txBox="1"/>
           <p:nvPr/>
         </p:nvSpPr>
         <p:spPr>
           <a:xfrm>
             <a:off x="6208776" y="4682804"/>
-            <a:ext cx="1938528" cy="248502"/>
+            <a:ext cx="310896" cy="248502"/>
+          </a:xfrm>
+          <a:prstGeom prst="rect">
+            <a:avLst/>
+          </a:prstGeom>
+          <a:noFill/>
+          <a:ln/>
+        </p:spPr>
+        <p:txBody>
+          <a:bodyPr wrap="square" lIns="0" tIns="0" rIns="0" bIns="0" rtlCol="0" anchor="ctr"/>
+          <a:lstStyle/>
+          <a:p>
+            <a:pPr algn="r" indent="0" marL="0">
+              <a:buNone/>
+            </a:pPr>
+            <a:r>
+              <a:rPr lang="en-US" sz="1200" dirty="0">
+                <a:solidFill>
+                  <a:srgbClr val="9AA3AD"/>
+                </a:solidFill>
+                <a:latin typeface="Inter" pitchFamily="34" charset="0"/>
+                <a:ea typeface="Inter" pitchFamily="34" charset="-122"/>
+                <a:cs typeface="Inter" pitchFamily="34" charset="-120"/>
+              </a:rPr>
+              <a:t>30</a:t>
+            </a:r>
+            <a:endParaRPr lang="en-US" sz="1200" dirty="0"/>
+          </a:p>
+        </p:txBody>
+      </p:sp>
+      <p:sp>
+        <p:nvSpPr>
+          <p:cNvPr id="187" name="Text 185"/>
+          <p:cNvSpPr txBox="1"/>
+          <p:nvPr/>
+        </p:nvSpPr>
+        <p:spPr>
+          <a:xfrm>
+            <a:off x="6565392" y="4682804"/>
+            <a:ext cx="1783080" cy="248502"/>
           </a:xfrm>
           <a:prstGeom prst="rect">
             <a:avLst/>
@@ -21069,14 +22239,14 @@
       </p:sp>
       <p:sp>
         <p:nvSpPr>
-          <p:cNvPr id="158" name="Shape 156"/>
+          <p:cNvPr id="188" name="Shape 186"/>
           <p:cNvSpPr/>
           <p:nvPr/>
         </p:nvSpPr>
         <p:spPr>
           <a:xfrm>
-            <a:off x="8220456" y="4738717"/>
-            <a:ext cx="54038" cy="136676"/>
+            <a:off x="8421624" y="4738717"/>
+            <a:ext cx="42835" cy="136676"/>
           </a:xfrm>
           <a:prstGeom prst="rect">
             <a:avLst/>
@@ -21089,13 +22259,13 @@
       </p:sp>
       <p:sp>
         <p:nvSpPr>
-          <p:cNvPr id="159" name="Text 157"/>
-          <p:cNvSpPr txBox="1"/>
-          <p:nvPr/>
-        </p:nvSpPr>
-        <p:spPr>
-          <a:xfrm>
-            <a:off x="9025128" y="4682804"/>
+          <p:cNvPr id="189" name="Text 187"/>
+          <p:cNvSpPr txBox="1"/>
+          <p:nvPr/>
+        </p:nvSpPr>
+        <p:spPr>
+          <a:xfrm>
+            <a:off x="9070848" y="4682804"/>
             <a:ext cx="786384" cy="248502"/>
           </a:xfrm>
           <a:prstGeom prst="rect">
@@ -21128,13 +22298,13 @@
       </p:sp>
       <p:sp>
         <p:nvSpPr>
-          <p:cNvPr id="160" name="Text 158"/>
-          <p:cNvSpPr txBox="1"/>
-          <p:nvPr/>
-        </p:nvSpPr>
-        <p:spPr>
-          <a:xfrm>
-            <a:off x="9811512" y="4682804"/>
+          <p:cNvPr id="190" name="Text 188"/>
+          <p:cNvSpPr txBox="1"/>
+          <p:nvPr/>
+        </p:nvSpPr>
+        <p:spPr>
+          <a:xfrm>
+            <a:off x="9857232" y="4682804"/>
             <a:ext cx="932688" cy="248502"/>
           </a:xfrm>
           <a:prstGeom prst="rect">
@@ -21167,13 +22337,13 @@
       </p:sp>
       <p:sp>
         <p:nvSpPr>
-          <p:cNvPr id="161" name="Text 159"/>
-          <p:cNvSpPr txBox="1"/>
-          <p:nvPr/>
-        </p:nvSpPr>
-        <p:spPr>
-          <a:xfrm>
-            <a:off x="10744200" y="4682804"/>
+          <p:cNvPr id="191" name="Text 189"/>
+          <p:cNvSpPr txBox="1"/>
+          <p:nvPr/>
+        </p:nvSpPr>
+        <p:spPr>
+          <a:xfrm>
+            <a:off x="10789920" y="4682804"/>
             <a:ext cx="676656" cy="248502"/>
           </a:xfrm>
           <a:prstGeom prst="rect">
@@ -21206,14 +22376,53 @@
       </p:sp>
       <p:sp>
         <p:nvSpPr>
-          <p:cNvPr id="162" name="Text 160"/>
+          <p:cNvPr id="192" name="Text 190"/>
           <p:cNvSpPr txBox="1"/>
           <p:nvPr/>
         </p:nvSpPr>
         <p:spPr>
           <a:xfrm>
             <a:off x="6208776" y="4931305"/>
-            <a:ext cx="1938528" cy="248502"/>
+            <a:ext cx="310896" cy="248502"/>
+          </a:xfrm>
+          <a:prstGeom prst="rect">
+            <a:avLst/>
+          </a:prstGeom>
+          <a:noFill/>
+          <a:ln/>
+        </p:spPr>
+        <p:txBody>
+          <a:bodyPr wrap="square" lIns="0" tIns="0" rIns="0" bIns="0" rtlCol="0" anchor="ctr"/>
+          <a:lstStyle/>
+          <a:p>
+            <a:pPr algn="r" indent="0" marL="0">
+              <a:buNone/>
+            </a:pPr>
+            <a:r>
+              <a:rPr lang="en-US" sz="1200" dirty="0">
+                <a:solidFill>
+                  <a:srgbClr val="9AA3AD"/>
+                </a:solidFill>
+                <a:latin typeface="Inter" pitchFamily="34" charset="0"/>
+                <a:ea typeface="Inter" pitchFamily="34" charset="-122"/>
+                <a:cs typeface="Inter" pitchFamily="34" charset="-120"/>
+              </a:rPr>
+              <a:t>31</a:t>
+            </a:r>
+            <a:endParaRPr lang="en-US" sz="1200" dirty="0"/>
+          </a:p>
+        </p:txBody>
+      </p:sp>
+      <p:sp>
+        <p:nvSpPr>
+          <p:cNvPr id="193" name="Text 191"/>
+          <p:cNvSpPr txBox="1"/>
+          <p:nvPr/>
+        </p:nvSpPr>
+        <p:spPr>
+          <a:xfrm>
+            <a:off x="6565392" y="4931305"/>
+            <a:ext cx="1783080" cy="248502"/>
           </a:xfrm>
           <a:prstGeom prst="rect">
             <a:avLst/>
@@ -21245,14 +22454,14 @@
       </p:sp>
       <p:sp>
         <p:nvSpPr>
-          <p:cNvPr id="163" name="Shape 161"/>
+          <p:cNvPr id="194" name="Shape 192"/>
           <p:cNvSpPr/>
           <p:nvPr/>
         </p:nvSpPr>
         <p:spPr>
           <a:xfrm>
-            <a:off x="8220456" y="4987218"/>
-            <a:ext cx="49766" cy="136676"/>
+            <a:off x="8421624" y="4987218"/>
+            <a:ext cx="39448" cy="136676"/>
           </a:xfrm>
           <a:prstGeom prst="rect">
             <a:avLst/>
@@ -21265,13 +22474,13 @@
       </p:sp>
       <p:sp>
         <p:nvSpPr>
-          <p:cNvPr id="164" name="Text 162"/>
-          <p:cNvSpPr txBox="1"/>
-          <p:nvPr/>
-        </p:nvSpPr>
-        <p:spPr>
-          <a:xfrm>
-            <a:off x="9025128" y="4931305"/>
+          <p:cNvPr id="195" name="Text 193"/>
+          <p:cNvSpPr txBox="1"/>
+          <p:nvPr/>
+        </p:nvSpPr>
+        <p:spPr>
+          <a:xfrm>
+            <a:off x="9070848" y="4931305"/>
             <a:ext cx="786384" cy="248502"/>
           </a:xfrm>
           <a:prstGeom prst="rect">
@@ -21304,13 +22513,13 @@
       </p:sp>
       <p:sp>
         <p:nvSpPr>
-          <p:cNvPr id="165" name="Text 163"/>
-          <p:cNvSpPr txBox="1"/>
-          <p:nvPr/>
-        </p:nvSpPr>
-        <p:spPr>
-          <a:xfrm>
-            <a:off x="9811512" y="4931305"/>
+          <p:cNvPr id="196" name="Text 194"/>
+          <p:cNvSpPr txBox="1"/>
+          <p:nvPr/>
+        </p:nvSpPr>
+        <p:spPr>
+          <a:xfrm>
+            <a:off x="9857232" y="4931305"/>
             <a:ext cx="932688" cy="248502"/>
           </a:xfrm>
           <a:prstGeom prst="rect">
@@ -21343,13 +22552,13 @@
       </p:sp>
       <p:sp>
         <p:nvSpPr>
-          <p:cNvPr id="166" name="Text 164"/>
-          <p:cNvSpPr txBox="1"/>
-          <p:nvPr/>
-        </p:nvSpPr>
-        <p:spPr>
-          <a:xfrm>
-            <a:off x="10744200" y="4931305"/>
+          <p:cNvPr id="197" name="Text 195"/>
+          <p:cNvSpPr txBox="1"/>
+          <p:nvPr/>
+        </p:nvSpPr>
+        <p:spPr>
+          <a:xfrm>
+            <a:off x="10789920" y="4931305"/>
             <a:ext cx="676656" cy="248502"/>
           </a:xfrm>
           <a:prstGeom prst="rect">
@@ -21382,14 +22591,53 @@
       </p:sp>
       <p:sp>
         <p:nvSpPr>
-          <p:cNvPr id="167" name="Text 165"/>
+          <p:cNvPr id="198" name="Text 196"/>
           <p:cNvSpPr txBox="1"/>
           <p:nvPr/>
         </p:nvSpPr>
         <p:spPr>
           <a:xfrm>
             <a:off x="6208776" y="5179807"/>
-            <a:ext cx="1938528" cy="248502"/>
+            <a:ext cx="310896" cy="248502"/>
+          </a:xfrm>
+          <a:prstGeom prst="rect">
+            <a:avLst/>
+          </a:prstGeom>
+          <a:noFill/>
+          <a:ln/>
+        </p:spPr>
+        <p:txBody>
+          <a:bodyPr wrap="square" lIns="0" tIns="0" rIns="0" bIns="0" rtlCol="0" anchor="ctr"/>
+          <a:lstStyle/>
+          <a:p>
+            <a:pPr algn="r" indent="0" marL="0">
+              <a:buNone/>
+            </a:pPr>
+            <a:r>
+              <a:rPr lang="en-US" sz="1200" dirty="0">
+                <a:solidFill>
+                  <a:srgbClr val="9AA3AD"/>
+                </a:solidFill>
+                <a:latin typeface="Inter" pitchFamily="34" charset="0"/>
+                <a:ea typeface="Inter" pitchFamily="34" charset="-122"/>
+                <a:cs typeface="Inter" pitchFamily="34" charset="-120"/>
+              </a:rPr>
+              <a:t>32</a:t>
+            </a:r>
+            <a:endParaRPr lang="en-US" sz="1200" dirty="0"/>
+          </a:p>
+        </p:txBody>
+      </p:sp>
+      <p:sp>
+        <p:nvSpPr>
+          <p:cNvPr id="199" name="Text 197"/>
+          <p:cNvSpPr txBox="1"/>
+          <p:nvPr/>
+        </p:nvSpPr>
+        <p:spPr>
+          <a:xfrm>
+            <a:off x="6565392" y="5179807"/>
+            <a:ext cx="1783080" cy="248502"/>
           </a:xfrm>
           <a:prstGeom prst="rect">
             <a:avLst/>
@@ -21421,14 +22669,14 @@
       </p:sp>
       <p:sp>
         <p:nvSpPr>
-          <p:cNvPr id="168" name="Shape 166"/>
+          <p:cNvPr id="200" name="Shape 198"/>
           <p:cNvSpPr/>
           <p:nvPr/>
         </p:nvSpPr>
         <p:spPr>
           <a:xfrm>
-            <a:off x="8220456" y="5235720"/>
-            <a:ext cx="40736" cy="136676"/>
+            <a:off x="8421624" y="5235720"/>
+            <a:ext cx="32291" cy="136676"/>
           </a:xfrm>
           <a:prstGeom prst="rect">
             <a:avLst/>
@@ -21441,13 +22689,13 @@
       </p:sp>
       <p:sp>
         <p:nvSpPr>
-          <p:cNvPr id="169" name="Text 167"/>
-          <p:cNvSpPr txBox="1"/>
-          <p:nvPr/>
-        </p:nvSpPr>
-        <p:spPr>
-          <a:xfrm>
-            <a:off x="9025128" y="5179807"/>
+          <p:cNvPr id="201" name="Text 199"/>
+          <p:cNvSpPr txBox="1"/>
+          <p:nvPr/>
+        </p:nvSpPr>
+        <p:spPr>
+          <a:xfrm>
+            <a:off x="9070848" y="5179807"/>
             <a:ext cx="786384" cy="248502"/>
           </a:xfrm>
           <a:prstGeom prst="rect">
@@ -21480,13 +22728,13 @@
       </p:sp>
       <p:sp>
         <p:nvSpPr>
-          <p:cNvPr id="170" name="Text 168"/>
-          <p:cNvSpPr txBox="1"/>
-          <p:nvPr/>
-        </p:nvSpPr>
-        <p:spPr>
-          <a:xfrm>
-            <a:off x="9811512" y="5179807"/>
+          <p:cNvPr id="202" name="Text 200"/>
+          <p:cNvSpPr txBox="1"/>
+          <p:nvPr/>
+        </p:nvSpPr>
+        <p:spPr>
+          <a:xfrm>
+            <a:off x="9857232" y="5179807"/>
             <a:ext cx="932688" cy="248502"/>
           </a:xfrm>
           <a:prstGeom prst="rect">
@@ -21519,13 +22767,13 @@
       </p:sp>
       <p:sp>
         <p:nvSpPr>
-          <p:cNvPr id="171" name="Text 169"/>
-          <p:cNvSpPr txBox="1"/>
-          <p:nvPr/>
-        </p:nvSpPr>
-        <p:spPr>
-          <a:xfrm>
-            <a:off x="10744200" y="5179807"/>
+          <p:cNvPr id="203" name="Text 201"/>
+          <p:cNvSpPr txBox="1"/>
+          <p:nvPr/>
+        </p:nvSpPr>
+        <p:spPr>
+          <a:xfrm>
+            <a:off x="10789920" y="5179807"/>
             <a:ext cx="676656" cy="248502"/>
           </a:xfrm>
           <a:prstGeom prst="rect">
@@ -21558,14 +22806,53 @@
       </p:sp>
       <p:sp>
         <p:nvSpPr>
-          <p:cNvPr id="172" name="Text 170"/>
+          <p:cNvPr id="204" name="Text 202"/>
           <p:cNvSpPr txBox="1"/>
           <p:nvPr/>
         </p:nvSpPr>
         <p:spPr>
           <a:xfrm>
             <a:off x="6208776" y="5428309"/>
-            <a:ext cx="1938528" cy="248502"/>
+            <a:ext cx="310896" cy="248502"/>
+          </a:xfrm>
+          <a:prstGeom prst="rect">
+            <a:avLst/>
+          </a:prstGeom>
+          <a:noFill/>
+          <a:ln/>
+        </p:spPr>
+        <p:txBody>
+          <a:bodyPr wrap="square" lIns="0" tIns="0" rIns="0" bIns="0" rtlCol="0" anchor="ctr"/>
+          <a:lstStyle/>
+          <a:p>
+            <a:pPr algn="r" indent="0" marL="0">
+              <a:buNone/>
+            </a:pPr>
+            <a:r>
+              <a:rPr lang="en-US" sz="1200" dirty="0">
+                <a:solidFill>
+                  <a:srgbClr val="9AA3AD"/>
+                </a:solidFill>
+                <a:latin typeface="Inter" pitchFamily="34" charset="0"/>
+                <a:ea typeface="Inter" pitchFamily="34" charset="-122"/>
+                <a:cs typeface="Inter" pitchFamily="34" charset="-120"/>
+              </a:rPr>
+              <a:t>33</a:t>
+            </a:r>
+            <a:endParaRPr lang="en-US" sz="1200" dirty="0"/>
+          </a:p>
+        </p:txBody>
+      </p:sp>
+      <p:sp>
+        <p:nvSpPr>
+          <p:cNvPr id="205" name="Text 203"/>
+          <p:cNvSpPr txBox="1"/>
+          <p:nvPr/>
+        </p:nvSpPr>
+        <p:spPr>
+          <a:xfrm>
+            <a:off x="6565392" y="5428309"/>
+            <a:ext cx="1783080" cy="248502"/>
           </a:xfrm>
           <a:prstGeom prst="rect">
             <a:avLst/>
@@ -21597,13 +22884,13 @@
       </p:sp>
       <p:sp>
         <p:nvSpPr>
-          <p:cNvPr id="173" name="Shape 171"/>
+          <p:cNvPr id="206" name="Shape 204"/>
           <p:cNvSpPr/>
           <p:nvPr/>
         </p:nvSpPr>
         <p:spPr>
           <a:xfrm>
-            <a:off x="8220456" y="5484222"/>
+            <a:off x="8421624" y="5484222"/>
             <a:ext cx="18288" cy="136676"/>
           </a:xfrm>
           <a:prstGeom prst="rect">
@@ -21617,13 +22904,13 @@
       </p:sp>
       <p:sp>
         <p:nvSpPr>
-          <p:cNvPr id="174" name="Text 172"/>
-          <p:cNvSpPr txBox="1"/>
-          <p:nvPr/>
-        </p:nvSpPr>
-        <p:spPr>
-          <a:xfrm>
-            <a:off x="9025128" y="5428309"/>
+          <p:cNvPr id="207" name="Text 205"/>
+          <p:cNvSpPr txBox="1"/>
+          <p:nvPr/>
+        </p:nvSpPr>
+        <p:spPr>
+          <a:xfrm>
+            <a:off x="9070848" y="5428309"/>
             <a:ext cx="786384" cy="248502"/>
           </a:xfrm>
           <a:prstGeom prst="rect">
@@ -21656,13 +22943,13 @@
       </p:sp>
       <p:sp>
         <p:nvSpPr>
-          <p:cNvPr id="175" name="Text 173"/>
-          <p:cNvSpPr txBox="1"/>
-          <p:nvPr/>
-        </p:nvSpPr>
-        <p:spPr>
-          <a:xfrm>
-            <a:off x="9811512" y="5428309"/>
+          <p:cNvPr id="208" name="Text 206"/>
+          <p:cNvSpPr txBox="1"/>
+          <p:nvPr/>
+        </p:nvSpPr>
+        <p:spPr>
+          <a:xfrm>
+            <a:off x="9857232" y="5428309"/>
             <a:ext cx="932688" cy="248502"/>
           </a:xfrm>
           <a:prstGeom prst="rect">
@@ -21695,13 +22982,13 @@
       </p:sp>
       <p:sp>
         <p:nvSpPr>
-          <p:cNvPr id="176" name="Text 174"/>
-          <p:cNvSpPr txBox="1"/>
-          <p:nvPr/>
-        </p:nvSpPr>
-        <p:spPr>
-          <a:xfrm>
-            <a:off x="10744200" y="5428309"/>
+          <p:cNvPr id="209" name="Text 207"/>
+          <p:cNvSpPr txBox="1"/>
+          <p:nvPr/>
+        </p:nvSpPr>
+        <p:spPr>
+          <a:xfrm>
+            <a:off x="10789920" y="5428309"/>
             <a:ext cx="676656" cy="248502"/>
           </a:xfrm>
           <a:prstGeom prst="rect">
@@ -21734,7 +23021,27 @@
       </p:sp>
       <p:sp>
         <p:nvSpPr>
-          <p:cNvPr id="177" name="Shape 175"/>
+          <p:cNvPr id="210" name="Shape 208"/>
+          <p:cNvSpPr/>
+          <p:nvPr/>
+        </p:nvSpPr>
+        <p:spPr>
+          <a:xfrm>
+            <a:off x="6085332" y="1700784"/>
+            <a:ext cx="10973" cy="4224528"/>
+          </a:xfrm>
+          <a:prstGeom prst="rect">
+            <a:avLst/>
+          </a:prstGeom>
+          <a:solidFill>
+            <a:srgbClr val="D9D9D9"/>
+          </a:solidFill>
+          <a:ln/>
+        </p:spPr>
+      </p:sp>
+      <p:sp>
+        <p:nvSpPr>
+          <p:cNvPr id="211" name="Shape 209"/>
           <p:cNvSpPr/>
           <p:nvPr/>
         </p:nvSpPr>
@@ -21754,7 +23061,7 @@
       </p:sp>
       <p:sp>
         <p:nvSpPr>
-          <p:cNvPr id="178" name="Text 176"/>
+          <p:cNvPr id="212" name="Text 210"/>
           <p:cNvSpPr txBox="1"/>
           <p:nvPr/>
         </p:nvSpPr>
@@ -21949,7 +23256,7 @@
         </p:nvSpPr>
         <p:spPr>
           <a:xfrm>
-            <a:off x="3346704" y="1316736"/>
+            <a:off x="3392424" y="1316736"/>
             <a:ext cx="786384" cy="329184"/>
           </a:xfrm>
           <a:prstGeom prst="rect">
@@ -21988,7 +23295,7 @@
         </p:nvSpPr>
         <p:spPr>
           <a:xfrm>
-            <a:off x="4133088" y="1316736"/>
+            <a:off x="4178808" y="1316736"/>
             <a:ext cx="868680" cy="329184"/>
           </a:xfrm>
           <a:prstGeom prst="rect">
@@ -22027,7 +23334,7 @@
         </p:nvSpPr>
         <p:spPr>
           <a:xfrm>
-            <a:off x="5001768" y="1316736"/>
+            <a:off x="5047488" y="1316736"/>
             <a:ext cx="868680" cy="329184"/>
           </a:xfrm>
           <a:prstGeom prst="rect">
@@ -22066,7 +23373,7 @@
         </p:nvSpPr>
         <p:spPr>
           <a:xfrm>
-            <a:off x="8897112" y="1316736"/>
+            <a:off x="8942832" y="1316736"/>
             <a:ext cx="786384" cy="329184"/>
           </a:xfrm>
           <a:prstGeom prst="rect">
@@ -22105,7 +23412,7 @@
         </p:nvSpPr>
         <p:spPr>
           <a:xfrm>
-            <a:off x="9683496" y="1316736"/>
+            <a:off x="9729216" y="1316736"/>
             <a:ext cx="868680" cy="329184"/>
           </a:xfrm>
           <a:prstGeom prst="rect">
@@ -22144,7 +23451,7 @@
         </p:nvSpPr>
         <p:spPr>
           <a:xfrm>
-            <a:off x="10552176" y="1316736"/>
+            <a:off x="10597896" y="1316736"/>
             <a:ext cx="868680" cy="329184"/>
           </a:xfrm>
           <a:prstGeom prst="rect">
@@ -22184,7 +23491,46 @@
         <p:spPr>
           <a:xfrm>
             <a:off x="658368" y="1700784"/>
-            <a:ext cx="1938528" cy="248502"/>
+            <a:ext cx="310896" cy="248502"/>
+          </a:xfrm>
+          <a:prstGeom prst="rect">
+            <a:avLst/>
+          </a:prstGeom>
+          <a:noFill/>
+          <a:ln/>
+        </p:spPr>
+        <p:txBody>
+          <a:bodyPr wrap="square" lIns="0" tIns="0" rIns="0" bIns="0" rtlCol="0" anchor="ctr"/>
+          <a:lstStyle/>
+          <a:p>
+            <a:pPr algn="r" indent="0" marL="0">
+              <a:buNone/>
+            </a:pPr>
+            <a:r>
+              <a:rPr lang="en-US" sz="1200" dirty="0">
+                <a:solidFill>
+                  <a:srgbClr val="9AA3AD"/>
+                </a:solidFill>
+                <a:latin typeface="Inter" pitchFamily="34" charset="0"/>
+                <a:ea typeface="Inter" pitchFamily="34" charset="-122"/>
+                <a:cs typeface="Inter" pitchFamily="34" charset="-120"/>
+              </a:rPr>
+              <a:t>1</a:t>
+            </a:r>
+            <a:endParaRPr lang="en-US" sz="1200" dirty="0"/>
+          </a:p>
+        </p:txBody>
+      </p:sp>
+      <p:sp>
+        <p:nvSpPr>
+          <p:cNvPr id="13" name="Text 11"/>
+          <p:cNvSpPr txBox="1"/>
+          <p:nvPr/>
+        </p:nvSpPr>
+        <p:spPr>
+          <a:xfrm>
+            <a:off x="1014984" y="1700784"/>
+            <a:ext cx="1783080" cy="248502"/>
           </a:xfrm>
           <a:prstGeom prst="rect">
             <a:avLst/>
@@ -22216,14 +23562,14 @@
       </p:sp>
       <p:sp>
         <p:nvSpPr>
-          <p:cNvPr id="13" name="Shape 11"/>
+          <p:cNvPr id="14" name="Shape 12"/>
           <p:cNvSpPr/>
           <p:nvPr/>
         </p:nvSpPr>
         <p:spPr>
           <a:xfrm>
-            <a:off x="2670048" y="1756697"/>
-            <a:ext cx="621792" cy="136676"/>
+            <a:off x="2871216" y="1756697"/>
+            <a:ext cx="466344" cy="136676"/>
           </a:xfrm>
           <a:prstGeom prst="rect">
             <a:avLst/>
@@ -22236,13 +23582,13 @@
       </p:sp>
       <p:sp>
         <p:nvSpPr>
-          <p:cNvPr id="14" name="Text 12"/>
-          <p:cNvSpPr txBox="1"/>
-          <p:nvPr/>
-        </p:nvSpPr>
-        <p:spPr>
-          <a:xfrm>
-            <a:off x="3346704" y="1700784"/>
+          <p:cNvPr id="15" name="Text 13"/>
+          <p:cNvSpPr txBox="1"/>
+          <p:nvPr/>
+        </p:nvSpPr>
+        <p:spPr>
+          <a:xfrm>
+            <a:off x="3392424" y="1700784"/>
             <a:ext cx="786384" cy="248502"/>
           </a:xfrm>
           <a:prstGeom prst="rect">
@@ -22275,13 +23621,13 @@
       </p:sp>
       <p:sp>
         <p:nvSpPr>
-          <p:cNvPr id="15" name="Text 13"/>
-          <p:cNvSpPr txBox="1"/>
-          <p:nvPr/>
-        </p:nvSpPr>
-        <p:spPr>
-          <a:xfrm>
-            <a:off x="4133088" y="1700784"/>
+          <p:cNvPr id="16" name="Text 14"/>
+          <p:cNvSpPr txBox="1"/>
+          <p:nvPr/>
+        </p:nvSpPr>
+        <p:spPr>
+          <a:xfrm>
+            <a:off x="4178808" y="1700784"/>
             <a:ext cx="868680" cy="248502"/>
           </a:xfrm>
           <a:prstGeom prst="rect">
@@ -22314,13 +23660,13 @@
       </p:sp>
       <p:sp>
         <p:nvSpPr>
-          <p:cNvPr id="16" name="Text 14"/>
-          <p:cNvSpPr txBox="1"/>
-          <p:nvPr/>
-        </p:nvSpPr>
-        <p:spPr>
-          <a:xfrm>
-            <a:off x="5001768" y="1700784"/>
+          <p:cNvPr id="17" name="Text 15"/>
+          <p:cNvSpPr txBox="1"/>
+          <p:nvPr/>
+        </p:nvSpPr>
+        <p:spPr>
+          <a:xfrm>
+            <a:off x="5047488" y="1700784"/>
             <a:ext cx="868680" cy="248502"/>
           </a:xfrm>
           <a:prstGeom prst="rect">
@@ -22353,14 +23699,53 @@
       </p:sp>
       <p:sp>
         <p:nvSpPr>
-          <p:cNvPr id="17" name="Text 15"/>
+          <p:cNvPr id="18" name="Text 16"/>
           <p:cNvSpPr txBox="1"/>
           <p:nvPr/>
         </p:nvSpPr>
         <p:spPr>
           <a:xfrm>
             <a:off x="658368" y="1949286"/>
-            <a:ext cx="1938528" cy="248502"/>
+            <a:ext cx="310896" cy="248502"/>
+          </a:xfrm>
+          <a:prstGeom prst="rect">
+            <a:avLst/>
+          </a:prstGeom>
+          <a:noFill/>
+          <a:ln/>
+        </p:spPr>
+        <p:txBody>
+          <a:bodyPr wrap="square" lIns="0" tIns="0" rIns="0" bIns="0" rtlCol="0" anchor="ctr"/>
+          <a:lstStyle/>
+          <a:p>
+            <a:pPr algn="r" indent="0" marL="0">
+              <a:buNone/>
+            </a:pPr>
+            <a:r>
+              <a:rPr lang="en-US" sz="1200" dirty="0">
+                <a:solidFill>
+                  <a:srgbClr val="9AA3AD"/>
+                </a:solidFill>
+                <a:latin typeface="Inter" pitchFamily="34" charset="0"/>
+                <a:ea typeface="Inter" pitchFamily="34" charset="-122"/>
+                <a:cs typeface="Inter" pitchFamily="34" charset="-120"/>
+              </a:rPr>
+              <a:t>2</a:t>
+            </a:r>
+            <a:endParaRPr lang="en-US" sz="1200" dirty="0"/>
+          </a:p>
+        </p:txBody>
+      </p:sp>
+      <p:sp>
+        <p:nvSpPr>
+          <p:cNvPr id="19" name="Text 17"/>
+          <p:cNvSpPr txBox="1"/>
+          <p:nvPr/>
+        </p:nvSpPr>
+        <p:spPr>
+          <a:xfrm>
+            <a:off x="1014984" y="1949286"/>
+            <a:ext cx="1783080" cy="248502"/>
           </a:xfrm>
           <a:prstGeom prst="rect">
             <a:avLst/>
@@ -22392,14 +23777,14 @@
       </p:sp>
       <p:sp>
         <p:nvSpPr>
-          <p:cNvPr id="18" name="Shape 16"/>
+          <p:cNvPr id="20" name="Shape 18"/>
           <p:cNvSpPr/>
           <p:nvPr/>
         </p:nvSpPr>
         <p:spPr>
           <a:xfrm>
-            <a:off x="2670048" y="2005199"/>
-            <a:ext cx="580151" cy="136676"/>
+            <a:off x="2871216" y="2005199"/>
+            <a:ext cx="435113" cy="136676"/>
           </a:xfrm>
           <a:prstGeom prst="rect">
             <a:avLst/>
@@ -22412,13 +23797,13 @@
       </p:sp>
       <p:sp>
         <p:nvSpPr>
-          <p:cNvPr id="19" name="Text 17"/>
-          <p:cNvSpPr txBox="1"/>
-          <p:nvPr/>
-        </p:nvSpPr>
-        <p:spPr>
-          <a:xfrm>
-            <a:off x="3346704" y="1949286"/>
+          <p:cNvPr id="21" name="Text 19"/>
+          <p:cNvSpPr txBox="1"/>
+          <p:nvPr/>
+        </p:nvSpPr>
+        <p:spPr>
+          <a:xfrm>
+            <a:off x="3392424" y="1949286"/>
             <a:ext cx="786384" cy="248502"/>
           </a:xfrm>
           <a:prstGeom prst="rect">
@@ -22451,13 +23836,13 @@
       </p:sp>
       <p:sp>
         <p:nvSpPr>
-          <p:cNvPr id="20" name="Text 18"/>
-          <p:cNvSpPr txBox="1"/>
-          <p:nvPr/>
-        </p:nvSpPr>
-        <p:spPr>
-          <a:xfrm>
-            <a:off x="4133088" y="1949286"/>
+          <p:cNvPr id="22" name="Text 20"/>
+          <p:cNvSpPr txBox="1"/>
+          <p:nvPr/>
+        </p:nvSpPr>
+        <p:spPr>
+          <a:xfrm>
+            <a:off x="4178808" y="1949286"/>
             <a:ext cx="868680" cy="248502"/>
           </a:xfrm>
           <a:prstGeom prst="rect">
@@ -22490,13 +23875,13 @@
       </p:sp>
       <p:sp>
         <p:nvSpPr>
-          <p:cNvPr id="21" name="Text 19"/>
-          <p:cNvSpPr txBox="1"/>
-          <p:nvPr/>
-        </p:nvSpPr>
-        <p:spPr>
-          <a:xfrm>
-            <a:off x="5001768" y="1949286"/>
+          <p:cNvPr id="23" name="Text 21"/>
+          <p:cNvSpPr txBox="1"/>
+          <p:nvPr/>
+        </p:nvSpPr>
+        <p:spPr>
+          <a:xfrm>
+            <a:off x="5047488" y="1949286"/>
             <a:ext cx="868680" cy="248502"/>
           </a:xfrm>
           <a:prstGeom prst="rect">
@@ -22529,14 +23914,53 @@
       </p:sp>
       <p:sp>
         <p:nvSpPr>
-          <p:cNvPr id="22" name="Text 20"/>
+          <p:cNvPr id="24" name="Text 22"/>
           <p:cNvSpPr txBox="1"/>
           <p:nvPr/>
         </p:nvSpPr>
         <p:spPr>
           <a:xfrm>
             <a:off x="658368" y="2197787"/>
-            <a:ext cx="1938528" cy="248502"/>
+            <a:ext cx="310896" cy="248502"/>
+          </a:xfrm>
+          <a:prstGeom prst="rect">
+            <a:avLst/>
+          </a:prstGeom>
+          <a:noFill/>
+          <a:ln/>
+        </p:spPr>
+        <p:txBody>
+          <a:bodyPr wrap="square" lIns="0" tIns="0" rIns="0" bIns="0" rtlCol="0" anchor="ctr"/>
+          <a:lstStyle/>
+          <a:p>
+            <a:pPr algn="r" indent="0" marL="0">
+              <a:buNone/>
+            </a:pPr>
+            <a:r>
+              <a:rPr lang="en-US" sz="1200" dirty="0">
+                <a:solidFill>
+                  <a:srgbClr val="9AA3AD"/>
+                </a:solidFill>
+                <a:latin typeface="Inter" pitchFamily="34" charset="0"/>
+                <a:ea typeface="Inter" pitchFamily="34" charset="-122"/>
+                <a:cs typeface="Inter" pitchFamily="34" charset="-120"/>
+              </a:rPr>
+              <a:t>3</a:t>
+            </a:r>
+            <a:endParaRPr lang="en-US" sz="1200" dirty="0"/>
+          </a:p>
+        </p:txBody>
+      </p:sp>
+      <p:sp>
+        <p:nvSpPr>
+          <p:cNvPr id="25" name="Text 23"/>
+          <p:cNvSpPr txBox="1"/>
+          <p:nvPr/>
+        </p:nvSpPr>
+        <p:spPr>
+          <a:xfrm>
+            <a:off x="1014984" y="2197787"/>
+            <a:ext cx="1783080" cy="248502"/>
           </a:xfrm>
           <a:prstGeom prst="rect">
             <a:avLst/>
@@ -22568,14 +23992,14 @@
       </p:sp>
       <p:sp>
         <p:nvSpPr>
-          <p:cNvPr id="23" name="Shape 21"/>
+          <p:cNvPr id="26" name="Shape 24"/>
           <p:cNvSpPr/>
           <p:nvPr/>
         </p:nvSpPr>
         <p:spPr>
           <a:xfrm>
-            <a:off x="2670048" y="2253700"/>
-            <a:ext cx="495930" cy="136676"/>
+            <a:off x="2871216" y="2253700"/>
+            <a:ext cx="371948" cy="136676"/>
           </a:xfrm>
           <a:prstGeom prst="rect">
             <a:avLst/>
@@ -22588,13 +24012,13 @@
       </p:sp>
       <p:sp>
         <p:nvSpPr>
-          <p:cNvPr id="24" name="Text 22"/>
-          <p:cNvSpPr txBox="1"/>
-          <p:nvPr/>
-        </p:nvSpPr>
-        <p:spPr>
-          <a:xfrm>
-            <a:off x="3346704" y="2197787"/>
+          <p:cNvPr id="27" name="Text 25"/>
+          <p:cNvSpPr txBox="1"/>
+          <p:nvPr/>
+        </p:nvSpPr>
+        <p:spPr>
+          <a:xfrm>
+            <a:off x="3392424" y="2197787"/>
             <a:ext cx="786384" cy="248502"/>
           </a:xfrm>
           <a:prstGeom prst="rect">
@@ -22627,13 +24051,13 @@
       </p:sp>
       <p:sp>
         <p:nvSpPr>
-          <p:cNvPr id="25" name="Text 23"/>
-          <p:cNvSpPr txBox="1"/>
-          <p:nvPr/>
-        </p:nvSpPr>
-        <p:spPr>
-          <a:xfrm>
-            <a:off x="4133088" y="2197787"/>
+          <p:cNvPr id="28" name="Text 26"/>
+          <p:cNvSpPr txBox="1"/>
+          <p:nvPr/>
+        </p:nvSpPr>
+        <p:spPr>
+          <a:xfrm>
+            <a:off x="4178808" y="2197787"/>
             <a:ext cx="868680" cy="248502"/>
           </a:xfrm>
           <a:prstGeom prst="rect">
@@ -22666,13 +24090,13 @@
       </p:sp>
       <p:sp>
         <p:nvSpPr>
-          <p:cNvPr id="26" name="Text 24"/>
-          <p:cNvSpPr txBox="1"/>
-          <p:nvPr/>
-        </p:nvSpPr>
-        <p:spPr>
-          <a:xfrm>
-            <a:off x="5001768" y="2197787"/>
+          <p:cNvPr id="29" name="Text 27"/>
+          <p:cNvSpPr txBox="1"/>
+          <p:nvPr/>
+        </p:nvSpPr>
+        <p:spPr>
+          <a:xfrm>
+            <a:off x="5047488" y="2197787"/>
             <a:ext cx="868680" cy="248502"/>
           </a:xfrm>
           <a:prstGeom prst="rect">
@@ -22705,14 +24129,53 @@
       </p:sp>
       <p:sp>
         <p:nvSpPr>
-          <p:cNvPr id="27" name="Text 25"/>
+          <p:cNvPr id="30" name="Text 28"/>
           <p:cNvSpPr txBox="1"/>
           <p:nvPr/>
         </p:nvSpPr>
         <p:spPr>
           <a:xfrm>
             <a:off x="658368" y="2446289"/>
-            <a:ext cx="1938528" cy="248502"/>
+            <a:ext cx="310896" cy="248502"/>
+          </a:xfrm>
+          <a:prstGeom prst="rect">
+            <a:avLst/>
+          </a:prstGeom>
+          <a:noFill/>
+          <a:ln/>
+        </p:spPr>
+        <p:txBody>
+          <a:bodyPr wrap="square" lIns="0" tIns="0" rIns="0" bIns="0" rtlCol="0" anchor="ctr"/>
+          <a:lstStyle/>
+          <a:p>
+            <a:pPr algn="r" indent="0" marL="0">
+              <a:buNone/>
+            </a:pPr>
+            <a:r>
+              <a:rPr lang="en-US" sz="1200" dirty="0">
+                <a:solidFill>
+                  <a:srgbClr val="9AA3AD"/>
+                </a:solidFill>
+                <a:latin typeface="Inter" pitchFamily="34" charset="0"/>
+                <a:ea typeface="Inter" pitchFamily="34" charset="-122"/>
+                <a:cs typeface="Inter" pitchFamily="34" charset="-120"/>
+              </a:rPr>
+              <a:t>4</a:t>
+            </a:r>
+            <a:endParaRPr lang="en-US" sz="1200" dirty="0"/>
+          </a:p>
+        </p:txBody>
+      </p:sp>
+      <p:sp>
+        <p:nvSpPr>
+          <p:cNvPr id="31" name="Text 29"/>
+          <p:cNvSpPr txBox="1"/>
+          <p:nvPr/>
+        </p:nvSpPr>
+        <p:spPr>
+          <a:xfrm>
+            <a:off x="1014984" y="2446289"/>
+            <a:ext cx="1783080" cy="248502"/>
           </a:xfrm>
           <a:prstGeom prst="rect">
             <a:avLst/>
@@ -22744,14 +24207,14 @@
       </p:sp>
       <p:sp>
         <p:nvSpPr>
-          <p:cNvPr id="28" name="Shape 26"/>
+          <p:cNvPr id="32" name="Shape 30"/>
           <p:cNvSpPr/>
           <p:nvPr/>
         </p:nvSpPr>
         <p:spPr>
           <a:xfrm>
-            <a:off x="2670048" y="2502202"/>
-            <a:ext cx="479181" cy="136676"/>
+            <a:off x="2871216" y="2502202"/>
+            <a:ext cx="359385" cy="136676"/>
           </a:xfrm>
           <a:prstGeom prst="rect">
             <a:avLst/>
@@ -22764,13 +24227,13 @@
       </p:sp>
       <p:sp>
         <p:nvSpPr>
-          <p:cNvPr id="29" name="Text 27"/>
-          <p:cNvSpPr txBox="1"/>
-          <p:nvPr/>
-        </p:nvSpPr>
-        <p:spPr>
-          <a:xfrm>
-            <a:off x="3346704" y="2446289"/>
+          <p:cNvPr id="33" name="Text 31"/>
+          <p:cNvSpPr txBox="1"/>
+          <p:nvPr/>
+        </p:nvSpPr>
+        <p:spPr>
+          <a:xfrm>
+            <a:off x="3392424" y="2446289"/>
             <a:ext cx="786384" cy="248502"/>
           </a:xfrm>
           <a:prstGeom prst="rect">
@@ -22803,13 +24266,13 @@
       </p:sp>
       <p:sp>
         <p:nvSpPr>
-          <p:cNvPr id="30" name="Text 28"/>
-          <p:cNvSpPr txBox="1"/>
-          <p:nvPr/>
-        </p:nvSpPr>
-        <p:spPr>
-          <a:xfrm>
-            <a:off x="4133088" y="2446289"/>
+          <p:cNvPr id="34" name="Text 32"/>
+          <p:cNvSpPr txBox="1"/>
+          <p:nvPr/>
+        </p:nvSpPr>
+        <p:spPr>
+          <a:xfrm>
+            <a:off x="4178808" y="2446289"/>
             <a:ext cx="868680" cy="248502"/>
           </a:xfrm>
           <a:prstGeom prst="rect">
@@ -22842,13 +24305,13 @@
       </p:sp>
       <p:sp>
         <p:nvSpPr>
-          <p:cNvPr id="31" name="Text 29"/>
-          <p:cNvSpPr txBox="1"/>
-          <p:nvPr/>
-        </p:nvSpPr>
-        <p:spPr>
-          <a:xfrm>
-            <a:off x="5001768" y="2446289"/>
+          <p:cNvPr id="35" name="Text 33"/>
+          <p:cNvSpPr txBox="1"/>
+          <p:nvPr/>
+        </p:nvSpPr>
+        <p:spPr>
+          <a:xfrm>
+            <a:off x="5047488" y="2446289"/>
             <a:ext cx="868680" cy="248502"/>
           </a:xfrm>
           <a:prstGeom prst="rect">
@@ -22881,14 +24344,53 @@
       </p:sp>
       <p:sp>
         <p:nvSpPr>
-          <p:cNvPr id="32" name="Text 30"/>
+          <p:cNvPr id="36" name="Text 34"/>
           <p:cNvSpPr txBox="1"/>
           <p:nvPr/>
         </p:nvSpPr>
         <p:spPr>
           <a:xfrm>
             <a:off x="658368" y="2694791"/>
-            <a:ext cx="1938528" cy="248502"/>
+            <a:ext cx="310896" cy="248502"/>
+          </a:xfrm>
+          <a:prstGeom prst="rect">
+            <a:avLst/>
+          </a:prstGeom>
+          <a:noFill/>
+          <a:ln/>
+        </p:spPr>
+        <p:txBody>
+          <a:bodyPr wrap="square" lIns="0" tIns="0" rIns="0" bIns="0" rtlCol="0" anchor="ctr"/>
+          <a:lstStyle/>
+          <a:p>
+            <a:pPr algn="r" indent="0" marL="0">
+              <a:buNone/>
+            </a:pPr>
+            <a:r>
+              <a:rPr lang="en-US" sz="1200" dirty="0">
+                <a:solidFill>
+                  <a:srgbClr val="9AA3AD"/>
+                </a:solidFill>
+                <a:latin typeface="Inter" pitchFamily="34" charset="0"/>
+                <a:ea typeface="Inter" pitchFamily="34" charset="-122"/>
+                <a:cs typeface="Inter" pitchFamily="34" charset="-120"/>
+              </a:rPr>
+              <a:t>5</a:t>
+            </a:r>
+            <a:endParaRPr lang="en-US" sz="1200" dirty="0"/>
+          </a:p>
+        </p:txBody>
+      </p:sp>
+      <p:sp>
+        <p:nvSpPr>
+          <p:cNvPr id="37" name="Text 35"/>
+          <p:cNvSpPr txBox="1"/>
+          <p:nvPr/>
+        </p:nvSpPr>
+        <p:spPr>
+          <a:xfrm>
+            <a:off x="1014984" y="2694791"/>
+            <a:ext cx="1783080" cy="248502"/>
           </a:xfrm>
           <a:prstGeom prst="rect">
             <a:avLst/>
@@ -22920,14 +24422,14 @@
       </p:sp>
       <p:sp>
         <p:nvSpPr>
-          <p:cNvPr id="33" name="Shape 31"/>
+          <p:cNvPr id="38" name="Shape 36"/>
           <p:cNvSpPr/>
           <p:nvPr/>
         </p:nvSpPr>
         <p:spPr>
           <a:xfrm>
-            <a:off x="2670048" y="2750703"/>
-            <a:ext cx="453006" cy="136676"/>
+            <a:off x="2871216" y="2750703"/>
+            <a:ext cx="339754" cy="136676"/>
           </a:xfrm>
           <a:prstGeom prst="rect">
             <a:avLst/>
@@ -22940,13 +24442,13 @@
       </p:sp>
       <p:sp>
         <p:nvSpPr>
-          <p:cNvPr id="34" name="Text 32"/>
-          <p:cNvSpPr txBox="1"/>
-          <p:nvPr/>
-        </p:nvSpPr>
-        <p:spPr>
-          <a:xfrm>
-            <a:off x="3346704" y="2694791"/>
+          <p:cNvPr id="39" name="Text 37"/>
+          <p:cNvSpPr txBox="1"/>
+          <p:nvPr/>
+        </p:nvSpPr>
+        <p:spPr>
+          <a:xfrm>
+            <a:off x="3392424" y="2694791"/>
             <a:ext cx="786384" cy="248502"/>
           </a:xfrm>
           <a:prstGeom prst="rect">
@@ -22979,13 +24481,13 @@
       </p:sp>
       <p:sp>
         <p:nvSpPr>
-          <p:cNvPr id="35" name="Text 33"/>
-          <p:cNvSpPr txBox="1"/>
-          <p:nvPr/>
-        </p:nvSpPr>
-        <p:spPr>
-          <a:xfrm>
-            <a:off x="4133088" y="2694791"/>
+          <p:cNvPr id="40" name="Text 38"/>
+          <p:cNvSpPr txBox="1"/>
+          <p:nvPr/>
+        </p:nvSpPr>
+        <p:spPr>
+          <a:xfrm>
+            <a:off x="4178808" y="2694791"/>
             <a:ext cx="868680" cy="248502"/>
           </a:xfrm>
           <a:prstGeom prst="rect">
@@ -23018,13 +24520,13 @@
       </p:sp>
       <p:sp>
         <p:nvSpPr>
-          <p:cNvPr id="36" name="Text 34"/>
-          <p:cNvSpPr txBox="1"/>
-          <p:nvPr/>
-        </p:nvSpPr>
-        <p:spPr>
-          <a:xfrm>
-            <a:off x="5001768" y="2694791"/>
+          <p:cNvPr id="41" name="Text 39"/>
+          <p:cNvSpPr txBox="1"/>
+          <p:nvPr/>
+        </p:nvSpPr>
+        <p:spPr>
+          <a:xfrm>
+            <a:off x="5047488" y="2694791"/>
             <a:ext cx="868680" cy="248502"/>
           </a:xfrm>
           <a:prstGeom prst="rect">
@@ -23057,14 +24559,53 @@
       </p:sp>
       <p:sp>
         <p:nvSpPr>
-          <p:cNvPr id="37" name="Text 35"/>
+          <p:cNvPr id="42" name="Text 40"/>
           <p:cNvSpPr txBox="1"/>
           <p:nvPr/>
         </p:nvSpPr>
         <p:spPr>
           <a:xfrm>
             <a:off x="658368" y="2943292"/>
-            <a:ext cx="1938528" cy="248502"/>
+            <a:ext cx="310896" cy="248502"/>
+          </a:xfrm>
+          <a:prstGeom prst="rect">
+            <a:avLst/>
+          </a:prstGeom>
+          <a:noFill/>
+          <a:ln/>
+        </p:spPr>
+        <p:txBody>
+          <a:bodyPr wrap="square" lIns="0" tIns="0" rIns="0" bIns="0" rtlCol="0" anchor="ctr"/>
+          <a:lstStyle/>
+          <a:p>
+            <a:pPr algn="r" indent="0" marL="0">
+              <a:buNone/>
+            </a:pPr>
+            <a:r>
+              <a:rPr lang="en-US" sz="1200" dirty="0">
+                <a:solidFill>
+                  <a:srgbClr val="9AA3AD"/>
+                </a:solidFill>
+                <a:latin typeface="Inter" pitchFamily="34" charset="0"/>
+                <a:ea typeface="Inter" pitchFamily="34" charset="-122"/>
+                <a:cs typeface="Inter" pitchFamily="34" charset="-120"/>
+              </a:rPr>
+              <a:t>6</a:t>
+            </a:r>
+            <a:endParaRPr lang="en-US" sz="1200" dirty="0"/>
+          </a:p>
+        </p:txBody>
+      </p:sp>
+      <p:sp>
+        <p:nvSpPr>
+          <p:cNvPr id="43" name="Text 41"/>
+          <p:cNvSpPr txBox="1"/>
+          <p:nvPr/>
+        </p:nvSpPr>
+        <p:spPr>
+          <a:xfrm>
+            <a:off x="1014984" y="2943292"/>
+            <a:ext cx="1783080" cy="248502"/>
           </a:xfrm>
           <a:prstGeom prst="rect">
             <a:avLst/>
@@ -23096,14 +24637,14 @@
       </p:sp>
       <p:sp>
         <p:nvSpPr>
-          <p:cNvPr id="38" name="Shape 36"/>
+          <p:cNvPr id="44" name="Shape 42"/>
           <p:cNvSpPr/>
           <p:nvPr/>
         </p:nvSpPr>
         <p:spPr>
           <a:xfrm>
-            <a:off x="2670048" y="2999205"/>
-            <a:ext cx="389713" cy="136676"/>
+            <a:off x="2871216" y="2999205"/>
+            <a:ext cx="292285" cy="136676"/>
           </a:xfrm>
           <a:prstGeom prst="rect">
             <a:avLst/>
@@ -23116,13 +24657,13 @@
       </p:sp>
       <p:sp>
         <p:nvSpPr>
-          <p:cNvPr id="39" name="Text 37"/>
-          <p:cNvSpPr txBox="1"/>
-          <p:nvPr/>
-        </p:nvSpPr>
-        <p:spPr>
-          <a:xfrm>
-            <a:off x="3346704" y="2943292"/>
+          <p:cNvPr id="45" name="Text 43"/>
+          <p:cNvSpPr txBox="1"/>
+          <p:nvPr/>
+        </p:nvSpPr>
+        <p:spPr>
+          <a:xfrm>
+            <a:off x="3392424" y="2943292"/>
             <a:ext cx="786384" cy="248502"/>
           </a:xfrm>
           <a:prstGeom prst="rect">
@@ -23155,13 +24696,13 @@
       </p:sp>
       <p:sp>
         <p:nvSpPr>
-          <p:cNvPr id="40" name="Text 38"/>
-          <p:cNvSpPr txBox="1"/>
-          <p:nvPr/>
-        </p:nvSpPr>
-        <p:spPr>
-          <a:xfrm>
-            <a:off x="4133088" y="2943292"/>
+          <p:cNvPr id="46" name="Text 44"/>
+          <p:cNvSpPr txBox="1"/>
+          <p:nvPr/>
+        </p:nvSpPr>
+        <p:spPr>
+          <a:xfrm>
+            <a:off x="4178808" y="2943292"/>
             <a:ext cx="868680" cy="248502"/>
           </a:xfrm>
           <a:prstGeom prst="rect">
@@ -23194,13 +24735,13 @@
       </p:sp>
       <p:sp>
         <p:nvSpPr>
-          <p:cNvPr id="41" name="Text 39"/>
-          <p:cNvSpPr txBox="1"/>
-          <p:nvPr/>
-        </p:nvSpPr>
-        <p:spPr>
-          <a:xfrm>
-            <a:off x="5001768" y="2943292"/>
+          <p:cNvPr id="47" name="Text 45"/>
+          <p:cNvSpPr txBox="1"/>
+          <p:nvPr/>
+        </p:nvSpPr>
+        <p:spPr>
+          <a:xfrm>
+            <a:off x="5047488" y="2943292"/>
             <a:ext cx="868680" cy="248502"/>
           </a:xfrm>
           <a:prstGeom prst="rect">
@@ -23233,14 +24774,53 @@
       </p:sp>
       <p:sp>
         <p:nvSpPr>
-          <p:cNvPr id="42" name="Text 40"/>
+          <p:cNvPr id="48" name="Text 46"/>
           <p:cNvSpPr txBox="1"/>
           <p:nvPr/>
         </p:nvSpPr>
         <p:spPr>
           <a:xfrm>
             <a:off x="658368" y="3191794"/>
-            <a:ext cx="1938528" cy="248502"/>
+            <a:ext cx="310896" cy="248502"/>
+          </a:xfrm>
+          <a:prstGeom prst="rect">
+            <a:avLst/>
+          </a:prstGeom>
+          <a:noFill/>
+          <a:ln/>
+        </p:spPr>
+        <p:txBody>
+          <a:bodyPr wrap="square" lIns="0" tIns="0" rIns="0" bIns="0" rtlCol="0" anchor="ctr"/>
+          <a:lstStyle/>
+          <a:p>
+            <a:pPr algn="r" indent="0" marL="0">
+              <a:buNone/>
+            </a:pPr>
+            <a:r>
+              <a:rPr lang="en-US" sz="1200" dirty="0">
+                <a:solidFill>
+                  <a:srgbClr val="9AA3AD"/>
+                </a:solidFill>
+                <a:latin typeface="Inter" pitchFamily="34" charset="0"/>
+                <a:ea typeface="Inter" pitchFamily="34" charset="-122"/>
+                <a:cs typeface="Inter" pitchFamily="34" charset="-120"/>
+              </a:rPr>
+              <a:t>7</a:t>
+            </a:r>
+            <a:endParaRPr lang="en-US" sz="1200" dirty="0"/>
+          </a:p>
+        </p:txBody>
+      </p:sp>
+      <p:sp>
+        <p:nvSpPr>
+          <p:cNvPr id="49" name="Text 47"/>
+          <p:cNvSpPr txBox="1"/>
+          <p:nvPr/>
+        </p:nvSpPr>
+        <p:spPr>
+          <a:xfrm>
+            <a:off x="1014984" y="3191794"/>
+            <a:ext cx="1783080" cy="248502"/>
           </a:xfrm>
           <a:prstGeom prst="rect">
             <a:avLst/>
@@ -23272,14 +24852,14 @@
       </p:sp>
       <p:sp>
         <p:nvSpPr>
-          <p:cNvPr id="43" name="Shape 41"/>
+          <p:cNvPr id="50" name="Shape 48"/>
           <p:cNvSpPr/>
           <p:nvPr/>
         </p:nvSpPr>
         <p:spPr>
           <a:xfrm>
-            <a:off x="2670048" y="3247707"/>
-            <a:ext cx="381884" cy="136676"/>
+            <a:off x="2871216" y="3247707"/>
+            <a:ext cx="286413" cy="136676"/>
           </a:xfrm>
           <a:prstGeom prst="rect">
             <a:avLst/>
@@ -23292,13 +24872,13 @@
       </p:sp>
       <p:sp>
         <p:nvSpPr>
-          <p:cNvPr id="44" name="Text 42"/>
-          <p:cNvSpPr txBox="1"/>
-          <p:nvPr/>
-        </p:nvSpPr>
-        <p:spPr>
-          <a:xfrm>
-            <a:off x="3346704" y="3191794"/>
+          <p:cNvPr id="51" name="Text 49"/>
+          <p:cNvSpPr txBox="1"/>
+          <p:nvPr/>
+        </p:nvSpPr>
+        <p:spPr>
+          <a:xfrm>
+            <a:off x="3392424" y="3191794"/>
             <a:ext cx="786384" cy="248502"/>
           </a:xfrm>
           <a:prstGeom prst="rect">
@@ -23331,13 +24911,13 @@
       </p:sp>
       <p:sp>
         <p:nvSpPr>
-          <p:cNvPr id="45" name="Text 43"/>
-          <p:cNvSpPr txBox="1"/>
-          <p:nvPr/>
-        </p:nvSpPr>
-        <p:spPr>
-          <a:xfrm>
-            <a:off x="4133088" y="3191794"/>
+          <p:cNvPr id="52" name="Text 50"/>
+          <p:cNvSpPr txBox="1"/>
+          <p:nvPr/>
+        </p:nvSpPr>
+        <p:spPr>
+          <a:xfrm>
+            <a:off x="4178808" y="3191794"/>
             <a:ext cx="868680" cy="248502"/>
           </a:xfrm>
           <a:prstGeom prst="rect">
@@ -23370,13 +24950,13 @@
       </p:sp>
       <p:sp>
         <p:nvSpPr>
-          <p:cNvPr id="46" name="Text 44"/>
-          <p:cNvSpPr txBox="1"/>
-          <p:nvPr/>
-        </p:nvSpPr>
-        <p:spPr>
-          <a:xfrm>
-            <a:off x="5001768" y="3191794"/>
+          <p:cNvPr id="53" name="Text 51"/>
+          <p:cNvSpPr txBox="1"/>
+          <p:nvPr/>
+        </p:nvSpPr>
+        <p:spPr>
+          <a:xfrm>
+            <a:off x="5047488" y="3191794"/>
             <a:ext cx="868680" cy="248502"/>
           </a:xfrm>
           <a:prstGeom prst="rect">
@@ -23409,14 +24989,53 @@
       </p:sp>
       <p:sp>
         <p:nvSpPr>
-          <p:cNvPr id="47" name="Text 45"/>
+          <p:cNvPr id="54" name="Text 52"/>
           <p:cNvSpPr txBox="1"/>
           <p:nvPr/>
         </p:nvSpPr>
         <p:spPr>
           <a:xfrm>
             <a:off x="658368" y="3440296"/>
-            <a:ext cx="1938528" cy="248502"/>
+            <a:ext cx="310896" cy="248502"/>
+          </a:xfrm>
+          <a:prstGeom prst="rect">
+            <a:avLst/>
+          </a:prstGeom>
+          <a:noFill/>
+          <a:ln/>
+        </p:spPr>
+        <p:txBody>
+          <a:bodyPr wrap="square" lIns="0" tIns="0" rIns="0" bIns="0" rtlCol="0" anchor="ctr"/>
+          <a:lstStyle/>
+          <a:p>
+            <a:pPr algn="r" indent="0" marL="0">
+              <a:buNone/>
+            </a:pPr>
+            <a:r>
+              <a:rPr lang="en-US" sz="1200" dirty="0">
+                <a:solidFill>
+                  <a:srgbClr val="9AA3AD"/>
+                </a:solidFill>
+                <a:latin typeface="Inter" pitchFamily="34" charset="0"/>
+                <a:ea typeface="Inter" pitchFamily="34" charset="-122"/>
+                <a:cs typeface="Inter" pitchFamily="34" charset="-120"/>
+              </a:rPr>
+              <a:t>8</a:t>
+            </a:r>
+            <a:endParaRPr lang="en-US" sz="1200" dirty="0"/>
+          </a:p>
+        </p:txBody>
+      </p:sp>
+      <p:sp>
+        <p:nvSpPr>
+          <p:cNvPr id="55" name="Text 53"/>
+          <p:cNvSpPr txBox="1"/>
+          <p:nvPr/>
+        </p:nvSpPr>
+        <p:spPr>
+          <a:xfrm>
+            <a:off x="1014984" y="3440296"/>
+            <a:ext cx="1783080" cy="248502"/>
           </a:xfrm>
           <a:prstGeom prst="rect">
             <a:avLst/>
@@ -23448,14 +25067,14 @@
       </p:sp>
       <p:sp>
         <p:nvSpPr>
-          <p:cNvPr id="48" name="Shape 46"/>
+          <p:cNvPr id="56" name="Shape 54"/>
           <p:cNvSpPr/>
           <p:nvPr/>
         </p:nvSpPr>
         <p:spPr>
           <a:xfrm>
-            <a:off x="2670048" y="3496208"/>
-            <a:ext cx="370032" cy="136676"/>
+            <a:off x="2871216" y="3496208"/>
+            <a:ext cx="277524" cy="136676"/>
           </a:xfrm>
           <a:prstGeom prst="rect">
             <a:avLst/>
@@ -23468,13 +25087,13 @@
       </p:sp>
       <p:sp>
         <p:nvSpPr>
-          <p:cNvPr id="49" name="Text 47"/>
-          <p:cNvSpPr txBox="1"/>
-          <p:nvPr/>
-        </p:nvSpPr>
-        <p:spPr>
-          <a:xfrm>
-            <a:off x="3346704" y="3440296"/>
+          <p:cNvPr id="57" name="Text 55"/>
+          <p:cNvSpPr txBox="1"/>
+          <p:nvPr/>
+        </p:nvSpPr>
+        <p:spPr>
+          <a:xfrm>
+            <a:off x="3392424" y="3440296"/>
             <a:ext cx="786384" cy="248502"/>
           </a:xfrm>
           <a:prstGeom prst="rect">
@@ -23507,13 +25126,13 @@
       </p:sp>
       <p:sp>
         <p:nvSpPr>
-          <p:cNvPr id="50" name="Text 48"/>
-          <p:cNvSpPr txBox="1"/>
-          <p:nvPr/>
-        </p:nvSpPr>
-        <p:spPr>
-          <a:xfrm>
-            <a:off x="4133088" y="3440296"/>
+          <p:cNvPr id="58" name="Text 56"/>
+          <p:cNvSpPr txBox="1"/>
+          <p:nvPr/>
+        </p:nvSpPr>
+        <p:spPr>
+          <a:xfrm>
+            <a:off x="4178808" y="3440296"/>
             <a:ext cx="868680" cy="248502"/>
           </a:xfrm>
           <a:prstGeom prst="rect">
@@ -23546,13 +25165,13 @@
       </p:sp>
       <p:sp>
         <p:nvSpPr>
-          <p:cNvPr id="51" name="Text 49"/>
-          <p:cNvSpPr txBox="1"/>
-          <p:nvPr/>
-        </p:nvSpPr>
-        <p:spPr>
-          <a:xfrm>
-            <a:off x="5001768" y="3440296"/>
+          <p:cNvPr id="59" name="Text 57"/>
+          <p:cNvSpPr txBox="1"/>
+          <p:nvPr/>
+        </p:nvSpPr>
+        <p:spPr>
+          <a:xfrm>
+            <a:off x="5047488" y="3440296"/>
             <a:ext cx="868680" cy="248502"/>
           </a:xfrm>
           <a:prstGeom prst="rect">
@@ -23585,14 +25204,53 @@
       </p:sp>
       <p:sp>
         <p:nvSpPr>
-          <p:cNvPr id="52" name="Text 50"/>
+          <p:cNvPr id="60" name="Text 58"/>
           <p:cNvSpPr txBox="1"/>
           <p:nvPr/>
         </p:nvSpPr>
         <p:spPr>
           <a:xfrm>
             <a:off x="658368" y="3688797"/>
-            <a:ext cx="1938528" cy="248502"/>
+            <a:ext cx="310896" cy="248502"/>
+          </a:xfrm>
+          <a:prstGeom prst="rect">
+            <a:avLst/>
+          </a:prstGeom>
+          <a:noFill/>
+          <a:ln/>
+        </p:spPr>
+        <p:txBody>
+          <a:bodyPr wrap="square" lIns="0" tIns="0" rIns="0" bIns="0" rtlCol="0" anchor="ctr"/>
+          <a:lstStyle/>
+          <a:p>
+            <a:pPr algn="r" indent="0" marL="0">
+              <a:buNone/>
+            </a:pPr>
+            <a:r>
+              <a:rPr lang="en-US" sz="1200" dirty="0">
+                <a:solidFill>
+                  <a:srgbClr val="9AA3AD"/>
+                </a:solidFill>
+                <a:latin typeface="Inter" pitchFamily="34" charset="0"/>
+                <a:ea typeface="Inter" pitchFamily="34" charset="-122"/>
+                <a:cs typeface="Inter" pitchFamily="34" charset="-120"/>
+              </a:rPr>
+              <a:t>9</a:t>
+            </a:r>
+            <a:endParaRPr lang="en-US" sz="1200" dirty="0"/>
+          </a:p>
+        </p:txBody>
+      </p:sp>
+      <p:sp>
+        <p:nvSpPr>
+          <p:cNvPr id="61" name="Text 59"/>
+          <p:cNvSpPr txBox="1"/>
+          <p:nvPr/>
+        </p:nvSpPr>
+        <p:spPr>
+          <a:xfrm>
+            <a:off x="1014984" y="3688797"/>
+            <a:ext cx="1783080" cy="248502"/>
           </a:xfrm>
           <a:prstGeom prst="rect">
             <a:avLst/>
@@ -23624,14 +25282,14 @@
       </p:sp>
       <p:sp>
         <p:nvSpPr>
-          <p:cNvPr id="53" name="Shape 51"/>
+          <p:cNvPr id="62" name="Shape 60"/>
           <p:cNvSpPr/>
           <p:nvPr/>
         </p:nvSpPr>
         <p:spPr>
           <a:xfrm>
-            <a:off x="2670048" y="3744710"/>
-            <a:ext cx="361163" cy="136676"/>
+            <a:off x="2871216" y="3744710"/>
+            <a:ext cx="270873" cy="136676"/>
           </a:xfrm>
           <a:prstGeom prst="rect">
             <a:avLst/>
@@ -23644,13 +25302,13 @@
       </p:sp>
       <p:sp>
         <p:nvSpPr>
-          <p:cNvPr id="54" name="Text 52"/>
-          <p:cNvSpPr txBox="1"/>
-          <p:nvPr/>
-        </p:nvSpPr>
-        <p:spPr>
-          <a:xfrm>
-            <a:off x="3346704" y="3688797"/>
+          <p:cNvPr id="63" name="Text 61"/>
+          <p:cNvSpPr txBox="1"/>
+          <p:nvPr/>
+        </p:nvSpPr>
+        <p:spPr>
+          <a:xfrm>
+            <a:off x="3392424" y="3688797"/>
             <a:ext cx="786384" cy="248502"/>
           </a:xfrm>
           <a:prstGeom prst="rect">
@@ -23683,13 +25341,13 @@
       </p:sp>
       <p:sp>
         <p:nvSpPr>
-          <p:cNvPr id="55" name="Text 53"/>
-          <p:cNvSpPr txBox="1"/>
-          <p:nvPr/>
-        </p:nvSpPr>
-        <p:spPr>
-          <a:xfrm>
-            <a:off x="4133088" y="3688797"/>
+          <p:cNvPr id="64" name="Text 62"/>
+          <p:cNvSpPr txBox="1"/>
+          <p:nvPr/>
+        </p:nvSpPr>
+        <p:spPr>
+          <a:xfrm>
+            <a:off x="4178808" y="3688797"/>
             <a:ext cx="868680" cy="248502"/>
           </a:xfrm>
           <a:prstGeom prst="rect">
@@ -23722,13 +25380,13 @@
       </p:sp>
       <p:sp>
         <p:nvSpPr>
-          <p:cNvPr id="56" name="Text 54"/>
-          <p:cNvSpPr txBox="1"/>
-          <p:nvPr/>
-        </p:nvSpPr>
-        <p:spPr>
-          <a:xfrm>
-            <a:off x="5001768" y="3688797"/>
+          <p:cNvPr id="65" name="Text 63"/>
+          <p:cNvSpPr txBox="1"/>
+          <p:nvPr/>
+        </p:nvSpPr>
+        <p:spPr>
+          <a:xfrm>
+            <a:off x="5047488" y="3688797"/>
             <a:ext cx="868680" cy="248502"/>
           </a:xfrm>
           <a:prstGeom prst="rect">
@@ -23761,14 +25419,53 @@
       </p:sp>
       <p:sp>
         <p:nvSpPr>
-          <p:cNvPr id="57" name="Text 55"/>
+          <p:cNvPr id="66" name="Text 64"/>
           <p:cNvSpPr txBox="1"/>
           <p:nvPr/>
         </p:nvSpPr>
         <p:spPr>
           <a:xfrm>
             <a:off x="658368" y="3937299"/>
-            <a:ext cx="1938528" cy="248502"/>
+            <a:ext cx="310896" cy="248502"/>
+          </a:xfrm>
+          <a:prstGeom prst="rect">
+            <a:avLst/>
+          </a:prstGeom>
+          <a:noFill/>
+          <a:ln/>
+        </p:spPr>
+        <p:txBody>
+          <a:bodyPr wrap="square" lIns="0" tIns="0" rIns="0" bIns="0" rtlCol="0" anchor="ctr"/>
+          <a:lstStyle/>
+          <a:p>
+            <a:pPr algn="r" indent="0" marL="0">
+              <a:buNone/>
+            </a:pPr>
+            <a:r>
+              <a:rPr lang="en-US" sz="1200" dirty="0">
+                <a:solidFill>
+                  <a:srgbClr val="9AA3AD"/>
+                </a:solidFill>
+                <a:latin typeface="Inter" pitchFamily="34" charset="0"/>
+                <a:ea typeface="Inter" pitchFamily="34" charset="-122"/>
+                <a:cs typeface="Inter" pitchFamily="34" charset="-120"/>
+              </a:rPr>
+              <a:t>10</a:t>
+            </a:r>
+            <a:endParaRPr lang="en-US" sz="1200" dirty="0"/>
+          </a:p>
+        </p:txBody>
+      </p:sp>
+      <p:sp>
+        <p:nvSpPr>
+          <p:cNvPr id="67" name="Text 65"/>
+          <p:cNvSpPr txBox="1"/>
+          <p:nvPr/>
+        </p:nvSpPr>
+        <p:spPr>
+          <a:xfrm>
+            <a:off x="1014984" y="3937299"/>
+            <a:ext cx="1783080" cy="248502"/>
           </a:xfrm>
           <a:prstGeom prst="rect">
             <a:avLst/>
@@ -23800,14 +25497,14 @@
       </p:sp>
       <p:sp>
         <p:nvSpPr>
-          <p:cNvPr id="58" name="Shape 56"/>
+          <p:cNvPr id="68" name="Shape 66"/>
           <p:cNvSpPr/>
           <p:nvPr/>
         </p:nvSpPr>
         <p:spPr>
           <a:xfrm>
-            <a:off x="2670048" y="3993212"/>
-            <a:ext cx="289514" cy="136676"/>
+            <a:off x="2871216" y="3993212"/>
+            <a:ext cx="217136" cy="136676"/>
           </a:xfrm>
           <a:prstGeom prst="rect">
             <a:avLst/>
@@ -23820,13 +25517,13 @@
       </p:sp>
       <p:sp>
         <p:nvSpPr>
-          <p:cNvPr id="59" name="Text 57"/>
-          <p:cNvSpPr txBox="1"/>
-          <p:nvPr/>
-        </p:nvSpPr>
-        <p:spPr>
-          <a:xfrm>
-            <a:off x="3346704" y="3937299"/>
+          <p:cNvPr id="69" name="Text 67"/>
+          <p:cNvSpPr txBox="1"/>
+          <p:nvPr/>
+        </p:nvSpPr>
+        <p:spPr>
+          <a:xfrm>
+            <a:off x="3392424" y="3937299"/>
             <a:ext cx="786384" cy="248502"/>
           </a:xfrm>
           <a:prstGeom prst="rect">
@@ -23859,13 +25556,13 @@
       </p:sp>
       <p:sp>
         <p:nvSpPr>
-          <p:cNvPr id="60" name="Text 58"/>
-          <p:cNvSpPr txBox="1"/>
-          <p:nvPr/>
-        </p:nvSpPr>
-        <p:spPr>
-          <a:xfrm>
-            <a:off x="4133088" y="3937299"/>
+          <p:cNvPr id="70" name="Text 68"/>
+          <p:cNvSpPr txBox="1"/>
+          <p:nvPr/>
+        </p:nvSpPr>
+        <p:spPr>
+          <a:xfrm>
+            <a:off x="4178808" y="3937299"/>
             <a:ext cx="868680" cy="248502"/>
           </a:xfrm>
           <a:prstGeom prst="rect">
@@ -23898,13 +25595,13 @@
       </p:sp>
       <p:sp>
         <p:nvSpPr>
-          <p:cNvPr id="61" name="Text 59"/>
-          <p:cNvSpPr txBox="1"/>
-          <p:nvPr/>
-        </p:nvSpPr>
-        <p:spPr>
-          <a:xfrm>
-            <a:off x="5001768" y="3937299"/>
+          <p:cNvPr id="71" name="Text 69"/>
+          <p:cNvSpPr txBox="1"/>
+          <p:nvPr/>
+        </p:nvSpPr>
+        <p:spPr>
+          <a:xfrm>
+            <a:off x="5047488" y="3937299"/>
             <a:ext cx="868680" cy="248502"/>
           </a:xfrm>
           <a:prstGeom prst="rect">
@@ -23937,14 +25634,53 @@
       </p:sp>
       <p:sp>
         <p:nvSpPr>
-          <p:cNvPr id="62" name="Text 60"/>
+          <p:cNvPr id="72" name="Text 70"/>
           <p:cNvSpPr txBox="1"/>
           <p:nvPr/>
         </p:nvSpPr>
         <p:spPr>
           <a:xfrm>
             <a:off x="658368" y="4185800"/>
-            <a:ext cx="1938528" cy="248502"/>
+            <a:ext cx="310896" cy="248502"/>
+          </a:xfrm>
+          <a:prstGeom prst="rect">
+            <a:avLst/>
+          </a:prstGeom>
+          <a:noFill/>
+          <a:ln/>
+        </p:spPr>
+        <p:txBody>
+          <a:bodyPr wrap="square" lIns="0" tIns="0" rIns="0" bIns="0" rtlCol="0" anchor="ctr"/>
+          <a:lstStyle/>
+          <a:p>
+            <a:pPr algn="r" indent="0" marL="0">
+              <a:buNone/>
+            </a:pPr>
+            <a:r>
+              <a:rPr lang="en-US" sz="1200" dirty="0">
+                <a:solidFill>
+                  <a:srgbClr val="9AA3AD"/>
+                </a:solidFill>
+                <a:latin typeface="Inter" pitchFamily="34" charset="0"/>
+                <a:ea typeface="Inter" pitchFamily="34" charset="-122"/>
+                <a:cs typeface="Inter" pitchFamily="34" charset="-120"/>
+              </a:rPr>
+              <a:t>11</a:t>
+            </a:r>
+            <a:endParaRPr lang="en-US" sz="1200" dirty="0"/>
+          </a:p>
+        </p:txBody>
+      </p:sp>
+      <p:sp>
+        <p:nvSpPr>
+          <p:cNvPr id="73" name="Text 71"/>
+          <p:cNvSpPr txBox="1"/>
+          <p:nvPr/>
+        </p:nvSpPr>
+        <p:spPr>
+          <a:xfrm>
+            <a:off x="1014984" y="4185800"/>
+            <a:ext cx="1783080" cy="248502"/>
           </a:xfrm>
           <a:prstGeom prst="rect">
             <a:avLst/>
@@ -23976,14 +25712,14 @@
       </p:sp>
       <p:sp>
         <p:nvSpPr>
-          <p:cNvPr id="63" name="Shape 61"/>
+          <p:cNvPr id="74" name="Shape 72"/>
           <p:cNvSpPr/>
           <p:nvPr/>
         </p:nvSpPr>
         <p:spPr>
           <a:xfrm>
-            <a:off x="2670048" y="4241713"/>
-            <a:ext cx="280378" cy="136676"/>
+            <a:off x="2871216" y="4241713"/>
+            <a:ext cx="210283" cy="136676"/>
           </a:xfrm>
           <a:prstGeom prst="rect">
             <a:avLst/>
@@ -23996,13 +25732,13 @@
       </p:sp>
       <p:sp>
         <p:nvSpPr>
-          <p:cNvPr id="64" name="Text 62"/>
-          <p:cNvSpPr txBox="1"/>
-          <p:nvPr/>
-        </p:nvSpPr>
-        <p:spPr>
-          <a:xfrm>
-            <a:off x="3346704" y="4185800"/>
+          <p:cNvPr id="75" name="Text 73"/>
+          <p:cNvSpPr txBox="1"/>
+          <p:nvPr/>
+        </p:nvSpPr>
+        <p:spPr>
+          <a:xfrm>
+            <a:off x="3392424" y="4185800"/>
             <a:ext cx="786384" cy="248502"/>
           </a:xfrm>
           <a:prstGeom prst="rect">
@@ -24035,13 +25771,13 @@
       </p:sp>
       <p:sp>
         <p:nvSpPr>
-          <p:cNvPr id="65" name="Text 63"/>
-          <p:cNvSpPr txBox="1"/>
-          <p:nvPr/>
-        </p:nvSpPr>
-        <p:spPr>
-          <a:xfrm>
-            <a:off x="4133088" y="4185800"/>
+          <p:cNvPr id="76" name="Text 74"/>
+          <p:cNvSpPr txBox="1"/>
+          <p:nvPr/>
+        </p:nvSpPr>
+        <p:spPr>
+          <a:xfrm>
+            <a:off x="4178808" y="4185800"/>
             <a:ext cx="868680" cy="248502"/>
           </a:xfrm>
           <a:prstGeom prst="rect">
@@ -24074,13 +25810,13 @@
       </p:sp>
       <p:sp>
         <p:nvSpPr>
-          <p:cNvPr id="66" name="Text 64"/>
-          <p:cNvSpPr txBox="1"/>
-          <p:nvPr/>
-        </p:nvSpPr>
-        <p:spPr>
-          <a:xfrm>
-            <a:off x="5001768" y="4185800"/>
+          <p:cNvPr id="77" name="Text 75"/>
+          <p:cNvSpPr txBox="1"/>
+          <p:nvPr/>
+        </p:nvSpPr>
+        <p:spPr>
+          <a:xfrm>
+            <a:off x="5047488" y="4185800"/>
             <a:ext cx="868680" cy="248502"/>
           </a:xfrm>
           <a:prstGeom prst="rect">
@@ -24113,14 +25849,53 @@
       </p:sp>
       <p:sp>
         <p:nvSpPr>
-          <p:cNvPr id="67" name="Text 65"/>
+          <p:cNvPr id="78" name="Text 76"/>
           <p:cNvSpPr txBox="1"/>
           <p:nvPr/>
         </p:nvSpPr>
         <p:spPr>
           <a:xfrm>
             <a:off x="658368" y="4434302"/>
-            <a:ext cx="1938528" cy="248502"/>
+            <a:ext cx="310896" cy="248502"/>
+          </a:xfrm>
+          <a:prstGeom prst="rect">
+            <a:avLst/>
+          </a:prstGeom>
+          <a:noFill/>
+          <a:ln/>
+        </p:spPr>
+        <p:txBody>
+          <a:bodyPr wrap="square" lIns="0" tIns="0" rIns="0" bIns="0" rtlCol="0" anchor="ctr"/>
+          <a:lstStyle/>
+          <a:p>
+            <a:pPr algn="r" indent="0" marL="0">
+              <a:buNone/>
+            </a:pPr>
+            <a:r>
+              <a:rPr lang="en-US" sz="1200" dirty="0">
+                <a:solidFill>
+                  <a:srgbClr val="9AA3AD"/>
+                </a:solidFill>
+                <a:latin typeface="Inter" pitchFamily="34" charset="0"/>
+                <a:ea typeface="Inter" pitchFamily="34" charset="-122"/>
+                <a:cs typeface="Inter" pitchFamily="34" charset="-120"/>
+              </a:rPr>
+              <a:t>12</a:t>
+            </a:r>
+            <a:endParaRPr lang="en-US" sz="1200" dirty="0"/>
+          </a:p>
+        </p:txBody>
+      </p:sp>
+      <p:sp>
+        <p:nvSpPr>
+          <p:cNvPr id="79" name="Text 77"/>
+          <p:cNvSpPr txBox="1"/>
+          <p:nvPr/>
+        </p:nvSpPr>
+        <p:spPr>
+          <a:xfrm>
+            <a:off x="1014984" y="4434302"/>
+            <a:ext cx="1783080" cy="248502"/>
           </a:xfrm>
           <a:prstGeom prst="rect">
             <a:avLst/>
@@ -24152,14 +25927,14 @@
       </p:sp>
       <p:sp>
         <p:nvSpPr>
-          <p:cNvPr id="68" name="Shape 66"/>
+          <p:cNvPr id="80" name="Shape 78"/>
           <p:cNvSpPr/>
           <p:nvPr/>
         </p:nvSpPr>
         <p:spPr>
           <a:xfrm>
-            <a:off x="2670048" y="4490215"/>
-            <a:ext cx="265831" cy="136676"/>
+            <a:off x="2871216" y="4490215"/>
+            <a:ext cx="199373" cy="136676"/>
           </a:xfrm>
           <a:prstGeom prst="rect">
             <a:avLst/>
@@ -24172,13 +25947,13 @@
       </p:sp>
       <p:sp>
         <p:nvSpPr>
-          <p:cNvPr id="69" name="Text 67"/>
-          <p:cNvSpPr txBox="1"/>
-          <p:nvPr/>
-        </p:nvSpPr>
-        <p:spPr>
-          <a:xfrm>
-            <a:off x="3346704" y="4434302"/>
+          <p:cNvPr id="81" name="Text 79"/>
+          <p:cNvSpPr txBox="1"/>
+          <p:nvPr/>
+        </p:nvSpPr>
+        <p:spPr>
+          <a:xfrm>
+            <a:off x="3392424" y="4434302"/>
             <a:ext cx="786384" cy="248502"/>
           </a:xfrm>
           <a:prstGeom prst="rect">
@@ -24211,13 +25986,13 @@
       </p:sp>
       <p:sp>
         <p:nvSpPr>
-          <p:cNvPr id="70" name="Text 68"/>
-          <p:cNvSpPr txBox="1"/>
-          <p:nvPr/>
-        </p:nvSpPr>
-        <p:spPr>
-          <a:xfrm>
-            <a:off x="4133088" y="4434302"/>
+          <p:cNvPr id="82" name="Text 80"/>
+          <p:cNvSpPr txBox="1"/>
+          <p:nvPr/>
+        </p:nvSpPr>
+        <p:spPr>
+          <a:xfrm>
+            <a:off x="4178808" y="4434302"/>
             <a:ext cx="868680" cy="248502"/>
           </a:xfrm>
           <a:prstGeom prst="rect">
@@ -24250,13 +26025,13 @@
       </p:sp>
       <p:sp>
         <p:nvSpPr>
-          <p:cNvPr id="71" name="Text 69"/>
-          <p:cNvSpPr txBox="1"/>
-          <p:nvPr/>
-        </p:nvSpPr>
-        <p:spPr>
-          <a:xfrm>
-            <a:off x="5001768" y="4434302"/>
+          <p:cNvPr id="83" name="Text 81"/>
+          <p:cNvSpPr txBox="1"/>
+          <p:nvPr/>
+        </p:nvSpPr>
+        <p:spPr>
+          <a:xfrm>
+            <a:off x="5047488" y="4434302"/>
             <a:ext cx="868680" cy="248502"/>
           </a:xfrm>
           <a:prstGeom prst="rect">
@@ -24289,14 +26064,53 @@
       </p:sp>
       <p:sp>
         <p:nvSpPr>
-          <p:cNvPr id="72" name="Text 70"/>
+          <p:cNvPr id="84" name="Text 82"/>
           <p:cNvSpPr txBox="1"/>
           <p:nvPr/>
         </p:nvSpPr>
         <p:spPr>
           <a:xfrm>
             <a:off x="658368" y="4682804"/>
-            <a:ext cx="1938528" cy="248502"/>
+            <a:ext cx="310896" cy="248502"/>
+          </a:xfrm>
+          <a:prstGeom prst="rect">
+            <a:avLst/>
+          </a:prstGeom>
+          <a:noFill/>
+          <a:ln/>
+        </p:spPr>
+        <p:txBody>
+          <a:bodyPr wrap="square" lIns="0" tIns="0" rIns="0" bIns="0" rtlCol="0" anchor="ctr"/>
+          <a:lstStyle/>
+          <a:p>
+            <a:pPr algn="r" indent="0" marL="0">
+              <a:buNone/>
+            </a:pPr>
+            <a:r>
+              <a:rPr lang="en-US" sz="1200" dirty="0">
+                <a:solidFill>
+                  <a:srgbClr val="9AA3AD"/>
+                </a:solidFill>
+                <a:latin typeface="Inter" pitchFamily="34" charset="0"/>
+                <a:ea typeface="Inter" pitchFamily="34" charset="-122"/>
+                <a:cs typeface="Inter" pitchFamily="34" charset="-120"/>
+              </a:rPr>
+              <a:t>13</a:t>
+            </a:r>
+            <a:endParaRPr lang="en-US" sz="1200" dirty="0"/>
+          </a:p>
+        </p:txBody>
+      </p:sp>
+      <p:sp>
+        <p:nvSpPr>
+          <p:cNvPr id="85" name="Text 83"/>
+          <p:cNvSpPr txBox="1"/>
+          <p:nvPr/>
+        </p:nvSpPr>
+        <p:spPr>
+          <a:xfrm>
+            <a:off x="1014984" y="4682804"/>
+            <a:ext cx="1783080" cy="248502"/>
           </a:xfrm>
           <a:prstGeom prst="rect">
             <a:avLst/>
@@ -24328,14 +26142,14 @@
       </p:sp>
       <p:sp>
         <p:nvSpPr>
-          <p:cNvPr id="73" name="Shape 71"/>
+          <p:cNvPr id="86" name="Shape 84"/>
           <p:cNvSpPr/>
           <p:nvPr/>
         </p:nvSpPr>
         <p:spPr>
           <a:xfrm>
-            <a:off x="2670048" y="4738717"/>
-            <a:ext cx="263180" cy="136676"/>
+            <a:off x="2871216" y="4738717"/>
+            <a:ext cx="197385" cy="136676"/>
           </a:xfrm>
           <a:prstGeom prst="rect">
             <a:avLst/>
@@ -24348,13 +26162,13 @@
       </p:sp>
       <p:sp>
         <p:nvSpPr>
-          <p:cNvPr id="74" name="Text 72"/>
-          <p:cNvSpPr txBox="1"/>
-          <p:nvPr/>
-        </p:nvSpPr>
-        <p:spPr>
-          <a:xfrm>
-            <a:off x="3346704" y="4682804"/>
+          <p:cNvPr id="87" name="Text 85"/>
+          <p:cNvSpPr txBox="1"/>
+          <p:nvPr/>
+        </p:nvSpPr>
+        <p:spPr>
+          <a:xfrm>
+            <a:off x="3392424" y="4682804"/>
             <a:ext cx="786384" cy="248502"/>
           </a:xfrm>
           <a:prstGeom prst="rect">
@@ -24387,13 +26201,13 @@
       </p:sp>
       <p:sp>
         <p:nvSpPr>
-          <p:cNvPr id="75" name="Text 73"/>
-          <p:cNvSpPr txBox="1"/>
-          <p:nvPr/>
-        </p:nvSpPr>
-        <p:spPr>
-          <a:xfrm>
-            <a:off x="4133088" y="4682804"/>
+          <p:cNvPr id="88" name="Text 86"/>
+          <p:cNvSpPr txBox="1"/>
+          <p:nvPr/>
+        </p:nvSpPr>
+        <p:spPr>
+          <a:xfrm>
+            <a:off x="4178808" y="4682804"/>
             <a:ext cx="868680" cy="248502"/>
           </a:xfrm>
           <a:prstGeom prst="rect">
@@ -24426,13 +26240,13 @@
       </p:sp>
       <p:sp>
         <p:nvSpPr>
-          <p:cNvPr id="76" name="Text 74"/>
-          <p:cNvSpPr txBox="1"/>
-          <p:nvPr/>
-        </p:nvSpPr>
-        <p:spPr>
-          <a:xfrm>
-            <a:off x="5001768" y="4682804"/>
+          <p:cNvPr id="89" name="Text 87"/>
+          <p:cNvSpPr txBox="1"/>
+          <p:nvPr/>
+        </p:nvSpPr>
+        <p:spPr>
+          <a:xfrm>
+            <a:off x="5047488" y="4682804"/>
             <a:ext cx="868680" cy="248502"/>
           </a:xfrm>
           <a:prstGeom prst="rect">
@@ -24465,14 +26279,53 @@
       </p:sp>
       <p:sp>
         <p:nvSpPr>
-          <p:cNvPr id="77" name="Text 75"/>
+          <p:cNvPr id="90" name="Text 88"/>
           <p:cNvSpPr txBox="1"/>
           <p:nvPr/>
         </p:nvSpPr>
         <p:spPr>
           <a:xfrm>
             <a:off x="658368" y="4931305"/>
-            <a:ext cx="1938528" cy="248502"/>
+            <a:ext cx="310896" cy="248502"/>
+          </a:xfrm>
+          <a:prstGeom prst="rect">
+            <a:avLst/>
+          </a:prstGeom>
+          <a:noFill/>
+          <a:ln/>
+        </p:spPr>
+        <p:txBody>
+          <a:bodyPr wrap="square" lIns="0" tIns="0" rIns="0" bIns="0" rtlCol="0" anchor="ctr"/>
+          <a:lstStyle/>
+          <a:p>
+            <a:pPr algn="r" indent="0" marL="0">
+              <a:buNone/>
+            </a:pPr>
+            <a:r>
+              <a:rPr lang="en-US" sz="1200" dirty="0">
+                <a:solidFill>
+                  <a:srgbClr val="9AA3AD"/>
+                </a:solidFill>
+                <a:latin typeface="Inter" pitchFamily="34" charset="0"/>
+                <a:ea typeface="Inter" pitchFamily="34" charset="-122"/>
+                <a:cs typeface="Inter" pitchFamily="34" charset="-120"/>
+              </a:rPr>
+              <a:t>14</a:t>
+            </a:r>
+            <a:endParaRPr lang="en-US" sz="1200" dirty="0"/>
+          </a:p>
+        </p:txBody>
+      </p:sp>
+      <p:sp>
+        <p:nvSpPr>
+          <p:cNvPr id="91" name="Text 89"/>
+          <p:cNvSpPr txBox="1"/>
+          <p:nvPr/>
+        </p:nvSpPr>
+        <p:spPr>
+          <a:xfrm>
+            <a:off x="1014984" y="4931305"/>
+            <a:ext cx="1783080" cy="248502"/>
           </a:xfrm>
           <a:prstGeom prst="rect">
             <a:avLst/>
@@ -24504,14 +26357,14 @@
       </p:sp>
       <p:sp>
         <p:nvSpPr>
-          <p:cNvPr id="78" name="Shape 76"/>
+          <p:cNvPr id="92" name="Shape 90"/>
           <p:cNvSpPr/>
           <p:nvPr/>
         </p:nvSpPr>
         <p:spPr>
           <a:xfrm>
-            <a:off x="2670048" y="4987218"/>
-            <a:ext cx="225366" cy="136676"/>
+            <a:off x="2871216" y="4987218"/>
+            <a:ext cx="169024" cy="136676"/>
           </a:xfrm>
           <a:prstGeom prst="rect">
             <a:avLst/>
@@ -24524,13 +26377,13 @@
       </p:sp>
       <p:sp>
         <p:nvSpPr>
-          <p:cNvPr id="79" name="Text 77"/>
-          <p:cNvSpPr txBox="1"/>
-          <p:nvPr/>
-        </p:nvSpPr>
-        <p:spPr>
-          <a:xfrm>
-            <a:off x="3346704" y="4931305"/>
+          <p:cNvPr id="93" name="Text 91"/>
+          <p:cNvSpPr txBox="1"/>
+          <p:nvPr/>
+        </p:nvSpPr>
+        <p:spPr>
+          <a:xfrm>
+            <a:off x="3392424" y="4931305"/>
             <a:ext cx="786384" cy="248502"/>
           </a:xfrm>
           <a:prstGeom prst="rect">
@@ -24563,13 +26416,13 @@
       </p:sp>
       <p:sp>
         <p:nvSpPr>
-          <p:cNvPr id="80" name="Text 78"/>
-          <p:cNvSpPr txBox="1"/>
-          <p:nvPr/>
-        </p:nvSpPr>
-        <p:spPr>
-          <a:xfrm>
-            <a:off x="4133088" y="4931305"/>
+          <p:cNvPr id="94" name="Text 92"/>
+          <p:cNvSpPr txBox="1"/>
+          <p:nvPr/>
+        </p:nvSpPr>
+        <p:spPr>
+          <a:xfrm>
+            <a:off x="4178808" y="4931305"/>
             <a:ext cx="868680" cy="248502"/>
           </a:xfrm>
           <a:prstGeom prst="rect">
@@ -24602,13 +26455,13 @@
       </p:sp>
       <p:sp>
         <p:nvSpPr>
-          <p:cNvPr id="81" name="Text 79"/>
-          <p:cNvSpPr txBox="1"/>
-          <p:nvPr/>
-        </p:nvSpPr>
-        <p:spPr>
-          <a:xfrm>
-            <a:off x="5001768" y="4931305"/>
+          <p:cNvPr id="95" name="Text 93"/>
+          <p:cNvSpPr txBox="1"/>
+          <p:nvPr/>
+        </p:nvSpPr>
+        <p:spPr>
+          <a:xfrm>
+            <a:off x="5047488" y="4931305"/>
             <a:ext cx="868680" cy="248502"/>
           </a:xfrm>
           <a:prstGeom prst="rect">
@@ -24641,14 +26494,53 @@
       </p:sp>
       <p:sp>
         <p:nvSpPr>
-          <p:cNvPr id="82" name="Text 80"/>
+          <p:cNvPr id="96" name="Text 94"/>
           <p:cNvSpPr txBox="1"/>
           <p:nvPr/>
         </p:nvSpPr>
         <p:spPr>
           <a:xfrm>
             <a:off x="658368" y="5179807"/>
-            <a:ext cx="1938528" cy="248502"/>
+            <a:ext cx="310896" cy="248502"/>
+          </a:xfrm>
+          <a:prstGeom prst="rect">
+            <a:avLst/>
+          </a:prstGeom>
+          <a:noFill/>
+          <a:ln/>
+        </p:spPr>
+        <p:txBody>
+          <a:bodyPr wrap="square" lIns="0" tIns="0" rIns="0" bIns="0" rtlCol="0" anchor="ctr"/>
+          <a:lstStyle/>
+          <a:p>
+            <a:pPr algn="r" indent="0" marL="0">
+              <a:buNone/>
+            </a:pPr>
+            <a:r>
+              <a:rPr lang="en-US" sz="1200" dirty="0">
+                <a:solidFill>
+                  <a:srgbClr val="9AA3AD"/>
+                </a:solidFill>
+                <a:latin typeface="Inter" pitchFamily="34" charset="0"/>
+                <a:ea typeface="Inter" pitchFamily="34" charset="-122"/>
+                <a:cs typeface="Inter" pitchFamily="34" charset="-120"/>
+              </a:rPr>
+              <a:t>15</a:t>
+            </a:r>
+            <a:endParaRPr lang="en-US" sz="1200" dirty="0"/>
+          </a:p>
+        </p:txBody>
+      </p:sp>
+      <p:sp>
+        <p:nvSpPr>
+          <p:cNvPr id="97" name="Text 95"/>
+          <p:cNvSpPr txBox="1"/>
+          <p:nvPr/>
+        </p:nvSpPr>
+        <p:spPr>
+          <a:xfrm>
+            <a:off x="1014984" y="5179807"/>
+            <a:ext cx="1783080" cy="248502"/>
           </a:xfrm>
           <a:prstGeom prst="rect">
             <a:avLst/>
@@ -24680,14 +26572,14 @@
       </p:sp>
       <p:sp>
         <p:nvSpPr>
-          <p:cNvPr id="83" name="Shape 81"/>
+          <p:cNvPr id="98" name="Shape 96"/>
           <p:cNvSpPr/>
           <p:nvPr/>
         </p:nvSpPr>
         <p:spPr>
           <a:xfrm>
-            <a:off x="2670048" y="5235720"/>
-            <a:ext cx="175448" cy="136676"/>
+            <a:off x="2871216" y="5235720"/>
+            <a:ext cx="131586" cy="136676"/>
           </a:xfrm>
           <a:prstGeom prst="rect">
             <a:avLst/>
@@ -24700,13 +26592,13 @@
       </p:sp>
       <p:sp>
         <p:nvSpPr>
-          <p:cNvPr id="84" name="Text 82"/>
-          <p:cNvSpPr txBox="1"/>
-          <p:nvPr/>
-        </p:nvSpPr>
-        <p:spPr>
-          <a:xfrm>
-            <a:off x="3346704" y="5179807"/>
+          <p:cNvPr id="99" name="Text 97"/>
+          <p:cNvSpPr txBox="1"/>
+          <p:nvPr/>
+        </p:nvSpPr>
+        <p:spPr>
+          <a:xfrm>
+            <a:off x="3392424" y="5179807"/>
             <a:ext cx="786384" cy="248502"/>
           </a:xfrm>
           <a:prstGeom prst="rect">
@@ -24739,13 +26631,13 @@
       </p:sp>
       <p:sp>
         <p:nvSpPr>
-          <p:cNvPr id="85" name="Text 83"/>
-          <p:cNvSpPr txBox="1"/>
-          <p:nvPr/>
-        </p:nvSpPr>
-        <p:spPr>
-          <a:xfrm>
-            <a:off x="4133088" y="5179807"/>
+          <p:cNvPr id="100" name="Text 98"/>
+          <p:cNvSpPr txBox="1"/>
+          <p:nvPr/>
+        </p:nvSpPr>
+        <p:spPr>
+          <a:xfrm>
+            <a:off x="4178808" y="5179807"/>
             <a:ext cx="868680" cy="248502"/>
           </a:xfrm>
           <a:prstGeom prst="rect">
@@ -24778,13 +26670,13 @@
       </p:sp>
       <p:sp>
         <p:nvSpPr>
-          <p:cNvPr id="86" name="Text 84"/>
-          <p:cNvSpPr txBox="1"/>
-          <p:nvPr/>
-        </p:nvSpPr>
-        <p:spPr>
-          <a:xfrm>
-            <a:off x="5001768" y="5179807"/>
+          <p:cNvPr id="101" name="Text 99"/>
+          <p:cNvSpPr txBox="1"/>
+          <p:nvPr/>
+        </p:nvSpPr>
+        <p:spPr>
+          <a:xfrm>
+            <a:off x="5047488" y="5179807"/>
             <a:ext cx="868680" cy="248502"/>
           </a:xfrm>
           <a:prstGeom prst="rect">
@@ -24817,14 +26709,53 @@
       </p:sp>
       <p:sp>
         <p:nvSpPr>
-          <p:cNvPr id="87" name="Text 85"/>
+          <p:cNvPr id="102" name="Text 100"/>
           <p:cNvSpPr txBox="1"/>
           <p:nvPr/>
         </p:nvSpPr>
         <p:spPr>
           <a:xfrm>
             <a:off x="658368" y="5428309"/>
-            <a:ext cx="1938528" cy="248502"/>
+            <a:ext cx="310896" cy="248502"/>
+          </a:xfrm>
+          <a:prstGeom prst="rect">
+            <a:avLst/>
+          </a:prstGeom>
+          <a:noFill/>
+          <a:ln/>
+        </p:spPr>
+        <p:txBody>
+          <a:bodyPr wrap="square" lIns="0" tIns="0" rIns="0" bIns="0" rtlCol="0" anchor="ctr"/>
+          <a:lstStyle/>
+          <a:p>
+            <a:pPr algn="r" indent="0" marL="0">
+              <a:buNone/>
+            </a:pPr>
+            <a:r>
+              <a:rPr lang="en-US" sz="1200" dirty="0">
+                <a:solidFill>
+                  <a:srgbClr val="9AA3AD"/>
+                </a:solidFill>
+                <a:latin typeface="Inter" pitchFamily="34" charset="0"/>
+                <a:ea typeface="Inter" pitchFamily="34" charset="-122"/>
+                <a:cs typeface="Inter" pitchFamily="34" charset="-120"/>
+              </a:rPr>
+              <a:t>16</a:t>
+            </a:r>
+            <a:endParaRPr lang="en-US" sz="1200" dirty="0"/>
+          </a:p>
+        </p:txBody>
+      </p:sp>
+      <p:sp>
+        <p:nvSpPr>
+          <p:cNvPr id="103" name="Text 101"/>
+          <p:cNvSpPr txBox="1"/>
+          <p:nvPr/>
+        </p:nvSpPr>
+        <p:spPr>
+          <a:xfrm>
+            <a:off x="1014984" y="5428309"/>
+            <a:ext cx="1783080" cy="248502"/>
           </a:xfrm>
           <a:prstGeom prst="rect">
             <a:avLst/>
@@ -24856,14 +26787,14 @@
       </p:sp>
       <p:sp>
         <p:nvSpPr>
-          <p:cNvPr id="88" name="Shape 86"/>
+          <p:cNvPr id="104" name="Shape 102"/>
           <p:cNvSpPr/>
           <p:nvPr/>
         </p:nvSpPr>
         <p:spPr>
           <a:xfrm>
-            <a:off x="2670048" y="5484222"/>
-            <a:ext cx="161118" cy="136676"/>
+            <a:off x="2871216" y="5484222"/>
+            <a:ext cx="120839" cy="136676"/>
           </a:xfrm>
           <a:prstGeom prst="rect">
             <a:avLst/>
@@ -24876,13 +26807,13 @@
       </p:sp>
       <p:sp>
         <p:nvSpPr>
-          <p:cNvPr id="89" name="Text 87"/>
-          <p:cNvSpPr txBox="1"/>
-          <p:nvPr/>
-        </p:nvSpPr>
-        <p:spPr>
-          <a:xfrm>
-            <a:off x="3346704" y="5428309"/>
+          <p:cNvPr id="105" name="Text 103"/>
+          <p:cNvSpPr txBox="1"/>
+          <p:nvPr/>
+        </p:nvSpPr>
+        <p:spPr>
+          <a:xfrm>
+            <a:off x="3392424" y="5428309"/>
             <a:ext cx="786384" cy="248502"/>
           </a:xfrm>
           <a:prstGeom prst="rect">
@@ -24915,13 +26846,13 @@
       </p:sp>
       <p:sp>
         <p:nvSpPr>
-          <p:cNvPr id="90" name="Text 88"/>
-          <p:cNvSpPr txBox="1"/>
-          <p:nvPr/>
-        </p:nvSpPr>
-        <p:spPr>
-          <a:xfrm>
-            <a:off x="4133088" y="5428309"/>
+          <p:cNvPr id="106" name="Text 104"/>
+          <p:cNvSpPr txBox="1"/>
+          <p:nvPr/>
+        </p:nvSpPr>
+        <p:spPr>
+          <a:xfrm>
+            <a:off x="4178808" y="5428309"/>
             <a:ext cx="868680" cy="248502"/>
           </a:xfrm>
           <a:prstGeom prst="rect">
@@ -24954,13 +26885,13 @@
       </p:sp>
       <p:sp>
         <p:nvSpPr>
-          <p:cNvPr id="91" name="Text 89"/>
-          <p:cNvSpPr txBox="1"/>
-          <p:nvPr/>
-        </p:nvSpPr>
-        <p:spPr>
-          <a:xfrm>
-            <a:off x="5001768" y="5428309"/>
+          <p:cNvPr id="107" name="Text 105"/>
+          <p:cNvSpPr txBox="1"/>
+          <p:nvPr/>
+        </p:nvSpPr>
+        <p:spPr>
+          <a:xfrm>
+            <a:off x="5047488" y="5428309"/>
             <a:ext cx="868680" cy="248502"/>
           </a:xfrm>
           <a:prstGeom prst="rect">
@@ -24993,14 +26924,53 @@
       </p:sp>
       <p:sp>
         <p:nvSpPr>
-          <p:cNvPr id="92" name="Text 90"/>
+          <p:cNvPr id="108" name="Text 106"/>
           <p:cNvSpPr txBox="1"/>
           <p:nvPr/>
         </p:nvSpPr>
         <p:spPr>
           <a:xfrm>
             <a:off x="658368" y="5676810"/>
-            <a:ext cx="1938528" cy="248502"/>
+            <a:ext cx="310896" cy="248502"/>
+          </a:xfrm>
+          <a:prstGeom prst="rect">
+            <a:avLst/>
+          </a:prstGeom>
+          <a:noFill/>
+          <a:ln/>
+        </p:spPr>
+        <p:txBody>
+          <a:bodyPr wrap="square" lIns="0" tIns="0" rIns="0" bIns="0" rtlCol="0" anchor="ctr"/>
+          <a:lstStyle/>
+          <a:p>
+            <a:pPr algn="r" indent="0" marL="0">
+              <a:buNone/>
+            </a:pPr>
+            <a:r>
+              <a:rPr lang="en-US" sz="1200" dirty="0">
+                <a:solidFill>
+                  <a:srgbClr val="9AA3AD"/>
+                </a:solidFill>
+                <a:latin typeface="Inter" pitchFamily="34" charset="0"/>
+                <a:ea typeface="Inter" pitchFamily="34" charset="-122"/>
+                <a:cs typeface="Inter" pitchFamily="34" charset="-120"/>
+              </a:rPr>
+              <a:t>17</a:t>
+            </a:r>
+            <a:endParaRPr lang="en-US" sz="1200" dirty="0"/>
+          </a:p>
+        </p:txBody>
+      </p:sp>
+      <p:sp>
+        <p:nvSpPr>
+          <p:cNvPr id="109" name="Text 107"/>
+          <p:cNvSpPr txBox="1"/>
+          <p:nvPr/>
+        </p:nvSpPr>
+        <p:spPr>
+          <a:xfrm>
+            <a:off x="1014984" y="5676810"/>
+            <a:ext cx="1783080" cy="248502"/>
           </a:xfrm>
           <a:prstGeom prst="rect">
             <a:avLst/>
@@ -25032,14 +27002,14 @@
       </p:sp>
       <p:sp>
         <p:nvSpPr>
-          <p:cNvPr id="93" name="Shape 91"/>
+          <p:cNvPr id="110" name="Shape 108"/>
           <p:cNvSpPr/>
           <p:nvPr/>
         </p:nvSpPr>
         <p:spPr>
           <a:xfrm>
-            <a:off x="2670048" y="5732723"/>
-            <a:ext cx="155810" cy="136676"/>
+            <a:off x="2871216" y="5732723"/>
+            <a:ext cx="116857" cy="136676"/>
           </a:xfrm>
           <a:prstGeom prst="rect">
             <a:avLst/>
@@ -25052,13 +27022,13 @@
       </p:sp>
       <p:sp>
         <p:nvSpPr>
-          <p:cNvPr id="94" name="Text 92"/>
-          <p:cNvSpPr txBox="1"/>
-          <p:nvPr/>
-        </p:nvSpPr>
-        <p:spPr>
-          <a:xfrm>
-            <a:off x="3346704" y="5676810"/>
+          <p:cNvPr id="111" name="Text 109"/>
+          <p:cNvSpPr txBox="1"/>
+          <p:nvPr/>
+        </p:nvSpPr>
+        <p:spPr>
+          <a:xfrm>
+            <a:off x="3392424" y="5676810"/>
             <a:ext cx="786384" cy="248502"/>
           </a:xfrm>
           <a:prstGeom prst="rect">
@@ -25091,13 +27061,13 @@
       </p:sp>
       <p:sp>
         <p:nvSpPr>
-          <p:cNvPr id="95" name="Text 93"/>
-          <p:cNvSpPr txBox="1"/>
-          <p:nvPr/>
-        </p:nvSpPr>
-        <p:spPr>
-          <a:xfrm>
-            <a:off x="4133088" y="5676810"/>
+          <p:cNvPr id="112" name="Text 110"/>
+          <p:cNvSpPr txBox="1"/>
+          <p:nvPr/>
+        </p:nvSpPr>
+        <p:spPr>
+          <a:xfrm>
+            <a:off x="4178808" y="5676810"/>
             <a:ext cx="868680" cy="248502"/>
           </a:xfrm>
           <a:prstGeom prst="rect">
@@ -25130,13 +27100,13 @@
       </p:sp>
       <p:sp>
         <p:nvSpPr>
-          <p:cNvPr id="96" name="Text 94"/>
-          <p:cNvSpPr txBox="1"/>
-          <p:nvPr/>
-        </p:nvSpPr>
-        <p:spPr>
-          <a:xfrm>
-            <a:off x="5001768" y="5676810"/>
+          <p:cNvPr id="113" name="Text 111"/>
+          <p:cNvSpPr txBox="1"/>
+          <p:nvPr/>
+        </p:nvSpPr>
+        <p:spPr>
+          <a:xfrm>
+            <a:off x="5047488" y="5676810"/>
             <a:ext cx="868680" cy="248502"/>
           </a:xfrm>
           <a:prstGeom prst="rect">
@@ -25169,14 +27139,53 @@
       </p:sp>
       <p:sp>
         <p:nvSpPr>
-          <p:cNvPr id="97" name="Text 95"/>
+          <p:cNvPr id="114" name="Text 112"/>
           <p:cNvSpPr txBox="1"/>
           <p:nvPr/>
         </p:nvSpPr>
         <p:spPr>
           <a:xfrm>
             <a:off x="6208776" y="1700784"/>
-            <a:ext cx="1938528" cy="248502"/>
+            <a:ext cx="310896" cy="248502"/>
+          </a:xfrm>
+          <a:prstGeom prst="rect">
+            <a:avLst/>
+          </a:prstGeom>
+          <a:noFill/>
+          <a:ln/>
+        </p:spPr>
+        <p:txBody>
+          <a:bodyPr wrap="square" lIns="0" tIns="0" rIns="0" bIns="0" rtlCol="0" anchor="ctr"/>
+          <a:lstStyle/>
+          <a:p>
+            <a:pPr algn="r" indent="0" marL="0">
+              <a:buNone/>
+            </a:pPr>
+            <a:r>
+              <a:rPr lang="en-US" sz="1200" dirty="0">
+                <a:solidFill>
+                  <a:srgbClr val="9AA3AD"/>
+                </a:solidFill>
+                <a:latin typeface="Inter" pitchFamily="34" charset="0"/>
+                <a:ea typeface="Inter" pitchFamily="34" charset="-122"/>
+                <a:cs typeface="Inter" pitchFamily="34" charset="-120"/>
+              </a:rPr>
+              <a:t>18</a:t>
+            </a:r>
+            <a:endParaRPr lang="en-US" sz="1200" dirty="0"/>
+          </a:p>
+        </p:txBody>
+      </p:sp>
+      <p:sp>
+        <p:nvSpPr>
+          <p:cNvPr id="115" name="Text 113"/>
+          <p:cNvSpPr txBox="1"/>
+          <p:nvPr/>
+        </p:nvSpPr>
+        <p:spPr>
+          <a:xfrm>
+            <a:off x="6565392" y="1700784"/>
+            <a:ext cx="1783080" cy="248502"/>
           </a:xfrm>
           <a:prstGeom prst="rect">
             <a:avLst/>
@@ -25208,14 +27217,14 @@
       </p:sp>
       <p:sp>
         <p:nvSpPr>
-          <p:cNvPr id="98" name="Shape 96"/>
+          <p:cNvPr id="116" name="Shape 114"/>
           <p:cNvSpPr/>
           <p:nvPr/>
         </p:nvSpPr>
         <p:spPr>
           <a:xfrm>
-            <a:off x="8220456" y="1756697"/>
-            <a:ext cx="155313" cy="136676"/>
+            <a:off x="8421624" y="1756697"/>
+            <a:ext cx="116484" cy="136676"/>
           </a:xfrm>
           <a:prstGeom prst="rect">
             <a:avLst/>
@@ -25228,13 +27237,13 @@
       </p:sp>
       <p:sp>
         <p:nvSpPr>
-          <p:cNvPr id="99" name="Text 97"/>
-          <p:cNvSpPr txBox="1"/>
-          <p:nvPr/>
-        </p:nvSpPr>
-        <p:spPr>
-          <a:xfrm>
-            <a:off x="8897112" y="1700784"/>
+          <p:cNvPr id="117" name="Text 115"/>
+          <p:cNvSpPr txBox="1"/>
+          <p:nvPr/>
+        </p:nvSpPr>
+        <p:spPr>
+          <a:xfrm>
+            <a:off x="8942832" y="1700784"/>
             <a:ext cx="786384" cy="248502"/>
           </a:xfrm>
           <a:prstGeom prst="rect">
@@ -25267,13 +27276,13 @@
       </p:sp>
       <p:sp>
         <p:nvSpPr>
-          <p:cNvPr id="100" name="Text 98"/>
-          <p:cNvSpPr txBox="1"/>
-          <p:nvPr/>
-        </p:nvSpPr>
-        <p:spPr>
-          <a:xfrm>
-            <a:off x="9683496" y="1700784"/>
+          <p:cNvPr id="118" name="Text 116"/>
+          <p:cNvSpPr txBox="1"/>
+          <p:nvPr/>
+        </p:nvSpPr>
+        <p:spPr>
+          <a:xfrm>
+            <a:off x="9729216" y="1700784"/>
             <a:ext cx="868680" cy="248502"/>
           </a:xfrm>
           <a:prstGeom prst="rect">
@@ -25306,13 +27315,13 @@
       </p:sp>
       <p:sp>
         <p:nvSpPr>
-          <p:cNvPr id="101" name="Text 99"/>
-          <p:cNvSpPr txBox="1"/>
-          <p:nvPr/>
-        </p:nvSpPr>
-        <p:spPr>
-          <a:xfrm>
-            <a:off x="10552176" y="1700784"/>
+          <p:cNvPr id="119" name="Text 117"/>
+          <p:cNvSpPr txBox="1"/>
+          <p:nvPr/>
+        </p:nvSpPr>
+        <p:spPr>
+          <a:xfrm>
+            <a:off x="10597896" y="1700784"/>
             <a:ext cx="868680" cy="248502"/>
           </a:xfrm>
           <a:prstGeom prst="rect">
@@ -25345,14 +27354,53 @@
       </p:sp>
       <p:sp>
         <p:nvSpPr>
-          <p:cNvPr id="102" name="Text 100"/>
+          <p:cNvPr id="120" name="Text 118"/>
           <p:cNvSpPr txBox="1"/>
           <p:nvPr/>
         </p:nvSpPr>
         <p:spPr>
           <a:xfrm>
             <a:off x="6208776" y="1949286"/>
-            <a:ext cx="1938528" cy="248502"/>
+            <a:ext cx="310896" cy="248502"/>
+          </a:xfrm>
+          <a:prstGeom prst="rect">
+            <a:avLst/>
+          </a:prstGeom>
+          <a:noFill/>
+          <a:ln/>
+        </p:spPr>
+        <p:txBody>
+          <a:bodyPr wrap="square" lIns="0" tIns="0" rIns="0" bIns="0" rtlCol="0" anchor="ctr"/>
+          <a:lstStyle/>
+          <a:p>
+            <a:pPr algn="r" indent="0" marL="0">
+              <a:buNone/>
+            </a:pPr>
+            <a:r>
+              <a:rPr lang="en-US" sz="1200" dirty="0">
+                <a:solidFill>
+                  <a:srgbClr val="9AA3AD"/>
+                </a:solidFill>
+                <a:latin typeface="Inter" pitchFamily="34" charset="0"/>
+                <a:ea typeface="Inter" pitchFamily="34" charset="-122"/>
+                <a:cs typeface="Inter" pitchFamily="34" charset="-120"/>
+              </a:rPr>
+              <a:t>19</a:t>
+            </a:r>
+            <a:endParaRPr lang="en-US" sz="1200" dirty="0"/>
+          </a:p>
+        </p:txBody>
+      </p:sp>
+      <p:sp>
+        <p:nvSpPr>
+          <p:cNvPr id="121" name="Text 119"/>
+          <p:cNvSpPr txBox="1"/>
+          <p:nvPr/>
+        </p:nvSpPr>
+        <p:spPr>
+          <a:xfrm>
+            <a:off x="6565392" y="1949286"/>
+            <a:ext cx="1783080" cy="248502"/>
           </a:xfrm>
           <a:prstGeom prst="rect">
             <a:avLst/>
@@ -25384,14 +27432,14 @@
       </p:sp>
       <p:sp>
         <p:nvSpPr>
-          <p:cNvPr id="103" name="Shape 101"/>
+          <p:cNvPr id="122" name="Shape 120"/>
           <p:cNvSpPr/>
           <p:nvPr/>
         </p:nvSpPr>
         <p:spPr>
           <a:xfrm>
-            <a:off x="8220456" y="2005199"/>
-            <a:ext cx="154055" cy="136676"/>
+            <a:off x="8421624" y="2005199"/>
+            <a:ext cx="115541" cy="136676"/>
           </a:xfrm>
           <a:prstGeom prst="rect">
             <a:avLst/>
@@ -25404,13 +27452,13 @@
       </p:sp>
       <p:sp>
         <p:nvSpPr>
-          <p:cNvPr id="104" name="Text 102"/>
-          <p:cNvSpPr txBox="1"/>
-          <p:nvPr/>
-        </p:nvSpPr>
-        <p:spPr>
-          <a:xfrm>
-            <a:off x="8897112" y="1949286"/>
+          <p:cNvPr id="123" name="Text 121"/>
+          <p:cNvSpPr txBox="1"/>
+          <p:nvPr/>
+        </p:nvSpPr>
+        <p:spPr>
+          <a:xfrm>
+            <a:off x="8942832" y="1949286"/>
             <a:ext cx="786384" cy="248502"/>
           </a:xfrm>
           <a:prstGeom prst="rect">
@@ -25443,13 +27491,13 @@
       </p:sp>
       <p:sp>
         <p:nvSpPr>
-          <p:cNvPr id="105" name="Text 103"/>
-          <p:cNvSpPr txBox="1"/>
-          <p:nvPr/>
-        </p:nvSpPr>
-        <p:spPr>
-          <a:xfrm>
-            <a:off x="9683496" y="1949286"/>
+          <p:cNvPr id="124" name="Text 122"/>
+          <p:cNvSpPr txBox="1"/>
+          <p:nvPr/>
+        </p:nvSpPr>
+        <p:spPr>
+          <a:xfrm>
+            <a:off x="9729216" y="1949286"/>
             <a:ext cx="868680" cy="248502"/>
           </a:xfrm>
           <a:prstGeom prst="rect">
@@ -25482,13 +27530,13 @@
       </p:sp>
       <p:sp>
         <p:nvSpPr>
-          <p:cNvPr id="106" name="Text 104"/>
-          <p:cNvSpPr txBox="1"/>
-          <p:nvPr/>
-        </p:nvSpPr>
-        <p:spPr>
-          <a:xfrm>
-            <a:off x="10552176" y="1949286"/>
+          <p:cNvPr id="125" name="Text 123"/>
+          <p:cNvSpPr txBox="1"/>
+          <p:nvPr/>
+        </p:nvSpPr>
+        <p:spPr>
+          <a:xfrm>
+            <a:off x="10597896" y="1949286"/>
             <a:ext cx="868680" cy="248502"/>
           </a:xfrm>
           <a:prstGeom prst="rect">
@@ -25521,14 +27569,53 @@
       </p:sp>
       <p:sp>
         <p:nvSpPr>
-          <p:cNvPr id="107" name="Text 105"/>
+          <p:cNvPr id="126" name="Text 124"/>
           <p:cNvSpPr txBox="1"/>
           <p:nvPr/>
         </p:nvSpPr>
         <p:spPr>
           <a:xfrm>
             <a:off x="6208776" y="2197787"/>
-            <a:ext cx="1938528" cy="248502"/>
+            <a:ext cx="310896" cy="248502"/>
+          </a:xfrm>
+          <a:prstGeom prst="rect">
+            <a:avLst/>
+          </a:prstGeom>
+          <a:noFill/>
+          <a:ln/>
+        </p:spPr>
+        <p:txBody>
+          <a:bodyPr wrap="square" lIns="0" tIns="0" rIns="0" bIns="0" rtlCol="0" anchor="ctr"/>
+          <a:lstStyle/>
+          <a:p>
+            <a:pPr algn="r" indent="0" marL="0">
+              <a:buNone/>
+            </a:pPr>
+            <a:r>
+              <a:rPr lang="en-US" sz="1200" dirty="0">
+                <a:solidFill>
+                  <a:srgbClr val="9AA3AD"/>
+                </a:solidFill>
+                <a:latin typeface="Inter" pitchFamily="34" charset="0"/>
+                <a:ea typeface="Inter" pitchFamily="34" charset="-122"/>
+                <a:cs typeface="Inter" pitchFamily="34" charset="-120"/>
+              </a:rPr>
+              <a:t>20</a:t>
+            </a:r>
+            <a:endParaRPr lang="en-US" sz="1200" dirty="0"/>
+          </a:p>
+        </p:txBody>
+      </p:sp>
+      <p:sp>
+        <p:nvSpPr>
+          <p:cNvPr id="127" name="Text 125"/>
+          <p:cNvSpPr txBox="1"/>
+          <p:nvPr/>
+        </p:nvSpPr>
+        <p:spPr>
+          <a:xfrm>
+            <a:off x="6565392" y="2197787"/>
+            <a:ext cx="1783080" cy="248502"/>
           </a:xfrm>
           <a:prstGeom prst="rect">
             <a:avLst/>
@@ -25560,14 +27647,14 @@
       </p:sp>
       <p:sp>
         <p:nvSpPr>
-          <p:cNvPr id="108" name="Shape 106"/>
+          <p:cNvPr id="128" name="Shape 126"/>
           <p:cNvSpPr/>
           <p:nvPr/>
         </p:nvSpPr>
         <p:spPr>
           <a:xfrm>
-            <a:off x="8220456" y="2253700"/>
-            <a:ext cx="148215" cy="136676"/>
+            <a:off x="8421624" y="2253700"/>
+            <a:ext cx="111161" cy="136676"/>
           </a:xfrm>
           <a:prstGeom prst="rect">
             <a:avLst/>
@@ -25580,13 +27667,13 @@
       </p:sp>
       <p:sp>
         <p:nvSpPr>
-          <p:cNvPr id="109" name="Text 107"/>
-          <p:cNvSpPr txBox="1"/>
-          <p:nvPr/>
-        </p:nvSpPr>
-        <p:spPr>
-          <a:xfrm>
-            <a:off x="8897112" y="2197787"/>
+          <p:cNvPr id="129" name="Text 127"/>
+          <p:cNvSpPr txBox="1"/>
+          <p:nvPr/>
+        </p:nvSpPr>
+        <p:spPr>
+          <a:xfrm>
+            <a:off x="8942832" y="2197787"/>
             <a:ext cx="786384" cy="248502"/>
           </a:xfrm>
           <a:prstGeom prst="rect">
@@ -25619,13 +27706,13 @@
       </p:sp>
       <p:sp>
         <p:nvSpPr>
-          <p:cNvPr id="110" name="Text 108"/>
-          <p:cNvSpPr txBox="1"/>
-          <p:nvPr/>
-        </p:nvSpPr>
-        <p:spPr>
-          <a:xfrm>
-            <a:off x="9683496" y="2197787"/>
+          <p:cNvPr id="130" name="Text 128"/>
+          <p:cNvSpPr txBox="1"/>
+          <p:nvPr/>
+        </p:nvSpPr>
+        <p:spPr>
+          <a:xfrm>
+            <a:off x="9729216" y="2197787"/>
             <a:ext cx="868680" cy="248502"/>
           </a:xfrm>
           <a:prstGeom prst="rect">
@@ -25658,13 +27745,13 @@
       </p:sp>
       <p:sp>
         <p:nvSpPr>
-          <p:cNvPr id="111" name="Text 109"/>
-          <p:cNvSpPr txBox="1"/>
-          <p:nvPr/>
-        </p:nvSpPr>
-        <p:spPr>
-          <a:xfrm>
-            <a:off x="10552176" y="2197787"/>
+          <p:cNvPr id="131" name="Text 129"/>
+          <p:cNvSpPr txBox="1"/>
+          <p:nvPr/>
+        </p:nvSpPr>
+        <p:spPr>
+          <a:xfrm>
+            <a:off x="10597896" y="2197787"/>
             <a:ext cx="868680" cy="248502"/>
           </a:xfrm>
           <a:prstGeom prst="rect">
@@ -25697,14 +27784,53 @@
       </p:sp>
       <p:sp>
         <p:nvSpPr>
-          <p:cNvPr id="112" name="Text 110"/>
+          <p:cNvPr id="132" name="Text 130"/>
           <p:cNvSpPr txBox="1"/>
           <p:nvPr/>
         </p:nvSpPr>
         <p:spPr>
           <a:xfrm>
             <a:off x="6208776" y="2446289"/>
-            <a:ext cx="1938528" cy="248502"/>
+            <a:ext cx="310896" cy="248502"/>
+          </a:xfrm>
+          <a:prstGeom prst="rect">
+            <a:avLst/>
+          </a:prstGeom>
+          <a:noFill/>
+          <a:ln/>
+        </p:spPr>
+        <p:txBody>
+          <a:bodyPr wrap="square" lIns="0" tIns="0" rIns="0" bIns="0" rtlCol="0" anchor="ctr"/>
+          <a:lstStyle/>
+          <a:p>
+            <a:pPr algn="r" indent="0" marL="0">
+              <a:buNone/>
+            </a:pPr>
+            <a:r>
+              <a:rPr lang="en-US" sz="1200" dirty="0">
+                <a:solidFill>
+                  <a:srgbClr val="9AA3AD"/>
+                </a:solidFill>
+                <a:latin typeface="Inter" pitchFamily="34" charset="0"/>
+                <a:ea typeface="Inter" pitchFamily="34" charset="-122"/>
+                <a:cs typeface="Inter" pitchFamily="34" charset="-120"/>
+              </a:rPr>
+              <a:t>21</a:t>
+            </a:r>
+            <a:endParaRPr lang="en-US" sz="1200" dirty="0"/>
+          </a:p>
+        </p:txBody>
+      </p:sp>
+      <p:sp>
+        <p:nvSpPr>
+          <p:cNvPr id="133" name="Text 131"/>
+          <p:cNvSpPr txBox="1"/>
+          <p:nvPr/>
+        </p:nvSpPr>
+        <p:spPr>
+          <a:xfrm>
+            <a:off x="6565392" y="2446289"/>
+            <a:ext cx="1783080" cy="248502"/>
           </a:xfrm>
           <a:prstGeom prst="rect">
             <a:avLst/>
@@ -25736,14 +27862,14 @@
       </p:sp>
       <p:sp>
         <p:nvSpPr>
-          <p:cNvPr id="113" name="Shape 111"/>
+          <p:cNvPr id="134" name="Shape 132"/>
           <p:cNvSpPr/>
           <p:nvPr/>
         </p:nvSpPr>
         <p:spPr>
           <a:xfrm>
-            <a:off x="8220456" y="2502202"/>
-            <a:ext cx="113006" cy="136676"/>
+            <a:off x="8421624" y="2502202"/>
+            <a:ext cx="84754" cy="136676"/>
           </a:xfrm>
           <a:prstGeom prst="rect">
             <a:avLst/>
@@ -25756,13 +27882,13 @@
       </p:sp>
       <p:sp>
         <p:nvSpPr>
-          <p:cNvPr id="114" name="Text 112"/>
-          <p:cNvSpPr txBox="1"/>
-          <p:nvPr/>
-        </p:nvSpPr>
-        <p:spPr>
-          <a:xfrm>
-            <a:off x="8897112" y="2446289"/>
+          <p:cNvPr id="135" name="Text 133"/>
+          <p:cNvSpPr txBox="1"/>
+          <p:nvPr/>
+        </p:nvSpPr>
+        <p:spPr>
+          <a:xfrm>
+            <a:off x="8942832" y="2446289"/>
             <a:ext cx="786384" cy="248502"/>
           </a:xfrm>
           <a:prstGeom prst="rect">
@@ -25795,13 +27921,13 @@
       </p:sp>
       <p:sp>
         <p:nvSpPr>
-          <p:cNvPr id="115" name="Text 113"/>
-          <p:cNvSpPr txBox="1"/>
-          <p:nvPr/>
-        </p:nvSpPr>
-        <p:spPr>
-          <a:xfrm>
-            <a:off x="9683496" y="2446289"/>
+          <p:cNvPr id="136" name="Text 134"/>
+          <p:cNvSpPr txBox="1"/>
+          <p:nvPr/>
+        </p:nvSpPr>
+        <p:spPr>
+          <a:xfrm>
+            <a:off x="9729216" y="2446289"/>
             <a:ext cx="868680" cy="248502"/>
           </a:xfrm>
           <a:prstGeom prst="rect">
@@ -25834,13 +27960,13 @@
       </p:sp>
       <p:sp>
         <p:nvSpPr>
-          <p:cNvPr id="116" name="Text 114"/>
-          <p:cNvSpPr txBox="1"/>
-          <p:nvPr/>
-        </p:nvSpPr>
-        <p:spPr>
-          <a:xfrm>
-            <a:off x="10552176" y="2446289"/>
+          <p:cNvPr id="137" name="Text 135"/>
+          <p:cNvSpPr txBox="1"/>
+          <p:nvPr/>
+        </p:nvSpPr>
+        <p:spPr>
+          <a:xfrm>
+            <a:off x="10597896" y="2446289"/>
             <a:ext cx="868680" cy="248502"/>
           </a:xfrm>
           <a:prstGeom prst="rect">
@@ -25873,14 +27999,53 @@
       </p:sp>
       <p:sp>
         <p:nvSpPr>
-          <p:cNvPr id="117" name="Text 115"/>
+          <p:cNvPr id="138" name="Text 136"/>
           <p:cNvSpPr txBox="1"/>
           <p:nvPr/>
         </p:nvSpPr>
         <p:spPr>
           <a:xfrm>
             <a:off x="6208776" y="2694791"/>
-            <a:ext cx="1938528" cy="248502"/>
+            <a:ext cx="310896" cy="248502"/>
+          </a:xfrm>
+          <a:prstGeom prst="rect">
+            <a:avLst/>
+          </a:prstGeom>
+          <a:noFill/>
+          <a:ln/>
+        </p:spPr>
+        <p:txBody>
+          <a:bodyPr wrap="square" lIns="0" tIns="0" rIns="0" bIns="0" rtlCol="0" anchor="ctr"/>
+          <a:lstStyle/>
+          <a:p>
+            <a:pPr algn="r" indent="0" marL="0">
+              <a:buNone/>
+            </a:pPr>
+            <a:r>
+              <a:rPr lang="en-US" sz="1200" dirty="0">
+                <a:solidFill>
+                  <a:srgbClr val="9AA3AD"/>
+                </a:solidFill>
+                <a:latin typeface="Inter" pitchFamily="34" charset="0"/>
+                <a:ea typeface="Inter" pitchFamily="34" charset="-122"/>
+                <a:cs typeface="Inter" pitchFamily="34" charset="-120"/>
+              </a:rPr>
+              <a:t>22</a:t>
+            </a:r>
+            <a:endParaRPr lang="en-US" sz="1200" dirty="0"/>
+          </a:p>
+        </p:txBody>
+      </p:sp>
+      <p:sp>
+        <p:nvSpPr>
+          <p:cNvPr id="139" name="Text 137"/>
+          <p:cNvSpPr txBox="1"/>
+          <p:nvPr/>
+        </p:nvSpPr>
+        <p:spPr>
+          <a:xfrm>
+            <a:off x="6565392" y="2694791"/>
+            <a:ext cx="1783080" cy="248502"/>
           </a:xfrm>
           <a:prstGeom prst="rect">
             <a:avLst/>
@@ -25912,14 +28077,14 @@
       </p:sp>
       <p:sp>
         <p:nvSpPr>
-          <p:cNvPr id="118" name="Shape 116"/>
+          <p:cNvPr id="140" name="Shape 138"/>
           <p:cNvSpPr/>
           <p:nvPr/>
         </p:nvSpPr>
         <p:spPr>
           <a:xfrm>
-            <a:off x="8220456" y="2750703"/>
-            <a:ext cx="100935" cy="136676"/>
+            <a:off x="8421624" y="2750703"/>
+            <a:ext cx="75701" cy="136676"/>
           </a:xfrm>
           <a:prstGeom prst="rect">
             <a:avLst/>
@@ -25932,13 +28097,13 @@
       </p:sp>
       <p:sp>
         <p:nvSpPr>
-          <p:cNvPr id="119" name="Text 117"/>
-          <p:cNvSpPr txBox="1"/>
-          <p:nvPr/>
-        </p:nvSpPr>
-        <p:spPr>
-          <a:xfrm>
-            <a:off x="8897112" y="2694791"/>
+          <p:cNvPr id="141" name="Text 139"/>
+          <p:cNvSpPr txBox="1"/>
+          <p:nvPr/>
+        </p:nvSpPr>
+        <p:spPr>
+          <a:xfrm>
+            <a:off x="8942832" y="2694791"/>
             <a:ext cx="786384" cy="248502"/>
           </a:xfrm>
           <a:prstGeom prst="rect">
@@ -25971,13 +28136,13 @@
       </p:sp>
       <p:sp>
         <p:nvSpPr>
-          <p:cNvPr id="120" name="Text 118"/>
-          <p:cNvSpPr txBox="1"/>
-          <p:nvPr/>
-        </p:nvSpPr>
-        <p:spPr>
-          <a:xfrm>
-            <a:off x="9683496" y="2694791"/>
+          <p:cNvPr id="142" name="Text 140"/>
+          <p:cNvSpPr txBox="1"/>
+          <p:nvPr/>
+        </p:nvSpPr>
+        <p:spPr>
+          <a:xfrm>
+            <a:off x="9729216" y="2694791"/>
             <a:ext cx="868680" cy="248502"/>
           </a:xfrm>
           <a:prstGeom prst="rect">
@@ -26010,13 +28175,13 @@
       </p:sp>
       <p:sp>
         <p:nvSpPr>
-          <p:cNvPr id="121" name="Text 119"/>
-          <p:cNvSpPr txBox="1"/>
-          <p:nvPr/>
-        </p:nvSpPr>
-        <p:spPr>
-          <a:xfrm>
-            <a:off x="10552176" y="2694791"/>
+          <p:cNvPr id="143" name="Text 141"/>
+          <p:cNvSpPr txBox="1"/>
+          <p:nvPr/>
+        </p:nvSpPr>
+        <p:spPr>
+          <a:xfrm>
+            <a:off x="10597896" y="2694791"/>
             <a:ext cx="868680" cy="248502"/>
           </a:xfrm>
           <a:prstGeom prst="rect">
@@ -26049,14 +28214,53 @@
       </p:sp>
       <p:sp>
         <p:nvSpPr>
-          <p:cNvPr id="122" name="Text 120"/>
+          <p:cNvPr id="144" name="Text 142"/>
           <p:cNvSpPr txBox="1"/>
           <p:nvPr/>
         </p:nvSpPr>
         <p:spPr>
           <a:xfrm>
             <a:off x="6208776" y="2943292"/>
-            <a:ext cx="1938528" cy="248502"/>
+            <a:ext cx="310896" cy="248502"/>
+          </a:xfrm>
+          <a:prstGeom prst="rect">
+            <a:avLst/>
+          </a:prstGeom>
+          <a:noFill/>
+          <a:ln/>
+        </p:spPr>
+        <p:txBody>
+          <a:bodyPr wrap="square" lIns="0" tIns="0" rIns="0" bIns="0" rtlCol="0" anchor="ctr"/>
+          <a:lstStyle/>
+          <a:p>
+            <a:pPr algn="r" indent="0" marL="0">
+              <a:buNone/>
+            </a:pPr>
+            <a:r>
+              <a:rPr lang="en-US" sz="1200" dirty="0">
+                <a:solidFill>
+                  <a:srgbClr val="9AA3AD"/>
+                </a:solidFill>
+                <a:latin typeface="Inter" pitchFamily="34" charset="0"/>
+                <a:ea typeface="Inter" pitchFamily="34" charset="-122"/>
+                <a:cs typeface="Inter" pitchFamily="34" charset="-120"/>
+              </a:rPr>
+              <a:t>23</a:t>
+            </a:r>
+            <a:endParaRPr lang="en-US" sz="1200" dirty="0"/>
+          </a:p>
+        </p:txBody>
+      </p:sp>
+      <p:sp>
+        <p:nvSpPr>
+          <p:cNvPr id="145" name="Text 143"/>
+          <p:cNvSpPr txBox="1"/>
+          <p:nvPr/>
+        </p:nvSpPr>
+        <p:spPr>
+          <a:xfrm>
+            <a:off x="6565392" y="2943292"/>
+            <a:ext cx="1783080" cy="248502"/>
           </a:xfrm>
           <a:prstGeom prst="rect">
             <a:avLst/>
@@ -26088,14 +28292,14 @@
       </p:sp>
       <p:sp>
         <p:nvSpPr>
-          <p:cNvPr id="123" name="Shape 121"/>
+          <p:cNvPr id="146" name="Shape 144"/>
           <p:cNvSpPr/>
           <p:nvPr/>
         </p:nvSpPr>
         <p:spPr>
           <a:xfrm>
-            <a:off x="8220456" y="2999205"/>
-            <a:ext cx="93000" cy="136676"/>
+            <a:off x="8421624" y="2999205"/>
+            <a:ext cx="69750" cy="136676"/>
           </a:xfrm>
           <a:prstGeom prst="rect">
             <a:avLst/>
@@ -26108,13 +28312,13 @@
       </p:sp>
       <p:sp>
         <p:nvSpPr>
-          <p:cNvPr id="124" name="Text 122"/>
-          <p:cNvSpPr txBox="1"/>
-          <p:nvPr/>
-        </p:nvSpPr>
-        <p:spPr>
-          <a:xfrm>
-            <a:off x="8897112" y="2943292"/>
+          <p:cNvPr id="147" name="Text 145"/>
+          <p:cNvSpPr txBox="1"/>
+          <p:nvPr/>
+        </p:nvSpPr>
+        <p:spPr>
+          <a:xfrm>
+            <a:off x="8942832" y="2943292"/>
             <a:ext cx="786384" cy="248502"/>
           </a:xfrm>
           <a:prstGeom prst="rect">
@@ -26147,13 +28351,13 @@
       </p:sp>
       <p:sp>
         <p:nvSpPr>
-          <p:cNvPr id="125" name="Text 123"/>
-          <p:cNvSpPr txBox="1"/>
-          <p:nvPr/>
-        </p:nvSpPr>
-        <p:spPr>
-          <a:xfrm>
-            <a:off x="9683496" y="2943292"/>
+          <p:cNvPr id="148" name="Text 146"/>
+          <p:cNvSpPr txBox="1"/>
+          <p:nvPr/>
+        </p:nvSpPr>
+        <p:spPr>
+          <a:xfrm>
+            <a:off x="9729216" y="2943292"/>
             <a:ext cx="868680" cy="248502"/>
           </a:xfrm>
           <a:prstGeom prst="rect">
@@ -26186,13 +28390,13 @@
       </p:sp>
       <p:sp>
         <p:nvSpPr>
-          <p:cNvPr id="126" name="Text 124"/>
-          <p:cNvSpPr txBox="1"/>
-          <p:nvPr/>
-        </p:nvSpPr>
-        <p:spPr>
-          <a:xfrm>
-            <a:off x="10552176" y="2943292"/>
+          <p:cNvPr id="149" name="Text 147"/>
+          <p:cNvSpPr txBox="1"/>
+          <p:nvPr/>
+        </p:nvSpPr>
+        <p:spPr>
+          <a:xfrm>
+            <a:off x="10597896" y="2943292"/>
             <a:ext cx="868680" cy="248502"/>
           </a:xfrm>
           <a:prstGeom prst="rect">
@@ -26225,14 +28429,53 @@
       </p:sp>
       <p:sp>
         <p:nvSpPr>
-          <p:cNvPr id="127" name="Text 125"/>
+          <p:cNvPr id="150" name="Text 148"/>
           <p:cNvSpPr txBox="1"/>
           <p:nvPr/>
         </p:nvSpPr>
         <p:spPr>
           <a:xfrm>
             <a:off x="6208776" y="3191794"/>
-            <a:ext cx="1938528" cy="248502"/>
+            <a:ext cx="310896" cy="248502"/>
+          </a:xfrm>
+          <a:prstGeom prst="rect">
+            <a:avLst/>
+          </a:prstGeom>
+          <a:noFill/>
+          <a:ln/>
+        </p:spPr>
+        <p:txBody>
+          <a:bodyPr wrap="square" lIns="0" tIns="0" rIns="0" bIns="0" rtlCol="0" anchor="ctr"/>
+          <a:lstStyle/>
+          <a:p>
+            <a:pPr algn="r" indent="0" marL="0">
+              <a:buNone/>
+            </a:pPr>
+            <a:r>
+              <a:rPr lang="en-US" sz="1200" dirty="0">
+                <a:solidFill>
+                  <a:srgbClr val="9AA3AD"/>
+                </a:solidFill>
+                <a:latin typeface="Inter" pitchFamily="34" charset="0"/>
+                <a:ea typeface="Inter" pitchFamily="34" charset="-122"/>
+                <a:cs typeface="Inter" pitchFamily="34" charset="-120"/>
+              </a:rPr>
+              <a:t>24</a:t>
+            </a:r>
+            <a:endParaRPr lang="en-US" sz="1200" dirty="0"/>
+          </a:p>
+        </p:txBody>
+      </p:sp>
+      <p:sp>
+        <p:nvSpPr>
+          <p:cNvPr id="151" name="Text 149"/>
+          <p:cNvSpPr txBox="1"/>
+          <p:nvPr/>
+        </p:nvSpPr>
+        <p:spPr>
+          <a:xfrm>
+            <a:off x="6565392" y="3191794"/>
+            <a:ext cx="1783080" cy="248502"/>
           </a:xfrm>
           <a:prstGeom prst="rect">
             <a:avLst/>
@@ -26264,14 +28507,14 @@
       </p:sp>
       <p:sp>
         <p:nvSpPr>
-          <p:cNvPr id="128" name="Shape 126"/>
+          <p:cNvPr id="152" name="Shape 150"/>
           <p:cNvSpPr/>
           <p:nvPr/>
         </p:nvSpPr>
         <p:spPr>
           <a:xfrm>
-            <a:off x="8220456" y="3247707"/>
-            <a:ext cx="81778" cy="136676"/>
+            <a:off x="8421624" y="3247707"/>
+            <a:ext cx="61333" cy="136676"/>
           </a:xfrm>
           <a:prstGeom prst="rect">
             <a:avLst/>
@@ -26284,13 +28527,13 @@
       </p:sp>
       <p:sp>
         <p:nvSpPr>
-          <p:cNvPr id="129" name="Text 127"/>
-          <p:cNvSpPr txBox="1"/>
-          <p:nvPr/>
-        </p:nvSpPr>
-        <p:spPr>
-          <a:xfrm>
-            <a:off x="8897112" y="3191794"/>
+          <p:cNvPr id="153" name="Text 151"/>
+          <p:cNvSpPr txBox="1"/>
+          <p:nvPr/>
+        </p:nvSpPr>
+        <p:spPr>
+          <a:xfrm>
+            <a:off x="8942832" y="3191794"/>
             <a:ext cx="786384" cy="248502"/>
           </a:xfrm>
           <a:prstGeom prst="rect">
@@ -26323,13 +28566,13 @@
       </p:sp>
       <p:sp>
         <p:nvSpPr>
-          <p:cNvPr id="130" name="Text 128"/>
-          <p:cNvSpPr txBox="1"/>
-          <p:nvPr/>
-        </p:nvSpPr>
-        <p:spPr>
-          <a:xfrm>
-            <a:off x="9683496" y="3191794"/>
+          <p:cNvPr id="154" name="Text 152"/>
+          <p:cNvSpPr txBox="1"/>
+          <p:nvPr/>
+        </p:nvSpPr>
+        <p:spPr>
+          <a:xfrm>
+            <a:off x="9729216" y="3191794"/>
             <a:ext cx="868680" cy="248502"/>
           </a:xfrm>
           <a:prstGeom prst="rect">
@@ -26362,13 +28605,13 @@
       </p:sp>
       <p:sp>
         <p:nvSpPr>
-          <p:cNvPr id="131" name="Text 129"/>
-          <p:cNvSpPr txBox="1"/>
-          <p:nvPr/>
-        </p:nvSpPr>
-        <p:spPr>
-          <a:xfrm>
-            <a:off x="10552176" y="3191794"/>
+          <p:cNvPr id="155" name="Text 153"/>
+          <p:cNvSpPr txBox="1"/>
+          <p:nvPr/>
+        </p:nvSpPr>
+        <p:spPr>
+          <a:xfrm>
+            <a:off x="10597896" y="3191794"/>
             <a:ext cx="868680" cy="248502"/>
           </a:xfrm>
           <a:prstGeom prst="rect">
@@ -26401,14 +28644,53 @@
       </p:sp>
       <p:sp>
         <p:nvSpPr>
-          <p:cNvPr id="132" name="Text 130"/>
+          <p:cNvPr id="156" name="Text 154"/>
           <p:cNvSpPr txBox="1"/>
           <p:nvPr/>
         </p:nvSpPr>
         <p:spPr>
           <a:xfrm>
             <a:off x="6208776" y="3440296"/>
-            <a:ext cx="1938528" cy="248502"/>
+            <a:ext cx="310896" cy="248502"/>
+          </a:xfrm>
+          <a:prstGeom prst="rect">
+            <a:avLst/>
+          </a:prstGeom>
+          <a:noFill/>
+          <a:ln/>
+        </p:spPr>
+        <p:txBody>
+          <a:bodyPr wrap="square" lIns="0" tIns="0" rIns="0" bIns="0" rtlCol="0" anchor="ctr"/>
+          <a:lstStyle/>
+          <a:p>
+            <a:pPr algn="r" indent="0" marL="0">
+              <a:buNone/>
+            </a:pPr>
+            <a:r>
+              <a:rPr lang="en-US" sz="1200" dirty="0">
+                <a:solidFill>
+                  <a:srgbClr val="9AA3AD"/>
+                </a:solidFill>
+                <a:latin typeface="Inter" pitchFamily="34" charset="0"/>
+                <a:ea typeface="Inter" pitchFamily="34" charset="-122"/>
+                <a:cs typeface="Inter" pitchFamily="34" charset="-120"/>
+              </a:rPr>
+              <a:t>25</a:t>
+            </a:r>
+            <a:endParaRPr lang="en-US" sz="1200" dirty="0"/>
+          </a:p>
+        </p:txBody>
+      </p:sp>
+      <p:sp>
+        <p:nvSpPr>
+          <p:cNvPr id="157" name="Text 155"/>
+          <p:cNvSpPr txBox="1"/>
+          <p:nvPr/>
+        </p:nvSpPr>
+        <p:spPr>
+          <a:xfrm>
+            <a:off x="6565392" y="3440296"/>
+            <a:ext cx="1783080" cy="248502"/>
           </a:xfrm>
           <a:prstGeom prst="rect">
             <a:avLst/>
@@ -26440,14 +28722,14 @@
       </p:sp>
       <p:sp>
         <p:nvSpPr>
-          <p:cNvPr id="133" name="Shape 131"/>
+          <p:cNvPr id="158" name="Shape 156"/>
           <p:cNvSpPr/>
           <p:nvPr/>
         </p:nvSpPr>
         <p:spPr>
           <a:xfrm>
-            <a:off x="8220456" y="3496208"/>
-            <a:ext cx="79315" cy="136676"/>
+            <a:off x="8421624" y="3496208"/>
+            <a:ext cx="59486" cy="136676"/>
           </a:xfrm>
           <a:prstGeom prst="rect">
             <a:avLst/>
@@ -26460,13 +28742,13 @@
       </p:sp>
       <p:sp>
         <p:nvSpPr>
-          <p:cNvPr id="134" name="Text 132"/>
-          <p:cNvSpPr txBox="1"/>
-          <p:nvPr/>
-        </p:nvSpPr>
-        <p:spPr>
-          <a:xfrm>
-            <a:off x="8897112" y="3440296"/>
+          <p:cNvPr id="159" name="Text 157"/>
+          <p:cNvSpPr txBox="1"/>
+          <p:nvPr/>
+        </p:nvSpPr>
+        <p:spPr>
+          <a:xfrm>
+            <a:off x="8942832" y="3440296"/>
             <a:ext cx="786384" cy="248502"/>
           </a:xfrm>
           <a:prstGeom prst="rect">
@@ -26499,13 +28781,13 @@
       </p:sp>
       <p:sp>
         <p:nvSpPr>
-          <p:cNvPr id="135" name="Text 133"/>
-          <p:cNvSpPr txBox="1"/>
-          <p:nvPr/>
-        </p:nvSpPr>
-        <p:spPr>
-          <a:xfrm>
-            <a:off x="9683496" y="3440296"/>
+          <p:cNvPr id="160" name="Text 158"/>
+          <p:cNvSpPr txBox="1"/>
+          <p:nvPr/>
+        </p:nvSpPr>
+        <p:spPr>
+          <a:xfrm>
+            <a:off x="9729216" y="3440296"/>
             <a:ext cx="868680" cy="248502"/>
           </a:xfrm>
           <a:prstGeom prst="rect">
@@ -26538,13 +28820,13 @@
       </p:sp>
       <p:sp>
         <p:nvSpPr>
-          <p:cNvPr id="136" name="Text 134"/>
-          <p:cNvSpPr txBox="1"/>
-          <p:nvPr/>
-        </p:nvSpPr>
-        <p:spPr>
-          <a:xfrm>
-            <a:off x="10552176" y="3440296"/>
+          <p:cNvPr id="161" name="Text 159"/>
+          <p:cNvSpPr txBox="1"/>
+          <p:nvPr/>
+        </p:nvSpPr>
+        <p:spPr>
+          <a:xfrm>
+            <a:off x="10597896" y="3440296"/>
             <a:ext cx="868680" cy="248502"/>
           </a:xfrm>
           <a:prstGeom prst="rect">
@@ -26577,14 +28859,53 @@
       </p:sp>
       <p:sp>
         <p:nvSpPr>
-          <p:cNvPr id="137" name="Text 135"/>
+          <p:cNvPr id="162" name="Text 160"/>
           <p:cNvSpPr txBox="1"/>
           <p:nvPr/>
         </p:nvSpPr>
         <p:spPr>
           <a:xfrm>
             <a:off x="6208776" y="3688797"/>
-            <a:ext cx="1938528" cy="248502"/>
+            <a:ext cx="310896" cy="248502"/>
+          </a:xfrm>
+          <a:prstGeom prst="rect">
+            <a:avLst/>
+          </a:prstGeom>
+          <a:noFill/>
+          <a:ln/>
+        </p:spPr>
+        <p:txBody>
+          <a:bodyPr wrap="square" lIns="0" tIns="0" rIns="0" bIns="0" rtlCol="0" anchor="ctr"/>
+          <a:lstStyle/>
+          <a:p>
+            <a:pPr algn="r" indent="0" marL="0">
+              <a:buNone/>
+            </a:pPr>
+            <a:r>
+              <a:rPr lang="en-US" sz="1200" dirty="0">
+                <a:solidFill>
+                  <a:srgbClr val="9AA3AD"/>
+                </a:solidFill>
+                <a:latin typeface="Inter" pitchFamily="34" charset="0"/>
+                <a:ea typeface="Inter" pitchFamily="34" charset="-122"/>
+                <a:cs typeface="Inter" pitchFamily="34" charset="-120"/>
+              </a:rPr>
+              <a:t>26</a:t>
+            </a:r>
+            <a:endParaRPr lang="en-US" sz="1200" dirty="0"/>
+          </a:p>
+        </p:txBody>
+      </p:sp>
+      <p:sp>
+        <p:nvSpPr>
+          <p:cNvPr id="163" name="Text 161"/>
+          <p:cNvSpPr txBox="1"/>
+          <p:nvPr/>
+        </p:nvSpPr>
+        <p:spPr>
+          <a:xfrm>
+            <a:off x="6565392" y="3688797"/>
+            <a:ext cx="1783080" cy="248502"/>
           </a:xfrm>
           <a:prstGeom prst="rect">
             <a:avLst/>
@@ -26616,14 +28937,14 @@
       </p:sp>
       <p:sp>
         <p:nvSpPr>
-          <p:cNvPr id="138" name="Shape 136"/>
+          <p:cNvPr id="164" name="Shape 162"/>
           <p:cNvSpPr/>
           <p:nvPr/>
         </p:nvSpPr>
         <p:spPr>
           <a:xfrm>
-            <a:off x="8220456" y="3744710"/>
-            <a:ext cx="77721" cy="136676"/>
+            <a:off x="8421624" y="3744710"/>
+            <a:ext cx="58291" cy="136676"/>
           </a:xfrm>
           <a:prstGeom prst="rect">
             <a:avLst/>
@@ -26636,13 +28957,13 @@
       </p:sp>
       <p:sp>
         <p:nvSpPr>
-          <p:cNvPr id="139" name="Text 137"/>
-          <p:cNvSpPr txBox="1"/>
-          <p:nvPr/>
-        </p:nvSpPr>
-        <p:spPr>
-          <a:xfrm>
-            <a:off x="8897112" y="3688797"/>
+          <p:cNvPr id="165" name="Text 163"/>
+          <p:cNvSpPr txBox="1"/>
+          <p:nvPr/>
+        </p:nvSpPr>
+        <p:spPr>
+          <a:xfrm>
+            <a:off x="8942832" y="3688797"/>
             <a:ext cx="786384" cy="248502"/>
           </a:xfrm>
           <a:prstGeom prst="rect">
@@ -26675,13 +28996,13 @@
       </p:sp>
       <p:sp>
         <p:nvSpPr>
-          <p:cNvPr id="140" name="Text 138"/>
-          <p:cNvSpPr txBox="1"/>
-          <p:nvPr/>
-        </p:nvSpPr>
-        <p:spPr>
-          <a:xfrm>
-            <a:off x="9683496" y="3688797"/>
+          <p:cNvPr id="166" name="Text 164"/>
+          <p:cNvSpPr txBox="1"/>
+          <p:nvPr/>
+        </p:nvSpPr>
+        <p:spPr>
+          <a:xfrm>
+            <a:off x="9729216" y="3688797"/>
             <a:ext cx="868680" cy="248502"/>
           </a:xfrm>
           <a:prstGeom prst="rect">
@@ -26714,13 +29035,13 @@
       </p:sp>
       <p:sp>
         <p:nvSpPr>
-          <p:cNvPr id="141" name="Text 139"/>
-          <p:cNvSpPr txBox="1"/>
-          <p:nvPr/>
-        </p:nvSpPr>
-        <p:spPr>
-          <a:xfrm>
-            <a:off x="10552176" y="3688797"/>
+          <p:cNvPr id="167" name="Text 165"/>
+          <p:cNvSpPr txBox="1"/>
+          <p:nvPr/>
+        </p:nvSpPr>
+        <p:spPr>
+          <a:xfrm>
+            <a:off x="10597896" y="3688797"/>
             <a:ext cx="868680" cy="248502"/>
           </a:xfrm>
           <a:prstGeom prst="rect">
@@ -26753,14 +29074,53 @@
       </p:sp>
       <p:sp>
         <p:nvSpPr>
-          <p:cNvPr id="142" name="Text 140"/>
+          <p:cNvPr id="168" name="Text 166"/>
           <p:cNvSpPr txBox="1"/>
           <p:nvPr/>
         </p:nvSpPr>
         <p:spPr>
           <a:xfrm>
             <a:off x="6208776" y="3937299"/>
-            <a:ext cx="1938528" cy="248502"/>
+            <a:ext cx="310896" cy="248502"/>
+          </a:xfrm>
+          <a:prstGeom prst="rect">
+            <a:avLst/>
+          </a:prstGeom>
+          <a:noFill/>
+          <a:ln/>
+        </p:spPr>
+        <p:txBody>
+          <a:bodyPr wrap="square" lIns="0" tIns="0" rIns="0" bIns="0" rtlCol="0" anchor="ctr"/>
+          <a:lstStyle/>
+          <a:p>
+            <a:pPr algn="r" indent="0" marL="0">
+              <a:buNone/>
+            </a:pPr>
+            <a:r>
+              <a:rPr lang="en-US" sz="1200" dirty="0">
+                <a:solidFill>
+                  <a:srgbClr val="9AA3AD"/>
+                </a:solidFill>
+                <a:latin typeface="Inter" pitchFamily="34" charset="0"/>
+                <a:ea typeface="Inter" pitchFamily="34" charset="-122"/>
+                <a:cs typeface="Inter" pitchFamily="34" charset="-120"/>
+              </a:rPr>
+              <a:t>27</a:t>
+            </a:r>
+            <a:endParaRPr lang="en-US" sz="1200" dirty="0"/>
+          </a:p>
+        </p:txBody>
+      </p:sp>
+      <p:sp>
+        <p:nvSpPr>
+          <p:cNvPr id="169" name="Text 167"/>
+          <p:cNvSpPr txBox="1"/>
+          <p:nvPr/>
+        </p:nvSpPr>
+        <p:spPr>
+          <a:xfrm>
+            <a:off x="6565392" y="3937299"/>
+            <a:ext cx="1783080" cy="248502"/>
           </a:xfrm>
           <a:prstGeom prst="rect">
             <a:avLst/>
@@ -26792,14 +29152,14 @@
       </p:sp>
       <p:sp>
         <p:nvSpPr>
-          <p:cNvPr id="143" name="Shape 141"/>
+          <p:cNvPr id="170" name="Shape 168"/>
           <p:cNvSpPr/>
           <p:nvPr/>
         </p:nvSpPr>
         <p:spPr>
           <a:xfrm>
-            <a:off x="8220456" y="3993212"/>
-            <a:ext cx="56042" cy="136676"/>
+            <a:off x="8421624" y="3993212"/>
+            <a:ext cx="42032" cy="136676"/>
           </a:xfrm>
           <a:prstGeom prst="rect">
             <a:avLst/>
@@ -26812,13 +29172,13 @@
       </p:sp>
       <p:sp>
         <p:nvSpPr>
-          <p:cNvPr id="144" name="Text 142"/>
-          <p:cNvSpPr txBox="1"/>
-          <p:nvPr/>
-        </p:nvSpPr>
-        <p:spPr>
-          <a:xfrm>
-            <a:off x="8897112" y="3937299"/>
+          <p:cNvPr id="171" name="Text 169"/>
+          <p:cNvSpPr txBox="1"/>
+          <p:nvPr/>
+        </p:nvSpPr>
+        <p:spPr>
+          <a:xfrm>
+            <a:off x="8942832" y="3937299"/>
             <a:ext cx="786384" cy="248502"/>
           </a:xfrm>
           <a:prstGeom prst="rect">
@@ -26851,13 +29211,13 @@
       </p:sp>
       <p:sp>
         <p:nvSpPr>
-          <p:cNvPr id="145" name="Text 143"/>
-          <p:cNvSpPr txBox="1"/>
-          <p:nvPr/>
-        </p:nvSpPr>
-        <p:spPr>
-          <a:xfrm>
-            <a:off x="9683496" y="3937299"/>
+          <p:cNvPr id="172" name="Text 170"/>
+          <p:cNvSpPr txBox="1"/>
+          <p:nvPr/>
+        </p:nvSpPr>
+        <p:spPr>
+          <a:xfrm>
+            <a:off x="9729216" y="3937299"/>
             <a:ext cx="868680" cy="248502"/>
           </a:xfrm>
           <a:prstGeom prst="rect">
@@ -26890,13 +29250,13 @@
       </p:sp>
       <p:sp>
         <p:nvSpPr>
-          <p:cNvPr id="146" name="Text 144"/>
-          <p:cNvSpPr txBox="1"/>
-          <p:nvPr/>
-        </p:nvSpPr>
-        <p:spPr>
-          <a:xfrm>
-            <a:off x="10552176" y="3937299"/>
+          <p:cNvPr id="173" name="Text 171"/>
+          <p:cNvSpPr txBox="1"/>
+          <p:nvPr/>
+        </p:nvSpPr>
+        <p:spPr>
+          <a:xfrm>
+            <a:off x="10597896" y="3937299"/>
             <a:ext cx="868680" cy="248502"/>
           </a:xfrm>
           <a:prstGeom prst="rect">
@@ -26929,14 +29289,53 @@
       </p:sp>
       <p:sp>
         <p:nvSpPr>
-          <p:cNvPr id="147" name="Text 145"/>
+          <p:cNvPr id="174" name="Text 172"/>
           <p:cNvSpPr txBox="1"/>
           <p:nvPr/>
         </p:nvSpPr>
         <p:spPr>
           <a:xfrm>
             <a:off x="6208776" y="4185800"/>
-            <a:ext cx="1938528" cy="248502"/>
+            <a:ext cx="310896" cy="248502"/>
+          </a:xfrm>
+          <a:prstGeom prst="rect">
+            <a:avLst/>
+          </a:prstGeom>
+          <a:noFill/>
+          <a:ln/>
+        </p:spPr>
+        <p:txBody>
+          <a:bodyPr wrap="square" lIns="0" tIns="0" rIns="0" bIns="0" rtlCol="0" anchor="ctr"/>
+          <a:lstStyle/>
+          <a:p>
+            <a:pPr algn="r" indent="0" marL="0">
+              <a:buNone/>
+            </a:pPr>
+            <a:r>
+              <a:rPr lang="en-US" sz="1200" dirty="0">
+                <a:solidFill>
+                  <a:srgbClr val="9AA3AD"/>
+                </a:solidFill>
+                <a:latin typeface="Inter" pitchFamily="34" charset="0"/>
+                <a:ea typeface="Inter" pitchFamily="34" charset="-122"/>
+                <a:cs typeface="Inter" pitchFamily="34" charset="-120"/>
+              </a:rPr>
+              <a:t>28</a:t>
+            </a:r>
+            <a:endParaRPr lang="en-US" sz="1200" dirty="0"/>
+          </a:p>
+        </p:txBody>
+      </p:sp>
+      <p:sp>
+        <p:nvSpPr>
+          <p:cNvPr id="175" name="Text 173"/>
+          <p:cNvSpPr txBox="1"/>
+          <p:nvPr/>
+        </p:nvSpPr>
+        <p:spPr>
+          <a:xfrm>
+            <a:off x="6565392" y="4185800"/>
+            <a:ext cx="1783080" cy="248502"/>
           </a:xfrm>
           <a:prstGeom prst="rect">
             <a:avLst/>
@@ -26968,14 +29367,14 @@
       </p:sp>
       <p:sp>
         <p:nvSpPr>
-          <p:cNvPr id="148" name="Shape 146"/>
+          <p:cNvPr id="176" name="Shape 174"/>
           <p:cNvSpPr/>
           <p:nvPr/>
         </p:nvSpPr>
         <p:spPr>
           <a:xfrm>
-            <a:off x="8220456" y="4241713"/>
-            <a:ext cx="51888" cy="136676"/>
+            <a:off x="8421624" y="4241713"/>
+            <a:ext cx="38916" cy="136676"/>
           </a:xfrm>
           <a:prstGeom prst="rect">
             <a:avLst/>
@@ -26988,13 +29387,13 @@
       </p:sp>
       <p:sp>
         <p:nvSpPr>
-          <p:cNvPr id="149" name="Text 147"/>
-          <p:cNvSpPr txBox="1"/>
-          <p:nvPr/>
-        </p:nvSpPr>
-        <p:spPr>
-          <a:xfrm>
-            <a:off x="8897112" y="4185800"/>
+          <p:cNvPr id="177" name="Text 175"/>
+          <p:cNvSpPr txBox="1"/>
+          <p:nvPr/>
+        </p:nvSpPr>
+        <p:spPr>
+          <a:xfrm>
+            <a:off x="8942832" y="4185800"/>
             <a:ext cx="786384" cy="248502"/>
           </a:xfrm>
           <a:prstGeom prst="rect">
@@ -27027,13 +29426,13 @@
       </p:sp>
       <p:sp>
         <p:nvSpPr>
-          <p:cNvPr id="150" name="Text 148"/>
-          <p:cNvSpPr txBox="1"/>
-          <p:nvPr/>
-        </p:nvSpPr>
-        <p:spPr>
-          <a:xfrm>
-            <a:off x="9683496" y="4185800"/>
+          <p:cNvPr id="178" name="Text 176"/>
+          <p:cNvSpPr txBox="1"/>
+          <p:nvPr/>
+        </p:nvSpPr>
+        <p:spPr>
+          <a:xfrm>
+            <a:off x="9729216" y="4185800"/>
             <a:ext cx="868680" cy="248502"/>
           </a:xfrm>
           <a:prstGeom prst="rect">
@@ -27066,13 +29465,13 @@
       </p:sp>
       <p:sp>
         <p:nvSpPr>
-          <p:cNvPr id="151" name="Text 149"/>
-          <p:cNvSpPr txBox="1"/>
-          <p:nvPr/>
-        </p:nvSpPr>
-        <p:spPr>
-          <a:xfrm>
-            <a:off x="10552176" y="4185800"/>
+          <p:cNvPr id="179" name="Text 177"/>
+          <p:cNvSpPr txBox="1"/>
+          <p:nvPr/>
+        </p:nvSpPr>
+        <p:spPr>
+          <a:xfrm>
+            <a:off x="10597896" y="4185800"/>
             <a:ext cx="868680" cy="248502"/>
           </a:xfrm>
           <a:prstGeom prst="rect">
@@ -27105,14 +29504,53 @@
       </p:sp>
       <p:sp>
         <p:nvSpPr>
-          <p:cNvPr id="152" name="Text 150"/>
+          <p:cNvPr id="180" name="Text 178"/>
           <p:cNvSpPr txBox="1"/>
           <p:nvPr/>
         </p:nvSpPr>
         <p:spPr>
           <a:xfrm>
             <a:off x="6208776" y="4434302"/>
-            <a:ext cx="1938528" cy="248502"/>
+            <a:ext cx="310896" cy="248502"/>
+          </a:xfrm>
+          <a:prstGeom prst="rect">
+            <a:avLst/>
+          </a:prstGeom>
+          <a:noFill/>
+          <a:ln/>
+        </p:spPr>
+        <p:txBody>
+          <a:bodyPr wrap="square" lIns="0" tIns="0" rIns="0" bIns="0" rtlCol="0" anchor="ctr"/>
+          <a:lstStyle/>
+          <a:p>
+            <a:pPr algn="r" indent="0" marL="0">
+              <a:buNone/>
+            </a:pPr>
+            <a:r>
+              <a:rPr lang="en-US" sz="1200" dirty="0">
+                <a:solidFill>
+                  <a:srgbClr val="9AA3AD"/>
+                </a:solidFill>
+                <a:latin typeface="Inter" pitchFamily="34" charset="0"/>
+                <a:ea typeface="Inter" pitchFamily="34" charset="-122"/>
+                <a:cs typeface="Inter" pitchFamily="34" charset="-120"/>
+              </a:rPr>
+              <a:t>29</a:t>
+            </a:r>
+            <a:endParaRPr lang="en-US" sz="1200" dirty="0"/>
+          </a:p>
+        </p:txBody>
+      </p:sp>
+      <p:sp>
+        <p:nvSpPr>
+          <p:cNvPr id="181" name="Text 179"/>
+          <p:cNvSpPr txBox="1"/>
+          <p:nvPr/>
+        </p:nvSpPr>
+        <p:spPr>
+          <a:xfrm>
+            <a:off x="6565392" y="4434302"/>
+            <a:ext cx="1783080" cy="248502"/>
           </a:xfrm>
           <a:prstGeom prst="rect">
             <a:avLst/>
@@ -27144,14 +29582,14 @@
       </p:sp>
       <p:sp>
         <p:nvSpPr>
-          <p:cNvPr id="153" name="Shape 151"/>
+          <p:cNvPr id="182" name="Shape 180"/>
           <p:cNvSpPr/>
           <p:nvPr/>
         </p:nvSpPr>
         <p:spPr>
           <a:xfrm>
-            <a:off x="8220456" y="4490215"/>
-            <a:ext cx="37656" cy="136676"/>
+            <a:off x="8421624" y="4490215"/>
+            <a:ext cx="28242" cy="136676"/>
           </a:xfrm>
           <a:prstGeom prst="rect">
             <a:avLst/>
@@ -27164,13 +29602,13 @@
       </p:sp>
       <p:sp>
         <p:nvSpPr>
-          <p:cNvPr id="154" name="Text 152"/>
-          <p:cNvSpPr txBox="1"/>
-          <p:nvPr/>
-        </p:nvSpPr>
-        <p:spPr>
-          <a:xfrm>
-            <a:off x="8897112" y="4434302"/>
+          <p:cNvPr id="183" name="Text 181"/>
+          <p:cNvSpPr txBox="1"/>
+          <p:nvPr/>
+        </p:nvSpPr>
+        <p:spPr>
+          <a:xfrm>
+            <a:off x="8942832" y="4434302"/>
             <a:ext cx="786384" cy="248502"/>
           </a:xfrm>
           <a:prstGeom prst="rect">
@@ -27203,13 +29641,13 @@
       </p:sp>
       <p:sp>
         <p:nvSpPr>
-          <p:cNvPr id="155" name="Text 153"/>
-          <p:cNvSpPr txBox="1"/>
-          <p:nvPr/>
-        </p:nvSpPr>
-        <p:spPr>
-          <a:xfrm>
-            <a:off x="9683496" y="4434302"/>
+          <p:cNvPr id="184" name="Text 182"/>
+          <p:cNvSpPr txBox="1"/>
+          <p:nvPr/>
+        </p:nvSpPr>
+        <p:spPr>
+          <a:xfrm>
+            <a:off x="9729216" y="4434302"/>
             <a:ext cx="868680" cy="248502"/>
           </a:xfrm>
           <a:prstGeom prst="rect">
@@ -27242,13 +29680,13 @@
       </p:sp>
       <p:sp>
         <p:nvSpPr>
-          <p:cNvPr id="156" name="Text 154"/>
-          <p:cNvSpPr txBox="1"/>
-          <p:nvPr/>
-        </p:nvSpPr>
-        <p:spPr>
-          <a:xfrm>
-            <a:off x="10552176" y="4434302"/>
+          <p:cNvPr id="185" name="Text 183"/>
+          <p:cNvSpPr txBox="1"/>
+          <p:nvPr/>
+        </p:nvSpPr>
+        <p:spPr>
+          <a:xfrm>
+            <a:off x="10597896" y="4434302"/>
             <a:ext cx="868680" cy="248502"/>
           </a:xfrm>
           <a:prstGeom prst="rect">
@@ -27281,14 +29719,53 @@
       </p:sp>
       <p:sp>
         <p:nvSpPr>
-          <p:cNvPr id="157" name="Text 155"/>
+          <p:cNvPr id="186" name="Text 184"/>
           <p:cNvSpPr txBox="1"/>
           <p:nvPr/>
         </p:nvSpPr>
         <p:spPr>
           <a:xfrm>
             <a:off x="6208776" y="4682804"/>
-            <a:ext cx="1938528" cy="248502"/>
+            <a:ext cx="310896" cy="248502"/>
+          </a:xfrm>
+          <a:prstGeom prst="rect">
+            <a:avLst/>
+          </a:prstGeom>
+          <a:noFill/>
+          <a:ln/>
+        </p:spPr>
+        <p:txBody>
+          <a:bodyPr wrap="square" lIns="0" tIns="0" rIns="0" bIns="0" rtlCol="0" anchor="ctr"/>
+          <a:lstStyle/>
+          <a:p>
+            <a:pPr algn="r" indent="0" marL="0">
+              <a:buNone/>
+            </a:pPr>
+            <a:r>
+              <a:rPr lang="en-US" sz="1200" dirty="0">
+                <a:solidFill>
+                  <a:srgbClr val="9AA3AD"/>
+                </a:solidFill>
+                <a:latin typeface="Inter" pitchFamily="34" charset="0"/>
+                <a:ea typeface="Inter" pitchFamily="34" charset="-122"/>
+                <a:cs typeface="Inter" pitchFamily="34" charset="-120"/>
+              </a:rPr>
+              <a:t>30</a:t>
+            </a:r>
+            <a:endParaRPr lang="en-US" sz="1200" dirty="0"/>
+          </a:p>
+        </p:txBody>
+      </p:sp>
+      <p:sp>
+        <p:nvSpPr>
+          <p:cNvPr id="187" name="Text 185"/>
+          <p:cNvSpPr txBox="1"/>
+          <p:nvPr/>
+        </p:nvSpPr>
+        <p:spPr>
+          <a:xfrm>
+            <a:off x="6565392" y="4682804"/>
+            <a:ext cx="1783080" cy="248502"/>
           </a:xfrm>
           <a:prstGeom prst="rect">
             <a:avLst/>
@@ -27320,14 +29797,14 @@
       </p:sp>
       <p:sp>
         <p:nvSpPr>
-          <p:cNvPr id="158" name="Shape 156"/>
+          <p:cNvPr id="188" name="Shape 186"/>
           <p:cNvSpPr/>
           <p:nvPr/>
         </p:nvSpPr>
         <p:spPr>
           <a:xfrm>
-            <a:off x="8220456" y="4738717"/>
-            <a:ext cx="36383" cy="136676"/>
+            <a:off x="8421624" y="4738717"/>
+            <a:ext cx="27287" cy="136676"/>
           </a:xfrm>
           <a:prstGeom prst="rect">
             <a:avLst/>
@@ -27340,13 +29817,13 @@
       </p:sp>
       <p:sp>
         <p:nvSpPr>
-          <p:cNvPr id="159" name="Text 157"/>
-          <p:cNvSpPr txBox="1"/>
-          <p:nvPr/>
-        </p:nvSpPr>
-        <p:spPr>
-          <a:xfrm>
-            <a:off x="8897112" y="4682804"/>
+          <p:cNvPr id="189" name="Text 187"/>
+          <p:cNvSpPr txBox="1"/>
+          <p:nvPr/>
+        </p:nvSpPr>
+        <p:spPr>
+          <a:xfrm>
+            <a:off x="8942832" y="4682804"/>
             <a:ext cx="786384" cy="248502"/>
           </a:xfrm>
           <a:prstGeom prst="rect">
@@ -27379,13 +29856,13 @@
       </p:sp>
       <p:sp>
         <p:nvSpPr>
-          <p:cNvPr id="160" name="Text 158"/>
-          <p:cNvSpPr txBox="1"/>
-          <p:nvPr/>
-        </p:nvSpPr>
-        <p:spPr>
-          <a:xfrm>
-            <a:off x="9683496" y="4682804"/>
+          <p:cNvPr id="190" name="Text 188"/>
+          <p:cNvSpPr txBox="1"/>
+          <p:nvPr/>
+        </p:nvSpPr>
+        <p:spPr>
+          <a:xfrm>
+            <a:off x="9729216" y="4682804"/>
             <a:ext cx="868680" cy="248502"/>
           </a:xfrm>
           <a:prstGeom prst="rect">
@@ -27418,13 +29895,13 @@
       </p:sp>
       <p:sp>
         <p:nvSpPr>
-          <p:cNvPr id="161" name="Text 159"/>
-          <p:cNvSpPr txBox="1"/>
-          <p:nvPr/>
-        </p:nvSpPr>
-        <p:spPr>
-          <a:xfrm>
-            <a:off x="10552176" y="4682804"/>
+          <p:cNvPr id="191" name="Text 189"/>
+          <p:cNvSpPr txBox="1"/>
+          <p:nvPr/>
+        </p:nvSpPr>
+        <p:spPr>
+          <a:xfrm>
+            <a:off x="10597896" y="4682804"/>
             <a:ext cx="868680" cy="248502"/>
           </a:xfrm>
           <a:prstGeom prst="rect">
@@ -27457,14 +29934,53 @@
       </p:sp>
       <p:sp>
         <p:nvSpPr>
-          <p:cNvPr id="162" name="Text 160"/>
+          <p:cNvPr id="192" name="Text 190"/>
           <p:cNvSpPr txBox="1"/>
           <p:nvPr/>
         </p:nvSpPr>
         <p:spPr>
           <a:xfrm>
             <a:off x="6208776" y="4931305"/>
-            <a:ext cx="1938528" cy="248502"/>
+            <a:ext cx="310896" cy="248502"/>
+          </a:xfrm>
+          <a:prstGeom prst="rect">
+            <a:avLst/>
+          </a:prstGeom>
+          <a:noFill/>
+          <a:ln/>
+        </p:spPr>
+        <p:txBody>
+          <a:bodyPr wrap="square" lIns="0" tIns="0" rIns="0" bIns="0" rtlCol="0" anchor="ctr"/>
+          <a:lstStyle/>
+          <a:p>
+            <a:pPr algn="r" indent="0" marL="0">
+              <a:buNone/>
+            </a:pPr>
+            <a:r>
+              <a:rPr lang="en-US" sz="1200" dirty="0">
+                <a:solidFill>
+                  <a:srgbClr val="9AA3AD"/>
+                </a:solidFill>
+                <a:latin typeface="Inter" pitchFamily="34" charset="0"/>
+                <a:ea typeface="Inter" pitchFamily="34" charset="-122"/>
+                <a:cs typeface="Inter" pitchFamily="34" charset="-120"/>
+              </a:rPr>
+              <a:t>31</a:t>
+            </a:r>
+            <a:endParaRPr lang="en-US" sz="1200" dirty="0"/>
+          </a:p>
+        </p:txBody>
+      </p:sp>
+      <p:sp>
+        <p:nvSpPr>
+          <p:cNvPr id="193" name="Text 191"/>
+          <p:cNvSpPr txBox="1"/>
+          <p:nvPr/>
+        </p:nvSpPr>
+        <p:spPr>
+          <a:xfrm>
+            <a:off x="6565392" y="4931305"/>
+            <a:ext cx="1783080" cy="248502"/>
           </a:xfrm>
           <a:prstGeom prst="rect">
             <a:avLst/>
@@ -27496,14 +30012,14 @@
       </p:sp>
       <p:sp>
         <p:nvSpPr>
-          <p:cNvPr id="163" name="Shape 161"/>
+          <p:cNvPr id="194" name="Shape 192"/>
           <p:cNvSpPr/>
           <p:nvPr/>
         </p:nvSpPr>
         <p:spPr>
           <a:xfrm>
-            <a:off x="8220456" y="4987218"/>
-            <a:ext cx="26547" cy="136676"/>
+            <a:off x="8421624" y="4987218"/>
+            <a:ext cx="19910" cy="136676"/>
           </a:xfrm>
           <a:prstGeom prst="rect">
             <a:avLst/>
@@ -27516,13 +30032,13 @@
       </p:sp>
       <p:sp>
         <p:nvSpPr>
-          <p:cNvPr id="164" name="Text 162"/>
-          <p:cNvSpPr txBox="1"/>
-          <p:nvPr/>
-        </p:nvSpPr>
-        <p:spPr>
-          <a:xfrm>
-            <a:off x="8897112" y="4931305"/>
+          <p:cNvPr id="195" name="Text 193"/>
+          <p:cNvSpPr txBox="1"/>
+          <p:nvPr/>
+        </p:nvSpPr>
+        <p:spPr>
+          <a:xfrm>
+            <a:off x="8942832" y="4931305"/>
             <a:ext cx="786384" cy="248502"/>
           </a:xfrm>
           <a:prstGeom prst="rect">
@@ -27555,13 +30071,13 @@
       </p:sp>
       <p:sp>
         <p:nvSpPr>
-          <p:cNvPr id="165" name="Text 163"/>
-          <p:cNvSpPr txBox="1"/>
-          <p:nvPr/>
-        </p:nvSpPr>
-        <p:spPr>
-          <a:xfrm>
-            <a:off x="9683496" y="4931305"/>
+          <p:cNvPr id="196" name="Text 194"/>
+          <p:cNvSpPr txBox="1"/>
+          <p:nvPr/>
+        </p:nvSpPr>
+        <p:spPr>
+          <a:xfrm>
+            <a:off x="9729216" y="4931305"/>
             <a:ext cx="868680" cy="248502"/>
           </a:xfrm>
           <a:prstGeom prst="rect">
@@ -27594,13 +30110,13 @@
       </p:sp>
       <p:sp>
         <p:nvSpPr>
-          <p:cNvPr id="166" name="Text 164"/>
-          <p:cNvSpPr txBox="1"/>
-          <p:nvPr/>
-        </p:nvSpPr>
-        <p:spPr>
-          <a:xfrm>
-            <a:off x="10552176" y="4931305"/>
+          <p:cNvPr id="197" name="Text 195"/>
+          <p:cNvSpPr txBox="1"/>
+          <p:nvPr/>
+        </p:nvSpPr>
+        <p:spPr>
+          <a:xfrm>
+            <a:off x="10597896" y="4931305"/>
             <a:ext cx="868680" cy="248502"/>
           </a:xfrm>
           <a:prstGeom prst="rect">
@@ -27633,14 +30149,53 @@
       </p:sp>
       <p:sp>
         <p:nvSpPr>
-          <p:cNvPr id="167" name="Text 165"/>
+          <p:cNvPr id="198" name="Text 196"/>
           <p:cNvSpPr txBox="1"/>
           <p:nvPr/>
         </p:nvSpPr>
         <p:spPr>
           <a:xfrm>
             <a:off x="6208776" y="5179807"/>
-            <a:ext cx="1938528" cy="248502"/>
+            <a:ext cx="310896" cy="248502"/>
+          </a:xfrm>
+          <a:prstGeom prst="rect">
+            <a:avLst/>
+          </a:prstGeom>
+          <a:noFill/>
+          <a:ln/>
+        </p:spPr>
+        <p:txBody>
+          <a:bodyPr wrap="square" lIns="0" tIns="0" rIns="0" bIns="0" rtlCol="0" anchor="ctr"/>
+          <a:lstStyle/>
+          <a:p>
+            <a:pPr algn="r" indent="0" marL="0">
+              <a:buNone/>
+            </a:pPr>
+            <a:r>
+              <a:rPr lang="en-US" sz="1200" dirty="0">
+                <a:solidFill>
+                  <a:srgbClr val="9AA3AD"/>
+                </a:solidFill>
+                <a:latin typeface="Inter" pitchFamily="34" charset="0"/>
+                <a:ea typeface="Inter" pitchFamily="34" charset="-122"/>
+                <a:cs typeface="Inter" pitchFamily="34" charset="-120"/>
+              </a:rPr>
+              <a:t>32</a:t>
+            </a:r>
+            <a:endParaRPr lang="en-US" sz="1200" dirty="0"/>
+          </a:p>
+        </p:txBody>
+      </p:sp>
+      <p:sp>
+        <p:nvSpPr>
+          <p:cNvPr id="199" name="Text 197"/>
+          <p:cNvSpPr txBox="1"/>
+          <p:nvPr/>
+        </p:nvSpPr>
+        <p:spPr>
+          <a:xfrm>
+            <a:off x="6565392" y="5179807"/>
+            <a:ext cx="1783080" cy="248502"/>
           </a:xfrm>
           <a:prstGeom prst="rect">
             <a:avLst/>
@@ -27672,13 +30227,13 @@
       </p:sp>
       <p:sp>
         <p:nvSpPr>
-          <p:cNvPr id="168" name="Shape 166"/>
+          <p:cNvPr id="200" name="Shape 198"/>
           <p:cNvSpPr/>
           <p:nvPr/>
         </p:nvSpPr>
         <p:spPr>
           <a:xfrm>
-            <a:off x="8220456" y="5235720"/>
+            <a:off x="8421624" y="5235720"/>
             <a:ext cx="18288" cy="136676"/>
           </a:xfrm>
           <a:prstGeom prst="rect">
@@ -27692,13 +30247,13 @@
       </p:sp>
       <p:sp>
         <p:nvSpPr>
-          <p:cNvPr id="169" name="Text 167"/>
-          <p:cNvSpPr txBox="1"/>
-          <p:nvPr/>
-        </p:nvSpPr>
-        <p:spPr>
-          <a:xfrm>
-            <a:off x="8897112" y="5179807"/>
+          <p:cNvPr id="201" name="Text 199"/>
+          <p:cNvSpPr txBox="1"/>
+          <p:nvPr/>
+        </p:nvSpPr>
+        <p:spPr>
+          <a:xfrm>
+            <a:off x="8942832" y="5179807"/>
             <a:ext cx="786384" cy="248502"/>
           </a:xfrm>
           <a:prstGeom prst="rect">
@@ -27731,13 +30286,13 @@
       </p:sp>
       <p:sp>
         <p:nvSpPr>
-          <p:cNvPr id="170" name="Text 168"/>
-          <p:cNvSpPr txBox="1"/>
-          <p:nvPr/>
-        </p:nvSpPr>
-        <p:spPr>
-          <a:xfrm>
-            <a:off x="9683496" y="5179807"/>
+          <p:cNvPr id="202" name="Text 200"/>
+          <p:cNvSpPr txBox="1"/>
+          <p:nvPr/>
+        </p:nvSpPr>
+        <p:spPr>
+          <a:xfrm>
+            <a:off x="9729216" y="5179807"/>
             <a:ext cx="868680" cy="248502"/>
           </a:xfrm>
           <a:prstGeom prst="rect">
@@ -27770,13 +30325,13 @@
       </p:sp>
       <p:sp>
         <p:nvSpPr>
-          <p:cNvPr id="171" name="Text 169"/>
-          <p:cNvSpPr txBox="1"/>
-          <p:nvPr/>
-        </p:nvSpPr>
-        <p:spPr>
-          <a:xfrm>
-            <a:off x="10552176" y="5179807"/>
+          <p:cNvPr id="203" name="Text 201"/>
+          <p:cNvSpPr txBox="1"/>
+          <p:nvPr/>
+        </p:nvSpPr>
+        <p:spPr>
+          <a:xfrm>
+            <a:off x="10597896" y="5179807"/>
             <a:ext cx="868680" cy="248502"/>
           </a:xfrm>
           <a:prstGeom prst="rect">
@@ -27809,14 +30364,53 @@
       </p:sp>
       <p:sp>
         <p:nvSpPr>
-          <p:cNvPr id="172" name="Text 170"/>
+          <p:cNvPr id="204" name="Text 202"/>
           <p:cNvSpPr txBox="1"/>
           <p:nvPr/>
         </p:nvSpPr>
         <p:spPr>
           <a:xfrm>
             <a:off x="6208776" y="5428309"/>
-            <a:ext cx="1938528" cy="248502"/>
+            <a:ext cx="310896" cy="248502"/>
+          </a:xfrm>
+          <a:prstGeom prst="rect">
+            <a:avLst/>
+          </a:prstGeom>
+          <a:noFill/>
+          <a:ln/>
+        </p:spPr>
+        <p:txBody>
+          <a:bodyPr wrap="square" lIns="0" tIns="0" rIns="0" bIns="0" rtlCol="0" anchor="ctr"/>
+          <a:lstStyle/>
+          <a:p>
+            <a:pPr algn="r" indent="0" marL="0">
+              <a:buNone/>
+            </a:pPr>
+            <a:r>
+              <a:rPr lang="en-US" sz="1200" dirty="0">
+                <a:solidFill>
+                  <a:srgbClr val="9AA3AD"/>
+                </a:solidFill>
+                <a:latin typeface="Inter" pitchFamily="34" charset="0"/>
+                <a:ea typeface="Inter" pitchFamily="34" charset="-122"/>
+                <a:cs typeface="Inter" pitchFamily="34" charset="-120"/>
+              </a:rPr>
+              <a:t>33</a:t>
+            </a:r>
+            <a:endParaRPr lang="en-US" sz="1200" dirty="0"/>
+          </a:p>
+        </p:txBody>
+      </p:sp>
+      <p:sp>
+        <p:nvSpPr>
+          <p:cNvPr id="205" name="Text 203"/>
+          <p:cNvSpPr txBox="1"/>
+          <p:nvPr/>
+        </p:nvSpPr>
+        <p:spPr>
+          <a:xfrm>
+            <a:off x="6565392" y="5428309"/>
+            <a:ext cx="1783080" cy="248502"/>
           </a:xfrm>
           <a:prstGeom prst="rect">
             <a:avLst/>
@@ -27848,13 +30442,13 @@
       </p:sp>
       <p:sp>
         <p:nvSpPr>
-          <p:cNvPr id="173" name="Shape 171"/>
+          <p:cNvPr id="206" name="Shape 204"/>
           <p:cNvSpPr/>
           <p:nvPr/>
         </p:nvSpPr>
         <p:spPr>
           <a:xfrm>
-            <a:off x="8220456" y="5484222"/>
+            <a:off x="8421624" y="5484222"/>
             <a:ext cx="18288" cy="136676"/>
           </a:xfrm>
           <a:prstGeom prst="rect">
@@ -27868,13 +30462,13 @@
       </p:sp>
       <p:sp>
         <p:nvSpPr>
-          <p:cNvPr id="174" name="Text 172"/>
-          <p:cNvSpPr txBox="1"/>
-          <p:nvPr/>
-        </p:nvSpPr>
-        <p:spPr>
-          <a:xfrm>
-            <a:off x="8897112" y="5428309"/>
+          <p:cNvPr id="207" name="Text 205"/>
+          <p:cNvSpPr txBox="1"/>
+          <p:nvPr/>
+        </p:nvSpPr>
+        <p:spPr>
+          <a:xfrm>
+            <a:off x="8942832" y="5428309"/>
             <a:ext cx="786384" cy="248502"/>
           </a:xfrm>
           <a:prstGeom prst="rect">
@@ -27907,13 +30501,13 @@
       </p:sp>
       <p:sp>
         <p:nvSpPr>
-          <p:cNvPr id="175" name="Text 173"/>
-          <p:cNvSpPr txBox="1"/>
-          <p:nvPr/>
-        </p:nvSpPr>
-        <p:spPr>
-          <a:xfrm>
-            <a:off x="9683496" y="5428309"/>
+          <p:cNvPr id="208" name="Text 206"/>
+          <p:cNvSpPr txBox="1"/>
+          <p:nvPr/>
+        </p:nvSpPr>
+        <p:spPr>
+          <a:xfrm>
+            <a:off x="9729216" y="5428309"/>
             <a:ext cx="868680" cy="248502"/>
           </a:xfrm>
           <a:prstGeom prst="rect">
@@ -27946,13 +30540,13 @@
       </p:sp>
       <p:sp>
         <p:nvSpPr>
-          <p:cNvPr id="176" name="Text 174"/>
-          <p:cNvSpPr txBox="1"/>
-          <p:nvPr/>
-        </p:nvSpPr>
-        <p:spPr>
-          <a:xfrm>
-            <a:off x="10552176" y="5428309"/>
+          <p:cNvPr id="209" name="Text 207"/>
+          <p:cNvSpPr txBox="1"/>
+          <p:nvPr/>
+        </p:nvSpPr>
+        <p:spPr>
+          <a:xfrm>
+            <a:off x="10597896" y="5428309"/>
             <a:ext cx="868680" cy="248502"/>
           </a:xfrm>
           <a:prstGeom prst="rect">
@@ -27985,7 +30579,27 @@
       </p:sp>
       <p:sp>
         <p:nvSpPr>
-          <p:cNvPr id="177" name="Shape 175"/>
+          <p:cNvPr id="210" name="Shape 208"/>
+          <p:cNvSpPr/>
+          <p:nvPr/>
+        </p:nvSpPr>
+        <p:spPr>
+          <a:xfrm>
+            <a:off x="6085332" y="1700784"/>
+            <a:ext cx="10973" cy="4224528"/>
+          </a:xfrm>
+          <a:prstGeom prst="rect">
+            <a:avLst/>
+          </a:prstGeom>
+          <a:solidFill>
+            <a:srgbClr val="D9D9D9"/>
+          </a:solidFill>
+          <a:ln/>
+        </p:spPr>
+      </p:sp>
+      <p:sp>
+        <p:nvSpPr>
+          <p:cNvPr id="211" name="Shape 209"/>
           <p:cNvSpPr/>
           <p:nvPr/>
         </p:nvSpPr>
@@ -28005,7 +30619,7 @@
       </p:sp>
       <p:sp>
         <p:nvSpPr>
-          <p:cNvPr id="178" name="Text 176"/>
+          <p:cNvPr id="212" name="Text 210"/>
           <p:cNvSpPr txBox="1"/>
           <p:nvPr/>
         </p:nvSpPr>

--- a/day2-deck/decks/Technician Proficiency - House Style.pptx
+++ b/day2-deck/decks/Technician Proficiency - House Style.pptx
@@ -15988,7 +15988,7 @@
               <a:buNone/>
             </a:pPr>
             <a:r>
-              <a:rPr lang="en-US" sz="1300" dirty="0">
+              <a:rPr lang="en-US" sz="1200" dirty="0">
                 <a:solidFill>
                   <a:srgbClr val="1A1A1A"/>
                 </a:solidFill>
@@ -15998,7 +15998,7 @@
               </a:rPr>
               <a:t>CADILLAC</a:t>
             </a:r>
-            <a:endParaRPr lang="en-US" sz="1300" dirty="0"/>
+            <a:endParaRPr lang="en-US" sz="1200" dirty="0"/>
           </a:p>
         </p:txBody>
       </p:sp>
@@ -16203,7 +16203,7 @@
               <a:buNone/>
             </a:pPr>
             <a:r>
-              <a:rPr lang="en-US" sz="1300" dirty="0">
+              <a:rPr lang="en-US" sz="1200" dirty="0">
                 <a:solidFill>
                   <a:srgbClr val="1A1A1A"/>
                 </a:solidFill>
@@ -16213,7 +16213,7 @@
               </a:rPr>
               <a:t>CHEVY GMC BULLHEAD</a:t>
             </a:r>
-            <a:endParaRPr lang="en-US" sz="1300" dirty="0"/>
+            <a:endParaRPr lang="en-US" sz="1200" dirty="0"/>
           </a:p>
         </p:txBody>
       </p:sp>
@@ -16418,7 +16418,7 @@
               <a:buNone/>
             </a:pPr>
             <a:r>
-              <a:rPr lang="en-US" sz="1300" dirty="0">
+              <a:rPr lang="en-US" sz="1200" dirty="0">
                 <a:solidFill>
                   <a:srgbClr val="1A1A1A"/>
                 </a:solidFill>
@@ -16428,7 +16428,7 @@
               </a:rPr>
               <a:t>AUDI HENDERSON</a:t>
             </a:r>
-            <a:endParaRPr lang="en-US" sz="1300" dirty="0"/>
+            <a:endParaRPr lang="en-US" sz="1200" dirty="0"/>
           </a:p>
         </p:txBody>
       </p:sp>
@@ -16633,7 +16633,7 @@
               <a:buNone/>
             </a:pPr>
             <a:r>
-              <a:rPr lang="en-US" sz="1300" dirty="0">
+              <a:rPr lang="en-US" sz="1200" dirty="0">
                 <a:solidFill>
                   <a:srgbClr val="1A1A1A"/>
                 </a:solidFill>
@@ -16643,7 +16643,7 @@
               </a:rPr>
               <a:t>CDJR POST FALLS</a:t>
             </a:r>
-            <a:endParaRPr lang="en-US" sz="1300" dirty="0"/>
+            <a:endParaRPr lang="en-US" sz="1200" dirty="0"/>
           </a:p>
         </p:txBody>
       </p:sp>
@@ -16848,7 +16848,7 @@
               <a:buNone/>
             </a:pPr>
             <a:r>
-              <a:rPr lang="en-US" sz="1300" dirty="0">
+              <a:rPr lang="en-US" sz="1200" dirty="0">
                 <a:solidFill>
                   <a:srgbClr val="1A1A1A"/>
                 </a:solidFill>
@@ -16858,7 +16858,7 @@
               </a:rPr>
               <a:t>HYUNDAI ST GEORGE</a:t>
             </a:r>
-            <a:endParaRPr lang="en-US" sz="1300" dirty="0"/>
+            <a:endParaRPr lang="en-US" sz="1200" dirty="0"/>
           </a:p>
         </p:txBody>
       </p:sp>
@@ -17063,7 +17063,7 @@
               <a:buNone/>
             </a:pPr>
             <a:r>
-              <a:rPr lang="en-US" sz="1300" dirty="0">
+              <a:rPr lang="en-US" sz="1200" dirty="0">
                 <a:solidFill>
                   <a:srgbClr val="1A1A1A"/>
                 </a:solidFill>
@@ -17073,7 +17073,7 @@
               </a:rPr>
               <a:t>CHEVY LV</a:t>
             </a:r>
-            <a:endParaRPr lang="en-US" sz="1300" dirty="0"/>
+            <a:endParaRPr lang="en-US" sz="1200" dirty="0"/>
           </a:p>
         </p:txBody>
       </p:sp>
@@ -17278,7 +17278,7 @@
               <a:buNone/>
             </a:pPr>
             <a:r>
-              <a:rPr lang="en-US" sz="1300" dirty="0">
+              <a:rPr lang="en-US" sz="1200" dirty="0">
                 <a:solidFill>
                   <a:srgbClr val="1A1A1A"/>
                 </a:solidFill>
@@ -17288,7 +17288,7 @@
               </a:rPr>
               <a:t>TOYOTA PRESCOTT</a:t>
             </a:r>
-            <a:endParaRPr lang="en-US" sz="1300" dirty="0"/>
+            <a:endParaRPr lang="en-US" sz="1200" dirty="0"/>
           </a:p>
         </p:txBody>
       </p:sp>
@@ -17493,7 +17493,7 @@
               <a:buNone/>
             </a:pPr>
             <a:r>
-              <a:rPr lang="en-US" sz="1300" dirty="0">
+              <a:rPr lang="en-US" sz="1200" dirty="0">
                 <a:solidFill>
                   <a:srgbClr val="1A1A1A"/>
                 </a:solidFill>
@@ -17503,7 +17503,7 @@
               </a:rPr>
               <a:t>KIA ST GEORGE</a:t>
             </a:r>
-            <a:endParaRPr lang="en-US" sz="1300" dirty="0"/>
+            <a:endParaRPr lang="en-US" sz="1200" dirty="0"/>
           </a:p>
         </p:txBody>
       </p:sp>
@@ -17708,7 +17708,7 @@
               <a:buNone/>
             </a:pPr>
             <a:r>
-              <a:rPr lang="en-US" sz="1300" dirty="0">
+              <a:rPr lang="en-US" sz="1200" dirty="0">
                 <a:solidFill>
                   <a:srgbClr val="1A1A1A"/>
                 </a:solidFill>
@@ -17718,7 +17718,7 @@
               </a:rPr>
               <a:t>ACURA</a:t>
             </a:r>
-            <a:endParaRPr lang="en-US" sz="1300" dirty="0"/>
+            <a:endParaRPr lang="en-US" sz="1200" dirty="0"/>
           </a:p>
         </p:txBody>
       </p:sp>
@@ -17923,7 +17923,7 @@
               <a:buNone/>
             </a:pPr>
             <a:r>
-              <a:rPr lang="en-US" sz="1300" dirty="0">
+              <a:rPr lang="en-US" sz="1200" dirty="0">
                 <a:solidFill>
                   <a:srgbClr val="1A1A1A"/>
                 </a:solidFill>
@@ -17933,7 +17933,7 @@
               </a:rPr>
               <a:t>KIA LV</a:t>
             </a:r>
-            <a:endParaRPr lang="en-US" sz="1300" dirty="0"/>
+            <a:endParaRPr lang="en-US" sz="1200" dirty="0"/>
           </a:p>
         </p:txBody>
       </p:sp>
@@ -18138,7 +18138,7 @@
               <a:buNone/>
             </a:pPr>
             <a:r>
-              <a:rPr lang="en-US" sz="1300" dirty="0">
+              <a:rPr lang="en-US" sz="1200" dirty="0">
                 <a:solidFill>
                   <a:srgbClr val="1A1A1A"/>
                 </a:solidFill>
@@ -18148,7 +18148,7 @@
               </a:rPr>
               <a:t>TOYOTA HENDERSON</a:t>
             </a:r>
-            <a:endParaRPr lang="en-US" sz="1300" dirty="0"/>
+            <a:endParaRPr lang="en-US" sz="1200" dirty="0"/>
           </a:p>
         </p:txBody>
       </p:sp>
@@ -18353,7 +18353,7 @@
               <a:buNone/>
             </a:pPr>
             <a:r>
-              <a:rPr lang="en-US" sz="1300" dirty="0">
+              <a:rPr lang="en-US" sz="1200" dirty="0">
                 <a:solidFill>
                   <a:srgbClr val="1A1A1A"/>
                 </a:solidFill>
@@ -18363,7 +18363,7 @@
               </a:rPr>
               <a:t>LR LV</a:t>
             </a:r>
-            <a:endParaRPr lang="en-US" sz="1300" dirty="0"/>
+            <a:endParaRPr lang="en-US" sz="1200" dirty="0"/>
           </a:p>
         </p:txBody>
       </p:sp>
@@ -18568,7 +18568,7 @@
               <a:buNone/>
             </a:pPr>
             <a:r>
-              <a:rPr lang="en-US" sz="1300" dirty="0">
+              <a:rPr lang="en-US" sz="1200" dirty="0">
                 <a:solidFill>
                   <a:srgbClr val="1A1A1A"/>
                 </a:solidFill>
@@ -18578,7 +18578,7 @@
               </a:rPr>
               <a:t>VOLVO</a:t>
             </a:r>
-            <a:endParaRPr lang="en-US" sz="1300" dirty="0"/>
+            <a:endParaRPr lang="en-US" sz="1200" dirty="0"/>
           </a:p>
         </p:txBody>
       </p:sp>
@@ -18783,7 +18783,7 @@
               <a:buNone/>
             </a:pPr>
             <a:r>
-              <a:rPr lang="en-US" sz="1300" dirty="0">
+              <a:rPr lang="en-US" sz="1200" dirty="0">
                 <a:solidFill>
                   <a:srgbClr val="1A1A1A"/>
                 </a:solidFill>
@@ -18793,7 +18793,7 @@
               </a:rPr>
               <a:t>SUBARU PRESCOTT</a:t>
             </a:r>
-            <a:endParaRPr lang="en-US" sz="1300" dirty="0"/>
+            <a:endParaRPr lang="en-US" sz="1200" dirty="0"/>
           </a:p>
         </p:txBody>
       </p:sp>
@@ -18998,7 +18998,7 @@
               <a:buNone/>
             </a:pPr>
             <a:r>
-              <a:rPr lang="en-US" sz="1300" dirty="0">
+              <a:rPr lang="en-US" sz="1200" dirty="0">
                 <a:solidFill>
                   <a:srgbClr val="1A1A1A"/>
                 </a:solidFill>
@@ -19008,7 +19008,7 @@
               </a:rPr>
               <a:t>GMC PRESCOTT</a:t>
             </a:r>
-            <a:endParaRPr lang="en-US" sz="1300" dirty="0"/>
+            <a:endParaRPr lang="en-US" sz="1200" dirty="0"/>
           </a:p>
         </p:txBody>
       </p:sp>
@@ -19213,7 +19213,7 @@
               <a:buNone/>
             </a:pPr>
             <a:r>
-              <a:rPr lang="en-US" sz="1300" dirty="0">
+              <a:rPr lang="en-US" sz="1200" dirty="0">
                 <a:solidFill>
                   <a:srgbClr val="1A1A1A"/>
                 </a:solidFill>
@@ -19223,7 +19223,7 @@
               </a:rPr>
               <a:t>SUBARU LV</a:t>
             </a:r>
-            <a:endParaRPr lang="en-US" sz="1300" dirty="0"/>
+            <a:endParaRPr lang="en-US" sz="1200" dirty="0"/>
           </a:p>
         </p:txBody>
       </p:sp>
@@ -19428,7 +19428,7 @@
               <a:buNone/>
             </a:pPr>
             <a:r>
-              <a:rPr lang="en-US" sz="1300" dirty="0">
+              <a:rPr lang="en-US" sz="1200" dirty="0">
                 <a:solidFill>
                   <a:srgbClr val="1A1A1A"/>
                 </a:solidFill>
@@ -19438,7 +19438,7 @@
               </a:rPr>
               <a:t>NISSAN</a:t>
             </a:r>
-            <a:endParaRPr lang="en-US" sz="1300" dirty="0"/>
+            <a:endParaRPr lang="en-US" sz="1200" dirty="0"/>
           </a:p>
         </p:txBody>
       </p:sp>
@@ -19643,7 +19643,7 @@
               <a:buNone/>
             </a:pPr>
             <a:r>
-              <a:rPr lang="en-US" sz="1300" dirty="0">
+              <a:rPr lang="en-US" sz="1200" dirty="0">
                 <a:solidFill>
                   <a:srgbClr val="1A1A1A"/>
                 </a:solidFill>
@@ -19653,7 +19653,7 @@
               </a:rPr>
               <a:t>HONDA FLAGSTAFF</a:t>
             </a:r>
-            <a:endParaRPr lang="en-US" sz="1300" dirty="0"/>
+            <a:endParaRPr lang="en-US" sz="1200" dirty="0"/>
           </a:p>
         </p:txBody>
       </p:sp>
@@ -19858,7 +19858,7 @@
               <a:buNone/>
             </a:pPr>
             <a:r>
-              <a:rPr lang="en-US" sz="1300" dirty="0">
+              <a:rPr lang="en-US" sz="1200" dirty="0">
                 <a:solidFill>
                   <a:srgbClr val="1A1A1A"/>
                 </a:solidFill>
@@ -19868,7 +19868,7 @@
               </a:rPr>
               <a:t>HYUNDAI PRESCOTT</a:t>
             </a:r>
-            <a:endParaRPr lang="en-US" sz="1300" dirty="0"/>
+            <a:endParaRPr lang="en-US" sz="1200" dirty="0"/>
           </a:p>
         </p:txBody>
       </p:sp>
@@ -20073,7 +20073,7 @@
               <a:buNone/>
             </a:pPr>
             <a:r>
-              <a:rPr lang="en-US" sz="1300" dirty="0">
+              <a:rPr lang="en-US" sz="1200" dirty="0">
                 <a:solidFill>
                   <a:srgbClr val="1A1A1A"/>
                 </a:solidFill>
@@ -20083,7 +20083,7 @@
               </a:rPr>
               <a:t>LEXUS</a:t>
             </a:r>
-            <a:endParaRPr lang="en-US" sz="1300" dirty="0"/>
+            <a:endParaRPr lang="en-US" sz="1200" dirty="0"/>
           </a:p>
         </p:txBody>
       </p:sp>
@@ -20288,7 +20288,7 @@
               <a:buNone/>
             </a:pPr>
             <a:r>
-              <a:rPr lang="en-US" sz="1300" dirty="0">
+              <a:rPr lang="en-US" sz="1200" dirty="0">
                 <a:solidFill>
                   <a:srgbClr val="1A1A1A"/>
                 </a:solidFill>
@@ -20298,7 +20298,7 @@
               </a:rPr>
               <a:t>VW HENDERSON</a:t>
             </a:r>
-            <a:endParaRPr lang="en-US" sz="1300" dirty="0"/>
+            <a:endParaRPr lang="en-US" sz="1200" dirty="0"/>
           </a:p>
         </p:txBody>
       </p:sp>
@@ -20503,7 +20503,7 @@
               <a:buNone/>
             </a:pPr>
             <a:r>
-              <a:rPr lang="en-US" sz="1300" dirty="0">
+              <a:rPr lang="en-US" sz="1200" dirty="0">
                 <a:solidFill>
                   <a:srgbClr val="1A1A1A"/>
                 </a:solidFill>
@@ -20513,7 +20513,7 @@
               </a:rPr>
               <a:t>LINCOLN</a:t>
             </a:r>
-            <a:endParaRPr lang="en-US" sz="1300" dirty="0"/>
+            <a:endParaRPr lang="en-US" sz="1200" dirty="0"/>
           </a:p>
         </p:txBody>
       </p:sp>
@@ -20718,7 +20718,7 @@
               <a:buNone/>
             </a:pPr>
             <a:r>
-              <a:rPr lang="en-US" sz="1300" dirty="0">
+              <a:rPr lang="en-US" sz="1200" dirty="0">
                 <a:solidFill>
                   <a:srgbClr val="1A1A1A"/>
                 </a:solidFill>
@@ -20728,7 +20728,7 @@
               </a:rPr>
               <a:t>SUBARU ST GEORGE</a:t>
             </a:r>
-            <a:endParaRPr lang="en-US" sz="1300" dirty="0"/>
+            <a:endParaRPr lang="en-US" sz="1200" dirty="0"/>
           </a:p>
         </p:txBody>
       </p:sp>
@@ -20933,7 +20933,7 @@
               <a:buNone/>
             </a:pPr>
             <a:r>
-              <a:rPr lang="en-US" sz="1300" dirty="0">
+              <a:rPr lang="en-US" sz="1200" dirty="0">
                 <a:solidFill>
                   <a:srgbClr val="1A1A1A"/>
                 </a:solidFill>
@@ -20943,7 +20943,7 @@
               </a:rPr>
               <a:t>VW ST GEORGE</a:t>
             </a:r>
-            <a:endParaRPr lang="en-US" sz="1300" dirty="0"/>
+            <a:endParaRPr lang="en-US" sz="1200" dirty="0"/>
           </a:p>
         </p:txBody>
       </p:sp>
@@ -21148,7 +21148,7 @@
               <a:buNone/>
             </a:pPr>
             <a:r>
-              <a:rPr lang="en-US" sz="1300" dirty="0">
+              <a:rPr lang="en-US" sz="1200" dirty="0">
                 <a:solidFill>
                   <a:srgbClr val="1A1A1A"/>
                 </a:solidFill>
@@ -21158,7 +21158,7 @@
               </a:rPr>
               <a:t>LR RENO</a:t>
             </a:r>
-            <a:endParaRPr lang="en-US" sz="1300" dirty="0"/>
+            <a:endParaRPr lang="en-US" sz="1200" dirty="0"/>
           </a:p>
         </p:txBody>
       </p:sp>
@@ -21363,7 +21363,7 @@
               <a:buNone/>
             </a:pPr>
             <a:r>
-              <a:rPr lang="en-US" sz="1300" dirty="0">
+              <a:rPr lang="en-US" sz="1200" dirty="0">
                 <a:solidFill>
                   <a:srgbClr val="1A1A1A"/>
                 </a:solidFill>
@@ -21373,7 +21373,7 @@
               </a:rPr>
               <a:t>AUDI RENO</a:t>
             </a:r>
-            <a:endParaRPr lang="en-US" sz="1300" dirty="0"/>
+            <a:endParaRPr lang="en-US" sz="1200" dirty="0"/>
           </a:p>
         </p:txBody>
       </p:sp>
@@ -21578,7 +21578,7 @@
               <a:buNone/>
             </a:pPr>
             <a:r>
-              <a:rPr lang="en-US" sz="1300" dirty="0">
+              <a:rPr lang="en-US" sz="1200" dirty="0">
                 <a:solidFill>
                   <a:srgbClr val="1A1A1A"/>
                 </a:solidFill>
@@ -21588,7 +21588,7 @@
               </a:rPr>
               <a:t>LR HENDERSON</a:t>
             </a:r>
-            <a:endParaRPr lang="en-US" sz="1300" dirty="0"/>
+            <a:endParaRPr lang="en-US" sz="1200" dirty="0"/>
           </a:p>
         </p:txBody>
       </p:sp>
@@ -21793,7 +21793,7 @@
               <a:buNone/>
             </a:pPr>
             <a:r>
-              <a:rPr lang="en-US" sz="1300" dirty="0">
+              <a:rPr lang="en-US" sz="1200" dirty="0">
                 <a:solidFill>
                   <a:srgbClr val="1A1A1A"/>
                 </a:solidFill>
@@ -21803,7 +21803,7 @@
               </a:rPr>
               <a:t>HONDA HENDERSON</a:t>
             </a:r>
-            <a:endParaRPr lang="en-US" sz="1300" dirty="0"/>
+            <a:endParaRPr lang="en-US" sz="1200" dirty="0"/>
           </a:p>
         </p:txBody>
       </p:sp>
@@ -22008,7 +22008,7 @@
               <a:buNone/>
             </a:pPr>
             <a:r>
-              <a:rPr lang="en-US" sz="1300" dirty="0">
+              <a:rPr lang="en-US" sz="1200" dirty="0">
                 <a:solidFill>
                   <a:srgbClr val="1A1A1A"/>
                 </a:solidFill>
@@ -22018,7 +22018,7 @@
               </a:rPr>
               <a:t>HONDA NORTH</a:t>
             </a:r>
-            <a:endParaRPr lang="en-US" sz="1300" dirty="0"/>
+            <a:endParaRPr lang="en-US" sz="1200" dirty="0"/>
           </a:p>
         </p:txBody>
       </p:sp>
@@ -22223,7 +22223,7 @@
               <a:buNone/>
             </a:pPr>
             <a:r>
-              <a:rPr lang="en-US" sz="1300" dirty="0">
+              <a:rPr lang="en-US" sz="1200" dirty="0">
                 <a:solidFill>
                   <a:srgbClr val="1A1A1A"/>
                 </a:solidFill>
@@ -22233,7 +22233,7 @@
               </a:rPr>
               <a:t>TOYOTA SPOKANE</a:t>
             </a:r>
-            <a:endParaRPr lang="en-US" sz="1300" dirty="0"/>
+            <a:endParaRPr lang="en-US" sz="1200" dirty="0"/>
           </a:p>
         </p:txBody>
       </p:sp>
@@ -22438,7 +22438,7 @@
               <a:buNone/>
             </a:pPr>
             <a:r>
-              <a:rPr lang="en-US" sz="1300" dirty="0">
+              <a:rPr lang="en-US" sz="1200" dirty="0">
                 <a:solidFill>
                   <a:srgbClr val="1A1A1A"/>
                 </a:solidFill>
@@ -22448,7 +22448,7 @@
               </a:rPr>
               <a:t>TOYOTA FLAGSTAFF</a:t>
             </a:r>
-            <a:endParaRPr lang="en-US" sz="1300" dirty="0"/>
+            <a:endParaRPr lang="en-US" sz="1200" dirty="0"/>
           </a:p>
         </p:txBody>
       </p:sp>
@@ -22653,7 +22653,7 @@
               <a:buNone/>
             </a:pPr>
             <a:r>
-              <a:rPr lang="en-US" sz="1300" dirty="0">
+              <a:rPr lang="en-US" sz="1200" dirty="0">
                 <a:solidFill>
                   <a:srgbClr val="1A1A1A"/>
                 </a:solidFill>
@@ -22663,7 +22663,7 @@
               </a:rPr>
               <a:t>MAZDA</a:t>
             </a:r>
-            <a:endParaRPr lang="en-US" sz="1300" dirty="0"/>
+            <a:endParaRPr lang="en-US" sz="1200" dirty="0"/>
           </a:p>
         </p:txBody>
       </p:sp>
@@ -22868,7 +22868,7 @@
               <a:buNone/>
             </a:pPr>
             <a:r>
-              <a:rPr lang="en-US" sz="1300" dirty="0">
+              <a:rPr lang="en-US" sz="1200" dirty="0">
                 <a:solidFill>
                   <a:srgbClr val="1A1A1A"/>
                 </a:solidFill>
@@ -22878,7 +22878,7 @@
               </a:rPr>
               <a:t>HONDA SPOKANE</a:t>
             </a:r>
-            <a:endParaRPr lang="en-US" sz="1300" dirty="0"/>
+            <a:endParaRPr lang="en-US" sz="1200" dirty="0"/>
           </a:p>
         </p:txBody>
       </p:sp>
@@ -23546,7 +23546,7 @@
               <a:buNone/>
             </a:pPr>
             <a:r>
-              <a:rPr lang="en-US" sz="1300" dirty="0">
+              <a:rPr lang="en-US" sz="1200" dirty="0">
                 <a:solidFill>
                   <a:srgbClr val="1A1A1A"/>
                 </a:solidFill>
@@ -23556,7 +23556,7 @@
               </a:rPr>
               <a:t>HYUNDAI ST GEORGE</a:t>
             </a:r>
-            <a:endParaRPr lang="en-US" sz="1300" dirty="0"/>
+            <a:endParaRPr lang="en-US" sz="1200" dirty="0"/>
           </a:p>
         </p:txBody>
       </p:sp>
@@ -23761,7 +23761,7 @@
               <a:buNone/>
             </a:pPr>
             <a:r>
-              <a:rPr lang="en-US" sz="1300" dirty="0">
+              <a:rPr lang="en-US" sz="1200" dirty="0">
                 <a:solidFill>
                   <a:srgbClr val="1A1A1A"/>
                 </a:solidFill>
@@ -23771,7 +23771,7 @@
               </a:rPr>
               <a:t>KIA ST GEORGE</a:t>
             </a:r>
-            <a:endParaRPr lang="en-US" sz="1300" dirty="0"/>
+            <a:endParaRPr lang="en-US" sz="1200" dirty="0"/>
           </a:p>
         </p:txBody>
       </p:sp>
@@ -23976,7 +23976,7 @@
               <a:buNone/>
             </a:pPr>
             <a:r>
-              <a:rPr lang="en-US" sz="1300" dirty="0">
+              <a:rPr lang="en-US" sz="1200" dirty="0">
                 <a:solidFill>
                   <a:srgbClr val="1A1A1A"/>
                 </a:solidFill>
@@ -23986,7 +23986,7 @@
               </a:rPr>
               <a:t>ACURA</a:t>
             </a:r>
-            <a:endParaRPr lang="en-US" sz="1300" dirty="0"/>
+            <a:endParaRPr lang="en-US" sz="1200" dirty="0"/>
           </a:p>
         </p:txBody>
       </p:sp>
@@ -24191,7 +24191,7 @@
               <a:buNone/>
             </a:pPr>
             <a:r>
-              <a:rPr lang="en-US" sz="1300" dirty="0">
+              <a:rPr lang="en-US" sz="1200" dirty="0">
                 <a:solidFill>
                   <a:srgbClr val="1A1A1A"/>
                 </a:solidFill>
@@ -24201,7 +24201,7 @@
               </a:rPr>
               <a:t>CDJR POST FALLS</a:t>
             </a:r>
-            <a:endParaRPr lang="en-US" sz="1300" dirty="0"/>
+            <a:endParaRPr lang="en-US" sz="1200" dirty="0"/>
           </a:p>
         </p:txBody>
       </p:sp>
@@ -24406,7 +24406,7 @@
               <a:buNone/>
             </a:pPr>
             <a:r>
-              <a:rPr lang="en-US" sz="1300" dirty="0">
+              <a:rPr lang="en-US" sz="1200" dirty="0">
                 <a:solidFill>
                   <a:srgbClr val="1A1A1A"/>
                 </a:solidFill>
@@ -24416,7 +24416,7 @@
               </a:rPr>
               <a:t>CHEVY GMC BULLHEAD</a:t>
             </a:r>
-            <a:endParaRPr lang="en-US" sz="1300" dirty="0"/>
+            <a:endParaRPr lang="en-US" sz="1200" dirty="0"/>
           </a:p>
         </p:txBody>
       </p:sp>
@@ -24621,7 +24621,7 @@
               <a:buNone/>
             </a:pPr>
             <a:r>
-              <a:rPr lang="en-US" sz="1300" dirty="0">
+              <a:rPr lang="en-US" sz="1200" dirty="0">
                 <a:solidFill>
                   <a:srgbClr val="1A1A1A"/>
                 </a:solidFill>
@@ -24631,7 +24631,7 @@
               </a:rPr>
               <a:t>SUBARU PRESCOTT</a:t>
             </a:r>
-            <a:endParaRPr lang="en-US" sz="1300" dirty="0"/>
+            <a:endParaRPr lang="en-US" sz="1200" dirty="0"/>
           </a:p>
         </p:txBody>
       </p:sp>
@@ -24836,7 +24836,7 @@
               <a:buNone/>
             </a:pPr>
             <a:r>
-              <a:rPr lang="en-US" sz="1300" dirty="0">
+              <a:rPr lang="en-US" sz="1200" dirty="0">
                 <a:solidFill>
                   <a:srgbClr val="1A1A1A"/>
                 </a:solidFill>
@@ -24846,7 +24846,7 @@
               </a:rPr>
               <a:t>HONDA FLAGSTAFF</a:t>
             </a:r>
-            <a:endParaRPr lang="en-US" sz="1300" dirty="0"/>
+            <a:endParaRPr lang="en-US" sz="1200" dirty="0"/>
           </a:p>
         </p:txBody>
       </p:sp>
@@ -25051,7 +25051,7 @@
               <a:buNone/>
             </a:pPr>
             <a:r>
-              <a:rPr lang="en-US" sz="1300" dirty="0">
+              <a:rPr lang="en-US" sz="1200" dirty="0">
                 <a:solidFill>
                   <a:srgbClr val="1A1A1A"/>
                 </a:solidFill>
@@ -25061,7 +25061,7 @@
               </a:rPr>
               <a:t>VW ST GEORGE</a:t>
             </a:r>
-            <a:endParaRPr lang="en-US" sz="1300" dirty="0"/>
+            <a:endParaRPr lang="en-US" sz="1200" dirty="0"/>
           </a:p>
         </p:txBody>
       </p:sp>
@@ -25266,7 +25266,7 @@
               <a:buNone/>
             </a:pPr>
             <a:r>
-              <a:rPr lang="en-US" sz="1300" dirty="0">
+              <a:rPr lang="en-US" sz="1200" dirty="0">
                 <a:solidFill>
                   <a:srgbClr val="1A1A1A"/>
                 </a:solidFill>
@@ -25276,7 +25276,7 @@
               </a:rPr>
               <a:t>HYUNDAI PRESCOTT</a:t>
             </a:r>
-            <a:endParaRPr lang="en-US" sz="1300" dirty="0"/>
+            <a:endParaRPr lang="en-US" sz="1200" dirty="0"/>
           </a:p>
         </p:txBody>
       </p:sp>
@@ -25481,7 +25481,7 @@
               <a:buNone/>
             </a:pPr>
             <a:r>
-              <a:rPr lang="en-US" sz="1300" dirty="0">
+              <a:rPr lang="en-US" sz="1200" dirty="0">
                 <a:solidFill>
                   <a:srgbClr val="1A1A1A"/>
                 </a:solidFill>
@@ -25491,7 +25491,7 @@
               </a:rPr>
               <a:t>VOLVO</a:t>
             </a:r>
-            <a:endParaRPr lang="en-US" sz="1300" dirty="0"/>
+            <a:endParaRPr lang="en-US" sz="1200" dirty="0"/>
           </a:p>
         </p:txBody>
       </p:sp>
@@ -25696,7 +25696,7 @@
               <a:buNone/>
             </a:pPr>
             <a:r>
-              <a:rPr lang="en-US" sz="1300" dirty="0">
+              <a:rPr lang="en-US" sz="1200" dirty="0">
                 <a:solidFill>
                   <a:srgbClr val="1A1A1A"/>
                 </a:solidFill>
@@ -25706,7 +25706,7 @@
               </a:rPr>
               <a:t>GMC PRESCOTT</a:t>
             </a:r>
-            <a:endParaRPr lang="en-US" sz="1300" dirty="0"/>
+            <a:endParaRPr lang="en-US" sz="1200" dirty="0"/>
           </a:p>
         </p:txBody>
       </p:sp>
@@ -25911,7 +25911,7 @@
               <a:buNone/>
             </a:pPr>
             <a:r>
-              <a:rPr lang="en-US" sz="1300" dirty="0">
+              <a:rPr lang="en-US" sz="1200" dirty="0">
                 <a:solidFill>
                   <a:srgbClr val="1A1A1A"/>
                 </a:solidFill>
@@ -25921,7 +25921,7 @@
               </a:rPr>
               <a:t>CADILLAC</a:t>
             </a:r>
-            <a:endParaRPr lang="en-US" sz="1300" dirty="0"/>
+            <a:endParaRPr lang="en-US" sz="1200" dirty="0"/>
           </a:p>
         </p:txBody>
       </p:sp>
@@ -26126,7 +26126,7 @@
               <a:buNone/>
             </a:pPr>
             <a:r>
-              <a:rPr lang="en-US" sz="1300" dirty="0">
+              <a:rPr lang="en-US" sz="1200" dirty="0">
                 <a:solidFill>
                   <a:srgbClr val="1A1A1A"/>
                 </a:solidFill>
@@ -26136,7 +26136,7 @@
               </a:rPr>
               <a:t>TOYOTA PRESCOTT</a:t>
             </a:r>
-            <a:endParaRPr lang="en-US" sz="1300" dirty="0"/>
+            <a:endParaRPr lang="en-US" sz="1200" dirty="0"/>
           </a:p>
         </p:txBody>
       </p:sp>
@@ -26341,7 +26341,7 @@
               <a:buNone/>
             </a:pPr>
             <a:r>
-              <a:rPr lang="en-US" sz="1300" dirty="0">
+              <a:rPr lang="en-US" sz="1200" dirty="0">
                 <a:solidFill>
                   <a:srgbClr val="1A1A1A"/>
                 </a:solidFill>
@@ -26351,7 +26351,7 @@
               </a:rPr>
               <a:t>KIA LV</a:t>
             </a:r>
-            <a:endParaRPr lang="en-US" sz="1300" dirty="0"/>
+            <a:endParaRPr lang="en-US" sz="1200" dirty="0"/>
           </a:p>
         </p:txBody>
       </p:sp>
@@ -26556,7 +26556,7 @@
               <a:buNone/>
             </a:pPr>
             <a:r>
-              <a:rPr lang="en-US" sz="1300" dirty="0">
+              <a:rPr lang="en-US" sz="1200" dirty="0">
                 <a:solidFill>
                   <a:srgbClr val="1A1A1A"/>
                 </a:solidFill>
@@ -26566,7 +26566,7 @@
               </a:rPr>
               <a:t>LR LV</a:t>
             </a:r>
-            <a:endParaRPr lang="en-US" sz="1300" dirty="0"/>
+            <a:endParaRPr lang="en-US" sz="1200" dirty="0"/>
           </a:p>
         </p:txBody>
       </p:sp>
@@ -26771,7 +26771,7 @@
               <a:buNone/>
             </a:pPr>
             <a:r>
-              <a:rPr lang="en-US" sz="1300" dirty="0">
+              <a:rPr lang="en-US" sz="1200" dirty="0">
                 <a:solidFill>
                   <a:srgbClr val="1A1A1A"/>
                 </a:solidFill>
@@ -26781,7 +26781,7 @@
               </a:rPr>
               <a:t>AUDI HENDERSON</a:t>
             </a:r>
-            <a:endParaRPr lang="en-US" sz="1300" dirty="0"/>
+            <a:endParaRPr lang="en-US" sz="1200" dirty="0"/>
           </a:p>
         </p:txBody>
       </p:sp>
@@ -26986,7 +26986,7 @@
               <a:buNone/>
             </a:pPr>
             <a:r>
-              <a:rPr lang="en-US" sz="1300" dirty="0">
+              <a:rPr lang="en-US" sz="1200" dirty="0">
                 <a:solidFill>
                   <a:srgbClr val="1A1A1A"/>
                 </a:solidFill>
@@ -26996,7 +26996,7 @@
               </a:rPr>
               <a:t>LR RENO</a:t>
             </a:r>
-            <a:endParaRPr lang="en-US" sz="1300" dirty="0"/>
+            <a:endParaRPr lang="en-US" sz="1200" dirty="0"/>
           </a:p>
         </p:txBody>
       </p:sp>
@@ -27201,7 +27201,7 @@
               <a:buNone/>
             </a:pPr>
             <a:r>
-              <a:rPr lang="en-US" sz="1300" dirty="0">
+              <a:rPr lang="en-US" sz="1200" dirty="0">
                 <a:solidFill>
                   <a:srgbClr val="1A1A1A"/>
                 </a:solidFill>
@@ -27211,7 +27211,7 @@
               </a:rPr>
               <a:t>NISSAN</a:t>
             </a:r>
-            <a:endParaRPr lang="en-US" sz="1300" dirty="0"/>
+            <a:endParaRPr lang="en-US" sz="1200" dirty="0"/>
           </a:p>
         </p:txBody>
       </p:sp>
@@ -27416,7 +27416,7 @@
               <a:buNone/>
             </a:pPr>
             <a:r>
-              <a:rPr lang="en-US" sz="1300" dirty="0">
+              <a:rPr lang="en-US" sz="1200" dirty="0">
                 <a:solidFill>
                   <a:srgbClr val="1A1A1A"/>
                 </a:solidFill>
@@ -27426,7 +27426,7 @@
               </a:rPr>
               <a:t>LEXUS</a:t>
             </a:r>
-            <a:endParaRPr lang="en-US" sz="1300" dirty="0"/>
+            <a:endParaRPr lang="en-US" sz="1200" dirty="0"/>
           </a:p>
         </p:txBody>
       </p:sp>
@@ -27631,7 +27631,7 @@
               <a:buNone/>
             </a:pPr>
             <a:r>
-              <a:rPr lang="en-US" sz="1300" dirty="0">
+              <a:rPr lang="en-US" sz="1200" dirty="0">
                 <a:solidFill>
                   <a:srgbClr val="1A1A1A"/>
                 </a:solidFill>
@@ -27641,7 +27641,7 @@
               </a:rPr>
               <a:t>LINCOLN</a:t>
             </a:r>
-            <a:endParaRPr lang="en-US" sz="1300" dirty="0"/>
+            <a:endParaRPr lang="en-US" sz="1200" dirty="0"/>
           </a:p>
         </p:txBody>
       </p:sp>
@@ -27846,7 +27846,7 @@
               <a:buNone/>
             </a:pPr>
             <a:r>
-              <a:rPr lang="en-US" sz="1300" dirty="0">
+              <a:rPr lang="en-US" sz="1200" dirty="0">
                 <a:solidFill>
                   <a:srgbClr val="1A1A1A"/>
                 </a:solidFill>
@@ -27856,7 +27856,7 @@
               </a:rPr>
               <a:t>SUBARU ST GEORGE</a:t>
             </a:r>
-            <a:endParaRPr lang="en-US" sz="1300" dirty="0"/>
+            <a:endParaRPr lang="en-US" sz="1200" dirty="0"/>
           </a:p>
         </p:txBody>
       </p:sp>
@@ -28061,7 +28061,7 @@
               <a:buNone/>
             </a:pPr>
             <a:r>
-              <a:rPr lang="en-US" sz="1300" dirty="0">
+              <a:rPr lang="en-US" sz="1200" dirty="0">
                 <a:solidFill>
                   <a:srgbClr val="1A1A1A"/>
                 </a:solidFill>
@@ -28071,7 +28071,7 @@
               </a:rPr>
               <a:t>CHEVY LV</a:t>
             </a:r>
-            <a:endParaRPr lang="en-US" sz="1300" dirty="0"/>
+            <a:endParaRPr lang="en-US" sz="1200" dirty="0"/>
           </a:p>
         </p:txBody>
       </p:sp>
@@ -28276,7 +28276,7 @@
               <a:buNone/>
             </a:pPr>
             <a:r>
-              <a:rPr lang="en-US" sz="1300" dirty="0">
+              <a:rPr lang="en-US" sz="1200" dirty="0">
                 <a:solidFill>
                   <a:srgbClr val="1A1A1A"/>
                 </a:solidFill>
@@ -28286,7 +28286,7 @@
               </a:rPr>
               <a:t>VW HENDERSON</a:t>
             </a:r>
-            <a:endParaRPr lang="en-US" sz="1300" dirty="0"/>
+            <a:endParaRPr lang="en-US" sz="1200" dirty="0"/>
           </a:p>
         </p:txBody>
       </p:sp>
@@ -28491,7 +28491,7 @@
               <a:buNone/>
             </a:pPr>
             <a:r>
-              <a:rPr lang="en-US" sz="1300" dirty="0">
+              <a:rPr lang="en-US" sz="1200" dirty="0">
                 <a:solidFill>
                   <a:srgbClr val="1A1A1A"/>
                 </a:solidFill>
@@ -28501,7 +28501,7 @@
               </a:rPr>
               <a:t>LR HENDERSON</a:t>
             </a:r>
-            <a:endParaRPr lang="en-US" sz="1300" dirty="0"/>
+            <a:endParaRPr lang="en-US" sz="1200" dirty="0"/>
           </a:p>
         </p:txBody>
       </p:sp>
@@ -28706,7 +28706,7 @@
               <a:buNone/>
             </a:pPr>
             <a:r>
-              <a:rPr lang="en-US" sz="1300" dirty="0">
+              <a:rPr lang="en-US" sz="1200" dirty="0">
                 <a:solidFill>
                   <a:srgbClr val="1A1A1A"/>
                 </a:solidFill>
@@ -28716,7 +28716,7 @@
               </a:rPr>
               <a:t>SUBARU LV</a:t>
             </a:r>
-            <a:endParaRPr lang="en-US" sz="1300" dirty="0"/>
+            <a:endParaRPr lang="en-US" sz="1200" dirty="0"/>
           </a:p>
         </p:txBody>
       </p:sp>
@@ -28921,7 +28921,7 @@
               <a:buNone/>
             </a:pPr>
             <a:r>
-              <a:rPr lang="en-US" sz="1300" dirty="0">
+              <a:rPr lang="en-US" sz="1200" dirty="0">
                 <a:solidFill>
                   <a:srgbClr val="1A1A1A"/>
                 </a:solidFill>
@@ -28931,7 +28931,7 @@
               </a:rPr>
               <a:t>AUDI RENO</a:t>
             </a:r>
-            <a:endParaRPr lang="en-US" sz="1300" dirty="0"/>
+            <a:endParaRPr lang="en-US" sz="1200" dirty="0"/>
           </a:p>
         </p:txBody>
       </p:sp>
@@ -29136,7 +29136,7 @@
               <a:buNone/>
             </a:pPr>
             <a:r>
-              <a:rPr lang="en-US" sz="1300" dirty="0">
+              <a:rPr lang="en-US" sz="1200" dirty="0">
                 <a:solidFill>
                   <a:srgbClr val="1A1A1A"/>
                 </a:solidFill>
@@ -29146,7 +29146,7 @@
               </a:rPr>
               <a:t>TOYOTA HENDERSON</a:t>
             </a:r>
-            <a:endParaRPr lang="en-US" sz="1300" dirty="0"/>
+            <a:endParaRPr lang="en-US" sz="1200" dirty="0"/>
           </a:p>
         </p:txBody>
       </p:sp>
@@ -29351,7 +29351,7 @@
               <a:buNone/>
             </a:pPr>
             <a:r>
-              <a:rPr lang="en-US" sz="1300" dirty="0">
+              <a:rPr lang="en-US" sz="1200" dirty="0">
                 <a:solidFill>
                   <a:srgbClr val="1A1A1A"/>
                 </a:solidFill>
@@ -29361,7 +29361,7 @@
               </a:rPr>
               <a:t>MAZDA</a:t>
             </a:r>
-            <a:endParaRPr lang="en-US" sz="1300" dirty="0"/>
+            <a:endParaRPr lang="en-US" sz="1200" dirty="0"/>
           </a:p>
         </p:txBody>
       </p:sp>
@@ -29566,7 +29566,7 @@
               <a:buNone/>
             </a:pPr>
             <a:r>
-              <a:rPr lang="en-US" sz="1300" dirty="0">
+              <a:rPr lang="en-US" sz="1200" dirty="0">
                 <a:solidFill>
                   <a:srgbClr val="1A1A1A"/>
                 </a:solidFill>
@@ -29576,7 +29576,7 @@
               </a:rPr>
               <a:t>TOYOTA FLAGSTAFF</a:t>
             </a:r>
-            <a:endParaRPr lang="en-US" sz="1300" dirty="0"/>
+            <a:endParaRPr lang="en-US" sz="1200" dirty="0"/>
           </a:p>
         </p:txBody>
       </p:sp>
@@ -29781,7 +29781,7 @@
               <a:buNone/>
             </a:pPr>
             <a:r>
-              <a:rPr lang="en-US" sz="1300" dirty="0">
+              <a:rPr lang="en-US" sz="1200" dirty="0">
                 <a:solidFill>
                   <a:srgbClr val="1A1A1A"/>
                 </a:solidFill>
@@ -29791,7 +29791,7 @@
               </a:rPr>
               <a:t>TOYOTA SPOKANE</a:t>
             </a:r>
-            <a:endParaRPr lang="en-US" sz="1300" dirty="0"/>
+            <a:endParaRPr lang="en-US" sz="1200" dirty="0"/>
           </a:p>
         </p:txBody>
       </p:sp>
@@ -29996,7 +29996,7 @@
               <a:buNone/>
             </a:pPr>
             <a:r>
-              <a:rPr lang="en-US" sz="1300" dirty="0">
+              <a:rPr lang="en-US" sz="1200" dirty="0">
                 <a:solidFill>
                   <a:srgbClr val="1A1A1A"/>
                 </a:solidFill>
@@ -30006,7 +30006,7 @@
               </a:rPr>
               <a:t>HONDA NORTH</a:t>
             </a:r>
-            <a:endParaRPr lang="en-US" sz="1300" dirty="0"/>
+            <a:endParaRPr lang="en-US" sz="1200" dirty="0"/>
           </a:p>
         </p:txBody>
       </p:sp>
@@ -30211,7 +30211,7 @@
               <a:buNone/>
             </a:pPr>
             <a:r>
-              <a:rPr lang="en-US" sz="1300" dirty="0">
+              <a:rPr lang="en-US" sz="1200" dirty="0">
                 <a:solidFill>
                   <a:srgbClr val="1A1A1A"/>
                 </a:solidFill>
@@ -30221,7 +30221,7 @@
               </a:rPr>
               <a:t>HONDA HENDERSON</a:t>
             </a:r>
-            <a:endParaRPr lang="en-US" sz="1300" dirty="0"/>
+            <a:endParaRPr lang="en-US" sz="1200" dirty="0"/>
           </a:p>
         </p:txBody>
       </p:sp>
@@ -30426,7 +30426,7 @@
               <a:buNone/>
             </a:pPr>
             <a:r>
-              <a:rPr lang="en-US" sz="1300" dirty="0">
+              <a:rPr lang="en-US" sz="1200" dirty="0">
                 <a:solidFill>
                   <a:srgbClr val="1A1A1A"/>
                 </a:solidFill>
@@ -30436,7 +30436,7 @@
               </a:rPr>
               <a:t>HONDA SPOKANE</a:t>
             </a:r>
-            <a:endParaRPr lang="en-US" sz="1300" dirty="0"/>
+            <a:endParaRPr lang="en-US" sz="1200" dirty="0"/>
           </a:p>
         </p:txBody>
       </p:sp>

--- a/day2-deck/decks/Technician Proficiency - House Style.pptx
+++ b/day2-deck/decks/Technician Proficiency - House Style.pptx
@@ -16133,7 +16133,7 @@
                 <a:ea typeface="Inter" pitchFamily="34" charset="-122"/>
                 <a:cs typeface="Inter" pitchFamily="34" charset="-120"/>
               </a:rPr>
-              <a:t>87.7%</a:t>
+              <a:t>87%</a:t>
             </a:r>
             <a:endParaRPr lang="en-US" sz="1300" dirty="0"/>
           </a:p>
@@ -16348,7 +16348,7 @@
                 <a:ea typeface="Inter" pitchFamily="34" charset="-122"/>
                 <a:cs typeface="Inter" pitchFamily="34" charset="-120"/>
               </a:rPr>
-              <a:t>68.4%</a:t>
+              <a:t>68%</a:t>
             </a:r>
             <a:endParaRPr lang="en-US" sz="1300" dirty="0"/>
           </a:p>
@@ -16563,7 +16563,7 @@
                 <a:ea typeface="Inter" pitchFamily="34" charset="-122"/>
                 <a:cs typeface="Inter" pitchFamily="34" charset="-120"/>
               </a:rPr>
-              <a:t>91.0%</a:t>
+              <a:t>91%</a:t>
             </a:r>
             <a:endParaRPr lang="en-US" sz="1300" dirty="0"/>
           </a:p>
@@ -16778,7 +16778,7 @@
                 <a:ea typeface="Inter" pitchFamily="34" charset="-122"/>
                 <a:cs typeface="Inter" pitchFamily="34" charset="-120"/>
               </a:rPr>
-              <a:t>71.2%</a:t>
+              <a:t>71%</a:t>
             </a:r>
             <a:endParaRPr lang="en-US" sz="1300" dirty="0"/>
           </a:p>
@@ -16993,7 +16993,7 @@
                 <a:ea typeface="Inter" pitchFamily="34" charset="-122"/>
                 <a:cs typeface="Inter" pitchFamily="34" charset="-120"/>
               </a:rPr>
-              <a:t>69.0%</a:t>
+              <a:t>69%</a:t>
             </a:r>
             <a:endParaRPr lang="en-US" sz="1300" dirty="0"/>
           </a:p>
@@ -17208,7 +17208,7 @@
                 <a:ea typeface="Inter" pitchFamily="34" charset="-122"/>
                 <a:cs typeface="Inter" pitchFamily="34" charset="-120"/>
               </a:rPr>
-              <a:t>103.4%</a:t>
+              <a:t>103%</a:t>
             </a:r>
             <a:endParaRPr lang="en-US" sz="1300" dirty="0"/>
           </a:p>
@@ -17423,7 +17423,7 @@
                 <a:ea typeface="Inter" pitchFamily="34" charset="-122"/>
                 <a:cs typeface="Inter" pitchFamily="34" charset="-120"/>
               </a:rPr>
-              <a:t>83.6%</a:t>
+              <a:t>83%</a:t>
             </a:r>
             <a:endParaRPr lang="en-US" sz="1300" dirty="0"/>
           </a:p>
@@ -17638,7 +17638,7 @@
                 <a:ea typeface="Inter" pitchFamily="34" charset="-122"/>
                 <a:cs typeface="Inter" pitchFamily="34" charset="-120"/>
               </a:rPr>
-              <a:t>67.5%</a:t>
+              <a:t>67%</a:t>
             </a:r>
             <a:endParaRPr lang="en-US" sz="1300" dirty="0"/>
           </a:p>
@@ -17853,7 +17853,7 @@
                 <a:ea typeface="Inter" pitchFamily="34" charset="-122"/>
                 <a:cs typeface="Inter" pitchFamily="34" charset="-120"/>
               </a:rPr>
-              <a:t>67.4%</a:t>
+              <a:t>67%</a:t>
             </a:r>
             <a:endParaRPr lang="en-US" sz="1300" dirty="0"/>
           </a:p>
@@ -18068,7 +18068,7 @@
                 <a:ea typeface="Inter" pitchFamily="34" charset="-122"/>
                 <a:cs typeface="Inter" pitchFamily="34" charset="-120"/>
               </a:rPr>
-              <a:t>76.8%</a:t>
+              <a:t>76%</a:t>
             </a:r>
             <a:endParaRPr lang="en-US" sz="1300" dirty="0"/>
           </a:p>
@@ -18283,7 +18283,7 @@
                 <a:ea typeface="Inter" pitchFamily="34" charset="-122"/>
                 <a:cs typeface="Inter" pitchFamily="34" charset="-120"/>
               </a:rPr>
-              <a:t>104.3%</a:t>
+              <a:t>104%</a:t>
             </a:r>
             <a:endParaRPr lang="en-US" sz="1300" dirty="0"/>
           </a:p>
@@ -18498,7 +18498,7 @@
                 <a:ea typeface="Inter" pitchFamily="34" charset="-122"/>
                 <a:cs typeface="Inter" pitchFamily="34" charset="-120"/>
               </a:rPr>
-              <a:t>91.2%</a:t>
+              <a:t>91%</a:t>
             </a:r>
             <a:endParaRPr lang="en-US" sz="1300" dirty="0"/>
           </a:p>
@@ -18713,7 +18713,7 @@
                 <a:ea typeface="Inter" pitchFamily="34" charset="-122"/>
                 <a:cs typeface="Inter" pitchFamily="34" charset="-120"/>
               </a:rPr>
-              <a:t>72.3%</a:t>
+              <a:t>72%</a:t>
             </a:r>
             <a:endParaRPr lang="en-US" sz="1300" dirty="0"/>
           </a:p>
@@ -18928,7 +18928,7 @@
                 <a:ea typeface="Inter" pitchFamily="34" charset="-122"/>
                 <a:cs typeface="Inter" pitchFamily="34" charset="-120"/>
               </a:rPr>
-              <a:t>98.4%</a:t>
+              <a:t>98%</a:t>
             </a:r>
             <a:endParaRPr lang="en-US" sz="1300" dirty="0"/>
           </a:p>
@@ -19143,7 +19143,7 @@
                 <a:ea typeface="Inter" pitchFamily="34" charset="-122"/>
                 <a:cs typeface="Inter" pitchFamily="34" charset="-120"/>
               </a:rPr>
-              <a:t>73.6%</a:t>
+              <a:t>73%</a:t>
             </a:r>
             <a:endParaRPr lang="en-US" sz="1300" dirty="0"/>
           </a:p>
@@ -19358,7 +19358,7 @@
                 <a:ea typeface="Inter" pitchFamily="34" charset="-122"/>
                 <a:cs typeface="Inter" pitchFamily="34" charset="-120"/>
               </a:rPr>
-              <a:t>96.9%</a:t>
+              <a:t>96%</a:t>
             </a:r>
             <a:endParaRPr lang="en-US" sz="1300" dirty="0"/>
           </a:p>
@@ -19573,7 +19573,7 @@
                 <a:ea typeface="Inter" pitchFamily="34" charset="-122"/>
                 <a:cs typeface="Inter" pitchFamily="34" charset="-120"/>
               </a:rPr>
-              <a:t>91.1%</a:t>
+              <a:t>91%</a:t>
             </a:r>
             <a:endParaRPr lang="en-US" sz="1300" dirty="0"/>
           </a:p>
@@ -19788,7 +19788,7 @@
                 <a:ea typeface="Inter" pitchFamily="34" charset="-122"/>
                 <a:cs typeface="Inter" pitchFamily="34" charset="-120"/>
               </a:rPr>
-              <a:t>78.5%</a:t>
+              <a:t>78%</a:t>
             </a:r>
             <a:endParaRPr lang="en-US" sz="1300" dirty="0"/>
           </a:p>
@@ -20003,7 +20003,7 @@
                 <a:ea typeface="Inter" pitchFamily="34" charset="-122"/>
                 <a:cs typeface="Inter" pitchFamily="34" charset="-120"/>
               </a:rPr>
-              <a:t>78.8%</a:t>
+              <a:t>78%</a:t>
             </a:r>
             <a:endParaRPr lang="en-US" sz="1300" dirty="0"/>
           </a:p>
@@ -20218,7 +20218,7 @@
                 <a:ea typeface="Inter" pitchFamily="34" charset="-122"/>
                 <a:cs typeface="Inter" pitchFamily="34" charset="-120"/>
               </a:rPr>
-              <a:t>104.7%</a:t>
+              <a:t>104%</a:t>
             </a:r>
             <a:endParaRPr lang="en-US" sz="1300" dirty="0"/>
           </a:p>
@@ -20433,7 +20433,7 @@
                 <a:ea typeface="Inter" pitchFamily="34" charset="-122"/>
                 <a:cs typeface="Inter" pitchFamily="34" charset="-120"/>
               </a:rPr>
-              <a:t>92.2%</a:t>
+              <a:t>92%</a:t>
             </a:r>
             <a:endParaRPr lang="en-US" sz="1300" dirty="0"/>
           </a:p>
@@ -20648,7 +20648,7 @@
                 <a:ea typeface="Inter" pitchFamily="34" charset="-122"/>
                 <a:cs typeface="Inter" pitchFamily="34" charset="-120"/>
               </a:rPr>
-              <a:t>94.9%</a:t>
+              <a:t>94%</a:t>
             </a:r>
             <a:endParaRPr lang="en-US" sz="1300" dirty="0"/>
           </a:p>
@@ -20863,7 +20863,7 @@
                 <a:ea typeface="Inter" pitchFamily="34" charset="-122"/>
                 <a:cs typeface="Inter" pitchFamily="34" charset="-120"/>
               </a:rPr>
-              <a:t>109.7%</a:t>
+              <a:t>109%</a:t>
             </a:r>
             <a:endParaRPr lang="en-US" sz="1300" dirty="0"/>
           </a:p>
@@ -21078,7 +21078,7 @@
                 <a:ea typeface="Inter" pitchFamily="34" charset="-122"/>
                 <a:cs typeface="Inter" pitchFamily="34" charset="-120"/>
               </a:rPr>
-              <a:t>70.0%</a:t>
+              <a:t>70%</a:t>
             </a:r>
             <a:endParaRPr lang="en-US" sz="1300" dirty="0"/>
           </a:p>
@@ -21293,7 +21293,7 @@
                 <a:ea typeface="Inter" pitchFamily="34" charset="-122"/>
                 <a:cs typeface="Inter" pitchFamily="34" charset="-120"/>
               </a:rPr>
-              <a:t>81.4%</a:t>
+              <a:t>81%</a:t>
             </a:r>
             <a:endParaRPr lang="en-US" sz="1300" dirty="0"/>
           </a:p>
@@ -21508,7 +21508,7 @@
                 <a:ea typeface="Inter" pitchFamily="34" charset="-122"/>
                 <a:cs typeface="Inter" pitchFamily="34" charset="-120"/>
               </a:rPr>
-              <a:t>117.1%</a:t>
+              <a:t>117%</a:t>
             </a:r>
             <a:endParaRPr lang="en-US" sz="1300" dirty="0"/>
           </a:p>
@@ -21723,7 +21723,7 @@
                 <a:ea typeface="Inter" pitchFamily="34" charset="-122"/>
                 <a:cs typeface="Inter" pitchFamily="34" charset="-120"/>
               </a:rPr>
-              <a:t>106.0%</a:t>
+              <a:t>106%</a:t>
             </a:r>
             <a:endParaRPr lang="en-US" sz="1300" dirty="0"/>
           </a:p>
@@ -21938,7 +21938,7 @@
                 <a:ea typeface="Inter" pitchFamily="34" charset="-122"/>
                 <a:cs typeface="Inter" pitchFamily="34" charset="-120"/>
               </a:rPr>
-              <a:t>118.5%</a:t>
+              <a:t>118%</a:t>
             </a:r>
             <a:endParaRPr lang="en-US" sz="1300" dirty="0"/>
           </a:p>
@@ -22153,7 +22153,7 @@
                 <a:ea typeface="Inter" pitchFamily="34" charset="-122"/>
                 <a:cs typeface="Inter" pitchFamily="34" charset="-120"/>
               </a:rPr>
-              <a:t>109.3%</a:t>
+              <a:t>109%</a:t>
             </a:r>
             <a:endParaRPr lang="en-US" sz="1300" dirty="0"/>
           </a:p>
@@ -22368,7 +22368,7 @@
                 <a:ea typeface="Inter" pitchFamily="34" charset="-122"/>
                 <a:cs typeface="Inter" pitchFamily="34" charset="-120"/>
               </a:rPr>
-              <a:t>108.0%</a:t>
+              <a:t>108%</a:t>
             </a:r>
             <a:endParaRPr lang="en-US" sz="1300" dirty="0"/>
           </a:p>
@@ -22583,7 +22583,7 @@
                 <a:ea typeface="Inter" pitchFamily="34" charset="-122"/>
                 <a:cs typeface="Inter" pitchFamily="34" charset="-120"/>
               </a:rPr>
-              <a:t>102.4%</a:t>
+              <a:t>102%</a:t>
             </a:r>
             <a:endParaRPr lang="en-US" sz="1300" dirty="0"/>
           </a:p>
@@ -22798,7 +22798,7 @@
                 <a:ea typeface="Inter" pitchFamily="34" charset="-122"/>
                 <a:cs typeface="Inter" pitchFamily="34" charset="-120"/>
               </a:rPr>
-              <a:t>101.6%</a:t>
+              <a:t>101%</a:t>
             </a:r>
             <a:endParaRPr lang="en-US" sz="1300" dirty="0"/>
           </a:p>
@@ -23013,7 +23013,7 @@
                 <a:ea typeface="Inter" pitchFamily="34" charset="-122"/>
                 <a:cs typeface="Inter" pitchFamily="34" charset="-120"/>
               </a:rPr>
-              <a:t>109.0%</a:t>
+              <a:t>109%</a:t>
             </a:r>
             <a:endParaRPr lang="en-US" sz="1300" dirty="0"/>
           </a:p>
@@ -23613,7 +23613,7 @@
                 <a:ea typeface="Inter" pitchFamily="34" charset="-122"/>
                 <a:cs typeface="Inter" pitchFamily="34" charset="-120"/>
               </a:rPr>
-              <a:t>31.9%</a:t>
+              <a:t>32%</a:t>
             </a:r>
             <a:endParaRPr lang="en-US" sz="1300" dirty="0"/>
           </a:p>
@@ -23828,7 +23828,7 @@
                 <a:ea typeface="Inter" pitchFamily="34" charset="-122"/>
                 <a:cs typeface="Inter" pitchFamily="34" charset="-120"/>
               </a:rPr>
-              <a:t>29.7%</a:t>
+              <a:t>30%</a:t>
             </a:r>
             <a:endParaRPr lang="en-US" sz="1300" dirty="0"/>
           </a:p>
@@ -24043,7 +24043,7 @@
                 <a:ea typeface="Inter" pitchFamily="34" charset="-122"/>
                 <a:cs typeface="Inter" pitchFamily="34" charset="-120"/>
               </a:rPr>
-              <a:t>25.4%</a:t>
+              <a:t>25%</a:t>
             </a:r>
             <a:endParaRPr lang="en-US" sz="1300" dirty="0"/>
           </a:p>
@@ -24258,7 +24258,7 @@
                 <a:ea typeface="Inter" pitchFamily="34" charset="-122"/>
                 <a:cs typeface="Inter" pitchFamily="34" charset="-120"/>
               </a:rPr>
-              <a:t>24.6%</a:t>
+              <a:t>25%</a:t>
             </a:r>
             <a:endParaRPr lang="en-US" sz="1300" dirty="0"/>
           </a:p>
@@ -24473,7 +24473,7 @@
                 <a:ea typeface="Inter" pitchFamily="34" charset="-122"/>
                 <a:cs typeface="Inter" pitchFamily="34" charset="-120"/>
               </a:rPr>
-              <a:t>23.2%</a:t>
+              <a:t>23%</a:t>
             </a:r>
             <a:endParaRPr lang="en-US" sz="1300" dirty="0"/>
           </a:p>
@@ -24688,7 +24688,7 @@
                 <a:ea typeface="Inter" pitchFamily="34" charset="-122"/>
                 <a:cs typeface="Inter" pitchFamily="34" charset="-120"/>
               </a:rPr>
-              <a:t>20.0%</a:t>
+              <a:t>20%</a:t>
             </a:r>
             <a:endParaRPr lang="en-US" sz="1300" dirty="0"/>
           </a:p>
@@ -24903,7 +24903,7 @@
                 <a:ea typeface="Inter" pitchFamily="34" charset="-122"/>
                 <a:cs typeface="Inter" pitchFamily="34" charset="-120"/>
               </a:rPr>
-              <a:t>19.6%</a:t>
+              <a:t>20%</a:t>
             </a:r>
             <a:endParaRPr lang="en-US" sz="1300" dirty="0"/>
           </a:p>
@@ -25118,7 +25118,7 @@
                 <a:ea typeface="Inter" pitchFamily="34" charset="-122"/>
                 <a:cs typeface="Inter" pitchFamily="34" charset="-120"/>
               </a:rPr>
-              <a:t>19.0%</a:t>
+              <a:t>19%</a:t>
             </a:r>
             <a:endParaRPr lang="en-US" sz="1300" dirty="0"/>
           </a:p>
@@ -25333,7 +25333,7 @@
                 <a:ea typeface="Inter" pitchFamily="34" charset="-122"/>
                 <a:cs typeface="Inter" pitchFamily="34" charset="-120"/>
               </a:rPr>
-              <a:t>18.5%</a:t>
+              <a:t>19%</a:t>
             </a:r>
             <a:endParaRPr lang="en-US" sz="1300" dirty="0"/>
           </a:p>
@@ -25548,7 +25548,7 @@
                 <a:ea typeface="Inter" pitchFamily="34" charset="-122"/>
                 <a:cs typeface="Inter" pitchFamily="34" charset="-120"/>
               </a:rPr>
-              <a:t>14.8%</a:t>
+              <a:t>15%</a:t>
             </a:r>
             <a:endParaRPr lang="en-US" sz="1300" dirty="0"/>
           </a:p>
@@ -25763,7 +25763,7 @@
                 <a:ea typeface="Inter" pitchFamily="34" charset="-122"/>
                 <a:cs typeface="Inter" pitchFamily="34" charset="-120"/>
               </a:rPr>
-              <a:t>14.4%</a:t>
+              <a:t>14%</a:t>
             </a:r>
             <a:endParaRPr lang="en-US" sz="1300" dirty="0"/>
           </a:p>
@@ -25978,7 +25978,7 @@
                 <a:ea typeface="Inter" pitchFamily="34" charset="-122"/>
                 <a:cs typeface="Inter" pitchFamily="34" charset="-120"/>
               </a:rPr>
-              <a:t>13.6%</a:t>
+              <a:t>14%</a:t>
             </a:r>
             <a:endParaRPr lang="en-US" sz="1300" dirty="0"/>
           </a:p>
@@ -26193,7 +26193,7 @@
                 <a:ea typeface="Inter" pitchFamily="34" charset="-122"/>
                 <a:cs typeface="Inter" pitchFamily="34" charset="-120"/>
               </a:rPr>
-              <a:t>13.5%</a:t>
+              <a:t>13%</a:t>
             </a:r>
             <a:endParaRPr lang="en-US" sz="1300" dirty="0"/>
           </a:p>
@@ -26408,7 +26408,7 @@
                 <a:ea typeface="Inter" pitchFamily="34" charset="-122"/>
                 <a:cs typeface="Inter" pitchFamily="34" charset="-120"/>
               </a:rPr>
-              <a:t>11.6%</a:t>
+              <a:t>12%</a:t>
             </a:r>
             <a:endParaRPr lang="en-US" sz="1300" dirty="0"/>
           </a:p>
@@ -26623,7 +26623,7 @@
                 <a:ea typeface="Inter" pitchFamily="34" charset="-122"/>
                 <a:cs typeface="Inter" pitchFamily="34" charset="-120"/>
               </a:rPr>
-              <a:t>9.0%</a:t>
+              <a:t>9%</a:t>
             </a:r>
             <a:endParaRPr lang="en-US" sz="1300" dirty="0"/>
           </a:p>
@@ -26838,7 +26838,7 @@
                 <a:ea typeface="Inter" pitchFamily="34" charset="-122"/>
                 <a:cs typeface="Inter" pitchFamily="34" charset="-120"/>
               </a:rPr>
-              <a:t>8.3%</a:t>
+              <a:t>8%</a:t>
             </a:r>
             <a:endParaRPr lang="en-US" sz="1300" dirty="0"/>
           </a:p>
@@ -27053,7 +27053,7 @@
                 <a:ea typeface="Inter" pitchFamily="34" charset="-122"/>
                 <a:cs typeface="Inter" pitchFamily="34" charset="-120"/>
               </a:rPr>
-              <a:t>8.0%</a:t>
+              <a:t>8%</a:t>
             </a:r>
             <a:endParaRPr lang="en-US" sz="1300" dirty="0"/>
           </a:p>
@@ -27268,7 +27268,7 @@
                 <a:ea typeface="Inter" pitchFamily="34" charset="-122"/>
                 <a:cs typeface="Inter" pitchFamily="34" charset="-120"/>
               </a:rPr>
-              <a:t>8.0%</a:t>
+              <a:t>8%</a:t>
             </a:r>
             <a:endParaRPr lang="en-US" sz="1300" dirty="0"/>
           </a:p>
@@ -27483,7 +27483,7 @@
                 <a:ea typeface="Inter" pitchFamily="34" charset="-122"/>
                 <a:cs typeface="Inter" pitchFamily="34" charset="-120"/>
               </a:rPr>
-              <a:t>7.9%</a:t>
+              <a:t>8%</a:t>
             </a:r>
             <a:endParaRPr lang="en-US" sz="1300" dirty="0"/>
           </a:p>
@@ -27698,7 +27698,7 @@
                 <a:ea typeface="Inter" pitchFamily="34" charset="-122"/>
                 <a:cs typeface="Inter" pitchFamily="34" charset="-120"/>
               </a:rPr>
-              <a:t>7.6%</a:t>
+              <a:t>8%</a:t>
             </a:r>
             <a:endParaRPr lang="en-US" sz="1300" dirty="0"/>
           </a:p>
@@ -27913,7 +27913,7 @@
                 <a:ea typeface="Inter" pitchFamily="34" charset="-122"/>
                 <a:cs typeface="Inter" pitchFamily="34" charset="-120"/>
               </a:rPr>
-              <a:t>5.8%</a:t>
+              <a:t>6%</a:t>
             </a:r>
             <a:endParaRPr lang="en-US" sz="1300" dirty="0"/>
           </a:p>
@@ -28128,7 +28128,7 @@
                 <a:ea typeface="Inter" pitchFamily="34" charset="-122"/>
                 <a:cs typeface="Inter" pitchFamily="34" charset="-120"/>
               </a:rPr>
-              <a:t>5.2%</a:t>
+              <a:t>5%</a:t>
             </a:r>
             <a:endParaRPr lang="en-US" sz="1300" dirty="0"/>
           </a:p>
@@ -28343,7 +28343,7 @@
                 <a:ea typeface="Inter" pitchFamily="34" charset="-122"/>
                 <a:cs typeface="Inter" pitchFamily="34" charset="-120"/>
               </a:rPr>
-              <a:t>4.8%</a:t>
+              <a:t>5%</a:t>
             </a:r>
             <a:endParaRPr lang="en-US" sz="1300" dirty="0"/>
           </a:p>
@@ -28558,7 +28558,7 @@
                 <a:ea typeface="Inter" pitchFamily="34" charset="-122"/>
                 <a:cs typeface="Inter" pitchFamily="34" charset="-120"/>
               </a:rPr>
-              <a:t>4.2%</a:t>
+              <a:t>4%</a:t>
             </a:r>
             <a:endParaRPr lang="en-US" sz="1300" dirty="0"/>
           </a:p>
@@ -28773,7 +28773,7 @@
                 <a:ea typeface="Inter" pitchFamily="34" charset="-122"/>
                 <a:cs typeface="Inter" pitchFamily="34" charset="-120"/>
               </a:rPr>
-              <a:t>4.1%</a:t>
+              <a:t>4%</a:t>
             </a:r>
             <a:endParaRPr lang="en-US" sz="1300" dirty="0"/>
           </a:p>
@@ -28988,7 +28988,7 @@
                 <a:ea typeface="Inter" pitchFamily="34" charset="-122"/>
                 <a:cs typeface="Inter" pitchFamily="34" charset="-120"/>
               </a:rPr>
-              <a:t>4.0%</a:t>
+              <a:t>4%</a:t>
             </a:r>
             <a:endParaRPr lang="en-US" sz="1300" dirty="0"/>
           </a:p>
@@ -29203,7 +29203,7 @@
                 <a:ea typeface="Inter" pitchFamily="34" charset="-122"/>
                 <a:cs typeface="Inter" pitchFamily="34" charset="-120"/>
               </a:rPr>
-              <a:t>2.9%</a:t>
+              <a:t>3%</a:t>
             </a:r>
             <a:endParaRPr lang="en-US" sz="1300" dirty="0"/>
           </a:p>
@@ -29418,7 +29418,7 @@
                 <a:ea typeface="Inter" pitchFamily="34" charset="-122"/>
                 <a:cs typeface="Inter" pitchFamily="34" charset="-120"/>
               </a:rPr>
-              <a:t>2.7%</a:t>
+              <a:t>3%</a:t>
             </a:r>
             <a:endParaRPr lang="en-US" sz="1300" dirty="0"/>
           </a:p>
@@ -29633,7 +29633,7 @@
                 <a:ea typeface="Inter" pitchFamily="34" charset="-122"/>
                 <a:cs typeface="Inter" pitchFamily="34" charset="-120"/>
               </a:rPr>
-              <a:t>1.9%</a:t>
+              <a:t>2%</a:t>
             </a:r>
             <a:endParaRPr lang="en-US" sz="1300" dirty="0"/>
           </a:p>
@@ -29848,7 +29848,7 @@
                 <a:ea typeface="Inter" pitchFamily="34" charset="-122"/>
                 <a:cs typeface="Inter" pitchFamily="34" charset="-120"/>
               </a:rPr>
-              <a:t>1.9%</a:t>
+              <a:t>2%</a:t>
             </a:r>
             <a:endParaRPr lang="en-US" sz="1300" dirty="0"/>
           </a:p>
@@ -30063,7 +30063,7 @@
                 <a:ea typeface="Inter" pitchFamily="34" charset="-122"/>
                 <a:cs typeface="Inter" pitchFamily="34" charset="-120"/>
               </a:rPr>
-              <a:t>1.4%</a:t>
+              <a:t>1%</a:t>
             </a:r>
             <a:endParaRPr lang="en-US" sz="1300" dirty="0"/>
           </a:p>
@@ -30278,7 +30278,7 @@
                 <a:ea typeface="Inter" pitchFamily="34" charset="-122"/>
                 <a:cs typeface="Inter" pitchFamily="34" charset="-120"/>
               </a:rPr>
-              <a:t>0.8%</a:t>
+              <a:t>1%</a:t>
             </a:r>
             <a:endParaRPr lang="en-US" sz="1300" dirty="0"/>
           </a:p>
@@ -30493,7 +30493,7 @@
                 <a:ea typeface="Inter" pitchFamily="34" charset="-122"/>
                 <a:cs typeface="Inter" pitchFamily="34" charset="-120"/>
               </a:rPr>
-              <a:t>0.2%</a:t>
+              <a:t>0%</a:t>
             </a:r>
             <a:endParaRPr lang="en-US" sz="1300" dirty="0"/>
           </a:p>

--- a/day2-deck/decks/Technician Proficiency - House Style.pptx
+++ b/day2-deck/decks/Technician Proficiency - House Style.pptx
@@ -23183,7 +23183,7 @@
                 <a:ea typeface="Inter" pitchFamily="34" charset="-122"/>
                 <a:cs typeface="Inter" pitchFamily="34" charset="-120"/>
               </a:rPr>
-              <a:t>FIXED OPS PRODUCTIVITY</a:t>
+              <a:t>FIXED OPS PRODUCTIVITY · JAN–SEP 2026, MONTHLY AVERAGE</a:t>
             </a:r>
             <a:endParaRPr lang="en-US" sz="1400" dirty="0"/>
           </a:p>

--- a/day2-deck/decks/Technician Proficiency - House Style.pptx
+++ b/day2-deck/decks/Technician Proficiency - House Style.pptx
@@ -597,7 +597,7 @@
           <a:p>
             <a:r>
               <a:rPr lang="en-US" dirty="0"/>
-              <a:t>Source: ADP worked hours (regular + overtime) and Qlik - Closed Repair Orders sold hours, all pay types, matched by tech number. Dec 25, 2025 - Oct 9, 2026 (shown as Jan-Sep). Same-store, INEOS excluded (opened 2026). Service, express, team-leader and shop-foreman titles only; body shop, detail and tint excluded. Outliers dropped: shop foremen at or below 30% (workbook uses 20%; under 30% a foreman is mainly dispatching), team leaders at or below 20%, service and express technicians at or below 10% (workbook uses 2%; under 10% a tech is not working as a line tech). Unassigned codes (MULT, 999, 77777) excluded. Role changes: ADP shows one current title with worked hours for the whole period, so when a tech's worked hours exceed 125% of full time over the months they actually flagged, worked hours are scaled to that span (56 techs). 45 keying-error lines removed from sold hours (5,399 hrs: single lines of 20+ hours with under $25 labor sale per hour, e.g. 940.58 hrs for $0 at Hyundai St George, RO 177970). Proficiency = sold hours / worked hours, from store totals. Green at or above 85%, red below. Bars start at 40%.ACURA: 67.4% (11,339 sold / 16,815 worked, 11 techs: 0 above, 0 on, 11 under)
+              <a:t>Takeaway (off the slide): 20 of 33 stores at or above the 85% target and 12 above 100%. Group 94.7%, led by Honda Henderson at 118.5%; Acura lowest at 67.4%.Source: ADP worked hours (regular + overtime) and Qlik - Closed Repair Orders sold hours, all pay types, matched by tech number. Dec 25, 2025 - Oct 9, 2026 (shown as Jan-Sep). Same-store, INEOS excluded (opened 2026). Service, express, team-leader and shop-foreman titles only; body shop, detail and tint excluded. Outliers dropped: shop foremen at or below 30% (workbook uses 20%; under 30% a foreman is mainly dispatching), team leaders at or below 20%, service and express technicians at or below 10% (workbook uses 2%; under 10% a tech is not working as a line tech). Unassigned codes (MULT, 999, 77777) excluded. Role changes: ADP shows one current title with worked hours for the whole period, so when a tech's worked hours exceed 125% of full time over the months they actually flagged, worked hours are scaled to that span (56 techs). 45 keying-error lines removed from sold hours (5,399 hrs: single lines of 20+ hours with under $25 labor sale per hour, e.g. 940.58 hrs for $0 at Hyundai St George, RO 177970). Proficiency = sold hours / worked hours, from store totals. Green at or above 85%, red below. Bars start at 40%.ACURA: 67.4% (11,339 sold / 16,815 worked, 11 techs: 0 above, 0 on, 11 under)
 AUDI HENDERSON: 91.0% (33,481 sold / 36,766 worked, 23 techs: 6 above, 4 on, 13 under)
 AUDI RENO: 117.1% (15,985 sold / 13,640 worked, 10 techs: 6 above, 0 on, 4 under)
 CADILLAC: 87.7% (42,358 sold / 48,277 worked, 29 techs: 8 above, 5 on, 16 under)
@@ -957,7 +957,7 @@
           <a:p>
             <a:r>
               <a:rPr lang="en-US" dirty="0"/>
-              <a:t>Source: Each technician under 85% lifted to 85% of their own worked hours; techs at or above 85% count as zero, so no store offsets one tech with another. Gap hours valued at what the store's own technicians (counted titles) earn per sold hour in labor gross and parts gross, all pay types, Qlik - Closed Repair Orders, same dates; tech pay at their labor cost per sold hour. Store-wide averages are not used because they carry detail, rental and recon sale booked with no hours. Per month = period total / 9.49 months (Dec 25, 2025 - Oct 9, 2026). Parts assumes the extra hours carry the store's average parts per hour. Population as on the proficiency slides. Per mo = labor + parts gross. Under 85% = technicians under 85% of all counted. Store = store proficiency.ACURA: 67.4%; 11 of 11 under 85%; gap 2,954 hrs; labor $50K/mo + parts $26K/mo; tech pay $14K/mo; 25.4% of $299K/mo RO gross; top quarter 74% (3 techs); 3.46 ROs/tech day; 1.75 hrs/RO
+              <a:t>Takeaway (off the slide): Six stores hold $647K a month, led by Cadillac at $158K. 6 stores at or above 85% still leave $537K a month.Source: Each technician under 85% lifted to 85% of their own worked hours; techs at or above 85% count as zero, so no store offsets one tech with another. Gap hours valued at what the store's own technicians (counted titles) earn per sold hour in labor gross and parts gross, all pay types, Qlik - Closed Repair Orders, same dates; tech pay at their labor cost per sold hour. Store-wide averages are not used because they carry detail, rental and recon sale booked with no hours. Per month = period total / 9.49 months (Dec 25, 2025 - Oct 9, 2026). Parts assumes the extra hours carry the store's average parts per hour. Population as on the proficiency slides. Per mo = labor + parts gross. Under 85% = technicians under 85% of all counted. Store = store proficiency.ACURA: 67.4%; 11 of 11 under 85%; gap 2,954 hrs; labor $50K/mo + parts $26K/mo; tech pay $14K/mo; 25.4% of $299K/mo RO gross; top quarter 74% (3 techs); 3.46 ROs/tech day; 1.75 hrs/RO
 AUDI HENDERSON: 91.0%; 13 of 23 under 85%; gap 3,426 hrs; labor $81K/mo + parts $20K/mo; tech pay $14K/mo; 8.3% of $1.23M/mo RO gross; top quarter 135% (6 techs); 2.77 ROs/tech day; 3.23 hrs/RO
 AUDI RENO: 117.1%; 4 of 10 under 85%; gap 826 hrs; labor $14K/mo + parts $6K/mo; tech pay $4K/mo; 4.0% of $504K/mo RO gross; top quarter 194% (2 techs); 4.08 ROs/tech day; 2.88 hrs/RO
 CADILLAC: 87.7%; 16 of 29 under 85%; gap 6,705 hrs; labor $108K/mo + parts $49K/mo; tech pay $24K/mo; 13.6% of $1.16M/mo RO gross; top quarter 143% (7 techs); 2.48 ROs/tech day; 3.41 hrs/RO
@@ -1077,7 +1077,7 @@
           <a:p>
             <a:r>
               <a:rPr lang="en-US" dirty="0"/>
-              <a:t>Source: Each technician under 85% lifted to 85% of their own worked hours; techs at or above 85% count as zero, so no store offsets one tech with another. Gap hours valued at what the store's own technicians (counted titles) earn per sold hour in labor gross and parts gross, all pay types, Qlik - Closed Repair Orders, same dates; tech pay at their labor cost per sold hour. Store-wide averages are not used because they carry detail, rental and recon sale booked with no hours. Per month = period total / 9.49 months (Dec 25, 2025 - Oct 9, 2026). Parts assumes the extra hours carry the store's average parts per hour. Population as on the proficiency slides. Missed and Gross are per month. Share = missed labor + parts gross / labor + parts gross on the store's closed ROs, all pay types, same dates (includes work on shared tech codes). Not P&amp;L gross: counter and wholesale parts are excluded because techs do not produce them.ACURA: 67.4%; 11 of 11 under 85%; gap 2,954 hrs; labor $50K/mo + parts $26K/mo; tech pay $14K/mo; 25.4% of $299K/mo RO gross; top quarter 74% (3 techs); 3.46 ROs/tech day; 1.75 hrs/RO
+              <a:t>Takeaway (off the slide): Group-wide the gap is 8.1% of RO gross. 5 stores are missing a fifth or more, led by Hyundai St George at 32% ($88K of $277K a month).Source: Each technician under 85% lifted to 85% of their own worked hours; techs at or above 85% count as zero, so no store offsets one tech with another. Gap hours valued at what the store's own technicians (counted titles) earn per sold hour in labor gross and parts gross, all pay types, Qlik - Closed Repair Orders, same dates; tech pay at their labor cost per sold hour. Store-wide averages are not used because they carry detail, rental and recon sale booked with no hours. Per month = period total / 9.49 months (Dec 25, 2025 - Oct 9, 2026). Parts assumes the extra hours carry the store's average parts per hour. Population as on the proficiency slides. Missed and Gross are per month. Share = missed labor + parts gross / labor + parts gross on the store's closed ROs, all pay types, same dates (includes work on shared tech codes). Not P&amp;L gross: counter and wholesale parts are excluded because techs do not produce them.ACURA: 67.4%; 11 of 11 under 85%; gap 2,954 hrs; labor $50K/mo + parts $26K/mo; tech pay $14K/mo; 25.4% of $299K/mo RO gross; top quarter 74% (3 techs); 3.46 ROs/tech day; 1.75 hrs/RO
 AUDI HENDERSON: 91.0%; 13 of 23 under 85%; gap 3,426 hrs; labor $81K/mo + parts $20K/mo; tech pay $14K/mo; 8.3% of $1.23M/mo RO gross; top quarter 135% (6 techs); 2.77 ROs/tech day; 3.23 hrs/RO
 AUDI RENO: 117.1%; 4 of 10 under 85%; gap 826 hrs; labor $14K/mo + parts $6K/mo; tech pay $4K/mo; 4.0% of $504K/mo RO gross; top quarter 194% (2 techs); 4.08 ROs/tech day; 2.88 hrs/RO
 CADILLAC: 87.7%; 16 of 29 under 85%; gap 6,705 hrs; labor $108K/mo + parts $49K/mo; tech pay $24K/mo; 13.6% of $1.16M/mo RO gross; top quarter 143% (7 techs); 2.48 ROs/tech day; 3.41 hrs/RO
@@ -1317,7 +1317,7 @@
           <a:p>
             <a:r>
               <a:rPr lang="en-US" dirty="0"/>
-              <a:t>Source: ADP worked hours (regular + overtime) and Qlik - Closed Repair Orders sold hours, all pay types, matched by tech number. Dec 25, 2025 - Oct 9, 2026 (shown as Jan-Sep). Same-store, INEOS excluded (opened 2026). Service, express, team-leader and shop-foreman titles only; body shop, detail and tint excluded. Outliers dropped: shop foremen at or below 30% (workbook uses 20%; under 30% a foreman is mainly dispatching), team leaders at or below 20%, service and express technicians at or below 10% (workbook uses 2%; under 10% a tech is not working as a line tech). Unassigned codes (MULT, 999, 77777) excluded. Role changes: ADP shows one current title with worked hours for the whole period, so when a tech's worked hours exceed 125% of full time over the months they actually flagged, worked hours are scaled to that span (56 techs). 45 keying-error lines removed from sold hours (5,399 hrs: single lines of 20+ hours with under $25 labor sale per hour, e.g. 940.58 hrs for $0 at Hyundai St George, RO 177970). Stores under 85% only. ROs/day = distinct ROs, all pay types, per counted tech per 8 worked hours. Seg avg = luxury 3.0, non-luxury 4.9 (luxury = Lexus, Lincoln, Cadillac, Volvo, Audi Reno, Audi Henderson, LR Reno, LR LV, LR Henderson). Fewer ROs per tech can mean too few cars for the staff or slow techs turning work away; it starts the conversation rather than settling it.ACURA: 67.4%; 11 of 11 under 85%; gap 2,954 hrs; labor $50K/mo + parts $26K/mo; tech pay $14K/mo; 25.4% of $299K/mo RO gross; top quarter 74% (3 techs); 3.46 ROs/tech day; 1.75 hrs/RO
+              <a:t>Takeaway (off the slide): 10 of the 13 stores under 85% also see fewer ROs per tech than their segment: check car count and staffing first. At Honda Flagstaff, Kia LV, Volvo the work is there.Source: ADP worked hours (regular + overtime) and Qlik - Closed Repair Orders sold hours, all pay types, matched by tech number. Dec 25, 2025 - Oct 9, 2026 (shown as Jan-Sep). Same-store, INEOS excluded (opened 2026). Service, express, team-leader and shop-foreman titles only; body shop, detail and tint excluded. Outliers dropped: shop foremen at or below 30% (workbook uses 20%; under 30% a foreman is mainly dispatching), team leaders at or below 20%, service and express technicians at or below 10% (workbook uses 2%; under 10% a tech is not working as a line tech). Unassigned codes (MULT, 999, 77777) excluded. Role changes: ADP shows one current title with worked hours for the whole period, so when a tech's worked hours exceed 125% of full time over the months they actually flagged, worked hours are scaled to that span (56 techs). 45 keying-error lines removed from sold hours (5,399 hrs: single lines of 20+ hours with under $25 labor sale per hour, e.g. 940.58 hrs for $0 at Hyundai St George, RO 177970). Stores under 85% only. ROs/day = distinct ROs, all pay types, per counted tech per 8 worked hours. Seg avg = luxury 3.0, non-luxury 4.9 (luxury = Lexus, Lincoln, Cadillac, Volvo, Audi Reno, Audi Henderson, LR Reno, LR LV, LR Henderson). Fewer ROs per tech can mean too few cars for the staff or slow techs turning work away; it starts the conversation rather than settling it.ACURA: 67.4%; 11 of 11 under 85%; gap 2,954 hrs; labor $50K/mo + parts $26K/mo; tech pay $14K/mo; 25.4% of $299K/mo RO gross; top quarter 74% (3 techs); 3.46 ROs/tech day; 1.75 hrs/RO
 AUDI HENDERSON: 91.0%; 13 of 23 under 85%; gap 3,426 hrs; labor $81K/mo + parts $20K/mo; tech pay $14K/mo; 8.3% of $1.23M/mo RO gross; top quarter 135% (6 techs); 2.77 ROs/tech day; 3.23 hrs/RO
 AUDI RENO: 117.1%; 4 of 10 under 85%; gap 826 hrs; labor $14K/mo + parts $6K/mo; tech pay $4K/mo; 4.0% of $504K/mo RO gross; top quarter 194% (2 techs); 4.08 ROs/tech day; 2.88 hrs/RO
 CADILLAC: 87.7%; 16 of 29 under 85%; gap 6,705 hrs; labor $108K/mo + parts $49K/mo; tech pay $24K/mo; 13.6% of $1.16M/mo RO gross; top quarter 143% (7 techs); 2.48 ROs/tech day; 3.41 hrs/RO
@@ -1978,7 +1978,7 @@
         <p:spPr>
           <a:xfrm>
             <a:off x="457200" y="1207008"/>
-            <a:ext cx="11274552" cy="4782312"/>
+            <a:ext cx="11274552" cy="5148072"/>
           </a:xfrm>
           <a:prstGeom prst="rect">
             <a:avLst/>
@@ -2155,7 +2155,7 @@
         <p:spPr>
           <a:xfrm>
             <a:off x="658368" y="1847088"/>
-            <a:ext cx="310896" cy="239896"/>
+            <a:ext cx="310896" cy="261411"/>
           </a:xfrm>
           <a:prstGeom prst="rect">
             <a:avLst/>
@@ -2194,7 +2194,7 @@
         <p:spPr>
           <a:xfrm>
             <a:off x="1014984" y="1847088"/>
-            <a:ext cx="1920240" cy="239896"/>
+            <a:ext cx="1920240" cy="261411"/>
           </a:xfrm>
           <a:prstGeom prst="rect">
             <a:avLst/>
@@ -2232,8 +2232,8 @@
         </p:nvSpPr>
         <p:spPr>
           <a:xfrm>
-            <a:off x="3008376" y="1907062"/>
-            <a:ext cx="1691640" cy="119948"/>
+            <a:off x="3008376" y="1912441"/>
+            <a:ext cx="1691640" cy="130705"/>
           </a:xfrm>
           <a:prstGeom prst="rect">
             <a:avLst/>
@@ -2253,7 +2253,7 @@
         <p:spPr>
           <a:xfrm>
             <a:off x="4754880" y="1847088"/>
-            <a:ext cx="1143000" cy="239896"/>
+            <a:ext cx="1143000" cy="261411"/>
           </a:xfrm>
           <a:prstGeom prst="rect">
             <a:avLst/>
@@ -2291,8 +2291,8 @@
         </p:nvSpPr>
         <p:spPr>
           <a:xfrm>
-            <a:off x="658368" y="2086984"/>
-            <a:ext cx="310896" cy="239896"/>
+            <a:off x="658368" y="2108499"/>
+            <a:ext cx="310896" cy="261411"/>
           </a:xfrm>
           <a:prstGeom prst="rect">
             <a:avLst/>
@@ -2330,8 +2330,8 @@
         </p:nvSpPr>
         <p:spPr>
           <a:xfrm>
-            <a:off x="1014984" y="2086984"/>
-            <a:ext cx="1920240" cy="239896"/>
+            <a:off x="1014984" y="2108499"/>
+            <a:ext cx="1920240" cy="261411"/>
           </a:xfrm>
           <a:prstGeom prst="rect">
             <a:avLst/>
@@ -2369,8 +2369,8 @@
         </p:nvSpPr>
         <p:spPr>
           <a:xfrm>
-            <a:off x="3008376" y="2146957"/>
-            <a:ext cx="1663031" cy="119948"/>
+            <a:off x="3008376" y="2173852"/>
+            <a:ext cx="1663031" cy="130705"/>
           </a:xfrm>
           <a:prstGeom prst="rect">
             <a:avLst/>
@@ -2389,8 +2389,8 @@
         </p:nvSpPr>
         <p:spPr>
           <a:xfrm>
-            <a:off x="4754880" y="2086984"/>
-            <a:ext cx="1143000" cy="239896"/>
+            <a:off x="4754880" y="2108499"/>
+            <a:ext cx="1143000" cy="261411"/>
           </a:xfrm>
           <a:prstGeom prst="rect">
             <a:avLst/>
@@ -2428,8 +2428,8 @@
         </p:nvSpPr>
         <p:spPr>
           <a:xfrm>
-            <a:off x="658368" y="2326879"/>
-            <a:ext cx="310896" cy="239896"/>
+            <a:off x="658368" y="2369910"/>
+            <a:ext cx="310896" cy="261411"/>
           </a:xfrm>
           <a:prstGeom prst="rect">
             <a:avLst/>
@@ -2467,8 +2467,8 @@
         </p:nvSpPr>
         <p:spPr>
           <a:xfrm>
-            <a:off x="1014984" y="2326879"/>
-            <a:ext cx="1920240" cy="239896"/>
+            <a:off x="1014984" y="2369910"/>
+            <a:ext cx="1920240" cy="261411"/>
           </a:xfrm>
           <a:prstGeom prst="rect">
             <a:avLst/>
@@ -2506,8 +2506,8 @@
         </p:nvSpPr>
         <p:spPr>
           <a:xfrm>
-            <a:off x="3008376" y="2386853"/>
-            <a:ext cx="1503694" cy="119948"/>
+            <a:off x="3008376" y="2435262"/>
+            <a:ext cx="1503694" cy="130705"/>
           </a:xfrm>
           <a:prstGeom prst="rect">
             <a:avLst/>
@@ -2526,8 +2526,8 @@
         </p:nvSpPr>
         <p:spPr>
           <a:xfrm>
-            <a:off x="4754880" y="2326879"/>
-            <a:ext cx="1143000" cy="239896"/>
+            <a:off x="4754880" y="2369910"/>
+            <a:ext cx="1143000" cy="261411"/>
           </a:xfrm>
           <a:prstGeom prst="rect">
             <a:avLst/>
@@ -2565,8 +2565,8 @@
         </p:nvSpPr>
         <p:spPr>
           <a:xfrm>
-            <a:off x="658368" y="2566775"/>
-            <a:ext cx="310896" cy="239896"/>
+            <a:off x="658368" y="2631320"/>
+            <a:ext cx="310896" cy="261411"/>
           </a:xfrm>
           <a:prstGeom prst="rect">
             <a:avLst/>
@@ -2604,8 +2604,8 @@
         </p:nvSpPr>
         <p:spPr>
           <a:xfrm>
-            <a:off x="1014984" y="2566775"/>
-            <a:ext cx="1920240" cy="239896"/>
+            <a:off x="1014984" y="2631320"/>
+            <a:ext cx="1920240" cy="261411"/>
           </a:xfrm>
           <a:prstGeom prst="rect">
             <a:avLst/>
@@ -2643,8 +2643,8 @@
         </p:nvSpPr>
         <p:spPr>
           <a:xfrm>
-            <a:off x="3008376" y="2626748"/>
-            <a:ext cx="1493335" cy="119948"/>
+            <a:off x="3008376" y="2696673"/>
+            <a:ext cx="1493335" cy="130705"/>
           </a:xfrm>
           <a:prstGeom prst="rect">
             <a:avLst/>
@@ -2663,8 +2663,8 @@
         </p:nvSpPr>
         <p:spPr>
           <a:xfrm>
-            <a:off x="4754880" y="2566775"/>
-            <a:ext cx="1143000" cy="239896"/>
+            <a:off x="4754880" y="2631320"/>
+            <a:ext cx="1143000" cy="261411"/>
           </a:xfrm>
           <a:prstGeom prst="rect">
             <a:avLst/>
@@ -2702,8 +2702,8 @@
         </p:nvSpPr>
         <p:spPr>
           <a:xfrm>
-            <a:off x="658368" y="2806670"/>
-            <a:ext cx="310896" cy="239896"/>
+            <a:off x="658368" y="2892731"/>
+            <a:ext cx="310896" cy="261411"/>
           </a:xfrm>
           <a:prstGeom prst="rect">
             <a:avLst/>
@@ -2741,8 +2741,8 @@
         </p:nvSpPr>
         <p:spPr>
           <a:xfrm>
-            <a:off x="1014984" y="2806670"/>
-            <a:ext cx="1920240" cy="239896"/>
+            <a:off x="1014984" y="2892731"/>
+            <a:ext cx="1920240" cy="261411"/>
           </a:xfrm>
           <a:prstGeom prst="rect">
             <a:avLst/>
@@ -2780,8 +2780,8 @@
         </p:nvSpPr>
         <p:spPr>
           <a:xfrm>
-            <a:off x="3008376" y="2866644"/>
-            <a:ext cx="1488550" cy="119948"/>
+            <a:off x="3008376" y="2958084"/>
+            <a:ext cx="1488550" cy="130705"/>
           </a:xfrm>
           <a:prstGeom prst="rect">
             <a:avLst/>
@@ -2800,8 +2800,8 @@
         </p:nvSpPr>
         <p:spPr>
           <a:xfrm>
-            <a:off x="4754880" y="2806670"/>
-            <a:ext cx="1143000" cy="239896"/>
+            <a:off x="4754880" y="2892731"/>
+            <a:ext cx="1143000" cy="261411"/>
           </a:xfrm>
           <a:prstGeom prst="rect">
             <a:avLst/>
@@ -2839,8 +2839,8 @@
         </p:nvSpPr>
         <p:spPr>
           <a:xfrm>
-            <a:off x="658368" y="3046566"/>
-            <a:ext cx="310896" cy="239896"/>
+            <a:off x="658368" y="3154142"/>
+            <a:ext cx="310896" cy="261411"/>
           </a:xfrm>
           <a:prstGeom prst="rect">
             <a:avLst/>
@@ -2878,8 +2878,8 @@
         </p:nvSpPr>
         <p:spPr>
           <a:xfrm>
-            <a:off x="1014984" y="3046566"/>
-            <a:ext cx="1920240" cy="239896"/>
+            <a:off x="1014984" y="3154142"/>
+            <a:ext cx="1920240" cy="261411"/>
           </a:xfrm>
           <a:prstGeom prst="rect">
             <a:avLst/>
@@ -2917,8 +2917,8 @@
         </p:nvSpPr>
         <p:spPr>
           <a:xfrm>
-            <a:off x="3008376" y="3106540"/>
-            <a:ext cx="1465805" cy="119948"/>
+            <a:off x="3008376" y="3219495"/>
+            <a:ext cx="1465805" cy="130705"/>
           </a:xfrm>
           <a:prstGeom prst="rect">
             <a:avLst/>
@@ -2937,8 +2937,8 @@
         </p:nvSpPr>
         <p:spPr>
           <a:xfrm>
-            <a:off x="4754880" y="3046566"/>
-            <a:ext cx="1143000" cy="239896"/>
+            <a:off x="4754880" y="3154142"/>
+            <a:ext cx="1143000" cy="261411"/>
           </a:xfrm>
           <a:prstGeom prst="rect">
             <a:avLst/>
@@ -2976,8 +2976,8 @@
         </p:nvSpPr>
         <p:spPr>
           <a:xfrm>
-            <a:off x="658368" y="3286461"/>
-            <a:ext cx="310896" cy="239896"/>
+            <a:off x="658368" y="3415553"/>
+            <a:ext cx="310896" cy="261411"/>
           </a:xfrm>
           <a:prstGeom prst="rect">
             <a:avLst/>
@@ -3015,8 +3015,8 @@
         </p:nvSpPr>
         <p:spPr>
           <a:xfrm>
-            <a:off x="1014984" y="3286461"/>
-            <a:ext cx="1920240" cy="239896"/>
+            <a:off x="1014984" y="3415553"/>
+            <a:ext cx="1920240" cy="261411"/>
           </a:xfrm>
           <a:prstGeom prst="rect">
             <a:avLst/>
@@ -3054,8 +3054,8 @@
         </p:nvSpPr>
         <p:spPr>
           <a:xfrm>
-            <a:off x="3008376" y="3346435"/>
-            <a:ext cx="1423787" cy="119948"/>
+            <a:off x="3008376" y="3480906"/>
+            <a:ext cx="1423787" cy="130705"/>
           </a:xfrm>
           <a:prstGeom prst="rect">
             <a:avLst/>
@@ -3074,8 +3074,8 @@
         </p:nvSpPr>
         <p:spPr>
           <a:xfrm>
-            <a:off x="4754880" y="3286461"/>
-            <a:ext cx="1143000" cy="239896"/>
+            <a:off x="4754880" y="3415553"/>
+            <a:ext cx="1143000" cy="261411"/>
           </a:xfrm>
           <a:prstGeom prst="rect">
             <a:avLst/>
@@ -3113,8 +3113,8 @@
         </p:nvSpPr>
         <p:spPr>
           <a:xfrm>
-            <a:off x="658368" y="3526357"/>
-            <a:ext cx="310896" cy="239896"/>
+            <a:off x="658368" y="3676964"/>
+            <a:ext cx="310896" cy="261411"/>
           </a:xfrm>
           <a:prstGeom prst="rect">
             <a:avLst/>
@@ -3152,8 +3152,8 @@
         </p:nvSpPr>
         <p:spPr>
           <a:xfrm>
-            <a:off x="1014984" y="3526357"/>
-            <a:ext cx="1920240" cy="239896"/>
+            <a:off x="1014984" y="3676964"/>
+            <a:ext cx="1920240" cy="261411"/>
           </a:xfrm>
           <a:prstGeom prst="rect">
             <a:avLst/>
@@ -3191,8 +3191,8 @@
         </p:nvSpPr>
         <p:spPr>
           <a:xfrm>
-            <a:off x="3008376" y="3586331"/>
-            <a:ext cx="1394590" cy="119948"/>
+            <a:off x="3008376" y="3742316"/>
+            <a:ext cx="1394590" cy="130705"/>
           </a:xfrm>
           <a:prstGeom prst="rect">
             <a:avLst/>
@@ -3211,8 +3211,8 @@
         </p:nvSpPr>
         <p:spPr>
           <a:xfrm>
-            <a:off x="4754880" y="3526357"/>
-            <a:ext cx="1143000" cy="239896"/>
+            <a:off x="4754880" y="3676964"/>
+            <a:ext cx="1143000" cy="261411"/>
           </a:xfrm>
           <a:prstGeom prst="rect">
             <a:avLst/>
@@ -3250,8 +3250,8 @@
         </p:nvSpPr>
         <p:spPr>
           <a:xfrm>
-            <a:off x="658368" y="3766252"/>
-            <a:ext cx="310896" cy="239896"/>
+            <a:off x="658368" y="3938375"/>
+            <a:ext cx="310896" cy="261411"/>
           </a:xfrm>
           <a:prstGeom prst="rect">
             <a:avLst/>
@@ -3289,8 +3289,8 @@
         </p:nvSpPr>
         <p:spPr>
           <a:xfrm>
-            <a:off x="1014984" y="3766252"/>
-            <a:ext cx="1920240" cy="239896"/>
+            <a:off x="1014984" y="3938375"/>
+            <a:ext cx="1920240" cy="261411"/>
           </a:xfrm>
           <a:prstGeom prst="rect">
             <a:avLst/>
@@ -3328,8 +3328,8 @@
         </p:nvSpPr>
         <p:spPr>
           <a:xfrm>
-            <a:off x="3008376" y="3826226"/>
-            <a:ext cx="1387136" cy="119948"/>
+            <a:off x="3008376" y="4003727"/>
+            <a:ext cx="1387136" cy="130705"/>
           </a:xfrm>
           <a:prstGeom prst="rect">
             <a:avLst/>
@@ -3348,8 +3348,8 @@
         </p:nvSpPr>
         <p:spPr>
           <a:xfrm>
-            <a:off x="4754880" y="3766252"/>
-            <a:ext cx="1143000" cy="239896"/>
+            <a:off x="4754880" y="3938375"/>
+            <a:ext cx="1143000" cy="261411"/>
           </a:xfrm>
           <a:prstGeom prst="rect">
             <a:avLst/>
@@ -3387,8 +3387,8 @@
         </p:nvSpPr>
         <p:spPr>
           <a:xfrm>
-            <a:off x="658368" y="4006148"/>
-            <a:ext cx="310896" cy="239896"/>
+            <a:off x="658368" y="4199785"/>
+            <a:ext cx="310896" cy="261411"/>
           </a:xfrm>
           <a:prstGeom prst="rect">
             <a:avLst/>
@@ -3426,8 +3426,8 @@
         </p:nvSpPr>
         <p:spPr>
           <a:xfrm>
-            <a:off x="1014984" y="4006148"/>
-            <a:ext cx="1920240" cy="239896"/>
+            <a:off x="1014984" y="4199785"/>
+            <a:ext cx="1920240" cy="261411"/>
           </a:xfrm>
           <a:prstGeom prst="rect">
             <a:avLst/>
@@ -3465,8 +3465,8 @@
         </p:nvSpPr>
         <p:spPr>
           <a:xfrm>
-            <a:off x="3008376" y="4066122"/>
-            <a:ext cx="1366169" cy="119948"/>
+            <a:off x="3008376" y="4265138"/>
+            <a:ext cx="1366169" cy="130705"/>
           </a:xfrm>
           <a:prstGeom prst="rect">
             <a:avLst/>
@@ -3485,8 +3485,8 @@
         </p:nvSpPr>
         <p:spPr>
           <a:xfrm>
-            <a:off x="4754880" y="4006148"/>
-            <a:ext cx="1143000" cy="239896"/>
+            <a:off x="4754880" y="4199785"/>
+            <a:ext cx="1143000" cy="261411"/>
           </a:xfrm>
           <a:prstGeom prst="rect">
             <a:avLst/>
@@ -3524,8 +3524,8 @@
         </p:nvSpPr>
         <p:spPr>
           <a:xfrm>
-            <a:off x="658368" y="4246043"/>
-            <a:ext cx="310896" cy="239896"/>
+            <a:off x="658368" y="4461196"/>
+            <a:ext cx="310896" cy="261411"/>
           </a:xfrm>
           <a:prstGeom prst="rect">
             <a:avLst/>
@@ -3563,8 +3563,8 @@
         </p:nvSpPr>
         <p:spPr>
           <a:xfrm>
-            <a:off x="1014984" y="4246043"/>
-            <a:ext cx="1920240" cy="239896"/>
+            <a:off x="1014984" y="4461196"/>
+            <a:ext cx="1920240" cy="261411"/>
           </a:xfrm>
           <a:prstGeom prst="rect">
             <a:avLst/>
@@ -3602,8 +3602,8 @@
         </p:nvSpPr>
         <p:spPr>
           <a:xfrm>
-            <a:off x="3008376" y="4306017"/>
-            <a:ext cx="1345338" cy="119948"/>
+            <a:off x="3008376" y="4526549"/>
+            <a:ext cx="1345338" cy="130705"/>
           </a:xfrm>
           <a:prstGeom prst="rect">
             <a:avLst/>
@@ -3622,8 +3622,8 @@
         </p:nvSpPr>
         <p:spPr>
           <a:xfrm>
-            <a:off x="4754880" y="4246043"/>
-            <a:ext cx="1143000" cy="239896"/>
+            <a:off x="4754880" y="4461196"/>
+            <a:ext cx="1143000" cy="261411"/>
           </a:xfrm>
           <a:prstGeom prst="rect">
             <a:avLst/>
@@ -3661,8 +3661,8 @@
         </p:nvSpPr>
         <p:spPr>
           <a:xfrm>
-            <a:off x="658368" y="4485939"/>
-            <a:ext cx="310896" cy="239896"/>
+            <a:off x="658368" y="4722607"/>
+            <a:ext cx="310896" cy="261411"/>
           </a:xfrm>
           <a:prstGeom prst="rect">
             <a:avLst/>
@@ -3700,8 +3700,8 @@
         </p:nvSpPr>
         <p:spPr>
           <a:xfrm>
-            <a:off x="1014984" y="4485939"/>
-            <a:ext cx="1920240" cy="239896"/>
+            <a:off x="1014984" y="4722607"/>
+            <a:ext cx="1920240" cy="261411"/>
           </a:xfrm>
           <a:prstGeom prst="rect">
             <a:avLst/>
@@ -3739,8 +3739,8 @@
         </p:nvSpPr>
         <p:spPr>
           <a:xfrm>
-            <a:off x="3008376" y="4545913"/>
-            <a:ext cx="1328569" cy="119948"/>
+            <a:off x="3008376" y="4787960"/>
+            <a:ext cx="1328569" cy="130705"/>
           </a:xfrm>
           <a:prstGeom prst="rect">
             <a:avLst/>
@@ -3759,8 +3759,8 @@
         </p:nvSpPr>
         <p:spPr>
           <a:xfrm>
-            <a:off x="4754880" y="4485939"/>
-            <a:ext cx="1143000" cy="239896"/>
+            <a:off x="4754880" y="4722607"/>
+            <a:ext cx="1143000" cy="261411"/>
           </a:xfrm>
           <a:prstGeom prst="rect">
             <a:avLst/>
@@ -3798,8 +3798,8 @@
         </p:nvSpPr>
         <p:spPr>
           <a:xfrm>
-            <a:off x="658368" y="4725834"/>
-            <a:ext cx="310896" cy="239896"/>
+            <a:off x="658368" y="4984018"/>
+            <a:ext cx="310896" cy="261411"/>
           </a:xfrm>
           <a:prstGeom prst="rect">
             <a:avLst/>
@@ -3837,8 +3837,8 @@
         </p:nvSpPr>
         <p:spPr>
           <a:xfrm>
-            <a:off x="1014984" y="4725834"/>
-            <a:ext cx="1920240" cy="239896"/>
+            <a:off x="1014984" y="4984018"/>
+            <a:ext cx="1920240" cy="261411"/>
           </a:xfrm>
           <a:prstGeom prst="rect">
             <a:avLst/>
@@ -3876,8 +3876,8 @@
         </p:nvSpPr>
         <p:spPr>
           <a:xfrm>
-            <a:off x="3008376" y="4785808"/>
-            <a:ext cx="1259696" cy="119948"/>
+            <a:off x="3008376" y="5049371"/>
+            <a:ext cx="1259696" cy="130705"/>
           </a:xfrm>
           <a:prstGeom prst="rect">
             <a:avLst/>
@@ -3896,8 +3896,8 @@
         </p:nvSpPr>
         <p:spPr>
           <a:xfrm>
-            <a:off x="4754880" y="4725834"/>
-            <a:ext cx="1143000" cy="239896"/>
+            <a:off x="4754880" y="4984018"/>
+            <a:ext cx="1143000" cy="261411"/>
           </a:xfrm>
           <a:prstGeom prst="rect">
             <a:avLst/>
@@ -3935,8 +3935,8 @@
         </p:nvSpPr>
         <p:spPr>
           <a:xfrm>
-            <a:off x="658368" y="4965730"/>
-            <a:ext cx="310896" cy="239896"/>
+            <a:off x="658368" y="5245429"/>
+            <a:ext cx="310896" cy="261411"/>
           </a:xfrm>
           <a:prstGeom prst="rect">
             <a:avLst/>
@@ -3974,8 +3974,8 @@
         </p:nvSpPr>
         <p:spPr>
           <a:xfrm>
-            <a:off x="1014984" y="4965730"/>
-            <a:ext cx="1920240" cy="239896"/>
+            <a:off x="1014984" y="5245429"/>
+            <a:ext cx="1920240" cy="261411"/>
           </a:xfrm>
           <a:prstGeom prst="rect">
             <a:avLst/>
@@ -4013,8 +4013,8 @@
         </p:nvSpPr>
         <p:spPr>
           <a:xfrm>
-            <a:off x="3008376" y="5025704"/>
-            <a:ext cx="1227504" cy="119948"/>
+            <a:off x="3008376" y="5310781"/>
+            <a:ext cx="1227504" cy="130705"/>
           </a:xfrm>
           <a:prstGeom prst="rect">
             <a:avLst/>
@@ -4033,8 +4033,8 @@
         </p:nvSpPr>
         <p:spPr>
           <a:xfrm>
-            <a:off x="4754880" y="4965730"/>
-            <a:ext cx="1143000" cy="239896"/>
+            <a:off x="4754880" y="5245429"/>
+            <a:ext cx="1143000" cy="261411"/>
           </a:xfrm>
           <a:prstGeom prst="rect">
             <a:avLst/>
@@ -4072,8 +4072,8 @@
         </p:nvSpPr>
         <p:spPr>
           <a:xfrm>
-            <a:off x="658368" y="5205625"/>
-            <a:ext cx="310896" cy="239896"/>
+            <a:off x="658368" y="5506840"/>
+            <a:ext cx="310896" cy="261411"/>
           </a:xfrm>
           <a:prstGeom prst="rect">
             <a:avLst/>
@@ -4111,8 +4111,8 @@
         </p:nvSpPr>
         <p:spPr>
           <a:xfrm>
-            <a:off x="1014984" y="5205625"/>
-            <a:ext cx="1920240" cy="239896"/>
+            <a:off x="1014984" y="5506840"/>
+            <a:ext cx="1920240" cy="261411"/>
           </a:xfrm>
           <a:prstGeom prst="rect">
             <a:avLst/>
@@ -4150,8 +4150,8 @@
         </p:nvSpPr>
         <p:spPr>
           <a:xfrm>
-            <a:off x="3008376" y="5265599"/>
-            <a:ext cx="1183546" cy="119948"/>
+            <a:off x="3008376" y="5572192"/>
+            <a:ext cx="1183546" cy="130705"/>
           </a:xfrm>
           <a:prstGeom prst="rect">
             <a:avLst/>
@@ -4170,8 +4170,8 @@
         </p:nvSpPr>
         <p:spPr>
           <a:xfrm>
-            <a:off x="4754880" y="5205625"/>
-            <a:ext cx="1143000" cy="239896"/>
+            <a:off x="4754880" y="5506840"/>
+            <a:ext cx="1143000" cy="261411"/>
           </a:xfrm>
           <a:prstGeom prst="rect">
             <a:avLst/>
@@ -4209,8 +4209,8 @@
         </p:nvSpPr>
         <p:spPr>
           <a:xfrm>
-            <a:off x="658368" y="5445521"/>
-            <a:ext cx="310896" cy="239896"/>
+            <a:off x="658368" y="5768250"/>
+            <a:ext cx="310896" cy="261411"/>
           </a:xfrm>
           <a:prstGeom prst="rect">
             <a:avLst/>
@@ -4248,8 +4248,8 @@
         </p:nvSpPr>
         <p:spPr>
           <a:xfrm>
-            <a:off x="1014984" y="5445521"/>
-            <a:ext cx="1920240" cy="239896"/>
+            <a:off x="1014984" y="5768250"/>
+            <a:ext cx="1920240" cy="261411"/>
           </a:xfrm>
           <a:prstGeom prst="rect">
             <a:avLst/>
@@ -4287,8 +4287,8 @@
         </p:nvSpPr>
         <p:spPr>
           <a:xfrm>
-            <a:off x="3008376" y="5505495"/>
-            <a:ext cx="1125838" cy="119948"/>
+            <a:off x="3008376" y="5833603"/>
+            <a:ext cx="1125838" cy="130705"/>
           </a:xfrm>
           <a:prstGeom prst="rect">
             <a:avLst/>
@@ -4307,8 +4307,8 @@
         </p:nvSpPr>
         <p:spPr>
           <a:xfrm>
-            <a:off x="4754880" y="5445521"/>
-            <a:ext cx="1143000" cy="239896"/>
+            <a:off x="4754880" y="5768250"/>
+            <a:ext cx="1143000" cy="261411"/>
           </a:xfrm>
           <a:prstGeom prst="rect">
             <a:avLst/>
@@ -4346,8 +4346,8 @@
         </p:nvSpPr>
         <p:spPr>
           <a:xfrm>
-            <a:off x="658368" y="5685416"/>
-            <a:ext cx="310896" cy="239896"/>
+            <a:off x="658368" y="6029661"/>
+            <a:ext cx="310896" cy="261411"/>
           </a:xfrm>
           <a:prstGeom prst="rect">
             <a:avLst/>
@@ -4385,8 +4385,8 @@
         </p:nvSpPr>
         <p:spPr>
           <a:xfrm>
-            <a:off x="1014984" y="5685416"/>
-            <a:ext cx="1920240" cy="239896"/>
+            <a:off x="1014984" y="6029661"/>
+            <a:ext cx="1920240" cy="261411"/>
           </a:xfrm>
           <a:prstGeom prst="rect">
             <a:avLst/>
@@ -4424,8 +4424,8 @@
         </p:nvSpPr>
         <p:spPr>
           <a:xfrm>
-            <a:off x="3008376" y="5745390"/>
-            <a:ext cx="1103246" cy="119948"/>
+            <a:off x="3008376" y="6095014"/>
+            <a:ext cx="1103246" cy="130705"/>
           </a:xfrm>
           <a:prstGeom prst="rect">
             <a:avLst/>
@@ -4444,8 +4444,8 @@
         </p:nvSpPr>
         <p:spPr>
           <a:xfrm>
-            <a:off x="4754880" y="5685416"/>
-            <a:ext cx="1143000" cy="239896"/>
+            <a:off x="4754880" y="6029661"/>
+            <a:ext cx="1143000" cy="261411"/>
           </a:xfrm>
           <a:prstGeom prst="rect">
             <a:avLst/>
@@ -4484,7 +4484,7 @@
         <p:spPr>
           <a:xfrm>
             <a:off x="6208776" y="1847088"/>
-            <a:ext cx="310896" cy="239896"/>
+            <a:ext cx="310896" cy="261411"/>
           </a:xfrm>
           <a:prstGeom prst="rect">
             <a:avLst/>
@@ -4523,7 +4523,7 @@
         <p:spPr>
           <a:xfrm>
             <a:off x="6565392" y="1847088"/>
-            <a:ext cx="1920240" cy="239896"/>
+            <a:ext cx="1920240" cy="261411"/>
           </a:xfrm>
           <a:prstGeom prst="rect">
             <a:avLst/>
@@ -4561,8 +4561,8 @@
         </p:nvSpPr>
         <p:spPr>
           <a:xfrm>
-            <a:off x="8558784" y="1907062"/>
-            <a:ext cx="1102256" cy="119948"/>
+            <a:off x="8558784" y="1912441"/>
+            <a:ext cx="1102256" cy="130705"/>
           </a:xfrm>
           <a:prstGeom prst="rect">
             <a:avLst/>
@@ -4582,7 +4582,7 @@
         <p:spPr>
           <a:xfrm>
             <a:off x="10305288" y="1847088"/>
-            <a:ext cx="1143000" cy="239896"/>
+            <a:ext cx="1143000" cy="261411"/>
           </a:xfrm>
           <a:prstGeom prst="rect">
             <a:avLst/>
@@ -4620,8 +4620,8 @@
         </p:nvSpPr>
         <p:spPr>
           <a:xfrm>
-            <a:off x="6208776" y="2086984"/>
-            <a:ext cx="310896" cy="239896"/>
+            <a:off x="6208776" y="2108499"/>
+            <a:ext cx="310896" cy="261411"/>
           </a:xfrm>
           <a:prstGeom prst="rect">
             <a:avLst/>
@@ -4659,8 +4659,8 @@
         </p:nvSpPr>
         <p:spPr>
           <a:xfrm>
-            <a:off x="6565392" y="2086984"/>
-            <a:ext cx="1920240" cy="239896"/>
+            <a:off x="6565392" y="2108499"/>
+            <a:ext cx="1920240" cy="261411"/>
           </a:xfrm>
           <a:prstGeom prst="rect">
             <a:avLst/>
@@ -4698,8 +4698,8 @@
         </p:nvSpPr>
         <p:spPr>
           <a:xfrm>
-            <a:off x="8558784" y="2146957"/>
-            <a:ext cx="1100233" cy="119948"/>
+            <a:off x="8558784" y="2173852"/>
+            <a:ext cx="1100233" cy="130705"/>
           </a:xfrm>
           <a:prstGeom prst="rect">
             <a:avLst/>
@@ -4718,8 +4718,8 @@
         </p:nvSpPr>
         <p:spPr>
           <a:xfrm>
-            <a:off x="10305288" y="2086984"/>
-            <a:ext cx="1143000" cy="239896"/>
+            <a:off x="10305288" y="2108499"/>
+            <a:ext cx="1143000" cy="261411"/>
           </a:xfrm>
           <a:prstGeom prst="rect">
             <a:avLst/>
@@ -4757,8 +4757,8 @@
         </p:nvSpPr>
         <p:spPr>
           <a:xfrm>
-            <a:off x="6208776" y="2326879"/>
-            <a:ext cx="310896" cy="239896"/>
+            <a:off x="6208776" y="2369910"/>
+            <a:ext cx="310896" cy="261411"/>
           </a:xfrm>
           <a:prstGeom prst="rect">
             <a:avLst/>
@@ -4796,8 +4796,8 @@
         </p:nvSpPr>
         <p:spPr>
           <a:xfrm>
-            <a:off x="6565392" y="2326879"/>
-            <a:ext cx="1920240" cy="239896"/>
+            <a:off x="6565392" y="2369910"/>
+            <a:ext cx="1920240" cy="261411"/>
           </a:xfrm>
           <a:prstGeom prst="rect">
             <a:avLst/>
@@ -4835,8 +4835,8 @@
         </p:nvSpPr>
         <p:spPr>
           <a:xfrm>
-            <a:off x="8558784" y="2386853"/>
-            <a:ext cx="1028587" cy="119948"/>
+            <a:off x="8558784" y="2435262"/>
+            <a:ext cx="1028587" cy="130705"/>
           </a:xfrm>
           <a:prstGeom prst="rect">
             <a:avLst/>
@@ -4855,8 +4855,8 @@
         </p:nvSpPr>
         <p:spPr>
           <a:xfrm>
-            <a:off x="10305288" y="2326879"/>
-            <a:ext cx="1143000" cy="239896"/>
+            <a:off x="10305288" y="2369910"/>
+            <a:ext cx="1143000" cy="261411"/>
           </a:xfrm>
           <a:prstGeom prst="rect">
             <a:avLst/>
@@ -4894,8 +4894,8 @@
         </p:nvSpPr>
         <p:spPr>
           <a:xfrm>
-            <a:off x="6208776" y="2566775"/>
-            <a:ext cx="310896" cy="239896"/>
+            <a:off x="6208776" y="2631320"/>
+            <a:ext cx="310896" cy="261411"/>
           </a:xfrm>
           <a:prstGeom prst="rect">
             <a:avLst/>
@@ -4933,8 +4933,8 @@
         </p:nvSpPr>
         <p:spPr>
           <a:xfrm>
-            <a:off x="6565392" y="2566775"/>
-            <a:ext cx="1920240" cy="239896"/>
+            <a:off x="6565392" y="2631320"/>
+            <a:ext cx="1920240" cy="261411"/>
           </a:xfrm>
           <a:prstGeom prst="rect">
             <a:avLst/>
@@ -4972,8 +4972,8 @@
         </p:nvSpPr>
         <p:spPr>
           <a:xfrm>
-            <a:off x="8558784" y="2626748"/>
-            <a:ext cx="940185" cy="119948"/>
+            <a:off x="8558784" y="2696673"/>
+            <a:ext cx="940185" cy="130705"/>
           </a:xfrm>
           <a:prstGeom prst="rect">
             <a:avLst/>
@@ -4992,8 +4992,8 @@
         </p:nvSpPr>
         <p:spPr>
           <a:xfrm>
-            <a:off x="10305288" y="2566775"/>
-            <a:ext cx="1143000" cy="239896"/>
+            <a:off x="10305288" y="2631320"/>
+            <a:ext cx="1143000" cy="261411"/>
           </a:xfrm>
           <a:prstGeom prst="rect">
             <a:avLst/>
@@ -5031,8 +5031,8 @@
         </p:nvSpPr>
         <p:spPr>
           <a:xfrm>
-            <a:off x="6208776" y="2806670"/>
-            <a:ext cx="310896" cy="239896"/>
+            <a:off x="6208776" y="2892731"/>
+            <a:ext cx="310896" cy="261411"/>
           </a:xfrm>
           <a:prstGeom prst="rect">
             <a:avLst/>
@@ -5070,8 +5070,8 @@
         </p:nvSpPr>
         <p:spPr>
           <a:xfrm>
-            <a:off x="6565392" y="2806670"/>
-            <a:ext cx="1920240" cy="239896"/>
+            <a:off x="6565392" y="2892731"/>
+            <a:ext cx="1920240" cy="261411"/>
           </a:xfrm>
           <a:prstGeom prst="rect">
             <a:avLst/>
@@ -5109,8 +5109,8 @@
         </p:nvSpPr>
         <p:spPr>
           <a:xfrm>
-            <a:off x="8558784" y="2866644"/>
-            <a:ext cx="892570" cy="119948"/>
+            <a:off x="8558784" y="2958084"/>
+            <a:ext cx="892570" cy="130705"/>
           </a:xfrm>
           <a:prstGeom prst="rect">
             <a:avLst/>
@@ -5129,8 +5129,8 @@
         </p:nvSpPr>
         <p:spPr>
           <a:xfrm>
-            <a:off x="10305288" y="2806670"/>
-            <a:ext cx="1143000" cy="239896"/>
+            <a:off x="10305288" y="2892731"/>
+            <a:ext cx="1143000" cy="261411"/>
           </a:xfrm>
           <a:prstGeom prst="rect">
             <a:avLst/>
@@ -5168,8 +5168,8 @@
         </p:nvSpPr>
         <p:spPr>
           <a:xfrm>
-            <a:off x="6208776" y="3046566"/>
-            <a:ext cx="310896" cy="239896"/>
+            <a:off x="6208776" y="3154142"/>
+            <a:ext cx="310896" cy="261411"/>
           </a:xfrm>
           <a:prstGeom prst="rect">
             <a:avLst/>
@@ -5207,8 +5207,8 @@
         </p:nvSpPr>
         <p:spPr>
           <a:xfrm>
-            <a:off x="6565392" y="3046566"/>
-            <a:ext cx="1920240" cy="239896"/>
+            <a:off x="6565392" y="3154142"/>
+            <a:ext cx="1920240" cy="261411"/>
           </a:xfrm>
           <a:prstGeom prst="rect">
             <a:avLst/>
@@ -5246,8 +5246,8 @@
         </p:nvSpPr>
         <p:spPr>
           <a:xfrm>
-            <a:off x="8558784" y="3106540"/>
-            <a:ext cx="836550" cy="119948"/>
+            <a:off x="8558784" y="3219495"/>
+            <a:ext cx="836550" cy="130705"/>
           </a:xfrm>
           <a:prstGeom prst="rect">
             <a:avLst/>
@@ -5266,8 +5266,8 @@
         </p:nvSpPr>
         <p:spPr>
           <a:xfrm>
-            <a:off x="10305288" y="3046566"/>
-            <a:ext cx="1143000" cy="239896"/>
+            <a:off x="10305288" y="3154142"/>
+            <a:ext cx="1143000" cy="261411"/>
           </a:xfrm>
           <a:prstGeom prst="rect">
             <a:avLst/>
@@ -5305,8 +5305,8 @@
         </p:nvSpPr>
         <p:spPr>
           <a:xfrm>
-            <a:off x="6208776" y="3286461"/>
-            <a:ext cx="310896" cy="239896"/>
+            <a:off x="6208776" y="3415553"/>
+            <a:ext cx="310896" cy="261411"/>
           </a:xfrm>
           <a:prstGeom prst="rect">
             <a:avLst/>
@@ -5344,8 +5344,8 @@
         </p:nvSpPr>
         <p:spPr>
           <a:xfrm>
-            <a:off x="6565392" y="3286461"/>
-            <a:ext cx="1920240" cy="239896"/>
+            <a:off x="6565392" y="3415553"/>
+            <a:ext cx="1920240" cy="261411"/>
           </a:xfrm>
           <a:prstGeom prst="rect">
             <a:avLst/>
@@ -5383,8 +5383,8 @@
         </p:nvSpPr>
         <p:spPr>
           <a:xfrm>
-            <a:off x="8558784" y="3346435"/>
-            <a:ext cx="830598" cy="119948"/>
+            <a:off x="8558784" y="3480906"/>
+            <a:ext cx="830598" cy="130705"/>
           </a:xfrm>
           <a:prstGeom prst="rect">
             <a:avLst/>
@@ -5403,8 +5403,8 @@
         </p:nvSpPr>
         <p:spPr>
           <a:xfrm>
-            <a:off x="10305288" y="3286461"/>
-            <a:ext cx="1143000" cy="239896"/>
+            <a:off x="10305288" y="3415553"/>
+            <a:ext cx="1143000" cy="261411"/>
           </a:xfrm>
           <a:prstGeom prst="rect">
             <a:avLst/>
@@ -5442,8 +5442,8 @@
         </p:nvSpPr>
         <p:spPr>
           <a:xfrm>
-            <a:off x="6208776" y="3526357"/>
-            <a:ext cx="310896" cy="239896"/>
+            <a:off x="6208776" y="3676964"/>
+            <a:ext cx="310896" cy="261411"/>
           </a:xfrm>
           <a:prstGeom prst="rect">
             <a:avLst/>
@@ -5481,8 +5481,8 @@
         </p:nvSpPr>
         <p:spPr>
           <a:xfrm>
-            <a:off x="6565392" y="3526357"/>
-            <a:ext cx="1920240" cy="239896"/>
+            <a:off x="6565392" y="3676964"/>
+            <a:ext cx="1920240" cy="261411"/>
           </a:xfrm>
           <a:prstGeom prst="rect">
             <a:avLst/>
@@ -5520,8 +5520,8 @@
         </p:nvSpPr>
         <p:spPr>
           <a:xfrm>
-            <a:off x="8558784" y="3586331"/>
-            <a:ext cx="794181" cy="119948"/>
+            <a:off x="8558784" y="3742316"/>
+            <a:ext cx="794181" cy="130705"/>
           </a:xfrm>
           <a:prstGeom prst="rect">
             <a:avLst/>
@@ -5540,8 +5540,8 @@
         </p:nvSpPr>
         <p:spPr>
           <a:xfrm>
-            <a:off x="10305288" y="3526357"/>
-            <a:ext cx="1143000" cy="239896"/>
+            <a:off x="10305288" y="3676964"/>
+            <a:ext cx="1143000" cy="261411"/>
           </a:xfrm>
           <a:prstGeom prst="rect">
             <a:avLst/>
@@ -5579,8 +5579,8 @@
         </p:nvSpPr>
         <p:spPr>
           <a:xfrm>
-            <a:off x="6208776" y="3766252"/>
-            <a:ext cx="310896" cy="239896"/>
+            <a:off x="6208776" y="3938375"/>
+            <a:ext cx="310896" cy="261411"/>
           </a:xfrm>
           <a:prstGeom prst="rect">
             <a:avLst/>
@@ -5618,8 +5618,8 @@
         </p:nvSpPr>
         <p:spPr>
           <a:xfrm>
-            <a:off x="6565392" y="3766252"/>
-            <a:ext cx="1920240" cy="239896"/>
+            <a:off x="6565392" y="3938375"/>
+            <a:ext cx="1920240" cy="261411"/>
           </a:xfrm>
           <a:prstGeom prst="rect">
             <a:avLst/>
@@ -5657,8 +5657,8 @@
         </p:nvSpPr>
         <p:spPr>
           <a:xfrm>
-            <a:off x="8558784" y="3826226"/>
-            <a:ext cx="724094" cy="119948"/>
+            <a:off x="8558784" y="4003727"/>
+            <a:ext cx="724094" cy="130705"/>
           </a:xfrm>
           <a:prstGeom prst="rect">
             <a:avLst/>
@@ -5677,8 +5677,8 @@
         </p:nvSpPr>
         <p:spPr>
           <a:xfrm>
-            <a:off x="10305288" y="3766252"/>
-            <a:ext cx="1143000" cy="239896"/>
+            <a:off x="10305288" y="3938375"/>
+            <a:ext cx="1143000" cy="261411"/>
           </a:xfrm>
           <a:prstGeom prst="rect">
             <a:avLst/>
@@ -5716,8 +5716,8 @@
         </p:nvSpPr>
         <p:spPr>
           <a:xfrm>
-            <a:off x="6208776" y="4006148"/>
-            <a:ext cx="310896" cy="239896"/>
+            <a:off x="6208776" y="4199785"/>
+            <a:ext cx="310896" cy="261411"/>
           </a:xfrm>
           <a:prstGeom prst="rect">
             <a:avLst/>
@@ -5755,8 +5755,8 @@
         </p:nvSpPr>
         <p:spPr>
           <a:xfrm>
-            <a:off x="6565392" y="4006148"/>
-            <a:ext cx="1920240" cy="239896"/>
+            <a:off x="6565392" y="4199785"/>
+            <a:ext cx="1920240" cy="261411"/>
           </a:xfrm>
           <a:prstGeom prst="rect">
             <a:avLst/>
@@ -5794,8 +5794,8 @@
         </p:nvSpPr>
         <p:spPr>
           <a:xfrm>
-            <a:off x="8558784" y="4066122"/>
-            <a:ext cx="697908" cy="119948"/>
+            <a:off x="8558784" y="4265138"/>
+            <a:ext cx="697908" cy="130705"/>
           </a:xfrm>
           <a:prstGeom prst="rect">
             <a:avLst/>
@@ -5814,8 +5814,8 @@
         </p:nvSpPr>
         <p:spPr>
           <a:xfrm>
-            <a:off x="10305288" y="4006148"/>
-            <a:ext cx="1143000" cy="239896"/>
+            <a:off x="10305288" y="4199785"/>
+            <a:ext cx="1143000" cy="261411"/>
           </a:xfrm>
           <a:prstGeom prst="rect">
             <a:avLst/>
@@ -5853,8 +5853,8 @@
         </p:nvSpPr>
         <p:spPr>
           <a:xfrm>
-            <a:off x="6208776" y="4246043"/>
-            <a:ext cx="310896" cy="239896"/>
+            <a:off x="6208776" y="4461196"/>
+            <a:ext cx="310896" cy="261411"/>
           </a:xfrm>
           <a:prstGeom prst="rect">
             <a:avLst/>
@@ -5892,8 +5892,8 @@
         </p:nvSpPr>
         <p:spPr>
           <a:xfrm>
-            <a:off x="6565392" y="4246043"/>
-            <a:ext cx="1920240" cy="239896"/>
+            <a:off x="6565392" y="4461196"/>
+            <a:ext cx="1920240" cy="261411"/>
           </a:xfrm>
           <a:prstGeom prst="rect">
             <a:avLst/>
@@ -5931,8 +5931,8 @@
         </p:nvSpPr>
         <p:spPr>
           <a:xfrm>
-            <a:off x="8558784" y="4306017"/>
-            <a:ext cx="672256" cy="119948"/>
+            <a:off x="8558784" y="4526549"/>
+            <a:ext cx="672256" cy="130705"/>
           </a:xfrm>
           <a:prstGeom prst="rect">
             <a:avLst/>
@@ -5951,8 +5951,8 @@
         </p:nvSpPr>
         <p:spPr>
           <a:xfrm>
-            <a:off x="10305288" y="4246043"/>
-            <a:ext cx="1143000" cy="239896"/>
+            <a:off x="10305288" y="4461196"/>
+            <a:ext cx="1143000" cy="261411"/>
           </a:xfrm>
           <a:prstGeom prst="rect">
             <a:avLst/>
@@ -5990,8 +5990,8 @@
         </p:nvSpPr>
         <p:spPr>
           <a:xfrm>
-            <a:off x="6208776" y="4485939"/>
-            <a:ext cx="310896" cy="239896"/>
+            <a:off x="6208776" y="4722607"/>
+            <a:ext cx="310896" cy="261411"/>
           </a:xfrm>
           <a:prstGeom prst="rect">
             <a:avLst/>
@@ -6029,8 +6029,8 @@
         </p:nvSpPr>
         <p:spPr>
           <a:xfrm>
-            <a:off x="6565392" y="4485939"/>
-            <a:ext cx="1920240" cy="239896"/>
+            <a:off x="6565392" y="4722607"/>
+            <a:ext cx="1920240" cy="261411"/>
           </a:xfrm>
           <a:prstGeom prst="rect">
             <a:avLst/>
@@ -6068,8 +6068,8 @@
         </p:nvSpPr>
         <p:spPr>
           <a:xfrm>
-            <a:off x="8558784" y="4545913"/>
-            <a:ext cx="647056" cy="119948"/>
+            <a:off x="8558784" y="4787960"/>
+            <a:ext cx="647056" cy="130705"/>
           </a:xfrm>
           <a:prstGeom prst="rect">
             <a:avLst/>
@@ -6088,8 +6088,8 @@
         </p:nvSpPr>
         <p:spPr>
           <a:xfrm>
-            <a:off x="10305288" y="4485939"/>
-            <a:ext cx="1143000" cy="239896"/>
+            <a:off x="10305288" y="4722607"/>
+            <a:ext cx="1143000" cy="261411"/>
           </a:xfrm>
           <a:prstGeom prst="rect">
             <a:avLst/>
@@ -6127,8 +6127,8 @@
         </p:nvSpPr>
         <p:spPr>
           <a:xfrm>
-            <a:off x="6208776" y="4725834"/>
-            <a:ext cx="310896" cy="239896"/>
+            <a:off x="6208776" y="4984018"/>
+            <a:ext cx="310896" cy="261411"/>
           </a:xfrm>
           <a:prstGeom prst="rect">
             <a:avLst/>
@@ -6166,8 +6166,8 @@
         </p:nvSpPr>
         <p:spPr>
           <a:xfrm>
-            <a:off x="6565392" y="4725834"/>
-            <a:ext cx="1920240" cy="239896"/>
+            <a:off x="6565392" y="4984018"/>
+            <a:ext cx="1920240" cy="261411"/>
           </a:xfrm>
           <a:prstGeom prst="rect">
             <a:avLst/>
@@ -6205,8 +6205,8 @@
         </p:nvSpPr>
         <p:spPr>
           <a:xfrm>
-            <a:off x="8558784" y="4785808"/>
-            <a:ext cx="625345" cy="119948"/>
+            <a:off x="8558784" y="5049371"/>
+            <a:ext cx="625345" cy="130705"/>
           </a:xfrm>
           <a:prstGeom prst="rect">
             <a:avLst/>
@@ -6225,8 +6225,8 @@
         </p:nvSpPr>
         <p:spPr>
           <a:xfrm>
-            <a:off x="10305288" y="4725834"/>
-            <a:ext cx="1143000" cy="239896"/>
+            <a:off x="10305288" y="4984018"/>
+            <a:ext cx="1143000" cy="261411"/>
           </a:xfrm>
           <a:prstGeom prst="rect">
             <a:avLst/>
@@ -6264,8 +6264,8 @@
         </p:nvSpPr>
         <p:spPr>
           <a:xfrm>
-            <a:off x="6208776" y="4965730"/>
-            <a:ext cx="310896" cy="239896"/>
+            <a:off x="6208776" y="5245429"/>
+            <a:ext cx="310896" cy="261411"/>
           </a:xfrm>
           <a:prstGeom prst="rect">
             <a:avLst/>
@@ -6303,8 +6303,8 @@
         </p:nvSpPr>
         <p:spPr>
           <a:xfrm>
-            <a:off x="6565392" y="4965730"/>
-            <a:ext cx="1920240" cy="239896"/>
+            <a:off x="6565392" y="5245429"/>
+            <a:ext cx="1920240" cy="261411"/>
           </a:xfrm>
           <a:prstGeom prst="rect">
             <a:avLst/>
@@ -6342,8 +6342,8 @@
         </p:nvSpPr>
         <p:spPr>
           <a:xfrm>
-            <a:off x="8558784" y="5025704"/>
-            <a:ext cx="612255" cy="119948"/>
+            <a:off x="8558784" y="5310781"/>
+            <a:ext cx="612255" cy="130705"/>
           </a:xfrm>
           <a:prstGeom prst="rect">
             <a:avLst/>
@@ -6362,8 +6362,8 @@
         </p:nvSpPr>
         <p:spPr>
           <a:xfrm>
-            <a:off x="10305288" y="4965730"/>
-            <a:ext cx="1143000" cy="239896"/>
+            <a:off x="10305288" y="5245429"/>
+            <a:ext cx="1143000" cy="261411"/>
           </a:xfrm>
           <a:prstGeom prst="rect">
             <a:avLst/>
@@ -6401,8 +6401,8 @@
         </p:nvSpPr>
         <p:spPr>
           <a:xfrm>
-            <a:off x="6208776" y="5205625"/>
-            <a:ext cx="310896" cy="239896"/>
+            <a:off x="6208776" y="5506840"/>
+            <a:ext cx="310896" cy="261411"/>
           </a:xfrm>
           <a:prstGeom prst="rect">
             <a:avLst/>
@@ -6440,8 +6440,8 @@
         </p:nvSpPr>
         <p:spPr>
           <a:xfrm>
-            <a:off x="6565392" y="5205625"/>
-            <a:ext cx="1920240" cy="239896"/>
+            <a:off x="6565392" y="5506840"/>
+            <a:ext cx="1920240" cy="261411"/>
           </a:xfrm>
           <a:prstGeom prst="rect">
             <a:avLst/>
@@ -6479,8 +6479,8 @@
         </p:nvSpPr>
         <p:spPr>
           <a:xfrm>
-            <a:off x="8558784" y="5265599"/>
-            <a:ext cx="592803" cy="119948"/>
+            <a:off x="8558784" y="5572192"/>
+            <a:ext cx="592803" cy="130705"/>
           </a:xfrm>
           <a:prstGeom prst="rect">
             <a:avLst/>
@@ -6499,8 +6499,8 @@
         </p:nvSpPr>
         <p:spPr>
           <a:xfrm>
-            <a:off x="10305288" y="5205625"/>
-            <a:ext cx="1143000" cy="239896"/>
+            <a:off x="10305288" y="5506840"/>
+            <a:ext cx="1143000" cy="261411"/>
           </a:xfrm>
           <a:prstGeom prst="rect">
             <a:avLst/>
@@ -6538,8 +6538,8 @@
         </p:nvSpPr>
         <p:spPr>
           <a:xfrm>
-            <a:off x="6208776" y="5445521"/>
-            <a:ext cx="310896" cy="239896"/>
+            <a:off x="6208776" y="5768250"/>
+            <a:ext cx="310896" cy="261411"/>
           </a:xfrm>
           <a:prstGeom prst="rect">
             <a:avLst/>
@@ -6577,8 +6577,8 @@
         </p:nvSpPr>
         <p:spPr>
           <a:xfrm>
-            <a:off x="6565392" y="5445521"/>
-            <a:ext cx="1920240" cy="239896"/>
+            <a:off x="6565392" y="5768250"/>
+            <a:ext cx="1920240" cy="261411"/>
           </a:xfrm>
           <a:prstGeom prst="rect">
             <a:avLst/>
@@ -6616,8 +6616,8 @@
         </p:nvSpPr>
         <p:spPr>
           <a:xfrm>
-            <a:off x="8558784" y="5505495"/>
-            <a:ext cx="591028" cy="119948"/>
+            <a:off x="8558784" y="5833603"/>
+            <a:ext cx="591028" cy="130705"/>
           </a:xfrm>
           <a:prstGeom prst="rect">
             <a:avLst/>
@@ -6636,8 +6636,8 @@
         </p:nvSpPr>
         <p:spPr>
           <a:xfrm>
-            <a:off x="10305288" y="5445521"/>
-            <a:ext cx="1143000" cy="239896"/>
+            <a:off x="10305288" y="5768250"/>
+            <a:ext cx="1143000" cy="261411"/>
           </a:xfrm>
           <a:prstGeom prst="rect">
             <a:avLst/>
@@ -6676,7 +6676,7 @@
         <p:spPr>
           <a:xfrm>
             <a:off x="3970620" y="1847088"/>
-            <a:ext cx="14630" cy="4078224"/>
+            <a:ext cx="14630" cy="4443984"/>
           </a:xfrm>
           <a:prstGeom prst="rect">
             <a:avLst/>
@@ -6696,7 +6696,7 @@
         <p:spPr>
           <a:xfrm>
             <a:off x="9521028" y="1847088"/>
-            <a:ext cx="14630" cy="4078224"/>
+            <a:ext cx="14630" cy="4443984"/>
           </a:xfrm>
           <a:prstGeom prst="rect">
             <a:avLst/>
@@ -6716,7 +6716,7 @@
         <p:spPr>
           <a:xfrm>
             <a:off x="6085332" y="1847088"/>
-            <a:ext cx="10973" cy="4078224"/>
+            <a:ext cx="10973" cy="4443984"/>
           </a:xfrm>
           <a:prstGeom prst="rect">
             <a:avLst/>
@@ -6726,65 +6726,6 @@
           </a:solidFill>
           <a:ln/>
         </p:spPr>
-      </p:sp>
-      <p:sp>
-        <p:nvSpPr>
-          <p:cNvPr id="146" name="Shape 144"/>
-          <p:cNvSpPr/>
-          <p:nvPr/>
-        </p:nvSpPr>
-        <p:spPr>
-          <a:xfrm>
-            <a:off x="457200" y="6126480"/>
-            <a:ext cx="11274552" cy="615696"/>
-          </a:xfrm>
-          <a:prstGeom prst="rect">
-            <a:avLst/>
-          </a:prstGeom>
-          <a:solidFill>
-            <a:srgbClr val="EDF4FA"/>
-          </a:solidFill>
-          <a:ln/>
-        </p:spPr>
-      </p:sp>
-      <p:sp>
-        <p:nvSpPr>
-          <p:cNvPr id="147" name="Text 145"/>
-          <p:cNvSpPr txBox="1"/>
-          <p:nvPr/>
-        </p:nvSpPr>
-        <p:spPr>
-          <a:xfrm>
-            <a:off x="658368" y="6144768"/>
-            <a:ext cx="10927080" cy="579120"/>
-          </a:xfrm>
-          <a:prstGeom prst="rect">
-            <a:avLst/>
-          </a:prstGeom>
-          <a:noFill/>
-          <a:ln/>
-        </p:spPr>
-        <p:txBody>
-          <a:bodyPr wrap="square" lIns="0" tIns="0" rIns="0" bIns="0" rtlCol="0" anchor="ctr"/>
-          <a:lstStyle/>
-          <a:p>
-            <a:pPr indent="0" marL="0">
-              <a:buNone/>
-            </a:pPr>
-            <a:r>
-              <a:rPr lang="en-US" sz="1600" b="1" dirty="0">
-                <a:solidFill>
-                  <a:srgbClr val="0B2C4A"/>
-                </a:solidFill>
-                <a:latin typeface="Inter" pitchFamily="34" charset="0"/>
-                <a:ea typeface="Inter" pitchFamily="34" charset="-122"/>
-                <a:cs typeface="Inter" pitchFamily="34" charset="-120"/>
-              </a:rPr>
-              <a:t>20 of 33 stores at or above the 85% target and 12 above 100%. Group 94.7%, led by Honda Henderson at 118.5%; Acura lowest at 67.4%.</a:t>
-            </a:r>
-            <a:endParaRPr lang="en-US" sz="1600" dirty="0"/>
-          </a:p>
-        </p:txBody>
       </p:sp>
     </p:spTree>
   </p:cSld>
@@ -15679,7 +15620,7 @@
         <p:spPr>
           <a:xfrm>
             <a:off x="457200" y="1207008"/>
-            <a:ext cx="11274552" cy="4782312"/>
+            <a:ext cx="11274552" cy="5148072"/>
           </a:xfrm>
           <a:prstGeom prst="rect">
             <a:avLst/>
@@ -15933,7 +15874,7 @@
         <p:spPr>
           <a:xfrm>
             <a:off x="658368" y="1700784"/>
-            <a:ext cx="310896" cy="248502"/>
+            <a:ext cx="310896" cy="270017"/>
           </a:xfrm>
           <a:prstGeom prst="rect">
             <a:avLst/>
@@ -15972,7 +15913,7 @@
         <p:spPr>
           <a:xfrm>
             <a:off x="1014984" y="1700784"/>
-            <a:ext cx="1783080" cy="248502"/>
+            <a:ext cx="1783080" cy="270017"/>
           </a:xfrm>
           <a:prstGeom prst="rect">
             <a:avLst/>
@@ -16010,8 +15951,8 @@
         </p:nvSpPr>
         <p:spPr>
           <a:xfrm>
-            <a:off x="2871216" y="1756697"/>
-            <a:ext cx="594360" cy="136676"/>
+            <a:off x="2871216" y="1761538"/>
+            <a:ext cx="594360" cy="148509"/>
           </a:xfrm>
           <a:prstGeom prst="rect">
             <a:avLst/>
@@ -16031,7 +15972,7 @@
         <p:spPr>
           <a:xfrm>
             <a:off x="3520440" y="1700784"/>
-            <a:ext cx="786384" cy="248502"/>
+            <a:ext cx="786384" cy="270017"/>
           </a:xfrm>
           <a:prstGeom prst="rect">
             <a:avLst/>
@@ -16070,7 +16011,7 @@
         <p:spPr>
           <a:xfrm>
             <a:off x="4306824" y="1700784"/>
-            <a:ext cx="932688" cy="248502"/>
+            <a:ext cx="932688" cy="270017"/>
           </a:xfrm>
           <a:prstGeom prst="rect">
             <a:avLst/>
@@ -16109,7 +16050,7 @@
         <p:spPr>
           <a:xfrm>
             <a:off x="5239512" y="1700784"/>
-            <a:ext cx="676656" cy="248502"/>
+            <a:ext cx="676656" cy="270017"/>
           </a:xfrm>
           <a:prstGeom prst="rect">
             <a:avLst/>
@@ -16147,8 +16088,8 @@
         </p:nvSpPr>
         <p:spPr>
           <a:xfrm>
-            <a:off x="658368" y="1949286"/>
-            <a:ext cx="310896" cy="248502"/>
+            <a:off x="658368" y="1970801"/>
+            <a:ext cx="310896" cy="270017"/>
           </a:xfrm>
           <a:prstGeom prst="rect">
             <a:avLst/>
@@ -16186,8 +16127,8 @@
         </p:nvSpPr>
         <p:spPr>
           <a:xfrm>
-            <a:off x="1014984" y="1949286"/>
-            <a:ext cx="1783080" cy="248502"/>
+            <a:off x="1014984" y="1970801"/>
+            <a:ext cx="1783080" cy="270017"/>
           </a:xfrm>
           <a:prstGeom prst="rect">
             <a:avLst/>
@@ -16225,8 +16166,8 @@
         </p:nvSpPr>
         <p:spPr>
           <a:xfrm>
-            <a:off x="2871216" y="2005199"/>
-            <a:ext cx="423252" cy="136676"/>
+            <a:off x="2871216" y="2031555"/>
+            <a:ext cx="423252" cy="148509"/>
           </a:xfrm>
           <a:prstGeom prst="rect">
             <a:avLst/>
@@ -16245,8 +16186,8 @@
         </p:nvSpPr>
         <p:spPr>
           <a:xfrm>
-            <a:off x="3520440" y="1949286"/>
-            <a:ext cx="786384" cy="248502"/>
+            <a:off x="3520440" y="1970801"/>
+            <a:ext cx="786384" cy="270017"/>
           </a:xfrm>
           <a:prstGeom prst="rect">
             <a:avLst/>
@@ -16284,8 +16225,8 @@
         </p:nvSpPr>
         <p:spPr>
           <a:xfrm>
-            <a:off x="4306824" y="1949286"/>
-            <a:ext cx="932688" cy="248502"/>
+            <a:off x="4306824" y="1970801"/>
+            <a:ext cx="932688" cy="270017"/>
           </a:xfrm>
           <a:prstGeom prst="rect">
             <a:avLst/>
@@ -16323,8 +16264,8 @@
         </p:nvSpPr>
         <p:spPr>
           <a:xfrm>
-            <a:off x="5239512" y="1949286"/>
-            <a:ext cx="676656" cy="248502"/>
+            <a:off x="5239512" y="1970801"/>
+            <a:ext cx="676656" cy="270017"/>
           </a:xfrm>
           <a:prstGeom prst="rect">
             <a:avLst/>
@@ -16362,8 +16303,8 @@
         </p:nvSpPr>
         <p:spPr>
           <a:xfrm>
-            <a:off x="658368" y="2197787"/>
-            <a:ext cx="310896" cy="248502"/>
+            <a:off x="658368" y="2240818"/>
+            <a:ext cx="310896" cy="270017"/>
           </a:xfrm>
           <a:prstGeom prst="rect">
             <a:avLst/>
@@ -16401,8 +16342,8 @@
         </p:nvSpPr>
         <p:spPr>
           <a:xfrm>
-            <a:off x="1014984" y="2197787"/>
-            <a:ext cx="1783080" cy="248502"/>
+            <a:off x="1014984" y="2240818"/>
+            <a:ext cx="1783080" cy="270017"/>
           </a:xfrm>
           <a:prstGeom prst="rect">
             <a:avLst/>
@@ -16440,8 +16381,8 @@
         </p:nvSpPr>
         <p:spPr>
           <a:xfrm>
-            <a:off x="2871216" y="2253700"/>
-            <a:ext cx="383101" cy="136676"/>
+            <a:off x="2871216" y="2301572"/>
+            <a:ext cx="383101" cy="148509"/>
           </a:xfrm>
           <a:prstGeom prst="rect">
             <a:avLst/>
@@ -16460,8 +16401,8 @@
         </p:nvSpPr>
         <p:spPr>
           <a:xfrm>
-            <a:off x="3520440" y="2197787"/>
-            <a:ext cx="786384" cy="248502"/>
+            <a:off x="3520440" y="2240818"/>
+            <a:ext cx="786384" cy="270017"/>
           </a:xfrm>
           <a:prstGeom prst="rect">
             <a:avLst/>
@@ -16499,8 +16440,8 @@
         </p:nvSpPr>
         <p:spPr>
           <a:xfrm>
-            <a:off x="4306824" y="2197787"/>
-            <a:ext cx="932688" cy="248502"/>
+            <a:off x="4306824" y="2240818"/>
+            <a:ext cx="932688" cy="270017"/>
           </a:xfrm>
           <a:prstGeom prst="rect">
             <a:avLst/>
@@ -16538,8 +16479,8 @@
         </p:nvSpPr>
         <p:spPr>
           <a:xfrm>
-            <a:off x="5239512" y="2197787"/>
-            <a:ext cx="676656" cy="248502"/>
+            <a:off x="5239512" y="2240818"/>
+            <a:ext cx="676656" cy="270017"/>
           </a:xfrm>
           <a:prstGeom prst="rect">
             <a:avLst/>
@@ -16577,8 +16518,8 @@
         </p:nvSpPr>
         <p:spPr>
           <a:xfrm>
-            <a:off x="658368" y="2446289"/>
-            <a:ext cx="310896" cy="248502"/>
+            <a:off x="658368" y="2510835"/>
+            <a:ext cx="310896" cy="270017"/>
           </a:xfrm>
           <a:prstGeom prst="rect">
             <a:avLst/>
@@ -16616,8 +16557,8 @@
         </p:nvSpPr>
         <p:spPr>
           <a:xfrm>
-            <a:off x="1014984" y="2446289"/>
-            <a:ext cx="1783080" cy="248502"/>
+            <a:off x="1014984" y="2510835"/>
+            <a:ext cx="1783080" cy="270017"/>
           </a:xfrm>
           <a:prstGeom prst="rect">
             <a:avLst/>
@@ -16655,8 +16596,8 @@
         </p:nvSpPr>
         <p:spPr>
           <a:xfrm>
-            <a:off x="2871216" y="2502202"/>
-            <a:ext cx="377643" cy="136676"/>
+            <a:off x="2871216" y="2571589"/>
+            <a:ext cx="377643" cy="148509"/>
           </a:xfrm>
           <a:prstGeom prst="rect">
             <a:avLst/>
@@ -16675,8 +16616,8 @@
         </p:nvSpPr>
         <p:spPr>
           <a:xfrm>
-            <a:off x="3520440" y="2446289"/>
-            <a:ext cx="786384" cy="248502"/>
+            <a:off x="3520440" y="2510835"/>
+            <a:ext cx="786384" cy="270017"/>
           </a:xfrm>
           <a:prstGeom prst="rect">
             <a:avLst/>
@@ -16714,8 +16655,8 @@
         </p:nvSpPr>
         <p:spPr>
           <a:xfrm>
-            <a:off x="4306824" y="2446289"/>
-            <a:ext cx="932688" cy="248502"/>
+            <a:off x="4306824" y="2510835"/>
+            <a:ext cx="932688" cy="270017"/>
           </a:xfrm>
           <a:prstGeom prst="rect">
             <a:avLst/>
@@ -16753,8 +16694,8 @@
         </p:nvSpPr>
         <p:spPr>
           <a:xfrm>
-            <a:off x="5239512" y="2446289"/>
-            <a:ext cx="676656" cy="248502"/>
+            <a:off x="5239512" y="2510835"/>
+            <a:ext cx="676656" cy="270017"/>
           </a:xfrm>
           <a:prstGeom prst="rect">
             <a:avLst/>
@@ -16792,8 +16733,8 @@
         </p:nvSpPr>
         <p:spPr>
           <a:xfrm>
-            <a:off x="658368" y="2694791"/>
-            <a:ext cx="310896" cy="248502"/>
+            <a:off x="658368" y="2780852"/>
+            <a:ext cx="310896" cy="270017"/>
           </a:xfrm>
           <a:prstGeom prst="rect">
             <a:avLst/>
@@ -16831,8 +16772,8 @@
         </p:nvSpPr>
         <p:spPr>
           <a:xfrm>
-            <a:off x="1014984" y="2694791"/>
-            <a:ext cx="1783080" cy="248502"/>
+            <a:off x="1014984" y="2780852"/>
+            <a:ext cx="1783080" cy="270017"/>
           </a:xfrm>
           <a:prstGeom prst="rect">
             <a:avLst/>
@@ -16870,8 +16811,8 @@
         </p:nvSpPr>
         <p:spPr>
           <a:xfrm>
-            <a:off x="2871216" y="2750703"/>
-            <a:ext cx="332905" cy="136676"/>
+            <a:off x="2871216" y="2841606"/>
+            <a:ext cx="332905" cy="148509"/>
           </a:xfrm>
           <a:prstGeom prst="rect">
             <a:avLst/>
@@ -16890,8 +16831,8 @@
         </p:nvSpPr>
         <p:spPr>
           <a:xfrm>
-            <a:off x="3520440" y="2694791"/>
-            <a:ext cx="786384" cy="248502"/>
+            <a:off x="3520440" y="2780852"/>
+            <a:ext cx="786384" cy="270017"/>
           </a:xfrm>
           <a:prstGeom prst="rect">
             <a:avLst/>
@@ -16929,8 +16870,8 @@
         </p:nvSpPr>
         <p:spPr>
           <a:xfrm>
-            <a:off x="4306824" y="2694791"/>
-            <a:ext cx="932688" cy="248502"/>
+            <a:off x="4306824" y="2780852"/>
+            <a:ext cx="932688" cy="270017"/>
           </a:xfrm>
           <a:prstGeom prst="rect">
             <a:avLst/>
@@ -16968,8 +16909,8 @@
         </p:nvSpPr>
         <p:spPr>
           <a:xfrm>
-            <a:off x="5239512" y="2694791"/>
-            <a:ext cx="676656" cy="248502"/>
+            <a:off x="5239512" y="2780852"/>
+            <a:ext cx="676656" cy="270017"/>
           </a:xfrm>
           <a:prstGeom prst="rect">
             <a:avLst/>
@@ -17007,8 +16948,8 @@
         </p:nvSpPr>
         <p:spPr>
           <a:xfrm>
-            <a:off x="658368" y="2943292"/>
-            <a:ext cx="310896" cy="248502"/>
+            <a:off x="658368" y="3050869"/>
+            <a:ext cx="310896" cy="270017"/>
           </a:xfrm>
           <a:prstGeom prst="rect">
             <a:avLst/>
@@ -17046,8 +16987,8 @@
         </p:nvSpPr>
         <p:spPr>
           <a:xfrm>
-            <a:off x="1014984" y="2943292"/>
-            <a:ext cx="1783080" cy="248502"/>
+            <a:off x="1014984" y="3050869"/>
+            <a:ext cx="1783080" cy="270017"/>
           </a:xfrm>
           <a:prstGeom prst="rect">
             <a:avLst/>
@@ -17085,8 +17026,8 @@
         </p:nvSpPr>
         <p:spPr>
           <a:xfrm>
-            <a:off x="2871216" y="2999205"/>
-            <a:ext cx="329038" cy="136676"/>
+            <a:off x="2871216" y="3111623"/>
+            <a:ext cx="329038" cy="148509"/>
           </a:xfrm>
           <a:prstGeom prst="rect">
             <a:avLst/>
@@ -17105,8 +17046,8 @@
         </p:nvSpPr>
         <p:spPr>
           <a:xfrm>
-            <a:off x="3520440" y="2943292"/>
-            <a:ext cx="786384" cy="248502"/>
+            <a:off x="3520440" y="3050869"/>
+            <a:ext cx="786384" cy="270017"/>
           </a:xfrm>
           <a:prstGeom prst="rect">
             <a:avLst/>
@@ -17144,8 +17085,8 @@
         </p:nvSpPr>
         <p:spPr>
           <a:xfrm>
-            <a:off x="4306824" y="2943292"/>
-            <a:ext cx="932688" cy="248502"/>
+            <a:off x="4306824" y="3050869"/>
+            <a:ext cx="932688" cy="270017"/>
           </a:xfrm>
           <a:prstGeom prst="rect">
             <a:avLst/>
@@ -17183,8 +17124,8 @@
         </p:nvSpPr>
         <p:spPr>
           <a:xfrm>
-            <a:off x="5239512" y="2943292"/>
-            <a:ext cx="676656" cy="248502"/>
+            <a:off x="5239512" y="3050869"/>
+            <a:ext cx="676656" cy="270017"/>
           </a:xfrm>
           <a:prstGeom prst="rect">
             <a:avLst/>
@@ -17222,8 +17163,8 @@
         </p:nvSpPr>
         <p:spPr>
           <a:xfrm>
-            <a:off x="658368" y="3191794"/>
-            <a:ext cx="310896" cy="248502"/>
+            <a:off x="658368" y="3320886"/>
+            <a:ext cx="310896" cy="270017"/>
           </a:xfrm>
           <a:prstGeom prst="rect">
             <a:avLst/>
@@ -17261,8 +17202,8 @@
         </p:nvSpPr>
         <p:spPr>
           <a:xfrm>
-            <a:off x="1014984" y="3191794"/>
-            <a:ext cx="1783080" cy="248502"/>
+            <a:off x="1014984" y="3320886"/>
+            <a:ext cx="1783080" cy="270017"/>
           </a:xfrm>
           <a:prstGeom prst="rect">
             <a:avLst/>
@@ -17300,8 +17241,8 @@
         </p:nvSpPr>
         <p:spPr>
           <a:xfrm>
-            <a:off x="2871216" y="3247707"/>
-            <a:ext cx="291475" cy="136676"/>
+            <a:off x="2871216" y="3381639"/>
+            <a:ext cx="291475" cy="148509"/>
           </a:xfrm>
           <a:prstGeom prst="rect">
             <a:avLst/>
@@ -17320,8 +17261,8 @@
         </p:nvSpPr>
         <p:spPr>
           <a:xfrm>
-            <a:off x="3520440" y="3191794"/>
-            <a:ext cx="786384" cy="248502"/>
+            <a:off x="3520440" y="3320886"/>
+            <a:ext cx="786384" cy="270017"/>
           </a:xfrm>
           <a:prstGeom prst="rect">
             <a:avLst/>
@@ -17359,8 +17300,8 @@
         </p:nvSpPr>
         <p:spPr>
           <a:xfrm>
-            <a:off x="4306824" y="3191794"/>
-            <a:ext cx="932688" cy="248502"/>
+            <a:off x="4306824" y="3320886"/>
+            <a:ext cx="932688" cy="270017"/>
           </a:xfrm>
           <a:prstGeom prst="rect">
             <a:avLst/>
@@ -17398,8 +17339,8 @@
         </p:nvSpPr>
         <p:spPr>
           <a:xfrm>
-            <a:off x="5239512" y="3191794"/>
-            <a:ext cx="676656" cy="248502"/>
+            <a:off x="5239512" y="3320886"/>
+            <a:ext cx="676656" cy="270017"/>
           </a:xfrm>
           <a:prstGeom prst="rect">
             <a:avLst/>
@@ -17437,8 +17378,8 @@
         </p:nvSpPr>
         <p:spPr>
           <a:xfrm>
-            <a:off x="658368" y="3440296"/>
-            <a:ext cx="310896" cy="248502"/>
+            <a:off x="658368" y="3590903"/>
+            <a:ext cx="310896" cy="270017"/>
           </a:xfrm>
           <a:prstGeom prst="rect">
             <a:avLst/>
@@ -17476,8 +17417,8 @@
         </p:nvSpPr>
         <p:spPr>
           <a:xfrm>
-            <a:off x="1014984" y="3440296"/>
-            <a:ext cx="1783080" cy="248502"/>
+            <a:off x="1014984" y="3590903"/>
+            <a:ext cx="1783080" cy="270017"/>
           </a:xfrm>
           <a:prstGeom prst="rect">
             <a:avLst/>
@@ -17515,8 +17456,8 @@
         </p:nvSpPr>
         <p:spPr>
           <a:xfrm>
-            <a:off x="2871216" y="3496208"/>
-            <a:ext cx="288910" cy="136676"/>
+            <a:off x="2871216" y="3651656"/>
+            <a:ext cx="288910" cy="148509"/>
           </a:xfrm>
           <a:prstGeom prst="rect">
             <a:avLst/>
@@ -17535,8 +17476,8 @@
         </p:nvSpPr>
         <p:spPr>
           <a:xfrm>
-            <a:off x="3520440" y="3440296"/>
-            <a:ext cx="786384" cy="248502"/>
+            <a:off x="3520440" y="3590903"/>
+            <a:ext cx="786384" cy="270017"/>
           </a:xfrm>
           <a:prstGeom prst="rect">
             <a:avLst/>
@@ -17574,8 +17515,8 @@
         </p:nvSpPr>
         <p:spPr>
           <a:xfrm>
-            <a:off x="4306824" y="3440296"/>
-            <a:ext cx="932688" cy="248502"/>
+            <a:off x="4306824" y="3590903"/>
+            <a:ext cx="932688" cy="270017"/>
           </a:xfrm>
           <a:prstGeom prst="rect">
             <a:avLst/>
@@ -17613,8 +17554,8 @@
         </p:nvSpPr>
         <p:spPr>
           <a:xfrm>
-            <a:off x="5239512" y="3440296"/>
-            <a:ext cx="676656" cy="248502"/>
+            <a:off x="5239512" y="3590903"/>
+            <a:ext cx="676656" cy="270017"/>
           </a:xfrm>
           <a:prstGeom prst="rect">
             <a:avLst/>
@@ -17652,8 +17593,8 @@
         </p:nvSpPr>
         <p:spPr>
           <a:xfrm>
-            <a:off x="658368" y="3688797"/>
-            <a:ext cx="310896" cy="248502"/>
+            <a:off x="658368" y="3860920"/>
+            <a:ext cx="310896" cy="270017"/>
           </a:xfrm>
           <a:prstGeom prst="rect">
             <a:avLst/>
@@ -17691,8 +17632,8 @@
         </p:nvSpPr>
         <p:spPr>
           <a:xfrm>
-            <a:off x="1014984" y="3688797"/>
-            <a:ext cx="1783080" cy="248502"/>
+            <a:off x="1014984" y="3860920"/>
+            <a:ext cx="1783080" cy="270017"/>
           </a:xfrm>
           <a:prstGeom prst="rect">
             <a:avLst/>
@@ -17730,8 +17671,8 @@
         </p:nvSpPr>
         <p:spPr>
           <a:xfrm>
-            <a:off x="2871216" y="3744710"/>
-            <a:ext cx="286162" cy="136676"/>
+            <a:off x="2871216" y="3921673"/>
+            <a:ext cx="286162" cy="148509"/>
           </a:xfrm>
           <a:prstGeom prst="rect">
             <a:avLst/>
@@ -17750,8 +17691,8 @@
         </p:nvSpPr>
         <p:spPr>
           <a:xfrm>
-            <a:off x="3520440" y="3688797"/>
-            <a:ext cx="786384" cy="248502"/>
+            <a:off x="3520440" y="3860920"/>
+            <a:ext cx="786384" cy="270017"/>
           </a:xfrm>
           <a:prstGeom prst="rect">
             <a:avLst/>
@@ -17789,8 +17730,8 @@
         </p:nvSpPr>
         <p:spPr>
           <a:xfrm>
-            <a:off x="4306824" y="3688797"/>
-            <a:ext cx="932688" cy="248502"/>
+            <a:off x="4306824" y="3860920"/>
+            <a:ext cx="932688" cy="270017"/>
           </a:xfrm>
           <a:prstGeom prst="rect">
             <a:avLst/>
@@ -17828,8 +17769,8 @@
         </p:nvSpPr>
         <p:spPr>
           <a:xfrm>
-            <a:off x="5239512" y="3688797"/>
-            <a:ext cx="676656" cy="248502"/>
+            <a:off x="5239512" y="3860920"/>
+            <a:ext cx="676656" cy="270017"/>
           </a:xfrm>
           <a:prstGeom prst="rect">
             <a:avLst/>
@@ -17867,8 +17808,8 @@
         </p:nvSpPr>
         <p:spPr>
           <a:xfrm>
-            <a:off x="658368" y="3937299"/>
-            <a:ext cx="310896" cy="248502"/>
+            <a:off x="658368" y="4130936"/>
+            <a:ext cx="310896" cy="270017"/>
           </a:xfrm>
           <a:prstGeom prst="rect">
             <a:avLst/>
@@ -17906,8 +17847,8 @@
         </p:nvSpPr>
         <p:spPr>
           <a:xfrm>
-            <a:off x="1014984" y="3937299"/>
-            <a:ext cx="1783080" cy="248502"/>
+            <a:off x="1014984" y="4130936"/>
+            <a:ext cx="1783080" cy="270017"/>
           </a:xfrm>
           <a:prstGeom prst="rect">
             <a:avLst/>
@@ -17945,8 +17886,8 @@
         </p:nvSpPr>
         <p:spPr>
           <a:xfrm>
-            <a:off x="2871216" y="3993212"/>
-            <a:ext cx="280027" cy="136676"/>
+            <a:off x="2871216" y="4191690"/>
+            <a:ext cx="280027" cy="148509"/>
           </a:xfrm>
           <a:prstGeom prst="rect">
             <a:avLst/>
@@ -17965,8 +17906,8 @@
         </p:nvSpPr>
         <p:spPr>
           <a:xfrm>
-            <a:off x="3520440" y="3937299"/>
-            <a:ext cx="786384" cy="248502"/>
+            <a:off x="3520440" y="4130936"/>
+            <a:ext cx="786384" cy="270017"/>
           </a:xfrm>
           <a:prstGeom prst="rect">
             <a:avLst/>
@@ -18004,8 +17945,8 @@
         </p:nvSpPr>
         <p:spPr>
           <a:xfrm>
-            <a:off x="4306824" y="3937299"/>
-            <a:ext cx="932688" cy="248502"/>
+            <a:off x="4306824" y="4130936"/>
+            <a:ext cx="932688" cy="270017"/>
           </a:xfrm>
           <a:prstGeom prst="rect">
             <a:avLst/>
@@ -18043,8 +17984,8 @@
         </p:nvSpPr>
         <p:spPr>
           <a:xfrm>
-            <a:off x="5239512" y="3937299"/>
-            <a:ext cx="676656" cy="248502"/>
+            <a:off x="5239512" y="4130936"/>
+            <a:ext cx="676656" cy="270017"/>
           </a:xfrm>
           <a:prstGeom prst="rect">
             <a:avLst/>
@@ -18082,8 +18023,8 @@
         </p:nvSpPr>
         <p:spPr>
           <a:xfrm>
-            <a:off x="658368" y="4185800"/>
-            <a:ext cx="310896" cy="248502"/>
+            <a:off x="658368" y="4400953"/>
+            <a:ext cx="310896" cy="270017"/>
           </a:xfrm>
           <a:prstGeom prst="rect">
             <a:avLst/>
@@ -18121,8 +18062,8 @@
         </p:nvSpPr>
         <p:spPr>
           <a:xfrm>
-            <a:off x="1014984" y="4185800"/>
-            <a:ext cx="1783080" cy="248502"/>
+            <a:off x="1014984" y="4400953"/>
+            <a:ext cx="1783080" cy="270017"/>
           </a:xfrm>
           <a:prstGeom prst="rect">
             <a:avLst/>
@@ -18160,8 +18101,8 @@
         </p:nvSpPr>
         <p:spPr>
           <a:xfrm>
-            <a:off x="2871216" y="4241713"/>
-            <a:ext cx="264542" cy="136676"/>
+            <a:off x="2871216" y="4461707"/>
+            <a:ext cx="264542" cy="148509"/>
           </a:xfrm>
           <a:prstGeom prst="rect">
             <a:avLst/>
@@ -18180,8 +18121,8 @@
         </p:nvSpPr>
         <p:spPr>
           <a:xfrm>
-            <a:off x="3520440" y="4185800"/>
-            <a:ext cx="786384" cy="248502"/>
+            <a:off x="3520440" y="4400953"/>
+            <a:ext cx="786384" cy="270017"/>
           </a:xfrm>
           <a:prstGeom prst="rect">
             <a:avLst/>
@@ -18219,8 +18160,8 @@
         </p:nvSpPr>
         <p:spPr>
           <a:xfrm>
-            <a:off x="4306824" y="4185800"/>
-            <a:ext cx="932688" cy="248502"/>
+            <a:off x="4306824" y="4400953"/>
+            <a:ext cx="932688" cy="270017"/>
           </a:xfrm>
           <a:prstGeom prst="rect">
             <a:avLst/>
@@ -18258,8 +18199,8 @@
         </p:nvSpPr>
         <p:spPr>
           <a:xfrm>
-            <a:off x="5239512" y="4185800"/>
-            <a:ext cx="676656" cy="248502"/>
+            <a:off x="5239512" y="4400953"/>
+            <a:ext cx="676656" cy="270017"/>
           </a:xfrm>
           <a:prstGeom prst="rect">
             <a:avLst/>
@@ -18297,8 +18238,8 @@
         </p:nvSpPr>
         <p:spPr>
           <a:xfrm>
-            <a:off x="658368" y="4434302"/>
-            <a:ext cx="310896" cy="248502"/>
+            <a:off x="658368" y="4670970"/>
+            <a:ext cx="310896" cy="270017"/>
           </a:xfrm>
           <a:prstGeom prst="rect">
             <a:avLst/>
@@ -18336,8 +18277,8 @@
         </p:nvSpPr>
         <p:spPr>
           <a:xfrm>
-            <a:off x="1014984" y="4434302"/>
-            <a:ext cx="1783080" cy="248502"/>
+            <a:off x="1014984" y="4670970"/>
+            <a:ext cx="1783080" cy="270017"/>
           </a:xfrm>
           <a:prstGeom prst="rect">
             <a:avLst/>
@@ -18375,8 +18316,8 @@
         </p:nvSpPr>
         <p:spPr>
           <a:xfrm>
-            <a:off x="2871216" y="4490215"/>
-            <a:ext cx="238147" cy="136676"/>
+            <a:off x="2871216" y="4731724"/>
+            <a:ext cx="238147" cy="148509"/>
           </a:xfrm>
           <a:prstGeom prst="rect">
             <a:avLst/>
@@ -18395,8 +18336,8 @@
         </p:nvSpPr>
         <p:spPr>
           <a:xfrm>
-            <a:off x="3520440" y="4434302"/>
-            <a:ext cx="786384" cy="248502"/>
+            <a:off x="3520440" y="4670970"/>
+            <a:ext cx="786384" cy="270017"/>
           </a:xfrm>
           <a:prstGeom prst="rect">
             <a:avLst/>
@@ -18434,8 +18375,8 @@
         </p:nvSpPr>
         <p:spPr>
           <a:xfrm>
-            <a:off x="4306824" y="4434302"/>
-            <a:ext cx="932688" cy="248502"/>
+            <a:off x="4306824" y="4670970"/>
+            <a:ext cx="932688" cy="270017"/>
           </a:xfrm>
           <a:prstGeom prst="rect">
             <a:avLst/>
@@ -18473,8 +18414,8 @@
         </p:nvSpPr>
         <p:spPr>
           <a:xfrm>
-            <a:off x="5239512" y="4434302"/>
-            <a:ext cx="676656" cy="248502"/>
+            <a:off x="5239512" y="4670970"/>
+            <a:ext cx="676656" cy="270017"/>
           </a:xfrm>
           <a:prstGeom prst="rect">
             <a:avLst/>
@@ -18512,8 +18453,8 @@
         </p:nvSpPr>
         <p:spPr>
           <a:xfrm>
-            <a:off x="658368" y="4682804"/>
-            <a:ext cx="310896" cy="248502"/>
+            <a:off x="658368" y="4940987"/>
+            <a:ext cx="310896" cy="270017"/>
           </a:xfrm>
           <a:prstGeom prst="rect">
             <a:avLst/>
@@ -18551,8 +18492,8 @@
         </p:nvSpPr>
         <p:spPr>
           <a:xfrm>
-            <a:off x="1014984" y="4682804"/>
-            <a:ext cx="1783080" cy="248502"/>
+            <a:off x="1014984" y="4940987"/>
+            <a:ext cx="1783080" cy="270017"/>
           </a:xfrm>
           <a:prstGeom prst="rect">
             <a:avLst/>
@@ -18590,8 +18531,8 @@
         </p:nvSpPr>
         <p:spPr>
           <a:xfrm>
-            <a:off x="2871216" y="4738717"/>
-            <a:ext cx="233408" cy="136676"/>
+            <a:off x="2871216" y="5001741"/>
+            <a:ext cx="233408" cy="148509"/>
           </a:xfrm>
           <a:prstGeom prst="rect">
             <a:avLst/>
@@ -18610,8 +18551,8 @@
         </p:nvSpPr>
         <p:spPr>
           <a:xfrm>
-            <a:off x="3520440" y="4682804"/>
-            <a:ext cx="786384" cy="248502"/>
+            <a:off x="3520440" y="4940987"/>
+            <a:ext cx="786384" cy="270017"/>
           </a:xfrm>
           <a:prstGeom prst="rect">
             <a:avLst/>
@@ -18649,8 +18590,8 @@
         </p:nvSpPr>
         <p:spPr>
           <a:xfrm>
-            <a:off x="4306824" y="4682804"/>
-            <a:ext cx="932688" cy="248502"/>
+            <a:off x="4306824" y="4940987"/>
+            <a:ext cx="932688" cy="270017"/>
           </a:xfrm>
           <a:prstGeom prst="rect">
             <a:avLst/>
@@ -18688,8 +18629,8 @@
         </p:nvSpPr>
         <p:spPr>
           <a:xfrm>
-            <a:off x="5239512" y="4682804"/>
-            <a:ext cx="676656" cy="248502"/>
+            <a:off x="5239512" y="4940987"/>
+            <a:ext cx="676656" cy="270017"/>
           </a:xfrm>
           <a:prstGeom prst="rect">
             <a:avLst/>
@@ -18727,8 +18668,8 @@
         </p:nvSpPr>
         <p:spPr>
           <a:xfrm>
-            <a:off x="658368" y="4931305"/>
-            <a:ext cx="310896" cy="248502"/>
+            <a:off x="658368" y="5211004"/>
+            <a:ext cx="310896" cy="270017"/>
           </a:xfrm>
           <a:prstGeom prst="rect">
             <a:avLst/>
@@ -18766,8 +18707,8 @@
         </p:nvSpPr>
         <p:spPr>
           <a:xfrm>
-            <a:off x="1014984" y="4931305"/>
-            <a:ext cx="1783080" cy="248502"/>
+            <a:off x="1014984" y="5211004"/>
+            <a:ext cx="1783080" cy="270017"/>
           </a:xfrm>
           <a:prstGeom prst="rect">
             <a:avLst/>
@@ -18805,8 +18746,8 @@
         </p:nvSpPr>
         <p:spPr>
           <a:xfrm>
-            <a:off x="2871216" y="4987218"/>
-            <a:ext cx="217057" cy="136676"/>
+            <a:off x="2871216" y="5271758"/>
+            <a:ext cx="217057" cy="148509"/>
           </a:xfrm>
           <a:prstGeom prst="rect">
             <a:avLst/>
@@ -18825,8 +18766,8 @@
         </p:nvSpPr>
         <p:spPr>
           <a:xfrm>
-            <a:off x="3520440" y="4931305"/>
-            <a:ext cx="786384" cy="248502"/>
+            <a:off x="3520440" y="5211004"/>
+            <a:ext cx="786384" cy="270017"/>
           </a:xfrm>
           <a:prstGeom prst="rect">
             <a:avLst/>
@@ -18864,8 +18805,8 @@
         </p:nvSpPr>
         <p:spPr>
           <a:xfrm>
-            <a:off x="4306824" y="4931305"/>
-            <a:ext cx="932688" cy="248502"/>
+            <a:off x="4306824" y="5211004"/>
+            <a:ext cx="932688" cy="270017"/>
           </a:xfrm>
           <a:prstGeom prst="rect">
             <a:avLst/>
@@ -18903,8 +18844,8 @@
         </p:nvSpPr>
         <p:spPr>
           <a:xfrm>
-            <a:off x="5239512" y="4931305"/>
-            <a:ext cx="676656" cy="248502"/>
+            <a:off x="5239512" y="5211004"/>
+            <a:ext cx="676656" cy="270017"/>
           </a:xfrm>
           <a:prstGeom prst="rect">
             <a:avLst/>
@@ -18942,8 +18883,8 @@
         </p:nvSpPr>
         <p:spPr>
           <a:xfrm>
-            <a:off x="658368" y="5179807"/>
-            <a:ext cx="310896" cy="248502"/>
+            <a:off x="658368" y="5481021"/>
+            <a:ext cx="310896" cy="270017"/>
           </a:xfrm>
           <a:prstGeom prst="rect">
             <a:avLst/>
@@ -18981,8 +18922,8 @@
         </p:nvSpPr>
         <p:spPr>
           <a:xfrm>
-            <a:off x="1014984" y="5179807"/>
-            <a:ext cx="1783080" cy="248502"/>
+            <a:off x="1014984" y="5481021"/>
+            <a:ext cx="1783080" cy="270017"/>
           </a:xfrm>
           <a:prstGeom prst="rect">
             <a:avLst/>
@@ -19020,8 +18961,8 @@
         </p:nvSpPr>
         <p:spPr>
           <a:xfrm>
-            <a:off x="2871216" y="5235720"/>
-            <a:ext cx="180426" cy="136676"/>
+            <a:off x="2871216" y="5541775"/>
+            <a:ext cx="180426" cy="148509"/>
           </a:xfrm>
           <a:prstGeom prst="rect">
             <a:avLst/>
@@ -19040,8 +18981,8 @@
         </p:nvSpPr>
         <p:spPr>
           <a:xfrm>
-            <a:off x="3520440" y="5179807"/>
-            <a:ext cx="786384" cy="248502"/>
+            <a:off x="3520440" y="5481021"/>
+            <a:ext cx="786384" cy="270017"/>
           </a:xfrm>
           <a:prstGeom prst="rect">
             <a:avLst/>
@@ -19079,8 +19020,8 @@
         </p:nvSpPr>
         <p:spPr>
           <a:xfrm>
-            <a:off x="4306824" y="5179807"/>
-            <a:ext cx="932688" cy="248502"/>
+            <a:off x="4306824" y="5481021"/>
+            <a:ext cx="932688" cy="270017"/>
           </a:xfrm>
           <a:prstGeom prst="rect">
             <a:avLst/>
@@ -19118,8 +19059,8 @@
         </p:nvSpPr>
         <p:spPr>
           <a:xfrm>
-            <a:off x="5239512" y="5179807"/>
-            <a:ext cx="676656" cy="248502"/>
+            <a:off x="5239512" y="5481021"/>
+            <a:ext cx="676656" cy="270017"/>
           </a:xfrm>
           <a:prstGeom prst="rect">
             <a:avLst/>
@@ -19157,8 +19098,8 @@
         </p:nvSpPr>
         <p:spPr>
           <a:xfrm>
-            <a:off x="658368" y="5428309"/>
-            <a:ext cx="310896" cy="248502"/>
+            <a:off x="658368" y="5751038"/>
+            <a:ext cx="310896" cy="270017"/>
           </a:xfrm>
           <a:prstGeom prst="rect">
             <a:avLst/>
@@ -19196,8 +19137,8 @@
         </p:nvSpPr>
         <p:spPr>
           <a:xfrm>
-            <a:off x="1014984" y="5428309"/>
-            <a:ext cx="1783080" cy="248502"/>
+            <a:off x="1014984" y="5751038"/>
+            <a:ext cx="1783080" cy="270017"/>
           </a:xfrm>
           <a:prstGeom prst="rect">
             <a:avLst/>
@@ -19235,8 +19176,8 @@
         </p:nvSpPr>
         <p:spPr>
           <a:xfrm>
-            <a:off x="2871216" y="5484222"/>
-            <a:ext cx="164601" cy="136676"/>
+            <a:off x="2871216" y="5811792"/>
+            <a:ext cx="164601" cy="148509"/>
           </a:xfrm>
           <a:prstGeom prst="rect">
             <a:avLst/>
@@ -19255,8 +19196,8 @@
         </p:nvSpPr>
         <p:spPr>
           <a:xfrm>
-            <a:off x="3520440" y="5428309"/>
-            <a:ext cx="786384" cy="248502"/>
+            <a:off x="3520440" y="5751038"/>
+            <a:ext cx="786384" cy="270017"/>
           </a:xfrm>
           <a:prstGeom prst="rect">
             <a:avLst/>
@@ -19294,8 +19235,8 @@
         </p:nvSpPr>
         <p:spPr>
           <a:xfrm>
-            <a:off x="4306824" y="5428309"/>
-            <a:ext cx="932688" cy="248502"/>
+            <a:off x="4306824" y="5751038"/>
+            <a:ext cx="932688" cy="270017"/>
           </a:xfrm>
           <a:prstGeom prst="rect">
             <a:avLst/>
@@ -19333,8 +19274,8 @@
         </p:nvSpPr>
         <p:spPr>
           <a:xfrm>
-            <a:off x="5239512" y="5428309"/>
-            <a:ext cx="676656" cy="248502"/>
+            <a:off x="5239512" y="5751038"/>
+            <a:ext cx="676656" cy="270017"/>
           </a:xfrm>
           <a:prstGeom prst="rect">
             <a:avLst/>
@@ -19372,8 +19313,8 @@
         </p:nvSpPr>
         <p:spPr>
           <a:xfrm>
-            <a:off x="658368" y="5676810"/>
-            <a:ext cx="310896" cy="248502"/>
+            <a:off x="658368" y="6021055"/>
+            <a:ext cx="310896" cy="270017"/>
           </a:xfrm>
           <a:prstGeom prst="rect">
             <a:avLst/>
@@ -19411,8 +19352,8 @@
         </p:nvSpPr>
         <p:spPr>
           <a:xfrm>
-            <a:off x="1014984" y="5676810"/>
-            <a:ext cx="1783080" cy="248502"/>
+            <a:off x="1014984" y="6021055"/>
+            <a:ext cx="1783080" cy="270017"/>
           </a:xfrm>
           <a:prstGeom prst="rect">
             <a:avLst/>
@@ -19450,8 +19391,8 @@
         </p:nvSpPr>
         <p:spPr>
           <a:xfrm>
-            <a:off x="2871216" y="5732723"/>
-            <a:ext cx="159807" cy="136676"/>
+            <a:off x="2871216" y="6081809"/>
+            <a:ext cx="159807" cy="148509"/>
           </a:xfrm>
           <a:prstGeom prst="rect">
             <a:avLst/>
@@ -19470,8 +19411,8 @@
         </p:nvSpPr>
         <p:spPr>
           <a:xfrm>
-            <a:off x="3520440" y="5676810"/>
-            <a:ext cx="786384" cy="248502"/>
+            <a:off x="3520440" y="6021055"/>
+            <a:ext cx="786384" cy="270017"/>
           </a:xfrm>
           <a:prstGeom prst="rect">
             <a:avLst/>
@@ -19509,8 +19450,8 @@
         </p:nvSpPr>
         <p:spPr>
           <a:xfrm>
-            <a:off x="4306824" y="5676810"/>
-            <a:ext cx="932688" cy="248502"/>
+            <a:off x="4306824" y="6021055"/>
+            <a:ext cx="932688" cy="270017"/>
           </a:xfrm>
           <a:prstGeom prst="rect">
             <a:avLst/>
@@ -19548,8 +19489,8 @@
         </p:nvSpPr>
         <p:spPr>
           <a:xfrm>
-            <a:off x="5239512" y="5676810"/>
-            <a:ext cx="676656" cy="248502"/>
+            <a:off x="5239512" y="6021055"/>
+            <a:ext cx="676656" cy="270017"/>
           </a:xfrm>
           <a:prstGeom prst="rect">
             <a:avLst/>
@@ -19588,7 +19529,7 @@
         <p:spPr>
           <a:xfrm>
             <a:off x="6208776" y="1700784"/>
-            <a:ext cx="310896" cy="248502"/>
+            <a:ext cx="310896" cy="270017"/>
           </a:xfrm>
           <a:prstGeom prst="rect">
             <a:avLst/>
@@ -19627,7 +19568,7 @@
         <p:spPr>
           <a:xfrm>
             <a:off x="6565392" y="1700784"/>
-            <a:ext cx="1783080" cy="248502"/>
+            <a:ext cx="1783080" cy="270017"/>
           </a:xfrm>
           <a:prstGeom prst="rect">
             <a:avLst/>
@@ -19665,8 +19606,8 @@
         </p:nvSpPr>
         <p:spPr>
           <a:xfrm>
-            <a:off x="8421624" y="1756697"/>
-            <a:ext cx="148734" cy="136676"/>
+            <a:off x="8421624" y="1761538"/>
+            <a:ext cx="148734" cy="148509"/>
           </a:xfrm>
           <a:prstGeom prst="rect">
             <a:avLst/>
@@ -19686,7 +19627,7 @@
         <p:spPr>
           <a:xfrm>
             <a:off x="9070848" y="1700784"/>
-            <a:ext cx="786384" cy="248502"/>
+            <a:ext cx="786384" cy="270017"/>
           </a:xfrm>
           <a:prstGeom prst="rect">
             <a:avLst/>
@@ -19725,7 +19666,7 @@
         <p:spPr>
           <a:xfrm>
             <a:off x="9857232" y="1700784"/>
-            <a:ext cx="932688" cy="248502"/>
+            <a:ext cx="932688" cy="270017"/>
           </a:xfrm>
           <a:prstGeom prst="rect">
             <a:avLst/>
@@ -19764,7 +19705,7 @@
         <p:spPr>
           <a:xfrm>
             <a:off x="10789920" y="1700784"/>
-            <a:ext cx="676656" cy="248502"/>
+            <a:ext cx="676656" cy="270017"/>
           </a:xfrm>
           <a:prstGeom prst="rect">
             <a:avLst/>
@@ -19802,8 +19743,8 @@
         </p:nvSpPr>
         <p:spPr>
           <a:xfrm>
-            <a:off x="6208776" y="1949286"/>
-            <a:ext cx="310896" cy="248502"/>
+            <a:off x="6208776" y="1970801"/>
+            <a:ext cx="310896" cy="270017"/>
           </a:xfrm>
           <a:prstGeom prst="rect">
             <a:avLst/>
@@ -19841,8 +19782,8 @@
         </p:nvSpPr>
         <p:spPr>
           <a:xfrm>
-            <a:off x="6565392" y="1949286"/>
-            <a:ext cx="1783080" cy="248502"/>
+            <a:off x="6565392" y="1970801"/>
+            <a:ext cx="1783080" cy="270017"/>
           </a:xfrm>
           <a:prstGeom prst="rect">
             <a:avLst/>
@@ -19880,8 +19821,8 @@
         </p:nvSpPr>
         <p:spPr>
           <a:xfrm>
-            <a:off x="8421624" y="2005199"/>
-            <a:ext cx="129329" cy="136676"/>
+            <a:off x="8421624" y="2031555"/>
+            <a:ext cx="129329" cy="148509"/>
           </a:xfrm>
           <a:prstGeom prst="rect">
             <a:avLst/>
@@ -19900,8 +19841,8 @@
         </p:nvSpPr>
         <p:spPr>
           <a:xfrm>
-            <a:off x="9070848" y="1949286"/>
-            <a:ext cx="786384" cy="248502"/>
+            <a:off x="9070848" y="1970801"/>
+            <a:ext cx="786384" cy="270017"/>
           </a:xfrm>
           <a:prstGeom prst="rect">
             <a:avLst/>
@@ -19939,8 +19880,8 @@
         </p:nvSpPr>
         <p:spPr>
           <a:xfrm>
-            <a:off x="9857232" y="1949286"/>
-            <a:ext cx="932688" cy="248502"/>
+            <a:off x="9857232" y="1970801"/>
+            <a:ext cx="932688" cy="270017"/>
           </a:xfrm>
           <a:prstGeom prst="rect">
             <a:avLst/>
@@ -19978,8 +19919,8 @@
         </p:nvSpPr>
         <p:spPr>
           <a:xfrm>
-            <a:off x="10789920" y="1949286"/>
-            <a:ext cx="676656" cy="248502"/>
+            <a:off x="10789920" y="1970801"/>
+            <a:ext cx="676656" cy="270017"/>
           </a:xfrm>
           <a:prstGeom prst="rect">
             <a:avLst/>
@@ -20017,8 +19958,8 @@
         </p:nvSpPr>
         <p:spPr>
           <a:xfrm>
-            <a:off x="6208776" y="2197787"/>
-            <a:ext cx="310896" cy="248502"/>
+            <a:off x="6208776" y="2240818"/>
+            <a:ext cx="310896" cy="270017"/>
           </a:xfrm>
           <a:prstGeom prst="rect">
             <a:avLst/>
@@ -20056,8 +19997,8 @@
         </p:nvSpPr>
         <p:spPr>
           <a:xfrm>
-            <a:off x="6565392" y="2197787"/>
-            <a:ext cx="1783080" cy="248502"/>
+            <a:off x="6565392" y="2240818"/>
+            <a:ext cx="1783080" cy="270017"/>
           </a:xfrm>
           <a:prstGeom prst="rect">
             <a:avLst/>
@@ -20095,8 +20036,8 @@
         </p:nvSpPr>
         <p:spPr>
           <a:xfrm>
-            <a:off x="8421624" y="2253700"/>
-            <a:ext cx="119109" cy="136676"/>
+            <a:off x="8421624" y="2301572"/>
+            <a:ext cx="119109" cy="148509"/>
           </a:xfrm>
           <a:prstGeom prst="rect">
             <a:avLst/>
@@ -20115,8 +20056,8 @@
         </p:nvSpPr>
         <p:spPr>
           <a:xfrm>
-            <a:off x="9070848" y="2197787"/>
-            <a:ext cx="786384" cy="248502"/>
+            <a:off x="9070848" y="2240818"/>
+            <a:ext cx="786384" cy="270017"/>
           </a:xfrm>
           <a:prstGeom prst="rect">
             <a:avLst/>
@@ -20154,8 +20095,8 @@
         </p:nvSpPr>
         <p:spPr>
           <a:xfrm>
-            <a:off x="9857232" y="2197787"/>
-            <a:ext cx="932688" cy="248502"/>
+            <a:off x="9857232" y="2240818"/>
+            <a:ext cx="932688" cy="270017"/>
           </a:xfrm>
           <a:prstGeom prst="rect">
             <a:avLst/>
@@ -20193,8 +20134,8 @@
         </p:nvSpPr>
         <p:spPr>
           <a:xfrm>
-            <a:off x="10789920" y="2197787"/>
-            <a:ext cx="676656" cy="248502"/>
+            <a:off x="10789920" y="2240818"/>
+            <a:ext cx="676656" cy="270017"/>
           </a:xfrm>
           <a:prstGeom prst="rect">
             <a:avLst/>
@@ -20232,8 +20173,8 @@
         </p:nvSpPr>
         <p:spPr>
           <a:xfrm>
-            <a:off x="6208776" y="2446289"/>
-            <a:ext cx="310896" cy="248502"/>
+            <a:off x="6208776" y="2510835"/>
+            <a:ext cx="310896" cy="270017"/>
           </a:xfrm>
           <a:prstGeom prst="rect">
             <a:avLst/>
@@ -20271,8 +20212,8 @@
         </p:nvSpPr>
         <p:spPr>
           <a:xfrm>
-            <a:off x="6565392" y="2446289"/>
-            <a:ext cx="1783080" cy="248502"/>
+            <a:off x="6565392" y="2510835"/>
+            <a:ext cx="1783080" cy="270017"/>
           </a:xfrm>
           <a:prstGeom prst="rect">
             <a:avLst/>
@@ -20310,8 +20251,8 @@
         </p:nvSpPr>
         <p:spPr>
           <a:xfrm>
-            <a:off x="8421624" y="2502202"/>
-            <a:ext cx="92701" cy="136676"/>
+            <a:off x="8421624" y="2571589"/>
+            <a:ext cx="92701" cy="148509"/>
           </a:xfrm>
           <a:prstGeom prst="rect">
             <a:avLst/>
@@ -20330,8 +20271,8 @@
         </p:nvSpPr>
         <p:spPr>
           <a:xfrm>
-            <a:off x="9070848" y="2446289"/>
-            <a:ext cx="786384" cy="248502"/>
+            <a:off x="9070848" y="2510835"/>
+            <a:ext cx="786384" cy="270017"/>
           </a:xfrm>
           <a:prstGeom prst="rect">
             <a:avLst/>
@@ -20369,8 +20310,8 @@
         </p:nvSpPr>
         <p:spPr>
           <a:xfrm>
-            <a:off x="9857232" y="2446289"/>
-            <a:ext cx="932688" cy="248502"/>
+            <a:off x="9857232" y="2510835"/>
+            <a:ext cx="932688" cy="270017"/>
           </a:xfrm>
           <a:prstGeom prst="rect">
             <a:avLst/>
@@ -20408,8 +20349,8 @@
         </p:nvSpPr>
         <p:spPr>
           <a:xfrm>
-            <a:off x="10789920" y="2446289"/>
-            <a:ext cx="676656" cy="248502"/>
+            <a:off x="10789920" y="2510835"/>
+            <a:ext cx="676656" cy="270017"/>
           </a:xfrm>
           <a:prstGeom prst="rect">
             <a:avLst/>
@@ -20447,8 +20388,8 @@
         </p:nvSpPr>
         <p:spPr>
           <a:xfrm>
-            <a:off x="6208776" y="2694791"/>
-            <a:ext cx="310896" cy="248502"/>
+            <a:off x="6208776" y="2780852"/>
+            <a:ext cx="310896" cy="270017"/>
           </a:xfrm>
           <a:prstGeom prst="rect">
             <a:avLst/>
@@ -20486,8 +20427,8 @@
         </p:nvSpPr>
         <p:spPr>
           <a:xfrm>
-            <a:off x="6565392" y="2694791"/>
-            <a:ext cx="1783080" cy="248502"/>
+            <a:off x="6565392" y="2780852"/>
+            <a:ext cx="1783080" cy="270017"/>
           </a:xfrm>
           <a:prstGeom prst="rect">
             <a:avLst/>
@@ -20525,8 +20466,8 @@
         </p:nvSpPr>
         <p:spPr>
           <a:xfrm>
-            <a:off x="8421624" y="2750703"/>
-            <a:ext cx="89382" cy="136676"/>
+            <a:off x="8421624" y="2841606"/>
+            <a:ext cx="89382" cy="148509"/>
           </a:xfrm>
           <a:prstGeom prst="rect">
             <a:avLst/>
@@ -20545,8 +20486,8 @@
         </p:nvSpPr>
         <p:spPr>
           <a:xfrm>
-            <a:off x="9070848" y="2694791"/>
-            <a:ext cx="786384" cy="248502"/>
+            <a:off x="9070848" y="2780852"/>
+            <a:ext cx="786384" cy="270017"/>
           </a:xfrm>
           <a:prstGeom prst="rect">
             <a:avLst/>
@@ -20584,8 +20525,8 @@
         </p:nvSpPr>
         <p:spPr>
           <a:xfrm>
-            <a:off x="9857232" y="2694791"/>
-            <a:ext cx="932688" cy="248502"/>
+            <a:off x="9857232" y="2780852"/>
+            <a:ext cx="932688" cy="270017"/>
           </a:xfrm>
           <a:prstGeom prst="rect">
             <a:avLst/>
@@ -20623,8 +20564,8 @@
         </p:nvSpPr>
         <p:spPr>
           <a:xfrm>
-            <a:off x="10789920" y="2694791"/>
-            <a:ext cx="676656" cy="248502"/>
+            <a:off x="10789920" y="2780852"/>
+            <a:ext cx="676656" cy="270017"/>
           </a:xfrm>
           <a:prstGeom prst="rect">
             <a:avLst/>
@@ -20662,8 +20603,8 @@
         </p:nvSpPr>
         <p:spPr>
           <a:xfrm>
-            <a:off x="6208776" y="2943292"/>
-            <a:ext cx="310896" cy="248502"/>
+            <a:off x="6208776" y="3050869"/>
+            <a:ext cx="310896" cy="270017"/>
           </a:xfrm>
           <a:prstGeom prst="rect">
             <a:avLst/>
@@ -20701,8 +20642,8 @@
         </p:nvSpPr>
         <p:spPr>
           <a:xfrm>
-            <a:off x="6565392" y="2943292"/>
-            <a:ext cx="1783080" cy="248502"/>
+            <a:off x="6565392" y="3050869"/>
+            <a:ext cx="1783080" cy="270017"/>
           </a:xfrm>
           <a:prstGeom prst="rect">
             <a:avLst/>
@@ -20740,8 +20681,8 @@
         </p:nvSpPr>
         <p:spPr>
           <a:xfrm>
-            <a:off x="8421624" y="2999205"/>
-            <a:ext cx="83365" cy="136676"/>
+            <a:off x="8421624" y="3111623"/>
+            <a:ext cx="83365" cy="148509"/>
           </a:xfrm>
           <a:prstGeom prst="rect">
             <a:avLst/>
@@ -20760,8 +20701,8 @@
         </p:nvSpPr>
         <p:spPr>
           <a:xfrm>
-            <a:off x="9070848" y="2943292"/>
-            <a:ext cx="786384" cy="248502"/>
+            <a:off x="9070848" y="3050869"/>
+            <a:ext cx="786384" cy="270017"/>
           </a:xfrm>
           <a:prstGeom prst="rect">
             <a:avLst/>
@@ -20799,8 +20740,8 @@
         </p:nvSpPr>
         <p:spPr>
           <a:xfrm>
-            <a:off x="9857232" y="2943292"/>
-            <a:ext cx="932688" cy="248502"/>
+            <a:off x="9857232" y="3050869"/>
+            <a:ext cx="932688" cy="270017"/>
           </a:xfrm>
           <a:prstGeom prst="rect">
             <a:avLst/>
@@ -20838,8 +20779,8 @@
         </p:nvSpPr>
         <p:spPr>
           <a:xfrm>
-            <a:off x="10789920" y="2943292"/>
-            <a:ext cx="676656" cy="248502"/>
+            <a:off x="10789920" y="3050869"/>
+            <a:ext cx="676656" cy="270017"/>
           </a:xfrm>
           <a:prstGeom prst="rect">
             <a:avLst/>
@@ -20877,8 +20818,8 @@
         </p:nvSpPr>
         <p:spPr>
           <a:xfrm>
-            <a:off x="6208776" y="3191794"/>
-            <a:ext cx="310896" cy="248502"/>
+            <a:off x="6208776" y="3320886"/>
+            <a:ext cx="310896" cy="270017"/>
           </a:xfrm>
           <a:prstGeom prst="rect">
             <a:avLst/>
@@ -20916,8 +20857,8 @@
         </p:nvSpPr>
         <p:spPr>
           <a:xfrm>
-            <a:off x="6565392" y="3191794"/>
-            <a:ext cx="1783080" cy="248502"/>
+            <a:off x="6565392" y="3320886"/>
+            <a:ext cx="1783080" cy="270017"/>
           </a:xfrm>
           <a:prstGeom prst="rect">
             <a:avLst/>
@@ -20955,8 +20896,8 @@
         </p:nvSpPr>
         <p:spPr>
           <a:xfrm>
-            <a:off x="8421624" y="3247707"/>
-            <a:ext cx="78085" cy="136676"/>
+            <a:off x="8421624" y="3381639"/>
+            <a:ext cx="78085" cy="148509"/>
           </a:xfrm>
           <a:prstGeom prst="rect">
             <a:avLst/>
@@ -20975,8 +20916,8 @@
         </p:nvSpPr>
         <p:spPr>
           <a:xfrm>
-            <a:off x="9070848" y="3191794"/>
-            <a:ext cx="786384" cy="248502"/>
+            <a:off x="9070848" y="3320886"/>
+            <a:ext cx="786384" cy="270017"/>
           </a:xfrm>
           <a:prstGeom prst="rect">
             <a:avLst/>
@@ -21014,8 +20955,8 @@
         </p:nvSpPr>
         <p:spPr>
           <a:xfrm>
-            <a:off x="9857232" y="3191794"/>
-            <a:ext cx="932688" cy="248502"/>
+            <a:off x="9857232" y="3320886"/>
+            <a:ext cx="932688" cy="270017"/>
           </a:xfrm>
           <a:prstGeom prst="rect">
             <a:avLst/>
@@ -21053,8 +20994,8 @@
         </p:nvSpPr>
         <p:spPr>
           <a:xfrm>
-            <a:off x="10789920" y="3191794"/>
-            <a:ext cx="676656" cy="248502"/>
+            <a:off x="10789920" y="3320886"/>
+            <a:ext cx="676656" cy="270017"/>
           </a:xfrm>
           <a:prstGeom prst="rect">
             <a:avLst/>
@@ -21092,8 +21033,8 @@
         </p:nvSpPr>
         <p:spPr>
           <a:xfrm>
-            <a:off x="6208776" y="3440296"/>
-            <a:ext cx="310896" cy="248502"/>
+            <a:off x="6208776" y="3590903"/>
+            <a:ext cx="310896" cy="270017"/>
           </a:xfrm>
           <a:prstGeom prst="rect">
             <a:avLst/>
@@ -21131,8 +21072,8 @@
         </p:nvSpPr>
         <p:spPr>
           <a:xfrm>
-            <a:off x="6565392" y="3440296"/>
-            <a:ext cx="1783080" cy="248502"/>
+            <a:off x="6565392" y="3590903"/>
+            <a:ext cx="1783080" cy="270017"/>
           </a:xfrm>
           <a:prstGeom prst="rect">
             <a:avLst/>
@@ -21170,8 +21111,8 @@
         </p:nvSpPr>
         <p:spPr>
           <a:xfrm>
-            <a:off x="8421624" y="3496208"/>
-            <a:ext cx="77498" cy="136676"/>
+            <a:off x="8421624" y="3651656"/>
+            <a:ext cx="77498" cy="148509"/>
           </a:xfrm>
           <a:prstGeom prst="rect">
             <a:avLst/>
@@ -21190,8 +21131,8 @@
         </p:nvSpPr>
         <p:spPr>
           <a:xfrm>
-            <a:off x="9070848" y="3440296"/>
-            <a:ext cx="786384" cy="248502"/>
+            <a:off x="9070848" y="3590903"/>
+            <a:ext cx="786384" cy="270017"/>
           </a:xfrm>
           <a:prstGeom prst="rect">
             <a:avLst/>
@@ -21229,8 +21170,8 @@
         </p:nvSpPr>
         <p:spPr>
           <a:xfrm>
-            <a:off x="9857232" y="3440296"/>
-            <a:ext cx="932688" cy="248502"/>
+            <a:off x="9857232" y="3590903"/>
+            <a:ext cx="932688" cy="270017"/>
           </a:xfrm>
           <a:prstGeom prst="rect">
             <a:avLst/>
@@ -21268,8 +21209,8 @@
         </p:nvSpPr>
         <p:spPr>
           <a:xfrm>
-            <a:off x="10789920" y="3440296"/>
-            <a:ext cx="676656" cy="248502"/>
+            <a:off x="10789920" y="3590903"/>
+            <a:ext cx="676656" cy="270017"/>
           </a:xfrm>
           <a:prstGeom prst="rect">
             <a:avLst/>
@@ -21307,8 +21248,8 @@
         </p:nvSpPr>
         <p:spPr>
           <a:xfrm>
-            <a:off x="6208776" y="3688797"/>
-            <a:ext cx="310896" cy="248502"/>
+            <a:off x="6208776" y="3860920"/>
+            <a:ext cx="310896" cy="270017"/>
           </a:xfrm>
           <a:prstGeom prst="rect">
             <a:avLst/>
@@ -21346,8 +21287,8 @@
         </p:nvSpPr>
         <p:spPr>
           <a:xfrm>
-            <a:off x="6565392" y="3688797"/>
-            <a:ext cx="1783080" cy="248502"/>
+            <a:off x="6565392" y="3860920"/>
+            <a:ext cx="1783080" cy="270017"/>
           </a:xfrm>
           <a:prstGeom prst="rect">
             <a:avLst/>
@@ -21385,8 +21326,8 @@
         </p:nvSpPr>
         <p:spPr>
           <a:xfrm>
-            <a:off x="8421624" y="3744710"/>
-            <a:ext cx="75663" cy="136676"/>
+            <a:off x="8421624" y="3921673"/>
+            <a:ext cx="75663" cy="148509"/>
           </a:xfrm>
           <a:prstGeom prst="rect">
             <a:avLst/>
@@ -21405,8 +21346,8 @@
         </p:nvSpPr>
         <p:spPr>
           <a:xfrm>
-            <a:off x="9070848" y="3688797"/>
-            <a:ext cx="786384" cy="248502"/>
+            <a:off x="9070848" y="3860920"/>
+            <a:ext cx="786384" cy="270017"/>
           </a:xfrm>
           <a:prstGeom prst="rect">
             <a:avLst/>
@@ -21444,8 +21385,8 @@
         </p:nvSpPr>
         <p:spPr>
           <a:xfrm>
-            <a:off x="9857232" y="3688797"/>
-            <a:ext cx="932688" cy="248502"/>
+            <a:off x="9857232" y="3860920"/>
+            <a:ext cx="932688" cy="270017"/>
           </a:xfrm>
           <a:prstGeom prst="rect">
             <a:avLst/>
@@ -21483,8 +21424,8 @@
         </p:nvSpPr>
         <p:spPr>
           <a:xfrm>
-            <a:off x="10789920" y="3688797"/>
-            <a:ext cx="676656" cy="248502"/>
+            <a:off x="10789920" y="3860920"/>
+            <a:ext cx="676656" cy="270017"/>
           </a:xfrm>
           <a:prstGeom prst="rect">
             <a:avLst/>
@@ -21522,8 +21463,8 @@
         </p:nvSpPr>
         <p:spPr>
           <a:xfrm>
-            <a:off x="6208776" y="3937299"/>
-            <a:ext cx="310896" cy="248502"/>
+            <a:off x="6208776" y="4130936"/>
+            <a:ext cx="310896" cy="270017"/>
           </a:xfrm>
           <a:prstGeom prst="rect">
             <a:avLst/>
@@ -21561,8 +21502,8 @@
         </p:nvSpPr>
         <p:spPr>
           <a:xfrm>
-            <a:off x="6565392" y="3937299"/>
-            <a:ext cx="1783080" cy="248502"/>
+            <a:off x="6565392" y="4130936"/>
+            <a:ext cx="1783080" cy="270017"/>
           </a:xfrm>
           <a:prstGeom prst="rect">
             <a:avLst/>
@@ -21600,8 +21541,8 @@
         </p:nvSpPr>
         <p:spPr>
           <a:xfrm>
-            <a:off x="8421624" y="3993212"/>
-            <a:ext cx="56358" cy="136676"/>
+            <a:off x="8421624" y="4191690"/>
+            <a:ext cx="56358" cy="148509"/>
           </a:xfrm>
           <a:prstGeom prst="rect">
             <a:avLst/>
@@ -21620,8 +21561,8 @@
         </p:nvSpPr>
         <p:spPr>
           <a:xfrm>
-            <a:off x="9070848" y="3937299"/>
-            <a:ext cx="786384" cy="248502"/>
+            <a:off x="9070848" y="4130936"/>
+            <a:ext cx="786384" cy="270017"/>
           </a:xfrm>
           <a:prstGeom prst="rect">
             <a:avLst/>
@@ -21659,8 +21600,8 @@
         </p:nvSpPr>
         <p:spPr>
           <a:xfrm>
-            <a:off x="9857232" y="3937299"/>
-            <a:ext cx="932688" cy="248502"/>
+            <a:off x="9857232" y="4130936"/>
+            <a:ext cx="932688" cy="270017"/>
           </a:xfrm>
           <a:prstGeom prst="rect">
             <a:avLst/>
@@ -21698,8 +21639,8 @@
         </p:nvSpPr>
         <p:spPr>
           <a:xfrm>
-            <a:off x="10789920" y="3937299"/>
-            <a:ext cx="676656" cy="248502"/>
+            <a:off x="10789920" y="4130936"/>
+            <a:ext cx="676656" cy="270017"/>
           </a:xfrm>
           <a:prstGeom prst="rect">
             <a:avLst/>
@@ -21737,8 +21678,8 @@
         </p:nvSpPr>
         <p:spPr>
           <a:xfrm>
-            <a:off x="6208776" y="4185800"/>
-            <a:ext cx="310896" cy="248502"/>
+            <a:off x="6208776" y="4400953"/>
+            <a:ext cx="310896" cy="270017"/>
           </a:xfrm>
           <a:prstGeom prst="rect">
             <a:avLst/>
@@ -21776,8 +21717,8 @@
         </p:nvSpPr>
         <p:spPr>
           <a:xfrm>
-            <a:off x="6565392" y="4185800"/>
-            <a:ext cx="1783080" cy="248502"/>
+            <a:off x="6565392" y="4400953"/>
+            <a:ext cx="1783080" cy="270017"/>
           </a:xfrm>
           <a:prstGeom prst="rect">
             <a:avLst/>
@@ -21815,8 +21756,8 @@
         </p:nvSpPr>
         <p:spPr>
           <a:xfrm>
-            <a:off x="8421624" y="4241713"/>
-            <a:ext cx="48801" cy="136676"/>
+            <a:off x="8421624" y="4461707"/>
+            <a:ext cx="48801" cy="148509"/>
           </a:xfrm>
           <a:prstGeom prst="rect">
             <a:avLst/>
@@ -21835,8 +21776,8 @@
         </p:nvSpPr>
         <p:spPr>
           <a:xfrm>
-            <a:off x="9070848" y="4185800"/>
-            <a:ext cx="786384" cy="248502"/>
+            <a:off x="9070848" y="4400953"/>
+            <a:ext cx="786384" cy="270017"/>
           </a:xfrm>
           <a:prstGeom prst="rect">
             <a:avLst/>
@@ -21874,8 +21815,8 @@
         </p:nvSpPr>
         <p:spPr>
           <a:xfrm>
-            <a:off x="9857232" y="4185800"/>
-            <a:ext cx="932688" cy="248502"/>
+            <a:off x="9857232" y="4400953"/>
+            <a:ext cx="932688" cy="270017"/>
           </a:xfrm>
           <a:prstGeom prst="rect">
             <a:avLst/>
@@ -21913,8 +21854,8 @@
         </p:nvSpPr>
         <p:spPr>
           <a:xfrm>
-            <a:off x="10789920" y="4185800"/>
-            <a:ext cx="676656" cy="248502"/>
+            <a:off x="10789920" y="4400953"/>
+            <a:ext cx="676656" cy="270017"/>
           </a:xfrm>
           <a:prstGeom prst="rect">
             <a:avLst/>
@@ -21952,8 +21893,8 @@
         </p:nvSpPr>
         <p:spPr>
           <a:xfrm>
-            <a:off x="6208776" y="4434302"/>
-            <a:ext cx="310896" cy="248502"/>
+            <a:off x="6208776" y="4670970"/>
+            <a:ext cx="310896" cy="270017"/>
           </a:xfrm>
           <a:prstGeom prst="rect">
             <a:avLst/>
@@ -21991,8 +21932,8 @@
         </p:nvSpPr>
         <p:spPr>
           <a:xfrm>
-            <a:off x="6565392" y="4434302"/>
-            <a:ext cx="1783080" cy="248502"/>
+            <a:off x="6565392" y="4670970"/>
+            <a:ext cx="1783080" cy="270017"/>
           </a:xfrm>
           <a:prstGeom prst="rect">
             <a:avLst/>
@@ -22030,8 +21971,8 @@
         </p:nvSpPr>
         <p:spPr>
           <a:xfrm>
-            <a:off x="8421624" y="4490215"/>
-            <a:ext cx="48716" cy="136676"/>
+            <a:off x="8421624" y="4731724"/>
+            <a:ext cx="48716" cy="148509"/>
           </a:xfrm>
           <a:prstGeom prst="rect">
             <a:avLst/>
@@ -22050,8 +21991,8 @@
         </p:nvSpPr>
         <p:spPr>
           <a:xfrm>
-            <a:off x="9070848" y="4434302"/>
-            <a:ext cx="786384" cy="248502"/>
+            <a:off x="9070848" y="4670970"/>
+            <a:ext cx="786384" cy="270017"/>
           </a:xfrm>
           <a:prstGeom prst="rect">
             <a:avLst/>
@@ -22089,8 +22030,8 @@
         </p:nvSpPr>
         <p:spPr>
           <a:xfrm>
-            <a:off x="9857232" y="4434302"/>
-            <a:ext cx="932688" cy="248502"/>
+            <a:off x="9857232" y="4670970"/>
+            <a:ext cx="932688" cy="270017"/>
           </a:xfrm>
           <a:prstGeom prst="rect">
             <a:avLst/>
@@ -22128,8 +22069,8 @@
         </p:nvSpPr>
         <p:spPr>
           <a:xfrm>
-            <a:off x="10789920" y="4434302"/>
-            <a:ext cx="676656" cy="248502"/>
+            <a:off x="10789920" y="4670970"/>
+            <a:ext cx="676656" cy="270017"/>
           </a:xfrm>
           <a:prstGeom prst="rect">
             <a:avLst/>
@@ -22167,8 +22108,8 @@
         </p:nvSpPr>
         <p:spPr>
           <a:xfrm>
-            <a:off x="6208776" y="4682804"/>
-            <a:ext cx="310896" cy="248502"/>
+            <a:off x="6208776" y="4940987"/>
+            <a:ext cx="310896" cy="270017"/>
           </a:xfrm>
           <a:prstGeom prst="rect">
             <a:avLst/>
@@ -22206,8 +22147,8 @@
         </p:nvSpPr>
         <p:spPr>
           <a:xfrm>
-            <a:off x="6565392" y="4682804"/>
-            <a:ext cx="1783080" cy="248502"/>
+            <a:off x="6565392" y="4940987"/>
+            <a:ext cx="1783080" cy="270017"/>
           </a:xfrm>
           <a:prstGeom prst="rect">
             <a:avLst/>
@@ -22245,8 +22186,8 @@
         </p:nvSpPr>
         <p:spPr>
           <a:xfrm>
-            <a:off x="8421624" y="4738717"/>
-            <a:ext cx="42835" cy="136676"/>
+            <a:off x="8421624" y="5001741"/>
+            <a:ext cx="42835" cy="148509"/>
           </a:xfrm>
           <a:prstGeom prst="rect">
             <a:avLst/>
@@ -22265,8 +22206,8 @@
         </p:nvSpPr>
         <p:spPr>
           <a:xfrm>
-            <a:off x="9070848" y="4682804"/>
-            <a:ext cx="786384" cy="248502"/>
+            <a:off x="9070848" y="4940987"/>
+            <a:ext cx="786384" cy="270017"/>
           </a:xfrm>
           <a:prstGeom prst="rect">
             <a:avLst/>
@@ -22304,8 +22245,8 @@
         </p:nvSpPr>
         <p:spPr>
           <a:xfrm>
-            <a:off x="9857232" y="4682804"/>
-            <a:ext cx="932688" cy="248502"/>
+            <a:off x="9857232" y="4940987"/>
+            <a:ext cx="932688" cy="270017"/>
           </a:xfrm>
           <a:prstGeom prst="rect">
             <a:avLst/>
@@ -22343,8 +22284,8 @@
         </p:nvSpPr>
         <p:spPr>
           <a:xfrm>
-            <a:off x="10789920" y="4682804"/>
-            <a:ext cx="676656" cy="248502"/>
+            <a:off x="10789920" y="4940987"/>
+            <a:ext cx="676656" cy="270017"/>
           </a:xfrm>
           <a:prstGeom prst="rect">
             <a:avLst/>
@@ -22382,8 +22323,8 @@
         </p:nvSpPr>
         <p:spPr>
           <a:xfrm>
-            <a:off x="6208776" y="4931305"/>
-            <a:ext cx="310896" cy="248502"/>
+            <a:off x="6208776" y="5211004"/>
+            <a:ext cx="310896" cy="270017"/>
           </a:xfrm>
           <a:prstGeom prst="rect">
             <a:avLst/>
@@ -22421,8 +22362,8 @@
         </p:nvSpPr>
         <p:spPr>
           <a:xfrm>
-            <a:off x="6565392" y="4931305"/>
-            <a:ext cx="1783080" cy="248502"/>
+            <a:off x="6565392" y="5211004"/>
+            <a:ext cx="1783080" cy="270017"/>
           </a:xfrm>
           <a:prstGeom prst="rect">
             <a:avLst/>
@@ -22460,8 +22401,8 @@
         </p:nvSpPr>
         <p:spPr>
           <a:xfrm>
-            <a:off x="8421624" y="4987218"/>
-            <a:ext cx="39448" cy="136676"/>
+            <a:off x="8421624" y="5271758"/>
+            <a:ext cx="39448" cy="148509"/>
           </a:xfrm>
           <a:prstGeom prst="rect">
             <a:avLst/>
@@ -22480,8 +22421,8 @@
         </p:nvSpPr>
         <p:spPr>
           <a:xfrm>
-            <a:off x="9070848" y="4931305"/>
-            <a:ext cx="786384" cy="248502"/>
+            <a:off x="9070848" y="5211004"/>
+            <a:ext cx="786384" cy="270017"/>
           </a:xfrm>
           <a:prstGeom prst="rect">
             <a:avLst/>
@@ -22519,8 +22460,8 @@
         </p:nvSpPr>
         <p:spPr>
           <a:xfrm>
-            <a:off x="9857232" y="4931305"/>
-            <a:ext cx="932688" cy="248502"/>
+            <a:off x="9857232" y="5211004"/>
+            <a:ext cx="932688" cy="270017"/>
           </a:xfrm>
           <a:prstGeom prst="rect">
             <a:avLst/>
@@ -22558,8 +22499,8 @@
         </p:nvSpPr>
         <p:spPr>
           <a:xfrm>
-            <a:off x="10789920" y="4931305"/>
-            <a:ext cx="676656" cy="248502"/>
+            <a:off x="10789920" y="5211004"/>
+            <a:ext cx="676656" cy="270017"/>
           </a:xfrm>
           <a:prstGeom prst="rect">
             <a:avLst/>
@@ -22597,8 +22538,8 @@
         </p:nvSpPr>
         <p:spPr>
           <a:xfrm>
-            <a:off x="6208776" y="5179807"/>
-            <a:ext cx="310896" cy="248502"/>
+            <a:off x="6208776" y="5481021"/>
+            <a:ext cx="310896" cy="270017"/>
           </a:xfrm>
           <a:prstGeom prst="rect">
             <a:avLst/>
@@ -22636,8 +22577,8 @@
         </p:nvSpPr>
         <p:spPr>
           <a:xfrm>
-            <a:off x="6565392" y="5179807"/>
-            <a:ext cx="1783080" cy="248502"/>
+            <a:off x="6565392" y="5481021"/>
+            <a:ext cx="1783080" cy="270017"/>
           </a:xfrm>
           <a:prstGeom prst="rect">
             <a:avLst/>
@@ -22675,8 +22616,8 @@
         </p:nvSpPr>
         <p:spPr>
           <a:xfrm>
-            <a:off x="8421624" y="5235720"/>
-            <a:ext cx="32291" cy="136676"/>
+            <a:off x="8421624" y="5541775"/>
+            <a:ext cx="32291" cy="148509"/>
           </a:xfrm>
           <a:prstGeom prst="rect">
             <a:avLst/>
@@ -22695,8 +22636,8 @@
         </p:nvSpPr>
         <p:spPr>
           <a:xfrm>
-            <a:off x="9070848" y="5179807"/>
-            <a:ext cx="786384" cy="248502"/>
+            <a:off x="9070848" y="5481021"/>
+            <a:ext cx="786384" cy="270017"/>
           </a:xfrm>
           <a:prstGeom prst="rect">
             <a:avLst/>
@@ -22734,8 +22675,8 @@
         </p:nvSpPr>
         <p:spPr>
           <a:xfrm>
-            <a:off x="9857232" y="5179807"/>
-            <a:ext cx="932688" cy="248502"/>
+            <a:off x="9857232" y="5481021"/>
+            <a:ext cx="932688" cy="270017"/>
           </a:xfrm>
           <a:prstGeom prst="rect">
             <a:avLst/>
@@ -22773,8 +22714,8 @@
         </p:nvSpPr>
         <p:spPr>
           <a:xfrm>
-            <a:off x="10789920" y="5179807"/>
-            <a:ext cx="676656" cy="248502"/>
+            <a:off x="10789920" y="5481021"/>
+            <a:ext cx="676656" cy="270017"/>
           </a:xfrm>
           <a:prstGeom prst="rect">
             <a:avLst/>
@@ -22812,8 +22753,8 @@
         </p:nvSpPr>
         <p:spPr>
           <a:xfrm>
-            <a:off x="6208776" y="5428309"/>
-            <a:ext cx="310896" cy="248502"/>
+            <a:off x="6208776" y="5751038"/>
+            <a:ext cx="310896" cy="270017"/>
           </a:xfrm>
           <a:prstGeom prst="rect">
             <a:avLst/>
@@ -22851,8 +22792,8 @@
         </p:nvSpPr>
         <p:spPr>
           <a:xfrm>
-            <a:off x="6565392" y="5428309"/>
-            <a:ext cx="1783080" cy="248502"/>
+            <a:off x="6565392" y="5751038"/>
+            <a:ext cx="1783080" cy="270017"/>
           </a:xfrm>
           <a:prstGeom prst="rect">
             <a:avLst/>
@@ -22890,8 +22831,8 @@
         </p:nvSpPr>
         <p:spPr>
           <a:xfrm>
-            <a:off x="8421624" y="5484222"/>
-            <a:ext cx="18288" cy="136676"/>
+            <a:off x="8421624" y="5811792"/>
+            <a:ext cx="18288" cy="148509"/>
           </a:xfrm>
           <a:prstGeom prst="rect">
             <a:avLst/>
@@ -22910,8 +22851,8 @@
         </p:nvSpPr>
         <p:spPr>
           <a:xfrm>
-            <a:off x="9070848" y="5428309"/>
-            <a:ext cx="786384" cy="248502"/>
+            <a:off x="9070848" y="5751038"/>
+            <a:ext cx="786384" cy="270017"/>
           </a:xfrm>
           <a:prstGeom prst="rect">
             <a:avLst/>
@@ -22949,8 +22890,8 @@
         </p:nvSpPr>
         <p:spPr>
           <a:xfrm>
-            <a:off x="9857232" y="5428309"/>
-            <a:ext cx="932688" cy="248502"/>
+            <a:off x="9857232" y="5751038"/>
+            <a:ext cx="932688" cy="270017"/>
           </a:xfrm>
           <a:prstGeom prst="rect">
             <a:avLst/>
@@ -22988,8 +22929,8 @@
         </p:nvSpPr>
         <p:spPr>
           <a:xfrm>
-            <a:off x="10789920" y="5428309"/>
-            <a:ext cx="676656" cy="248502"/>
+            <a:off x="10789920" y="5751038"/>
+            <a:ext cx="676656" cy="270017"/>
           </a:xfrm>
           <a:prstGeom prst="rect">
             <a:avLst/>
@@ -23028,7 +22969,7 @@
         <p:spPr>
           <a:xfrm>
             <a:off x="6085332" y="1700784"/>
-            <a:ext cx="10973" cy="4224528"/>
+            <a:ext cx="10973" cy="4590288"/>
           </a:xfrm>
           <a:prstGeom prst="rect">
             <a:avLst/>
@@ -23038,65 +22979,6 @@
           </a:solidFill>
           <a:ln/>
         </p:spPr>
-      </p:sp>
-      <p:sp>
-        <p:nvSpPr>
-          <p:cNvPr id="211" name="Shape 209"/>
-          <p:cNvSpPr/>
-          <p:nvPr/>
-        </p:nvSpPr>
-        <p:spPr>
-          <a:xfrm>
-            <a:off x="457200" y="6126480"/>
-            <a:ext cx="11274552" cy="348996"/>
-          </a:xfrm>
-          <a:prstGeom prst="rect">
-            <a:avLst/>
-          </a:prstGeom>
-          <a:solidFill>
-            <a:srgbClr val="FBEBEA"/>
-          </a:solidFill>
-          <a:ln/>
-        </p:spPr>
-      </p:sp>
-      <p:sp>
-        <p:nvSpPr>
-          <p:cNvPr id="212" name="Text 210"/>
-          <p:cNvSpPr txBox="1"/>
-          <p:nvPr/>
-        </p:nvSpPr>
-        <p:spPr>
-          <a:xfrm>
-            <a:off x="658368" y="6144768"/>
-            <a:ext cx="10927080" cy="312420"/>
-          </a:xfrm>
-          <a:prstGeom prst="rect">
-            <a:avLst/>
-          </a:prstGeom>
-          <a:noFill/>
-          <a:ln/>
-        </p:spPr>
-        <p:txBody>
-          <a:bodyPr wrap="square" lIns="0" tIns="0" rIns="0" bIns="0" rtlCol="0" anchor="ctr"/>
-          <a:lstStyle/>
-          <a:p>
-            <a:pPr indent="0" marL="0">
-              <a:buNone/>
-            </a:pPr>
-            <a:r>
-              <a:rPr lang="en-US" sz="1450" b="1" dirty="0">
-                <a:solidFill>
-                  <a:srgbClr val="A82B26"/>
-                </a:solidFill>
-                <a:latin typeface="Inter" pitchFamily="34" charset="0"/>
-                <a:ea typeface="Inter" pitchFamily="34" charset="-122"/>
-                <a:cs typeface="Inter" pitchFamily="34" charset="-120"/>
-              </a:rPr>
-              <a:t>Six stores hold $647K a month, led by Cadillac at $158K. 6 stores at or above 85% still leave $537K a month.</a:t>
-            </a:r>
-            <a:endParaRPr lang="en-US" sz="1450" dirty="0"/>
-          </a:p>
-        </p:txBody>
       </p:sp>
     </p:spTree>
   </p:cSld>
@@ -23237,7 +23119,7 @@
         <p:spPr>
           <a:xfrm>
             <a:off x="457200" y="1207008"/>
-            <a:ext cx="11274552" cy="4782312"/>
+            <a:ext cx="11274552" cy="5148072"/>
           </a:xfrm>
           <a:prstGeom prst="rect">
             <a:avLst/>
@@ -23491,7 +23373,7 @@
         <p:spPr>
           <a:xfrm>
             <a:off x="658368" y="1700784"/>
-            <a:ext cx="310896" cy="248502"/>
+            <a:ext cx="310896" cy="270017"/>
           </a:xfrm>
           <a:prstGeom prst="rect">
             <a:avLst/>
@@ -23530,7 +23412,7 @@
         <p:spPr>
           <a:xfrm>
             <a:off x="1014984" y="1700784"/>
-            <a:ext cx="1783080" cy="248502"/>
+            <a:ext cx="1783080" cy="270017"/>
           </a:xfrm>
           <a:prstGeom prst="rect">
             <a:avLst/>
@@ -23568,8 +23450,8 @@
         </p:nvSpPr>
         <p:spPr>
           <a:xfrm>
-            <a:off x="2871216" y="1756697"/>
-            <a:ext cx="466344" cy="136676"/>
+            <a:off x="2871216" y="1761538"/>
+            <a:ext cx="466344" cy="148509"/>
           </a:xfrm>
           <a:prstGeom prst="rect">
             <a:avLst/>
@@ -23589,7 +23471,7 @@
         <p:spPr>
           <a:xfrm>
             <a:off x="3392424" y="1700784"/>
-            <a:ext cx="786384" cy="248502"/>
+            <a:ext cx="786384" cy="270017"/>
           </a:xfrm>
           <a:prstGeom prst="rect">
             <a:avLst/>
@@ -23628,7 +23510,7 @@
         <p:spPr>
           <a:xfrm>
             <a:off x="4178808" y="1700784"/>
-            <a:ext cx="868680" cy="248502"/>
+            <a:ext cx="868680" cy="270017"/>
           </a:xfrm>
           <a:prstGeom prst="rect">
             <a:avLst/>
@@ -23667,7 +23549,7 @@
         <p:spPr>
           <a:xfrm>
             <a:off x="5047488" y="1700784"/>
-            <a:ext cx="868680" cy="248502"/>
+            <a:ext cx="868680" cy="270017"/>
           </a:xfrm>
           <a:prstGeom prst="rect">
             <a:avLst/>
@@ -23705,8 +23587,8 @@
         </p:nvSpPr>
         <p:spPr>
           <a:xfrm>
-            <a:off x="658368" y="1949286"/>
-            <a:ext cx="310896" cy="248502"/>
+            <a:off x="658368" y="1970801"/>
+            <a:ext cx="310896" cy="270017"/>
           </a:xfrm>
           <a:prstGeom prst="rect">
             <a:avLst/>
@@ -23744,8 +23626,8 @@
         </p:nvSpPr>
         <p:spPr>
           <a:xfrm>
-            <a:off x="1014984" y="1949286"/>
-            <a:ext cx="1783080" cy="248502"/>
+            <a:off x="1014984" y="1970801"/>
+            <a:ext cx="1783080" cy="270017"/>
           </a:xfrm>
           <a:prstGeom prst="rect">
             <a:avLst/>
@@ -23783,8 +23665,8 @@
         </p:nvSpPr>
         <p:spPr>
           <a:xfrm>
-            <a:off x="2871216" y="2005199"/>
-            <a:ext cx="435113" cy="136676"/>
+            <a:off x="2871216" y="2031555"/>
+            <a:ext cx="435113" cy="148509"/>
           </a:xfrm>
           <a:prstGeom prst="rect">
             <a:avLst/>
@@ -23803,8 +23685,8 @@
         </p:nvSpPr>
         <p:spPr>
           <a:xfrm>
-            <a:off x="3392424" y="1949286"/>
-            <a:ext cx="786384" cy="248502"/>
+            <a:off x="3392424" y="1970801"/>
+            <a:ext cx="786384" cy="270017"/>
           </a:xfrm>
           <a:prstGeom prst="rect">
             <a:avLst/>
@@ -23842,8 +23724,8 @@
         </p:nvSpPr>
         <p:spPr>
           <a:xfrm>
-            <a:off x="4178808" y="1949286"/>
-            <a:ext cx="868680" cy="248502"/>
+            <a:off x="4178808" y="1970801"/>
+            <a:ext cx="868680" cy="270017"/>
           </a:xfrm>
           <a:prstGeom prst="rect">
             <a:avLst/>
@@ -23881,8 +23763,8 @@
         </p:nvSpPr>
         <p:spPr>
           <a:xfrm>
-            <a:off x="5047488" y="1949286"/>
-            <a:ext cx="868680" cy="248502"/>
+            <a:off x="5047488" y="1970801"/>
+            <a:ext cx="868680" cy="270017"/>
           </a:xfrm>
           <a:prstGeom prst="rect">
             <a:avLst/>
@@ -23920,8 +23802,8 @@
         </p:nvSpPr>
         <p:spPr>
           <a:xfrm>
-            <a:off x="658368" y="2197787"/>
-            <a:ext cx="310896" cy="248502"/>
+            <a:off x="658368" y="2240818"/>
+            <a:ext cx="310896" cy="270017"/>
           </a:xfrm>
           <a:prstGeom prst="rect">
             <a:avLst/>
@@ -23959,8 +23841,8 @@
         </p:nvSpPr>
         <p:spPr>
           <a:xfrm>
-            <a:off x="1014984" y="2197787"/>
-            <a:ext cx="1783080" cy="248502"/>
+            <a:off x="1014984" y="2240818"/>
+            <a:ext cx="1783080" cy="270017"/>
           </a:xfrm>
           <a:prstGeom prst="rect">
             <a:avLst/>
@@ -23998,8 +23880,8 @@
         </p:nvSpPr>
         <p:spPr>
           <a:xfrm>
-            <a:off x="2871216" y="2253700"/>
-            <a:ext cx="371948" cy="136676"/>
+            <a:off x="2871216" y="2301572"/>
+            <a:ext cx="371948" cy="148509"/>
           </a:xfrm>
           <a:prstGeom prst="rect">
             <a:avLst/>
@@ -24018,8 +23900,8 @@
         </p:nvSpPr>
         <p:spPr>
           <a:xfrm>
-            <a:off x="3392424" y="2197787"/>
-            <a:ext cx="786384" cy="248502"/>
+            <a:off x="3392424" y="2240818"/>
+            <a:ext cx="786384" cy="270017"/>
           </a:xfrm>
           <a:prstGeom prst="rect">
             <a:avLst/>
@@ -24057,8 +23939,8 @@
         </p:nvSpPr>
         <p:spPr>
           <a:xfrm>
-            <a:off x="4178808" y="2197787"/>
-            <a:ext cx="868680" cy="248502"/>
+            <a:off x="4178808" y="2240818"/>
+            <a:ext cx="868680" cy="270017"/>
           </a:xfrm>
           <a:prstGeom prst="rect">
             <a:avLst/>
@@ -24096,8 +23978,8 @@
         </p:nvSpPr>
         <p:spPr>
           <a:xfrm>
-            <a:off x="5047488" y="2197787"/>
-            <a:ext cx="868680" cy="248502"/>
+            <a:off x="5047488" y="2240818"/>
+            <a:ext cx="868680" cy="270017"/>
           </a:xfrm>
           <a:prstGeom prst="rect">
             <a:avLst/>
@@ -24135,8 +24017,8 @@
         </p:nvSpPr>
         <p:spPr>
           <a:xfrm>
-            <a:off x="658368" y="2446289"/>
-            <a:ext cx="310896" cy="248502"/>
+            <a:off x="658368" y="2510835"/>
+            <a:ext cx="310896" cy="270017"/>
           </a:xfrm>
           <a:prstGeom prst="rect">
             <a:avLst/>
@@ -24174,8 +24056,8 @@
         </p:nvSpPr>
         <p:spPr>
           <a:xfrm>
-            <a:off x="1014984" y="2446289"/>
-            <a:ext cx="1783080" cy="248502"/>
+            <a:off x="1014984" y="2510835"/>
+            <a:ext cx="1783080" cy="270017"/>
           </a:xfrm>
           <a:prstGeom prst="rect">
             <a:avLst/>
@@ -24213,8 +24095,8 @@
         </p:nvSpPr>
         <p:spPr>
           <a:xfrm>
-            <a:off x="2871216" y="2502202"/>
-            <a:ext cx="359385" cy="136676"/>
+            <a:off x="2871216" y="2571589"/>
+            <a:ext cx="359385" cy="148509"/>
           </a:xfrm>
           <a:prstGeom prst="rect">
             <a:avLst/>
@@ -24233,8 +24115,8 @@
         </p:nvSpPr>
         <p:spPr>
           <a:xfrm>
-            <a:off x="3392424" y="2446289"/>
-            <a:ext cx="786384" cy="248502"/>
+            <a:off x="3392424" y="2510835"/>
+            <a:ext cx="786384" cy="270017"/>
           </a:xfrm>
           <a:prstGeom prst="rect">
             <a:avLst/>
@@ -24272,8 +24154,8 @@
         </p:nvSpPr>
         <p:spPr>
           <a:xfrm>
-            <a:off x="4178808" y="2446289"/>
-            <a:ext cx="868680" cy="248502"/>
+            <a:off x="4178808" y="2510835"/>
+            <a:ext cx="868680" cy="270017"/>
           </a:xfrm>
           <a:prstGeom prst="rect">
             <a:avLst/>
@@ -24311,8 +24193,8 @@
         </p:nvSpPr>
         <p:spPr>
           <a:xfrm>
-            <a:off x="5047488" y="2446289"/>
-            <a:ext cx="868680" cy="248502"/>
+            <a:off x="5047488" y="2510835"/>
+            <a:ext cx="868680" cy="270017"/>
           </a:xfrm>
           <a:prstGeom prst="rect">
             <a:avLst/>
@@ -24350,8 +24232,8 @@
         </p:nvSpPr>
         <p:spPr>
           <a:xfrm>
-            <a:off x="658368" y="2694791"/>
-            <a:ext cx="310896" cy="248502"/>
+            <a:off x="658368" y="2780852"/>
+            <a:ext cx="310896" cy="270017"/>
           </a:xfrm>
           <a:prstGeom prst="rect">
             <a:avLst/>
@@ -24389,8 +24271,8 @@
         </p:nvSpPr>
         <p:spPr>
           <a:xfrm>
-            <a:off x="1014984" y="2694791"/>
-            <a:ext cx="1783080" cy="248502"/>
+            <a:off x="1014984" y="2780852"/>
+            <a:ext cx="1783080" cy="270017"/>
           </a:xfrm>
           <a:prstGeom prst="rect">
             <a:avLst/>
@@ -24428,8 +24310,8 @@
         </p:nvSpPr>
         <p:spPr>
           <a:xfrm>
-            <a:off x="2871216" y="2750703"/>
-            <a:ext cx="339754" cy="136676"/>
+            <a:off x="2871216" y="2841606"/>
+            <a:ext cx="339754" cy="148509"/>
           </a:xfrm>
           <a:prstGeom prst="rect">
             <a:avLst/>
@@ -24448,8 +24330,8 @@
         </p:nvSpPr>
         <p:spPr>
           <a:xfrm>
-            <a:off x="3392424" y="2694791"/>
-            <a:ext cx="786384" cy="248502"/>
+            <a:off x="3392424" y="2780852"/>
+            <a:ext cx="786384" cy="270017"/>
           </a:xfrm>
           <a:prstGeom prst="rect">
             <a:avLst/>
@@ -24487,8 +24369,8 @@
         </p:nvSpPr>
         <p:spPr>
           <a:xfrm>
-            <a:off x="4178808" y="2694791"/>
-            <a:ext cx="868680" cy="248502"/>
+            <a:off x="4178808" y="2780852"/>
+            <a:ext cx="868680" cy="270017"/>
           </a:xfrm>
           <a:prstGeom prst="rect">
             <a:avLst/>
@@ -24526,8 +24408,8 @@
         </p:nvSpPr>
         <p:spPr>
           <a:xfrm>
-            <a:off x="5047488" y="2694791"/>
-            <a:ext cx="868680" cy="248502"/>
+            <a:off x="5047488" y="2780852"/>
+            <a:ext cx="868680" cy="270017"/>
           </a:xfrm>
           <a:prstGeom prst="rect">
             <a:avLst/>
@@ -24565,8 +24447,8 @@
         </p:nvSpPr>
         <p:spPr>
           <a:xfrm>
-            <a:off x="658368" y="2943292"/>
-            <a:ext cx="310896" cy="248502"/>
+            <a:off x="658368" y="3050869"/>
+            <a:ext cx="310896" cy="270017"/>
           </a:xfrm>
           <a:prstGeom prst="rect">
             <a:avLst/>
@@ -24604,8 +24486,8 @@
         </p:nvSpPr>
         <p:spPr>
           <a:xfrm>
-            <a:off x="1014984" y="2943292"/>
-            <a:ext cx="1783080" cy="248502"/>
+            <a:off x="1014984" y="3050869"/>
+            <a:ext cx="1783080" cy="270017"/>
           </a:xfrm>
           <a:prstGeom prst="rect">
             <a:avLst/>
@@ -24643,8 +24525,8 @@
         </p:nvSpPr>
         <p:spPr>
           <a:xfrm>
-            <a:off x="2871216" y="2999205"/>
-            <a:ext cx="292285" cy="136676"/>
+            <a:off x="2871216" y="3111623"/>
+            <a:ext cx="292285" cy="148509"/>
           </a:xfrm>
           <a:prstGeom prst="rect">
             <a:avLst/>
@@ -24663,8 +24545,8 @@
         </p:nvSpPr>
         <p:spPr>
           <a:xfrm>
-            <a:off x="3392424" y="2943292"/>
-            <a:ext cx="786384" cy="248502"/>
+            <a:off x="3392424" y="3050869"/>
+            <a:ext cx="786384" cy="270017"/>
           </a:xfrm>
           <a:prstGeom prst="rect">
             <a:avLst/>
@@ -24702,8 +24584,8 @@
         </p:nvSpPr>
         <p:spPr>
           <a:xfrm>
-            <a:off x="4178808" y="2943292"/>
-            <a:ext cx="868680" cy="248502"/>
+            <a:off x="4178808" y="3050869"/>
+            <a:ext cx="868680" cy="270017"/>
           </a:xfrm>
           <a:prstGeom prst="rect">
             <a:avLst/>
@@ -24741,8 +24623,8 @@
         </p:nvSpPr>
         <p:spPr>
           <a:xfrm>
-            <a:off x="5047488" y="2943292"/>
-            <a:ext cx="868680" cy="248502"/>
+            <a:off x="5047488" y="3050869"/>
+            <a:ext cx="868680" cy="270017"/>
           </a:xfrm>
           <a:prstGeom prst="rect">
             <a:avLst/>
@@ -24780,8 +24662,8 @@
         </p:nvSpPr>
         <p:spPr>
           <a:xfrm>
-            <a:off x="658368" y="3191794"/>
-            <a:ext cx="310896" cy="248502"/>
+            <a:off x="658368" y="3320886"/>
+            <a:ext cx="310896" cy="270017"/>
           </a:xfrm>
           <a:prstGeom prst="rect">
             <a:avLst/>
@@ -24819,8 +24701,8 @@
         </p:nvSpPr>
         <p:spPr>
           <a:xfrm>
-            <a:off x="1014984" y="3191794"/>
-            <a:ext cx="1783080" cy="248502"/>
+            <a:off x="1014984" y="3320886"/>
+            <a:ext cx="1783080" cy="270017"/>
           </a:xfrm>
           <a:prstGeom prst="rect">
             <a:avLst/>
@@ -24858,8 +24740,8 @@
         </p:nvSpPr>
         <p:spPr>
           <a:xfrm>
-            <a:off x="2871216" y="3247707"/>
-            <a:ext cx="286413" cy="136676"/>
+            <a:off x="2871216" y="3381639"/>
+            <a:ext cx="286413" cy="148509"/>
           </a:xfrm>
           <a:prstGeom prst="rect">
             <a:avLst/>
@@ -24878,8 +24760,8 @@
         </p:nvSpPr>
         <p:spPr>
           <a:xfrm>
-            <a:off x="3392424" y="3191794"/>
-            <a:ext cx="786384" cy="248502"/>
+            <a:off x="3392424" y="3320886"/>
+            <a:ext cx="786384" cy="270017"/>
           </a:xfrm>
           <a:prstGeom prst="rect">
             <a:avLst/>
@@ -24917,8 +24799,8 @@
         </p:nvSpPr>
         <p:spPr>
           <a:xfrm>
-            <a:off x="4178808" y="3191794"/>
-            <a:ext cx="868680" cy="248502"/>
+            <a:off x="4178808" y="3320886"/>
+            <a:ext cx="868680" cy="270017"/>
           </a:xfrm>
           <a:prstGeom prst="rect">
             <a:avLst/>
@@ -24956,8 +24838,8 @@
         </p:nvSpPr>
         <p:spPr>
           <a:xfrm>
-            <a:off x="5047488" y="3191794"/>
-            <a:ext cx="868680" cy="248502"/>
+            <a:off x="5047488" y="3320886"/>
+            <a:ext cx="868680" cy="270017"/>
           </a:xfrm>
           <a:prstGeom prst="rect">
             <a:avLst/>
@@ -24995,8 +24877,8 @@
         </p:nvSpPr>
         <p:spPr>
           <a:xfrm>
-            <a:off x="658368" y="3440296"/>
-            <a:ext cx="310896" cy="248502"/>
+            <a:off x="658368" y="3590903"/>
+            <a:ext cx="310896" cy="270017"/>
           </a:xfrm>
           <a:prstGeom prst="rect">
             <a:avLst/>
@@ -25034,8 +24916,8 @@
         </p:nvSpPr>
         <p:spPr>
           <a:xfrm>
-            <a:off x="1014984" y="3440296"/>
-            <a:ext cx="1783080" cy="248502"/>
+            <a:off x="1014984" y="3590903"/>
+            <a:ext cx="1783080" cy="270017"/>
           </a:xfrm>
           <a:prstGeom prst="rect">
             <a:avLst/>
@@ -25073,8 +24955,8 @@
         </p:nvSpPr>
         <p:spPr>
           <a:xfrm>
-            <a:off x="2871216" y="3496208"/>
-            <a:ext cx="277524" cy="136676"/>
+            <a:off x="2871216" y="3651656"/>
+            <a:ext cx="277524" cy="148509"/>
           </a:xfrm>
           <a:prstGeom prst="rect">
             <a:avLst/>
@@ -25093,8 +24975,8 @@
         </p:nvSpPr>
         <p:spPr>
           <a:xfrm>
-            <a:off x="3392424" y="3440296"/>
-            <a:ext cx="786384" cy="248502"/>
+            <a:off x="3392424" y="3590903"/>
+            <a:ext cx="786384" cy="270017"/>
           </a:xfrm>
           <a:prstGeom prst="rect">
             <a:avLst/>
@@ -25132,8 +25014,8 @@
         </p:nvSpPr>
         <p:spPr>
           <a:xfrm>
-            <a:off x="4178808" y="3440296"/>
-            <a:ext cx="868680" cy="248502"/>
+            <a:off x="4178808" y="3590903"/>
+            <a:ext cx="868680" cy="270017"/>
           </a:xfrm>
           <a:prstGeom prst="rect">
             <a:avLst/>
@@ -25171,8 +25053,8 @@
         </p:nvSpPr>
         <p:spPr>
           <a:xfrm>
-            <a:off x="5047488" y="3440296"/>
-            <a:ext cx="868680" cy="248502"/>
+            <a:off x="5047488" y="3590903"/>
+            <a:ext cx="868680" cy="270017"/>
           </a:xfrm>
           <a:prstGeom prst="rect">
             <a:avLst/>
@@ -25210,8 +25092,8 @@
         </p:nvSpPr>
         <p:spPr>
           <a:xfrm>
-            <a:off x="658368" y="3688797"/>
-            <a:ext cx="310896" cy="248502"/>
+            <a:off x="658368" y="3860920"/>
+            <a:ext cx="310896" cy="270017"/>
           </a:xfrm>
           <a:prstGeom prst="rect">
             <a:avLst/>
@@ -25249,8 +25131,8 @@
         </p:nvSpPr>
         <p:spPr>
           <a:xfrm>
-            <a:off x="1014984" y="3688797"/>
-            <a:ext cx="1783080" cy="248502"/>
+            <a:off x="1014984" y="3860920"/>
+            <a:ext cx="1783080" cy="270017"/>
           </a:xfrm>
           <a:prstGeom prst="rect">
             <a:avLst/>
@@ -25288,8 +25170,8 @@
         </p:nvSpPr>
         <p:spPr>
           <a:xfrm>
-            <a:off x="2871216" y="3744710"/>
-            <a:ext cx="270873" cy="136676"/>
+            <a:off x="2871216" y="3921673"/>
+            <a:ext cx="270873" cy="148509"/>
           </a:xfrm>
           <a:prstGeom prst="rect">
             <a:avLst/>
@@ -25308,8 +25190,8 @@
         </p:nvSpPr>
         <p:spPr>
           <a:xfrm>
-            <a:off x="3392424" y="3688797"/>
-            <a:ext cx="786384" cy="248502"/>
+            <a:off x="3392424" y="3860920"/>
+            <a:ext cx="786384" cy="270017"/>
           </a:xfrm>
           <a:prstGeom prst="rect">
             <a:avLst/>
@@ -25347,8 +25229,8 @@
         </p:nvSpPr>
         <p:spPr>
           <a:xfrm>
-            <a:off x="4178808" y="3688797"/>
-            <a:ext cx="868680" cy="248502"/>
+            <a:off x="4178808" y="3860920"/>
+            <a:ext cx="868680" cy="270017"/>
           </a:xfrm>
           <a:prstGeom prst="rect">
             <a:avLst/>
@@ -25386,8 +25268,8 @@
         </p:nvSpPr>
         <p:spPr>
           <a:xfrm>
-            <a:off x="5047488" y="3688797"/>
-            <a:ext cx="868680" cy="248502"/>
+            <a:off x="5047488" y="3860920"/>
+            <a:ext cx="868680" cy="270017"/>
           </a:xfrm>
           <a:prstGeom prst="rect">
             <a:avLst/>
@@ -25425,8 +25307,8 @@
         </p:nvSpPr>
         <p:spPr>
           <a:xfrm>
-            <a:off x="658368" y="3937299"/>
-            <a:ext cx="310896" cy="248502"/>
+            <a:off x="658368" y="4130936"/>
+            <a:ext cx="310896" cy="270017"/>
           </a:xfrm>
           <a:prstGeom prst="rect">
             <a:avLst/>
@@ -25464,8 +25346,8 @@
         </p:nvSpPr>
         <p:spPr>
           <a:xfrm>
-            <a:off x="1014984" y="3937299"/>
-            <a:ext cx="1783080" cy="248502"/>
+            <a:off x="1014984" y="4130936"/>
+            <a:ext cx="1783080" cy="270017"/>
           </a:xfrm>
           <a:prstGeom prst="rect">
             <a:avLst/>
@@ -25503,8 +25385,8 @@
         </p:nvSpPr>
         <p:spPr>
           <a:xfrm>
-            <a:off x="2871216" y="3993212"/>
-            <a:ext cx="217136" cy="136676"/>
+            <a:off x="2871216" y="4191690"/>
+            <a:ext cx="217136" cy="148509"/>
           </a:xfrm>
           <a:prstGeom prst="rect">
             <a:avLst/>
@@ -25523,8 +25405,8 @@
         </p:nvSpPr>
         <p:spPr>
           <a:xfrm>
-            <a:off x="3392424" y="3937299"/>
-            <a:ext cx="786384" cy="248502"/>
+            <a:off x="3392424" y="4130936"/>
+            <a:ext cx="786384" cy="270017"/>
           </a:xfrm>
           <a:prstGeom prst="rect">
             <a:avLst/>
@@ -25562,8 +25444,8 @@
         </p:nvSpPr>
         <p:spPr>
           <a:xfrm>
-            <a:off x="4178808" y="3937299"/>
-            <a:ext cx="868680" cy="248502"/>
+            <a:off x="4178808" y="4130936"/>
+            <a:ext cx="868680" cy="270017"/>
           </a:xfrm>
           <a:prstGeom prst="rect">
             <a:avLst/>
@@ -25601,8 +25483,8 @@
         </p:nvSpPr>
         <p:spPr>
           <a:xfrm>
-            <a:off x="5047488" y="3937299"/>
-            <a:ext cx="868680" cy="248502"/>
+            <a:off x="5047488" y="4130936"/>
+            <a:ext cx="868680" cy="270017"/>
           </a:xfrm>
           <a:prstGeom prst="rect">
             <a:avLst/>
@@ -25640,8 +25522,8 @@
         </p:nvSpPr>
         <p:spPr>
           <a:xfrm>
-            <a:off x="658368" y="4185800"/>
-            <a:ext cx="310896" cy="248502"/>
+            <a:off x="658368" y="4400953"/>
+            <a:ext cx="310896" cy="270017"/>
           </a:xfrm>
           <a:prstGeom prst="rect">
             <a:avLst/>
@@ -25679,8 +25561,8 @@
         </p:nvSpPr>
         <p:spPr>
           <a:xfrm>
-            <a:off x="1014984" y="4185800"/>
-            <a:ext cx="1783080" cy="248502"/>
+            <a:off x="1014984" y="4400953"/>
+            <a:ext cx="1783080" cy="270017"/>
           </a:xfrm>
           <a:prstGeom prst="rect">
             <a:avLst/>
@@ -25718,8 +25600,8 @@
         </p:nvSpPr>
         <p:spPr>
           <a:xfrm>
-            <a:off x="2871216" y="4241713"/>
-            <a:ext cx="210283" cy="136676"/>
+            <a:off x="2871216" y="4461707"/>
+            <a:ext cx="210283" cy="148509"/>
           </a:xfrm>
           <a:prstGeom prst="rect">
             <a:avLst/>
@@ -25738,8 +25620,8 @@
         </p:nvSpPr>
         <p:spPr>
           <a:xfrm>
-            <a:off x="3392424" y="4185800"/>
-            <a:ext cx="786384" cy="248502"/>
+            <a:off x="3392424" y="4400953"/>
+            <a:ext cx="786384" cy="270017"/>
           </a:xfrm>
           <a:prstGeom prst="rect">
             <a:avLst/>
@@ -25777,8 +25659,8 @@
         </p:nvSpPr>
         <p:spPr>
           <a:xfrm>
-            <a:off x="4178808" y="4185800"/>
-            <a:ext cx="868680" cy="248502"/>
+            <a:off x="4178808" y="4400953"/>
+            <a:ext cx="868680" cy="270017"/>
           </a:xfrm>
           <a:prstGeom prst="rect">
             <a:avLst/>
@@ -25816,8 +25698,8 @@
         </p:nvSpPr>
         <p:spPr>
           <a:xfrm>
-            <a:off x="5047488" y="4185800"/>
-            <a:ext cx="868680" cy="248502"/>
+            <a:off x="5047488" y="4400953"/>
+            <a:ext cx="868680" cy="270017"/>
           </a:xfrm>
           <a:prstGeom prst="rect">
             <a:avLst/>
@@ -25855,8 +25737,8 @@
         </p:nvSpPr>
         <p:spPr>
           <a:xfrm>
-            <a:off x="658368" y="4434302"/>
-            <a:ext cx="310896" cy="248502"/>
+            <a:off x="658368" y="4670970"/>
+            <a:ext cx="310896" cy="270017"/>
           </a:xfrm>
           <a:prstGeom prst="rect">
             <a:avLst/>
@@ -25894,8 +25776,8 @@
         </p:nvSpPr>
         <p:spPr>
           <a:xfrm>
-            <a:off x="1014984" y="4434302"/>
-            <a:ext cx="1783080" cy="248502"/>
+            <a:off x="1014984" y="4670970"/>
+            <a:ext cx="1783080" cy="270017"/>
           </a:xfrm>
           <a:prstGeom prst="rect">
             <a:avLst/>
@@ -25933,8 +25815,8 @@
         </p:nvSpPr>
         <p:spPr>
           <a:xfrm>
-            <a:off x="2871216" y="4490215"/>
-            <a:ext cx="199373" cy="136676"/>
+            <a:off x="2871216" y="4731724"/>
+            <a:ext cx="199373" cy="148509"/>
           </a:xfrm>
           <a:prstGeom prst="rect">
             <a:avLst/>
@@ -25953,8 +25835,8 @@
         </p:nvSpPr>
         <p:spPr>
           <a:xfrm>
-            <a:off x="3392424" y="4434302"/>
-            <a:ext cx="786384" cy="248502"/>
+            <a:off x="3392424" y="4670970"/>
+            <a:ext cx="786384" cy="270017"/>
           </a:xfrm>
           <a:prstGeom prst="rect">
             <a:avLst/>
@@ -25992,8 +25874,8 @@
         </p:nvSpPr>
         <p:spPr>
           <a:xfrm>
-            <a:off x="4178808" y="4434302"/>
-            <a:ext cx="868680" cy="248502"/>
+            <a:off x="4178808" y="4670970"/>
+            <a:ext cx="868680" cy="270017"/>
           </a:xfrm>
           <a:prstGeom prst="rect">
             <a:avLst/>
@@ -26031,8 +25913,8 @@
         </p:nvSpPr>
         <p:spPr>
           <a:xfrm>
-            <a:off x="5047488" y="4434302"/>
-            <a:ext cx="868680" cy="248502"/>
+            <a:off x="5047488" y="4670970"/>
+            <a:ext cx="868680" cy="270017"/>
           </a:xfrm>
           <a:prstGeom prst="rect">
             <a:avLst/>
@@ -26070,8 +25952,8 @@
         </p:nvSpPr>
         <p:spPr>
           <a:xfrm>
-            <a:off x="658368" y="4682804"/>
-            <a:ext cx="310896" cy="248502"/>
+            <a:off x="658368" y="4940987"/>
+            <a:ext cx="310896" cy="270017"/>
           </a:xfrm>
           <a:prstGeom prst="rect">
             <a:avLst/>
@@ -26109,8 +25991,8 @@
         </p:nvSpPr>
         <p:spPr>
           <a:xfrm>
-            <a:off x="1014984" y="4682804"/>
-            <a:ext cx="1783080" cy="248502"/>
+            <a:off x="1014984" y="4940987"/>
+            <a:ext cx="1783080" cy="270017"/>
           </a:xfrm>
           <a:prstGeom prst="rect">
             <a:avLst/>
@@ -26148,8 +26030,8 @@
         </p:nvSpPr>
         <p:spPr>
           <a:xfrm>
-            <a:off x="2871216" y="4738717"/>
-            <a:ext cx="197385" cy="136676"/>
+            <a:off x="2871216" y="5001741"/>
+            <a:ext cx="197385" cy="148509"/>
           </a:xfrm>
           <a:prstGeom prst="rect">
             <a:avLst/>
@@ -26168,8 +26050,8 @@
         </p:nvSpPr>
         <p:spPr>
           <a:xfrm>
-            <a:off x="3392424" y="4682804"/>
-            <a:ext cx="786384" cy="248502"/>
+            <a:off x="3392424" y="4940987"/>
+            <a:ext cx="786384" cy="270017"/>
           </a:xfrm>
           <a:prstGeom prst="rect">
             <a:avLst/>
@@ -26207,8 +26089,8 @@
         </p:nvSpPr>
         <p:spPr>
           <a:xfrm>
-            <a:off x="4178808" y="4682804"/>
-            <a:ext cx="868680" cy="248502"/>
+            <a:off x="4178808" y="4940987"/>
+            <a:ext cx="868680" cy="270017"/>
           </a:xfrm>
           <a:prstGeom prst="rect">
             <a:avLst/>
@@ -26246,8 +26128,8 @@
         </p:nvSpPr>
         <p:spPr>
           <a:xfrm>
-            <a:off x="5047488" y="4682804"/>
-            <a:ext cx="868680" cy="248502"/>
+            <a:off x="5047488" y="4940987"/>
+            <a:ext cx="868680" cy="270017"/>
           </a:xfrm>
           <a:prstGeom prst="rect">
             <a:avLst/>
@@ -26285,8 +26167,8 @@
         </p:nvSpPr>
         <p:spPr>
           <a:xfrm>
-            <a:off x="658368" y="4931305"/>
-            <a:ext cx="310896" cy="248502"/>
+            <a:off x="658368" y="5211004"/>
+            <a:ext cx="310896" cy="270017"/>
           </a:xfrm>
           <a:prstGeom prst="rect">
             <a:avLst/>
@@ -26324,8 +26206,8 @@
         </p:nvSpPr>
         <p:spPr>
           <a:xfrm>
-            <a:off x="1014984" y="4931305"/>
-            <a:ext cx="1783080" cy="248502"/>
+            <a:off x="1014984" y="5211004"/>
+            <a:ext cx="1783080" cy="270017"/>
           </a:xfrm>
           <a:prstGeom prst="rect">
             <a:avLst/>
@@ -26363,8 +26245,8 @@
         </p:nvSpPr>
         <p:spPr>
           <a:xfrm>
-            <a:off x="2871216" y="4987218"/>
-            <a:ext cx="169024" cy="136676"/>
+            <a:off x="2871216" y="5271758"/>
+            <a:ext cx="169024" cy="148509"/>
           </a:xfrm>
           <a:prstGeom prst="rect">
             <a:avLst/>
@@ -26383,8 +26265,8 @@
         </p:nvSpPr>
         <p:spPr>
           <a:xfrm>
-            <a:off x="3392424" y="4931305"/>
-            <a:ext cx="786384" cy="248502"/>
+            <a:off x="3392424" y="5211004"/>
+            <a:ext cx="786384" cy="270017"/>
           </a:xfrm>
           <a:prstGeom prst="rect">
             <a:avLst/>
@@ -26422,8 +26304,8 @@
         </p:nvSpPr>
         <p:spPr>
           <a:xfrm>
-            <a:off x="4178808" y="4931305"/>
-            <a:ext cx="868680" cy="248502"/>
+            <a:off x="4178808" y="5211004"/>
+            <a:ext cx="868680" cy="270017"/>
           </a:xfrm>
           <a:prstGeom prst="rect">
             <a:avLst/>
@@ -26461,8 +26343,8 @@
         </p:nvSpPr>
         <p:spPr>
           <a:xfrm>
-            <a:off x="5047488" y="4931305"/>
-            <a:ext cx="868680" cy="248502"/>
+            <a:off x="5047488" y="5211004"/>
+            <a:ext cx="868680" cy="270017"/>
           </a:xfrm>
           <a:prstGeom prst="rect">
             <a:avLst/>
@@ -26500,8 +26382,8 @@
         </p:nvSpPr>
         <p:spPr>
           <a:xfrm>
-            <a:off x="658368" y="5179807"/>
-            <a:ext cx="310896" cy="248502"/>
+            <a:off x="658368" y="5481021"/>
+            <a:ext cx="310896" cy="270017"/>
           </a:xfrm>
           <a:prstGeom prst="rect">
             <a:avLst/>
@@ -26539,8 +26421,8 @@
         </p:nvSpPr>
         <p:spPr>
           <a:xfrm>
-            <a:off x="1014984" y="5179807"/>
-            <a:ext cx="1783080" cy="248502"/>
+            <a:off x="1014984" y="5481021"/>
+            <a:ext cx="1783080" cy="270017"/>
           </a:xfrm>
           <a:prstGeom prst="rect">
             <a:avLst/>
@@ -26578,8 +26460,8 @@
         </p:nvSpPr>
         <p:spPr>
           <a:xfrm>
-            <a:off x="2871216" y="5235720"/>
-            <a:ext cx="131586" cy="136676"/>
+            <a:off x="2871216" y="5541775"/>
+            <a:ext cx="131586" cy="148509"/>
           </a:xfrm>
           <a:prstGeom prst="rect">
             <a:avLst/>
@@ -26598,8 +26480,8 @@
         </p:nvSpPr>
         <p:spPr>
           <a:xfrm>
-            <a:off x="3392424" y="5179807"/>
-            <a:ext cx="786384" cy="248502"/>
+            <a:off x="3392424" y="5481021"/>
+            <a:ext cx="786384" cy="270017"/>
           </a:xfrm>
           <a:prstGeom prst="rect">
             <a:avLst/>
@@ -26637,8 +26519,8 @@
         </p:nvSpPr>
         <p:spPr>
           <a:xfrm>
-            <a:off x="4178808" y="5179807"/>
-            <a:ext cx="868680" cy="248502"/>
+            <a:off x="4178808" y="5481021"/>
+            <a:ext cx="868680" cy="270017"/>
           </a:xfrm>
           <a:prstGeom prst="rect">
             <a:avLst/>
@@ -26676,8 +26558,8 @@
         </p:nvSpPr>
         <p:spPr>
           <a:xfrm>
-            <a:off x="5047488" y="5179807"/>
-            <a:ext cx="868680" cy="248502"/>
+            <a:off x="5047488" y="5481021"/>
+            <a:ext cx="868680" cy="270017"/>
           </a:xfrm>
           <a:prstGeom prst="rect">
             <a:avLst/>
@@ -26715,8 +26597,8 @@
         </p:nvSpPr>
         <p:spPr>
           <a:xfrm>
-            <a:off x="658368" y="5428309"/>
-            <a:ext cx="310896" cy="248502"/>
+            <a:off x="658368" y="5751038"/>
+            <a:ext cx="310896" cy="270017"/>
           </a:xfrm>
           <a:prstGeom prst="rect">
             <a:avLst/>
@@ -26754,8 +26636,8 @@
         </p:nvSpPr>
         <p:spPr>
           <a:xfrm>
-            <a:off x="1014984" y="5428309"/>
-            <a:ext cx="1783080" cy="248502"/>
+            <a:off x="1014984" y="5751038"/>
+            <a:ext cx="1783080" cy="270017"/>
           </a:xfrm>
           <a:prstGeom prst="rect">
             <a:avLst/>
@@ -26793,8 +26675,8 @@
         </p:nvSpPr>
         <p:spPr>
           <a:xfrm>
-            <a:off x="2871216" y="5484222"/>
-            <a:ext cx="120839" cy="136676"/>
+            <a:off x="2871216" y="5811792"/>
+            <a:ext cx="120839" cy="148509"/>
           </a:xfrm>
           <a:prstGeom prst="rect">
             <a:avLst/>
@@ -26813,8 +26695,8 @@
         </p:nvSpPr>
         <p:spPr>
           <a:xfrm>
-            <a:off x="3392424" y="5428309"/>
-            <a:ext cx="786384" cy="248502"/>
+            <a:off x="3392424" y="5751038"/>
+            <a:ext cx="786384" cy="270017"/>
           </a:xfrm>
           <a:prstGeom prst="rect">
             <a:avLst/>
@@ -26852,8 +26734,8 @@
         </p:nvSpPr>
         <p:spPr>
           <a:xfrm>
-            <a:off x="4178808" y="5428309"/>
-            <a:ext cx="868680" cy="248502"/>
+            <a:off x="4178808" y="5751038"/>
+            <a:ext cx="868680" cy="270017"/>
           </a:xfrm>
           <a:prstGeom prst="rect">
             <a:avLst/>
@@ -26891,8 +26773,8 @@
         </p:nvSpPr>
         <p:spPr>
           <a:xfrm>
-            <a:off x="5047488" y="5428309"/>
-            <a:ext cx="868680" cy="248502"/>
+            <a:off x="5047488" y="5751038"/>
+            <a:ext cx="868680" cy="270017"/>
           </a:xfrm>
           <a:prstGeom prst="rect">
             <a:avLst/>
@@ -26930,8 +26812,8 @@
         </p:nvSpPr>
         <p:spPr>
           <a:xfrm>
-            <a:off x="658368" y="5676810"/>
-            <a:ext cx="310896" cy="248502"/>
+            <a:off x="658368" y="6021055"/>
+            <a:ext cx="310896" cy="270017"/>
           </a:xfrm>
           <a:prstGeom prst="rect">
             <a:avLst/>
@@ -26969,8 +26851,8 @@
         </p:nvSpPr>
         <p:spPr>
           <a:xfrm>
-            <a:off x="1014984" y="5676810"/>
-            <a:ext cx="1783080" cy="248502"/>
+            <a:off x="1014984" y="6021055"/>
+            <a:ext cx="1783080" cy="270017"/>
           </a:xfrm>
           <a:prstGeom prst="rect">
             <a:avLst/>
@@ -27008,8 +26890,8 @@
         </p:nvSpPr>
         <p:spPr>
           <a:xfrm>
-            <a:off x="2871216" y="5732723"/>
-            <a:ext cx="116857" cy="136676"/>
+            <a:off x="2871216" y="6081809"/>
+            <a:ext cx="116857" cy="148509"/>
           </a:xfrm>
           <a:prstGeom prst="rect">
             <a:avLst/>
@@ -27028,8 +26910,8 @@
         </p:nvSpPr>
         <p:spPr>
           <a:xfrm>
-            <a:off x="3392424" y="5676810"/>
-            <a:ext cx="786384" cy="248502"/>
+            <a:off x="3392424" y="6021055"/>
+            <a:ext cx="786384" cy="270017"/>
           </a:xfrm>
           <a:prstGeom prst="rect">
             <a:avLst/>
@@ -27067,8 +26949,8 @@
         </p:nvSpPr>
         <p:spPr>
           <a:xfrm>
-            <a:off x="4178808" y="5676810"/>
-            <a:ext cx="868680" cy="248502"/>
+            <a:off x="4178808" y="6021055"/>
+            <a:ext cx="868680" cy="270017"/>
           </a:xfrm>
           <a:prstGeom prst="rect">
             <a:avLst/>
@@ -27106,8 +26988,8 @@
         </p:nvSpPr>
         <p:spPr>
           <a:xfrm>
-            <a:off x="5047488" y="5676810"/>
-            <a:ext cx="868680" cy="248502"/>
+            <a:off x="5047488" y="6021055"/>
+            <a:ext cx="868680" cy="270017"/>
           </a:xfrm>
           <a:prstGeom prst="rect">
             <a:avLst/>
@@ -27146,7 +27028,7 @@
         <p:spPr>
           <a:xfrm>
             <a:off x="6208776" y="1700784"/>
-            <a:ext cx="310896" cy="248502"/>
+            <a:ext cx="310896" cy="270017"/>
           </a:xfrm>
           <a:prstGeom prst="rect">
             <a:avLst/>
@@ -27185,7 +27067,7 @@
         <p:spPr>
           <a:xfrm>
             <a:off x="6565392" y="1700784"/>
-            <a:ext cx="1783080" cy="248502"/>
+            <a:ext cx="1783080" cy="270017"/>
           </a:xfrm>
           <a:prstGeom prst="rect">
             <a:avLst/>
@@ -27223,8 +27105,8 @@
         </p:nvSpPr>
         <p:spPr>
           <a:xfrm>
-            <a:off x="8421624" y="1756697"/>
-            <a:ext cx="116484" cy="136676"/>
+            <a:off x="8421624" y="1761538"/>
+            <a:ext cx="116484" cy="148509"/>
           </a:xfrm>
           <a:prstGeom prst="rect">
             <a:avLst/>
@@ -27244,7 +27126,7 @@
         <p:spPr>
           <a:xfrm>
             <a:off x="8942832" y="1700784"/>
-            <a:ext cx="786384" cy="248502"/>
+            <a:ext cx="786384" cy="270017"/>
           </a:xfrm>
           <a:prstGeom prst="rect">
             <a:avLst/>
@@ -27283,7 +27165,7 @@
         <p:spPr>
           <a:xfrm>
             <a:off x="9729216" y="1700784"/>
-            <a:ext cx="868680" cy="248502"/>
+            <a:ext cx="868680" cy="270017"/>
           </a:xfrm>
           <a:prstGeom prst="rect">
             <a:avLst/>
@@ -27322,7 +27204,7 @@
         <p:spPr>
           <a:xfrm>
             <a:off x="10597896" y="1700784"/>
-            <a:ext cx="868680" cy="248502"/>
+            <a:ext cx="868680" cy="270017"/>
           </a:xfrm>
           <a:prstGeom prst="rect">
             <a:avLst/>
@@ -27360,8 +27242,8 @@
         </p:nvSpPr>
         <p:spPr>
           <a:xfrm>
-            <a:off x="6208776" y="1949286"/>
-            <a:ext cx="310896" cy="248502"/>
+            <a:off x="6208776" y="1970801"/>
+            <a:ext cx="310896" cy="270017"/>
           </a:xfrm>
           <a:prstGeom prst="rect">
             <a:avLst/>
@@ -27399,8 +27281,8 @@
         </p:nvSpPr>
         <p:spPr>
           <a:xfrm>
-            <a:off x="6565392" y="1949286"/>
-            <a:ext cx="1783080" cy="248502"/>
+            <a:off x="6565392" y="1970801"/>
+            <a:ext cx="1783080" cy="270017"/>
           </a:xfrm>
           <a:prstGeom prst="rect">
             <a:avLst/>
@@ -27438,8 +27320,8 @@
         </p:nvSpPr>
         <p:spPr>
           <a:xfrm>
-            <a:off x="8421624" y="2005199"/>
-            <a:ext cx="115541" cy="136676"/>
+            <a:off x="8421624" y="2031555"/>
+            <a:ext cx="115541" cy="148509"/>
           </a:xfrm>
           <a:prstGeom prst="rect">
             <a:avLst/>
@@ -27458,8 +27340,8 @@
         </p:nvSpPr>
         <p:spPr>
           <a:xfrm>
-            <a:off x="8942832" y="1949286"/>
-            <a:ext cx="786384" cy="248502"/>
+            <a:off x="8942832" y="1970801"/>
+            <a:ext cx="786384" cy="270017"/>
           </a:xfrm>
           <a:prstGeom prst="rect">
             <a:avLst/>
@@ -27497,8 +27379,8 @@
         </p:nvSpPr>
         <p:spPr>
           <a:xfrm>
-            <a:off x="9729216" y="1949286"/>
-            <a:ext cx="868680" cy="248502"/>
+            <a:off x="9729216" y="1970801"/>
+            <a:ext cx="868680" cy="270017"/>
           </a:xfrm>
           <a:prstGeom prst="rect">
             <a:avLst/>
@@ -27536,8 +27418,8 @@
         </p:nvSpPr>
         <p:spPr>
           <a:xfrm>
-            <a:off x="10597896" y="1949286"/>
-            <a:ext cx="868680" cy="248502"/>
+            <a:off x="10597896" y="1970801"/>
+            <a:ext cx="868680" cy="270017"/>
           </a:xfrm>
           <a:prstGeom prst="rect">
             <a:avLst/>
@@ -27575,8 +27457,8 @@
         </p:nvSpPr>
         <p:spPr>
           <a:xfrm>
-            <a:off x="6208776" y="2197787"/>
-            <a:ext cx="310896" cy="248502"/>
+            <a:off x="6208776" y="2240818"/>
+            <a:ext cx="310896" cy="270017"/>
           </a:xfrm>
           <a:prstGeom prst="rect">
             <a:avLst/>
@@ -27614,8 +27496,8 @@
         </p:nvSpPr>
         <p:spPr>
           <a:xfrm>
-            <a:off x="6565392" y="2197787"/>
-            <a:ext cx="1783080" cy="248502"/>
+            <a:off x="6565392" y="2240818"/>
+            <a:ext cx="1783080" cy="270017"/>
           </a:xfrm>
           <a:prstGeom prst="rect">
             <a:avLst/>
@@ -27653,8 +27535,8 @@
         </p:nvSpPr>
         <p:spPr>
           <a:xfrm>
-            <a:off x="8421624" y="2253700"/>
-            <a:ext cx="111161" cy="136676"/>
+            <a:off x="8421624" y="2301572"/>
+            <a:ext cx="111161" cy="148509"/>
           </a:xfrm>
           <a:prstGeom prst="rect">
             <a:avLst/>
@@ -27673,8 +27555,8 @@
         </p:nvSpPr>
         <p:spPr>
           <a:xfrm>
-            <a:off x="8942832" y="2197787"/>
-            <a:ext cx="786384" cy="248502"/>
+            <a:off x="8942832" y="2240818"/>
+            <a:ext cx="786384" cy="270017"/>
           </a:xfrm>
           <a:prstGeom prst="rect">
             <a:avLst/>
@@ -27712,8 +27594,8 @@
         </p:nvSpPr>
         <p:spPr>
           <a:xfrm>
-            <a:off x="9729216" y="2197787"/>
-            <a:ext cx="868680" cy="248502"/>
+            <a:off x="9729216" y="2240818"/>
+            <a:ext cx="868680" cy="270017"/>
           </a:xfrm>
           <a:prstGeom prst="rect">
             <a:avLst/>
@@ -27751,8 +27633,8 @@
         </p:nvSpPr>
         <p:spPr>
           <a:xfrm>
-            <a:off x="10597896" y="2197787"/>
-            <a:ext cx="868680" cy="248502"/>
+            <a:off x="10597896" y="2240818"/>
+            <a:ext cx="868680" cy="270017"/>
           </a:xfrm>
           <a:prstGeom prst="rect">
             <a:avLst/>
@@ -27790,8 +27672,8 @@
         </p:nvSpPr>
         <p:spPr>
           <a:xfrm>
-            <a:off x="6208776" y="2446289"/>
-            <a:ext cx="310896" cy="248502"/>
+            <a:off x="6208776" y="2510835"/>
+            <a:ext cx="310896" cy="270017"/>
           </a:xfrm>
           <a:prstGeom prst="rect">
             <a:avLst/>
@@ -27829,8 +27711,8 @@
         </p:nvSpPr>
         <p:spPr>
           <a:xfrm>
-            <a:off x="6565392" y="2446289"/>
-            <a:ext cx="1783080" cy="248502"/>
+            <a:off x="6565392" y="2510835"/>
+            <a:ext cx="1783080" cy="270017"/>
           </a:xfrm>
           <a:prstGeom prst="rect">
             <a:avLst/>
@@ -27868,8 +27750,8 @@
         </p:nvSpPr>
         <p:spPr>
           <a:xfrm>
-            <a:off x="8421624" y="2502202"/>
-            <a:ext cx="84754" cy="136676"/>
+            <a:off x="8421624" y="2571589"/>
+            <a:ext cx="84754" cy="148509"/>
           </a:xfrm>
           <a:prstGeom prst="rect">
             <a:avLst/>
@@ -27888,8 +27770,8 @@
         </p:nvSpPr>
         <p:spPr>
           <a:xfrm>
-            <a:off x="8942832" y="2446289"/>
-            <a:ext cx="786384" cy="248502"/>
+            <a:off x="8942832" y="2510835"/>
+            <a:ext cx="786384" cy="270017"/>
           </a:xfrm>
           <a:prstGeom prst="rect">
             <a:avLst/>
@@ -27927,8 +27809,8 @@
         </p:nvSpPr>
         <p:spPr>
           <a:xfrm>
-            <a:off x="9729216" y="2446289"/>
-            <a:ext cx="868680" cy="248502"/>
+            <a:off x="9729216" y="2510835"/>
+            <a:ext cx="868680" cy="270017"/>
           </a:xfrm>
           <a:prstGeom prst="rect">
             <a:avLst/>
@@ -27966,8 +27848,8 @@
         </p:nvSpPr>
         <p:spPr>
           <a:xfrm>
-            <a:off x="10597896" y="2446289"/>
-            <a:ext cx="868680" cy="248502"/>
+            <a:off x="10597896" y="2510835"/>
+            <a:ext cx="868680" cy="270017"/>
           </a:xfrm>
           <a:prstGeom prst="rect">
             <a:avLst/>
@@ -28005,8 +27887,8 @@
         </p:nvSpPr>
         <p:spPr>
           <a:xfrm>
-            <a:off x="6208776" y="2694791"/>
-            <a:ext cx="310896" cy="248502"/>
+            <a:off x="6208776" y="2780852"/>
+            <a:ext cx="310896" cy="270017"/>
           </a:xfrm>
           <a:prstGeom prst="rect">
             <a:avLst/>
@@ -28044,8 +27926,8 @@
         </p:nvSpPr>
         <p:spPr>
           <a:xfrm>
-            <a:off x="6565392" y="2694791"/>
-            <a:ext cx="1783080" cy="248502"/>
+            <a:off x="6565392" y="2780852"/>
+            <a:ext cx="1783080" cy="270017"/>
           </a:xfrm>
           <a:prstGeom prst="rect">
             <a:avLst/>
@@ -28083,8 +27965,8 @@
         </p:nvSpPr>
         <p:spPr>
           <a:xfrm>
-            <a:off x="8421624" y="2750703"/>
-            <a:ext cx="75701" cy="136676"/>
+            <a:off x="8421624" y="2841606"/>
+            <a:ext cx="75701" cy="148509"/>
           </a:xfrm>
           <a:prstGeom prst="rect">
             <a:avLst/>
@@ -28103,8 +27985,8 @@
         </p:nvSpPr>
         <p:spPr>
           <a:xfrm>
-            <a:off x="8942832" y="2694791"/>
-            <a:ext cx="786384" cy="248502"/>
+            <a:off x="8942832" y="2780852"/>
+            <a:ext cx="786384" cy="270017"/>
           </a:xfrm>
           <a:prstGeom prst="rect">
             <a:avLst/>
@@ -28142,8 +28024,8 @@
         </p:nvSpPr>
         <p:spPr>
           <a:xfrm>
-            <a:off x="9729216" y="2694791"/>
-            <a:ext cx="868680" cy="248502"/>
+            <a:off x="9729216" y="2780852"/>
+            <a:ext cx="868680" cy="270017"/>
           </a:xfrm>
           <a:prstGeom prst="rect">
             <a:avLst/>
@@ -28181,8 +28063,8 @@
         </p:nvSpPr>
         <p:spPr>
           <a:xfrm>
-            <a:off x="10597896" y="2694791"/>
-            <a:ext cx="868680" cy="248502"/>
+            <a:off x="10597896" y="2780852"/>
+            <a:ext cx="868680" cy="270017"/>
           </a:xfrm>
           <a:prstGeom prst="rect">
             <a:avLst/>
@@ -28220,8 +28102,8 @@
         </p:nvSpPr>
         <p:spPr>
           <a:xfrm>
-            <a:off x="6208776" y="2943292"/>
-            <a:ext cx="310896" cy="248502"/>
+            <a:off x="6208776" y="3050869"/>
+            <a:ext cx="310896" cy="270017"/>
           </a:xfrm>
           <a:prstGeom prst="rect">
             <a:avLst/>
@@ -28259,8 +28141,8 @@
         </p:nvSpPr>
         <p:spPr>
           <a:xfrm>
-            <a:off x="6565392" y="2943292"/>
-            <a:ext cx="1783080" cy="248502"/>
+            <a:off x="6565392" y="3050869"/>
+            <a:ext cx="1783080" cy="270017"/>
           </a:xfrm>
           <a:prstGeom prst="rect">
             <a:avLst/>
@@ -28298,8 +28180,8 @@
         </p:nvSpPr>
         <p:spPr>
           <a:xfrm>
-            <a:off x="8421624" y="2999205"/>
-            <a:ext cx="69750" cy="136676"/>
+            <a:off x="8421624" y="3111623"/>
+            <a:ext cx="69750" cy="148509"/>
           </a:xfrm>
           <a:prstGeom prst="rect">
             <a:avLst/>
@@ -28318,8 +28200,8 @@
         </p:nvSpPr>
         <p:spPr>
           <a:xfrm>
-            <a:off x="8942832" y="2943292"/>
-            <a:ext cx="786384" cy="248502"/>
+            <a:off x="8942832" y="3050869"/>
+            <a:ext cx="786384" cy="270017"/>
           </a:xfrm>
           <a:prstGeom prst="rect">
             <a:avLst/>
@@ -28357,8 +28239,8 @@
         </p:nvSpPr>
         <p:spPr>
           <a:xfrm>
-            <a:off x="9729216" y="2943292"/>
-            <a:ext cx="868680" cy="248502"/>
+            <a:off x="9729216" y="3050869"/>
+            <a:ext cx="868680" cy="270017"/>
           </a:xfrm>
           <a:prstGeom prst="rect">
             <a:avLst/>
@@ -28396,8 +28278,8 @@
         </p:nvSpPr>
         <p:spPr>
           <a:xfrm>
-            <a:off x="10597896" y="2943292"/>
-            <a:ext cx="868680" cy="248502"/>
+            <a:off x="10597896" y="3050869"/>
+            <a:ext cx="868680" cy="270017"/>
           </a:xfrm>
           <a:prstGeom prst="rect">
             <a:avLst/>
@@ -28435,8 +28317,8 @@
         </p:nvSpPr>
         <p:spPr>
           <a:xfrm>
-            <a:off x="6208776" y="3191794"/>
-            <a:ext cx="310896" cy="248502"/>
+            <a:off x="6208776" y="3320886"/>
+            <a:ext cx="310896" cy="270017"/>
           </a:xfrm>
           <a:prstGeom prst="rect">
             <a:avLst/>
@@ -28474,8 +28356,8 @@
         </p:nvSpPr>
         <p:spPr>
           <a:xfrm>
-            <a:off x="6565392" y="3191794"/>
-            <a:ext cx="1783080" cy="248502"/>
+            <a:off x="6565392" y="3320886"/>
+            <a:ext cx="1783080" cy="270017"/>
           </a:xfrm>
           <a:prstGeom prst="rect">
             <a:avLst/>
@@ -28513,8 +28395,8 @@
         </p:nvSpPr>
         <p:spPr>
           <a:xfrm>
-            <a:off x="8421624" y="3247707"/>
-            <a:ext cx="61333" cy="136676"/>
+            <a:off x="8421624" y="3381639"/>
+            <a:ext cx="61333" cy="148509"/>
           </a:xfrm>
           <a:prstGeom prst="rect">
             <a:avLst/>
@@ -28533,8 +28415,8 @@
         </p:nvSpPr>
         <p:spPr>
           <a:xfrm>
-            <a:off x="8942832" y="3191794"/>
-            <a:ext cx="786384" cy="248502"/>
+            <a:off x="8942832" y="3320886"/>
+            <a:ext cx="786384" cy="270017"/>
           </a:xfrm>
           <a:prstGeom prst="rect">
             <a:avLst/>
@@ -28572,8 +28454,8 @@
         </p:nvSpPr>
         <p:spPr>
           <a:xfrm>
-            <a:off x="9729216" y="3191794"/>
-            <a:ext cx="868680" cy="248502"/>
+            <a:off x="9729216" y="3320886"/>
+            <a:ext cx="868680" cy="270017"/>
           </a:xfrm>
           <a:prstGeom prst="rect">
             <a:avLst/>
@@ -28611,8 +28493,8 @@
         </p:nvSpPr>
         <p:spPr>
           <a:xfrm>
-            <a:off x="10597896" y="3191794"/>
-            <a:ext cx="868680" cy="248502"/>
+            <a:off x="10597896" y="3320886"/>
+            <a:ext cx="868680" cy="270017"/>
           </a:xfrm>
           <a:prstGeom prst="rect">
             <a:avLst/>
@@ -28650,8 +28532,8 @@
         </p:nvSpPr>
         <p:spPr>
           <a:xfrm>
-            <a:off x="6208776" y="3440296"/>
-            <a:ext cx="310896" cy="248502"/>
+            <a:off x="6208776" y="3590903"/>
+            <a:ext cx="310896" cy="270017"/>
           </a:xfrm>
           <a:prstGeom prst="rect">
             <a:avLst/>
@@ -28689,8 +28571,8 @@
         </p:nvSpPr>
         <p:spPr>
           <a:xfrm>
-            <a:off x="6565392" y="3440296"/>
-            <a:ext cx="1783080" cy="248502"/>
+            <a:off x="6565392" y="3590903"/>
+            <a:ext cx="1783080" cy="270017"/>
           </a:xfrm>
           <a:prstGeom prst="rect">
             <a:avLst/>
@@ -28728,8 +28610,8 @@
         </p:nvSpPr>
         <p:spPr>
           <a:xfrm>
-            <a:off x="8421624" y="3496208"/>
-            <a:ext cx="59486" cy="136676"/>
+            <a:off x="8421624" y="3651656"/>
+            <a:ext cx="59486" cy="148509"/>
           </a:xfrm>
           <a:prstGeom prst="rect">
             <a:avLst/>
@@ -28748,8 +28630,8 @@
         </p:nvSpPr>
         <p:spPr>
           <a:xfrm>
-            <a:off x="8942832" y="3440296"/>
-            <a:ext cx="786384" cy="248502"/>
+            <a:off x="8942832" y="3590903"/>
+            <a:ext cx="786384" cy="270017"/>
           </a:xfrm>
           <a:prstGeom prst="rect">
             <a:avLst/>
@@ -28787,8 +28669,8 @@
         </p:nvSpPr>
         <p:spPr>
           <a:xfrm>
-            <a:off x="9729216" y="3440296"/>
-            <a:ext cx="868680" cy="248502"/>
+            <a:off x="9729216" y="3590903"/>
+            <a:ext cx="868680" cy="270017"/>
           </a:xfrm>
           <a:prstGeom prst="rect">
             <a:avLst/>
@@ -28826,8 +28708,8 @@
         </p:nvSpPr>
         <p:spPr>
           <a:xfrm>
-            <a:off x="10597896" y="3440296"/>
-            <a:ext cx="868680" cy="248502"/>
+            <a:off x="10597896" y="3590903"/>
+            <a:ext cx="868680" cy="270017"/>
           </a:xfrm>
           <a:prstGeom prst="rect">
             <a:avLst/>
@@ -28865,8 +28747,8 @@
         </p:nvSpPr>
         <p:spPr>
           <a:xfrm>
-            <a:off x="6208776" y="3688797"/>
-            <a:ext cx="310896" cy="248502"/>
+            <a:off x="6208776" y="3860920"/>
+            <a:ext cx="310896" cy="270017"/>
           </a:xfrm>
           <a:prstGeom prst="rect">
             <a:avLst/>
@@ -28904,8 +28786,8 @@
         </p:nvSpPr>
         <p:spPr>
           <a:xfrm>
-            <a:off x="6565392" y="3688797"/>
-            <a:ext cx="1783080" cy="248502"/>
+            <a:off x="6565392" y="3860920"/>
+            <a:ext cx="1783080" cy="270017"/>
           </a:xfrm>
           <a:prstGeom prst="rect">
             <a:avLst/>
@@ -28943,8 +28825,8 @@
         </p:nvSpPr>
         <p:spPr>
           <a:xfrm>
-            <a:off x="8421624" y="3744710"/>
-            <a:ext cx="58291" cy="136676"/>
+            <a:off x="8421624" y="3921673"/>
+            <a:ext cx="58291" cy="148509"/>
           </a:xfrm>
           <a:prstGeom prst="rect">
             <a:avLst/>
@@ -28963,8 +28845,8 @@
         </p:nvSpPr>
         <p:spPr>
           <a:xfrm>
-            <a:off x="8942832" y="3688797"/>
-            <a:ext cx="786384" cy="248502"/>
+            <a:off x="8942832" y="3860920"/>
+            <a:ext cx="786384" cy="270017"/>
           </a:xfrm>
           <a:prstGeom prst="rect">
             <a:avLst/>
@@ -29002,8 +28884,8 @@
         </p:nvSpPr>
         <p:spPr>
           <a:xfrm>
-            <a:off x="9729216" y="3688797"/>
-            <a:ext cx="868680" cy="248502"/>
+            <a:off x="9729216" y="3860920"/>
+            <a:ext cx="868680" cy="270017"/>
           </a:xfrm>
           <a:prstGeom prst="rect">
             <a:avLst/>
@@ -29041,8 +28923,8 @@
         </p:nvSpPr>
         <p:spPr>
           <a:xfrm>
-            <a:off x="10597896" y="3688797"/>
-            <a:ext cx="868680" cy="248502"/>
+            <a:off x="10597896" y="3860920"/>
+            <a:ext cx="868680" cy="270017"/>
           </a:xfrm>
           <a:prstGeom prst="rect">
             <a:avLst/>
@@ -29080,8 +28962,8 @@
         </p:nvSpPr>
         <p:spPr>
           <a:xfrm>
-            <a:off x="6208776" y="3937299"/>
-            <a:ext cx="310896" cy="248502"/>
+            <a:off x="6208776" y="4130936"/>
+            <a:ext cx="310896" cy="270017"/>
           </a:xfrm>
           <a:prstGeom prst="rect">
             <a:avLst/>
@@ -29119,8 +29001,8 @@
         </p:nvSpPr>
         <p:spPr>
           <a:xfrm>
-            <a:off x="6565392" y="3937299"/>
-            <a:ext cx="1783080" cy="248502"/>
+            <a:off x="6565392" y="4130936"/>
+            <a:ext cx="1783080" cy="270017"/>
           </a:xfrm>
           <a:prstGeom prst="rect">
             <a:avLst/>
@@ -29158,8 +29040,8 @@
         </p:nvSpPr>
         <p:spPr>
           <a:xfrm>
-            <a:off x="8421624" y="3993212"/>
-            <a:ext cx="42032" cy="136676"/>
+            <a:off x="8421624" y="4191690"/>
+            <a:ext cx="42032" cy="148509"/>
           </a:xfrm>
           <a:prstGeom prst="rect">
             <a:avLst/>
@@ -29178,8 +29060,8 @@
         </p:nvSpPr>
         <p:spPr>
           <a:xfrm>
-            <a:off x="8942832" y="3937299"/>
-            <a:ext cx="786384" cy="248502"/>
+            <a:off x="8942832" y="4130936"/>
+            <a:ext cx="786384" cy="270017"/>
           </a:xfrm>
           <a:prstGeom prst="rect">
             <a:avLst/>
@@ -29217,8 +29099,8 @@
         </p:nvSpPr>
         <p:spPr>
           <a:xfrm>
-            <a:off x="9729216" y="3937299"/>
-            <a:ext cx="868680" cy="248502"/>
+            <a:off x="9729216" y="4130936"/>
+            <a:ext cx="868680" cy="270017"/>
           </a:xfrm>
           <a:prstGeom prst="rect">
             <a:avLst/>
@@ -29256,8 +29138,8 @@
         </p:nvSpPr>
         <p:spPr>
           <a:xfrm>
-            <a:off x="10597896" y="3937299"/>
-            <a:ext cx="868680" cy="248502"/>
+            <a:off x="10597896" y="4130936"/>
+            <a:ext cx="868680" cy="270017"/>
           </a:xfrm>
           <a:prstGeom prst="rect">
             <a:avLst/>
@@ -29295,8 +29177,8 @@
         </p:nvSpPr>
         <p:spPr>
           <a:xfrm>
-            <a:off x="6208776" y="4185800"/>
-            <a:ext cx="310896" cy="248502"/>
+            <a:off x="6208776" y="4400953"/>
+            <a:ext cx="310896" cy="270017"/>
           </a:xfrm>
           <a:prstGeom prst="rect">
             <a:avLst/>
@@ -29334,8 +29216,8 @@
         </p:nvSpPr>
         <p:spPr>
           <a:xfrm>
-            <a:off x="6565392" y="4185800"/>
-            <a:ext cx="1783080" cy="248502"/>
+            <a:off x="6565392" y="4400953"/>
+            <a:ext cx="1783080" cy="270017"/>
           </a:xfrm>
           <a:prstGeom prst="rect">
             <a:avLst/>
@@ -29373,8 +29255,8 @@
         </p:nvSpPr>
         <p:spPr>
           <a:xfrm>
-            <a:off x="8421624" y="4241713"/>
-            <a:ext cx="38916" cy="136676"/>
+            <a:off x="8421624" y="4461707"/>
+            <a:ext cx="38916" cy="148509"/>
           </a:xfrm>
           <a:prstGeom prst="rect">
             <a:avLst/>
@@ -29393,8 +29275,8 @@
         </p:nvSpPr>
         <p:spPr>
           <a:xfrm>
-            <a:off x="8942832" y="4185800"/>
-            <a:ext cx="786384" cy="248502"/>
+            <a:off x="8942832" y="4400953"/>
+            <a:ext cx="786384" cy="270017"/>
           </a:xfrm>
           <a:prstGeom prst="rect">
             <a:avLst/>
@@ -29432,8 +29314,8 @@
         </p:nvSpPr>
         <p:spPr>
           <a:xfrm>
-            <a:off x="9729216" y="4185800"/>
-            <a:ext cx="868680" cy="248502"/>
+            <a:off x="9729216" y="4400953"/>
+            <a:ext cx="868680" cy="270017"/>
           </a:xfrm>
           <a:prstGeom prst="rect">
             <a:avLst/>
@@ -29471,8 +29353,8 @@
         </p:nvSpPr>
         <p:spPr>
           <a:xfrm>
-            <a:off x="10597896" y="4185800"/>
-            <a:ext cx="868680" cy="248502"/>
+            <a:off x="10597896" y="4400953"/>
+            <a:ext cx="868680" cy="270017"/>
           </a:xfrm>
           <a:prstGeom prst="rect">
             <a:avLst/>
@@ -29510,8 +29392,8 @@
         </p:nvSpPr>
         <p:spPr>
           <a:xfrm>
-            <a:off x="6208776" y="4434302"/>
-            <a:ext cx="310896" cy="248502"/>
+            <a:off x="6208776" y="4670970"/>
+            <a:ext cx="310896" cy="270017"/>
           </a:xfrm>
           <a:prstGeom prst="rect">
             <a:avLst/>
@@ -29549,8 +29431,8 @@
         </p:nvSpPr>
         <p:spPr>
           <a:xfrm>
-            <a:off x="6565392" y="4434302"/>
-            <a:ext cx="1783080" cy="248502"/>
+            <a:off x="6565392" y="4670970"/>
+            <a:ext cx="1783080" cy="270017"/>
           </a:xfrm>
           <a:prstGeom prst="rect">
             <a:avLst/>
@@ -29588,8 +29470,8 @@
         </p:nvSpPr>
         <p:spPr>
           <a:xfrm>
-            <a:off x="8421624" y="4490215"/>
-            <a:ext cx="28242" cy="136676"/>
+            <a:off x="8421624" y="4731724"/>
+            <a:ext cx="28242" cy="148509"/>
           </a:xfrm>
           <a:prstGeom prst="rect">
             <a:avLst/>
@@ -29608,8 +29490,8 @@
         </p:nvSpPr>
         <p:spPr>
           <a:xfrm>
-            <a:off x="8942832" y="4434302"/>
-            <a:ext cx="786384" cy="248502"/>
+            <a:off x="8942832" y="4670970"/>
+            <a:ext cx="786384" cy="270017"/>
           </a:xfrm>
           <a:prstGeom prst="rect">
             <a:avLst/>
@@ -29647,8 +29529,8 @@
         </p:nvSpPr>
         <p:spPr>
           <a:xfrm>
-            <a:off x="9729216" y="4434302"/>
-            <a:ext cx="868680" cy="248502"/>
+            <a:off x="9729216" y="4670970"/>
+            <a:ext cx="868680" cy="270017"/>
           </a:xfrm>
           <a:prstGeom prst="rect">
             <a:avLst/>
@@ -29686,8 +29568,8 @@
         </p:nvSpPr>
         <p:spPr>
           <a:xfrm>
-            <a:off x="10597896" y="4434302"/>
-            <a:ext cx="868680" cy="248502"/>
+            <a:off x="10597896" y="4670970"/>
+            <a:ext cx="868680" cy="270017"/>
           </a:xfrm>
           <a:prstGeom prst="rect">
             <a:avLst/>
@@ -29725,8 +29607,8 @@
         </p:nvSpPr>
         <p:spPr>
           <a:xfrm>
-            <a:off x="6208776" y="4682804"/>
-            <a:ext cx="310896" cy="248502"/>
+            <a:off x="6208776" y="4940987"/>
+            <a:ext cx="310896" cy="270017"/>
           </a:xfrm>
           <a:prstGeom prst="rect">
             <a:avLst/>
@@ -29764,8 +29646,8 @@
         </p:nvSpPr>
         <p:spPr>
           <a:xfrm>
-            <a:off x="6565392" y="4682804"/>
-            <a:ext cx="1783080" cy="248502"/>
+            <a:off x="6565392" y="4940987"/>
+            <a:ext cx="1783080" cy="270017"/>
           </a:xfrm>
           <a:prstGeom prst="rect">
             <a:avLst/>
@@ -29803,8 +29685,8 @@
         </p:nvSpPr>
         <p:spPr>
           <a:xfrm>
-            <a:off x="8421624" y="4738717"/>
-            <a:ext cx="27287" cy="136676"/>
+            <a:off x="8421624" y="5001741"/>
+            <a:ext cx="27287" cy="148509"/>
           </a:xfrm>
           <a:prstGeom prst="rect">
             <a:avLst/>
@@ -29823,8 +29705,8 @@
         </p:nvSpPr>
         <p:spPr>
           <a:xfrm>
-            <a:off x="8942832" y="4682804"/>
-            <a:ext cx="786384" cy="248502"/>
+            <a:off x="8942832" y="4940987"/>
+            <a:ext cx="786384" cy="270017"/>
           </a:xfrm>
           <a:prstGeom prst="rect">
             <a:avLst/>
@@ -29862,8 +29744,8 @@
         </p:nvSpPr>
         <p:spPr>
           <a:xfrm>
-            <a:off x="9729216" y="4682804"/>
-            <a:ext cx="868680" cy="248502"/>
+            <a:off x="9729216" y="4940987"/>
+            <a:ext cx="868680" cy="270017"/>
           </a:xfrm>
           <a:prstGeom prst="rect">
             <a:avLst/>
@@ -29901,8 +29783,8 @@
         </p:nvSpPr>
         <p:spPr>
           <a:xfrm>
-            <a:off x="10597896" y="4682804"/>
-            <a:ext cx="868680" cy="248502"/>
+            <a:off x="10597896" y="4940987"/>
+            <a:ext cx="868680" cy="270017"/>
           </a:xfrm>
           <a:prstGeom prst="rect">
             <a:avLst/>
@@ -29940,8 +29822,8 @@
         </p:nvSpPr>
         <p:spPr>
           <a:xfrm>
-            <a:off x="6208776" y="4931305"/>
-            <a:ext cx="310896" cy="248502"/>
+            <a:off x="6208776" y="5211004"/>
+            <a:ext cx="310896" cy="270017"/>
           </a:xfrm>
           <a:prstGeom prst="rect">
             <a:avLst/>
@@ -29979,8 +29861,8 @@
         </p:nvSpPr>
         <p:spPr>
           <a:xfrm>
-            <a:off x="6565392" y="4931305"/>
-            <a:ext cx="1783080" cy="248502"/>
+            <a:off x="6565392" y="5211004"/>
+            <a:ext cx="1783080" cy="270017"/>
           </a:xfrm>
           <a:prstGeom prst="rect">
             <a:avLst/>
@@ -30018,8 +29900,8 @@
         </p:nvSpPr>
         <p:spPr>
           <a:xfrm>
-            <a:off x="8421624" y="4987218"/>
-            <a:ext cx="19910" cy="136676"/>
+            <a:off x="8421624" y="5271758"/>
+            <a:ext cx="19910" cy="148509"/>
           </a:xfrm>
           <a:prstGeom prst="rect">
             <a:avLst/>
@@ -30038,8 +29920,8 @@
         </p:nvSpPr>
         <p:spPr>
           <a:xfrm>
-            <a:off x="8942832" y="4931305"/>
-            <a:ext cx="786384" cy="248502"/>
+            <a:off x="8942832" y="5211004"/>
+            <a:ext cx="786384" cy="270017"/>
           </a:xfrm>
           <a:prstGeom prst="rect">
             <a:avLst/>
@@ -30077,8 +29959,8 @@
         </p:nvSpPr>
         <p:spPr>
           <a:xfrm>
-            <a:off x="9729216" y="4931305"/>
-            <a:ext cx="868680" cy="248502"/>
+            <a:off x="9729216" y="5211004"/>
+            <a:ext cx="868680" cy="270017"/>
           </a:xfrm>
           <a:prstGeom prst="rect">
             <a:avLst/>
@@ -30116,8 +29998,8 @@
         </p:nvSpPr>
         <p:spPr>
           <a:xfrm>
-            <a:off x="10597896" y="4931305"/>
-            <a:ext cx="868680" cy="248502"/>
+            <a:off x="10597896" y="5211004"/>
+            <a:ext cx="868680" cy="270017"/>
           </a:xfrm>
           <a:prstGeom prst="rect">
             <a:avLst/>
@@ -30155,8 +30037,8 @@
         </p:nvSpPr>
         <p:spPr>
           <a:xfrm>
-            <a:off x="6208776" y="5179807"/>
-            <a:ext cx="310896" cy="248502"/>
+            <a:off x="6208776" y="5481021"/>
+            <a:ext cx="310896" cy="270017"/>
           </a:xfrm>
           <a:prstGeom prst="rect">
             <a:avLst/>
@@ -30194,8 +30076,8 @@
         </p:nvSpPr>
         <p:spPr>
           <a:xfrm>
-            <a:off x="6565392" y="5179807"/>
-            <a:ext cx="1783080" cy="248502"/>
+            <a:off x="6565392" y="5481021"/>
+            <a:ext cx="1783080" cy="270017"/>
           </a:xfrm>
           <a:prstGeom prst="rect">
             <a:avLst/>
@@ -30233,8 +30115,8 @@
         </p:nvSpPr>
         <p:spPr>
           <a:xfrm>
-            <a:off x="8421624" y="5235720"/>
-            <a:ext cx="18288" cy="136676"/>
+            <a:off x="8421624" y="5541775"/>
+            <a:ext cx="18288" cy="148509"/>
           </a:xfrm>
           <a:prstGeom prst="rect">
             <a:avLst/>
@@ -30253,8 +30135,8 @@
         </p:nvSpPr>
         <p:spPr>
           <a:xfrm>
-            <a:off x="8942832" y="5179807"/>
-            <a:ext cx="786384" cy="248502"/>
+            <a:off x="8942832" y="5481021"/>
+            <a:ext cx="786384" cy="270017"/>
           </a:xfrm>
           <a:prstGeom prst="rect">
             <a:avLst/>
@@ -30292,8 +30174,8 @@
         </p:nvSpPr>
         <p:spPr>
           <a:xfrm>
-            <a:off x="9729216" y="5179807"/>
-            <a:ext cx="868680" cy="248502"/>
+            <a:off x="9729216" y="5481021"/>
+            <a:ext cx="868680" cy="270017"/>
           </a:xfrm>
           <a:prstGeom prst="rect">
             <a:avLst/>
@@ -30331,8 +30213,8 @@
         </p:nvSpPr>
         <p:spPr>
           <a:xfrm>
-            <a:off x="10597896" y="5179807"/>
-            <a:ext cx="868680" cy="248502"/>
+            <a:off x="10597896" y="5481021"/>
+            <a:ext cx="868680" cy="270017"/>
           </a:xfrm>
           <a:prstGeom prst="rect">
             <a:avLst/>
@@ -30370,8 +30252,8 @@
         </p:nvSpPr>
         <p:spPr>
           <a:xfrm>
-            <a:off x="6208776" y="5428309"/>
-            <a:ext cx="310896" cy="248502"/>
+            <a:off x="6208776" y="5751038"/>
+            <a:ext cx="310896" cy="270017"/>
           </a:xfrm>
           <a:prstGeom prst="rect">
             <a:avLst/>
@@ -30409,8 +30291,8 @@
         </p:nvSpPr>
         <p:spPr>
           <a:xfrm>
-            <a:off x="6565392" y="5428309"/>
-            <a:ext cx="1783080" cy="248502"/>
+            <a:off x="6565392" y="5751038"/>
+            <a:ext cx="1783080" cy="270017"/>
           </a:xfrm>
           <a:prstGeom prst="rect">
             <a:avLst/>
@@ -30448,8 +30330,8 @@
         </p:nvSpPr>
         <p:spPr>
           <a:xfrm>
-            <a:off x="8421624" y="5484222"/>
-            <a:ext cx="18288" cy="136676"/>
+            <a:off x="8421624" y="5811792"/>
+            <a:ext cx="18288" cy="148509"/>
           </a:xfrm>
           <a:prstGeom prst="rect">
             <a:avLst/>
@@ -30468,8 +30350,8 @@
         </p:nvSpPr>
         <p:spPr>
           <a:xfrm>
-            <a:off x="8942832" y="5428309"/>
-            <a:ext cx="786384" cy="248502"/>
+            <a:off x="8942832" y="5751038"/>
+            <a:ext cx="786384" cy="270017"/>
           </a:xfrm>
           <a:prstGeom prst="rect">
             <a:avLst/>
@@ -30507,8 +30389,8 @@
         </p:nvSpPr>
         <p:spPr>
           <a:xfrm>
-            <a:off x="9729216" y="5428309"/>
-            <a:ext cx="868680" cy="248502"/>
+            <a:off x="9729216" y="5751038"/>
+            <a:ext cx="868680" cy="270017"/>
           </a:xfrm>
           <a:prstGeom prst="rect">
             <a:avLst/>
@@ -30546,8 +30428,8 @@
         </p:nvSpPr>
         <p:spPr>
           <a:xfrm>
-            <a:off x="10597896" y="5428309"/>
-            <a:ext cx="868680" cy="248502"/>
+            <a:off x="10597896" y="5751038"/>
+            <a:ext cx="868680" cy="270017"/>
           </a:xfrm>
           <a:prstGeom prst="rect">
             <a:avLst/>
@@ -30586,7 +30468,7 @@
         <p:spPr>
           <a:xfrm>
             <a:off x="6085332" y="1700784"/>
-            <a:ext cx="10973" cy="4224528"/>
+            <a:ext cx="10973" cy="4590288"/>
           </a:xfrm>
           <a:prstGeom prst="rect">
             <a:avLst/>
@@ -30596,65 +30478,6 @@
           </a:solidFill>
           <a:ln/>
         </p:spPr>
-      </p:sp>
-      <p:sp>
-        <p:nvSpPr>
-          <p:cNvPr id="211" name="Shape 209"/>
-          <p:cNvSpPr/>
-          <p:nvPr/>
-        </p:nvSpPr>
-        <p:spPr>
-          <a:xfrm>
-            <a:off x="457200" y="6126480"/>
-            <a:ext cx="11274552" cy="615696"/>
-          </a:xfrm>
-          <a:prstGeom prst="rect">
-            <a:avLst/>
-          </a:prstGeom>
-          <a:solidFill>
-            <a:srgbClr val="FBEBEA"/>
-          </a:solidFill>
-          <a:ln/>
-        </p:spPr>
-      </p:sp>
-      <p:sp>
-        <p:nvSpPr>
-          <p:cNvPr id="212" name="Text 210"/>
-          <p:cNvSpPr txBox="1"/>
-          <p:nvPr/>
-        </p:nvSpPr>
-        <p:spPr>
-          <a:xfrm>
-            <a:off x="658368" y="6144768"/>
-            <a:ext cx="10927080" cy="579120"/>
-          </a:xfrm>
-          <a:prstGeom prst="rect">
-            <a:avLst/>
-          </a:prstGeom>
-          <a:noFill/>
-          <a:ln/>
-        </p:spPr>
-        <p:txBody>
-          <a:bodyPr wrap="square" lIns="0" tIns="0" rIns="0" bIns="0" rtlCol="0" anchor="ctr"/>
-          <a:lstStyle/>
-          <a:p>
-            <a:pPr indent="0" marL="0">
-              <a:buNone/>
-            </a:pPr>
-            <a:r>
-              <a:rPr lang="en-US" sz="1600" b="1" dirty="0">
-                <a:solidFill>
-                  <a:srgbClr val="A82B26"/>
-                </a:solidFill>
-                <a:latin typeface="Inter" pitchFamily="34" charset="0"/>
-                <a:ea typeface="Inter" pitchFamily="34" charset="-122"/>
-                <a:cs typeface="Inter" pitchFamily="34" charset="-120"/>
-              </a:rPr>
-              <a:t>Group-wide the gap is 8.1% of RO gross. 5 stores are missing a fifth or more, led by Hyundai St George at 32% ($88K of $277K a month).</a:t>
-            </a:r>
-            <a:endParaRPr lang="en-US" sz="1600" dirty="0"/>
-          </a:p>
-        </p:txBody>
       </p:sp>
     </p:spTree>
   </p:cSld>
@@ -36178,7 +36001,7 @@
         <p:spPr>
           <a:xfrm>
             <a:off x="457200" y="1207008"/>
-            <a:ext cx="11274552" cy="4782312"/>
+            <a:ext cx="11274552" cy="5148072"/>
           </a:xfrm>
           <a:prstGeom prst="rect">
             <a:avLst/>
@@ -36354,7 +36177,7 @@
         <p:spPr>
           <a:xfrm>
             <a:off x="658368" y="1755648"/>
-            <a:ext cx="1920240" cy="416966"/>
+            <a:ext cx="1920240" cy="453542"/>
           </a:xfrm>
           <a:prstGeom prst="rect">
             <a:avLst/>
@@ -36392,8 +36215,8 @@
         </p:nvSpPr>
         <p:spPr>
           <a:xfrm>
-            <a:off x="2651760" y="1859890"/>
-            <a:ext cx="648144" cy="208483"/>
+            <a:off x="2651760" y="1869034"/>
+            <a:ext cx="648144" cy="226771"/>
           </a:xfrm>
           <a:prstGeom prst="rect">
             <a:avLst/>
@@ -36413,7 +36236,7 @@
         <p:spPr>
           <a:xfrm>
             <a:off x="3438144" y="1755648"/>
-            <a:ext cx="749808" cy="416966"/>
+            <a:ext cx="749808" cy="453542"/>
           </a:xfrm>
           <a:prstGeom prst="rect">
             <a:avLst/>
@@ -36452,7 +36275,7 @@
         <p:spPr>
           <a:xfrm>
             <a:off x="4187952" y="1755648"/>
-            <a:ext cx="841248" cy="416966"/>
+            <a:ext cx="841248" cy="453542"/>
           </a:xfrm>
           <a:prstGeom prst="rect">
             <a:avLst/>
@@ -36491,7 +36314,7 @@
         <p:spPr>
           <a:xfrm>
             <a:off x="5029200" y="1755648"/>
-            <a:ext cx="841248" cy="416966"/>
+            <a:ext cx="841248" cy="453542"/>
           </a:xfrm>
           <a:prstGeom prst="rect">
             <a:avLst/>
@@ -36529,8 +36352,8 @@
         </p:nvSpPr>
         <p:spPr>
           <a:xfrm>
-            <a:off x="658368" y="2172614"/>
-            <a:ext cx="1920240" cy="416966"/>
+            <a:off x="658368" y="2209190"/>
+            <a:ext cx="1920240" cy="453542"/>
           </a:xfrm>
           <a:prstGeom prst="rect">
             <a:avLst/>
@@ -36568,8 +36391,8 @@
         </p:nvSpPr>
         <p:spPr>
           <a:xfrm>
-            <a:off x="2651760" y="2276856"/>
-            <a:ext cx="615319" cy="208483"/>
+            <a:off x="2651760" y="2322576"/>
+            <a:ext cx="615319" cy="226771"/>
           </a:xfrm>
           <a:prstGeom prst="rect">
             <a:avLst/>
@@ -36588,8 +36411,8 @@
         </p:nvSpPr>
         <p:spPr>
           <a:xfrm>
-            <a:off x="3438144" y="2172614"/>
-            <a:ext cx="749808" cy="416966"/>
+            <a:off x="3438144" y="2209190"/>
+            <a:ext cx="749808" cy="453542"/>
           </a:xfrm>
           <a:prstGeom prst="rect">
             <a:avLst/>
@@ -36627,8 +36450,8 @@
         </p:nvSpPr>
         <p:spPr>
           <a:xfrm>
-            <a:off x="4187952" y="2172614"/>
-            <a:ext cx="841248" cy="416966"/>
+            <a:off x="4187952" y="2209190"/>
+            <a:ext cx="841248" cy="453542"/>
           </a:xfrm>
           <a:prstGeom prst="rect">
             <a:avLst/>
@@ -36666,8 +36489,8 @@
         </p:nvSpPr>
         <p:spPr>
           <a:xfrm>
-            <a:off x="5029200" y="2172614"/>
-            <a:ext cx="841248" cy="416966"/>
+            <a:off x="5029200" y="2209190"/>
+            <a:ext cx="841248" cy="453542"/>
           </a:xfrm>
           <a:prstGeom prst="rect">
             <a:avLst/>
@@ -36705,8 +36528,8 @@
         </p:nvSpPr>
         <p:spPr>
           <a:xfrm>
-            <a:off x="658368" y="2589581"/>
-            <a:ext cx="1920240" cy="416966"/>
+            <a:off x="658368" y="2662733"/>
+            <a:ext cx="1920240" cy="453542"/>
           </a:xfrm>
           <a:prstGeom prst="rect">
             <a:avLst/>
@@ -36744,8 +36567,8 @@
         </p:nvSpPr>
         <p:spPr>
           <a:xfrm>
-            <a:off x="2651760" y="2693822"/>
-            <a:ext cx="576700" cy="208483"/>
+            <a:off x="2651760" y="2776118"/>
+            <a:ext cx="576700" cy="226771"/>
           </a:xfrm>
           <a:prstGeom prst="rect">
             <a:avLst/>
@@ -36764,8 +36587,8 @@
         </p:nvSpPr>
         <p:spPr>
           <a:xfrm>
-            <a:off x="3438144" y="2589581"/>
-            <a:ext cx="749808" cy="416966"/>
+            <a:off x="3438144" y="2662733"/>
+            <a:ext cx="749808" cy="453542"/>
           </a:xfrm>
           <a:prstGeom prst="rect">
             <a:avLst/>
@@ -36803,8 +36626,8 @@
         </p:nvSpPr>
         <p:spPr>
           <a:xfrm>
-            <a:off x="4187952" y="2589581"/>
-            <a:ext cx="841248" cy="416966"/>
+            <a:off x="4187952" y="2662733"/>
+            <a:ext cx="841248" cy="453542"/>
           </a:xfrm>
           <a:prstGeom prst="rect">
             <a:avLst/>
@@ -36842,8 +36665,8 @@
         </p:nvSpPr>
         <p:spPr>
           <a:xfrm>
-            <a:off x="5029200" y="2589581"/>
-            <a:ext cx="841248" cy="416966"/>
+            <a:off x="5029200" y="2662733"/>
+            <a:ext cx="841248" cy="453542"/>
           </a:xfrm>
           <a:prstGeom prst="rect">
             <a:avLst/>
@@ -36881,8 +36704,8 @@
         </p:nvSpPr>
         <p:spPr>
           <a:xfrm>
-            <a:off x="658368" y="3006547"/>
-            <a:ext cx="1920240" cy="416966"/>
+            <a:off x="658368" y="3116275"/>
+            <a:ext cx="1920240" cy="453542"/>
           </a:xfrm>
           <a:prstGeom prst="rect">
             <a:avLst/>
@@ -36920,8 +36743,8 @@
         </p:nvSpPr>
         <p:spPr>
           <a:xfrm>
-            <a:off x="2651760" y="3110789"/>
-            <a:ext cx="499175" cy="208483"/>
+            <a:off x="2651760" y="3229661"/>
+            <a:ext cx="499175" cy="226771"/>
           </a:xfrm>
           <a:prstGeom prst="rect">
             <a:avLst/>
@@ -36940,8 +36763,8 @@
         </p:nvSpPr>
         <p:spPr>
           <a:xfrm>
-            <a:off x="3438144" y="3006547"/>
-            <a:ext cx="749808" cy="416966"/>
+            <a:off x="3438144" y="3116275"/>
+            <a:ext cx="749808" cy="453542"/>
           </a:xfrm>
           <a:prstGeom prst="rect">
             <a:avLst/>
@@ -36979,8 +36802,8 @@
         </p:nvSpPr>
         <p:spPr>
           <a:xfrm>
-            <a:off x="4187952" y="3006547"/>
-            <a:ext cx="841248" cy="416966"/>
+            <a:off x="4187952" y="3116275"/>
+            <a:ext cx="841248" cy="453542"/>
           </a:xfrm>
           <a:prstGeom prst="rect">
             <a:avLst/>
@@ -37018,8 +36841,8 @@
         </p:nvSpPr>
         <p:spPr>
           <a:xfrm>
-            <a:off x="5029200" y="3006547"/>
-            <a:ext cx="841248" cy="416966"/>
+            <a:off x="5029200" y="3116275"/>
+            <a:ext cx="841248" cy="453542"/>
           </a:xfrm>
           <a:prstGeom prst="rect">
             <a:avLst/>
@@ -37057,8 +36880,8 @@
         </p:nvSpPr>
         <p:spPr>
           <a:xfrm>
-            <a:off x="658368" y="3423514"/>
-            <a:ext cx="1920240" cy="416966"/>
+            <a:off x="658368" y="3569818"/>
+            <a:ext cx="1920240" cy="453542"/>
           </a:xfrm>
           <a:prstGeom prst="rect">
             <a:avLst/>
@@ -37096,8 +36919,8 @@
         </p:nvSpPr>
         <p:spPr>
           <a:xfrm>
-            <a:off x="2651760" y="3527755"/>
-            <a:ext cx="463439" cy="208483"/>
+            <a:off x="2651760" y="3683203"/>
+            <a:ext cx="463439" cy="226771"/>
           </a:xfrm>
           <a:prstGeom prst="rect">
             <a:avLst/>
@@ -37116,8 +36939,8 @@
         </p:nvSpPr>
         <p:spPr>
           <a:xfrm>
-            <a:off x="3438144" y="3423514"/>
-            <a:ext cx="749808" cy="416966"/>
+            <a:off x="3438144" y="3569818"/>
+            <a:ext cx="749808" cy="453542"/>
           </a:xfrm>
           <a:prstGeom prst="rect">
             <a:avLst/>
@@ -37155,8 +36978,8 @@
         </p:nvSpPr>
         <p:spPr>
           <a:xfrm>
-            <a:off x="4187952" y="3423514"/>
-            <a:ext cx="841248" cy="416966"/>
+            <a:off x="4187952" y="3569818"/>
+            <a:ext cx="841248" cy="453542"/>
           </a:xfrm>
           <a:prstGeom prst="rect">
             <a:avLst/>
@@ -37194,8 +37017,8 @@
         </p:nvSpPr>
         <p:spPr>
           <a:xfrm>
-            <a:off x="5029200" y="3423514"/>
-            <a:ext cx="841248" cy="416966"/>
+            <a:off x="5029200" y="3569818"/>
+            <a:ext cx="841248" cy="453542"/>
           </a:xfrm>
           <a:prstGeom prst="rect">
             <a:avLst/>
@@ -37233,8 +37056,8 @@
         </p:nvSpPr>
         <p:spPr>
           <a:xfrm>
-            <a:off x="658368" y="3840480"/>
-            <a:ext cx="1920240" cy="416966"/>
+            <a:off x="658368" y="4023360"/>
+            <a:ext cx="1920240" cy="453542"/>
           </a:xfrm>
           <a:prstGeom prst="rect">
             <a:avLst/>
@@ -37272,8 +37095,8 @@
         </p:nvSpPr>
         <p:spPr>
           <a:xfrm>
-            <a:off x="2651760" y="3944722"/>
-            <a:ext cx="446067" cy="208483"/>
+            <a:off x="2651760" y="4136746"/>
+            <a:ext cx="446067" cy="226771"/>
           </a:xfrm>
           <a:prstGeom prst="rect">
             <a:avLst/>
@@ -37292,8 +37115,8 @@
         </p:nvSpPr>
         <p:spPr>
           <a:xfrm>
-            <a:off x="3438144" y="3840480"/>
-            <a:ext cx="749808" cy="416966"/>
+            <a:off x="3438144" y="4023360"/>
+            <a:ext cx="749808" cy="453542"/>
           </a:xfrm>
           <a:prstGeom prst="rect">
             <a:avLst/>
@@ -37331,8 +37154,8 @@
         </p:nvSpPr>
         <p:spPr>
           <a:xfrm>
-            <a:off x="4187952" y="3840480"/>
-            <a:ext cx="841248" cy="416966"/>
+            <a:off x="4187952" y="4023360"/>
+            <a:ext cx="841248" cy="453542"/>
           </a:xfrm>
           <a:prstGeom prst="rect">
             <a:avLst/>
@@ -37370,8 +37193,8 @@
         </p:nvSpPr>
         <p:spPr>
           <a:xfrm>
-            <a:off x="5029200" y="3840480"/>
-            <a:ext cx="841248" cy="416966"/>
+            <a:off x="5029200" y="4023360"/>
+            <a:ext cx="841248" cy="453542"/>
           </a:xfrm>
           <a:prstGeom prst="rect">
             <a:avLst/>
@@ -37409,8 +37232,8 @@
         </p:nvSpPr>
         <p:spPr>
           <a:xfrm>
-            <a:off x="658368" y="4257446"/>
-            <a:ext cx="1920240" cy="416966"/>
+            <a:off x="658368" y="4476902"/>
+            <a:ext cx="1920240" cy="453542"/>
           </a:xfrm>
           <a:prstGeom prst="rect">
             <a:avLst/>
@@ -37448,8 +37271,8 @@
         </p:nvSpPr>
         <p:spPr>
           <a:xfrm>
-            <a:off x="2651760" y="4361688"/>
-            <a:ext cx="431099" cy="208483"/>
+            <a:off x="2651760" y="4590288"/>
+            <a:ext cx="431099" cy="226771"/>
           </a:xfrm>
           <a:prstGeom prst="rect">
             <a:avLst/>
@@ -37468,8 +37291,8 @@
         </p:nvSpPr>
         <p:spPr>
           <a:xfrm>
-            <a:off x="3438144" y="4257446"/>
-            <a:ext cx="749808" cy="416966"/>
+            <a:off x="3438144" y="4476902"/>
+            <a:ext cx="749808" cy="453542"/>
           </a:xfrm>
           <a:prstGeom prst="rect">
             <a:avLst/>
@@ -37507,8 +37330,8 @@
         </p:nvSpPr>
         <p:spPr>
           <a:xfrm>
-            <a:off x="4187952" y="4257446"/>
-            <a:ext cx="841248" cy="416966"/>
+            <a:off x="4187952" y="4476902"/>
+            <a:ext cx="841248" cy="453542"/>
           </a:xfrm>
           <a:prstGeom prst="rect">
             <a:avLst/>
@@ -37546,8 +37369,8 @@
         </p:nvSpPr>
         <p:spPr>
           <a:xfrm>
-            <a:off x="5029200" y="4257446"/>
-            <a:ext cx="841248" cy="416966"/>
+            <a:off x="5029200" y="4476902"/>
+            <a:ext cx="841248" cy="453542"/>
           </a:xfrm>
           <a:prstGeom prst="rect">
             <a:avLst/>
@@ -37585,8 +37408,8 @@
         </p:nvSpPr>
         <p:spPr>
           <a:xfrm>
-            <a:off x="658368" y="4674413"/>
-            <a:ext cx="1920240" cy="416966"/>
+            <a:off x="658368" y="4930445"/>
+            <a:ext cx="1920240" cy="453542"/>
           </a:xfrm>
           <a:prstGeom prst="rect">
             <a:avLst/>
@@ -37624,8 +37447,8 @@
         </p:nvSpPr>
         <p:spPr>
           <a:xfrm>
-            <a:off x="2651760" y="4778654"/>
-            <a:ext cx="422076" cy="208483"/>
+            <a:off x="2651760" y="5043830"/>
+            <a:ext cx="422076" cy="226771"/>
           </a:xfrm>
           <a:prstGeom prst="rect">
             <a:avLst/>
@@ -37644,8 +37467,8 @@
         </p:nvSpPr>
         <p:spPr>
           <a:xfrm>
-            <a:off x="3438144" y="4674413"/>
-            <a:ext cx="749808" cy="416966"/>
+            <a:off x="3438144" y="4930445"/>
+            <a:ext cx="749808" cy="453542"/>
           </a:xfrm>
           <a:prstGeom prst="rect">
             <a:avLst/>
@@ -37683,8 +37506,8 @@
         </p:nvSpPr>
         <p:spPr>
           <a:xfrm>
-            <a:off x="4187952" y="4674413"/>
-            <a:ext cx="841248" cy="416966"/>
+            <a:off x="4187952" y="4930445"/>
+            <a:ext cx="841248" cy="453542"/>
           </a:xfrm>
           <a:prstGeom prst="rect">
             <a:avLst/>
@@ -37722,8 +37545,8 @@
         </p:nvSpPr>
         <p:spPr>
           <a:xfrm>
-            <a:off x="5029200" y="4674413"/>
-            <a:ext cx="841248" cy="416966"/>
+            <a:off x="5029200" y="4930445"/>
+            <a:ext cx="841248" cy="453542"/>
           </a:xfrm>
           <a:prstGeom prst="rect">
             <a:avLst/>
@@ -37761,8 +37584,8 @@
         </p:nvSpPr>
         <p:spPr>
           <a:xfrm>
-            <a:off x="658368" y="5091379"/>
-            <a:ext cx="1920240" cy="416966"/>
+            <a:off x="658368" y="5383987"/>
+            <a:ext cx="1920240" cy="453542"/>
           </a:xfrm>
           <a:prstGeom prst="rect">
             <a:avLst/>
@@ -37800,8 +37623,8 @@
         </p:nvSpPr>
         <p:spPr>
           <a:xfrm>
-            <a:off x="2651760" y="5195621"/>
-            <a:ext cx="408666" cy="208483"/>
+            <a:off x="2651760" y="5497373"/>
+            <a:ext cx="408666" cy="226771"/>
           </a:xfrm>
           <a:prstGeom prst="rect">
             <a:avLst/>
@@ -37820,8 +37643,8 @@
         </p:nvSpPr>
         <p:spPr>
           <a:xfrm>
-            <a:off x="3438144" y="5091379"/>
-            <a:ext cx="749808" cy="416966"/>
+            <a:off x="3438144" y="5383987"/>
+            <a:ext cx="749808" cy="453542"/>
           </a:xfrm>
           <a:prstGeom prst="rect">
             <a:avLst/>
@@ -37859,8 +37682,8 @@
         </p:nvSpPr>
         <p:spPr>
           <a:xfrm>
-            <a:off x="4187952" y="5091379"/>
-            <a:ext cx="841248" cy="416966"/>
+            <a:off x="4187952" y="5383987"/>
+            <a:ext cx="841248" cy="453542"/>
           </a:xfrm>
           <a:prstGeom prst="rect">
             <a:avLst/>
@@ -37898,8 +37721,8 @@
         </p:nvSpPr>
         <p:spPr>
           <a:xfrm>
-            <a:off x="5029200" y="5091379"/>
-            <a:ext cx="841248" cy="416966"/>
+            <a:off x="5029200" y="5383987"/>
+            <a:ext cx="841248" cy="453542"/>
           </a:xfrm>
           <a:prstGeom prst="rect">
             <a:avLst/>
@@ -37937,8 +37760,8 @@
         </p:nvSpPr>
         <p:spPr>
           <a:xfrm>
-            <a:off x="658368" y="5508346"/>
-            <a:ext cx="1920240" cy="416966"/>
+            <a:off x="658368" y="5837530"/>
+            <a:ext cx="1920240" cy="453542"/>
           </a:xfrm>
           <a:prstGeom prst="rect">
             <a:avLst/>
@@ -37976,8 +37799,8 @@
         </p:nvSpPr>
         <p:spPr>
           <a:xfrm>
-            <a:off x="2651760" y="5612587"/>
-            <a:ext cx="407442" cy="208483"/>
+            <a:off x="2651760" y="5950915"/>
+            <a:ext cx="407442" cy="226771"/>
           </a:xfrm>
           <a:prstGeom prst="rect">
             <a:avLst/>
@@ -37996,8 +37819,8 @@
         </p:nvSpPr>
         <p:spPr>
           <a:xfrm>
-            <a:off x="3438144" y="5508346"/>
-            <a:ext cx="749808" cy="416966"/>
+            <a:off x="3438144" y="5837530"/>
+            <a:ext cx="749808" cy="453542"/>
           </a:xfrm>
           <a:prstGeom prst="rect">
             <a:avLst/>
@@ -38035,8 +37858,8 @@
         </p:nvSpPr>
         <p:spPr>
           <a:xfrm>
-            <a:off x="4187952" y="5508346"/>
-            <a:ext cx="841248" cy="416966"/>
+            <a:off x="4187952" y="5837530"/>
+            <a:ext cx="841248" cy="453542"/>
           </a:xfrm>
           <a:prstGeom prst="rect">
             <a:avLst/>
@@ -38074,8 +37897,8 @@
         </p:nvSpPr>
         <p:spPr>
           <a:xfrm>
-            <a:off x="5029200" y="5508346"/>
-            <a:ext cx="841248" cy="416966"/>
+            <a:off x="5029200" y="5837530"/>
+            <a:ext cx="841248" cy="453542"/>
           </a:xfrm>
           <a:prstGeom prst="rect">
             <a:avLst/>
@@ -38114,7 +37937,7 @@
         <p:spPr>
           <a:xfrm>
             <a:off x="3312839" y="1755648"/>
-            <a:ext cx="14630" cy="4169664"/>
+            <a:ext cx="14630" cy="4535424"/>
           </a:xfrm>
           <a:prstGeom prst="rect">
             <a:avLst/>
@@ -38290,7 +38113,7 @@
         <p:spPr>
           <a:xfrm>
             <a:off x="6208776" y="1755648"/>
-            <a:ext cx="1920240" cy="416966"/>
+            <a:ext cx="1920240" cy="453542"/>
           </a:xfrm>
           <a:prstGeom prst="rect">
             <a:avLst/>
@@ -38328,8 +38151,8 @@
         </p:nvSpPr>
         <p:spPr>
           <a:xfrm>
-            <a:off x="8202168" y="1859890"/>
-            <a:ext cx="572597" cy="208483"/>
+            <a:off x="8202168" y="1869034"/>
+            <a:ext cx="572597" cy="226771"/>
           </a:xfrm>
           <a:prstGeom prst="rect">
             <a:avLst/>
@@ -38349,7 +38172,7 @@
         <p:spPr>
           <a:xfrm>
             <a:off x="8988552" y="1755648"/>
-            <a:ext cx="749808" cy="416966"/>
+            <a:ext cx="749808" cy="453542"/>
           </a:xfrm>
           <a:prstGeom prst="rect">
             <a:avLst/>
@@ -38388,7 +38211,7 @@
         <p:spPr>
           <a:xfrm>
             <a:off x="9738360" y="1755648"/>
-            <a:ext cx="841248" cy="416966"/>
+            <a:ext cx="841248" cy="453542"/>
           </a:xfrm>
           <a:prstGeom prst="rect">
             <a:avLst/>
@@ -38427,7 +38250,7 @@
         <p:spPr>
           <a:xfrm>
             <a:off x="10579608" y="1755648"/>
-            <a:ext cx="841248" cy="416966"/>
+            <a:ext cx="841248" cy="453542"/>
           </a:xfrm>
           <a:prstGeom prst="rect">
             <a:avLst/>
@@ -38465,8 +38288,8 @@
         </p:nvSpPr>
         <p:spPr>
           <a:xfrm>
-            <a:off x="6208776" y="2172614"/>
-            <a:ext cx="1920240" cy="416966"/>
+            <a:off x="6208776" y="2209190"/>
+            <a:ext cx="1920240" cy="453542"/>
           </a:xfrm>
           <a:prstGeom prst="rect">
             <a:avLst/>
@@ -38504,8 +38327,8 @@
         </p:nvSpPr>
         <p:spPr>
           <a:xfrm>
-            <a:off x="8202168" y="2276856"/>
-            <a:ext cx="547492" cy="208483"/>
+            <a:off x="8202168" y="2322576"/>
+            <a:ext cx="547492" cy="226771"/>
           </a:xfrm>
           <a:prstGeom prst="rect">
             <a:avLst/>
@@ -38524,8 +38347,8 @@
         </p:nvSpPr>
         <p:spPr>
           <a:xfrm>
-            <a:off x="8988552" y="2172614"/>
-            <a:ext cx="749808" cy="416966"/>
+            <a:off x="8988552" y="2209190"/>
+            <a:ext cx="749808" cy="453542"/>
           </a:xfrm>
           <a:prstGeom prst="rect">
             <a:avLst/>
@@ -38563,8 +38386,8 @@
         </p:nvSpPr>
         <p:spPr>
           <a:xfrm>
-            <a:off x="9738360" y="2172614"/>
-            <a:ext cx="841248" cy="416966"/>
+            <a:off x="9738360" y="2209190"/>
+            <a:ext cx="841248" cy="453542"/>
           </a:xfrm>
           <a:prstGeom prst="rect">
             <a:avLst/>
@@ -38602,8 +38425,8 @@
         </p:nvSpPr>
         <p:spPr>
           <a:xfrm>
-            <a:off x="10579608" y="2172614"/>
-            <a:ext cx="841248" cy="416966"/>
+            <a:off x="10579608" y="2209190"/>
+            <a:ext cx="841248" cy="453542"/>
           </a:xfrm>
           <a:prstGeom prst="rect">
             <a:avLst/>
@@ -38641,8 +38464,8 @@
         </p:nvSpPr>
         <p:spPr>
           <a:xfrm>
-            <a:off x="6208776" y="2589581"/>
-            <a:ext cx="1920240" cy="416966"/>
+            <a:off x="6208776" y="2662733"/>
+            <a:ext cx="1920240" cy="453542"/>
           </a:xfrm>
           <a:prstGeom prst="rect">
             <a:avLst/>
@@ -38680,8 +38503,8 @@
         </p:nvSpPr>
         <p:spPr>
           <a:xfrm>
-            <a:off x="8202168" y="2693822"/>
-            <a:ext cx="481123" cy="208483"/>
+            <a:off x="8202168" y="2776118"/>
+            <a:ext cx="481123" cy="226771"/>
           </a:xfrm>
           <a:prstGeom prst="rect">
             <a:avLst/>
@@ -38700,8 +38523,8 @@
         </p:nvSpPr>
         <p:spPr>
           <a:xfrm>
-            <a:off x="8988552" y="2589581"/>
-            <a:ext cx="749808" cy="416966"/>
+            <a:off x="8988552" y="2662733"/>
+            <a:ext cx="749808" cy="453542"/>
           </a:xfrm>
           <a:prstGeom prst="rect">
             <a:avLst/>
@@ -38739,8 +38562,8 @@
         </p:nvSpPr>
         <p:spPr>
           <a:xfrm>
-            <a:off x="9738360" y="2589581"/>
-            <a:ext cx="841248" cy="416966"/>
+            <a:off x="9738360" y="2662733"/>
+            <a:ext cx="841248" cy="453542"/>
           </a:xfrm>
           <a:prstGeom prst="rect">
             <a:avLst/>
@@ -38778,8 +38601,8 @@
         </p:nvSpPr>
         <p:spPr>
           <a:xfrm>
-            <a:off x="10579608" y="2589581"/>
-            <a:ext cx="841248" cy="416966"/>
+            <a:off x="10579608" y="2662733"/>
+            <a:ext cx="841248" cy="453542"/>
           </a:xfrm>
           <a:prstGeom prst="rect">
             <a:avLst/>
@@ -38818,7 +38641,7 @@
         <p:spPr>
           <a:xfrm>
             <a:off x="8863247" y="1755648"/>
-            <a:ext cx="14630" cy="1250899"/>
+            <a:ext cx="14630" cy="1360627"/>
           </a:xfrm>
           <a:prstGeom prst="rect">
             <a:avLst/>
@@ -38838,7 +38661,7 @@
         <p:spPr>
           <a:xfrm>
             <a:off x="6035040" y="1371600"/>
-            <a:ext cx="10973" cy="4553712"/>
+            <a:ext cx="10973" cy="4919472"/>
           </a:xfrm>
           <a:prstGeom prst="rect">
             <a:avLst/>
@@ -38848,65 +38671,6 @@
           </a:solidFill>
           <a:ln/>
         </p:spPr>
-      </p:sp>
-      <p:sp>
-        <p:nvSpPr>
-          <p:cNvPr id="82" name="Shape 80"/>
-          <p:cNvSpPr/>
-          <p:nvPr/>
-        </p:nvSpPr>
-        <p:spPr>
-          <a:xfrm>
-            <a:off x="457200" y="6126480"/>
-            <a:ext cx="11274552" cy="615696"/>
-          </a:xfrm>
-          <a:prstGeom prst="rect">
-            <a:avLst/>
-          </a:prstGeom>
-          <a:solidFill>
-            <a:srgbClr val="EDF4FA"/>
-          </a:solidFill>
-          <a:ln/>
-        </p:spPr>
-      </p:sp>
-      <p:sp>
-        <p:nvSpPr>
-          <p:cNvPr id="83" name="Text 81"/>
-          <p:cNvSpPr txBox="1"/>
-          <p:nvPr/>
-        </p:nvSpPr>
-        <p:spPr>
-          <a:xfrm>
-            <a:off x="658368" y="6144768"/>
-            <a:ext cx="10927080" cy="579120"/>
-          </a:xfrm>
-          <a:prstGeom prst="rect">
-            <a:avLst/>
-          </a:prstGeom>
-          <a:noFill/>
-          <a:ln/>
-        </p:spPr>
-        <p:txBody>
-          <a:bodyPr wrap="square" lIns="0" tIns="0" rIns="0" bIns="0" rtlCol="0" anchor="ctr"/>
-          <a:lstStyle/>
-          <a:p>
-            <a:pPr indent="0" marL="0">
-              <a:buNone/>
-            </a:pPr>
-            <a:r>
-              <a:rPr lang="en-US" sz="1600" b="1" dirty="0">
-                <a:solidFill>
-                  <a:srgbClr val="0B2C4A"/>
-                </a:solidFill>
-                <a:latin typeface="Inter" pitchFamily="34" charset="0"/>
-                <a:ea typeface="Inter" pitchFamily="34" charset="-122"/>
-                <a:cs typeface="Inter" pitchFamily="34" charset="-120"/>
-              </a:rPr>
-              <a:t>10 of the 13 stores under 85% also see fewer ROs per tech than their segment: check car count and staffing first. At Honda Flagstaff, Kia LV, Volvo the work is there.</a:t>
-            </a:r>
-            <a:endParaRPr lang="en-US" sz="1600" dirty="0"/>
-          </a:p>
-        </p:txBody>
       </p:sp>
     </p:spTree>
   </p:cSld>

--- a/day2-deck/decks/Technician Proficiency - House Style.pptx
+++ b/day2-deck/decks/Technician Proficiency - House Style.pptx
@@ -597,7 +597,7 @@
           <a:p>
             <a:r>
               <a:rPr lang="en-US" dirty="0"/>
-              <a:t>Takeaway (off the slide): 20 of 33 stores at or above the 85% target and 12 above 100%. Group 94.7%, led by Honda Henderson at 118.5%; Acura lowest at 67.4%.Source: ADP worked hours (regular + overtime) and Qlik - Closed Repair Orders sold hours, all pay types, matched by tech number. Dec 25, 2025 - Oct 9, 2026 (shown as Jan-Sep). Same-store, INEOS excluded (opened 2026). Service, express, team-leader and shop-foreman titles only; body shop, detail and tint excluded. Outliers dropped: shop foremen at or below 30% (workbook uses 20%; under 30% a foreman is mainly dispatching), team leaders at or below 20%, service and express technicians at or below 10% (workbook uses 2%; under 10% a tech is not working as a line tech). Unassigned codes (MULT, 999, 77777) excluded. Role changes: ADP shows one current title with worked hours for the whole period, so when a tech's worked hours exceed 125% of full time over the months they actually flagged, worked hours are scaled to that span (56 techs). 45 keying-error lines removed from sold hours (5,399 hrs: single lines of 20+ hours with under $25 labor sale per hour, e.g. 940.58 hrs for $0 at Hyundai St George, RO 177970). Proficiency = sold hours / worked hours, from store totals. Green at or above 85%, red below. Bars start at 40%.ACURA: 67.4% (11,339 sold / 16,815 worked, 11 techs: 0 above, 0 on, 11 under)
+              <a:t>Takeaway with the store call-outs (off the slide): 20 of 33 stores at or above the 85% target and 12 above 100%. Group 94.7%, led by Honda Henderson at 118.5%; Acura lowest at 67.4%.Source: ADP worked hours (regular + overtime) and Qlik - Closed Repair Orders sold hours, all pay types, matched by tech number. Dec 25, 2025 - Oct 9, 2026 (shown as Jan-Sep). Same-store, INEOS excluded (opened 2026). Service, express, team-leader and shop-foreman titles only; body shop, detail and tint excluded. Outliers dropped: shop foremen at or below 30% (workbook uses 20%; under 30% a foreman is mainly dispatching), team leaders at or below 20%, service and express technicians at or below 10% (workbook uses 2%; under 10% a tech is not working as a line tech). Unassigned codes (MULT, 999, 77777) excluded. Role changes: ADP shows one current title with worked hours for the whole period, so when a tech's worked hours exceed 125% of full time over the months they actually flagged, worked hours are scaled to that span (56 techs). 45 keying-error lines removed from sold hours (5,399 hrs: single lines of 20+ hours with under $25 labor sale per hour, e.g. 940.58 hrs for $0 at Hyundai St George, RO 177970). Proficiency = sold hours / worked hours, from store totals. Green at or above 85%, red below. Bars start at 40%.ACURA: 67.4% (11,339 sold / 16,815 worked, 11 techs: 0 above, 0 on, 11 under)
 AUDI HENDERSON: 91.0% (33,481 sold / 36,766 worked, 23 techs: 6 above, 4 on, 13 under)
 AUDI RENO: 117.1% (15,985 sold / 13,640 worked, 10 techs: 6 above, 0 on, 4 under)
 CADILLAC: 87.7% (42,358 sold / 48,277 worked, 29 techs: 8 above, 5 on, 16 under)
@@ -957,7 +957,7 @@
           <a:p>
             <a:r>
               <a:rPr lang="en-US" dirty="0"/>
-              <a:t>Takeaway (off the slide): Six stores hold $647K a month, led by Cadillac at $158K. 6 stores at or above 85% still leave $537K a month.Source: Each technician under 85% lifted to 85% of their own worked hours; techs at or above 85% count as zero, so no store offsets one tech with another. Gap hours valued at what the store's own technicians (counted titles) earn per sold hour in labor gross and parts gross, all pay types, Qlik - Closed Repair Orders, same dates; tech pay at their labor cost per sold hour. Store-wide averages are not used because they carry detail, rental and recon sale booked with no hours. Per month = period total / 9.49 months (Dec 25, 2025 - Oct 9, 2026). Parts assumes the extra hours carry the store's average parts per hour. Population as on the proficiency slides. Per mo = labor + parts gross. Under 85% = technicians under 85% of all counted. Store = store proficiency.ACURA: 67.4%; 11 of 11 under 85%; gap 2,954 hrs; labor $50K/mo + parts $26K/mo; tech pay $14K/mo; 25.4% of $299K/mo RO gross; top quarter 74% (3 techs); 3.46 ROs/tech day; 1.75 hrs/RO
+              <a:t>Takeaway with the store call-outs (off the slide): Six stores hold $647K a month, led by Cadillac at $158K. 6 stores at or above 85% still leave $537K a month.Source: Each technician under 85% lifted to 85% of their own worked hours; techs at or above 85% count as zero, so no store offsets one tech with another. Gap hours valued at what the store's own technicians (counted titles) earn per sold hour in labor gross and parts gross, all pay types, Qlik - Closed Repair Orders, same dates; tech pay at their labor cost per sold hour. Store-wide averages are not used because they carry detail, rental and recon sale booked with no hours. Per month = period total / 9.49 months (Dec 25, 2025 - Oct 9, 2026). Parts assumes the extra hours carry the store's average parts per hour. Population as on the proficiency slides. Per mo = labor + parts gross. Under 85% = technicians under 85% of all counted. Store = store proficiency.ACURA: 67.4%; 11 of 11 under 85%; gap 2,954 hrs; labor $50K/mo + parts $26K/mo; tech pay $14K/mo; 25.4% of $299K/mo RO gross; top quarter 74% (3 techs); 3.46 ROs/tech day; 1.75 hrs/RO
 AUDI HENDERSON: 91.0%; 13 of 23 under 85%; gap 3,426 hrs; labor $81K/mo + parts $20K/mo; tech pay $14K/mo; 8.3% of $1.23M/mo RO gross; top quarter 135% (6 techs); 2.77 ROs/tech day; 3.23 hrs/RO
 AUDI RENO: 117.1%; 4 of 10 under 85%; gap 826 hrs; labor $14K/mo + parts $6K/mo; tech pay $4K/mo; 4.0% of $504K/mo RO gross; top quarter 194% (2 techs); 4.08 ROs/tech day; 2.88 hrs/RO
 CADILLAC: 87.7%; 16 of 29 under 85%; gap 6,705 hrs; labor $108K/mo + parts $49K/mo; tech pay $24K/mo; 13.6% of $1.16M/mo RO gross; top quarter 143% (7 techs); 2.48 ROs/tech day; 3.41 hrs/RO
@@ -1077,7 +1077,7 @@
           <a:p>
             <a:r>
               <a:rPr lang="en-US" dirty="0"/>
-              <a:t>Takeaway (off the slide): Group-wide the gap is 8.1% of RO gross. 5 stores are missing a fifth or more, led by Hyundai St George at 32% ($88K of $277K a month).Source: Each technician under 85% lifted to 85% of their own worked hours; techs at or above 85% count as zero, so no store offsets one tech with another. Gap hours valued at what the store's own technicians (counted titles) earn per sold hour in labor gross and parts gross, all pay types, Qlik - Closed Repair Orders, same dates; tech pay at their labor cost per sold hour. Store-wide averages are not used because they carry detail, rental and recon sale booked with no hours. Per month = period total / 9.49 months (Dec 25, 2025 - Oct 9, 2026). Parts assumes the extra hours carry the store's average parts per hour. Population as on the proficiency slides. Missed and Gross are per month. Share = missed labor + parts gross / labor + parts gross on the store's closed ROs, all pay types, same dates (includes work on shared tech codes). Not P&amp;L gross: counter and wholesale parts are excluded because techs do not produce them.ACURA: 67.4%; 11 of 11 under 85%; gap 2,954 hrs; labor $50K/mo + parts $26K/mo; tech pay $14K/mo; 25.4% of $299K/mo RO gross; top quarter 74% (3 techs); 3.46 ROs/tech day; 1.75 hrs/RO
+              <a:t>Takeaway with the store call-outs (off the slide): Group-wide the gap is 8.1% of RO gross. 5 stores are missing a fifth or more, led by Hyundai St George at 32% ($88K of $277K a month).Source: Each technician under 85% lifted to 85% of their own worked hours; techs at or above 85% count as zero, so no store offsets one tech with another. Gap hours valued at what the store's own technicians (counted titles) earn per sold hour in labor gross and parts gross, all pay types, Qlik - Closed Repair Orders, same dates; tech pay at their labor cost per sold hour. Store-wide averages are not used because they carry detail, rental and recon sale booked with no hours. Per month = period total / 9.49 months (Dec 25, 2025 - Oct 9, 2026). Parts assumes the extra hours carry the store's average parts per hour. Population as on the proficiency slides. Missed and Gross are per month. Share = missed labor + parts gross / labor + parts gross on the store's closed ROs, all pay types, same dates (includes work on shared tech codes). Not P&amp;L gross: counter and wholesale parts are excluded because techs do not produce them.ACURA: 67.4%; 11 of 11 under 85%; gap 2,954 hrs; labor $50K/mo + parts $26K/mo; tech pay $14K/mo; 25.4% of $299K/mo RO gross; top quarter 74% (3 techs); 3.46 ROs/tech day; 1.75 hrs/RO
 AUDI HENDERSON: 91.0%; 13 of 23 under 85%; gap 3,426 hrs; labor $81K/mo + parts $20K/mo; tech pay $14K/mo; 8.3% of $1.23M/mo RO gross; top quarter 135% (6 techs); 2.77 ROs/tech day; 3.23 hrs/RO
 AUDI RENO: 117.1%; 4 of 10 under 85%; gap 826 hrs; labor $14K/mo + parts $6K/mo; tech pay $4K/mo; 4.0% of $504K/mo RO gross; top quarter 194% (2 techs); 4.08 ROs/tech day; 2.88 hrs/RO
 CADILLAC: 87.7%; 16 of 29 under 85%; gap 6,705 hrs; labor $108K/mo + parts $49K/mo; tech pay $24K/mo; 13.6% of $1.16M/mo RO gross; top quarter 143% (7 techs); 2.48 ROs/tech day; 3.41 hrs/RO
@@ -1317,7 +1317,7 @@
           <a:p>
             <a:r>
               <a:rPr lang="en-US" dirty="0"/>
-              <a:t>Takeaway (off the slide): 10 of the 13 stores under 85% also see fewer ROs per tech than their segment: check car count and staffing first. At Honda Flagstaff, Kia LV, Volvo the work is there.Source: ADP worked hours (regular + overtime) and Qlik - Closed Repair Orders sold hours, all pay types, matched by tech number. Dec 25, 2025 - Oct 9, 2026 (shown as Jan-Sep). Same-store, INEOS excluded (opened 2026). Service, express, team-leader and shop-foreman titles only; body shop, detail and tint excluded. Outliers dropped: shop foremen at or below 30% (workbook uses 20%; under 30% a foreman is mainly dispatching), team leaders at or below 20%, service and express technicians at or below 10% (workbook uses 2%; under 10% a tech is not working as a line tech). Unassigned codes (MULT, 999, 77777) excluded. Role changes: ADP shows one current title with worked hours for the whole period, so when a tech's worked hours exceed 125% of full time over the months they actually flagged, worked hours are scaled to that span (56 techs). 45 keying-error lines removed from sold hours (5,399 hrs: single lines of 20+ hours with under $25 labor sale per hour, e.g. 940.58 hrs for $0 at Hyundai St George, RO 177970). Stores under 85% only. ROs/day = distinct ROs, all pay types, per counted tech per 8 worked hours. Seg avg = luxury 3.0, non-luxury 4.9 (luxury = Lexus, Lincoln, Cadillac, Volvo, Audi Reno, Audi Henderson, LR Reno, LR LV, LR Henderson). Fewer ROs per tech can mean too few cars for the staff or slow techs turning work away; it starts the conversation rather than settling it.ACURA: 67.4%; 11 of 11 under 85%; gap 2,954 hrs; labor $50K/mo + parts $26K/mo; tech pay $14K/mo; 25.4% of $299K/mo RO gross; top quarter 74% (3 techs); 3.46 ROs/tech day; 1.75 hrs/RO
+              <a:t>Takeaway with the store call-outs (off the slide): 10 of the 13 stores under 85% also see fewer ROs per tech than their segment: check car count and staffing first. At Honda Flagstaff, Kia LV, Volvo the work is there.Source: ADP worked hours (regular + overtime) and Qlik - Closed Repair Orders sold hours, all pay types, matched by tech number. Dec 25, 2025 - Oct 9, 2026 (shown as Jan-Sep). Same-store, INEOS excluded (opened 2026). Service, express, team-leader and shop-foreman titles only; body shop, detail and tint excluded. Outliers dropped: shop foremen at or below 30% (workbook uses 20%; under 30% a foreman is mainly dispatching), team leaders at or below 20%, service and express technicians at or below 10% (workbook uses 2%; under 10% a tech is not working as a line tech). Unassigned codes (MULT, 999, 77777) excluded. Role changes: ADP shows one current title with worked hours for the whole period, so when a tech's worked hours exceed 125% of full time over the months they actually flagged, worked hours are scaled to that span (56 techs). 45 keying-error lines removed from sold hours (5,399 hrs: single lines of 20+ hours with under $25 labor sale per hour, e.g. 940.58 hrs for $0 at Hyundai St George, RO 177970). Stores under 85% only. ROs/day = distinct ROs, all pay types, per counted tech per 8 worked hours. Seg avg = luxury 3.0, non-luxury 4.9 (luxury = Lexus, Lincoln, Cadillac, Volvo, Audi Reno, Audi Henderson, LR Reno, LR LV, LR Henderson). Fewer ROs per tech can mean too few cars for the staff or slow techs turning work away; it starts the conversation rather than settling it.ACURA: 67.4%; 11 of 11 under 85%; gap 2,954 hrs; labor $50K/mo + parts $26K/mo; tech pay $14K/mo; 25.4% of $299K/mo RO gross; top quarter 74% (3 techs); 3.46 ROs/tech day; 1.75 hrs/RO
 AUDI HENDERSON: 91.0%; 13 of 23 under 85%; gap 3,426 hrs; labor $81K/mo + parts $20K/mo; tech pay $14K/mo; 8.3% of $1.23M/mo RO gross; top quarter 135% (6 techs); 2.77 ROs/tech day; 3.23 hrs/RO
 AUDI RENO: 117.1%; 4 of 10 under 85%; gap 826 hrs; labor $14K/mo + parts $6K/mo; tech pay $4K/mo; 4.0% of $504K/mo RO gross; top quarter 194% (2 techs); 4.08 ROs/tech day; 2.88 hrs/RO
 CADILLAC: 87.7%; 16 of 29 under 85%; gap 6,705 hrs; labor $108K/mo + parts $49K/mo; tech pay $24K/mo; 13.6% of $1.16M/mo RO gross; top quarter 143% (7 techs); 2.48 ROs/tech day; 3.41 hrs/RO
@@ -1978,7 +1978,7 @@
         <p:spPr>
           <a:xfrm>
             <a:off x="457200" y="1207008"/>
-            <a:ext cx="11274552" cy="5148072"/>
+            <a:ext cx="11274552" cy="4782312"/>
           </a:xfrm>
           <a:prstGeom prst="rect">
             <a:avLst/>
@@ -2155,7 +2155,7 @@
         <p:spPr>
           <a:xfrm>
             <a:off x="658368" y="1847088"/>
-            <a:ext cx="310896" cy="261411"/>
+            <a:ext cx="310896" cy="239896"/>
           </a:xfrm>
           <a:prstGeom prst="rect">
             <a:avLst/>
@@ -2194,7 +2194,7 @@
         <p:spPr>
           <a:xfrm>
             <a:off x="1014984" y="1847088"/>
-            <a:ext cx="1920240" cy="261411"/>
+            <a:ext cx="1920240" cy="239896"/>
           </a:xfrm>
           <a:prstGeom prst="rect">
             <a:avLst/>
@@ -2232,8 +2232,8 @@
         </p:nvSpPr>
         <p:spPr>
           <a:xfrm>
-            <a:off x="3008376" y="1912441"/>
-            <a:ext cx="1691640" cy="130705"/>
+            <a:off x="3008376" y="1907062"/>
+            <a:ext cx="1691640" cy="119948"/>
           </a:xfrm>
           <a:prstGeom prst="rect">
             <a:avLst/>
@@ -2253,7 +2253,7 @@
         <p:spPr>
           <a:xfrm>
             <a:off x="4754880" y="1847088"/>
-            <a:ext cx="1143000" cy="261411"/>
+            <a:ext cx="1143000" cy="239896"/>
           </a:xfrm>
           <a:prstGeom prst="rect">
             <a:avLst/>
@@ -2291,8 +2291,8 @@
         </p:nvSpPr>
         <p:spPr>
           <a:xfrm>
-            <a:off x="658368" y="2108499"/>
-            <a:ext cx="310896" cy="261411"/>
+            <a:off x="658368" y="2086984"/>
+            <a:ext cx="310896" cy="239896"/>
           </a:xfrm>
           <a:prstGeom prst="rect">
             <a:avLst/>
@@ -2330,8 +2330,8 @@
         </p:nvSpPr>
         <p:spPr>
           <a:xfrm>
-            <a:off x="1014984" y="2108499"/>
-            <a:ext cx="1920240" cy="261411"/>
+            <a:off x="1014984" y="2086984"/>
+            <a:ext cx="1920240" cy="239896"/>
           </a:xfrm>
           <a:prstGeom prst="rect">
             <a:avLst/>
@@ -2369,8 +2369,8 @@
         </p:nvSpPr>
         <p:spPr>
           <a:xfrm>
-            <a:off x="3008376" y="2173852"/>
-            <a:ext cx="1663031" cy="130705"/>
+            <a:off x="3008376" y="2146957"/>
+            <a:ext cx="1663031" cy="119948"/>
           </a:xfrm>
           <a:prstGeom prst="rect">
             <a:avLst/>
@@ -2389,8 +2389,8 @@
         </p:nvSpPr>
         <p:spPr>
           <a:xfrm>
-            <a:off x="4754880" y="2108499"/>
-            <a:ext cx="1143000" cy="261411"/>
+            <a:off x="4754880" y="2086984"/>
+            <a:ext cx="1143000" cy="239896"/>
           </a:xfrm>
           <a:prstGeom prst="rect">
             <a:avLst/>
@@ -2428,8 +2428,8 @@
         </p:nvSpPr>
         <p:spPr>
           <a:xfrm>
-            <a:off x="658368" y="2369910"/>
-            <a:ext cx="310896" cy="261411"/>
+            <a:off x="658368" y="2326879"/>
+            <a:ext cx="310896" cy="239896"/>
           </a:xfrm>
           <a:prstGeom prst="rect">
             <a:avLst/>
@@ -2467,8 +2467,8 @@
         </p:nvSpPr>
         <p:spPr>
           <a:xfrm>
-            <a:off x="1014984" y="2369910"/>
-            <a:ext cx="1920240" cy="261411"/>
+            <a:off x="1014984" y="2326879"/>
+            <a:ext cx="1920240" cy="239896"/>
           </a:xfrm>
           <a:prstGeom prst="rect">
             <a:avLst/>
@@ -2506,8 +2506,8 @@
         </p:nvSpPr>
         <p:spPr>
           <a:xfrm>
-            <a:off x="3008376" y="2435262"/>
-            <a:ext cx="1503694" cy="130705"/>
+            <a:off x="3008376" y="2386853"/>
+            <a:ext cx="1503694" cy="119948"/>
           </a:xfrm>
           <a:prstGeom prst="rect">
             <a:avLst/>
@@ -2526,8 +2526,8 @@
         </p:nvSpPr>
         <p:spPr>
           <a:xfrm>
-            <a:off x="4754880" y="2369910"/>
-            <a:ext cx="1143000" cy="261411"/>
+            <a:off x="4754880" y="2326879"/>
+            <a:ext cx="1143000" cy="239896"/>
           </a:xfrm>
           <a:prstGeom prst="rect">
             <a:avLst/>
@@ -2565,8 +2565,8 @@
         </p:nvSpPr>
         <p:spPr>
           <a:xfrm>
-            <a:off x="658368" y="2631320"/>
-            <a:ext cx="310896" cy="261411"/>
+            <a:off x="658368" y="2566775"/>
+            <a:ext cx="310896" cy="239896"/>
           </a:xfrm>
           <a:prstGeom prst="rect">
             <a:avLst/>
@@ -2604,8 +2604,8 @@
         </p:nvSpPr>
         <p:spPr>
           <a:xfrm>
-            <a:off x="1014984" y="2631320"/>
-            <a:ext cx="1920240" cy="261411"/>
+            <a:off x="1014984" y="2566775"/>
+            <a:ext cx="1920240" cy="239896"/>
           </a:xfrm>
           <a:prstGeom prst="rect">
             <a:avLst/>
@@ -2643,8 +2643,8 @@
         </p:nvSpPr>
         <p:spPr>
           <a:xfrm>
-            <a:off x="3008376" y="2696673"/>
-            <a:ext cx="1493335" cy="130705"/>
+            <a:off x="3008376" y="2626748"/>
+            <a:ext cx="1493335" cy="119948"/>
           </a:xfrm>
           <a:prstGeom prst="rect">
             <a:avLst/>
@@ -2663,8 +2663,8 @@
         </p:nvSpPr>
         <p:spPr>
           <a:xfrm>
-            <a:off x="4754880" y="2631320"/>
-            <a:ext cx="1143000" cy="261411"/>
+            <a:off x="4754880" y="2566775"/>
+            <a:ext cx="1143000" cy="239896"/>
           </a:xfrm>
           <a:prstGeom prst="rect">
             <a:avLst/>
@@ -2702,8 +2702,8 @@
         </p:nvSpPr>
         <p:spPr>
           <a:xfrm>
-            <a:off x="658368" y="2892731"/>
-            <a:ext cx="310896" cy="261411"/>
+            <a:off x="658368" y="2806670"/>
+            <a:ext cx="310896" cy="239896"/>
           </a:xfrm>
           <a:prstGeom prst="rect">
             <a:avLst/>
@@ -2741,8 +2741,8 @@
         </p:nvSpPr>
         <p:spPr>
           <a:xfrm>
-            <a:off x="1014984" y="2892731"/>
-            <a:ext cx="1920240" cy="261411"/>
+            <a:off x="1014984" y="2806670"/>
+            <a:ext cx="1920240" cy="239896"/>
           </a:xfrm>
           <a:prstGeom prst="rect">
             <a:avLst/>
@@ -2780,8 +2780,8 @@
         </p:nvSpPr>
         <p:spPr>
           <a:xfrm>
-            <a:off x="3008376" y="2958084"/>
-            <a:ext cx="1488550" cy="130705"/>
+            <a:off x="3008376" y="2866644"/>
+            <a:ext cx="1488550" cy="119948"/>
           </a:xfrm>
           <a:prstGeom prst="rect">
             <a:avLst/>
@@ -2800,8 +2800,8 @@
         </p:nvSpPr>
         <p:spPr>
           <a:xfrm>
-            <a:off x="4754880" y="2892731"/>
-            <a:ext cx="1143000" cy="261411"/>
+            <a:off x="4754880" y="2806670"/>
+            <a:ext cx="1143000" cy="239896"/>
           </a:xfrm>
           <a:prstGeom prst="rect">
             <a:avLst/>
@@ -2839,8 +2839,8 @@
         </p:nvSpPr>
         <p:spPr>
           <a:xfrm>
-            <a:off x="658368" y="3154142"/>
-            <a:ext cx="310896" cy="261411"/>
+            <a:off x="658368" y="3046566"/>
+            <a:ext cx="310896" cy="239896"/>
           </a:xfrm>
           <a:prstGeom prst="rect">
             <a:avLst/>
@@ -2878,8 +2878,8 @@
         </p:nvSpPr>
         <p:spPr>
           <a:xfrm>
-            <a:off x="1014984" y="3154142"/>
-            <a:ext cx="1920240" cy="261411"/>
+            <a:off x="1014984" y="3046566"/>
+            <a:ext cx="1920240" cy="239896"/>
           </a:xfrm>
           <a:prstGeom prst="rect">
             <a:avLst/>
@@ -2917,8 +2917,8 @@
         </p:nvSpPr>
         <p:spPr>
           <a:xfrm>
-            <a:off x="3008376" y="3219495"/>
-            <a:ext cx="1465805" cy="130705"/>
+            <a:off x="3008376" y="3106540"/>
+            <a:ext cx="1465805" cy="119948"/>
           </a:xfrm>
           <a:prstGeom prst="rect">
             <a:avLst/>
@@ -2937,8 +2937,8 @@
         </p:nvSpPr>
         <p:spPr>
           <a:xfrm>
-            <a:off x="4754880" y="3154142"/>
-            <a:ext cx="1143000" cy="261411"/>
+            <a:off x="4754880" y="3046566"/>
+            <a:ext cx="1143000" cy="239896"/>
           </a:xfrm>
           <a:prstGeom prst="rect">
             <a:avLst/>
@@ -2976,8 +2976,8 @@
         </p:nvSpPr>
         <p:spPr>
           <a:xfrm>
-            <a:off x="658368" y="3415553"/>
-            <a:ext cx="310896" cy="261411"/>
+            <a:off x="658368" y="3286461"/>
+            <a:ext cx="310896" cy="239896"/>
           </a:xfrm>
           <a:prstGeom prst="rect">
             <a:avLst/>
@@ -3015,8 +3015,8 @@
         </p:nvSpPr>
         <p:spPr>
           <a:xfrm>
-            <a:off x="1014984" y="3415553"/>
-            <a:ext cx="1920240" cy="261411"/>
+            <a:off x="1014984" y="3286461"/>
+            <a:ext cx="1920240" cy="239896"/>
           </a:xfrm>
           <a:prstGeom prst="rect">
             <a:avLst/>
@@ -3054,8 +3054,8 @@
         </p:nvSpPr>
         <p:spPr>
           <a:xfrm>
-            <a:off x="3008376" y="3480906"/>
-            <a:ext cx="1423787" cy="130705"/>
+            <a:off x="3008376" y="3346435"/>
+            <a:ext cx="1423787" cy="119948"/>
           </a:xfrm>
           <a:prstGeom prst="rect">
             <a:avLst/>
@@ -3074,8 +3074,8 @@
         </p:nvSpPr>
         <p:spPr>
           <a:xfrm>
-            <a:off x="4754880" y="3415553"/>
-            <a:ext cx="1143000" cy="261411"/>
+            <a:off x="4754880" y="3286461"/>
+            <a:ext cx="1143000" cy="239896"/>
           </a:xfrm>
           <a:prstGeom prst="rect">
             <a:avLst/>
@@ -3113,8 +3113,8 @@
         </p:nvSpPr>
         <p:spPr>
           <a:xfrm>
-            <a:off x="658368" y="3676964"/>
-            <a:ext cx="310896" cy="261411"/>
+            <a:off x="658368" y="3526357"/>
+            <a:ext cx="310896" cy="239896"/>
           </a:xfrm>
           <a:prstGeom prst="rect">
             <a:avLst/>
@@ -3152,8 +3152,8 @@
         </p:nvSpPr>
         <p:spPr>
           <a:xfrm>
-            <a:off x="1014984" y="3676964"/>
-            <a:ext cx="1920240" cy="261411"/>
+            <a:off x="1014984" y="3526357"/>
+            <a:ext cx="1920240" cy="239896"/>
           </a:xfrm>
           <a:prstGeom prst="rect">
             <a:avLst/>
@@ -3191,8 +3191,8 @@
         </p:nvSpPr>
         <p:spPr>
           <a:xfrm>
-            <a:off x="3008376" y="3742316"/>
-            <a:ext cx="1394590" cy="130705"/>
+            <a:off x="3008376" y="3586331"/>
+            <a:ext cx="1394590" cy="119948"/>
           </a:xfrm>
           <a:prstGeom prst="rect">
             <a:avLst/>
@@ -3211,8 +3211,8 @@
         </p:nvSpPr>
         <p:spPr>
           <a:xfrm>
-            <a:off x="4754880" y="3676964"/>
-            <a:ext cx="1143000" cy="261411"/>
+            <a:off x="4754880" y="3526357"/>
+            <a:ext cx="1143000" cy="239896"/>
           </a:xfrm>
           <a:prstGeom prst="rect">
             <a:avLst/>
@@ -3250,8 +3250,8 @@
         </p:nvSpPr>
         <p:spPr>
           <a:xfrm>
-            <a:off x="658368" y="3938375"/>
-            <a:ext cx="310896" cy="261411"/>
+            <a:off x="658368" y="3766252"/>
+            <a:ext cx="310896" cy="239896"/>
           </a:xfrm>
           <a:prstGeom prst="rect">
             <a:avLst/>
@@ -3289,8 +3289,8 @@
         </p:nvSpPr>
         <p:spPr>
           <a:xfrm>
-            <a:off x="1014984" y="3938375"/>
-            <a:ext cx="1920240" cy="261411"/>
+            <a:off x="1014984" y="3766252"/>
+            <a:ext cx="1920240" cy="239896"/>
           </a:xfrm>
           <a:prstGeom prst="rect">
             <a:avLst/>
@@ -3328,8 +3328,8 @@
         </p:nvSpPr>
         <p:spPr>
           <a:xfrm>
-            <a:off x="3008376" y="4003727"/>
-            <a:ext cx="1387136" cy="130705"/>
+            <a:off x="3008376" y="3826226"/>
+            <a:ext cx="1387136" cy="119948"/>
           </a:xfrm>
           <a:prstGeom prst="rect">
             <a:avLst/>
@@ -3348,8 +3348,8 @@
         </p:nvSpPr>
         <p:spPr>
           <a:xfrm>
-            <a:off x="4754880" y="3938375"/>
-            <a:ext cx="1143000" cy="261411"/>
+            <a:off x="4754880" y="3766252"/>
+            <a:ext cx="1143000" cy="239896"/>
           </a:xfrm>
           <a:prstGeom prst="rect">
             <a:avLst/>
@@ -3387,8 +3387,8 @@
         </p:nvSpPr>
         <p:spPr>
           <a:xfrm>
-            <a:off x="658368" y="4199785"/>
-            <a:ext cx="310896" cy="261411"/>
+            <a:off x="658368" y="4006148"/>
+            <a:ext cx="310896" cy="239896"/>
           </a:xfrm>
           <a:prstGeom prst="rect">
             <a:avLst/>
@@ -3426,8 +3426,8 @@
         </p:nvSpPr>
         <p:spPr>
           <a:xfrm>
-            <a:off x="1014984" y="4199785"/>
-            <a:ext cx="1920240" cy="261411"/>
+            <a:off x="1014984" y="4006148"/>
+            <a:ext cx="1920240" cy="239896"/>
           </a:xfrm>
           <a:prstGeom prst="rect">
             <a:avLst/>
@@ -3465,8 +3465,8 @@
         </p:nvSpPr>
         <p:spPr>
           <a:xfrm>
-            <a:off x="3008376" y="4265138"/>
-            <a:ext cx="1366169" cy="130705"/>
+            <a:off x="3008376" y="4066122"/>
+            <a:ext cx="1366169" cy="119948"/>
           </a:xfrm>
           <a:prstGeom prst="rect">
             <a:avLst/>
@@ -3485,8 +3485,8 @@
         </p:nvSpPr>
         <p:spPr>
           <a:xfrm>
-            <a:off x="4754880" y="4199785"/>
-            <a:ext cx="1143000" cy="261411"/>
+            <a:off x="4754880" y="4006148"/>
+            <a:ext cx="1143000" cy="239896"/>
           </a:xfrm>
           <a:prstGeom prst="rect">
             <a:avLst/>
@@ -3524,8 +3524,8 @@
         </p:nvSpPr>
         <p:spPr>
           <a:xfrm>
-            <a:off x="658368" y="4461196"/>
-            <a:ext cx="310896" cy="261411"/>
+            <a:off x="658368" y="4246043"/>
+            <a:ext cx="310896" cy="239896"/>
           </a:xfrm>
           <a:prstGeom prst="rect">
             <a:avLst/>
@@ -3563,8 +3563,8 @@
         </p:nvSpPr>
         <p:spPr>
           <a:xfrm>
-            <a:off x="1014984" y="4461196"/>
-            <a:ext cx="1920240" cy="261411"/>
+            <a:off x="1014984" y="4246043"/>
+            <a:ext cx="1920240" cy="239896"/>
           </a:xfrm>
           <a:prstGeom prst="rect">
             <a:avLst/>
@@ -3602,8 +3602,8 @@
         </p:nvSpPr>
         <p:spPr>
           <a:xfrm>
-            <a:off x="3008376" y="4526549"/>
-            <a:ext cx="1345338" cy="130705"/>
+            <a:off x="3008376" y="4306017"/>
+            <a:ext cx="1345338" cy="119948"/>
           </a:xfrm>
           <a:prstGeom prst="rect">
             <a:avLst/>
@@ -3622,8 +3622,8 @@
         </p:nvSpPr>
         <p:spPr>
           <a:xfrm>
-            <a:off x="4754880" y="4461196"/>
-            <a:ext cx="1143000" cy="261411"/>
+            <a:off x="4754880" y="4246043"/>
+            <a:ext cx="1143000" cy="239896"/>
           </a:xfrm>
           <a:prstGeom prst="rect">
             <a:avLst/>
@@ -3661,8 +3661,8 @@
         </p:nvSpPr>
         <p:spPr>
           <a:xfrm>
-            <a:off x="658368" y="4722607"/>
-            <a:ext cx="310896" cy="261411"/>
+            <a:off x="658368" y="4485939"/>
+            <a:ext cx="310896" cy="239896"/>
           </a:xfrm>
           <a:prstGeom prst="rect">
             <a:avLst/>
@@ -3700,8 +3700,8 @@
         </p:nvSpPr>
         <p:spPr>
           <a:xfrm>
-            <a:off x="1014984" y="4722607"/>
-            <a:ext cx="1920240" cy="261411"/>
+            <a:off x="1014984" y="4485939"/>
+            <a:ext cx="1920240" cy="239896"/>
           </a:xfrm>
           <a:prstGeom prst="rect">
             <a:avLst/>
@@ -3739,8 +3739,8 @@
         </p:nvSpPr>
         <p:spPr>
           <a:xfrm>
-            <a:off x="3008376" y="4787960"/>
-            <a:ext cx="1328569" cy="130705"/>
+            <a:off x="3008376" y="4545913"/>
+            <a:ext cx="1328569" cy="119948"/>
           </a:xfrm>
           <a:prstGeom prst="rect">
             <a:avLst/>
@@ -3759,8 +3759,8 @@
         </p:nvSpPr>
         <p:spPr>
           <a:xfrm>
-            <a:off x="4754880" y="4722607"/>
-            <a:ext cx="1143000" cy="261411"/>
+            <a:off x="4754880" y="4485939"/>
+            <a:ext cx="1143000" cy="239896"/>
           </a:xfrm>
           <a:prstGeom prst="rect">
             <a:avLst/>
@@ -3798,8 +3798,8 @@
         </p:nvSpPr>
         <p:spPr>
           <a:xfrm>
-            <a:off x="658368" y="4984018"/>
-            <a:ext cx="310896" cy="261411"/>
+            <a:off x="658368" y="4725834"/>
+            <a:ext cx="310896" cy="239896"/>
           </a:xfrm>
           <a:prstGeom prst="rect">
             <a:avLst/>
@@ -3837,8 +3837,8 @@
         </p:nvSpPr>
         <p:spPr>
           <a:xfrm>
-            <a:off x="1014984" y="4984018"/>
-            <a:ext cx="1920240" cy="261411"/>
+            <a:off x="1014984" y="4725834"/>
+            <a:ext cx="1920240" cy="239896"/>
           </a:xfrm>
           <a:prstGeom prst="rect">
             <a:avLst/>
@@ -3876,8 +3876,8 @@
         </p:nvSpPr>
         <p:spPr>
           <a:xfrm>
-            <a:off x="3008376" y="5049371"/>
-            <a:ext cx="1259696" cy="130705"/>
+            <a:off x="3008376" y="4785808"/>
+            <a:ext cx="1259696" cy="119948"/>
           </a:xfrm>
           <a:prstGeom prst="rect">
             <a:avLst/>
@@ -3896,8 +3896,8 @@
         </p:nvSpPr>
         <p:spPr>
           <a:xfrm>
-            <a:off x="4754880" y="4984018"/>
-            <a:ext cx="1143000" cy="261411"/>
+            <a:off x="4754880" y="4725834"/>
+            <a:ext cx="1143000" cy="239896"/>
           </a:xfrm>
           <a:prstGeom prst="rect">
             <a:avLst/>
@@ -3935,8 +3935,8 @@
         </p:nvSpPr>
         <p:spPr>
           <a:xfrm>
-            <a:off x="658368" y="5245429"/>
-            <a:ext cx="310896" cy="261411"/>
+            <a:off x="658368" y="4965730"/>
+            <a:ext cx="310896" cy="239896"/>
           </a:xfrm>
           <a:prstGeom prst="rect">
             <a:avLst/>
@@ -3974,8 +3974,8 @@
         </p:nvSpPr>
         <p:spPr>
           <a:xfrm>
-            <a:off x="1014984" y="5245429"/>
-            <a:ext cx="1920240" cy="261411"/>
+            <a:off x="1014984" y="4965730"/>
+            <a:ext cx="1920240" cy="239896"/>
           </a:xfrm>
           <a:prstGeom prst="rect">
             <a:avLst/>
@@ -4013,8 +4013,8 @@
         </p:nvSpPr>
         <p:spPr>
           <a:xfrm>
-            <a:off x="3008376" y="5310781"/>
-            <a:ext cx="1227504" cy="130705"/>
+            <a:off x="3008376" y="5025704"/>
+            <a:ext cx="1227504" cy="119948"/>
           </a:xfrm>
           <a:prstGeom prst="rect">
             <a:avLst/>
@@ -4033,8 +4033,8 @@
         </p:nvSpPr>
         <p:spPr>
           <a:xfrm>
-            <a:off x="4754880" y="5245429"/>
-            <a:ext cx="1143000" cy="261411"/>
+            <a:off x="4754880" y="4965730"/>
+            <a:ext cx="1143000" cy="239896"/>
           </a:xfrm>
           <a:prstGeom prst="rect">
             <a:avLst/>
@@ -4072,8 +4072,8 @@
         </p:nvSpPr>
         <p:spPr>
           <a:xfrm>
-            <a:off x="658368" y="5506840"/>
-            <a:ext cx="310896" cy="261411"/>
+            <a:off x="658368" y="5205625"/>
+            <a:ext cx="310896" cy="239896"/>
           </a:xfrm>
           <a:prstGeom prst="rect">
             <a:avLst/>
@@ -4111,8 +4111,8 @@
         </p:nvSpPr>
         <p:spPr>
           <a:xfrm>
-            <a:off x="1014984" y="5506840"/>
-            <a:ext cx="1920240" cy="261411"/>
+            <a:off x="1014984" y="5205625"/>
+            <a:ext cx="1920240" cy="239896"/>
           </a:xfrm>
           <a:prstGeom prst="rect">
             <a:avLst/>
@@ -4150,8 +4150,8 @@
         </p:nvSpPr>
         <p:spPr>
           <a:xfrm>
-            <a:off x="3008376" y="5572192"/>
-            <a:ext cx="1183546" cy="130705"/>
+            <a:off x="3008376" y="5265599"/>
+            <a:ext cx="1183546" cy="119948"/>
           </a:xfrm>
           <a:prstGeom prst="rect">
             <a:avLst/>
@@ -4170,8 +4170,8 @@
         </p:nvSpPr>
         <p:spPr>
           <a:xfrm>
-            <a:off x="4754880" y="5506840"/>
-            <a:ext cx="1143000" cy="261411"/>
+            <a:off x="4754880" y="5205625"/>
+            <a:ext cx="1143000" cy="239896"/>
           </a:xfrm>
           <a:prstGeom prst="rect">
             <a:avLst/>
@@ -4209,8 +4209,8 @@
         </p:nvSpPr>
         <p:spPr>
           <a:xfrm>
-            <a:off x="658368" y="5768250"/>
-            <a:ext cx="310896" cy="261411"/>
+            <a:off x="658368" y="5445521"/>
+            <a:ext cx="310896" cy="239896"/>
           </a:xfrm>
           <a:prstGeom prst="rect">
             <a:avLst/>
@@ -4248,8 +4248,8 @@
         </p:nvSpPr>
         <p:spPr>
           <a:xfrm>
-            <a:off x="1014984" y="5768250"/>
-            <a:ext cx="1920240" cy="261411"/>
+            <a:off x="1014984" y="5445521"/>
+            <a:ext cx="1920240" cy="239896"/>
           </a:xfrm>
           <a:prstGeom prst="rect">
             <a:avLst/>
@@ -4287,8 +4287,8 @@
         </p:nvSpPr>
         <p:spPr>
           <a:xfrm>
-            <a:off x="3008376" y="5833603"/>
-            <a:ext cx="1125838" cy="130705"/>
+            <a:off x="3008376" y="5505495"/>
+            <a:ext cx="1125838" cy="119948"/>
           </a:xfrm>
           <a:prstGeom prst="rect">
             <a:avLst/>
@@ -4307,8 +4307,8 @@
         </p:nvSpPr>
         <p:spPr>
           <a:xfrm>
-            <a:off x="4754880" y="5768250"/>
-            <a:ext cx="1143000" cy="261411"/>
+            <a:off x="4754880" y="5445521"/>
+            <a:ext cx="1143000" cy="239896"/>
           </a:xfrm>
           <a:prstGeom prst="rect">
             <a:avLst/>
@@ -4346,8 +4346,8 @@
         </p:nvSpPr>
         <p:spPr>
           <a:xfrm>
-            <a:off x="658368" y="6029661"/>
-            <a:ext cx="310896" cy="261411"/>
+            <a:off x="658368" y="5685416"/>
+            <a:ext cx="310896" cy="239896"/>
           </a:xfrm>
           <a:prstGeom prst="rect">
             <a:avLst/>
@@ -4385,8 +4385,8 @@
         </p:nvSpPr>
         <p:spPr>
           <a:xfrm>
-            <a:off x="1014984" y="6029661"/>
-            <a:ext cx="1920240" cy="261411"/>
+            <a:off x="1014984" y="5685416"/>
+            <a:ext cx="1920240" cy="239896"/>
           </a:xfrm>
           <a:prstGeom prst="rect">
             <a:avLst/>
@@ -4424,8 +4424,8 @@
         </p:nvSpPr>
         <p:spPr>
           <a:xfrm>
-            <a:off x="3008376" y="6095014"/>
-            <a:ext cx="1103246" cy="130705"/>
+            <a:off x="3008376" y="5745390"/>
+            <a:ext cx="1103246" cy="119948"/>
           </a:xfrm>
           <a:prstGeom prst="rect">
             <a:avLst/>
@@ -4444,8 +4444,8 @@
         </p:nvSpPr>
         <p:spPr>
           <a:xfrm>
-            <a:off x="4754880" y="6029661"/>
-            <a:ext cx="1143000" cy="261411"/>
+            <a:off x="4754880" y="5685416"/>
+            <a:ext cx="1143000" cy="239896"/>
           </a:xfrm>
           <a:prstGeom prst="rect">
             <a:avLst/>
@@ -4484,7 +4484,7 @@
         <p:spPr>
           <a:xfrm>
             <a:off x="6208776" y="1847088"/>
-            <a:ext cx="310896" cy="261411"/>
+            <a:ext cx="310896" cy="239896"/>
           </a:xfrm>
           <a:prstGeom prst="rect">
             <a:avLst/>
@@ -4523,7 +4523,7 @@
         <p:spPr>
           <a:xfrm>
             <a:off x="6565392" y="1847088"/>
-            <a:ext cx="1920240" cy="261411"/>
+            <a:ext cx="1920240" cy="239896"/>
           </a:xfrm>
           <a:prstGeom prst="rect">
             <a:avLst/>
@@ -4561,8 +4561,8 @@
         </p:nvSpPr>
         <p:spPr>
           <a:xfrm>
-            <a:off x="8558784" y="1912441"/>
-            <a:ext cx="1102256" cy="130705"/>
+            <a:off x="8558784" y="1907062"/>
+            <a:ext cx="1102256" cy="119948"/>
           </a:xfrm>
           <a:prstGeom prst="rect">
             <a:avLst/>
@@ -4582,7 +4582,7 @@
         <p:spPr>
           <a:xfrm>
             <a:off x="10305288" y="1847088"/>
-            <a:ext cx="1143000" cy="261411"/>
+            <a:ext cx="1143000" cy="239896"/>
           </a:xfrm>
           <a:prstGeom prst="rect">
             <a:avLst/>
@@ -4620,8 +4620,8 @@
         </p:nvSpPr>
         <p:spPr>
           <a:xfrm>
-            <a:off x="6208776" y="2108499"/>
-            <a:ext cx="310896" cy="261411"/>
+            <a:off x="6208776" y="2086984"/>
+            <a:ext cx="310896" cy="239896"/>
           </a:xfrm>
           <a:prstGeom prst="rect">
             <a:avLst/>
@@ -4659,8 +4659,8 @@
         </p:nvSpPr>
         <p:spPr>
           <a:xfrm>
-            <a:off x="6565392" y="2108499"/>
-            <a:ext cx="1920240" cy="261411"/>
+            <a:off x="6565392" y="2086984"/>
+            <a:ext cx="1920240" cy="239896"/>
           </a:xfrm>
           <a:prstGeom prst="rect">
             <a:avLst/>
@@ -4698,8 +4698,8 @@
         </p:nvSpPr>
         <p:spPr>
           <a:xfrm>
-            <a:off x="8558784" y="2173852"/>
-            <a:ext cx="1100233" cy="130705"/>
+            <a:off x="8558784" y="2146957"/>
+            <a:ext cx="1100233" cy="119948"/>
           </a:xfrm>
           <a:prstGeom prst="rect">
             <a:avLst/>
@@ -4718,8 +4718,8 @@
         </p:nvSpPr>
         <p:spPr>
           <a:xfrm>
-            <a:off x="10305288" y="2108499"/>
-            <a:ext cx="1143000" cy="261411"/>
+            <a:off x="10305288" y="2086984"/>
+            <a:ext cx="1143000" cy="239896"/>
           </a:xfrm>
           <a:prstGeom prst="rect">
             <a:avLst/>
@@ -4757,8 +4757,8 @@
         </p:nvSpPr>
         <p:spPr>
           <a:xfrm>
-            <a:off x="6208776" y="2369910"/>
-            <a:ext cx="310896" cy="261411"/>
+            <a:off x="6208776" y="2326879"/>
+            <a:ext cx="310896" cy="239896"/>
           </a:xfrm>
           <a:prstGeom prst="rect">
             <a:avLst/>
@@ -4796,8 +4796,8 @@
         </p:nvSpPr>
         <p:spPr>
           <a:xfrm>
-            <a:off x="6565392" y="2369910"/>
-            <a:ext cx="1920240" cy="261411"/>
+            <a:off x="6565392" y="2326879"/>
+            <a:ext cx="1920240" cy="239896"/>
           </a:xfrm>
           <a:prstGeom prst="rect">
             <a:avLst/>
@@ -4835,8 +4835,8 @@
         </p:nvSpPr>
         <p:spPr>
           <a:xfrm>
-            <a:off x="8558784" y="2435262"/>
-            <a:ext cx="1028587" cy="130705"/>
+            <a:off x="8558784" y="2386853"/>
+            <a:ext cx="1028587" cy="119948"/>
           </a:xfrm>
           <a:prstGeom prst="rect">
             <a:avLst/>
@@ -4855,8 +4855,8 @@
         </p:nvSpPr>
         <p:spPr>
           <a:xfrm>
-            <a:off x="10305288" y="2369910"/>
-            <a:ext cx="1143000" cy="261411"/>
+            <a:off x="10305288" y="2326879"/>
+            <a:ext cx="1143000" cy="239896"/>
           </a:xfrm>
           <a:prstGeom prst="rect">
             <a:avLst/>
@@ -4894,8 +4894,8 @@
         </p:nvSpPr>
         <p:spPr>
           <a:xfrm>
-            <a:off x="6208776" y="2631320"/>
-            <a:ext cx="310896" cy="261411"/>
+            <a:off x="6208776" y="2566775"/>
+            <a:ext cx="310896" cy="239896"/>
           </a:xfrm>
           <a:prstGeom prst="rect">
             <a:avLst/>
@@ -4933,8 +4933,8 @@
         </p:nvSpPr>
         <p:spPr>
           <a:xfrm>
-            <a:off x="6565392" y="2631320"/>
-            <a:ext cx="1920240" cy="261411"/>
+            <a:off x="6565392" y="2566775"/>
+            <a:ext cx="1920240" cy="239896"/>
           </a:xfrm>
           <a:prstGeom prst="rect">
             <a:avLst/>
@@ -4972,8 +4972,8 @@
         </p:nvSpPr>
         <p:spPr>
           <a:xfrm>
-            <a:off x="8558784" y="2696673"/>
-            <a:ext cx="940185" cy="130705"/>
+            <a:off x="8558784" y="2626748"/>
+            <a:ext cx="940185" cy="119948"/>
           </a:xfrm>
           <a:prstGeom prst="rect">
             <a:avLst/>
@@ -4992,8 +4992,8 @@
         </p:nvSpPr>
         <p:spPr>
           <a:xfrm>
-            <a:off x="10305288" y="2631320"/>
-            <a:ext cx="1143000" cy="261411"/>
+            <a:off x="10305288" y="2566775"/>
+            <a:ext cx="1143000" cy="239896"/>
           </a:xfrm>
           <a:prstGeom prst="rect">
             <a:avLst/>
@@ -5031,8 +5031,8 @@
         </p:nvSpPr>
         <p:spPr>
           <a:xfrm>
-            <a:off x="6208776" y="2892731"/>
-            <a:ext cx="310896" cy="261411"/>
+            <a:off x="6208776" y="2806670"/>
+            <a:ext cx="310896" cy="239896"/>
           </a:xfrm>
           <a:prstGeom prst="rect">
             <a:avLst/>
@@ -5070,8 +5070,8 @@
         </p:nvSpPr>
         <p:spPr>
           <a:xfrm>
-            <a:off x="6565392" y="2892731"/>
-            <a:ext cx="1920240" cy="261411"/>
+            <a:off x="6565392" y="2806670"/>
+            <a:ext cx="1920240" cy="239896"/>
           </a:xfrm>
           <a:prstGeom prst="rect">
             <a:avLst/>
@@ -5109,8 +5109,8 @@
         </p:nvSpPr>
         <p:spPr>
           <a:xfrm>
-            <a:off x="8558784" y="2958084"/>
-            <a:ext cx="892570" cy="130705"/>
+            <a:off x="8558784" y="2866644"/>
+            <a:ext cx="892570" cy="119948"/>
           </a:xfrm>
           <a:prstGeom prst="rect">
             <a:avLst/>
@@ -5129,8 +5129,8 @@
         </p:nvSpPr>
         <p:spPr>
           <a:xfrm>
-            <a:off x="10305288" y="2892731"/>
-            <a:ext cx="1143000" cy="261411"/>
+            <a:off x="10305288" y="2806670"/>
+            <a:ext cx="1143000" cy="239896"/>
           </a:xfrm>
           <a:prstGeom prst="rect">
             <a:avLst/>
@@ -5168,8 +5168,8 @@
         </p:nvSpPr>
         <p:spPr>
           <a:xfrm>
-            <a:off x="6208776" y="3154142"/>
-            <a:ext cx="310896" cy="261411"/>
+            <a:off x="6208776" y="3046566"/>
+            <a:ext cx="310896" cy="239896"/>
           </a:xfrm>
           <a:prstGeom prst="rect">
             <a:avLst/>
@@ -5207,8 +5207,8 @@
         </p:nvSpPr>
         <p:spPr>
           <a:xfrm>
-            <a:off x="6565392" y="3154142"/>
-            <a:ext cx="1920240" cy="261411"/>
+            <a:off x="6565392" y="3046566"/>
+            <a:ext cx="1920240" cy="239896"/>
           </a:xfrm>
           <a:prstGeom prst="rect">
             <a:avLst/>
@@ -5246,8 +5246,8 @@
         </p:nvSpPr>
         <p:spPr>
           <a:xfrm>
-            <a:off x="8558784" y="3219495"/>
-            <a:ext cx="836550" cy="130705"/>
+            <a:off x="8558784" y="3106540"/>
+            <a:ext cx="836550" cy="119948"/>
           </a:xfrm>
           <a:prstGeom prst="rect">
             <a:avLst/>
@@ -5266,8 +5266,8 @@
         </p:nvSpPr>
         <p:spPr>
           <a:xfrm>
-            <a:off x="10305288" y="3154142"/>
-            <a:ext cx="1143000" cy="261411"/>
+            <a:off x="10305288" y="3046566"/>
+            <a:ext cx="1143000" cy="239896"/>
           </a:xfrm>
           <a:prstGeom prst="rect">
             <a:avLst/>
@@ -5305,8 +5305,8 @@
         </p:nvSpPr>
         <p:spPr>
           <a:xfrm>
-            <a:off x="6208776" y="3415553"/>
-            <a:ext cx="310896" cy="261411"/>
+            <a:off x="6208776" y="3286461"/>
+            <a:ext cx="310896" cy="239896"/>
           </a:xfrm>
           <a:prstGeom prst="rect">
             <a:avLst/>
@@ -5344,8 +5344,8 @@
         </p:nvSpPr>
         <p:spPr>
           <a:xfrm>
-            <a:off x="6565392" y="3415553"/>
-            <a:ext cx="1920240" cy="261411"/>
+            <a:off x="6565392" y="3286461"/>
+            <a:ext cx="1920240" cy="239896"/>
           </a:xfrm>
           <a:prstGeom prst="rect">
             <a:avLst/>
@@ -5383,8 +5383,8 @@
         </p:nvSpPr>
         <p:spPr>
           <a:xfrm>
-            <a:off x="8558784" y="3480906"/>
-            <a:ext cx="830598" cy="130705"/>
+            <a:off x="8558784" y="3346435"/>
+            <a:ext cx="830598" cy="119948"/>
           </a:xfrm>
           <a:prstGeom prst="rect">
             <a:avLst/>
@@ -5403,8 +5403,8 @@
         </p:nvSpPr>
         <p:spPr>
           <a:xfrm>
-            <a:off x="10305288" y="3415553"/>
-            <a:ext cx="1143000" cy="261411"/>
+            <a:off x="10305288" y="3286461"/>
+            <a:ext cx="1143000" cy="239896"/>
           </a:xfrm>
           <a:prstGeom prst="rect">
             <a:avLst/>
@@ -5442,8 +5442,8 @@
         </p:nvSpPr>
         <p:spPr>
           <a:xfrm>
-            <a:off x="6208776" y="3676964"/>
-            <a:ext cx="310896" cy="261411"/>
+            <a:off x="6208776" y="3526357"/>
+            <a:ext cx="310896" cy="239896"/>
           </a:xfrm>
           <a:prstGeom prst="rect">
             <a:avLst/>
@@ -5481,8 +5481,8 @@
         </p:nvSpPr>
         <p:spPr>
           <a:xfrm>
-            <a:off x="6565392" y="3676964"/>
-            <a:ext cx="1920240" cy="261411"/>
+            <a:off x="6565392" y="3526357"/>
+            <a:ext cx="1920240" cy="239896"/>
           </a:xfrm>
           <a:prstGeom prst="rect">
             <a:avLst/>
@@ -5520,8 +5520,8 @@
         </p:nvSpPr>
         <p:spPr>
           <a:xfrm>
-            <a:off x="8558784" y="3742316"/>
-            <a:ext cx="794181" cy="130705"/>
+            <a:off x="8558784" y="3586331"/>
+            <a:ext cx="794181" cy="119948"/>
           </a:xfrm>
           <a:prstGeom prst="rect">
             <a:avLst/>
@@ -5540,8 +5540,8 @@
         </p:nvSpPr>
         <p:spPr>
           <a:xfrm>
-            <a:off x="10305288" y="3676964"/>
-            <a:ext cx="1143000" cy="261411"/>
+            <a:off x="10305288" y="3526357"/>
+            <a:ext cx="1143000" cy="239896"/>
           </a:xfrm>
           <a:prstGeom prst="rect">
             <a:avLst/>
@@ -5579,8 +5579,8 @@
         </p:nvSpPr>
         <p:spPr>
           <a:xfrm>
-            <a:off x="6208776" y="3938375"/>
-            <a:ext cx="310896" cy="261411"/>
+            <a:off x="6208776" y="3766252"/>
+            <a:ext cx="310896" cy="239896"/>
           </a:xfrm>
           <a:prstGeom prst="rect">
             <a:avLst/>
@@ -5618,8 +5618,8 @@
         </p:nvSpPr>
         <p:spPr>
           <a:xfrm>
-            <a:off x="6565392" y="3938375"/>
-            <a:ext cx="1920240" cy="261411"/>
+            <a:off x="6565392" y="3766252"/>
+            <a:ext cx="1920240" cy="239896"/>
           </a:xfrm>
           <a:prstGeom prst="rect">
             <a:avLst/>
@@ -5657,8 +5657,8 @@
         </p:nvSpPr>
         <p:spPr>
           <a:xfrm>
-            <a:off x="8558784" y="4003727"/>
-            <a:ext cx="724094" cy="130705"/>
+            <a:off x="8558784" y="3826226"/>
+            <a:ext cx="724094" cy="119948"/>
           </a:xfrm>
           <a:prstGeom prst="rect">
             <a:avLst/>
@@ -5677,8 +5677,8 @@
         </p:nvSpPr>
         <p:spPr>
           <a:xfrm>
-            <a:off x="10305288" y="3938375"/>
-            <a:ext cx="1143000" cy="261411"/>
+            <a:off x="10305288" y="3766252"/>
+            <a:ext cx="1143000" cy="239896"/>
           </a:xfrm>
           <a:prstGeom prst="rect">
             <a:avLst/>
@@ -5716,8 +5716,8 @@
         </p:nvSpPr>
         <p:spPr>
           <a:xfrm>
-            <a:off x="6208776" y="4199785"/>
-            <a:ext cx="310896" cy="261411"/>
+            <a:off x="6208776" y="4006148"/>
+            <a:ext cx="310896" cy="239896"/>
           </a:xfrm>
           <a:prstGeom prst="rect">
             <a:avLst/>
@@ -5755,8 +5755,8 @@
         </p:nvSpPr>
         <p:spPr>
           <a:xfrm>
-            <a:off x="6565392" y="4199785"/>
-            <a:ext cx="1920240" cy="261411"/>
+            <a:off x="6565392" y="4006148"/>
+            <a:ext cx="1920240" cy="239896"/>
           </a:xfrm>
           <a:prstGeom prst="rect">
             <a:avLst/>
@@ -5794,8 +5794,8 @@
         </p:nvSpPr>
         <p:spPr>
           <a:xfrm>
-            <a:off x="8558784" y="4265138"/>
-            <a:ext cx="697908" cy="130705"/>
+            <a:off x="8558784" y="4066122"/>
+            <a:ext cx="697908" cy="119948"/>
           </a:xfrm>
           <a:prstGeom prst="rect">
             <a:avLst/>
@@ -5814,8 +5814,8 @@
         </p:nvSpPr>
         <p:spPr>
           <a:xfrm>
-            <a:off x="10305288" y="4199785"/>
-            <a:ext cx="1143000" cy="261411"/>
+            <a:off x="10305288" y="4006148"/>
+            <a:ext cx="1143000" cy="239896"/>
           </a:xfrm>
           <a:prstGeom prst="rect">
             <a:avLst/>
@@ -5853,8 +5853,8 @@
         </p:nvSpPr>
         <p:spPr>
           <a:xfrm>
-            <a:off x="6208776" y="4461196"/>
-            <a:ext cx="310896" cy="261411"/>
+            <a:off x="6208776" y="4246043"/>
+            <a:ext cx="310896" cy="239896"/>
           </a:xfrm>
           <a:prstGeom prst="rect">
             <a:avLst/>
@@ -5892,8 +5892,8 @@
         </p:nvSpPr>
         <p:spPr>
           <a:xfrm>
-            <a:off x="6565392" y="4461196"/>
-            <a:ext cx="1920240" cy="261411"/>
+            <a:off x="6565392" y="4246043"/>
+            <a:ext cx="1920240" cy="239896"/>
           </a:xfrm>
           <a:prstGeom prst="rect">
             <a:avLst/>
@@ -5931,8 +5931,8 @@
         </p:nvSpPr>
         <p:spPr>
           <a:xfrm>
-            <a:off x="8558784" y="4526549"/>
-            <a:ext cx="672256" cy="130705"/>
+            <a:off x="8558784" y="4306017"/>
+            <a:ext cx="672256" cy="119948"/>
           </a:xfrm>
           <a:prstGeom prst="rect">
             <a:avLst/>
@@ -5951,8 +5951,8 @@
         </p:nvSpPr>
         <p:spPr>
           <a:xfrm>
-            <a:off x="10305288" y="4461196"/>
-            <a:ext cx="1143000" cy="261411"/>
+            <a:off x="10305288" y="4246043"/>
+            <a:ext cx="1143000" cy="239896"/>
           </a:xfrm>
           <a:prstGeom prst="rect">
             <a:avLst/>
@@ -5990,8 +5990,8 @@
         </p:nvSpPr>
         <p:spPr>
           <a:xfrm>
-            <a:off x="6208776" y="4722607"/>
-            <a:ext cx="310896" cy="261411"/>
+            <a:off x="6208776" y="4485939"/>
+            <a:ext cx="310896" cy="239896"/>
           </a:xfrm>
           <a:prstGeom prst="rect">
             <a:avLst/>
@@ -6029,8 +6029,8 @@
         </p:nvSpPr>
         <p:spPr>
           <a:xfrm>
-            <a:off x="6565392" y="4722607"/>
-            <a:ext cx="1920240" cy="261411"/>
+            <a:off x="6565392" y="4485939"/>
+            <a:ext cx="1920240" cy="239896"/>
           </a:xfrm>
           <a:prstGeom prst="rect">
             <a:avLst/>
@@ -6068,8 +6068,8 @@
         </p:nvSpPr>
         <p:spPr>
           <a:xfrm>
-            <a:off x="8558784" y="4787960"/>
-            <a:ext cx="647056" cy="130705"/>
+            <a:off x="8558784" y="4545913"/>
+            <a:ext cx="647056" cy="119948"/>
           </a:xfrm>
           <a:prstGeom prst="rect">
             <a:avLst/>
@@ -6088,8 +6088,8 @@
         </p:nvSpPr>
         <p:spPr>
           <a:xfrm>
-            <a:off x="10305288" y="4722607"/>
-            <a:ext cx="1143000" cy="261411"/>
+            <a:off x="10305288" y="4485939"/>
+            <a:ext cx="1143000" cy="239896"/>
           </a:xfrm>
           <a:prstGeom prst="rect">
             <a:avLst/>
@@ -6127,8 +6127,8 @@
         </p:nvSpPr>
         <p:spPr>
           <a:xfrm>
-            <a:off x="6208776" y="4984018"/>
-            <a:ext cx="310896" cy="261411"/>
+            <a:off x="6208776" y="4725834"/>
+            <a:ext cx="310896" cy="239896"/>
           </a:xfrm>
           <a:prstGeom prst="rect">
             <a:avLst/>
@@ -6166,8 +6166,8 @@
         </p:nvSpPr>
         <p:spPr>
           <a:xfrm>
-            <a:off x="6565392" y="4984018"/>
-            <a:ext cx="1920240" cy="261411"/>
+            <a:off x="6565392" y="4725834"/>
+            <a:ext cx="1920240" cy="239896"/>
           </a:xfrm>
           <a:prstGeom prst="rect">
             <a:avLst/>
@@ -6205,8 +6205,8 @@
         </p:nvSpPr>
         <p:spPr>
           <a:xfrm>
-            <a:off x="8558784" y="5049371"/>
-            <a:ext cx="625345" cy="130705"/>
+            <a:off x="8558784" y="4785808"/>
+            <a:ext cx="625345" cy="119948"/>
           </a:xfrm>
           <a:prstGeom prst="rect">
             <a:avLst/>
@@ -6225,8 +6225,8 @@
         </p:nvSpPr>
         <p:spPr>
           <a:xfrm>
-            <a:off x="10305288" y="4984018"/>
-            <a:ext cx="1143000" cy="261411"/>
+            <a:off x="10305288" y="4725834"/>
+            <a:ext cx="1143000" cy="239896"/>
           </a:xfrm>
           <a:prstGeom prst="rect">
             <a:avLst/>
@@ -6264,8 +6264,8 @@
         </p:nvSpPr>
         <p:spPr>
           <a:xfrm>
-            <a:off x="6208776" y="5245429"/>
-            <a:ext cx="310896" cy="261411"/>
+            <a:off x="6208776" y="4965730"/>
+            <a:ext cx="310896" cy="239896"/>
           </a:xfrm>
           <a:prstGeom prst="rect">
             <a:avLst/>
@@ -6303,8 +6303,8 @@
         </p:nvSpPr>
         <p:spPr>
           <a:xfrm>
-            <a:off x="6565392" y="5245429"/>
-            <a:ext cx="1920240" cy="261411"/>
+            <a:off x="6565392" y="4965730"/>
+            <a:ext cx="1920240" cy="239896"/>
           </a:xfrm>
           <a:prstGeom prst="rect">
             <a:avLst/>
@@ -6342,8 +6342,8 @@
         </p:nvSpPr>
         <p:spPr>
           <a:xfrm>
-            <a:off x="8558784" y="5310781"/>
-            <a:ext cx="612255" cy="130705"/>
+            <a:off x="8558784" y="5025704"/>
+            <a:ext cx="612255" cy="119948"/>
           </a:xfrm>
           <a:prstGeom prst="rect">
             <a:avLst/>
@@ -6362,8 +6362,8 @@
         </p:nvSpPr>
         <p:spPr>
           <a:xfrm>
-            <a:off x="10305288" y="5245429"/>
-            <a:ext cx="1143000" cy="261411"/>
+            <a:off x="10305288" y="4965730"/>
+            <a:ext cx="1143000" cy="239896"/>
           </a:xfrm>
           <a:prstGeom prst="rect">
             <a:avLst/>
@@ -6401,8 +6401,8 @@
         </p:nvSpPr>
         <p:spPr>
           <a:xfrm>
-            <a:off x="6208776" y="5506840"/>
-            <a:ext cx="310896" cy="261411"/>
+            <a:off x="6208776" y="5205625"/>
+            <a:ext cx="310896" cy="239896"/>
           </a:xfrm>
           <a:prstGeom prst="rect">
             <a:avLst/>
@@ -6440,8 +6440,8 @@
         </p:nvSpPr>
         <p:spPr>
           <a:xfrm>
-            <a:off x="6565392" y="5506840"/>
-            <a:ext cx="1920240" cy="261411"/>
+            <a:off x="6565392" y="5205625"/>
+            <a:ext cx="1920240" cy="239896"/>
           </a:xfrm>
           <a:prstGeom prst="rect">
             <a:avLst/>
@@ -6479,8 +6479,8 @@
         </p:nvSpPr>
         <p:spPr>
           <a:xfrm>
-            <a:off x="8558784" y="5572192"/>
-            <a:ext cx="592803" cy="130705"/>
+            <a:off x="8558784" y="5265599"/>
+            <a:ext cx="592803" cy="119948"/>
           </a:xfrm>
           <a:prstGeom prst="rect">
             <a:avLst/>
@@ -6499,8 +6499,8 @@
         </p:nvSpPr>
         <p:spPr>
           <a:xfrm>
-            <a:off x="10305288" y="5506840"/>
-            <a:ext cx="1143000" cy="261411"/>
+            <a:off x="10305288" y="5205625"/>
+            <a:ext cx="1143000" cy="239896"/>
           </a:xfrm>
           <a:prstGeom prst="rect">
             <a:avLst/>
@@ -6538,8 +6538,8 @@
         </p:nvSpPr>
         <p:spPr>
           <a:xfrm>
-            <a:off x="6208776" y="5768250"/>
-            <a:ext cx="310896" cy="261411"/>
+            <a:off x="6208776" y="5445521"/>
+            <a:ext cx="310896" cy="239896"/>
           </a:xfrm>
           <a:prstGeom prst="rect">
             <a:avLst/>
@@ -6577,8 +6577,8 @@
         </p:nvSpPr>
         <p:spPr>
           <a:xfrm>
-            <a:off x="6565392" y="5768250"/>
-            <a:ext cx="1920240" cy="261411"/>
+            <a:off x="6565392" y="5445521"/>
+            <a:ext cx="1920240" cy="239896"/>
           </a:xfrm>
           <a:prstGeom prst="rect">
             <a:avLst/>
@@ -6616,8 +6616,8 @@
         </p:nvSpPr>
         <p:spPr>
           <a:xfrm>
-            <a:off x="8558784" y="5833603"/>
-            <a:ext cx="591028" cy="130705"/>
+            <a:off x="8558784" y="5505495"/>
+            <a:ext cx="591028" cy="119948"/>
           </a:xfrm>
           <a:prstGeom prst="rect">
             <a:avLst/>
@@ -6636,8 +6636,8 @@
         </p:nvSpPr>
         <p:spPr>
           <a:xfrm>
-            <a:off x="10305288" y="5768250"/>
-            <a:ext cx="1143000" cy="261411"/>
+            <a:off x="10305288" y="5445521"/>
+            <a:ext cx="1143000" cy="239896"/>
           </a:xfrm>
           <a:prstGeom prst="rect">
             <a:avLst/>
@@ -6676,7 +6676,7 @@
         <p:spPr>
           <a:xfrm>
             <a:off x="3970620" y="1847088"/>
-            <a:ext cx="14630" cy="4443984"/>
+            <a:ext cx="14630" cy="4078224"/>
           </a:xfrm>
           <a:prstGeom prst="rect">
             <a:avLst/>
@@ -6696,7 +6696,7 @@
         <p:spPr>
           <a:xfrm>
             <a:off x="9521028" y="1847088"/>
-            <a:ext cx="14630" cy="4443984"/>
+            <a:ext cx="14630" cy="4078224"/>
           </a:xfrm>
           <a:prstGeom prst="rect">
             <a:avLst/>
@@ -6716,7 +6716,7 @@
         <p:spPr>
           <a:xfrm>
             <a:off x="6085332" y="1847088"/>
-            <a:ext cx="10973" cy="4443984"/>
+            <a:ext cx="10973" cy="4078224"/>
           </a:xfrm>
           <a:prstGeom prst="rect">
             <a:avLst/>
@@ -6726,6 +6726,65 @@
           </a:solidFill>
           <a:ln/>
         </p:spPr>
+      </p:sp>
+      <p:sp>
+        <p:nvSpPr>
+          <p:cNvPr id="147" name="Shape 144"/>
+          <p:cNvSpPr/>
+          <p:nvPr/>
+        </p:nvSpPr>
+        <p:spPr>
+          <a:xfrm>
+            <a:off x="457200" y="6126480"/>
+            <a:ext cx="11274552" cy="371856"/>
+          </a:xfrm>
+          <a:prstGeom prst="rect">
+            <a:avLst/>
+          </a:prstGeom>
+          <a:solidFill>
+            <a:srgbClr val="EDF4FA"/>
+          </a:solidFill>
+          <a:ln/>
+        </p:spPr>
+      </p:sp>
+      <p:sp>
+        <p:nvSpPr>
+          <p:cNvPr id="148" name="Text 145"/>
+          <p:cNvSpPr txBox="1"/>
+          <p:nvPr/>
+        </p:nvSpPr>
+        <p:spPr>
+          <a:xfrm>
+            <a:off x="658368" y="6144768"/>
+            <a:ext cx="10927080" cy="335280"/>
+          </a:xfrm>
+          <a:prstGeom prst="rect">
+            <a:avLst/>
+          </a:prstGeom>
+          <a:noFill/>
+          <a:ln/>
+        </p:spPr>
+        <p:txBody>
+          <a:bodyPr wrap="square" lIns="0" tIns="0" rIns="0" bIns="0" rtlCol="0" anchor="ctr"/>
+          <a:lstStyle/>
+          <a:p>
+            <a:pPr indent="0" marL="0">
+              <a:buNone/>
+            </a:pPr>
+            <a:r>
+              <a:rPr lang="en-US" sz="1600" b="1" dirty="0">
+                <a:solidFill>
+                  <a:srgbClr val="0B2C4A"/>
+                </a:solidFill>
+                <a:latin typeface="Inter" pitchFamily="34" charset="0"/>
+                <a:ea typeface="Inter" pitchFamily="34" charset="-122"/>
+                <a:cs typeface="Inter" pitchFamily="34" charset="-120"/>
+              </a:rPr>
+              <a:t>20 of 33 stores at or above the 85% target and 12 above 100%. Group 94.7%.</a:t>
+            </a:r>
+            <a:endParaRPr lang="en-US" sz="1600" dirty="0"/>
+          </a:p>
+        </p:txBody>
       </p:sp>
     </p:spTree>
   </p:cSld>
@@ -15620,7 +15679,7 @@
         <p:spPr>
           <a:xfrm>
             <a:off x="457200" y="1207008"/>
-            <a:ext cx="11274552" cy="5148072"/>
+            <a:ext cx="11274552" cy="4782312"/>
           </a:xfrm>
           <a:prstGeom prst="rect">
             <a:avLst/>
@@ -15874,7 +15933,7 @@
         <p:spPr>
           <a:xfrm>
             <a:off x="658368" y="1700784"/>
-            <a:ext cx="310896" cy="270017"/>
+            <a:ext cx="310896" cy="248502"/>
           </a:xfrm>
           <a:prstGeom prst="rect">
             <a:avLst/>
@@ -15913,7 +15972,7 @@
         <p:spPr>
           <a:xfrm>
             <a:off x="1014984" y="1700784"/>
-            <a:ext cx="1783080" cy="270017"/>
+            <a:ext cx="1783080" cy="248502"/>
           </a:xfrm>
           <a:prstGeom prst="rect">
             <a:avLst/>
@@ -15951,8 +16010,8 @@
         </p:nvSpPr>
         <p:spPr>
           <a:xfrm>
-            <a:off x="2871216" y="1761538"/>
-            <a:ext cx="594360" cy="148509"/>
+            <a:off x="2871216" y="1756697"/>
+            <a:ext cx="594360" cy="136676"/>
           </a:xfrm>
           <a:prstGeom prst="rect">
             <a:avLst/>
@@ -15972,7 +16031,7 @@
         <p:spPr>
           <a:xfrm>
             <a:off x="3520440" y="1700784"/>
-            <a:ext cx="786384" cy="270017"/>
+            <a:ext cx="786384" cy="248502"/>
           </a:xfrm>
           <a:prstGeom prst="rect">
             <a:avLst/>
@@ -16011,7 +16070,7 @@
         <p:spPr>
           <a:xfrm>
             <a:off x="4306824" y="1700784"/>
-            <a:ext cx="932688" cy="270017"/>
+            <a:ext cx="932688" cy="248502"/>
           </a:xfrm>
           <a:prstGeom prst="rect">
             <a:avLst/>
@@ -16050,7 +16109,7 @@
         <p:spPr>
           <a:xfrm>
             <a:off x="5239512" y="1700784"/>
-            <a:ext cx="676656" cy="270017"/>
+            <a:ext cx="676656" cy="248502"/>
           </a:xfrm>
           <a:prstGeom prst="rect">
             <a:avLst/>
@@ -16088,8 +16147,8 @@
         </p:nvSpPr>
         <p:spPr>
           <a:xfrm>
-            <a:off x="658368" y="1970801"/>
-            <a:ext cx="310896" cy="270017"/>
+            <a:off x="658368" y="1949286"/>
+            <a:ext cx="310896" cy="248502"/>
           </a:xfrm>
           <a:prstGeom prst="rect">
             <a:avLst/>
@@ -16127,8 +16186,8 @@
         </p:nvSpPr>
         <p:spPr>
           <a:xfrm>
-            <a:off x="1014984" y="1970801"/>
-            <a:ext cx="1783080" cy="270017"/>
+            <a:off x="1014984" y="1949286"/>
+            <a:ext cx="1783080" cy="248502"/>
           </a:xfrm>
           <a:prstGeom prst="rect">
             <a:avLst/>
@@ -16166,8 +16225,8 @@
         </p:nvSpPr>
         <p:spPr>
           <a:xfrm>
-            <a:off x="2871216" y="2031555"/>
-            <a:ext cx="423252" cy="148509"/>
+            <a:off x="2871216" y="2005199"/>
+            <a:ext cx="423252" cy="136676"/>
           </a:xfrm>
           <a:prstGeom prst="rect">
             <a:avLst/>
@@ -16186,8 +16245,8 @@
         </p:nvSpPr>
         <p:spPr>
           <a:xfrm>
-            <a:off x="3520440" y="1970801"/>
-            <a:ext cx="786384" cy="270017"/>
+            <a:off x="3520440" y="1949286"/>
+            <a:ext cx="786384" cy="248502"/>
           </a:xfrm>
           <a:prstGeom prst="rect">
             <a:avLst/>
@@ -16225,8 +16284,8 @@
         </p:nvSpPr>
         <p:spPr>
           <a:xfrm>
-            <a:off x="4306824" y="1970801"/>
-            <a:ext cx="932688" cy="270017"/>
+            <a:off x="4306824" y="1949286"/>
+            <a:ext cx="932688" cy="248502"/>
           </a:xfrm>
           <a:prstGeom prst="rect">
             <a:avLst/>
@@ -16264,8 +16323,8 @@
         </p:nvSpPr>
         <p:spPr>
           <a:xfrm>
-            <a:off x="5239512" y="1970801"/>
-            <a:ext cx="676656" cy="270017"/>
+            <a:off x="5239512" y="1949286"/>
+            <a:ext cx="676656" cy="248502"/>
           </a:xfrm>
           <a:prstGeom prst="rect">
             <a:avLst/>
@@ -16303,8 +16362,8 @@
         </p:nvSpPr>
         <p:spPr>
           <a:xfrm>
-            <a:off x="658368" y="2240818"/>
-            <a:ext cx="310896" cy="270017"/>
+            <a:off x="658368" y="2197787"/>
+            <a:ext cx="310896" cy="248502"/>
           </a:xfrm>
           <a:prstGeom prst="rect">
             <a:avLst/>
@@ -16342,8 +16401,8 @@
         </p:nvSpPr>
         <p:spPr>
           <a:xfrm>
-            <a:off x="1014984" y="2240818"/>
-            <a:ext cx="1783080" cy="270017"/>
+            <a:off x="1014984" y="2197787"/>
+            <a:ext cx="1783080" cy="248502"/>
           </a:xfrm>
           <a:prstGeom prst="rect">
             <a:avLst/>
@@ -16381,8 +16440,8 @@
         </p:nvSpPr>
         <p:spPr>
           <a:xfrm>
-            <a:off x="2871216" y="2301572"/>
-            <a:ext cx="383101" cy="148509"/>
+            <a:off x="2871216" y="2253700"/>
+            <a:ext cx="383101" cy="136676"/>
           </a:xfrm>
           <a:prstGeom prst="rect">
             <a:avLst/>
@@ -16401,8 +16460,8 @@
         </p:nvSpPr>
         <p:spPr>
           <a:xfrm>
-            <a:off x="3520440" y="2240818"/>
-            <a:ext cx="786384" cy="270017"/>
+            <a:off x="3520440" y="2197787"/>
+            <a:ext cx="786384" cy="248502"/>
           </a:xfrm>
           <a:prstGeom prst="rect">
             <a:avLst/>
@@ -16440,8 +16499,8 @@
         </p:nvSpPr>
         <p:spPr>
           <a:xfrm>
-            <a:off x="4306824" y="2240818"/>
-            <a:ext cx="932688" cy="270017"/>
+            <a:off x="4306824" y="2197787"/>
+            <a:ext cx="932688" cy="248502"/>
           </a:xfrm>
           <a:prstGeom prst="rect">
             <a:avLst/>
@@ -16479,8 +16538,8 @@
         </p:nvSpPr>
         <p:spPr>
           <a:xfrm>
-            <a:off x="5239512" y="2240818"/>
-            <a:ext cx="676656" cy="270017"/>
+            <a:off x="5239512" y="2197787"/>
+            <a:ext cx="676656" cy="248502"/>
           </a:xfrm>
           <a:prstGeom prst="rect">
             <a:avLst/>
@@ -16518,8 +16577,8 @@
         </p:nvSpPr>
         <p:spPr>
           <a:xfrm>
-            <a:off x="658368" y="2510835"/>
-            <a:ext cx="310896" cy="270017"/>
+            <a:off x="658368" y="2446289"/>
+            <a:ext cx="310896" cy="248502"/>
           </a:xfrm>
           <a:prstGeom prst="rect">
             <a:avLst/>
@@ -16557,8 +16616,8 @@
         </p:nvSpPr>
         <p:spPr>
           <a:xfrm>
-            <a:off x="1014984" y="2510835"/>
-            <a:ext cx="1783080" cy="270017"/>
+            <a:off x="1014984" y="2446289"/>
+            <a:ext cx="1783080" cy="248502"/>
           </a:xfrm>
           <a:prstGeom prst="rect">
             <a:avLst/>
@@ -16596,8 +16655,8 @@
         </p:nvSpPr>
         <p:spPr>
           <a:xfrm>
-            <a:off x="2871216" y="2571589"/>
-            <a:ext cx="377643" cy="148509"/>
+            <a:off x="2871216" y="2502202"/>
+            <a:ext cx="377643" cy="136676"/>
           </a:xfrm>
           <a:prstGeom prst="rect">
             <a:avLst/>
@@ -16616,8 +16675,8 @@
         </p:nvSpPr>
         <p:spPr>
           <a:xfrm>
-            <a:off x="3520440" y="2510835"/>
-            <a:ext cx="786384" cy="270017"/>
+            <a:off x="3520440" y="2446289"/>
+            <a:ext cx="786384" cy="248502"/>
           </a:xfrm>
           <a:prstGeom prst="rect">
             <a:avLst/>
@@ -16655,8 +16714,8 @@
         </p:nvSpPr>
         <p:spPr>
           <a:xfrm>
-            <a:off x="4306824" y="2510835"/>
-            <a:ext cx="932688" cy="270017"/>
+            <a:off x="4306824" y="2446289"/>
+            <a:ext cx="932688" cy="248502"/>
           </a:xfrm>
           <a:prstGeom prst="rect">
             <a:avLst/>
@@ -16694,8 +16753,8 @@
         </p:nvSpPr>
         <p:spPr>
           <a:xfrm>
-            <a:off x="5239512" y="2510835"/>
-            <a:ext cx="676656" cy="270017"/>
+            <a:off x="5239512" y="2446289"/>
+            <a:ext cx="676656" cy="248502"/>
           </a:xfrm>
           <a:prstGeom prst="rect">
             <a:avLst/>
@@ -16733,8 +16792,8 @@
         </p:nvSpPr>
         <p:spPr>
           <a:xfrm>
-            <a:off x="658368" y="2780852"/>
-            <a:ext cx="310896" cy="270017"/>
+            <a:off x="658368" y="2694791"/>
+            <a:ext cx="310896" cy="248502"/>
           </a:xfrm>
           <a:prstGeom prst="rect">
             <a:avLst/>
@@ -16772,8 +16831,8 @@
         </p:nvSpPr>
         <p:spPr>
           <a:xfrm>
-            <a:off x="1014984" y="2780852"/>
-            <a:ext cx="1783080" cy="270017"/>
+            <a:off x="1014984" y="2694791"/>
+            <a:ext cx="1783080" cy="248502"/>
           </a:xfrm>
           <a:prstGeom prst="rect">
             <a:avLst/>
@@ -16811,8 +16870,8 @@
         </p:nvSpPr>
         <p:spPr>
           <a:xfrm>
-            <a:off x="2871216" y="2841606"/>
-            <a:ext cx="332905" cy="148509"/>
+            <a:off x="2871216" y="2750703"/>
+            <a:ext cx="332905" cy="136676"/>
           </a:xfrm>
           <a:prstGeom prst="rect">
             <a:avLst/>
@@ -16831,8 +16890,8 @@
         </p:nvSpPr>
         <p:spPr>
           <a:xfrm>
-            <a:off x="3520440" y="2780852"/>
-            <a:ext cx="786384" cy="270017"/>
+            <a:off x="3520440" y="2694791"/>
+            <a:ext cx="786384" cy="248502"/>
           </a:xfrm>
           <a:prstGeom prst="rect">
             <a:avLst/>
@@ -16870,8 +16929,8 @@
         </p:nvSpPr>
         <p:spPr>
           <a:xfrm>
-            <a:off x="4306824" y="2780852"/>
-            <a:ext cx="932688" cy="270017"/>
+            <a:off x="4306824" y="2694791"/>
+            <a:ext cx="932688" cy="248502"/>
           </a:xfrm>
           <a:prstGeom prst="rect">
             <a:avLst/>
@@ -16909,8 +16968,8 @@
         </p:nvSpPr>
         <p:spPr>
           <a:xfrm>
-            <a:off x="5239512" y="2780852"/>
-            <a:ext cx="676656" cy="270017"/>
+            <a:off x="5239512" y="2694791"/>
+            <a:ext cx="676656" cy="248502"/>
           </a:xfrm>
           <a:prstGeom prst="rect">
             <a:avLst/>
@@ -16948,8 +17007,8 @@
         </p:nvSpPr>
         <p:spPr>
           <a:xfrm>
-            <a:off x="658368" y="3050869"/>
-            <a:ext cx="310896" cy="270017"/>
+            <a:off x="658368" y="2943292"/>
+            <a:ext cx="310896" cy="248502"/>
           </a:xfrm>
           <a:prstGeom prst="rect">
             <a:avLst/>
@@ -16987,8 +17046,8 @@
         </p:nvSpPr>
         <p:spPr>
           <a:xfrm>
-            <a:off x="1014984" y="3050869"/>
-            <a:ext cx="1783080" cy="270017"/>
+            <a:off x="1014984" y="2943292"/>
+            <a:ext cx="1783080" cy="248502"/>
           </a:xfrm>
           <a:prstGeom prst="rect">
             <a:avLst/>
@@ -17026,8 +17085,8 @@
         </p:nvSpPr>
         <p:spPr>
           <a:xfrm>
-            <a:off x="2871216" y="3111623"/>
-            <a:ext cx="329038" cy="148509"/>
+            <a:off x="2871216" y="2999205"/>
+            <a:ext cx="329038" cy="136676"/>
           </a:xfrm>
           <a:prstGeom prst="rect">
             <a:avLst/>
@@ -17046,8 +17105,8 @@
         </p:nvSpPr>
         <p:spPr>
           <a:xfrm>
-            <a:off x="3520440" y="3050869"/>
-            <a:ext cx="786384" cy="270017"/>
+            <a:off x="3520440" y="2943292"/>
+            <a:ext cx="786384" cy="248502"/>
           </a:xfrm>
           <a:prstGeom prst="rect">
             <a:avLst/>
@@ -17085,8 +17144,8 @@
         </p:nvSpPr>
         <p:spPr>
           <a:xfrm>
-            <a:off x="4306824" y="3050869"/>
-            <a:ext cx="932688" cy="270017"/>
+            <a:off x="4306824" y="2943292"/>
+            <a:ext cx="932688" cy="248502"/>
           </a:xfrm>
           <a:prstGeom prst="rect">
             <a:avLst/>
@@ -17124,8 +17183,8 @@
         </p:nvSpPr>
         <p:spPr>
           <a:xfrm>
-            <a:off x="5239512" y="3050869"/>
-            <a:ext cx="676656" cy="270017"/>
+            <a:off x="5239512" y="2943292"/>
+            <a:ext cx="676656" cy="248502"/>
           </a:xfrm>
           <a:prstGeom prst="rect">
             <a:avLst/>
@@ -17163,8 +17222,8 @@
         </p:nvSpPr>
         <p:spPr>
           <a:xfrm>
-            <a:off x="658368" y="3320886"/>
-            <a:ext cx="310896" cy="270017"/>
+            <a:off x="658368" y="3191794"/>
+            <a:ext cx="310896" cy="248502"/>
           </a:xfrm>
           <a:prstGeom prst="rect">
             <a:avLst/>
@@ -17202,8 +17261,8 @@
         </p:nvSpPr>
         <p:spPr>
           <a:xfrm>
-            <a:off x="1014984" y="3320886"/>
-            <a:ext cx="1783080" cy="270017"/>
+            <a:off x="1014984" y="3191794"/>
+            <a:ext cx="1783080" cy="248502"/>
           </a:xfrm>
           <a:prstGeom prst="rect">
             <a:avLst/>
@@ -17241,8 +17300,8 @@
         </p:nvSpPr>
         <p:spPr>
           <a:xfrm>
-            <a:off x="2871216" y="3381639"/>
-            <a:ext cx="291475" cy="148509"/>
+            <a:off x="2871216" y="3247707"/>
+            <a:ext cx="291475" cy="136676"/>
           </a:xfrm>
           <a:prstGeom prst="rect">
             <a:avLst/>
@@ -17261,8 +17320,8 @@
         </p:nvSpPr>
         <p:spPr>
           <a:xfrm>
-            <a:off x="3520440" y="3320886"/>
-            <a:ext cx="786384" cy="270017"/>
+            <a:off x="3520440" y="3191794"/>
+            <a:ext cx="786384" cy="248502"/>
           </a:xfrm>
           <a:prstGeom prst="rect">
             <a:avLst/>
@@ -17300,8 +17359,8 @@
         </p:nvSpPr>
         <p:spPr>
           <a:xfrm>
-            <a:off x="4306824" y="3320886"/>
-            <a:ext cx="932688" cy="270017"/>
+            <a:off x="4306824" y="3191794"/>
+            <a:ext cx="932688" cy="248502"/>
           </a:xfrm>
           <a:prstGeom prst="rect">
             <a:avLst/>
@@ -17339,8 +17398,8 @@
         </p:nvSpPr>
         <p:spPr>
           <a:xfrm>
-            <a:off x="5239512" y="3320886"/>
-            <a:ext cx="676656" cy="270017"/>
+            <a:off x="5239512" y="3191794"/>
+            <a:ext cx="676656" cy="248502"/>
           </a:xfrm>
           <a:prstGeom prst="rect">
             <a:avLst/>
@@ -17378,8 +17437,8 @@
         </p:nvSpPr>
         <p:spPr>
           <a:xfrm>
-            <a:off x="658368" y="3590903"/>
-            <a:ext cx="310896" cy="270017"/>
+            <a:off x="658368" y="3440296"/>
+            <a:ext cx="310896" cy="248502"/>
           </a:xfrm>
           <a:prstGeom prst="rect">
             <a:avLst/>
@@ -17417,8 +17476,8 @@
         </p:nvSpPr>
         <p:spPr>
           <a:xfrm>
-            <a:off x="1014984" y="3590903"/>
-            <a:ext cx="1783080" cy="270017"/>
+            <a:off x="1014984" y="3440296"/>
+            <a:ext cx="1783080" cy="248502"/>
           </a:xfrm>
           <a:prstGeom prst="rect">
             <a:avLst/>
@@ -17456,8 +17515,8 @@
         </p:nvSpPr>
         <p:spPr>
           <a:xfrm>
-            <a:off x="2871216" y="3651656"/>
-            <a:ext cx="288910" cy="148509"/>
+            <a:off x="2871216" y="3496208"/>
+            <a:ext cx="288910" cy="136676"/>
           </a:xfrm>
           <a:prstGeom prst="rect">
             <a:avLst/>
@@ -17476,8 +17535,8 @@
         </p:nvSpPr>
         <p:spPr>
           <a:xfrm>
-            <a:off x="3520440" y="3590903"/>
-            <a:ext cx="786384" cy="270017"/>
+            <a:off x="3520440" y="3440296"/>
+            <a:ext cx="786384" cy="248502"/>
           </a:xfrm>
           <a:prstGeom prst="rect">
             <a:avLst/>
@@ -17515,8 +17574,8 @@
         </p:nvSpPr>
         <p:spPr>
           <a:xfrm>
-            <a:off x="4306824" y="3590903"/>
-            <a:ext cx="932688" cy="270017"/>
+            <a:off x="4306824" y="3440296"/>
+            <a:ext cx="932688" cy="248502"/>
           </a:xfrm>
           <a:prstGeom prst="rect">
             <a:avLst/>
@@ -17554,8 +17613,8 @@
         </p:nvSpPr>
         <p:spPr>
           <a:xfrm>
-            <a:off x="5239512" y="3590903"/>
-            <a:ext cx="676656" cy="270017"/>
+            <a:off x="5239512" y="3440296"/>
+            <a:ext cx="676656" cy="248502"/>
           </a:xfrm>
           <a:prstGeom prst="rect">
             <a:avLst/>
@@ -17593,8 +17652,8 @@
         </p:nvSpPr>
         <p:spPr>
           <a:xfrm>
-            <a:off x="658368" y="3860920"/>
-            <a:ext cx="310896" cy="270017"/>
+            <a:off x="658368" y="3688797"/>
+            <a:ext cx="310896" cy="248502"/>
           </a:xfrm>
           <a:prstGeom prst="rect">
             <a:avLst/>
@@ -17632,8 +17691,8 @@
         </p:nvSpPr>
         <p:spPr>
           <a:xfrm>
-            <a:off x="1014984" y="3860920"/>
-            <a:ext cx="1783080" cy="270017"/>
+            <a:off x="1014984" y="3688797"/>
+            <a:ext cx="1783080" cy="248502"/>
           </a:xfrm>
           <a:prstGeom prst="rect">
             <a:avLst/>
@@ -17671,8 +17730,8 @@
         </p:nvSpPr>
         <p:spPr>
           <a:xfrm>
-            <a:off x="2871216" y="3921673"/>
-            <a:ext cx="286162" cy="148509"/>
+            <a:off x="2871216" y="3744710"/>
+            <a:ext cx="286162" cy="136676"/>
           </a:xfrm>
           <a:prstGeom prst="rect">
             <a:avLst/>
@@ -17691,8 +17750,8 @@
         </p:nvSpPr>
         <p:spPr>
           <a:xfrm>
-            <a:off x="3520440" y="3860920"/>
-            <a:ext cx="786384" cy="270017"/>
+            <a:off x="3520440" y="3688797"/>
+            <a:ext cx="786384" cy="248502"/>
           </a:xfrm>
           <a:prstGeom prst="rect">
             <a:avLst/>
@@ -17730,8 +17789,8 @@
         </p:nvSpPr>
         <p:spPr>
           <a:xfrm>
-            <a:off x="4306824" y="3860920"/>
-            <a:ext cx="932688" cy="270017"/>
+            <a:off x="4306824" y="3688797"/>
+            <a:ext cx="932688" cy="248502"/>
           </a:xfrm>
           <a:prstGeom prst="rect">
             <a:avLst/>
@@ -17769,8 +17828,8 @@
         </p:nvSpPr>
         <p:spPr>
           <a:xfrm>
-            <a:off x="5239512" y="3860920"/>
-            <a:ext cx="676656" cy="270017"/>
+            <a:off x="5239512" y="3688797"/>
+            <a:ext cx="676656" cy="248502"/>
           </a:xfrm>
           <a:prstGeom prst="rect">
             <a:avLst/>
@@ -17808,8 +17867,8 @@
         </p:nvSpPr>
         <p:spPr>
           <a:xfrm>
-            <a:off x="658368" y="4130936"/>
-            <a:ext cx="310896" cy="270017"/>
+            <a:off x="658368" y="3937299"/>
+            <a:ext cx="310896" cy="248502"/>
           </a:xfrm>
           <a:prstGeom prst="rect">
             <a:avLst/>
@@ -17847,8 +17906,8 @@
         </p:nvSpPr>
         <p:spPr>
           <a:xfrm>
-            <a:off x="1014984" y="4130936"/>
-            <a:ext cx="1783080" cy="270017"/>
+            <a:off x="1014984" y="3937299"/>
+            <a:ext cx="1783080" cy="248502"/>
           </a:xfrm>
           <a:prstGeom prst="rect">
             <a:avLst/>
@@ -17886,8 +17945,8 @@
         </p:nvSpPr>
         <p:spPr>
           <a:xfrm>
-            <a:off x="2871216" y="4191690"/>
-            <a:ext cx="280027" cy="148509"/>
+            <a:off x="2871216" y="3993212"/>
+            <a:ext cx="280027" cy="136676"/>
           </a:xfrm>
           <a:prstGeom prst="rect">
             <a:avLst/>
@@ -17906,8 +17965,8 @@
         </p:nvSpPr>
         <p:spPr>
           <a:xfrm>
-            <a:off x="3520440" y="4130936"/>
-            <a:ext cx="786384" cy="270017"/>
+            <a:off x="3520440" y="3937299"/>
+            <a:ext cx="786384" cy="248502"/>
           </a:xfrm>
           <a:prstGeom prst="rect">
             <a:avLst/>
@@ -17945,8 +18004,8 @@
         </p:nvSpPr>
         <p:spPr>
           <a:xfrm>
-            <a:off x="4306824" y="4130936"/>
-            <a:ext cx="932688" cy="270017"/>
+            <a:off x="4306824" y="3937299"/>
+            <a:ext cx="932688" cy="248502"/>
           </a:xfrm>
           <a:prstGeom prst="rect">
             <a:avLst/>
@@ -17984,8 +18043,8 @@
         </p:nvSpPr>
         <p:spPr>
           <a:xfrm>
-            <a:off x="5239512" y="4130936"/>
-            <a:ext cx="676656" cy="270017"/>
+            <a:off x="5239512" y="3937299"/>
+            <a:ext cx="676656" cy="248502"/>
           </a:xfrm>
           <a:prstGeom prst="rect">
             <a:avLst/>
@@ -18023,8 +18082,8 @@
         </p:nvSpPr>
         <p:spPr>
           <a:xfrm>
-            <a:off x="658368" y="4400953"/>
-            <a:ext cx="310896" cy="270017"/>
+            <a:off x="658368" y="4185800"/>
+            <a:ext cx="310896" cy="248502"/>
           </a:xfrm>
           <a:prstGeom prst="rect">
             <a:avLst/>
@@ -18062,8 +18121,8 @@
         </p:nvSpPr>
         <p:spPr>
           <a:xfrm>
-            <a:off x="1014984" y="4400953"/>
-            <a:ext cx="1783080" cy="270017"/>
+            <a:off x="1014984" y="4185800"/>
+            <a:ext cx="1783080" cy="248502"/>
           </a:xfrm>
           <a:prstGeom prst="rect">
             <a:avLst/>
@@ -18101,8 +18160,8 @@
         </p:nvSpPr>
         <p:spPr>
           <a:xfrm>
-            <a:off x="2871216" y="4461707"/>
-            <a:ext cx="264542" cy="148509"/>
+            <a:off x="2871216" y="4241713"/>
+            <a:ext cx="264542" cy="136676"/>
           </a:xfrm>
           <a:prstGeom prst="rect">
             <a:avLst/>
@@ -18121,8 +18180,8 @@
         </p:nvSpPr>
         <p:spPr>
           <a:xfrm>
-            <a:off x="3520440" y="4400953"/>
-            <a:ext cx="786384" cy="270017"/>
+            <a:off x="3520440" y="4185800"/>
+            <a:ext cx="786384" cy="248502"/>
           </a:xfrm>
           <a:prstGeom prst="rect">
             <a:avLst/>
@@ -18160,8 +18219,8 @@
         </p:nvSpPr>
         <p:spPr>
           <a:xfrm>
-            <a:off x="4306824" y="4400953"/>
-            <a:ext cx="932688" cy="270017"/>
+            <a:off x="4306824" y="4185800"/>
+            <a:ext cx="932688" cy="248502"/>
           </a:xfrm>
           <a:prstGeom prst="rect">
             <a:avLst/>
@@ -18199,8 +18258,8 @@
         </p:nvSpPr>
         <p:spPr>
           <a:xfrm>
-            <a:off x="5239512" y="4400953"/>
-            <a:ext cx="676656" cy="270017"/>
+            <a:off x="5239512" y="4185800"/>
+            <a:ext cx="676656" cy="248502"/>
           </a:xfrm>
           <a:prstGeom prst="rect">
             <a:avLst/>
@@ -18238,8 +18297,8 @@
         </p:nvSpPr>
         <p:spPr>
           <a:xfrm>
-            <a:off x="658368" y="4670970"/>
-            <a:ext cx="310896" cy="270017"/>
+            <a:off x="658368" y="4434302"/>
+            <a:ext cx="310896" cy="248502"/>
           </a:xfrm>
           <a:prstGeom prst="rect">
             <a:avLst/>
@@ -18277,8 +18336,8 @@
         </p:nvSpPr>
         <p:spPr>
           <a:xfrm>
-            <a:off x="1014984" y="4670970"/>
-            <a:ext cx="1783080" cy="270017"/>
+            <a:off x="1014984" y="4434302"/>
+            <a:ext cx="1783080" cy="248502"/>
           </a:xfrm>
           <a:prstGeom prst="rect">
             <a:avLst/>
@@ -18316,8 +18375,8 @@
         </p:nvSpPr>
         <p:spPr>
           <a:xfrm>
-            <a:off x="2871216" y="4731724"/>
-            <a:ext cx="238147" cy="148509"/>
+            <a:off x="2871216" y="4490215"/>
+            <a:ext cx="238147" cy="136676"/>
           </a:xfrm>
           <a:prstGeom prst="rect">
             <a:avLst/>
@@ -18336,8 +18395,8 @@
         </p:nvSpPr>
         <p:spPr>
           <a:xfrm>
-            <a:off x="3520440" y="4670970"/>
-            <a:ext cx="786384" cy="270017"/>
+            <a:off x="3520440" y="4434302"/>
+            <a:ext cx="786384" cy="248502"/>
           </a:xfrm>
           <a:prstGeom prst="rect">
             <a:avLst/>
@@ -18375,8 +18434,8 @@
         </p:nvSpPr>
         <p:spPr>
           <a:xfrm>
-            <a:off x="4306824" y="4670970"/>
-            <a:ext cx="932688" cy="270017"/>
+            <a:off x="4306824" y="4434302"/>
+            <a:ext cx="932688" cy="248502"/>
           </a:xfrm>
           <a:prstGeom prst="rect">
             <a:avLst/>
@@ -18414,8 +18473,8 @@
         </p:nvSpPr>
         <p:spPr>
           <a:xfrm>
-            <a:off x="5239512" y="4670970"/>
-            <a:ext cx="676656" cy="270017"/>
+            <a:off x="5239512" y="4434302"/>
+            <a:ext cx="676656" cy="248502"/>
           </a:xfrm>
           <a:prstGeom prst="rect">
             <a:avLst/>
@@ -18453,8 +18512,8 @@
         </p:nvSpPr>
         <p:spPr>
           <a:xfrm>
-            <a:off x="658368" y="4940987"/>
-            <a:ext cx="310896" cy="270017"/>
+            <a:off x="658368" y="4682804"/>
+            <a:ext cx="310896" cy="248502"/>
           </a:xfrm>
           <a:prstGeom prst="rect">
             <a:avLst/>
@@ -18492,8 +18551,8 @@
         </p:nvSpPr>
         <p:spPr>
           <a:xfrm>
-            <a:off x="1014984" y="4940987"/>
-            <a:ext cx="1783080" cy="270017"/>
+            <a:off x="1014984" y="4682804"/>
+            <a:ext cx="1783080" cy="248502"/>
           </a:xfrm>
           <a:prstGeom prst="rect">
             <a:avLst/>
@@ -18531,8 +18590,8 @@
         </p:nvSpPr>
         <p:spPr>
           <a:xfrm>
-            <a:off x="2871216" y="5001741"/>
-            <a:ext cx="233408" cy="148509"/>
+            <a:off x="2871216" y="4738717"/>
+            <a:ext cx="233408" cy="136676"/>
           </a:xfrm>
           <a:prstGeom prst="rect">
             <a:avLst/>
@@ -18551,8 +18610,8 @@
         </p:nvSpPr>
         <p:spPr>
           <a:xfrm>
-            <a:off x="3520440" y="4940987"/>
-            <a:ext cx="786384" cy="270017"/>
+            <a:off x="3520440" y="4682804"/>
+            <a:ext cx="786384" cy="248502"/>
           </a:xfrm>
           <a:prstGeom prst="rect">
             <a:avLst/>
@@ -18590,8 +18649,8 @@
         </p:nvSpPr>
         <p:spPr>
           <a:xfrm>
-            <a:off x="4306824" y="4940987"/>
-            <a:ext cx="932688" cy="270017"/>
+            <a:off x="4306824" y="4682804"/>
+            <a:ext cx="932688" cy="248502"/>
           </a:xfrm>
           <a:prstGeom prst="rect">
             <a:avLst/>
@@ -18629,8 +18688,8 @@
         </p:nvSpPr>
         <p:spPr>
           <a:xfrm>
-            <a:off x="5239512" y="4940987"/>
-            <a:ext cx="676656" cy="270017"/>
+            <a:off x="5239512" y="4682804"/>
+            <a:ext cx="676656" cy="248502"/>
           </a:xfrm>
           <a:prstGeom prst="rect">
             <a:avLst/>
@@ -18668,8 +18727,8 @@
         </p:nvSpPr>
         <p:spPr>
           <a:xfrm>
-            <a:off x="658368" y="5211004"/>
-            <a:ext cx="310896" cy="270017"/>
+            <a:off x="658368" y="4931305"/>
+            <a:ext cx="310896" cy="248502"/>
           </a:xfrm>
           <a:prstGeom prst="rect">
             <a:avLst/>
@@ -18707,8 +18766,8 @@
         </p:nvSpPr>
         <p:spPr>
           <a:xfrm>
-            <a:off x="1014984" y="5211004"/>
-            <a:ext cx="1783080" cy="270017"/>
+            <a:off x="1014984" y="4931305"/>
+            <a:ext cx="1783080" cy="248502"/>
           </a:xfrm>
           <a:prstGeom prst="rect">
             <a:avLst/>
@@ -18746,8 +18805,8 @@
         </p:nvSpPr>
         <p:spPr>
           <a:xfrm>
-            <a:off x="2871216" y="5271758"/>
-            <a:ext cx="217057" cy="148509"/>
+            <a:off x="2871216" y="4987218"/>
+            <a:ext cx="217057" cy="136676"/>
           </a:xfrm>
           <a:prstGeom prst="rect">
             <a:avLst/>
@@ -18766,8 +18825,8 @@
         </p:nvSpPr>
         <p:spPr>
           <a:xfrm>
-            <a:off x="3520440" y="5211004"/>
-            <a:ext cx="786384" cy="270017"/>
+            <a:off x="3520440" y="4931305"/>
+            <a:ext cx="786384" cy="248502"/>
           </a:xfrm>
           <a:prstGeom prst="rect">
             <a:avLst/>
@@ -18805,8 +18864,8 @@
         </p:nvSpPr>
         <p:spPr>
           <a:xfrm>
-            <a:off x="4306824" y="5211004"/>
-            <a:ext cx="932688" cy="270017"/>
+            <a:off x="4306824" y="4931305"/>
+            <a:ext cx="932688" cy="248502"/>
           </a:xfrm>
           <a:prstGeom prst="rect">
             <a:avLst/>
@@ -18844,8 +18903,8 @@
         </p:nvSpPr>
         <p:spPr>
           <a:xfrm>
-            <a:off x="5239512" y="5211004"/>
-            <a:ext cx="676656" cy="270017"/>
+            <a:off x="5239512" y="4931305"/>
+            <a:ext cx="676656" cy="248502"/>
           </a:xfrm>
           <a:prstGeom prst="rect">
             <a:avLst/>
@@ -18883,8 +18942,8 @@
         </p:nvSpPr>
         <p:spPr>
           <a:xfrm>
-            <a:off x="658368" y="5481021"/>
-            <a:ext cx="310896" cy="270017"/>
+            <a:off x="658368" y="5179807"/>
+            <a:ext cx="310896" cy="248502"/>
           </a:xfrm>
           <a:prstGeom prst="rect">
             <a:avLst/>
@@ -18922,8 +18981,8 @@
         </p:nvSpPr>
         <p:spPr>
           <a:xfrm>
-            <a:off x="1014984" y="5481021"/>
-            <a:ext cx="1783080" cy="270017"/>
+            <a:off x="1014984" y="5179807"/>
+            <a:ext cx="1783080" cy="248502"/>
           </a:xfrm>
           <a:prstGeom prst="rect">
             <a:avLst/>
@@ -18961,8 +19020,8 @@
         </p:nvSpPr>
         <p:spPr>
           <a:xfrm>
-            <a:off x="2871216" y="5541775"/>
-            <a:ext cx="180426" cy="148509"/>
+            <a:off x="2871216" y="5235720"/>
+            <a:ext cx="180426" cy="136676"/>
           </a:xfrm>
           <a:prstGeom prst="rect">
             <a:avLst/>
@@ -18981,8 +19040,8 @@
         </p:nvSpPr>
         <p:spPr>
           <a:xfrm>
-            <a:off x="3520440" y="5481021"/>
-            <a:ext cx="786384" cy="270017"/>
+            <a:off x="3520440" y="5179807"/>
+            <a:ext cx="786384" cy="248502"/>
           </a:xfrm>
           <a:prstGeom prst="rect">
             <a:avLst/>
@@ -19020,8 +19079,8 @@
         </p:nvSpPr>
         <p:spPr>
           <a:xfrm>
-            <a:off x="4306824" y="5481021"/>
-            <a:ext cx="932688" cy="270017"/>
+            <a:off x="4306824" y="5179807"/>
+            <a:ext cx="932688" cy="248502"/>
           </a:xfrm>
           <a:prstGeom prst="rect">
             <a:avLst/>
@@ -19059,8 +19118,8 @@
         </p:nvSpPr>
         <p:spPr>
           <a:xfrm>
-            <a:off x="5239512" y="5481021"/>
-            <a:ext cx="676656" cy="270017"/>
+            <a:off x="5239512" y="5179807"/>
+            <a:ext cx="676656" cy="248502"/>
           </a:xfrm>
           <a:prstGeom prst="rect">
             <a:avLst/>
@@ -19098,8 +19157,8 @@
         </p:nvSpPr>
         <p:spPr>
           <a:xfrm>
-            <a:off x="658368" y="5751038"/>
-            <a:ext cx="310896" cy="270017"/>
+            <a:off x="658368" y="5428309"/>
+            <a:ext cx="310896" cy="248502"/>
           </a:xfrm>
           <a:prstGeom prst="rect">
             <a:avLst/>
@@ -19137,8 +19196,8 @@
         </p:nvSpPr>
         <p:spPr>
           <a:xfrm>
-            <a:off x="1014984" y="5751038"/>
-            <a:ext cx="1783080" cy="270017"/>
+            <a:off x="1014984" y="5428309"/>
+            <a:ext cx="1783080" cy="248502"/>
           </a:xfrm>
           <a:prstGeom prst="rect">
             <a:avLst/>
@@ -19176,8 +19235,8 @@
         </p:nvSpPr>
         <p:spPr>
           <a:xfrm>
-            <a:off x="2871216" y="5811792"/>
-            <a:ext cx="164601" cy="148509"/>
+            <a:off x="2871216" y="5484222"/>
+            <a:ext cx="164601" cy="136676"/>
           </a:xfrm>
           <a:prstGeom prst="rect">
             <a:avLst/>
@@ -19196,8 +19255,8 @@
         </p:nvSpPr>
         <p:spPr>
           <a:xfrm>
-            <a:off x="3520440" y="5751038"/>
-            <a:ext cx="786384" cy="270017"/>
+            <a:off x="3520440" y="5428309"/>
+            <a:ext cx="786384" cy="248502"/>
           </a:xfrm>
           <a:prstGeom prst="rect">
             <a:avLst/>
@@ -19235,8 +19294,8 @@
         </p:nvSpPr>
         <p:spPr>
           <a:xfrm>
-            <a:off x="4306824" y="5751038"/>
-            <a:ext cx="932688" cy="270017"/>
+            <a:off x="4306824" y="5428309"/>
+            <a:ext cx="932688" cy="248502"/>
           </a:xfrm>
           <a:prstGeom prst="rect">
             <a:avLst/>
@@ -19274,8 +19333,8 @@
         </p:nvSpPr>
         <p:spPr>
           <a:xfrm>
-            <a:off x="5239512" y="5751038"/>
-            <a:ext cx="676656" cy="270017"/>
+            <a:off x="5239512" y="5428309"/>
+            <a:ext cx="676656" cy="248502"/>
           </a:xfrm>
           <a:prstGeom prst="rect">
             <a:avLst/>
@@ -19313,8 +19372,8 @@
         </p:nvSpPr>
         <p:spPr>
           <a:xfrm>
-            <a:off x="658368" y="6021055"/>
-            <a:ext cx="310896" cy="270017"/>
+            <a:off x="658368" y="5676810"/>
+            <a:ext cx="310896" cy="248502"/>
           </a:xfrm>
           <a:prstGeom prst="rect">
             <a:avLst/>
@@ -19352,8 +19411,8 @@
         </p:nvSpPr>
         <p:spPr>
           <a:xfrm>
-            <a:off x="1014984" y="6021055"/>
-            <a:ext cx="1783080" cy="270017"/>
+            <a:off x="1014984" y="5676810"/>
+            <a:ext cx="1783080" cy="248502"/>
           </a:xfrm>
           <a:prstGeom prst="rect">
             <a:avLst/>
@@ -19391,8 +19450,8 @@
         </p:nvSpPr>
         <p:spPr>
           <a:xfrm>
-            <a:off x="2871216" y="6081809"/>
-            <a:ext cx="159807" cy="148509"/>
+            <a:off x="2871216" y="5732723"/>
+            <a:ext cx="159807" cy="136676"/>
           </a:xfrm>
           <a:prstGeom prst="rect">
             <a:avLst/>
@@ -19411,8 +19470,8 @@
         </p:nvSpPr>
         <p:spPr>
           <a:xfrm>
-            <a:off x="3520440" y="6021055"/>
-            <a:ext cx="786384" cy="270017"/>
+            <a:off x="3520440" y="5676810"/>
+            <a:ext cx="786384" cy="248502"/>
           </a:xfrm>
           <a:prstGeom prst="rect">
             <a:avLst/>
@@ -19450,8 +19509,8 @@
         </p:nvSpPr>
         <p:spPr>
           <a:xfrm>
-            <a:off x="4306824" y="6021055"/>
-            <a:ext cx="932688" cy="270017"/>
+            <a:off x="4306824" y="5676810"/>
+            <a:ext cx="932688" cy="248502"/>
           </a:xfrm>
           <a:prstGeom prst="rect">
             <a:avLst/>
@@ -19489,8 +19548,8 @@
         </p:nvSpPr>
         <p:spPr>
           <a:xfrm>
-            <a:off x="5239512" y="6021055"/>
-            <a:ext cx="676656" cy="270017"/>
+            <a:off x="5239512" y="5676810"/>
+            <a:ext cx="676656" cy="248502"/>
           </a:xfrm>
           <a:prstGeom prst="rect">
             <a:avLst/>
@@ -19529,7 +19588,7 @@
         <p:spPr>
           <a:xfrm>
             <a:off x="6208776" y="1700784"/>
-            <a:ext cx="310896" cy="270017"/>
+            <a:ext cx="310896" cy="248502"/>
           </a:xfrm>
           <a:prstGeom prst="rect">
             <a:avLst/>
@@ -19568,7 +19627,7 @@
         <p:spPr>
           <a:xfrm>
             <a:off x="6565392" y="1700784"/>
-            <a:ext cx="1783080" cy="270017"/>
+            <a:ext cx="1783080" cy="248502"/>
           </a:xfrm>
           <a:prstGeom prst="rect">
             <a:avLst/>
@@ -19606,8 +19665,8 @@
         </p:nvSpPr>
         <p:spPr>
           <a:xfrm>
-            <a:off x="8421624" y="1761538"/>
-            <a:ext cx="148734" cy="148509"/>
+            <a:off x="8421624" y="1756697"/>
+            <a:ext cx="148734" cy="136676"/>
           </a:xfrm>
           <a:prstGeom prst="rect">
             <a:avLst/>
@@ -19627,7 +19686,7 @@
         <p:spPr>
           <a:xfrm>
             <a:off x="9070848" y="1700784"/>
-            <a:ext cx="786384" cy="270017"/>
+            <a:ext cx="786384" cy="248502"/>
           </a:xfrm>
           <a:prstGeom prst="rect">
             <a:avLst/>
@@ -19666,7 +19725,7 @@
         <p:spPr>
           <a:xfrm>
             <a:off x="9857232" y="1700784"/>
-            <a:ext cx="932688" cy="270017"/>
+            <a:ext cx="932688" cy="248502"/>
           </a:xfrm>
           <a:prstGeom prst="rect">
             <a:avLst/>
@@ -19705,7 +19764,7 @@
         <p:spPr>
           <a:xfrm>
             <a:off x="10789920" y="1700784"/>
-            <a:ext cx="676656" cy="270017"/>
+            <a:ext cx="676656" cy="248502"/>
           </a:xfrm>
           <a:prstGeom prst="rect">
             <a:avLst/>
@@ -19743,8 +19802,8 @@
         </p:nvSpPr>
         <p:spPr>
           <a:xfrm>
-            <a:off x="6208776" y="1970801"/>
-            <a:ext cx="310896" cy="270017"/>
+            <a:off x="6208776" y="1949286"/>
+            <a:ext cx="310896" cy="248502"/>
           </a:xfrm>
           <a:prstGeom prst="rect">
             <a:avLst/>
@@ -19782,8 +19841,8 @@
         </p:nvSpPr>
         <p:spPr>
           <a:xfrm>
-            <a:off x="6565392" y="1970801"/>
-            <a:ext cx="1783080" cy="270017"/>
+            <a:off x="6565392" y="1949286"/>
+            <a:ext cx="1783080" cy="248502"/>
           </a:xfrm>
           <a:prstGeom prst="rect">
             <a:avLst/>
@@ -19821,8 +19880,8 @@
         </p:nvSpPr>
         <p:spPr>
           <a:xfrm>
-            <a:off x="8421624" y="2031555"/>
-            <a:ext cx="129329" cy="148509"/>
+            <a:off x="8421624" y="2005199"/>
+            <a:ext cx="129329" cy="136676"/>
           </a:xfrm>
           <a:prstGeom prst="rect">
             <a:avLst/>
@@ -19841,8 +19900,8 @@
         </p:nvSpPr>
         <p:spPr>
           <a:xfrm>
-            <a:off x="9070848" y="1970801"/>
-            <a:ext cx="786384" cy="270017"/>
+            <a:off x="9070848" y="1949286"/>
+            <a:ext cx="786384" cy="248502"/>
           </a:xfrm>
           <a:prstGeom prst="rect">
             <a:avLst/>
@@ -19880,8 +19939,8 @@
         </p:nvSpPr>
         <p:spPr>
           <a:xfrm>
-            <a:off x="9857232" y="1970801"/>
-            <a:ext cx="932688" cy="270017"/>
+            <a:off x="9857232" y="1949286"/>
+            <a:ext cx="932688" cy="248502"/>
           </a:xfrm>
           <a:prstGeom prst="rect">
             <a:avLst/>
@@ -19919,8 +19978,8 @@
         </p:nvSpPr>
         <p:spPr>
           <a:xfrm>
-            <a:off x="10789920" y="1970801"/>
-            <a:ext cx="676656" cy="270017"/>
+            <a:off x="10789920" y="1949286"/>
+            <a:ext cx="676656" cy="248502"/>
           </a:xfrm>
           <a:prstGeom prst="rect">
             <a:avLst/>
@@ -19958,8 +20017,8 @@
         </p:nvSpPr>
         <p:spPr>
           <a:xfrm>
-            <a:off x="6208776" y="2240818"/>
-            <a:ext cx="310896" cy="270017"/>
+            <a:off x="6208776" y="2197787"/>
+            <a:ext cx="310896" cy="248502"/>
           </a:xfrm>
           <a:prstGeom prst="rect">
             <a:avLst/>
@@ -19997,8 +20056,8 @@
         </p:nvSpPr>
         <p:spPr>
           <a:xfrm>
-            <a:off x="6565392" y="2240818"/>
-            <a:ext cx="1783080" cy="270017"/>
+            <a:off x="6565392" y="2197787"/>
+            <a:ext cx="1783080" cy="248502"/>
           </a:xfrm>
           <a:prstGeom prst="rect">
             <a:avLst/>
@@ -20036,8 +20095,8 @@
         </p:nvSpPr>
         <p:spPr>
           <a:xfrm>
-            <a:off x="8421624" y="2301572"/>
-            <a:ext cx="119109" cy="148509"/>
+            <a:off x="8421624" y="2253700"/>
+            <a:ext cx="119109" cy="136676"/>
           </a:xfrm>
           <a:prstGeom prst="rect">
             <a:avLst/>
@@ -20056,8 +20115,8 @@
         </p:nvSpPr>
         <p:spPr>
           <a:xfrm>
-            <a:off x="9070848" y="2240818"/>
-            <a:ext cx="786384" cy="270017"/>
+            <a:off x="9070848" y="2197787"/>
+            <a:ext cx="786384" cy="248502"/>
           </a:xfrm>
           <a:prstGeom prst="rect">
             <a:avLst/>
@@ -20095,8 +20154,8 @@
         </p:nvSpPr>
         <p:spPr>
           <a:xfrm>
-            <a:off x="9857232" y="2240818"/>
-            <a:ext cx="932688" cy="270017"/>
+            <a:off x="9857232" y="2197787"/>
+            <a:ext cx="932688" cy="248502"/>
           </a:xfrm>
           <a:prstGeom prst="rect">
             <a:avLst/>
@@ -20134,8 +20193,8 @@
         </p:nvSpPr>
         <p:spPr>
           <a:xfrm>
-            <a:off x="10789920" y="2240818"/>
-            <a:ext cx="676656" cy="270017"/>
+            <a:off x="10789920" y="2197787"/>
+            <a:ext cx="676656" cy="248502"/>
           </a:xfrm>
           <a:prstGeom prst="rect">
             <a:avLst/>
@@ -20173,8 +20232,8 @@
         </p:nvSpPr>
         <p:spPr>
           <a:xfrm>
-            <a:off x="6208776" y="2510835"/>
-            <a:ext cx="310896" cy="270017"/>
+            <a:off x="6208776" y="2446289"/>
+            <a:ext cx="310896" cy="248502"/>
           </a:xfrm>
           <a:prstGeom prst="rect">
             <a:avLst/>
@@ -20212,8 +20271,8 @@
         </p:nvSpPr>
         <p:spPr>
           <a:xfrm>
-            <a:off x="6565392" y="2510835"/>
-            <a:ext cx="1783080" cy="270017"/>
+            <a:off x="6565392" y="2446289"/>
+            <a:ext cx="1783080" cy="248502"/>
           </a:xfrm>
           <a:prstGeom prst="rect">
             <a:avLst/>
@@ -20251,8 +20310,8 @@
         </p:nvSpPr>
         <p:spPr>
           <a:xfrm>
-            <a:off x="8421624" y="2571589"/>
-            <a:ext cx="92701" cy="148509"/>
+            <a:off x="8421624" y="2502202"/>
+            <a:ext cx="92701" cy="136676"/>
           </a:xfrm>
           <a:prstGeom prst="rect">
             <a:avLst/>
@@ -20271,8 +20330,8 @@
         </p:nvSpPr>
         <p:spPr>
           <a:xfrm>
-            <a:off x="9070848" y="2510835"/>
-            <a:ext cx="786384" cy="270017"/>
+            <a:off x="9070848" y="2446289"/>
+            <a:ext cx="786384" cy="248502"/>
           </a:xfrm>
           <a:prstGeom prst="rect">
             <a:avLst/>
@@ -20310,8 +20369,8 @@
         </p:nvSpPr>
         <p:spPr>
           <a:xfrm>
-            <a:off x="9857232" y="2510835"/>
-            <a:ext cx="932688" cy="270017"/>
+            <a:off x="9857232" y="2446289"/>
+            <a:ext cx="932688" cy="248502"/>
           </a:xfrm>
           <a:prstGeom prst="rect">
             <a:avLst/>
@@ -20349,8 +20408,8 @@
         </p:nvSpPr>
         <p:spPr>
           <a:xfrm>
-            <a:off x="10789920" y="2510835"/>
-            <a:ext cx="676656" cy="270017"/>
+            <a:off x="10789920" y="2446289"/>
+            <a:ext cx="676656" cy="248502"/>
           </a:xfrm>
           <a:prstGeom prst="rect">
             <a:avLst/>
@@ -20388,8 +20447,8 @@
         </p:nvSpPr>
         <p:spPr>
           <a:xfrm>
-            <a:off x="6208776" y="2780852"/>
-            <a:ext cx="310896" cy="270017"/>
+            <a:off x="6208776" y="2694791"/>
+            <a:ext cx="310896" cy="248502"/>
           </a:xfrm>
           <a:prstGeom prst="rect">
             <a:avLst/>
@@ -20427,8 +20486,8 @@
         </p:nvSpPr>
         <p:spPr>
           <a:xfrm>
-            <a:off x="6565392" y="2780852"/>
-            <a:ext cx="1783080" cy="270017"/>
+            <a:off x="6565392" y="2694791"/>
+            <a:ext cx="1783080" cy="248502"/>
           </a:xfrm>
           <a:prstGeom prst="rect">
             <a:avLst/>
@@ -20466,8 +20525,8 @@
         </p:nvSpPr>
         <p:spPr>
           <a:xfrm>
-            <a:off x="8421624" y="2841606"/>
-            <a:ext cx="89382" cy="148509"/>
+            <a:off x="8421624" y="2750703"/>
+            <a:ext cx="89382" cy="136676"/>
           </a:xfrm>
           <a:prstGeom prst="rect">
             <a:avLst/>
@@ -20486,8 +20545,8 @@
         </p:nvSpPr>
         <p:spPr>
           <a:xfrm>
-            <a:off x="9070848" y="2780852"/>
-            <a:ext cx="786384" cy="270017"/>
+            <a:off x="9070848" y="2694791"/>
+            <a:ext cx="786384" cy="248502"/>
           </a:xfrm>
           <a:prstGeom prst="rect">
             <a:avLst/>
@@ -20525,8 +20584,8 @@
         </p:nvSpPr>
         <p:spPr>
           <a:xfrm>
-            <a:off x="9857232" y="2780852"/>
-            <a:ext cx="932688" cy="270017"/>
+            <a:off x="9857232" y="2694791"/>
+            <a:ext cx="932688" cy="248502"/>
           </a:xfrm>
           <a:prstGeom prst="rect">
             <a:avLst/>
@@ -20564,8 +20623,8 @@
         </p:nvSpPr>
         <p:spPr>
           <a:xfrm>
-            <a:off x="10789920" y="2780852"/>
-            <a:ext cx="676656" cy="270017"/>
+            <a:off x="10789920" y="2694791"/>
+            <a:ext cx="676656" cy="248502"/>
           </a:xfrm>
           <a:prstGeom prst="rect">
             <a:avLst/>
@@ -20603,8 +20662,8 @@
         </p:nvSpPr>
         <p:spPr>
           <a:xfrm>
-            <a:off x="6208776" y="3050869"/>
-            <a:ext cx="310896" cy="270017"/>
+            <a:off x="6208776" y="2943292"/>
+            <a:ext cx="310896" cy="248502"/>
           </a:xfrm>
           <a:prstGeom prst="rect">
             <a:avLst/>
@@ -20642,8 +20701,8 @@
         </p:nvSpPr>
         <p:spPr>
           <a:xfrm>
-            <a:off x="6565392" y="3050869"/>
-            <a:ext cx="1783080" cy="270017"/>
+            <a:off x="6565392" y="2943292"/>
+            <a:ext cx="1783080" cy="248502"/>
           </a:xfrm>
           <a:prstGeom prst="rect">
             <a:avLst/>
@@ -20681,8 +20740,8 @@
         </p:nvSpPr>
         <p:spPr>
           <a:xfrm>
-            <a:off x="8421624" y="3111623"/>
-            <a:ext cx="83365" cy="148509"/>
+            <a:off x="8421624" y="2999205"/>
+            <a:ext cx="83365" cy="136676"/>
           </a:xfrm>
           <a:prstGeom prst="rect">
             <a:avLst/>
@@ -20701,8 +20760,8 @@
         </p:nvSpPr>
         <p:spPr>
           <a:xfrm>
-            <a:off x="9070848" y="3050869"/>
-            <a:ext cx="786384" cy="270017"/>
+            <a:off x="9070848" y="2943292"/>
+            <a:ext cx="786384" cy="248502"/>
           </a:xfrm>
           <a:prstGeom prst="rect">
             <a:avLst/>
@@ -20740,8 +20799,8 @@
         </p:nvSpPr>
         <p:spPr>
           <a:xfrm>
-            <a:off x="9857232" y="3050869"/>
-            <a:ext cx="932688" cy="270017"/>
+            <a:off x="9857232" y="2943292"/>
+            <a:ext cx="932688" cy="248502"/>
           </a:xfrm>
           <a:prstGeom prst="rect">
             <a:avLst/>
@@ -20779,8 +20838,8 @@
         </p:nvSpPr>
         <p:spPr>
           <a:xfrm>
-            <a:off x="10789920" y="3050869"/>
-            <a:ext cx="676656" cy="270017"/>
+            <a:off x="10789920" y="2943292"/>
+            <a:ext cx="676656" cy="248502"/>
           </a:xfrm>
           <a:prstGeom prst="rect">
             <a:avLst/>
@@ -20818,8 +20877,8 @@
         </p:nvSpPr>
         <p:spPr>
           <a:xfrm>
-            <a:off x="6208776" y="3320886"/>
-            <a:ext cx="310896" cy="270017"/>
+            <a:off x="6208776" y="3191794"/>
+            <a:ext cx="310896" cy="248502"/>
           </a:xfrm>
           <a:prstGeom prst="rect">
             <a:avLst/>
@@ -20857,8 +20916,8 @@
         </p:nvSpPr>
         <p:spPr>
           <a:xfrm>
-            <a:off x="6565392" y="3320886"/>
-            <a:ext cx="1783080" cy="270017"/>
+            <a:off x="6565392" y="3191794"/>
+            <a:ext cx="1783080" cy="248502"/>
           </a:xfrm>
           <a:prstGeom prst="rect">
             <a:avLst/>
@@ -20896,8 +20955,8 @@
         </p:nvSpPr>
         <p:spPr>
           <a:xfrm>
-            <a:off x="8421624" y="3381639"/>
-            <a:ext cx="78085" cy="148509"/>
+            <a:off x="8421624" y="3247707"/>
+            <a:ext cx="78085" cy="136676"/>
           </a:xfrm>
           <a:prstGeom prst="rect">
             <a:avLst/>
@@ -20916,8 +20975,8 @@
         </p:nvSpPr>
         <p:spPr>
           <a:xfrm>
-            <a:off x="9070848" y="3320886"/>
-            <a:ext cx="786384" cy="270017"/>
+            <a:off x="9070848" y="3191794"/>
+            <a:ext cx="786384" cy="248502"/>
           </a:xfrm>
           <a:prstGeom prst="rect">
             <a:avLst/>
@@ -20955,8 +21014,8 @@
         </p:nvSpPr>
         <p:spPr>
           <a:xfrm>
-            <a:off x="9857232" y="3320886"/>
-            <a:ext cx="932688" cy="270017"/>
+            <a:off x="9857232" y="3191794"/>
+            <a:ext cx="932688" cy="248502"/>
           </a:xfrm>
           <a:prstGeom prst="rect">
             <a:avLst/>
@@ -20994,8 +21053,8 @@
         </p:nvSpPr>
         <p:spPr>
           <a:xfrm>
-            <a:off x="10789920" y="3320886"/>
-            <a:ext cx="676656" cy="270017"/>
+            <a:off x="10789920" y="3191794"/>
+            <a:ext cx="676656" cy="248502"/>
           </a:xfrm>
           <a:prstGeom prst="rect">
             <a:avLst/>
@@ -21033,8 +21092,8 @@
         </p:nvSpPr>
         <p:spPr>
           <a:xfrm>
-            <a:off x="6208776" y="3590903"/>
-            <a:ext cx="310896" cy="270017"/>
+            <a:off x="6208776" y="3440296"/>
+            <a:ext cx="310896" cy="248502"/>
           </a:xfrm>
           <a:prstGeom prst="rect">
             <a:avLst/>
@@ -21072,8 +21131,8 @@
         </p:nvSpPr>
         <p:spPr>
           <a:xfrm>
-            <a:off x="6565392" y="3590903"/>
-            <a:ext cx="1783080" cy="270017"/>
+            <a:off x="6565392" y="3440296"/>
+            <a:ext cx="1783080" cy="248502"/>
           </a:xfrm>
           <a:prstGeom prst="rect">
             <a:avLst/>
@@ -21111,8 +21170,8 @@
         </p:nvSpPr>
         <p:spPr>
           <a:xfrm>
-            <a:off x="8421624" y="3651656"/>
-            <a:ext cx="77498" cy="148509"/>
+            <a:off x="8421624" y="3496208"/>
+            <a:ext cx="77498" cy="136676"/>
           </a:xfrm>
           <a:prstGeom prst="rect">
             <a:avLst/>
@@ -21131,8 +21190,8 @@
         </p:nvSpPr>
         <p:spPr>
           <a:xfrm>
-            <a:off x="9070848" y="3590903"/>
-            <a:ext cx="786384" cy="270017"/>
+            <a:off x="9070848" y="3440296"/>
+            <a:ext cx="786384" cy="248502"/>
           </a:xfrm>
           <a:prstGeom prst="rect">
             <a:avLst/>
@@ -21170,8 +21229,8 @@
         </p:nvSpPr>
         <p:spPr>
           <a:xfrm>
-            <a:off x="9857232" y="3590903"/>
-            <a:ext cx="932688" cy="270017"/>
+            <a:off x="9857232" y="3440296"/>
+            <a:ext cx="932688" cy="248502"/>
           </a:xfrm>
           <a:prstGeom prst="rect">
             <a:avLst/>
@@ -21209,8 +21268,8 @@
         </p:nvSpPr>
         <p:spPr>
           <a:xfrm>
-            <a:off x="10789920" y="3590903"/>
-            <a:ext cx="676656" cy="270017"/>
+            <a:off x="10789920" y="3440296"/>
+            <a:ext cx="676656" cy="248502"/>
           </a:xfrm>
           <a:prstGeom prst="rect">
             <a:avLst/>
@@ -21248,8 +21307,8 @@
         </p:nvSpPr>
         <p:spPr>
           <a:xfrm>
-            <a:off x="6208776" y="3860920"/>
-            <a:ext cx="310896" cy="270017"/>
+            <a:off x="6208776" y="3688797"/>
+            <a:ext cx="310896" cy="248502"/>
           </a:xfrm>
           <a:prstGeom prst="rect">
             <a:avLst/>
@@ -21287,8 +21346,8 @@
         </p:nvSpPr>
         <p:spPr>
           <a:xfrm>
-            <a:off x="6565392" y="3860920"/>
-            <a:ext cx="1783080" cy="270017"/>
+            <a:off x="6565392" y="3688797"/>
+            <a:ext cx="1783080" cy="248502"/>
           </a:xfrm>
           <a:prstGeom prst="rect">
             <a:avLst/>
@@ -21326,8 +21385,8 @@
         </p:nvSpPr>
         <p:spPr>
           <a:xfrm>
-            <a:off x="8421624" y="3921673"/>
-            <a:ext cx="75663" cy="148509"/>
+            <a:off x="8421624" y="3744710"/>
+            <a:ext cx="75663" cy="136676"/>
           </a:xfrm>
           <a:prstGeom prst="rect">
             <a:avLst/>
@@ -21346,8 +21405,8 @@
         </p:nvSpPr>
         <p:spPr>
           <a:xfrm>
-            <a:off x="9070848" y="3860920"/>
-            <a:ext cx="786384" cy="270017"/>
+            <a:off x="9070848" y="3688797"/>
+            <a:ext cx="786384" cy="248502"/>
           </a:xfrm>
           <a:prstGeom prst="rect">
             <a:avLst/>
@@ -21385,8 +21444,8 @@
         </p:nvSpPr>
         <p:spPr>
           <a:xfrm>
-            <a:off x="9857232" y="3860920"/>
-            <a:ext cx="932688" cy="270017"/>
+            <a:off x="9857232" y="3688797"/>
+            <a:ext cx="932688" cy="248502"/>
           </a:xfrm>
           <a:prstGeom prst="rect">
             <a:avLst/>
@@ -21424,8 +21483,8 @@
         </p:nvSpPr>
         <p:spPr>
           <a:xfrm>
-            <a:off x="10789920" y="3860920"/>
-            <a:ext cx="676656" cy="270017"/>
+            <a:off x="10789920" y="3688797"/>
+            <a:ext cx="676656" cy="248502"/>
           </a:xfrm>
           <a:prstGeom prst="rect">
             <a:avLst/>
@@ -21463,8 +21522,8 @@
         </p:nvSpPr>
         <p:spPr>
           <a:xfrm>
-            <a:off x="6208776" y="4130936"/>
-            <a:ext cx="310896" cy="270017"/>
+            <a:off x="6208776" y="3937299"/>
+            <a:ext cx="310896" cy="248502"/>
           </a:xfrm>
           <a:prstGeom prst="rect">
             <a:avLst/>
@@ -21502,8 +21561,8 @@
         </p:nvSpPr>
         <p:spPr>
           <a:xfrm>
-            <a:off x="6565392" y="4130936"/>
-            <a:ext cx="1783080" cy="270017"/>
+            <a:off x="6565392" y="3937299"/>
+            <a:ext cx="1783080" cy="248502"/>
           </a:xfrm>
           <a:prstGeom prst="rect">
             <a:avLst/>
@@ -21541,8 +21600,8 @@
         </p:nvSpPr>
         <p:spPr>
           <a:xfrm>
-            <a:off x="8421624" y="4191690"/>
-            <a:ext cx="56358" cy="148509"/>
+            <a:off x="8421624" y="3993212"/>
+            <a:ext cx="56358" cy="136676"/>
           </a:xfrm>
           <a:prstGeom prst="rect">
             <a:avLst/>
@@ -21561,8 +21620,8 @@
         </p:nvSpPr>
         <p:spPr>
           <a:xfrm>
-            <a:off x="9070848" y="4130936"/>
-            <a:ext cx="786384" cy="270017"/>
+            <a:off x="9070848" y="3937299"/>
+            <a:ext cx="786384" cy="248502"/>
           </a:xfrm>
           <a:prstGeom prst="rect">
             <a:avLst/>
@@ -21600,8 +21659,8 @@
         </p:nvSpPr>
         <p:spPr>
           <a:xfrm>
-            <a:off x="9857232" y="4130936"/>
-            <a:ext cx="932688" cy="270017"/>
+            <a:off x="9857232" y="3937299"/>
+            <a:ext cx="932688" cy="248502"/>
           </a:xfrm>
           <a:prstGeom prst="rect">
             <a:avLst/>
@@ -21639,8 +21698,8 @@
         </p:nvSpPr>
         <p:spPr>
           <a:xfrm>
-            <a:off x="10789920" y="4130936"/>
-            <a:ext cx="676656" cy="270017"/>
+            <a:off x="10789920" y="3937299"/>
+            <a:ext cx="676656" cy="248502"/>
           </a:xfrm>
           <a:prstGeom prst="rect">
             <a:avLst/>
@@ -21678,8 +21737,8 @@
         </p:nvSpPr>
         <p:spPr>
           <a:xfrm>
-            <a:off x="6208776" y="4400953"/>
-            <a:ext cx="310896" cy="270017"/>
+            <a:off x="6208776" y="4185800"/>
+            <a:ext cx="310896" cy="248502"/>
           </a:xfrm>
           <a:prstGeom prst="rect">
             <a:avLst/>
@@ -21717,8 +21776,8 @@
         </p:nvSpPr>
         <p:spPr>
           <a:xfrm>
-            <a:off x="6565392" y="4400953"/>
-            <a:ext cx="1783080" cy="270017"/>
+            <a:off x="6565392" y="4185800"/>
+            <a:ext cx="1783080" cy="248502"/>
           </a:xfrm>
           <a:prstGeom prst="rect">
             <a:avLst/>
@@ -21756,8 +21815,8 @@
         </p:nvSpPr>
         <p:spPr>
           <a:xfrm>
-            <a:off x="8421624" y="4461707"/>
-            <a:ext cx="48801" cy="148509"/>
+            <a:off x="8421624" y="4241713"/>
+            <a:ext cx="48801" cy="136676"/>
           </a:xfrm>
           <a:prstGeom prst="rect">
             <a:avLst/>
@@ -21776,8 +21835,8 @@
         </p:nvSpPr>
         <p:spPr>
           <a:xfrm>
-            <a:off x="9070848" y="4400953"/>
-            <a:ext cx="786384" cy="270017"/>
+            <a:off x="9070848" y="4185800"/>
+            <a:ext cx="786384" cy="248502"/>
           </a:xfrm>
           <a:prstGeom prst="rect">
             <a:avLst/>
@@ -21815,8 +21874,8 @@
         </p:nvSpPr>
         <p:spPr>
           <a:xfrm>
-            <a:off x="9857232" y="4400953"/>
-            <a:ext cx="932688" cy="270017"/>
+            <a:off x="9857232" y="4185800"/>
+            <a:ext cx="932688" cy="248502"/>
           </a:xfrm>
           <a:prstGeom prst="rect">
             <a:avLst/>
@@ -21854,8 +21913,8 @@
         </p:nvSpPr>
         <p:spPr>
           <a:xfrm>
-            <a:off x="10789920" y="4400953"/>
-            <a:ext cx="676656" cy="270017"/>
+            <a:off x="10789920" y="4185800"/>
+            <a:ext cx="676656" cy="248502"/>
           </a:xfrm>
           <a:prstGeom prst="rect">
             <a:avLst/>
@@ -21893,8 +21952,8 @@
         </p:nvSpPr>
         <p:spPr>
           <a:xfrm>
-            <a:off x="6208776" y="4670970"/>
-            <a:ext cx="310896" cy="270017"/>
+            <a:off x="6208776" y="4434302"/>
+            <a:ext cx="310896" cy="248502"/>
           </a:xfrm>
           <a:prstGeom prst="rect">
             <a:avLst/>
@@ -21932,8 +21991,8 @@
         </p:nvSpPr>
         <p:spPr>
           <a:xfrm>
-            <a:off x="6565392" y="4670970"/>
-            <a:ext cx="1783080" cy="270017"/>
+            <a:off x="6565392" y="4434302"/>
+            <a:ext cx="1783080" cy="248502"/>
           </a:xfrm>
           <a:prstGeom prst="rect">
             <a:avLst/>
@@ -21971,8 +22030,8 @@
         </p:nvSpPr>
         <p:spPr>
           <a:xfrm>
-            <a:off x="8421624" y="4731724"/>
-            <a:ext cx="48716" cy="148509"/>
+            <a:off x="8421624" y="4490215"/>
+            <a:ext cx="48716" cy="136676"/>
           </a:xfrm>
           <a:prstGeom prst="rect">
             <a:avLst/>
@@ -21991,8 +22050,8 @@
         </p:nvSpPr>
         <p:spPr>
           <a:xfrm>
-            <a:off x="9070848" y="4670970"/>
-            <a:ext cx="786384" cy="270017"/>
+            <a:off x="9070848" y="4434302"/>
+            <a:ext cx="786384" cy="248502"/>
           </a:xfrm>
           <a:prstGeom prst="rect">
             <a:avLst/>
@@ -22030,8 +22089,8 @@
         </p:nvSpPr>
         <p:spPr>
           <a:xfrm>
-            <a:off x="9857232" y="4670970"/>
-            <a:ext cx="932688" cy="270017"/>
+            <a:off x="9857232" y="4434302"/>
+            <a:ext cx="932688" cy="248502"/>
           </a:xfrm>
           <a:prstGeom prst="rect">
             <a:avLst/>
@@ -22069,8 +22128,8 @@
         </p:nvSpPr>
         <p:spPr>
           <a:xfrm>
-            <a:off x="10789920" y="4670970"/>
-            <a:ext cx="676656" cy="270017"/>
+            <a:off x="10789920" y="4434302"/>
+            <a:ext cx="676656" cy="248502"/>
           </a:xfrm>
           <a:prstGeom prst="rect">
             <a:avLst/>
@@ -22108,8 +22167,8 @@
         </p:nvSpPr>
         <p:spPr>
           <a:xfrm>
-            <a:off x="6208776" y="4940987"/>
-            <a:ext cx="310896" cy="270017"/>
+            <a:off x="6208776" y="4682804"/>
+            <a:ext cx="310896" cy="248502"/>
           </a:xfrm>
           <a:prstGeom prst="rect">
             <a:avLst/>
@@ -22147,8 +22206,8 @@
         </p:nvSpPr>
         <p:spPr>
           <a:xfrm>
-            <a:off x="6565392" y="4940987"/>
-            <a:ext cx="1783080" cy="270017"/>
+            <a:off x="6565392" y="4682804"/>
+            <a:ext cx="1783080" cy="248502"/>
           </a:xfrm>
           <a:prstGeom prst="rect">
             <a:avLst/>
@@ -22186,8 +22245,8 @@
         </p:nvSpPr>
         <p:spPr>
           <a:xfrm>
-            <a:off x="8421624" y="5001741"/>
-            <a:ext cx="42835" cy="148509"/>
+            <a:off x="8421624" y="4738717"/>
+            <a:ext cx="42835" cy="136676"/>
           </a:xfrm>
           <a:prstGeom prst="rect">
             <a:avLst/>
@@ -22206,8 +22265,8 @@
         </p:nvSpPr>
         <p:spPr>
           <a:xfrm>
-            <a:off x="9070848" y="4940987"/>
-            <a:ext cx="786384" cy="270017"/>
+            <a:off x="9070848" y="4682804"/>
+            <a:ext cx="786384" cy="248502"/>
           </a:xfrm>
           <a:prstGeom prst="rect">
             <a:avLst/>
@@ -22245,8 +22304,8 @@
         </p:nvSpPr>
         <p:spPr>
           <a:xfrm>
-            <a:off x="9857232" y="4940987"/>
-            <a:ext cx="932688" cy="270017"/>
+            <a:off x="9857232" y="4682804"/>
+            <a:ext cx="932688" cy="248502"/>
           </a:xfrm>
           <a:prstGeom prst="rect">
             <a:avLst/>
@@ -22284,8 +22343,8 @@
         </p:nvSpPr>
         <p:spPr>
           <a:xfrm>
-            <a:off x="10789920" y="4940987"/>
-            <a:ext cx="676656" cy="270017"/>
+            <a:off x="10789920" y="4682804"/>
+            <a:ext cx="676656" cy="248502"/>
           </a:xfrm>
           <a:prstGeom prst="rect">
             <a:avLst/>
@@ -22323,8 +22382,8 @@
         </p:nvSpPr>
         <p:spPr>
           <a:xfrm>
-            <a:off x="6208776" y="5211004"/>
-            <a:ext cx="310896" cy="270017"/>
+            <a:off x="6208776" y="4931305"/>
+            <a:ext cx="310896" cy="248502"/>
           </a:xfrm>
           <a:prstGeom prst="rect">
             <a:avLst/>
@@ -22362,8 +22421,8 @@
         </p:nvSpPr>
         <p:spPr>
           <a:xfrm>
-            <a:off x="6565392" y="5211004"/>
-            <a:ext cx="1783080" cy="270017"/>
+            <a:off x="6565392" y="4931305"/>
+            <a:ext cx="1783080" cy="248502"/>
           </a:xfrm>
           <a:prstGeom prst="rect">
             <a:avLst/>
@@ -22401,8 +22460,8 @@
         </p:nvSpPr>
         <p:spPr>
           <a:xfrm>
-            <a:off x="8421624" y="5271758"/>
-            <a:ext cx="39448" cy="148509"/>
+            <a:off x="8421624" y="4987218"/>
+            <a:ext cx="39448" cy="136676"/>
           </a:xfrm>
           <a:prstGeom prst="rect">
             <a:avLst/>
@@ -22421,8 +22480,8 @@
         </p:nvSpPr>
         <p:spPr>
           <a:xfrm>
-            <a:off x="9070848" y="5211004"/>
-            <a:ext cx="786384" cy="270017"/>
+            <a:off x="9070848" y="4931305"/>
+            <a:ext cx="786384" cy="248502"/>
           </a:xfrm>
           <a:prstGeom prst="rect">
             <a:avLst/>
@@ -22460,8 +22519,8 @@
         </p:nvSpPr>
         <p:spPr>
           <a:xfrm>
-            <a:off x="9857232" y="5211004"/>
-            <a:ext cx="932688" cy="270017"/>
+            <a:off x="9857232" y="4931305"/>
+            <a:ext cx="932688" cy="248502"/>
           </a:xfrm>
           <a:prstGeom prst="rect">
             <a:avLst/>
@@ -22499,8 +22558,8 @@
         </p:nvSpPr>
         <p:spPr>
           <a:xfrm>
-            <a:off x="10789920" y="5211004"/>
-            <a:ext cx="676656" cy="270017"/>
+            <a:off x="10789920" y="4931305"/>
+            <a:ext cx="676656" cy="248502"/>
           </a:xfrm>
           <a:prstGeom prst="rect">
             <a:avLst/>
@@ -22538,8 +22597,8 @@
         </p:nvSpPr>
         <p:spPr>
           <a:xfrm>
-            <a:off x="6208776" y="5481021"/>
-            <a:ext cx="310896" cy="270017"/>
+            <a:off x="6208776" y="5179807"/>
+            <a:ext cx="310896" cy="248502"/>
           </a:xfrm>
           <a:prstGeom prst="rect">
             <a:avLst/>
@@ -22577,8 +22636,8 @@
         </p:nvSpPr>
         <p:spPr>
           <a:xfrm>
-            <a:off x="6565392" y="5481021"/>
-            <a:ext cx="1783080" cy="270017"/>
+            <a:off x="6565392" y="5179807"/>
+            <a:ext cx="1783080" cy="248502"/>
           </a:xfrm>
           <a:prstGeom prst="rect">
             <a:avLst/>
@@ -22616,8 +22675,8 @@
         </p:nvSpPr>
         <p:spPr>
           <a:xfrm>
-            <a:off x="8421624" y="5541775"/>
-            <a:ext cx="32291" cy="148509"/>
+            <a:off x="8421624" y="5235720"/>
+            <a:ext cx="32291" cy="136676"/>
           </a:xfrm>
           <a:prstGeom prst="rect">
             <a:avLst/>
@@ -22636,8 +22695,8 @@
         </p:nvSpPr>
         <p:spPr>
           <a:xfrm>
-            <a:off x="9070848" y="5481021"/>
-            <a:ext cx="786384" cy="270017"/>
+            <a:off x="9070848" y="5179807"/>
+            <a:ext cx="786384" cy="248502"/>
           </a:xfrm>
           <a:prstGeom prst="rect">
             <a:avLst/>
@@ -22675,8 +22734,8 @@
         </p:nvSpPr>
         <p:spPr>
           <a:xfrm>
-            <a:off x="9857232" y="5481021"/>
-            <a:ext cx="932688" cy="270017"/>
+            <a:off x="9857232" y="5179807"/>
+            <a:ext cx="932688" cy="248502"/>
           </a:xfrm>
           <a:prstGeom prst="rect">
             <a:avLst/>
@@ -22714,8 +22773,8 @@
         </p:nvSpPr>
         <p:spPr>
           <a:xfrm>
-            <a:off x="10789920" y="5481021"/>
-            <a:ext cx="676656" cy="270017"/>
+            <a:off x="10789920" y="5179807"/>
+            <a:ext cx="676656" cy="248502"/>
           </a:xfrm>
           <a:prstGeom prst="rect">
             <a:avLst/>
@@ -22753,8 +22812,8 @@
         </p:nvSpPr>
         <p:spPr>
           <a:xfrm>
-            <a:off x="6208776" y="5751038"/>
-            <a:ext cx="310896" cy="270017"/>
+            <a:off x="6208776" y="5428309"/>
+            <a:ext cx="310896" cy="248502"/>
           </a:xfrm>
           <a:prstGeom prst="rect">
             <a:avLst/>
@@ -22792,8 +22851,8 @@
         </p:nvSpPr>
         <p:spPr>
           <a:xfrm>
-            <a:off x="6565392" y="5751038"/>
-            <a:ext cx="1783080" cy="270017"/>
+            <a:off x="6565392" y="5428309"/>
+            <a:ext cx="1783080" cy="248502"/>
           </a:xfrm>
           <a:prstGeom prst="rect">
             <a:avLst/>
@@ -22831,8 +22890,8 @@
         </p:nvSpPr>
         <p:spPr>
           <a:xfrm>
-            <a:off x="8421624" y="5811792"/>
-            <a:ext cx="18288" cy="148509"/>
+            <a:off x="8421624" y="5484222"/>
+            <a:ext cx="18288" cy="136676"/>
           </a:xfrm>
           <a:prstGeom prst="rect">
             <a:avLst/>
@@ -22851,8 +22910,8 @@
         </p:nvSpPr>
         <p:spPr>
           <a:xfrm>
-            <a:off x="9070848" y="5751038"/>
-            <a:ext cx="786384" cy="270017"/>
+            <a:off x="9070848" y="5428309"/>
+            <a:ext cx="786384" cy="248502"/>
           </a:xfrm>
           <a:prstGeom prst="rect">
             <a:avLst/>
@@ -22890,8 +22949,8 @@
         </p:nvSpPr>
         <p:spPr>
           <a:xfrm>
-            <a:off x="9857232" y="5751038"/>
-            <a:ext cx="932688" cy="270017"/>
+            <a:off x="9857232" y="5428309"/>
+            <a:ext cx="932688" cy="248502"/>
           </a:xfrm>
           <a:prstGeom prst="rect">
             <a:avLst/>
@@ -22929,8 +22988,8 @@
         </p:nvSpPr>
         <p:spPr>
           <a:xfrm>
-            <a:off x="10789920" y="5751038"/>
-            <a:ext cx="676656" cy="270017"/>
+            <a:off x="10789920" y="5428309"/>
+            <a:ext cx="676656" cy="248502"/>
           </a:xfrm>
           <a:prstGeom prst="rect">
             <a:avLst/>
@@ -22969,7 +23028,7 @@
         <p:spPr>
           <a:xfrm>
             <a:off x="6085332" y="1700784"/>
-            <a:ext cx="10973" cy="4590288"/>
+            <a:ext cx="10973" cy="4224528"/>
           </a:xfrm>
           <a:prstGeom prst="rect">
             <a:avLst/>
@@ -22979,6 +23038,65 @@
           </a:solidFill>
           <a:ln/>
         </p:spPr>
+      </p:sp>
+      <p:sp>
+        <p:nvSpPr>
+          <p:cNvPr id="212" name="Shape 209"/>
+          <p:cNvSpPr/>
+          <p:nvPr/>
+        </p:nvSpPr>
+        <p:spPr>
+          <a:xfrm>
+            <a:off x="457200" y="6126480"/>
+            <a:ext cx="11274552" cy="371856"/>
+          </a:xfrm>
+          <a:prstGeom prst="rect">
+            <a:avLst/>
+          </a:prstGeom>
+          <a:solidFill>
+            <a:srgbClr val="FBEBEA"/>
+          </a:solidFill>
+          <a:ln/>
+        </p:spPr>
+      </p:sp>
+      <p:sp>
+        <p:nvSpPr>
+          <p:cNvPr id="213" name="Text 210"/>
+          <p:cNvSpPr txBox="1"/>
+          <p:nvPr/>
+        </p:nvSpPr>
+        <p:spPr>
+          <a:xfrm>
+            <a:off x="658368" y="6144768"/>
+            <a:ext cx="10927080" cy="335280"/>
+          </a:xfrm>
+          <a:prstGeom prst="rect">
+            <a:avLst/>
+          </a:prstGeom>
+          <a:noFill/>
+          <a:ln/>
+        </p:spPr>
+        <p:txBody>
+          <a:bodyPr wrap="square" lIns="0" tIns="0" rIns="0" bIns="0" rtlCol="0" anchor="ctr"/>
+          <a:lstStyle/>
+          <a:p>
+            <a:pPr indent="0" marL="0">
+              <a:buNone/>
+            </a:pPr>
+            <a:r>
+              <a:rPr lang="en-US" sz="1600" b="1" dirty="0">
+                <a:solidFill>
+                  <a:srgbClr val="A82B26"/>
+                </a:solidFill>
+                <a:latin typeface="Inter" pitchFamily="34" charset="0"/>
+                <a:ea typeface="Inter" pitchFamily="34" charset="-122"/>
+                <a:cs typeface="Inter" pitchFamily="34" charset="-120"/>
+              </a:rPr>
+              <a:t>Six stores hold $647K a month. 6 stores at or above 85% still leave $537K a month.</a:t>
+            </a:r>
+            <a:endParaRPr lang="en-US" sz="1600" dirty="0"/>
+          </a:p>
+        </p:txBody>
       </p:sp>
     </p:spTree>
   </p:cSld>
@@ -23119,7 +23237,7 @@
         <p:spPr>
           <a:xfrm>
             <a:off x="457200" y="1207008"/>
-            <a:ext cx="11274552" cy="5148072"/>
+            <a:ext cx="11274552" cy="4782312"/>
           </a:xfrm>
           <a:prstGeom prst="rect">
             <a:avLst/>
@@ -23373,7 +23491,7 @@
         <p:spPr>
           <a:xfrm>
             <a:off x="658368" y="1700784"/>
-            <a:ext cx="310896" cy="270017"/>
+            <a:ext cx="310896" cy="248502"/>
           </a:xfrm>
           <a:prstGeom prst="rect">
             <a:avLst/>
@@ -23412,7 +23530,7 @@
         <p:spPr>
           <a:xfrm>
             <a:off x="1014984" y="1700784"/>
-            <a:ext cx="1783080" cy="270017"/>
+            <a:ext cx="1783080" cy="248502"/>
           </a:xfrm>
           <a:prstGeom prst="rect">
             <a:avLst/>
@@ -23450,8 +23568,8 @@
         </p:nvSpPr>
         <p:spPr>
           <a:xfrm>
-            <a:off x="2871216" y="1761538"/>
-            <a:ext cx="466344" cy="148509"/>
+            <a:off x="2871216" y="1756697"/>
+            <a:ext cx="466344" cy="136676"/>
           </a:xfrm>
           <a:prstGeom prst="rect">
             <a:avLst/>
@@ -23471,7 +23589,7 @@
         <p:spPr>
           <a:xfrm>
             <a:off x="3392424" y="1700784"/>
-            <a:ext cx="786384" cy="270017"/>
+            <a:ext cx="786384" cy="248502"/>
           </a:xfrm>
           <a:prstGeom prst="rect">
             <a:avLst/>
@@ -23510,7 +23628,7 @@
         <p:spPr>
           <a:xfrm>
             <a:off x="4178808" y="1700784"/>
-            <a:ext cx="868680" cy="270017"/>
+            <a:ext cx="868680" cy="248502"/>
           </a:xfrm>
           <a:prstGeom prst="rect">
             <a:avLst/>
@@ -23549,7 +23667,7 @@
         <p:spPr>
           <a:xfrm>
             <a:off x="5047488" y="1700784"/>
-            <a:ext cx="868680" cy="270017"/>
+            <a:ext cx="868680" cy="248502"/>
           </a:xfrm>
           <a:prstGeom prst="rect">
             <a:avLst/>
@@ -23587,8 +23705,8 @@
         </p:nvSpPr>
         <p:spPr>
           <a:xfrm>
-            <a:off x="658368" y="1970801"/>
-            <a:ext cx="310896" cy="270017"/>
+            <a:off x="658368" y="1949286"/>
+            <a:ext cx="310896" cy="248502"/>
           </a:xfrm>
           <a:prstGeom prst="rect">
             <a:avLst/>
@@ -23626,8 +23744,8 @@
         </p:nvSpPr>
         <p:spPr>
           <a:xfrm>
-            <a:off x="1014984" y="1970801"/>
-            <a:ext cx="1783080" cy="270017"/>
+            <a:off x="1014984" y="1949286"/>
+            <a:ext cx="1783080" cy="248502"/>
           </a:xfrm>
           <a:prstGeom prst="rect">
             <a:avLst/>
@@ -23665,8 +23783,8 @@
         </p:nvSpPr>
         <p:spPr>
           <a:xfrm>
-            <a:off x="2871216" y="2031555"/>
-            <a:ext cx="435113" cy="148509"/>
+            <a:off x="2871216" y="2005199"/>
+            <a:ext cx="435113" cy="136676"/>
           </a:xfrm>
           <a:prstGeom prst="rect">
             <a:avLst/>
@@ -23685,8 +23803,8 @@
         </p:nvSpPr>
         <p:spPr>
           <a:xfrm>
-            <a:off x="3392424" y="1970801"/>
-            <a:ext cx="786384" cy="270017"/>
+            <a:off x="3392424" y="1949286"/>
+            <a:ext cx="786384" cy="248502"/>
           </a:xfrm>
           <a:prstGeom prst="rect">
             <a:avLst/>
@@ -23724,8 +23842,8 @@
         </p:nvSpPr>
         <p:spPr>
           <a:xfrm>
-            <a:off x="4178808" y="1970801"/>
-            <a:ext cx="868680" cy="270017"/>
+            <a:off x="4178808" y="1949286"/>
+            <a:ext cx="868680" cy="248502"/>
           </a:xfrm>
           <a:prstGeom prst="rect">
             <a:avLst/>
@@ -23763,8 +23881,8 @@
         </p:nvSpPr>
         <p:spPr>
           <a:xfrm>
-            <a:off x="5047488" y="1970801"/>
-            <a:ext cx="868680" cy="270017"/>
+            <a:off x="5047488" y="1949286"/>
+            <a:ext cx="868680" cy="248502"/>
           </a:xfrm>
           <a:prstGeom prst="rect">
             <a:avLst/>
@@ -23802,8 +23920,8 @@
         </p:nvSpPr>
         <p:spPr>
           <a:xfrm>
-            <a:off x="658368" y="2240818"/>
-            <a:ext cx="310896" cy="270017"/>
+            <a:off x="658368" y="2197787"/>
+            <a:ext cx="310896" cy="248502"/>
           </a:xfrm>
           <a:prstGeom prst="rect">
             <a:avLst/>
@@ -23841,8 +23959,8 @@
         </p:nvSpPr>
         <p:spPr>
           <a:xfrm>
-            <a:off x="1014984" y="2240818"/>
-            <a:ext cx="1783080" cy="270017"/>
+            <a:off x="1014984" y="2197787"/>
+            <a:ext cx="1783080" cy="248502"/>
           </a:xfrm>
           <a:prstGeom prst="rect">
             <a:avLst/>
@@ -23880,8 +23998,8 @@
         </p:nvSpPr>
         <p:spPr>
           <a:xfrm>
-            <a:off x="2871216" y="2301572"/>
-            <a:ext cx="371948" cy="148509"/>
+            <a:off x="2871216" y="2253700"/>
+            <a:ext cx="371948" cy="136676"/>
           </a:xfrm>
           <a:prstGeom prst="rect">
             <a:avLst/>
@@ -23900,8 +24018,8 @@
         </p:nvSpPr>
         <p:spPr>
           <a:xfrm>
-            <a:off x="3392424" y="2240818"/>
-            <a:ext cx="786384" cy="270017"/>
+            <a:off x="3392424" y="2197787"/>
+            <a:ext cx="786384" cy="248502"/>
           </a:xfrm>
           <a:prstGeom prst="rect">
             <a:avLst/>
@@ -23939,8 +24057,8 @@
         </p:nvSpPr>
         <p:spPr>
           <a:xfrm>
-            <a:off x="4178808" y="2240818"/>
-            <a:ext cx="868680" cy="270017"/>
+            <a:off x="4178808" y="2197787"/>
+            <a:ext cx="868680" cy="248502"/>
           </a:xfrm>
           <a:prstGeom prst="rect">
             <a:avLst/>
@@ -23978,8 +24096,8 @@
         </p:nvSpPr>
         <p:spPr>
           <a:xfrm>
-            <a:off x="5047488" y="2240818"/>
-            <a:ext cx="868680" cy="270017"/>
+            <a:off x="5047488" y="2197787"/>
+            <a:ext cx="868680" cy="248502"/>
           </a:xfrm>
           <a:prstGeom prst="rect">
             <a:avLst/>
@@ -24017,8 +24135,8 @@
         </p:nvSpPr>
         <p:spPr>
           <a:xfrm>
-            <a:off x="658368" y="2510835"/>
-            <a:ext cx="310896" cy="270017"/>
+            <a:off x="658368" y="2446289"/>
+            <a:ext cx="310896" cy="248502"/>
           </a:xfrm>
           <a:prstGeom prst="rect">
             <a:avLst/>
@@ -24056,8 +24174,8 @@
         </p:nvSpPr>
         <p:spPr>
           <a:xfrm>
-            <a:off x="1014984" y="2510835"/>
-            <a:ext cx="1783080" cy="270017"/>
+            <a:off x="1014984" y="2446289"/>
+            <a:ext cx="1783080" cy="248502"/>
           </a:xfrm>
           <a:prstGeom prst="rect">
             <a:avLst/>
@@ -24095,8 +24213,8 @@
         </p:nvSpPr>
         <p:spPr>
           <a:xfrm>
-            <a:off x="2871216" y="2571589"/>
-            <a:ext cx="359385" cy="148509"/>
+            <a:off x="2871216" y="2502202"/>
+            <a:ext cx="359385" cy="136676"/>
           </a:xfrm>
           <a:prstGeom prst="rect">
             <a:avLst/>
@@ -24115,8 +24233,8 @@
         </p:nvSpPr>
         <p:spPr>
           <a:xfrm>
-            <a:off x="3392424" y="2510835"/>
-            <a:ext cx="786384" cy="270017"/>
+            <a:off x="3392424" y="2446289"/>
+            <a:ext cx="786384" cy="248502"/>
           </a:xfrm>
           <a:prstGeom prst="rect">
             <a:avLst/>
@@ -24154,8 +24272,8 @@
         </p:nvSpPr>
         <p:spPr>
           <a:xfrm>
-            <a:off x="4178808" y="2510835"/>
-            <a:ext cx="868680" cy="270017"/>
+            <a:off x="4178808" y="2446289"/>
+            <a:ext cx="868680" cy="248502"/>
           </a:xfrm>
           <a:prstGeom prst="rect">
             <a:avLst/>
@@ -24193,8 +24311,8 @@
         </p:nvSpPr>
         <p:spPr>
           <a:xfrm>
-            <a:off x="5047488" y="2510835"/>
-            <a:ext cx="868680" cy="270017"/>
+            <a:off x="5047488" y="2446289"/>
+            <a:ext cx="868680" cy="248502"/>
           </a:xfrm>
           <a:prstGeom prst="rect">
             <a:avLst/>
@@ -24232,8 +24350,8 @@
         </p:nvSpPr>
         <p:spPr>
           <a:xfrm>
-            <a:off x="658368" y="2780852"/>
-            <a:ext cx="310896" cy="270017"/>
+            <a:off x="658368" y="2694791"/>
+            <a:ext cx="310896" cy="248502"/>
           </a:xfrm>
           <a:prstGeom prst="rect">
             <a:avLst/>
@@ -24271,8 +24389,8 @@
         </p:nvSpPr>
         <p:spPr>
           <a:xfrm>
-            <a:off x="1014984" y="2780852"/>
-            <a:ext cx="1783080" cy="270017"/>
+            <a:off x="1014984" y="2694791"/>
+            <a:ext cx="1783080" cy="248502"/>
           </a:xfrm>
           <a:prstGeom prst="rect">
             <a:avLst/>
@@ -24310,8 +24428,8 @@
         </p:nvSpPr>
         <p:spPr>
           <a:xfrm>
-            <a:off x="2871216" y="2841606"/>
-            <a:ext cx="339754" cy="148509"/>
+            <a:off x="2871216" y="2750703"/>
+            <a:ext cx="339754" cy="136676"/>
           </a:xfrm>
           <a:prstGeom prst="rect">
             <a:avLst/>
@@ -24330,8 +24448,8 @@
         </p:nvSpPr>
         <p:spPr>
           <a:xfrm>
-            <a:off x="3392424" y="2780852"/>
-            <a:ext cx="786384" cy="270017"/>
+            <a:off x="3392424" y="2694791"/>
+            <a:ext cx="786384" cy="248502"/>
           </a:xfrm>
           <a:prstGeom prst="rect">
             <a:avLst/>
@@ -24369,8 +24487,8 @@
         </p:nvSpPr>
         <p:spPr>
           <a:xfrm>
-            <a:off x="4178808" y="2780852"/>
-            <a:ext cx="868680" cy="270017"/>
+            <a:off x="4178808" y="2694791"/>
+            <a:ext cx="868680" cy="248502"/>
           </a:xfrm>
           <a:prstGeom prst="rect">
             <a:avLst/>
@@ -24408,8 +24526,8 @@
         </p:nvSpPr>
         <p:spPr>
           <a:xfrm>
-            <a:off x="5047488" y="2780852"/>
-            <a:ext cx="868680" cy="270017"/>
+            <a:off x="5047488" y="2694791"/>
+            <a:ext cx="868680" cy="248502"/>
           </a:xfrm>
           <a:prstGeom prst="rect">
             <a:avLst/>
@@ -24447,8 +24565,8 @@
         </p:nvSpPr>
         <p:spPr>
           <a:xfrm>
-            <a:off x="658368" y="3050869"/>
-            <a:ext cx="310896" cy="270017"/>
+            <a:off x="658368" y="2943292"/>
+            <a:ext cx="310896" cy="248502"/>
           </a:xfrm>
           <a:prstGeom prst="rect">
             <a:avLst/>
@@ -24486,8 +24604,8 @@
         </p:nvSpPr>
         <p:spPr>
           <a:xfrm>
-            <a:off x="1014984" y="3050869"/>
-            <a:ext cx="1783080" cy="270017"/>
+            <a:off x="1014984" y="2943292"/>
+            <a:ext cx="1783080" cy="248502"/>
           </a:xfrm>
           <a:prstGeom prst="rect">
             <a:avLst/>
@@ -24525,8 +24643,8 @@
         </p:nvSpPr>
         <p:spPr>
           <a:xfrm>
-            <a:off x="2871216" y="3111623"/>
-            <a:ext cx="292285" cy="148509"/>
+            <a:off x="2871216" y="2999205"/>
+            <a:ext cx="292285" cy="136676"/>
           </a:xfrm>
           <a:prstGeom prst="rect">
             <a:avLst/>
@@ -24545,8 +24663,8 @@
         </p:nvSpPr>
         <p:spPr>
           <a:xfrm>
-            <a:off x="3392424" y="3050869"/>
-            <a:ext cx="786384" cy="270017"/>
+            <a:off x="3392424" y="2943292"/>
+            <a:ext cx="786384" cy="248502"/>
           </a:xfrm>
           <a:prstGeom prst="rect">
             <a:avLst/>
@@ -24584,8 +24702,8 @@
         </p:nvSpPr>
         <p:spPr>
           <a:xfrm>
-            <a:off x="4178808" y="3050869"/>
-            <a:ext cx="868680" cy="270017"/>
+            <a:off x="4178808" y="2943292"/>
+            <a:ext cx="868680" cy="248502"/>
           </a:xfrm>
           <a:prstGeom prst="rect">
             <a:avLst/>
@@ -24623,8 +24741,8 @@
         </p:nvSpPr>
         <p:spPr>
           <a:xfrm>
-            <a:off x="5047488" y="3050869"/>
-            <a:ext cx="868680" cy="270017"/>
+            <a:off x="5047488" y="2943292"/>
+            <a:ext cx="868680" cy="248502"/>
           </a:xfrm>
           <a:prstGeom prst="rect">
             <a:avLst/>
@@ -24662,8 +24780,8 @@
         </p:nvSpPr>
         <p:spPr>
           <a:xfrm>
-            <a:off x="658368" y="3320886"/>
-            <a:ext cx="310896" cy="270017"/>
+            <a:off x="658368" y="3191794"/>
+            <a:ext cx="310896" cy="248502"/>
           </a:xfrm>
           <a:prstGeom prst="rect">
             <a:avLst/>
@@ -24701,8 +24819,8 @@
         </p:nvSpPr>
         <p:spPr>
           <a:xfrm>
-            <a:off x="1014984" y="3320886"/>
-            <a:ext cx="1783080" cy="270017"/>
+            <a:off x="1014984" y="3191794"/>
+            <a:ext cx="1783080" cy="248502"/>
           </a:xfrm>
           <a:prstGeom prst="rect">
             <a:avLst/>
@@ -24740,8 +24858,8 @@
         </p:nvSpPr>
         <p:spPr>
           <a:xfrm>
-            <a:off x="2871216" y="3381639"/>
-            <a:ext cx="286413" cy="148509"/>
+            <a:off x="2871216" y="3247707"/>
+            <a:ext cx="286413" cy="136676"/>
           </a:xfrm>
           <a:prstGeom prst="rect">
             <a:avLst/>
@@ -24760,8 +24878,8 @@
         </p:nvSpPr>
         <p:spPr>
           <a:xfrm>
-            <a:off x="3392424" y="3320886"/>
-            <a:ext cx="786384" cy="270017"/>
+            <a:off x="3392424" y="3191794"/>
+            <a:ext cx="786384" cy="248502"/>
           </a:xfrm>
           <a:prstGeom prst="rect">
             <a:avLst/>
@@ -24799,8 +24917,8 @@
         </p:nvSpPr>
         <p:spPr>
           <a:xfrm>
-            <a:off x="4178808" y="3320886"/>
-            <a:ext cx="868680" cy="270017"/>
+            <a:off x="4178808" y="3191794"/>
+            <a:ext cx="868680" cy="248502"/>
           </a:xfrm>
           <a:prstGeom prst="rect">
             <a:avLst/>
@@ -24838,8 +24956,8 @@
         </p:nvSpPr>
         <p:spPr>
           <a:xfrm>
-            <a:off x="5047488" y="3320886"/>
-            <a:ext cx="868680" cy="270017"/>
+            <a:off x="5047488" y="3191794"/>
+            <a:ext cx="868680" cy="248502"/>
           </a:xfrm>
           <a:prstGeom prst="rect">
             <a:avLst/>
@@ -24877,8 +24995,8 @@
         </p:nvSpPr>
         <p:spPr>
           <a:xfrm>
-            <a:off x="658368" y="3590903"/>
-            <a:ext cx="310896" cy="270017"/>
+            <a:off x="658368" y="3440296"/>
+            <a:ext cx="310896" cy="248502"/>
           </a:xfrm>
           <a:prstGeom prst="rect">
             <a:avLst/>
@@ -24916,8 +25034,8 @@
         </p:nvSpPr>
         <p:spPr>
           <a:xfrm>
-            <a:off x="1014984" y="3590903"/>
-            <a:ext cx="1783080" cy="270017"/>
+            <a:off x="1014984" y="3440296"/>
+            <a:ext cx="1783080" cy="248502"/>
           </a:xfrm>
           <a:prstGeom prst="rect">
             <a:avLst/>
@@ -24955,8 +25073,8 @@
         </p:nvSpPr>
         <p:spPr>
           <a:xfrm>
-            <a:off x="2871216" y="3651656"/>
-            <a:ext cx="277524" cy="148509"/>
+            <a:off x="2871216" y="3496208"/>
+            <a:ext cx="277524" cy="136676"/>
           </a:xfrm>
           <a:prstGeom prst="rect">
             <a:avLst/>
@@ -24975,8 +25093,8 @@
         </p:nvSpPr>
         <p:spPr>
           <a:xfrm>
-            <a:off x="3392424" y="3590903"/>
-            <a:ext cx="786384" cy="270017"/>
+            <a:off x="3392424" y="3440296"/>
+            <a:ext cx="786384" cy="248502"/>
           </a:xfrm>
           <a:prstGeom prst="rect">
             <a:avLst/>
@@ -25014,8 +25132,8 @@
         </p:nvSpPr>
         <p:spPr>
           <a:xfrm>
-            <a:off x="4178808" y="3590903"/>
-            <a:ext cx="868680" cy="270017"/>
+            <a:off x="4178808" y="3440296"/>
+            <a:ext cx="868680" cy="248502"/>
           </a:xfrm>
           <a:prstGeom prst="rect">
             <a:avLst/>
@@ -25053,8 +25171,8 @@
         </p:nvSpPr>
         <p:spPr>
           <a:xfrm>
-            <a:off x="5047488" y="3590903"/>
-            <a:ext cx="868680" cy="270017"/>
+            <a:off x="5047488" y="3440296"/>
+            <a:ext cx="868680" cy="248502"/>
           </a:xfrm>
           <a:prstGeom prst="rect">
             <a:avLst/>
@@ -25092,8 +25210,8 @@
         </p:nvSpPr>
         <p:spPr>
           <a:xfrm>
-            <a:off x="658368" y="3860920"/>
-            <a:ext cx="310896" cy="270017"/>
+            <a:off x="658368" y="3688797"/>
+            <a:ext cx="310896" cy="248502"/>
           </a:xfrm>
           <a:prstGeom prst="rect">
             <a:avLst/>
@@ -25131,8 +25249,8 @@
         </p:nvSpPr>
         <p:spPr>
           <a:xfrm>
-            <a:off x="1014984" y="3860920"/>
-            <a:ext cx="1783080" cy="270017"/>
+            <a:off x="1014984" y="3688797"/>
+            <a:ext cx="1783080" cy="248502"/>
           </a:xfrm>
           <a:prstGeom prst="rect">
             <a:avLst/>
@@ -25170,8 +25288,8 @@
         </p:nvSpPr>
         <p:spPr>
           <a:xfrm>
-            <a:off x="2871216" y="3921673"/>
-            <a:ext cx="270873" cy="148509"/>
+            <a:off x="2871216" y="3744710"/>
+            <a:ext cx="270873" cy="136676"/>
           </a:xfrm>
           <a:prstGeom prst="rect">
             <a:avLst/>
@@ -25190,8 +25308,8 @@
         </p:nvSpPr>
         <p:spPr>
           <a:xfrm>
-            <a:off x="3392424" y="3860920"/>
-            <a:ext cx="786384" cy="270017"/>
+            <a:off x="3392424" y="3688797"/>
+            <a:ext cx="786384" cy="248502"/>
           </a:xfrm>
           <a:prstGeom prst="rect">
             <a:avLst/>
@@ -25229,8 +25347,8 @@
         </p:nvSpPr>
         <p:spPr>
           <a:xfrm>
-            <a:off x="4178808" y="3860920"/>
-            <a:ext cx="868680" cy="270017"/>
+            <a:off x="4178808" y="3688797"/>
+            <a:ext cx="868680" cy="248502"/>
           </a:xfrm>
           <a:prstGeom prst="rect">
             <a:avLst/>
@@ -25268,8 +25386,8 @@
         </p:nvSpPr>
         <p:spPr>
           <a:xfrm>
-            <a:off x="5047488" y="3860920"/>
-            <a:ext cx="868680" cy="270017"/>
+            <a:off x="5047488" y="3688797"/>
+            <a:ext cx="868680" cy="248502"/>
           </a:xfrm>
           <a:prstGeom prst="rect">
             <a:avLst/>
@@ -25307,8 +25425,8 @@
         </p:nvSpPr>
         <p:spPr>
           <a:xfrm>
-            <a:off x="658368" y="4130936"/>
-            <a:ext cx="310896" cy="270017"/>
+            <a:off x="658368" y="3937299"/>
+            <a:ext cx="310896" cy="248502"/>
           </a:xfrm>
           <a:prstGeom prst="rect">
             <a:avLst/>
@@ -25346,8 +25464,8 @@
         </p:nvSpPr>
         <p:spPr>
           <a:xfrm>
-            <a:off x="1014984" y="4130936"/>
-            <a:ext cx="1783080" cy="270017"/>
+            <a:off x="1014984" y="3937299"/>
+            <a:ext cx="1783080" cy="248502"/>
           </a:xfrm>
           <a:prstGeom prst="rect">
             <a:avLst/>
@@ -25385,8 +25503,8 @@
         </p:nvSpPr>
         <p:spPr>
           <a:xfrm>
-            <a:off x="2871216" y="4191690"/>
-            <a:ext cx="217136" cy="148509"/>
+            <a:off x="2871216" y="3993212"/>
+            <a:ext cx="217136" cy="136676"/>
           </a:xfrm>
           <a:prstGeom prst="rect">
             <a:avLst/>
@@ -25405,8 +25523,8 @@
         </p:nvSpPr>
         <p:spPr>
           <a:xfrm>
-            <a:off x="3392424" y="4130936"/>
-            <a:ext cx="786384" cy="270017"/>
+            <a:off x="3392424" y="3937299"/>
+            <a:ext cx="786384" cy="248502"/>
           </a:xfrm>
           <a:prstGeom prst="rect">
             <a:avLst/>
@@ -25444,8 +25562,8 @@
         </p:nvSpPr>
         <p:spPr>
           <a:xfrm>
-            <a:off x="4178808" y="4130936"/>
-            <a:ext cx="868680" cy="270017"/>
+            <a:off x="4178808" y="3937299"/>
+            <a:ext cx="868680" cy="248502"/>
           </a:xfrm>
           <a:prstGeom prst="rect">
             <a:avLst/>
@@ -25483,8 +25601,8 @@
         </p:nvSpPr>
         <p:spPr>
           <a:xfrm>
-            <a:off x="5047488" y="4130936"/>
-            <a:ext cx="868680" cy="270017"/>
+            <a:off x="5047488" y="3937299"/>
+            <a:ext cx="868680" cy="248502"/>
           </a:xfrm>
           <a:prstGeom prst="rect">
             <a:avLst/>
@@ -25522,8 +25640,8 @@
         </p:nvSpPr>
         <p:spPr>
           <a:xfrm>
-            <a:off x="658368" y="4400953"/>
-            <a:ext cx="310896" cy="270017"/>
+            <a:off x="658368" y="4185800"/>
+            <a:ext cx="310896" cy="248502"/>
           </a:xfrm>
           <a:prstGeom prst="rect">
             <a:avLst/>
@@ -25561,8 +25679,8 @@
         </p:nvSpPr>
         <p:spPr>
           <a:xfrm>
-            <a:off x="1014984" y="4400953"/>
-            <a:ext cx="1783080" cy="270017"/>
+            <a:off x="1014984" y="4185800"/>
+            <a:ext cx="1783080" cy="248502"/>
           </a:xfrm>
           <a:prstGeom prst="rect">
             <a:avLst/>
@@ -25600,8 +25718,8 @@
         </p:nvSpPr>
         <p:spPr>
           <a:xfrm>
-            <a:off x="2871216" y="4461707"/>
-            <a:ext cx="210283" cy="148509"/>
+            <a:off x="2871216" y="4241713"/>
+            <a:ext cx="210283" cy="136676"/>
           </a:xfrm>
           <a:prstGeom prst="rect">
             <a:avLst/>
@@ -25620,8 +25738,8 @@
         </p:nvSpPr>
         <p:spPr>
           <a:xfrm>
-            <a:off x="3392424" y="4400953"/>
-            <a:ext cx="786384" cy="270017"/>
+            <a:off x="3392424" y="4185800"/>
+            <a:ext cx="786384" cy="248502"/>
           </a:xfrm>
           <a:prstGeom prst="rect">
             <a:avLst/>
@@ -25659,8 +25777,8 @@
         </p:nvSpPr>
         <p:spPr>
           <a:xfrm>
-            <a:off x="4178808" y="4400953"/>
-            <a:ext cx="868680" cy="270017"/>
+            <a:off x="4178808" y="4185800"/>
+            <a:ext cx="868680" cy="248502"/>
           </a:xfrm>
           <a:prstGeom prst="rect">
             <a:avLst/>
@@ -25698,8 +25816,8 @@
         </p:nvSpPr>
         <p:spPr>
           <a:xfrm>
-            <a:off x="5047488" y="4400953"/>
-            <a:ext cx="868680" cy="270017"/>
+            <a:off x="5047488" y="4185800"/>
+            <a:ext cx="868680" cy="248502"/>
           </a:xfrm>
           <a:prstGeom prst="rect">
             <a:avLst/>
@@ -25737,8 +25855,8 @@
         </p:nvSpPr>
         <p:spPr>
           <a:xfrm>
-            <a:off x="658368" y="4670970"/>
-            <a:ext cx="310896" cy="270017"/>
+            <a:off x="658368" y="4434302"/>
+            <a:ext cx="310896" cy="248502"/>
           </a:xfrm>
           <a:prstGeom prst="rect">
             <a:avLst/>
@@ -25776,8 +25894,8 @@
         </p:nvSpPr>
         <p:spPr>
           <a:xfrm>
-            <a:off x="1014984" y="4670970"/>
-            <a:ext cx="1783080" cy="270017"/>
+            <a:off x="1014984" y="4434302"/>
+            <a:ext cx="1783080" cy="248502"/>
           </a:xfrm>
           <a:prstGeom prst="rect">
             <a:avLst/>
@@ -25815,8 +25933,8 @@
         </p:nvSpPr>
         <p:spPr>
           <a:xfrm>
-            <a:off x="2871216" y="4731724"/>
-            <a:ext cx="199373" cy="148509"/>
+            <a:off x="2871216" y="4490215"/>
+            <a:ext cx="199373" cy="136676"/>
           </a:xfrm>
           <a:prstGeom prst="rect">
             <a:avLst/>
@@ -25835,8 +25953,8 @@
         </p:nvSpPr>
         <p:spPr>
           <a:xfrm>
-            <a:off x="3392424" y="4670970"/>
-            <a:ext cx="786384" cy="270017"/>
+            <a:off x="3392424" y="4434302"/>
+            <a:ext cx="786384" cy="248502"/>
           </a:xfrm>
           <a:prstGeom prst="rect">
             <a:avLst/>
@@ -25874,8 +25992,8 @@
         </p:nvSpPr>
         <p:spPr>
           <a:xfrm>
-            <a:off x="4178808" y="4670970"/>
-            <a:ext cx="868680" cy="270017"/>
+            <a:off x="4178808" y="4434302"/>
+            <a:ext cx="868680" cy="248502"/>
           </a:xfrm>
           <a:prstGeom prst="rect">
             <a:avLst/>
@@ -25913,8 +26031,8 @@
         </p:nvSpPr>
         <p:spPr>
           <a:xfrm>
-            <a:off x="5047488" y="4670970"/>
-            <a:ext cx="868680" cy="270017"/>
+            <a:off x="5047488" y="4434302"/>
+            <a:ext cx="868680" cy="248502"/>
           </a:xfrm>
           <a:prstGeom prst="rect">
             <a:avLst/>
@@ -25952,8 +26070,8 @@
         </p:nvSpPr>
         <p:spPr>
           <a:xfrm>
-            <a:off x="658368" y="4940987"/>
-            <a:ext cx="310896" cy="270017"/>
+            <a:off x="658368" y="4682804"/>
+            <a:ext cx="310896" cy="248502"/>
           </a:xfrm>
           <a:prstGeom prst="rect">
             <a:avLst/>
@@ -25991,8 +26109,8 @@
         </p:nvSpPr>
         <p:spPr>
           <a:xfrm>
-            <a:off x="1014984" y="4940987"/>
-            <a:ext cx="1783080" cy="270017"/>
+            <a:off x="1014984" y="4682804"/>
+            <a:ext cx="1783080" cy="248502"/>
           </a:xfrm>
           <a:prstGeom prst="rect">
             <a:avLst/>
@@ -26030,8 +26148,8 @@
         </p:nvSpPr>
         <p:spPr>
           <a:xfrm>
-            <a:off x="2871216" y="5001741"/>
-            <a:ext cx="197385" cy="148509"/>
+            <a:off x="2871216" y="4738717"/>
+            <a:ext cx="197385" cy="136676"/>
           </a:xfrm>
           <a:prstGeom prst="rect">
             <a:avLst/>
@@ -26050,8 +26168,8 @@
         </p:nvSpPr>
         <p:spPr>
           <a:xfrm>
-            <a:off x="3392424" y="4940987"/>
-            <a:ext cx="786384" cy="270017"/>
+            <a:off x="3392424" y="4682804"/>
+            <a:ext cx="786384" cy="248502"/>
           </a:xfrm>
           <a:prstGeom prst="rect">
             <a:avLst/>
@@ -26089,8 +26207,8 @@
         </p:nvSpPr>
         <p:spPr>
           <a:xfrm>
-            <a:off x="4178808" y="4940987"/>
-            <a:ext cx="868680" cy="270017"/>
+            <a:off x="4178808" y="4682804"/>
+            <a:ext cx="868680" cy="248502"/>
           </a:xfrm>
           <a:prstGeom prst="rect">
             <a:avLst/>
@@ -26128,8 +26246,8 @@
         </p:nvSpPr>
         <p:spPr>
           <a:xfrm>
-            <a:off x="5047488" y="4940987"/>
-            <a:ext cx="868680" cy="270017"/>
+            <a:off x="5047488" y="4682804"/>
+            <a:ext cx="868680" cy="248502"/>
           </a:xfrm>
           <a:prstGeom prst="rect">
             <a:avLst/>
@@ -26167,8 +26285,8 @@
         </p:nvSpPr>
         <p:spPr>
           <a:xfrm>
-            <a:off x="658368" y="5211004"/>
-            <a:ext cx="310896" cy="270017"/>
+            <a:off x="658368" y="4931305"/>
+            <a:ext cx="310896" cy="248502"/>
           </a:xfrm>
           <a:prstGeom prst="rect">
             <a:avLst/>
@@ -26206,8 +26324,8 @@
         </p:nvSpPr>
         <p:spPr>
           <a:xfrm>
-            <a:off x="1014984" y="5211004"/>
-            <a:ext cx="1783080" cy="270017"/>
+            <a:off x="1014984" y="4931305"/>
+            <a:ext cx="1783080" cy="248502"/>
           </a:xfrm>
           <a:prstGeom prst="rect">
             <a:avLst/>
@@ -26245,8 +26363,8 @@
         </p:nvSpPr>
         <p:spPr>
           <a:xfrm>
-            <a:off x="2871216" y="5271758"/>
-            <a:ext cx="169024" cy="148509"/>
+            <a:off x="2871216" y="4987218"/>
+            <a:ext cx="169024" cy="136676"/>
           </a:xfrm>
           <a:prstGeom prst="rect">
             <a:avLst/>
@@ -26265,8 +26383,8 @@
         </p:nvSpPr>
         <p:spPr>
           <a:xfrm>
-            <a:off x="3392424" y="5211004"/>
-            <a:ext cx="786384" cy="270017"/>
+            <a:off x="3392424" y="4931305"/>
+            <a:ext cx="786384" cy="248502"/>
           </a:xfrm>
           <a:prstGeom prst="rect">
             <a:avLst/>
@@ -26304,8 +26422,8 @@
         </p:nvSpPr>
         <p:spPr>
           <a:xfrm>
-            <a:off x="4178808" y="5211004"/>
-            <a:ext cx="868680" cy="270017"/>
+            <a:off x="4178808" y="4931305"/>
+            <a:ext cx="868680" cy="248502"/>
           </a:xfrm>
           <a:prstGeom prst="rect">
             <a:avLst/>
@@ -26343,8 +26461,8 @@
         </p:nvSpPr>
         <p:spPr>
           <a:xfrm>
-            <a:off x="5047488" y="5211004"/>
-            <a:ext cx="868680" cy="270017"/>
+            <a:off x="5047488" y="4931305"/>
+            <a:ext cx="868680" cy="248502"/>
           </a:xfrm>
           <a:prstGeom prst="rect">
             <a:avLst/>
@@ -26382,8 +26500,8 @@
         </p:nvSpPr>
         <p:spPr>
           <a:xfrm>
-            <a:off x="658368" y="5481021"/>
-            <a:ext cx="310896" cy="270017"/>
+            <a:off x="658368" y="5179807"/>
+            <a:ext cx="310896" cy="248502"/>
           </a:xfrm>
           <a:prstGeom prst="rect">
             <a:avLst/>
@@ -26421,8 +26539,8 @@
         </p:nvSpPr>
         <p:spPr>
           <a:xfrm>
-            <a:off x="1014984" y="5481021"/>
-            <a:ext cx="1783080" cy="270017"/>
+            <a:off x="1014984" y="5179807"/>
+            <a:ext cx="1783080" cy="248502"/>
           </a:xfrm>
           <a:prstGeom prst="rect">
             <a:avLst/>
@@ -26460,8 +26578,8 @@
         </p:nvSpPr>
         <p:spPr>
           <a:xfrm>
-            <a:off x="2871216" y="5541775"/>
-            <a:ext cx="131586" cy="148509"/>
+            <a:off x="2871216" y="5235720"/>
+            <a:ext cx="131586" cy="136676"/>
           </a:xfrm>
           <a:prstGeom prst="rect">
             <a:avLst/>
@@ -26480,8 +26598,8 @@
         </p:nvSpPr>
         <p:spPr>
           <a:xfrm>
-            <a:off x="3392424" y="5481021"/>
-            <a:ext cx="786384" cy="270017"/>
+            <a:off x="3392424" y="5179807"/>
+            <a:ext cx="786384" cy="248502"/>
           </a:xfrm>
           <a:prstGeom prst="rect">
             <a:avLst/>
@@ -26519,8 +26637,8 @@
         </p:nvSpPr>
         <p:spPr>
           <a:xfrm>
-            <a:off x="4178808" y="5481021"/>
-            <a:ext cx="868680" cy="270017"/>
+            <a:off x="4178808" y="5179807"/>
+            <a:ext cx="868680" cy="248502"/>
           </a:xfrm>
           <a:prstGeom prst="rect">
             <a:avLst/>
@@ -26558,8 +26676,8 @@
         </p:nvSpPr>
         <p:spPr>
           <a:xfrm>
-            <a:off x="5047488" y="5481021"/>
-            <a:ext cx="868680" cy="270017"/>
+            <a:off x="5047488" y="5179807"/>
+            <a:ext cx="868680" cy="248502"/>
           </a:xfrm>
           <a:prstGeom prst="rect">
             <a:avLst/>
@@ -26597,8 +26715,8 @@
         </p:nvSpPr>
         <p:spPr>
           <a:xfrm>
-            <a:off x="658368" y="5751038"/>
-            <a:ext cx="310896" cy="270017"/>
+            <a:off x="658368" y="5428309"/>
+            <a:ext cx="310896" cy="248502"/>
           </a:xfrm>
           <a:prstGeom prst="rect">
             <a:avLst/>
@@ -26636,8 +26754,8 @@
         </p:nvSpPr>
         <p:spPr>
           <a:xfrm>
-            <a:off x="1014984" y="5751038"/>
-            <a:ext cx="1783080" cy="270017"/>
+            <a:off x="1014984" y="5428309"/>
+            <a:ext cx="1783080" cy="248502"/>
           </a:xfrm>
           <a:prstGeom prst="rect">
             <a:avLst/>
@@ -26675,8 +26793,8 @@
         </p:nvSpPr>
         <p:spPr>
           <a:xfrm>
-            <a:off x="2871216" y="5811792"/>
-            <a:ext cx="120839" cy="148509"/>
+            <a:off x="2871216" y="5484222"/>
+            <a:ext cx="120839" cy="136676"/>
           </a:xfrm>
           <a:prstGeom prst="rect">
             <a:avLst/>
@@ -26695,8 +26813,8 @@
         </p:nvSpPr>
         <p:spPr>
           <a:xfrm>
-            <a:off x="3392424" y="5751038"/>
-            <a:ext cx="786384" cy="270017"/>
+            <a:off x="3392424" y="5428309"/>
+            <a:ext cx="786384" cy="248502"/>
           </a:xfrm>
           <a:prstGeom prst="rect">
             <a:avLst/>
@@ -26734,8 +26852,8 @@
         </p:nvSpPr>
         <p:spPr>
           <a:xfrm>
-            <a:off x="4178808" y="5751038"/>
-            <a:ext cx="868680" cy="270017"/>
+            <a:off x="4178808" y="5428309"/>
+            <a:ext cx="868680" cy="248502"/>
           </a:xfrm>
           <a:prstGeom prst="rect">
             <a:avLst/>
@@ -26773,8 +26891,8 @@
         </p:nvSpPr>
         <p:spPr>
           <a:xfrm>
-            <a:off x="5047488" y="5751038"/>
-            <a:ext cx="868680" cy="270017"/>
+            <a:off x="5047488" y="5428309"/>
+            <a:ext cx="868680" cy="248502"/>
           </a:xfrm>
           <a:prstGeom prst="rect">
             <a:avLst/>
@@ -26812,8 +26930,8 @@
         </p:nvSpPr>
         <p:spPr>
           <a:xfrm>
-            <a:off x="658368" y="6021055"/>
-            <a:ext cx="310896" cy="270017"/>
+            <a:off x="658368" y="5676810"/>
+            <a:ext cx="310896" cy="248502"/>
           </a:xfrm>
           <a:prstGeom prst="rect">
             <a:avLst/>
@@ -26851,8 +26969,8 @@
         </p:nvSpPr>
         <p:spPr>
           <a:xfrm>
-            <a:off x="1014984" y="6021055"/>
-            <a:ext cx="1783080" cy="270017"/>
+            <a:off x="1014984" y="5676810"/>
+            <a:ext cx="1783080" cy="248502"/>
           </a:xfrm>
           <a:prstGeom prst="rect">
             <a:avLst/>
@@ -26890,8 +27008,8 @@
         </p:nvSpPr>
         <p:spPr>
           <a:xfrm>
-            <a:off x="2871216" y="6081809"/>
-            <a:ext cx="116857" cy="148509"/>
+            <a:off x="2871216" y="5732723"/>
+            <a:ext cx="116857" cy="136676"/>
           </a:xfrm>
           <a:prstGeom prst="rect">
             <a:avLst/>
@@ -26910,8 +27028,8 @@
         </p:nvSpPr>
         <p:spPr>
           <a:xfrm>
-            <a:off x="3392424" y="6021055"/>
-            <a:ext cx="786384" cy="270017"/>
+            <a:off x="3392424" y="5676810"/>
+            <a:ext cx="786384" cy="248502"/>
           </a:xfrm>
           <a:prstGeom prst="rect">
             <a:avLst/>
@@ -26949,8 +27067,8 @@
         </p:nvSpPr>
         <p:spPr>
           <a:xfrm>
-            <a:off x="4178808" y="6021055"/>
-            <a:ext cx="868680" cy="270017"/>
+            <a:off x="4178808" y="5676810"/>
+            <a:ext cx="868680" cy="248502"/>
           </a:xfrm>
           <a:prstGeom prst="rect">
             <a:avLst/>
@@ -26988,8 +27106,8 @@
         </p:nvSpPr>
         <p:spPr>
           <a:xfrm>
-            <a:off x="5047488" y="6021055"/>
-            <a:ext cx="868680" cy="270017"/>
+            <a:off x="5047488" y="5676810"/>
+            <a:ext cx="868680" cy="248502"/>
           </a:xfrm>
           <a:prstGeom prst="rect">
             <a:avLst/>
@@ -27028,7 +27146,7 @@
         <p:spPr>
           <a:xfrm>
             <a:off x="6208776" y="1700784"/>
-            <a:ext cx="310896" cy="270017"/>
+            <a:ext cx="310896" cy="248502"/>
           </a:xfrm>
           <a:prstGeom prst="rect">
             <a:avLst/>
@@ -27067,7 +27185,7 @@
         <p:spPr>
           <a:xfrm>
             <a:off x="6565392" y="1700784"/>
-            <a:ext cx="1783080" cy="270017"/>
+            <a:ext cx="1783080" cy="248502"/>
           </a:xfrm>
           <a:prstGeom prst="rect">
             <a:avLst/>
@@ -27105,8 +27223,8 @@
         </p:nvSpPr>
         <p:spPr>
           <a:xfrm>
-            <a:off x="8421624" y="1761538"/>
-            <a:ext cx="116484" cy="148509"/>
+            <a:off x="8421624" y="1756697"/>
+            <a:ext cx="116484" cy="136676"/>
           </a:xfrm>
           <a:prstGeom prst="rect">
             <a:avLst/>
@@ -27126,7 +27244,7 @@
         <p:spPr>
           <a:xfrm>
             <a:off x="8942832" y="1700784"/>
-            <a:ext cx="786384" cy="270017"/>
+            <a:ext cx="786384" cy="248502"/>
           </a:xfrm>
           <a:prstGeom prst="rect">
             <a:avLst/>
@@ -27165,7 +27283,7 @@
         <p:spPr>
           <a:xfrm>
             <a:off x="9729216" y="1700784"/>
-            <a:ext cx="868680" cy="270017"/>
+            <a:ext cx="868680" cy="248502"/>
           </a:xfrm>
           <a:prstGeom prst="rect">
             <a:avLst/>
@@ -27204,7 +27322,7 @@
         <p:spPr>
           <a:xfrm>
             <a:off x="10597896" y="1700784"/>
-            <a:ext cx="868680" cy="270017"/>
+            <a:ext cx="868680" cy="248502"/>
           </a:xfrm>
           <a:prstGeom prst="rect">
             <a:avLst/>
@@ -27242,8 +27360,8 @@
         </p:nvSpPr>
         <p:spPr>
           <a:xfrm>
-            <a:off x="6208776" y="1970801"/>
-            <a:ext cx="310896" cy="270017"/>
+            <a:off x="6208776" y="1949286"/>
+            <a:ext cx="310896" cy="248502"/>
           </a:xfrm>
           <a:prstGeom prst="rect">
             <a:avLst/>
@@ -27281,8 +27399,8 @@
         </p:nvSpPr>
         <p:spPr>
           <a:xfrm>
-            <a:off x="6565392" y="1970801"/>
-            <a:ext cx="1783080" cy="270017"/>
+            <a:off x="6565392" y="1949286"/>
+            <a:ext cx="1783080" cy="248502"/>
           </a:xfrm>
           <a:prstGeom prst="rect">
             <a:avLst/>
@@ -27320,8 +27438,8 @@
         </p:nvSpPr>
         <p:spPr>
           <a:xfrm>
-            <a:off x="8421624" y="2031555"/>
-            <a:ext cx="115541" cy="148509"/>
+            <a:off x="8421624" y="2005199"/>
+            <a:ext cx="115541" cy="136676"/>
           </a:xfrm>
           <a:prstGeom prst="rect">
             <a:avLst/>
@@ -27340,8 +27458,8 @@
         </p:nvSpPr>
         <p:spPr>
           <a:xfrm>
-            <a:off x="8942832" y="1970801"/>
-            <a:ext cx="786384" cy="270017"/>
+            <a:off x="8942832" y="1949286"/>
+            <a:ext cx="786384" cy="248502"/>
           </a:xfrm>
           <a:prstGeom prst="rect">
             <a:avLst/>
@@ -27379,8 +27497,8 @@
         </p:nvSpPr>
         <p:spPr>
           <a:xfrm>
-            <a:off x="9729216" y="1970801"/>
-            <a:ext cx="868680" cy="270017"/>
+            <a:off x="9729216" y="1949286"/>
+            <a:ext cx="868680" cy="248502"/>
           </a:xfrm>
           <a:prstGeom prst="rect">
             <a:avLst/>
@@ -27418,8 +27536,8 @@
         </p:nvSpPr>
         <p:spPr>
           <a:xfrm>
-            <a:off x="10597896" y="1970801"/>
-            <a:ext cx="868680" cy="270017"/>
+            <a:off x="10597896" y="1949286"/>
+            <a:ext cx="868680" cy="248502"/>
           </a:xfrm>
           <a:prstGeom prst="rect">
             <a:avLst/>
@@ -27457,8 +27575,8 @@
         </p:nvSpPr>
         <p:spPr>
           <a:xfrm>
-            <a:off x="6208776" y="2240818"/>
-            <a:ext cx="310896" cy="270017"/>
+            <a:off x="6208776" y="2197787"/>
+            <a:ext cx="310896" cy="248502"/>
           </a:xfrm>
           <a:prstGeom prst="rect">
             <a:avLst/>
@@ -27496,8 +27614,8 @@
         </p:nvSpPr>
         <p:spPr>
           <a:xfrm>
-            <a:off x="6565392" y="2240818"/>
-            <a:ext cx="1783080" cy="270017"/>
+            <a:off x="6565392" y="2197787"/>
+            <a:ext cx="1783080" cy="248502"/>
           </a:xfrm>
           <a:prstGeom prst="rect">
             <a:avLst/>
@@ -27535,8 +27653,8 @@
         </p:nvSpPr>
         <p:spPr>
           <a:xfrm>
-            <a:off x="8421624" y="2301572"/>
-            <a:ext cx="111161" cy="148509"/>
+            <a:off x="8421624" y="2253700"/>
+            <a:ext cx="111161" cy="136676"/>
           </a:xfrm>
           <a:prstGeom prst="rect">
             <a:avLst/>
@@ -27555,8 +27673,8 @@
         </p:nvSpPr>
         <p:spPr>
           <a:xfrm>
-            <a:off x="8942832" y="2240818"/>
-            <a:ext cx="786384" cy="270017"/>
+            <a:off x="8942832" y="2197787"/>
+            <a:ext cx="786384" cy="248502"/>
           </a:xfrm>
           <a:prstGeom prst="rect">
             <a:avLst/>
@@ -27594,8 +27712,8 @@
         </p:nvSpPr>
         <p:spPr>
           <a:xfrm>
-            <a:off x="9729216" y="2240818"/>
-            <a:ext cx="868680" cy="270017"/>
+            <a:off x="9729216" y="2197787"/>
+            <a:ext cx="868680" cy="248502"/>
           </a:xfrm>
           <a:prstGeom prst="rect">
             <a:avLst/>
@@ -27633,8 +27751,8 @@
         </p:nvSpPr>
         <p:spPr>
           <a:xfrm>
-            <a:off x="10597896" y="2240818"/>
-            <a:ext cx="868680" cy="270017"/>
+            <a:off x="10597896" y="2197787"/>
+            <a:ext cx="868680" cy="248502"/>
           </a:xfrm>
           <a:prstGeom prst="rect">
             <a:avLst/>
@@ -27672,8 +27790,8 @@
         </p:nvSpPr>
         <p:spPr>
           <a:xfrm>
-            <a:off x="6208776" y="2510835"/>
-            <a:ext cx="310896" cy="270017"/>
+            <a:off x="6208776" y="2446289"/>
+            <a:ext cx="310896" cy="248502"/>
           </a:xfrm>
           <a:prstGeom prst="rect">
             <a:avLst/>
@@ -27711,8 +27829,8 @@
         </p:nvSpPr>
         <p:spPr>
           <a:xfrm>
-            <a:off x="6565392" y="2510835"/>
-            <a:ext cx="1783080" cy="270017"/>
+            <a:off x="6565392" y="2446289"/>
+            <a:ext cx="1783080" cy="248502"/>
           </a:xfrm>
           <a:prstGeom prst="rect">
             <a:avLst/>
@@ -27750,8 +27868,8 @@
         </p:nvSpPr>
         <p:spPr>
           <a:xfrm>
-            <a:off x="8421624" y="2571589"/>
-            <a:ext cx="84754" cy="148509"/>
+            <a:off x="8421624" y="2502202"/>
+            <a:ext cx="84754" cy="136676"/>
           </a:xfrm>
           <a:prstGeom prst="rect">
             <a:avLst/>
@@ -27770,8 +27888,8 @@
         </p:nvSpPr>
         <p:spPr>
           <a:xfrm>
-            <a:off x="8942832" y="2510835"/>
-            <a:ext cx="786384" cy="270017"/>
+            <a:off x="8942832" y="2446289"/>
+            <a:ext cx="786384" cy="248502"/>
           </a:xfrm>
           <a:prstGeom prst="rect">
             <a:avLst/>
@@ -27809,8 +27927,8 @@
         </p:nvSpPr>
         <p:spPr>
           <a:xfrm>
-            <a:off x="9729216" y="2510835"/>
-            <a:ext cx="868680" cy="270017"/>
+            <a:off x="9729216" y="2446289"/>
+            <a:ext cx="868680" cy="248502"/>
           </a:xfrm>
           <a:prstGeom prst="rect">
             <a:avLst/>
@@ -27848,8 +27966,8 @@
         </p:nvSpPr>
         <p:spPr>
           <a:xfrm>
-            <a:off x="10597896" y="2510835"/>
-            <a:ext cx="868680" cy="270017"/>
+            <a:off x="10597896" y="2446289"/>
+            <a:ext cx="868680" cy="248502"/>
           </a:xfrm>
           <a:prstGeom prst="rect">
             <a:avLst/>
@@ -27887,8 +28005,8 @@
         </p:nvSpPr>
         <p:spPr>
           <a:xfrm>
-            <a:off x="6208776" y="2780852"/>
-            <a:ext cx="310896" cy="270017"/>
+            <a:off x="6208776" y="2694791"/>
+            <a:ext cx="310896" cy="248502"/>
           </a:xfrm>
           <a:prstGeom prst="rect">
             <a:avLst/>
@@ -27926,8 +28044,8 @@
         </p:nvSpPr>
         <p:spPr>
           <a:xfrm>
-            <a:off x="6565392" y="2780852"/>
-            <a:ext cx="1783080" cy="270017"/>
+            <a:off x="6565392" y="2694791"/>
+            <a:ext cx="1783080" cy="248502"/>
           </a:xfrm>
           <a:prstGeom prst="rect">
             <a:avLst/>
@@ -27965,8 +28083,8 @@
         </p:nvSpPr>
         <p:spPr>
           <a:xfrm>
-            <a:off x="8421624" y="2841606"/>
-            <a:ext cx="75701" cy="148509"/>
+            <a:off x="8421624" y="2750703"/>
+            <a:ext cx="75701" cy="136676"/>
           </a:xfrm>
           <a:prstGeom prst="rect">
             <a:avLst/>
@@ -27985,8 +28103,8 @@
         </p:nvSpPr>
         <p:spPr>
           <a:xfrm>
-            <a:off x="8942832" y="2780852"/>
-            <a:ext cx="786384" cy="270017"/>
+            <a:off x="8942832" y="2694791"/>
+            <a:ext cx="786384" cy="248502"/>
           </a:xfrm>
           <a:prstGeom prst="rect">
             <a:avLst/>
@@ -28024,8 +28142,8 @@
         </p:nvSpPr>
         <p:spPr>
           <a:xfrm>
-            <a:off x="9729216" y="2780852"/>
-            <a:ext cx="868680" cy="270017"/>
+            <a:off x="9729216" y="2694791"/>
+            <a:ext cx="868680" cy="248502"/>
           </a:xfrm>
           <a:prstGeom prst="rect">
             <a:avLst/>
@@ -28063,8 +28181,8 @@
         </p:nvSpPr>
         <p:spPr>
           <a:xfrm>
-            <a:off x="10597896" y="2780852"/>
-            <a:ext cx="868680" cy="270017"/>
+            <a:off x="10597896" y="2694791"/>
+            <a:ext cx="868680" cy="248502"/>
           </a:xfrm>
           <a:prstGeom prst="rect">
             <a:avLst/>
@@ -28102,8 +28220,8 @@
         </p:nvSpPr>
         <p:spPr>
           <a:xfrm>
-            <a:off x="6208776" y="3050869"/>
-            <a:ext cx="310896" cy="270017"/>
+            <a:off x="6208776" y="2943292"/>
+            <a:ext cx="310896" cy="248502"/>
           </a:xfrm>
           <a:prstGeom prst="rect">
             <a:avLst/>
@@ -28141,8 +28259,8 @@
         </p:nvSpPr>
         <p:spPr>
           <a:xfrm>
-            <a:off x="6565392" y="3050869"/>
-            <a:ext cx="1783080" cy="270017"/>
+            <a:off x="6565392" y="2943292"/>
+            <a:ext cx="1783080" cy="248502"/>
           </a:xfrm>
           <a:prstGeom prst="rect">
             <a:avLst/>
@@ -28180,8 +28298,8 @@
         </p:nvSpPr>
         <p:spPr>
           <a:xfrm>
-            <a:off x="8421624" y="3111623"/>
-            <a:ext cx="69750" cy="148509"/>
+            <a:off x="8421624" y="2999205"/>
+            <a:ext cx="69750" cy="136676"/>
           </a:xfrm>
           <a:prstGeom prst="rect">
             <a:avLst/>
@@ -28200,8 +28318,8 @@
         </p:nvSpPr>
         <p:spPr>
           <a:xfrm>
-            <a:off x="8942832" y="3050869"/>
-            <a:ext cx="786384" cy="270017"/>
+            <a:off x="8942832" y="2943292"/>
+            <a:ext cx="786384" cy="248502"/>
           </a:xfrm>
           <a:prstGeom prst="rect">
             <a:avLst/>
@@ -28239,8 +28357,8 @@
         </p:nvSpPr>
         <p:spPr>
           <a:xfrm>
-            <a:off x="9729216" y="3050869"/>
-            <a:ext cx="868680" cy="270017"/>
+            <a:off x="9729216" y="2943292"/>
+            <a:ext cx="868680" cy="248502"/>
           </a:xfrm>
           <a:prstGeom prst="rect">
             <a:avLst/>
@@ -28278,8 +28396,8 @@
         </p:nvSpPr>
         <p:spPr>
           <a:xfrm>
-            <a:off x="10597896" y="3050869"/>
-            <a:ext cx="868680" cy="270017"/>
+            <a:off x="10597896" y="2943292"/>
+            <a:ext cx="868680" cy="248502"/>
           </a:xfrm>
           <a:prstGeom prst="rect">
             <a:avLst/>
@@ -28317,8 +28435,8 @@
         </p:nvSpPr>
         <p:spPr>
           <a:xfrm>
-            <a:off x="6208776" y="3320886"/>
-            <a:ext cx="310896" cy="270017"/>
+            <a:off x="6208776" y="3191794"/>
+            <a:ext cx="310896" cy="248502"/>
           </a:xfrm>
           <a:prstGeom prst="rect">
             <a:avLst/>
@@ -28356,8 +28474,8 @@
         </p:nvSpPr>
         <p:spPr>
           <a:xfrm>
-            <a:off x="6565392" y="3320886"/>
-            <a:ext cx="1783080" cy="270017"/>
+            <a:off x="6565392" y="3191794"/>
+            <a:ext cx="1783080" cy="248502"/>
           </a:xfrm>
           <a:prstGeom prst="rect">
             <a:avLst/>
@@ -28395,8 +28513,8 @@
         </p:nvSpPr>
         <p:spPr>
           <a:xfrm>
-            <a:off x="8421624" y="3381639"/>
-            <a:ext cx="61333" cy="148509"/>
+            <a:off x="8421624" y="3247707"/>
+            <a:ext cx="61333" cy="136676"/>
           </a:xfrm>
           <a:prstGeom prst="rect">
             <a:avLst/>
@@ -28415,8 +28533,8 @@
         </p:nvSpPr>
         <p:spPr>
           <a:xfrm>
-            <a:off x="8942832" y="3320886"/>
-            <a:ext cx="786384" cy="270017"/>
+            <a:off x="8942832" y="3191794"/>
+            <a:ext cx="786384" cy="248502"/>
           </a:xfrm>
           <a:prstGeom prst="rect">
             <a:avLst/>
@@ -28454,8 +28572,8 @@
         </p:nvSpPr>
         <p:spPr>
           <a:xfrm>
-            <a:off x="9729216" y="3320886"/>
-            <a:ext cx="868680" cy="270017"/>
+            <a:off x="9729216" y="3191794"/>
+            <a:ext cx="868680" cy="248502"/>
           </a:xfrm>
           <a:prstGeom prst="rect">
             <a:avLst/>
@@ -28493,8 +28611,8 @@
         </p:nvSpPr>
         <p:spPr>
           <a:xfrm>
-            <a:off x="10597896" y="3320886"/>
-            <a:ext cx="868680" cy="270017"/>
+            <a:off x="10597896" y="3191794"/>
+            <a:ext cx="868680" cy="248502"/>
           </a:xfrm>
           <a:prstGeom prst="rect">
             <a:avLst/>
@@ -28532,8 +28650,8 @@
         </p:nvSpPr>
         <p:spPr>
           <a:xfrm>
-            <a:off x="6208776" y="3590903"/>
-            <a:ext cx="310896" cy="270017"/>
+            <a:off x="6208776" y="3440296"/>
+            <a:ext cx="310896" cy="248502"/>
           </a:xfrm>
           <a:prstGeom prst="rect">
             <a:avLst/>
@@ -28571,8 +28689,8 @@
         </p:nvSpPr>
         <p:spPr>
           <a:xfrm>
-            <a:off x="6565392" y="3590903"/>
-            <a:ext cx="1783080" cy="270017"/>
+            <a:off x="6565392" y="3440296"/>
+            <a:ext cx="1783080" cy="248502"/>
           </a:xfrm>
           <a:prstGeom prst="rect">
             <a:avLst/>
@@ -28610,8 +28728,8 @@
         </p:nvSpPr>
         <p:spPr>
           <a:xfrm>
-            <a:off x="8421624" y="3651656"/>
-            <a:ext cx="59486" cy="148509"/>
+            <a:off x="8421624" y="3496208"/>
+            <a:ext cx="59486" cy="136676"/>
           </a:xfrm>
           <a:prstGeom prst="rect">
             <a:avLst/>
@@ -28630,8 +28748,8 @@
         </p:nvSpPr>
         <p:spPr>
           <a:xfrm>
-            <a:off x="8942832" y="3590903"/>
-            <a:ext cx="786384" cy="270017"/>
+            <a:off x="8942832" y="3440296"/>
+            <a:ext cx="786384" cy="248502"/>
           </a:xfrm>
           <a:prstGeom prst="rect">
             <a:avLst/>
@@ -28669,8 +28787,8 @@
         </p:nvSpPr>
         <p:spPr>
           <a:xfrm>
-            <a:off x="9729216" y="3590903"/>
-            <a:ext cx="868680" cy="270017"/>
+            <a:off x="9729216" y="3440296"/>
+            <a:ext cx="868680" cy="248502"/>
           </a:xfrm>
           <a:prstGeom prst="rect">
             <a:avLst/>
@@ -28708,8 +28826,8 @@
         </p:nvSpPr>
         <p:spPr>
           <a:xfrm>
-            <a:off x="10597896" y="3590903"/>
-            <a:ext cx="868680" cy="270017"/>
+            <a:off x="10597896" y="3440296"/>
+            <a:ext cx="868680" cy="248502"/>
           </a:xfrm>
           <a:prstGeom prst="rect">
             <a:avLst/>
@@ -28747,8 +28865,8 @@
         </p:nvSpPr>
         <p:spPr>
           <a:xfrm>
-            <a:off x="6208776" y="3860920"/>
-            <a:ext cx="310896" cy="270017"/>
+            <a:off x="6208776" y="3688797"/>
+            <a:ext cx="310896" cy="248502"/>
           </a:xfrm>
           <a:prstGeom prst="rect">
             <a:avLst/>
@@ -28786,8 +28904,8 @@
         </p:nvSpPr>
         <p:spPr>
           <a:xfrm>
-            <a:off x="6565392" y="3860920"/>
-            <a:ext cx="1783080" cy="270017"/>
+            <a:off x="6565392" y="3688797"/>
+            <a:ext cx="1783080" cy="248502"/>
           </a:xfrm>
           <a:prstGeom prst="rect">
             <a:avLst/>
@@ -28825,8 +28943,8 @@
         </p:nvSpPr>
         <p:spPr>
           <a:xfrm>
-            <a:off x="8421624" y="3921673"/>
-            <a:ext cx="58291" cy="148509"/>
+            <a:off x="8421624" y="3744710"/>
+            <a:ext cx="58291" cy="136676"/>
           </a:xfrm>
           <a:prstGeom prst="rect">
             <a:avLst/>
@@ -28845,8 +28963,8 @@
         </p:nvSpPr>
         <p:spPr>
           <a:xfrm>
-            <a:off x="8942832" y="3860920"/>
-            <a:ext cx="786384" cy="270017"/>
+            <a:off x="8942832" y="3688797"/>
+            <a:ext cx="786384" cy="248502"/>
           </a:xfrm>
           <a:prstGeom prst="rect">
             <a:avLst/>
@@ -28884,8 +29002,8 @@
         </p:nvSpPr>
         <p:spPr>
           <a:xfrm>
-            <a:off x="9729216" y="3860920"/>
-            <a:ext cx="868680" cy="270017"/>
+            <a:off x="9729216" y="3688797"/>
+            <a:ext cx="868680" cy="248502"/>
           </a:xfrm>
           <a:prstGeom prst="rect">
             <a:avLst/>
@@ -28923,8 +29041,8 @@
         </p:nvSpPr>
         <p:spPr>
           <a:xfrm>
-            <a:off x="10597896" y="3860920"/>
-            <a:ext cx="868680" cy="270017"/>
+            <a:off x="10597896" y="3688797"/>
+            <a:ext cx="868680" cy="248502"/>
           </a:xfrm>
           <a:prstGeom prst="rect">
             <a:avLst/>
@@ -28962,8 +29080,8 @@
         </p:nvSpPr>
         <p:spPr>
           <a:xfrm>
-            <a:off x="6208776" y="4130936"/>
-            <a:ext cx="310896" cy="270017"/>
+            <a:off x="6208776" y="3937299"/>
+            <a:ext cx="310896" cy="248502"/>
           </a:xfrm>
           <a:prstGeom prst="rect">
             <a:avLst/>
@@ -29001,8 +29119,8 @@
         </p:nvSpPr>
         <p:spPr>
           <a:xfrm>
-            <a:off x="6565392" y="4130936"/>
-            <a:ext cx="1783080" cy="270017"/>
+            <a:off x="6565392" y="3937299"/>
+            <a:ext cx="1783080" cy="248502"/>
           </a:xfrm>
           <a:prstGeom prst="rect">
             <a:avLst/>
@@ -29040,8 +29158,8 @@
         </p:nvSpPr>
         <p:spPr>
           <a:xfrm>
-            <a:off x="8421624" y="4191690"/>
-            <a:ext cx="42032" cy="148509"/>
+            <a:off x="8421624" y="3993212"/>
+            <a:ext cx="42032" cy="136676"/>
           </a:xfrm>
           <a:prstGeom prst="rect">
             <a:avLst/>
@@ -29060,8 +29178,8 @@
         </p:nvSpPr>
         <p:spPr>
           <a:xfrm>
-            <a:off x="8942832" y="4130936"/>
-            <a:ext cx="786384" cy="270017"/>
+            <a:off x="8942832" y="3937299"/>
+            <a:ext cx="786384" cy="248502"/>
           </a:xfrm>
           <a:prstGeom prst="rect">
             <a:avLst/>
@@ -29099,8 +29217,8 @@
         </p:nvSpPr>
         <p:spPr>
           <a:xfrm>
-            <a:off x="9729216" y="4130936"/>
-            <a:ext cx="868680" cy="270017"/>
+            <a:off x="9729216" y="3937299"/>
+            <a:ext cx="868680" cy="248502"/>
           </a:xfrm>
           <a:prstGeom prst="rect">
             <a:avLst/>
@@ -29138,8 +29256,8 @@
         </p:nvSpPr>
         <p:spPr>
           <a:xfrm>
-            <a:off x="10597896" y="4130936"/>
-            <a:ext cx="868680" cy="270017"/>
+            <a:off x="10597896" y="3937299"/>
+            <a:ext cx="868680" cy="248502"/>
           </a:xfrm>
           <a:prstGeom prst="rect">
             <a:avLst/>
@@ -29177,8 +29295,8 @@
         </p:nvSpPr>
         <p:spPr>
           <a:xfrm>
-            <a:off x="6208776" y="4400953"/>
-            <a:ext cx="310896" cy="270017"/>
+            <a:off x="6208776" y="4185800"/>
+            <a:ext cx="310896" cy="248502"/>
           </a:xfrm>
           <a:prstGeom prst="rect">
             <a:avLst/>
@@ -29216,8 +29334,8 @@
         </p:nvSpPr>
         <p:spPr>
           <a:xfrm>
-            <a:off x="6565392" y="4400953"/>
-            <a:ext cx="1783080" cy="270017"/>
+            <a:off x="6565392" y="4185800"/>
+            <a:ext cx="1783080" cy="248502"/>
           </a:xfrm>
           <a:prstGeom prst="rect">
             <a:avLst/>
@@ -29255,8 +29373,8 @@
         </p:nvSpPr>
         <p:spPr>
           <a:xfrm>
-            <a:off x="8421624" y="4461707"/>
-            <a:ext cx="38916" cy="148509"/>
+            <a:off x="8421624" y="4241713"/>
+            <a:ext cx="38916" cy="136676"/>
           </a:xfrm>
           <a:prstGeom prst="rect">
             <a:avLst/>
@@ -29275,8 +29393,8 @@
         </p:nvSpPr>
         <p:spPr>
           <a:xfrm>
-            <a:off x="8942832" y="4400953"/>
-            <a:ext cx="786384" cy="270017"/>
+            <a:off x="8942832" y="4185800"/>
+            <a:ext cx="786384" cy="248502"/>
           </a:xfrm>
           <a:prstGeom prst="rect">
             <a:avLst/>
@@ -29314,8 +29432,8 @@
         </p:nvSpPr>
         <p:spPr>
           <a:xfrm>
-            <a:off x="9729216" y="4400953"/>
-            <a:ext cx="868680" cy="270017"/>
+            <a:off x="9729216" y="4185800"/>
+            <a:ext cx="868680" cy="248502"/>
           </a:xfrm>
           <a:prstGeom prst="rect">
             <a:avLst/>
@@ -29353,8 +29471,8 @@
         </p:nvSpPr>
         <p:spPr>
           <a:xfrm>
-            <a:off x="10597896" y="4400953"/>
-            <a:ext cx="868680" cy="270017"/>
+            <a:off x="10597896" y="4185800"/>
+            <a:ext cx="868680" cy="248502"/>
           </a:xfrm>
           <a:prstGeom prst="rect">
             <a:avLst/>
@@ -29392,8 +29510,8 @@
         </p:nvSpPr>
         <p:spPr>
           <a:xfrm>
-            <a:off x="6208776" y="4670970"/>
-            <a:ext cx="310896" cy="270017"/>
+            <a:off x="6208776" y="4434302"/>
+            <a:ext cx="310896" cy="248502"/>
           </a:xfrm>
           <a:prstGeom prst="rect">
             <a:avLst/>
@@ -29431,8 +29549,8 @@
         </p:nvSpPr>
         <p:spPr>
           <a:xfrm>
-            <a:off x="6565392" y="4670970"/>
-            <a:ext cx="1783080" cy="270017"/>
+            <a:off x="6565392" y="4434302"/>
+            <a:ext cx="1783080" cy="248502"/>
           </a:xfrm>
           <a:prstGeom prst="rect">
             <a:avLst/>
@@ -29470,8 +29588,8 @@
         </p:nvSpPr>
         <p:spPr>
           <a:xfrm>
-            <a:off x="8421624" y="4731724"/>
-            <a:ext cx="28242" cy="148509"/>
+            <a:off x="8421624" y="4490215"/>
+            <a:ext cx="28242" cy="136676"/>
           </a:xfrm>
           <a:prstGeom prst="rect">
             <a:avLst/>
@@ -29490,8 +29608,8 @@
         </p:nvSpPr>
         <p:spPr>
           <a:xfrm>
-            <a:off x="8942832" y="4670970"/>
-            <a:ext cx="786384" cy="270017"/>
+            <a:off x="8942832" y="4434302"/>
+            <a:ext cx="786384" cy="248502"/>
           </a:xfrm>
           <a:prstGeom prst="rect">
             <a:avLst/>
@@ -29529,8 +29647,8 @@
         </p:nvSpPr>
         <p:spPr>
           <a:xfrm>
-            <a:off x="9729216" y="4670970"/>
-            <a:ext cx="868680" cy="270017"/>
+            <a:off x="9729216" y="4434302"/>
+            <a:ext cx="868680" cy="248502"/>
           </a:xfrm>
           <a:prstGeom prst="rect">
             <a:avLst/>
@@ -29568,8 +29686,8 @@
         </p:nvSpPr>
         <p:spPr>
           <a:xfrm>
-            <a:off x="10597896" y="4670970"/>
-            <a:ext cx="868680" cy="270017"/>
+            <a:off x="10597896" y="4434302"/>
+            <a:ext cx="868680" cy="248502"/>
           </a:xfrm>
           <a:prstGeom prst="rect">
             <a:avLst/>
@@ -29607,8 +29725,8 @@
         </p:nvSpPr>
         <p:spPr>
           <a:xfrm>
-            <a:off x="6208776" y="4940987"/>
-            <a:ext cx="310896" cy="270017"/>
+            <a:off x="6208776" y="4682804"/>
+            <a:ext cx="310896" cy="248502"/>
           </a:xfrm>
           <a:prstGeom prst="rect">
             <a:avLst/>
@@ -29646,8 +29764,8 @@
         </p:nvSpPr>
         <p:spPr>
           <a:xfrm>
-            <a:off x="6565392" y="4940987"/>
-            <a:ext cx="1783080" cy="270017"/>
+            <a:off x="6565392" y="4682804"/>
+            <a:ext cx="1783080" cy="248502"/>
           </a:xfrm>
           <a:prstGeom prst="rect">
             <a:avLst/>
@@ -29685,8 +29803,8 @@
         </p:nvSpPr>
         <p:spPr>
           <a:xfrm>
-            <a:off x="8421624" y="5001741"/>
-            <a:ext cx="27287" cy="148509"/>
+            <a:off x="8421624" y="4738717"/>
+            <a:ext cx="27287" cy="136676"/>
           </a:xfrm>
           <a:prstGeom prst="rect">
             <a:avLst/>
@@ -29705,8 +29823,8 @@
         </p:nvSpPr>
         <p:spPr>
           <a:xfrm>
-            <a:off x="8942832" y="4940987"/>
-            <a:ext cx="786384" cy="270017"/>
+            <a:off x="8942832" y="4682804"/>
+            <a:ext cx="786384" cy="248502"/>
           </a:xfrm>
           <a:prstGeom prst="rect">
             <a:avLst/>
@@ -29744,8 +29862,8 @@
         </p:nvSpPr>
         <p:spPr>
           <a:xfrm>
-            <a:off x="9729216" y="4940987"/>
-            <a:ext cx="868680" cy="270017"/>
+            <a:off x="9729216" y="4682804"/>
+            <a:ext cx="868680" cy="248502"/>
           </a:xfrm>
           <a:prstGeom prst="rect">
             <a:avLst/>
@@ -29783,8 +29901,8 @@
         </p:nvSpPr>
         <p:spPr>
           <a:xfrm>
-            <a:off x="10597896" y="4940987"/>
-            <a:ext cx="868680" cy="270017"/>
+            <a:off x="10597896" y="4682804"/>
+            <a:ext cx="868680" cy="248502"/>
           </a:xfrm>
           <a:prstGeom prst="rect">
             <a:avLst/>
@@ -29822,8 +29940,8 @@
         </p:nvSpPr>
         <p:spPr>
           <a:xfrm>
-            <a:off x="6208776" y="5211004"/>
-            <a:ext cx="310896" cy="270017"/>
+            <a:off x="6208776" y="4931305"/>
+            <a:ext cx="310896" cy="248502"/>
           </a:xfrm>
           <a:prstGeom prst="rect">
             <a:avLst/>
@@ -29861,8 +29979,8 @@
         </p:nvSpPr>
         <p:spPr>
           <a:xfrm>
-            <a:off x="6565392" y="5211004"/>
-            <a:ext cx="1783080" cy="270017"/>
+            <a:off x="6565392" y="4931305"/>
+            <a:ext cx="1783080" cy="248502"/>
           </a:xfrm>
           <a:prstGeom prst="rect">
             <a:avLst/>
@@ -29900,8 +30018,8 @@
         </p:nvSpPr>
         <p:spPr>
           <a:xfrm>
-            <a:off x="8421624" y="5271758"/>
-            <a:ext cx="19910" cy="148509"/>
+            <a:off x="8421624" y="4987218"/>
+            <a:ext cx="19910" cy="136676"/>
           </a:xfrm>
           <a:prstGeom prst="rect">
             <a:avLst/>
@@ -29920,8 +30038,8 @@
         </p:nvSpPr>
         <p:spPr>
           <a:xfrm>
-            <a:off x="8942832" y="5211004"/>
-            <a:ext cx="786384" cy="270017"/>
+            <a:off x="8942832" y="4931305"/>
+            <a:ext cx="786384" cy="248502"/>
           </a:xfrm>
           <a:prstGeom prst="rect">
             <a:avLst/>
@@ -29959,8 +30077,8 @@
         </p:nvSpPr>
         <p:spPr>
           <a:xfrm>
-            <a:off x="9729216" y="5211004"/>
-            <a:ext cx="868680" cy="270017"/>
+            <a:off x="9729216" y="4931305"/>
+            <a:ext cx="868680" cy="248502"/>
           </a:xfrm>
           <a:prstGeom prst="rect">
             <a:avLst/>
@@ -29998,8 +30116,8 @@
         </p:nvSpPr>
         <p:spPr>
           <a:xfrm>
-            <a:off x="10597896" y="5211004"/>
-            <a:ext cx="868680" cy="270017"/>
+            <a:off x="10597896" y="4931305"/>
+            <a:ext cx="868680" cy="248502"/>
           </a:xfrm>
           <a:prstGeom prst="rect">
             <a:avLst/>
@@ -30037,8 +30155,8 @@
         </p:nvSpPr>
         <p:spPr>
           <a:xfrm>
-            <a:off x="6208776" y="5481021"/>
-            <a:ext cx="310896" cy="270017"/>
+            <a:off x="6208776" y="5179807"/>
+            <a:ext cx="310896" cy="248502"/>
           </a:xfrm>
           <a:prstGeom prst="rect">
             <a:avLst/>
@@ -30076,8 +30194,8 @@
         </p:nvSpPr>
         <p:spPr>
           <a:xfrm>
-            <a:off x="6565392" y="5481021"/>
-            <a:ext cx="1783080" cy="270017"/>
+            <a:off x="6565392" y="5179807"/>
+            <a:ext cx="1783080" cy="248502"/>
           </a:xfrm>
           <a:prstGeom prst="rect">
             <a:avLst/>
@@ -30115,8 +30233,8 @@
         </p:nvSpPr>
         <p:spPr>
           <a:xfrm>
-            <a:off x="8421624" y="5541775"/>
-            <a:ext cx="18288" cy="148509"/>
+            <a:off x="8421624" y="5235720"/>
+            <a:ext cx="18288" cy="136676"/>
           </a:xfrm>
           <a:prstGeom prst="rect">
             <a:avLst/>
@@ -30135,8 +30253,8 @@
         </p:nvSpPr>
         <p:spPr>
           <a:xfrm>
-            <a:off x="8942832" y="5481021"/>
-            <a:ext cx="786384" cy="270017"/>
+            <a:off x="8942832" y="5179807"/>
+            <a:ext cx="786384" cy="248502"/>
           </a:xfrm>
           <a:prstGeom prst="rect">
             <a:avLst/>
@@ -30174,8 +30292,8 @@
         </p:nvSpPr>
         <p:spPr>
           <a:xfrm>
-            <a:off x="9729216" y="5481021"/>
-            <a:ext cx="868680" cy="270017"/>
+            <a:off x="9729216" y="5179807"/>
+            <a:ext cx="868680" cy="248502"/>
           </a:xfrm>
           <a:prstGeom prst="rect">
             <a:avLst/>
@@ -30213,8 +30331,8 @@
         </p:nvSpPr>
         <p:spPr>
           <a:xfrm>
-            <a:off x="10597896" y="5481021"/>
-            <a:ext cx="868680" cy="270017"/>
+            <a:off x="10597896" y="5179807"/>
+            <a:ext cx="868680" cy="248502"/>
           </a:xfrm>
           <a:prstGeom prst="rect">
             <a:avLst/>
@@ -30252,8 +30370,8 @@
         </p:nvSpPr>
         <p:spPr>
           <a:xfrm>
-            <a:off x="6208776" y="5751038"/>
-            <a:ext cx="310896" cy="270017"/>
+            <a:off x="6208776" y="5428309"/>
+            <a:ext cx="310896" cy="248502"/>
           </a:xfrm>
           <a:prstGeom prst="rect">
             <a:avLst/>
@@ -30291,8 +30409,8 @@
         </p:nvSpPr>
         <p:spPr>
           <a:xfrm>
-            <a:off x="6565392" y="5751038"/>
-            <a:ext cx="1783080" cy="270017"/>
+            <a:off x="6565392" y="5428309"/>
+            <a:ext cx="1783080" cy="248502"/>
           </a:xfrm>
           <a:prstGeom prst="rect">
             <a:avLst/>
@@ -30330,8 +30448,8 @@
         </p:nvSpPr>
         <p:spPr>
           <a:xfrm>
-            <a:off x="8421624" y="5811792"/>
-            <a:ext cx="18288" cy="148509"/>
+            <a:off x="8421624" y="5484222"/>
+            <a:ext cx="18288" cy="136676"/>
           </a:xfrm>
           <a:prstGeom prst="rect">
             <a:avLst/>
@@ -30350,8 +30468,8 @@
         </p:nvSpPr>
         <p:spPr>
           <a:xfrm>
-            <a:off x="8942832" y="5751038"/>
-            <a:ext cx="786384" cy="270017"/>
+            <a:off x="8942832" y="5428309"/>
+            <a:ext cx="786384" cy="248502"/>
           </a:xfrm>
           <a:prstGeom prst="rect">
             <a:avLst/>
@@ -30389,8 +30507,8 @@
         </p:nvSpPr>
         <p:spPr>
           <a:xfrm>
-            <a:off x="9729216" y="5751038"/>
-            <a:ext cx="868680" cy="270017"/>
+            <a:off x="9729216" y="5428309"/>
+            <a:ext cx="868680" cy="248502"/>
           </a:xfrm>
           <a:prstGeom prst="rect">
             <a:avLst/>
@@ -30428,8 +30546,8 @@
         </p:nvSpPr>
         <p:spPr>
           <a:xfrm>
-            <a:off x="10597896" y="5751038"/>
-            <a:ext cx="868680" cy="270017"/>
+            <a:off x="10597896" y="5428309"/>
+            <a:ext cx="868680" cy="248502"/>
           </a:xfrm>
           <a:prstGeom prst="rect">
             <a:avLst/>
@@ -30468,7 +30586,7 @@
         <p:spPr>
           <a:xfrm>
             <a:off x="6085332" y="1700784"/>
-            <a:ext cx="10973" cy="4590288"/>
+            <a:ext cx="10973" cy="4224528"/>
           </a:xfrm>
           <a:prstGeom prst="rect">
             <a:avLst/>
@@ -30478,6 +30596,65 @@
           </a:solidFill>
           <a:ln/>
         </p:spPr>
+      </p:sp>
+      <p:sp>
+        <p:nvSpPr>
+          <p:cNvPr id="212" name="Shape 209"/>
+          <p:cNvSpPr/>
+          <p:nvPr/>
+        </p:nvSpPr>
+        <p:spPr>
+          <a:xfrm>
+            <a:off x="457200" y="6126480"/>
+            <a:ext cx="11274552" cy="371856"/>
+          </a:xfrm>
+          <a:prstGeom prst="rect">
+            <a:avLst/>
+          </a:prstGeom>
+          <a:solidFill>
+            <a:srgbClr val="FBEBEA"/>
+          </a:solidFill>
+          <a:ln/>
+        </p:spPr>
+      </p:sp>
+      <p:sp>
+        <p:nvSpPr>
+          <p:cNvPr id="213" name="Text 210"/>
+          <p:cNvSpPr txBox="1"/>
+          <p:nvPr/>
+        </p:nvSpPr>
+        <p:spPr>
+          <a:xfrm>
+            <a:off x="658368" y="6144768"/>
+            <a:ext cx="10927080" cy="335280"/>
+          </a:xfrm>
+          <a:prstGeom prst="rect">
+            <a:avLst/>
+          </a:prstGeom>
+          <a:noFill/>
+          <a:ln/>
+        </p:spPr>
+        <p:txBody>
+          <a:bodyPr wrap="square" lIns="0" tIns="0" rIns="0" bIns="0" rtlCol="0" anchor="ctr"/>
+          <a:lstStyle/>
+          <a:p>
+            <a:pPr indent="0" marL="0">
+              <a:buNone/>
+            </a:pPr>
+            <a:r>
+              <a:rPr lang="en-US" sz="1600" b="1" dirty="0">
+                <a:solidFill>
+                  <a:srgbClr val="A82B26"/>
+                </a:solidFill>
+                <a:latin typeface="Inter" pitchFamily="34" charset="0"/>
+                <a:ea typeface="Inter" pitchFamily="34" charset="-122"/>
+                <a:cs typeface="Inter" pitchFamily="34" charset="-120"/>
+              </a:rPr>
+              <a:t>Group-wide the gap is 8.1% of RO gross. 5 stores are missing a fifth or more.</a:t>
+            </a:r>
+            <a:endParaRPr lang="en-US" sz="1600" dirty="0"/>
+          </a:p>
+        </p:txBody>
       </p:sp>
     </p:spTree>
   </p:cSld>
@@ -36001,7 +36178,7 @@
         <p:spPr>
           <a:xfrm>
             <a:off x="457200" y="1207008"/>
-            <a:ext cx="11274552" cy="5148072"/>
+            <a:ext cx="11274552" cy="4782312"/>
           </a:xfrm>
           <a:prstGeom prst="rect">
             <a:avLst/>
@@ -36177,7 +36354,7 @@
         <p:spPr>
           <a:xfrm>
             <a:off x="658368" y="1755648"/>
-            <a:ext cx="1920240" cy="453542"/>
+            <a:ext cx="1920240" cy="416966"/>
           </a:xfrm>
           <a:prstGeom prst="rect">
             <a:avLst/>
@@ -36215,8 +36392,8 @@
         </p:nvSpPr>
         <p:spPr>
           <a:xfrm>
-            <a:off x="2651760" y="1869034"/>
-            <a:ext cx="648144" cy="226771"/>
+            <a:off x="2651760" y="1859890"/>
+            <a:ext cx="648144" cy="208483"/>
           </a:xfrm>
           <a:prstGeom prst="rect">
             <a:avLst/>
@@ -36236,7 +36413,7 @@
         <p:spPr>
           <a:xfrm>
             <a:off x="3438144" y="1755648"/>
-            <a:ext cx="749808" cy="453542"/>
+            <a:ext cx="749808" cy="416966"/>
           </a:xfrm>
           <a:prstGeom prst="rect">
             <a:avLst/>
@@ -36275,7 +36452,7 @@
         <p:spPr>
           <a:xfrm>
             <a:off x="4187952" y="1755648"/>
-            <a:ext cx="841248" cy="453542"/>
+            <a:ext cx="841248" cy="416966"/>
           </a:xfrm>
           <a:prstGeom prst="rect">
             <a:avLst/>
@@ -36314,7 +36491,7 @@
         <p:spPr>
           <a:xfrm>
             <a:off x="5029200" y="1755648"/>
-            <a:ext cx="841248" cy="453542"/>
+            <a:ext cx="841248" cy="416966"/>
           </a:xfrm>
           <a:prstGeom prst="rect">
             <a:avLst/>
@@ -36352,8 +36529,8 @@
         </p:nvSpPr>
         <p:spPr>
           <a:xfrm>
-            <a:off x="658368" y="2209190"/>
-            <a:ext cx="1920240" cy="453542"/>
+            <a:off x="658368" y="2172614"/>
+            <a:ext cx="1920240" cy="416966"/>
           </a:xfrm>
           <a:prstGeom prst="rect">
             <a:avLst/>
@@ -36391,8 +36568,8 @@
         </p:nvSpPr>
         <p:spPr>
           <a:xfrm>
-            <a:off x="2651760" y="2322576"/>
-            <a:ext cx="615319" cy="226771"/>
+            <a:off x="2651760" y="2276856"/>
+            <a:ext cx="615319" cy="208483"/>
           </a:xfrm>
           <a:prstGeom prst="rect">
             <a:avLst/>
@@ -36411,8 +36588,8 @@
         </p:nvSpPr>
         <p:spPr>
           <a:xfrm>
-            <a:off x="3438144" y="2209190"/>
-            <a:ext cx="749808" cy="453542"/>
+            <a:off x="3438144" y="2172614"/>
+            <a:ext cx="749808" cy="416966"/>
           </a:xfrm>
           <a:prstGeom prst="rect">
             <a:avLst/>
@@ -36450,8 +36627,8 @@
         </p:nvSpPr>
         <p:spPr>
           <a:xfrm>
-            <a:off x="4187952" y="2209190"/>
-            <a:ext cx="841248" cy="453542"/>
+            <a:off x="4187952" y="2172614"/>
+            <a:ext cx="841248" cy="416966"/>
           </a:xfrm>
           <a:prstGeom prst="rect">
             <a:avLst/>
@@ -36489,8 +36666,8 @@
         </p:nvSpPr>
         <p:spPr>
           <a:xfrm>
-            <a:off x="5029200" y="2209190"/>
-            <a:ext cx="841248" cy="453542"/>
+            <a:off x="5029200" y="2172614"/>
+            <a:ext cx="841248" cy="416966"/>
           </a:xfrm>
           <a:prstGeom prst="rect">
             <a:avLst/>
@@ -36528,8 +36705,8 @@
         </p:nvSpPr>
         <p:spPr>
           <a:xfrm>
-            <a:off x="658368" y="2662733"/>
-            <a:ext cx="1920240" cy="453542"/>
+            <a:off x="658368" y="2589581"/>
+            <a:ext cx="1920240" cy="416966"/>
           </a:xfrm>
           <a:prstGeom prst="rect">
             <a:avLst/>
@@ -36567,8 +36744,8 @@
         </p:nvSpPr>
         <p:spPr>
           <a:xfrm>
-            <a:off x="2651760" y="2776118"/>
-            <a:ext cx="576700" cy="226771"/>
+            <a:off x="2651760" y="2693822"/>
+            <a:ext cx="576700" cy="208483"/>
           </a:xfrm>
           <a:prstGeom prst="rect">
             <a:avLst/>
@@ -36587,8 +36764,8 @@
         </p:nvSpPr>
         <p:spPr>
           <a:xfrm>
-            <a:off x="3438144" y="2662733"/>
-            <a:ext cx="749808" cy="453542"/>
+            <a:off x="3438144" y="2589581"/>
+            <a:ext cx="749808" cy="416966"/>
           </a:xfrm>
           <a:prstGeom prst="rect">
             <a:avLst/>
@@ -36626,8 +36803,8 @@
         </p:nvSpPr>
         <p:spPr>
           <a:xfrm>
-            <a:off x="4187952" y="2662733"/>
-            <a:ext cx="841248" cy="453542"/>
+            <a:off x="4187952" y="2589581"/>
+            <a:ext cx="841248" cy="416966"/>
           </a:xfrm>
           <a:prstGeom prst="rect">
             <a:avLst/>
@@ -36665,8 +36842,8 @@
         </p:nvSpPr>
         <p:spPr>
           <a:xfrm>
-            <a:off x="5029200" y="2662733"/>
-            <a:ext cx="841248" cy="453542"/>
+            <a:off x="5029200" y="2589581"/>
+            <a:ext cx="841248" cy="416966"/>
           </a:xfrm>
           <a:prstGeom prst="rect">
             <a:avLst/>
@@ -36704,8 +36881,8 @@
         </p:nvSpPr>
         <p:spPr>
           <a:xfrm>
-            <a:off x="658368" y="3116275"/>
-            <a:ext cx="1920240" cy="453542"/>
+            <a:off x="658368" y="3006547"/>
+            <a:ext cx="1920240" cy="416966"/>
           </a:xfrm>
           <a:prstGeom prst="rect">
             <a:avLst/>
@@ -36743,8 +36920,8 @@
         </p:nvSpPr>
         <p:spPr>
           <a:xfrm>
-            <a:off x="2651760" y="3229661"/>
-            <a:ext cx="499175" cy="226771"/>
+            <a:off x="2651760" y="3110789"/>
+            <a:ext cx="499175" cy="208483"/>
           </a:xfrm>
           <a:prstGeom prst="rect">
             <a:avLst/>
@@ -36763,8 +36940,8 @@
         </p:nvSpPr>
         <p:spPr>
           <a:xfrm>
-            <a:off x="3438144" y="3116275"/>
-            <a:ext cx="749808" cy="453542"/>
+            <a:off x="3438144" y="3006547"/>
+            <a:ext cx="749808" cy="416966"/>
           </a:xfrm>
           <a:prstGeom prst="rect">
             <a:avLst/>
@@ -36802,8 +36979,8 @@
         </p:nvSpPr>
         <p:spPr>
           <a:xfrm>
-            <a:off x="4187952" y="3116275"/>
-            <a:ext cx="841248" cy="453542"/>
+            <a:off x="4187952" y="3006547"/>
+            <a:ext cx="841248" cy="416966"/>
           </a:xfrm>
           <a:prstGeom prst="rect">
             <a:avLst/>
@@ -36841,8 +37018,8 @@
         </p:nvSpPr>
         <p:spPr>
           <a:xfrm>
-            <a:off x="5029200" y="3116275"/>
-            <a:ext cx="841248" cy="453542"/>
+            <a:off x="5029200" y="3006547"/>
+            <a:ext cx="841248" cy="416966"/>
           </a:xfrm>
           <a:prstGeom prst="rect">
             <a:avLst/>
@@ -36880,8 +37057,8 @@
         </p:nvSpPr>
         <p:spPr>
           <a:xfrm>
-            <a:off x="658368" y="3569818"/>
-            <a:ext cx="1920240" cy="453542"/>
+            <a:off x="658368" y="3423514"/>
+            <a:ext cx="1920240" cy="416966"/>
           </a:xfrm>
           <a:prstGeom prst="rect">
             <a:avLst/>
@@ -36919,8 +37096,8 @@
         </p:nvSpPr>
         <p:spPr>
           <a:xfrm>
-            <a:off x="2651760" y="3683203"/>
-            <a:ext cx="463439" cy="226771"/>
+            <a:off x="2651760" y="3527755"/>
+            <a:ext cx="463439" cy="208483"/>
           </a:xfrm>
           <a:prstGeom prst="rect">
             <a:avLst/>
@@ -36939,8 +37116,8 @@
         </p:nvSpPr>
         <p:spPr>
           <a:xfrm>
-            <a:off x="3438144" y="3569818"/>
-            <a:ext cx="749808" cy="453542"/>
+            <a:off x="3438144" y="3423514"/>
+            <a:ext cx="749808" cy="416966"/>
           </a:xfrm>
           <a:prstGeom prst="rect">
             <a:avLst/>
@@ -36978,8 +37155,8 @@
         </p:nvSpPr>
         <p:spPr>
           <a:xfrm>
-            <a:off x="4187952" y="3569818"/>
-            <a:ext cx="841248" cy="453542"/>
+            <a:off x="4187952" y="3423514"/>
+            <a:ext cx="841248" cy="416966"/>
           </a:xfrm>
           <a:prstGeom prst="rect">
             <a:avLst/>
@@ -37017,8 +37194,8 @@
         </p:nvSpPr>
         <p:spPr>
           <a:xfrm>
-            <a:off x="5029200" y="3569818"/>
-            <a:ext cx="841248" cy="453542"/>
+            <a:off x="5029200" y="3423514"/>
+            <a:ext cx="841248" cy="416966"/>
           </a:xfrm>
           <a:prstGeom prst="rect">
             <a:avLst/>
@@ -37056,8 +37233,8 @@
         </p:nvSpPr>
         <p:spPr>
           <a:xfrm>
-            <a:off x="658368" y="4023360"/>
-            <a:ext cx="1920240" cy="453542"/>
+            <a:off x="658368" y="3840480"/>
+            <a:ext cx="1920240" cy="416966"/>
           </a:xfrm>
           <a:prstGeom prst="rect">
             <a:avLst/>
@@ -37095,8 +37272,8 @@
         </p:nvSpPr>
         <p:spPr>
           <a:xfrm>
-            <a:off x="2651760" y="4136746"/>
-            <a:ext cx="446067" cy="226771"/>
+            <a:off x="2651760" y="3944722"/>
+            <a:ext cx="446067" cy="208483"/>
           </a:xfrm>
           <a:prstGeom prst="rect">
             <a:avLst/>
@@ -37115,8 +37292,8 @@
         </p:nvSpPr>
         <p:spPr>
           <a:xfrm>
-            <a:off x="3438144" y="4023360"/>
-            <a:ext cx="749808" cy="453542"/>
+            <a:off x="3438144" y="3840480"/>
+            <a:ext cx="749808" cy="416966"/>
           </a:xfrm>
           <a:prstGeom prst="rect">
             <a:avLst/>
@@ -37154,8 +37331,8 @@
         </p:nvSpPr>
         <p:spPr>
           <a:xfrm>
-            <a:off x="4187952" y="4023360"/>
-            <a:ext cx="841248" cy="453542"/>
+            <a:off x="4187952" y="3840480"/>
+            <a:ext cx="841248" cy="416966"/>
           </a:xfrm>
           <a:prstGeom prst="rect">
             <a:avLst/>
@@ -37193,8 +37370,8 @@
         </p:nvSpPr>
         <p:spPr>
           <a:xfrm>
-            <a:off x="5029200" y="4023360"/>
-            <a:ext cx="841248" cy="453542"/>
+            <a:off x="5029200" y="3840480"/>
+            <a:ext cx="841248" cy="416966"/>
           </a:xfrm>
           <a:prstGeom prst="rect">
             <a:avLst/>
@@ -37232,8 +37409,8 @@
         </p:nvSpPr>
         <p:spPr>
           <a:xfrm>
-            <a:off x="658368" y="4476902"/>
-            <a:ext cx="1920240" cy="453542"/>
+            <a:off x="658368" y="4257446"/>
+            <a:ext cx="1920240" cy="416966"/>
           </a:xfrm>
           <a:prstGeom prst="rect">
             <a:avLst/>
@@ -37271,8 +37448,8 @@
         </p:nvSpPr>
         <p:spPr>
           <a:xfrm>
-            <a:off x="2651760" y="4590288"/>
-            <a:ext cx="431099" cy="226771"/>
+            <a:off x="2651760" y="4361688"/>
+            <a:ext cx="431099" cy="208483"/>
           </a:xfrm>
           <a:prstGeom prst="rect">
             <a:avLst/>
@@ -37291,8 +37468,8 @@
         </p:nvSpPr>
         <p:spPr>
           <a:xfrm>
-            <a:off x="3438144" y="4476902"/>
-            <a:ext cx="749808" cy="453542"/>
+            <a:off x="3438144" y="4257446"/>
+            <a:ext cx="749808" cy="416966"/>
           </a:xfrm>
           <a:prstGeom prst="rect">
             <a:avLst/>
@@ -37330,8 +37507,8 @@
         </p:nvSpPr>
         <p:spPr>
           <a:xfrm>
-            <a:off x="4187952" y="4476902"/>
-            <a:ext cx="841248" cy="453542"/>
+            <a:off x="4187952" y="4257446"/>
+            <a:ext cx="841248" cy="416966"/>
           </a:xfrm>
           <a:prstGeom prst="rect">
             <a:avLst/>
@@ -37369,8 +37546,8 @@
         </p:nvSpPr>
         <p:spPr>
           <a:xfrm>
-            <a:off x="5029200" y="4476902"/>
-            <a:ext cx="841248" cy="453542"/>
+            <a:off x="5029200" y="4257446"/>
+            <a:ext cx="841248" cy="416966"/>
           </a:xfrm>
           <a:prstGeom prst="rect">
             <a:avLst/>
@@ -37408,8 +37585,8 @@
         </p:nvSpPr>
         <p:spPr>
           <a:xfrm>
-            <a:off x="658368" y="4930445"/>
-            <a:ext cx="1920240" cy="453542"/>
+            <a:off x="658368" y="4674413"/>
+            <a:ext cx="1920240" cy="416966"/>
           </a:xfrm>
           <a:prstGeom prst="rect">
             <a:avLst/>
@@ -37447,8 +37624,8 @@
         </p:nvSpPr>
         <p:spPr>
           <a:xfrm>
-            <a:off x="2651760" y="5043830"/>
-            <a:ext cx="422076" cy="226771"/>
+            <a:off x="2651760" y="4778654"/>
+            <a:ext cx="422076" cy="208483"/>
           </a:xfrm>
           <a:prstGeom prst="rect">
             <a:avLst/>
@@ -37467,8 +37644,8 @@
         </p:nvSpPr>
         <p:spPr>
           <a:xfrm>
-            <a:off x="3438144" y="4930445"/>
-            <a:ext cx="749808" cy="453542"/>
+            <a:off x="3438144" y="4674413"/>
+            <a:ext cx="749808" cy="416966"/>
           </a:xfrm>
           <a:prstGeom prst="rect">
             <a:avLst/>
@@ -37506,8 +37683,8 @@
         </p:nvSpPr>
         <p:spPr>
           <a:xfrm>
-            <a:off x="4187952" y="4930445"/>
-            <a:ext cx="841248" cy="453542"/>
+            <a:off x="4187952" y="4674413"/>
+            <a:ext cx="841248" cy="416966"/>
           </a:xfrm>
           <a:prstGeom prst="rect">
             <a:avLst/>
@@ -37545,8 +37722,8 @@
         </p:nvSpPr>
         <p:spPr>
           <a:xfrm>
-            <a:off x="5029200" y="4930445"/>
-            <a:ext cx="841248" cy="453542"/>
+            <a:off x="5029200" y="4674413"/>
+            <a:ext cx="841248" cy="416966"/>
           </a:xfrm>
           <a:prstGeom prst="rect">
             <a:avLst/>
@@ -37584,8 +37761,8 @@
         </p:nvSpPr>
         <p:spPr>
           <a:xfrm>
-            <a:off x="658368" y="5383987"/>
-            <a:ext cx="1920240" cy="453542"/>
+            <a:off x="658368" y="5091379"/>
+            <a:ext cx="1920240" cy="416966"/>
           </a:xfrm>
           <a:prstGeom prst="rect">
             <a:avLst/>
@@ -37623,8 +37800,8 @@
         </p:nvSpPr>
         <p:spPr>
           <a:xfrm>
-            <a:off x="2651760" y="5497373"/>
-            <a:ext cx="408666" cy="226771"/>
+            <a:off x="2651760" y="5195621"/>
+            <a:ext cx="408666" cy="208483"/>
           </a:xfrm>
           <a:prstGeom prst="rect">
             <a:avLst/>
@@ -37643,8 +37820,8 @@
         </p:nvSpPr>
         <p:spPr>
           <a:xfrm>
-            <a:off x="3438144" y="5383987"/>
-            <a:ext cx="749808" cy="453542"/>
+            <a:off x="3438144" y="5091379"/>
+            <a:ext cx="749808" cy="416966"/>
           </a:xfrm>
           <a:prstGeom prst="rect">
             <a:avLst/>
@@ -37682,8 +37859,8 @@
         </p:nvSpPr>
         <p:spPr>
           <a:xfrm>
-            <a:off x="4187952" y="5383987"/>
-            <a:ext cx="841248" cy="453542"/>
+            <a:off x="4187952" y="5091379"/>
+            <a:ext cx="841248" cy="416966"/>
           </a:xfrm>
           <a:prstGeom prst="rect">
             <a:avLst/>
@@ -37721,8 +37898,8 @@
         </p:nvSpPr>
         <p:spPr>
           <a:xfrm>
-            <a:off x="5029200" y="5383987"/>
-            <a:ext cx="841248" cy="453542"/>
+            <a:off x="5029200" y="5091379"/>
+            <a:ext cx="841248" cy="416966"/>
           </a:xfrm>
           <a:prstGeom prst="rect">
             <a:avLst/>
@@ -37760,8 +37937,8 @@
         </p:nvSpPr>
         <p:spPr>
           <a:xfrm>
-            <a:off x="658368" y="5837530"/>
-            <a:ext cx="1920240" cy="453542"/>
+            <a:off x="658368" y="5508346"/>
+            <a:ext cx="1920240" cy="416966"/>
           </a:xfrm>
           <a:prstGeom prst="rect">
             <a:avLst/>
@@ -37799,8 +37976,8 @@
         </p:nvSpPr>
         <p:spPr>
           <a:xfrm>
-            <a:off x="2651760" y="5950915"/>
-            <a:ext cx="407442" cy="226771"/>
+            <a:off x="2651760" y="5612587"/>
+            <a:ext cx="407442" cy="208483"/>
           </a:xfrm>
           <a:prstGeom prst="rect">
             <a:avLst/>
@@ -37819,8 +37996,8 @@
         </p:nvSpPr>
         <p:spPr>
           <a:xfrm>
-            <a:off x="3438144" y="5837530"/>
-            <a:ext cx="749808" cy="453542"/>
+            <a:off x="3438144" y="5508346"/>
+            <a:ext cx="749808" cy="416966"/>
           </a:xfrm>
           <a:prstGeom prst="rect">
             <a:avLst/>
@@ -37858,8 +38035,8 @@
         </p:nvSpPr>
         <p:spPr>
           <a:xfrm>
-            <a:off x="4187952" y="5837530"/>
-            <a:ext cx="841248" cy="453542"/>
+            <a:off x="4187952" y="5508346"/>
+            <a:ext cx="841248" cy="416966"/>
           </a:xfrm>
           <a:prstGeom prst="rect">
             <a:avLst/>
@@ -37897,8 +38074,8 @@
         </p:nvSpPr>
         <p:spPr>
           <a:xfrm>
-            <a:off x="5029200" y="5837530"/>
-            <a:ext cx="841248" cy="453542"/>
+            <a:off x="5029200" y="5508346"/>
+            <a:ext cx="841248" cy="416966"/>
           </a:xfrm>
           <a:prstGeom prst="rect">
             <a:avLst/>
@@ -37937,7 +38114,7 @@
         <p:spPr>
           <a:xfrm>
             <a:off x="3312839" y="1755648"/>
-            <a:ext cx="14630" cy="4535424"/>
+            <a:ext cx="14630" cy="4169664"/>
           </a:xfrm>
           <a:prstGeom prst="rect">
             <a:avLst/>
@@ -38113,7 +38290,7 @@
         <p:spPr>
           <a:xfrm>
             <a:off x="6208776" y="1755648"/>
-            <a:ext cx="1920240" cy="453542"/>
+            <a:ext cx="1920240" cy="416966"/>
           </a:xfrm>
           <a:prstGeom prst="rect">
             <a:avLst/>
@@ -38151,8 +38328,8 @@
         </p:nvSpPr>
         <p:spPr>
           <a:xfrm>
-            <a:off x="8202168" y="1869034"/>
-            <a:ext cx="572597" cy="226771"/>
+            <a:off x="8202168" y="1859890"/>
+            <a:ext cx="572597" cy="208483"/>
           </a:xfrm>
           <a:prstGeom prst="rect">
             <a:avLst/>
@@ -38172,7 +38349,7 @@
         <p:spPr>
           <a:xfrm>
             <a:off x="8988552" y="1755648"/>
-            <a:ext cx="749808" cy="453542"/>
+            <a:ext cx="749808" cy="416966"/>
           </a:xfrm>
           <a:prstGeom prst="rect">
             <a:avLst/>
@@ -38211,7 +38388,7 @@
         <p:spPr>
           <a:xfrm>
             <a:off x="9738360" y="1755648"/>
-            <a:ext cx="841248" cy="453542"/>
+            <a:ext cx="841248" cy="416966"/>
           </a:xfrm>
           <a:prstGeom prst="rect">
             <a:avLst/>
@@ -38250,7 +38427,7 @@
         <p:spPr>
           <a:xfrm>
             <a:off x="10579608" y="1755648"/>
-            <a:ext cx="841248" cy="453542"/>
+            <a:ext cx="841248" cy="416966"/>
           </a:xfrm>
           <a:prstGeom prst="rect">
             <a:avLst/>
@@ -38288,8 +38465,8 @@
         </p:nvSpPr>
         <p:spPr>
           <a:xfrm>
-            <a:off x="6208776" y="2209190"/>
-            <a:ext cx="1920240" cy="453542"/>
+            <a:off x="6208776" y="2172614"/>
+            <a:ext cx="1920240" cy="416966"/>
           </a:xfrm>
           <a:prstGeom prst="rect">
             <a:avLst/>
@@ -38327,8 +38504,8 @@
         </p:nvSpPr>
         <p:spPr>
           <a:xfrm>
-            <a:off x="8202168" y="2322576"/>
-            <a:ext cx="547492" cy="226771"/>
+            <a:off x="8202168" y="2276856"/>
+            <a:ext cx="547492" cy="208483"/>
           </a:xfrm>
           <a:prstGeom prst="rect">
             <a:avLst/>
@@ -38347,8 +38524,8 @@
         </p:nvSpPr>
         <p:spPr>
           <a:xfrm>
-            <a:off x="8988552" y="2209190"/>
-            <a:ext cx="749808" cy="453542"/>
+            <a:off x="8988552" y="2172614"/>
+            <a:ext cx="749808" cy="416966"/>
           </a:xfrm>
           <a:prstGeom prst="rect">
             <a:avLst/>
@@ -38386,8 +38563,8 @@
         </p:nvSpPr>
         <p:spPr>
           <a:xfrm>
-            <a:off x="9738360" y="2209190"/>
-            <a:ext cx="841248" cy="453542"/>
+            <a:off x="9738360" y="2172614"/>
+            <a:ext cx="841248" cy="416966"/>
           </a:xfrm>
           <a:prstGeom prst="rect">
             <a:avLst/>
@@ -38425,8 +38602,8 @@
         </p:nvSpPr>
         <p:spPr>
           <a:xfrm>
-            <a:off x="10579608" y="2209190"/>
-            <a:ext cx="841248" cy="453542"/>
+            <a:off x="10579608" y="2172614"/>
+            <a:ext cx="841248" cy="416966"/>
           </a:xfrm>
           <a:prstGeom prst="rect">
             <a:avLst/>
@@ -38464,8 +38641,8 @@
         </p:nvSpPr>
         <p:spPr>
           <a:xfrm>
-            <a:off x="6208776" y="2662733"/>
-            <a:ext cx="1920240" cy="453542"/>
+            <a:off x="6208776" y="2589581"/>
+            <a:ext cx="1920240" cy="416966"/>
           </a:xfrm>
           <a:prstGeom prst="rect">
             <a:avLst/>
@@ -38503,8 +38680,8 @@
         </p:nvSpPr>
         <p:spPr>
           <a:xfrm>
-            <a:off x="8202168" y="2776118"/>
-            <a:ext cx="481123" cy="226771"/>
+            <a:off x="8202168" y="2693822"/>
+            <a:ext cx="481123" cy="208483"/>
           </a:xfrm>
           <a:prstGeom prst="rect">
             <a:avLst/>
@@ -38523,8 +38700,8 @@
         </p:nvSpPr>
         <p:spPr>
           <a:xfrm>
-            <a:off x="8988552" y="2662733"/>
-            <a:ext cx="749808" cy="453542"/>
+            <a:off x="8988552" y="2589581"/>
+            <a:ext cx="749808" cy="416966"/>
           </a:xfrm>
           <a:prstGeom prst="rect">
             <a:avLst/>
@@ -38562,8 +38739,8 @@
         </p:nvSpPr>
         <p:spPr>
           <a:xfrm>
-            <a:off x="9738360" y="2662733"/>
-            <a:ext cx="841248" cy="453542"/>
+            <a:off x="9738360" y="2589581"/>
+            <a:ext cx="841248" cy="416966"/>
           </a:xfrm>
           <a:prstGeom prst="rect">
             <a:avLst/>
@@ -38601,8 +38778,8 @@
         </p:nvSpPr>
         <p:spPr>
           <a:xfrm>
-            <a:off x="10579608" y="2662733"/>
-            <a:ext cx="841248" cy="453542"/>
+            <a:off x="10579608" y="2589581"/>
+            <a:ext cx="841248" cy="416966"/>
           </a:xfrm>
           <a:prstGeom prst="rect">
             <a:avLst/>
@@ -38641,7 +38818,7 @@
         <p:spPr>
           <a:xfrm>
             <a:off x="8863247" y="1755648"/>
-            <a:ext cx="14630" cy="1360627"/>
+            <a:ext cx="14630" cy="1250899"/>
           </a:xfrm>
           <a:prstGeom prst="rect">
             <a:avLst/>
@@ -38661,7 +38838,7 @@
         <p:spPr>
           <a:xfrm>
             <a:off x="6035040" y="1371600"/>
-            <a:ext cx="10973" cy="4919472"/>
+            <a:ext cx="10973" cy="4553712"/>
           </a:xfrm>
           <a:prstGeom prst="rect">
             <a:avLst/>
@@ -38671,6 +38848,65 @@
           </a:solidFill>
           <a:ln/>
         </p:spPr>
+      </p:sp>
+      <p:sp>
+        <p:nvSpPr>
+          <p:cNvPr id="83" name="Shape 80"/>
+          <p:cNvSpPr/>
+          <p:nvPr/>
+        </p:nvSpPr>
+        <p:spPr>
+          <a:xfrm>
+            <a:off x="457200" y="6126480"/>
+            <a:ext cx="11274552" cy="341376"/>
+          </a:xfrm>
+          <a:prstGeom prst="rect">
+            <a:avLst/>
+          </a:prstGeom>
+          <a:solidFill>
+            <a:srgbClr val="EDF4FA"/>
+          </a:solidFill>
+          <a:ln/>
+        </p:spPr>
+      </p:sp>
+      <p:sp>
+        <p:nvSpPr>
+          <p:cNvPr id="84" name="Text 81"/>
+          <p:cNvSpPr txBox="1"/>
+          <p:nvPr/>
+        </p:nvSpPr>
+        <p:spPr>
+          <a:xfrm>
+            <a:off x="658368" y="6144768"/>
+            <a:ext cx="10927080" cy="304800"/>
+          </a:xfrm>
+          <a:prstGeom prst="rect">
+            <a:avLst/>
+          </a:prstGeom>
+          <a:noFill/>
+          <a:ln/>
+        </p:spPr>
+        <p:txBody>
+          <a:bodyPr wrap="square" lIns="0" tIns="0" rIns="0" bIns="0" rtlCol="0" anchor="ctr"/>
+          <a:lstStyle/>
+          <a:p>
+            <a:pPr indent="0" marL="0">
+              <a:buNone/>
+            </a:pPr>
+            <a:r>
+              <a:rPr lang="en-US" sz="1400" b="1" dirty="0">
+                <a:solidFill>
+                  <a:srgbClr val="0B2C4A"/>
+                </a:solidFill>
+                <a:latin typeface="Inter" pitchFamily="34" charset="0"/>
+                <a:ea typeface="Inter" pitchFamily="34" charset="-122"/>
+                <a:cs typeface="Inter" pitchFamily="34" charset="-120"/>
+              </a:rPr>
+              <a:t>10 of the 13 stores under 85% also see fewer ROs per tech than their segment: check car count and staffing first.</a:t>
+            </a:r>
+            <a:endParaRPr lang="en-US" sz="1400" dirty="0"/>
+          </a:p>
+        </p:txBody>
       </p:sp>
     </p:spTree>
   </p:cSld>

--- a/day2-deck/decks/Technician Proficiency - House Style.pptx
+++ b/day2-deck/decks/Technician Proficiency - House Style.pptx
@@ -957,7 +957,7 @@
           <a:p>
             <a:r>
               <a:rPr lang="en-US" dirty="0"/>
-              <a:t>Takeaway with the store call-outs (off the slide): Six stores hold $647K a month, led by Cadillac at $158K. 6 stores at or above 85% still leave $537K a month.Source: Each technician under 85% lifted to 85% of their own worked hours; techs at or above 85% count as zero, so no store offsets one tech with another. Gap hours valued at what the store's own technicians (counted titles) earn per sold hour in labor gross and parts gross, all pay types, Qlik - Closed Repair Orders, same dates; tech pay at their labor cost per sold hour. Store-wide averages are not used because they carry detail, rental and recon sale booked with no hours. Per month = period total / 9.49 months (Dec 25, 2025 - Oct 9, 2026). Parts assumes the extra hours carry the store's average parts per hour. Population as on the proficiency slides. Per mo = labor + parts gross. Under 85% = technicians under 85% of all counted. Store = store proficiency.ACURA: 67.4%; 11 of 11 under 85%; gap 2,954 hrs; labor $50K/mo + parts $26K/mo; tech pay $14K/mo; 25.4% of $299K/mo RO gross; top quarter 74% (3 techs); 3.46 ROs/tech day; 1.75 hrs/RO
+              <a:t>Takeaway with the store call-outs (off the slide): Six stores hold $647K a month, led by Cadillac at $158K. 20 stores at or above 85% still leave $818K a month.Source: Each technician under 85% lifted to 85% of their own worked hours; techs at or above 85% count as zero, so no store offsets one tech with another. Gap hours valued at what the store's own technicians (counted titles) earn per sold hour in labor gross and parts gross, all pay types, Qlik - Closed Repair Orders, same dates; tech pay at their labor cost per sold hour. Store-wide averages are not used because they carry detail, rental and recon sale booked with no hours. Per month = period total / 9.49 months (Dec 25, 2025 - Oct 9, 2026). Parts assumes the extra hours carry the store's average parts per hour. Population as on the proficiency slides. Per mo = labor + parts gross. Under 85% = technicians under 85% of all counted. Store = store proficiency.ACURA: 67.4%; 11 of 11 under 85%; gap 2,954 hrs; labor $50K/mo + parts $26K/mo; tech pay $14K/mo; 25.4% of $299K/mo RO gross; top quarter 74% (3 techs); 3.46 ROs/tech day; 1.75 hrs/RO
 AUDI HENDERSON: 91.0%; 13 of 23 under 85%; gap 3,426 hrs; labor $81K/mo + parts $20K/mo; tech pay $14K/mo; 8.3% of $1.23M/mo RO gross; top quarter 135% (6 techs); 2.77 ROs/tech day; 3.23 hrs/RO
 AUDI RENO: 117.1%; 4 of 10 under 85%; gap 826 hrs; labor $14K/mo + parts $6K/mo; tech pay $4K/mo; 4.0% of $504K/mo RO gross; top quarter 194% (2 techs); 4.08 ROs/tech day; 2.88 hrs/RO
 CADILLAC: 87.7%; 16 of 29 under 85%; gap 6,705 hrs; labor $108K/mo + parts $49K/mo; tech pay $24K/mo; 13.6% of $1.16M/mo RO gross; top quarter 143% (7 techs); 2.48 ROs/tech day; 3.41 hrs/RO
@@ -23092,7 +23092,7 @@
                 <a:ea typeface="Inter" pitchFamily="34" charset="-122"/>
                 <a:cs typeface="Inter" pitchFamily="34" charset="-120"/>
               </a:rPr>
-              <a:t>Six stores hold $647K a month. 6 stores at or above 85% still leave $537K a month.</a:t>
+              <a:t>Six stores hold $647K a month. 20 stores at or above 85% still leave $818K a month.</a:t>
             </a:r>
             <a:endParaRPr lang="en-US" sz="1600" dirty="0"/>
           </a:p>

--- a/day2-deck/decks/Technician Proficiency - House Style.pptx
+++ b/day2-deck/decks/Technician Proficiency - House Style.pptx
@@ -1077,7 +1077,7 @@
           <a:p>
             <a:r>
               <a:rPr lang="en-US" dirty="0"/>
-              <a:t>Takeaway with the store call-outs (off the slide): Group-wide the gap is 8.1% of RO gross. 5 stores are missing a fifth or more, led by Hyundai St George at 32% ($88K of $277K a month).Source: Each technician under 85% lifted to 85% of their own worked hours; techs at or above 85% count as zero, so no store offsets one tech with another. Gap hours valued at what the store's own technicians (counted titles) earn per sold hour in labor gross and parts gross, all pay types, Qlik - Closed Repair Orders, same dates; tech pay at their labor cost per sold hour. Store-wide averages are not used because they carry detail, rental and recon sale booked with no hours. Per month = period total / 9.49 months (Dec 25, 2025 - Oct 9, 2026). Parts assumes the extra hours carry the store's average parts per hour. Population as on the proficiency slides. Missed and Gross are per month. Share = missed labor + parts gross / labor + parts gross on the store's closed ROs, all pay types, same dates (includes work on shared tech codes). Not P&amp;L gross: counter and wholesale parts are excluded because techs do not produce them.ACURA: 67.4%; 11 of 11 under 85%; gap 2,954 hrs; labor $50K/mo + parts $26K/mo; tech pay $14K/mo; 25.4% of $299K/mo RO gross; top quarter 74% (3 techs); 3.46 ROs/tech day; 1.75 hrs/RO
+              <a:t>Takeaway with the store call-outs (off the slide): Group-wide the gap is 8.1% of RO gross. 7 stores show 20% or more, led by Hyundai St George at 32% ($88K of $277K a month).Source: Each technician under 85% lifted to 85% of their own worked hours; techs at or above 85% count as zero, so no store offsets one tech with another. Gap hours valued at what the store's own technicians (counted titles) earn per sold hour in labor gross and parts gross, all pay types, Qlik - Closed Repair Orders, same dates; tech pay at their labor cost per sold hour. Store-wide averages are not used because they carry detail, rental and recon sale booked with no hours. Per month = period total / 9.49 months (Dec 25, 2025 - Oct 9, 2026). Parts assumes the extra hours carry the store's average parts per hour. Population as on the proficiency slides. Missed and Gross are per month. Share = missed labor + parts gross / labor + parts gross on the store's closed ROs, all pay types, same dates (includes work on shared tech codes). Not P&amp;L gross: counter and wholesale parts are excluded because techs do not produce them.ACURA: 67.4%; 11 of 11 under 85%; gap 2,954 hrs; labor $50K/mo + parts $26K/mo; tech pay $14K/mo; 25.4% of $299K/mo RO gross; top quarter 74% (3 techs); 3.46 ROs/tech day; 1.75 hrs/RO
 AUDI HENDERSON: 91.0%; 13 of 23 under 85%; gap 3,426 hrs; labor $81K/mo + parts $20K/mo; tech pay $14K/mo; 8.3% of $1.23M/mo RO gross; top quarter 135% (6 techs); 2.77 ROs/tech day; 3.23 hrs/RO
 AUDI RENO: 117.1%; 4 of 10 under 85%; gap 826 hrs; labor $14K/mo + parts $6K/mo; tech pay $4K/mo; 4.0% of $504K/mo RO gross; top quarter 194% (2 techs); 4.08 ROs/tech day; 2.88 hrs/RO
 CADILLAC: 87.7%; 16 of 29 under 85%; gap 6,705 hrs; labor $108K/mo + parts $49K/mo; tech pay $24K/mo; 13.6% of $1.16M/mo RO gross; top quarter 143% (7 techs); 2.48 ROs/tech day; 3.41 hrs/RO
@@ -30650,7 +30650,7 @@
                 <a:ea typeface="Inter" pitchFamily="34" charset="-122"/>
                 <a:cs typeface="Inter" pitchFamily="34" charset="-120"/>
               </a:rPr>
-              <a:t>Group-wide the gap is 8.1% of RO gross. 5 stores are missing a fifth or more.</a:t>
+              <a:t>Group-wide the gap is 8.1% of RO gross. 7 stores show 20% or more.</a:t>
             </a:r>
             <a:endParaRPr lang="en-US" sz="1600" dirty="0"/>
           </a:p>
